--- a/Jave1_Hyrje_Nextjs_PWA_Copilot_2026.pptx
+++ b/Jave1_Hyrje_Nextjs_PWA_Copilot_2026.pptx
@@ -23,6 +23,7 @@
     <p:sldId id="271" r:id="rId22"/>
     <p:sldId id="272" r:id="rId23"/>
     <p:sldId id="273" r:id="rId24"/>
+    <p:sldId id="274" r:id="rId25"/>
   </p:sldIdLst>
   <p:sldSz cx="12191695" cy="6858000" type="screen4x3"/>
   <p:notesSz cx="6858000" cy="9144000"/>
@@ -4659,7 +4660,7 @@
               </a:defRPr>
             </a:pPr>
             <a:r>
-              <a:t>Formula e Notimit: 40% / 40% / 20%</a:t>
+              <a:t>Formula e Notimit: 10% / 30% / 40% / 20%</a:t>
             </a:r>
           </a:p>
         </p:txBody>
@@ -4695,7 +4696,7 @@
               </a:defRPr>
             </a:pPr>
             <a:r>
-              <a:t>Llogaridhënie e qartë — secili student vlerësohet për punën dhe kodin e tij.</a:t>
+              <a:t>Llogaridhënie e qartë — diferencojmë vijueshmërinë nga ata që kërkojnë vetëm një notë.</a:t>
             </a:r>
           </a:p>
         </p:txBody>
@@ -4709,7 +4710,152 @@
         <p:spPr>
           <a:xfrm>
             <a:off x="731520" y="2011680"/>
-            <a:ext cx="3383280" cy="4389120"/>
+            <a:ext cx="2514600" cy="4389120"/>
+          </a:xfrm>
+          <a:prstGeom prst="roundRect">
+            <a:avLst/>
+          </a:prstGeom>
+          <a:solidFill>
+            <a:srgbClr val="141E34"/>
+          </a:solidFill>
+          <a:ln w="31750">
+            <a:solidFill>
+              <a:srgbClr val="10B981"/>
+            </a:solidFill>
+          </a:ln>
+        </p:spPr>
+        <p:style>
+          <a:lnRef idx="1">
+            <a:schemeClr val="accent1"/>
+          </a:lnRef>
+          <a:fillRef idx="3">
+            <a:schemeClr val="accent1"/>
+          </a:fillRef>
+          <a:effectRef idx="2">
+            <a:schemeClr val="accent1"/>
+          </a:effectRef>
+          <a:fontRef idx="minor">
+            <a:schemeClr val="lt1"/>
+          </a:fontRef>
+        </p:style>
+        <p:txBody>
+          <a:bodyPr rtlCol="0" anchor="ctr"/>
+          <a:lstStyle/>
+          <a:p>
+            <a:pPr algn="ctr"/>
+          </a:p>
+        </p:txBody>
+      </p:sp>
+      <p:sp>
+        <p:nvSpPr>
+          <p:cNvPr id="7" name="TextBox 6"/>
+          <p:cNvSpPr txBox="1"/>
+          <p:nvPr/>
+        </p:nvSpPr>
+        <p:spPr>
+          <a:xfrm>
+            <a:off x="914400" y="2194560"/>
+            <a:ext cx="3017520" cy="4023360"/>
+          </a:xfrm>
+          <a:prstGeom prst="rect">
+            <a:avLst/>
+          </a:prstGeom>
+          <a:noFill/>
+        </p:spPr>
+        <p:txBody>
+          <a:bodyPr wrap="square">
+            <a:spAutoFit/>
+          </a:bodyPr>
+          <a:lstStyle/>
+          <a:p>
+            <a:pPr>
+              <a:defRPr sz="5400" b="1">
+                <a:solidFill>
+                  <a:srgbClr val="10B981"/>
+                </a:solidFill>
+                <a:latin typeface="Inter"/>
+              </a:defRPr>
+            </a:pPr>
+            <a:r>
+              <a:t>10%</a:t>
+            </a:r>
+          </a:p>
+          <a:p>
+            <a:pPr>
+              <a:spcAft>
+                <a:spcPts val="1400"/>
+              </a:spcAft>
+              <a:defRPr sz="2400" b="1">
+                <a:solidFill>
+                  <a:srgbClr val="FFFFFF"/>
+                </a:solidFill>
+                <a:latin typeface="Inter"/>
+              </a:defRPr>
+            </a:pPr>
+            <a:r>
+              <a:t>📡 Vijueshmëria &amp; QR</a:t>
+            </a:r>
+          </a:p>
+          <a:p>
+            <a:pPr>
+              <a:spcAft>
+                <a:spcPts val="1000"/>
+              </a:spcAft>
+              <a:defRPr sz="2000">
+                <a:solidFill>
+                  <a:srgbClr val="E2E8F0"/>
+                </a:solidFill>
+                <a:latin typeface="Inter"/>
+              </a:defRPr>
+            </a:pPr>
+            <a:r>
+              <a:t>• Check-In me QR në çdo ligjëratë/lab</a:t>
+            </a:r>
+          </a:p>
+          <a:p>
+            <a:pPr>
+              <a:spcAft>
+                <a:spcPts val="1000"/>
+              </a:spcAft>
+              <a:defRPr sz="2000">
+                <a:solidFill>
+                  <a:srgbClr val="E2E8F0"/>
+                </a:solidFill>
+                <a:latin typeface="Inter"/>
+              </a:defRPr>
+            </a:pPr>
+            <a:r>
+              <a:t>• Diferencon vijuesit nga pasivët</a:t>
+            </a:r>
+          </a:p>
+          <a:p>
+            <a:pPr>
+              <a:spcAft>
+                <a:spcPts val="1000"/>
+              </a:spcAft>
+              <a:defRPr sz="2000">
+                <a:solidFill>
+                  <a:srgbClr val="E2E8F0"/>
+                </a:solidFill>
+                <a:latin typeface="Inter"/>
+              </a:defRPr>
+            </a:pPr>
+            <a:r>
+              <a:t>• Pragu 70% minimal: Eliminues!</a:t>
+            </a:r>
+          </a:p>
+        </p:txBody>
+      </p:sp>
+      <p:sp>
+        <p:nvSpPr>
+          <p:cNvPr id="8" name="Rounded Rectangle 7"/>
+          <p:cNvSpPr/>
+          <p:nvPr/>
+        </p:nvSpPr>
+        <p:spPr>
+          <a:xfrm>
+            <a:off x="3465576" y="2011680"/>
+            <a:ext cx="2514600" cy="4389120"/>
           </a:xfrm>
           <a:prstGeom prst="roundRect">
             <a:avLst/>
@@ -4747,13 +4893,13 @@
       </p:sp>
       <p:sp>
         <p:nvSpPr>
-          <p:cNvPr id="7" name="TextBox 6"/>
+          <p:cNvPr id="9" name="TextBox 8"/>
           <p:cNvSpPr txBox="1"/>
           <p:nvPr/>
         </p:nvSpPr>
         <p:spPr>
           <a:xfrm>
-            <a:off x="914400" y="2194560"/>
+            <a:off x="3648456" y="2194560"/>
             <a:ext cx="3017520" cy="4023360"/>
           </a:xfrm>
           <a:prstGeom prst="rect">
@@ -4776,7 +4922,7 @@
               </a:defRPr>
             </a:pPr>
             <a:r>
-              <a:t>40%</a:t>
+              <a:t>30%</a:t>
             </a:r>
           </a:p>
           <a:p>
@@ -4792,7 +4938,7 @@
               </a:defRPr>
             </a:pPr>
             <a:r>
-              <a:t>🧪 Ushtrimet Lab</a:t>
+              <a:t>⚡ GitHub Autograding</a:t>
             </a:r>
           </a:p>
           <a:p>
@@ -4824,7 +4970,7 @@
               </a:defRPr>
             </a:pPr>
             <a:r>
-              <a:t>• Pjesëmarrje dhe kodim aktiv në sallë</a:t>
+              <a:t>• Vlerësim automatik me GitHub Actions</a:t>
             </a:r>
           </a:p>
           <a:p>
@@ -4840,21 +4986,21 @@
               </a:defRPr>
             </a:pPr>
             <a:r>
-              <a:t>• Dëshmi e punës me git commits</a:t>
-            </a:r>
-          </a:p>
-        </p:txBody>
-      </p:sp>
-      <p:sp>
-        <p:nvSpPr>
-          <p:cNvPr id="8" name="Rounded Rectangle 7"/>
+              <a:t>• Feedback i menjëhershëm në git push</a:t>
+            </a:r>
+          </a:p>
+        </p:txBody>
+      </p:sp>
+      <p:sp>
+        <p:nvSpPr>
+          <p:cNvPr id="10" name="Rounded Rectangle 9"/>
           <p:cNvSpPr/>
           <p:nvPr/>
         </p:nvSpPr>
         <p:spPr>
           <a:xfrm>
-            <a:off x="4389120" y="2011680"/>
-            <a:ext cx="3383280" cy="4389120"/>
+            <a:off x="6199632" y="2011680"/>
+            <a:ext cx="2514600" cy="4389120"/>
           </a:xfrm>
           <a:prstGeom prst="roundRect">
             <a:avLst/>
@@ -4864,7 +5010,7 @@
           </a:solidFill>
           <a:ln w="31750">
             <a:solidFill>
-              <a:srgbClr val="10B981"/>
+              <a:srgbClr val="F59E0B"/>
             </a:solidFill>
           </a:ln>
         </p:spPr>
@@ -4892,13 +5038,13 @@
       </p:sp>
       <p:sp>
         <p:nvSpPr>
-          <p:cNvPr id="9" name="TextBox 8"/>
+          <p:cNvPr id="11" name="TextBox 10"/>
           <p:cNvSpPr txBox="1"/>
           <p:nvPr/>
         </p:nvSpPr>
         <p:spPr>
           <a:xfrm>
-            <a:off x="4572000" y="2194560"/>
+            <a:off x="6382512" y="2194560"/>
             <a:ext cx="3017520" cy="4023360"/>
           </a:xfrm>
           <a:prstGeom prst="rect">
@@ -4915,7 +5061,7 @@
             <a:pPr>
               <a:defRPr sz="5400" b="1">
                 <a:solidFill>
-                  <a:srgbClr val="10B981"/>
+                  <a:srgbClr val="F59E0B"/>
                 </a:solidFill>
                 <a:latin typeface="Inter"/>
               </a:defRPr>
@@ -4937,7 +5083,7 @@
               </a:defRPr>
             </a:pPr>
             <a:r>
-              <a:t>📱 Projekti Final</a:t>
+              <a:t>📱 Projekti PWA</a:t>
             </a:r>
           </a:p>
           <a:p>
@@ -4953,7 +5099,7 @@
               </a:defRPr>
             </a:pPr>
             <a:r>
-              <a:t>• Aplikacioni PWA për biznesin tuaj</a:t>
+              <a:t>• PWA mobile për biznes real familjar</a:t>
             </a:r>
           </a:p>
           <a:p>
@@ -4969,7 +5115,7 @@
               </a:defRPr>
             </a:pPr>
             <a:r>
-              <a:t>• Supabase DB + Autentikimi i plotë</a:t>
+              <a:t>• Supabase DB + Auth + RLS e plotë</a:t>
             </a:r>
           </a:p>
           <a:p>
@@ -4992,14 +5138,14 @@
       </p:sp>
       <p:sp>
         <p:nvSpPr>
-          <p:cNvPr id="10" name="Rounded Rectangle 9"/>
+          <p:cNvPr id="12" name="Rounded Rectangle 11"/>
           <p:cNvSpPr/>
           <p:nvPr/>
         </p:nvSpPr>
         <p:spPr>
           <a:xfrm>
-            <a:off x="8046720" y="2011680"/>
-            <a:ext cx="3383280" cy="4389120"/>
+            <a:off x="8933688" y="2011680"/>
+            <a:ext cx="2514600" cy="4389120"/>
           </a:xfrm>
           <a:prstGeom prst="roundRect">
             <a:avLst/>
@@ -5037,13 +5183,13 @@
       </p:sp>
       <p:sp>
         <p:nvSpPr>
-          <p:cNvPr id="11" name="TextBox 10"/>
+          <p:cNvPr id="13" name="TextBox 12"/>
           <p:cNvSpPr txBox="1"/>
           <p:nvPr/>
         </p:nvSpPr>
         <p:spPr>
           <a:xfrm>
-            <a:off x="8229600" y="2194560"/>
+            <a:off x="9116568" y="2194560"/>
             <a:ext cx="3017520" cy="4023360"/>
           </a:xfrm>
           <a:prstGeom prst="rect">
@@ -5114,7 +5260,7 @@
               </a:defRPr>
             </a:pPr>
             <a:r>
-              <a:t>• Demo live nga telefoni juaj celular</a:t>
+              <a:t>• Demo live nga telefoni në auditor</a:t>
             </a:r>
           </a:p>
           <a:p>
@@ -5130,7 +5276,7 @@
               </a:defRPr>
             </a:pPr>
             <a:r>
-              <a:t>• Mbrojtje teknike individuale e kodit</a:t>
+              <a:t>• Mbrojtje teknike e thellë e kodit</a:t>
             </a:r>
           </a:p>
         </p:txBody>
@@ -5227,7 +5373,7 @@
               </a:defRPr>
             </a:pPr>
             <a:r>
-              <a:t>KULMI I SEMESTRIT</a:t>
+              <a:t>EFIKASITET &amp; SHPEJTËSI</a:t>
             </a:r>
           </a:p>
         </p:txBody>
@@ -5263,7 +5409,7 @@
               </a:defRPr>
             </a:pPr>
             <a:r>
-              <a:t>Demo Day në Javën 15: Vizioni i Suksesit!</a:t>
+              <a:t>Automatizimi i Detyrave Javore: GitHub Autograding</a:t>
             </a:r>
           </a:p>
         </p:txBody>
@@ -5299,7 +5445,7 @@
               </a:defRPr>
             </a:pPr>
             <a:r>
-              <a:t>Dita kur telefoni juaj kthehet në dëshminë e arritjes suaj profesionale.</a:t>
+              <a:t>Zero vonesa në korrigjim — çdo 'git push' testohet dhe vlerësohet menjëherë përmes CI/CD.</a:t>
             </a:r>
           </a:p>
         </p:txBody>
@@ -5323,7 +5469,7 @@
           </a:solidFill>
           <a:ln w="31750">
             <a:solidFill>
-              <a:srgbClr val="38BDF8"/>
+              <a:srgbClr val="6366F1"/>
             </a:solidFill>
           </a:ln>
         </p:spPr>
@@ -5377,21 +5523,21 @@
               </a:spcAft>
               <a:defRPr sz="2500" b="1">
                 <a:solidFill>
-                  <a:srgbClr val="38BDF8"/>
-                </a:solidFill>
-                <a:latin typeface="Inter"/>
-              </a:defRPr>
-            </a:pPr>
-            <a:r>
-              <a:t>🎤 Formati i Prezantimit</a:t>
-            </a:r>
-          </a:p>
-          <a:p>
-            <a:pPr>
-              <a:spcAft>
-                <a:spcPts val="1400"/>
-              </a:spcAft>
-              <a:defRPr sz="2000">
+                  <a:srgbClr val="FFFFFF"/>
+                </a:solidFill>
+                <a:latin typeface="Inter"/>
+              </a:defRPr>
+            </a:pPr>
+            <a:r>
+              <a:t>💻 Fluksi i Studentit në Çdo Javë</a:t>
+            </a:r>
+          </a:p>
+          <a:p>
+            <a:pPr>
+              <a:spcAft>
+                <a:spcPts val="1200"/>
+              </a:spcAft>
+              <a:defRPr sz="1900">
                 <a:solidFill>
                   <a:srgbClr val="E2E8F0"/>
                 </a:solidFill>
@@ -5399,15 +5545,15 @@
               </a:defRPr>
             </a:pPr>
             <a:r>
-              <a:t>• 5 Minuta Prezantim Live: Çdo student prezanton me telefonin e vet.</a:t>
-            </a:r>
-          </a:p>
-          <a:p>
-            <a:pPr>
-              <a:spcAft>
-                <a:spcPts val="1400"/>
-              </a:spcAft>
-              <a:defRPr sz="2000">
+              <a:t>1. Prano Detyrën: Klikoni ftesën në GitHub Classroom për të hapur depon tuaj private.</a:t>
+            </a:r>
+          </a:p>
+          <a:p>
+            <a:pPr>
+              <a:spcAft>
+                <a:spcPts val="1200"/>
+              </a:spcAft>
+              <a:defRPr sz="1900">
                 <a:solidFill>
                   <a:srgbClr val="E2E8F0"/>
                 </a:solidFill>
@@ -5415,15 +5561,15 @@
               </a:defRPr>
             </a:pPr>
             <a:r>
-              <a:t>• Projektori i Madh: Ekrani i celularit pasqyrohet para gjithë sallës.</a:t>
-            </a:r>
-          </a:p>
-          <a:p>
-            <a:pPr>
-              <a:spcAft>
-                <a:spcPts val="1400"/>
-              </a:spcAft>
-              <a:defRPr sz="2000">
+              <a:t>2. Kodo me Copilot: Zgjidhni kërkesat e ushtrimit (komponentët, logjikën, lidhjen me DB).</a:t>
+            </a:r>
+          </a:p>
+          <a:p>
+            <a:pPr>
+              <a:spcAft>
+                <a:spcPts val="1200"/>
+              </a:spcAft>
+              <a:defRPr sz="1900">
                 <a:solidFill>
                   <a:srgbClr val="E2E8F0"/>
                 </a:solidFill>
@@ -5431,23 +5577,7 @@
               </a:defRPr>
             </a:pPr>
             <a:r>
-              <a:t>• Simulim i Porosisë: Kryeni një porosi ose veprim live në kohë reale.</a:t>
-            </a:r>
-          </a:p>
-          <a:p>
-            <a:pPr>
-              <a:spcAft>
-                <a:spcPts val="1400"/>
-              </a:spcAft>
-              <a:defRPr sz="2000">
-                <a:solidFill>
-                  <a:srgbClr val="E2E8F0"/>
-                </a:solidFill>
-                <a:latin typeface="Inter"/>
-              </a:defRPr>
-            </a:pPr>
-            <a:r>
-              <a:t>• Pyetje Teknike: Shpjegoni arkitekturën e kodit para profesorit!</a:t>
+              <a:t>3. Git Push: Ekzekutoni 'git push origin main' drejt depos suaj zyrtare në GitHub.</a:t>
             </a:r>
           </a:p>
         </p:txBody>
@@ -5525,21 +5655,21 @@
               </a:spcAft>
               <a:defRPr sz="2500" b="1">
                 <a:solidFill>
-                  <a:srgbClr val="10B981"/>
-                </a:solidFill>
-                <a:latin typeface="Inter"/>
-              </a:defRPr>
-            </a:pPr>
-            <a:r>
-              <a:t>🌟 Çfarë Fitoni në Fund?</a:t>
-            </a:r>
-          </a:p>
-          <a:p>
-            <a:pPr>
-              <a:spcAft>
-                <a:spcPts val="1400"/>
-              </a:spcAft>
-              <a:defRPr sz="2000">
+                  <a:srgbClr val="FFFFFF"/>
+                </a:solidFill>
+                <a:latin typeface="Inter"/>
+              </a:defRPr>
+            </a:pPr>
+            <a:r>
+              <a:t>🤖 Vlerësimi Automat me GitHub Actions</a:t>
+            </a:r>
+          </a:p>
+          <a:p>
+            <a:pPr>
+              <a:spcAft>
+                <a:spcPts val="1200"/>
+              </a:spcAft>
+              <a:defRPr sz="1900">
                 <a:solidFill>
                   <a:srgbClr val="E2E8F0"/>
                 </a:solidFill>
@@ -5547,15 +5677,15 @@
               </a:defRPr>
             </a:pPr>
             <a:r>
-              <a:t>• Notë Maksimale: Vlerësim i merituar për kodin dhe punën tuaj reale.</a:t>
-            </a:r>
-          </a:p>
-          <a:p>
-            <a:pPr>
-              <a:spcAft>
-                <a:spcPts val="1400"/>
-              </a:spcAft>
-              <a:defRPr sz="2000">
+              <a:t>• Teste Automatike: Workflow CI/CD verifikon linter-in, tipet dhe funksionalitetin e kodit.</a:t>
+            </a:r>
+          </a:p>
+          <a:p>
+            <a:pPr>
+              <a:spcAft>
+                <a:spcPts val="1200"/>
+              </a:spcAft>
+              <a:defRPr sz="1900">
                 <a:solidFill>
                   <a:srgbClr val="E2E8F0"/>
                 </a:solidFill>
@@ -5563,15 +5693,15 @@
               </a:defRPr>
             </a:pPr>
             <a:r>
-              <a:t>• Zgjidhje për Biznesin: Biznesi familjar/lokal fiton një sistem funksional.</a:t>
-            </a:r>
-          </a:p>
-          <a:p>
-            <a:pPr>
-              <a:spcAft>
-                <a:spcPts val="1400"/>
-              </a:spcAft>
-              <a:defRPr sz="2000">
+              <a:t>• Rezultat i Menjëhershëm: Pikët (p.sh. 10/10) shfaqen te badge në README brenda 60 sekondave.</a:t>
+            </a:r>
+          </a:p>
+          <a:p>
+            <a:pPr>
+              <a:spcAft>
+                <a:spcPts val="1200"/>
+              </a:spcAft>
+              <a:defRPr sz="1900">
                 <a:solidFill>
                   <a:srgbClr val="E2E8F0"/>
                 </a:solidFill>
@@ -5579,23 +5709,7 @@
               </a:defRPr>
             </a:pPr>
             <a:r>
-              <a:t>• Portofol Digjital: Një link publik në internet për rezymenë tuaj.</a:t>
-            </a:r>
-          </a:p>
-          <a:p>
-            <a:pPr>
-              <a:spcAft>
-                <a:spcPts val="1400"/>
-              </a:spcAft>
-              <a:defRPr sz="2000">
-                <a:solidFill>
-                  <a:srgbClr val="E2E8F0"/>
-                </a:solidFill>
-                <a:latin typeface="Inter"/>
-              </a:defRPr>
-            </a:pPr>
-            <a:r>
-              <a:t>• Besim i Plotë: Bindja se mund të ndërtoni çdo softuer nga fillimi!</a:t>
+              <a:t>• Zero Pritje / Pa Ngarkesë: Notat sinkronizohen në Gradebook CSV të profesorit pa asnjë gabim njerëzor!</a:t>
             </a:r>
           </a:p>
         </p:txBody>
@@ -5692,7 +5806,7 @@
               </a:defRPr>
             </a:pPr>
             <a:r>
-              <a:t>EVIDENCA ZYRTARE E ORËS</a:t>
+              <a:t>KULMI I SEMESTRIT</a:t>
             </a:r>
           </a:p>
         </p:txBody>
@@ -5728,7 +5842,7 @@
               </a:defRPr>
             </a:pPr>
             <a:r>
-              <a:t>Nxirrni Telefonat: Check-In i Pjesëmarrjes!</a:t>
+              <a:t>Demo Day në Javën 15: Vizioni i Suksesit!</a:t>
             </a:r>
           </a:p>
         </p:txBody>
@@ -5764,7 +5878,7 @@
               </a:defRPr>
             </a:pPr>
             <a:r>
-              <a:t>Regjistroni praninë tuaj në ligjëratë ose laborator brenda dritares 2-minutëshe.</a:t>
+              <a:t>Dita kur telefoni juaj kthehet në dëshminë e arritjes suaj profesionale.</a:t>
             </a:r>
           </a:p>
         </p:txBody>
@@ -5778,7 +5892,7 @@
         <p:spPr>
           <a:xfrm>
             <a:off x="731520" y="2011680"/>
-            <a:ext cx="6858000" cy="4389120"/>
+            <a:ext cx="5120640" cy="4389120"/>
           </a:xfrm>
           <a:prstGeom prst="roundRect">
             <a:avLst/>
@@ -5822,8 +5936,8 @@
         </p:nvSpPr>
         <p:spPr>
           <a:xfrm>
-            <a:off x="1005840" y="2194560"/>
-            <a:ext cx="6309360" cy="2286000"/>
+            <a:off x="1005840" y="2286000"/>
+            <a:ext cx="4572000" cy="3840480"/>
           </a:xfrm>
           <a:prstGeom prst="rect">
             <a:avLst/>
@@ -5837,7 +5951,10 @@
           <a:lstStyle/>
           <a:p>
             <a:pPr>
-              <a:defRPr sz="2100" b="1">
+              <a:spcAft>
+                <a:spcPts val="1600"/>
+              </a:spcAft>
+              <a:defRPr sz="2500" b="1">
                 <a:solidFill>
                   <a:srgbClr val="38BDF8"/>
                 </a:solidFill>
@@ -5845,15 +5962,15 @@
               </a:defRPr>
             </a:pPr>
             <a:r>
-              <a:t>1️⃣ Skanoni QR Kodin:</a:t>
-            </a:r>
-          </a:p>
-          <a:p>
-            <a:pPr>
-              <a:spcAft>
-                <a:spcPts val="800"/>
-              </a:spcAft>
-              <a:defRPr sz="1800">
+              <a:t>🎤 Formati i Prezantimit</a:t>
+            </a:r>
+          </a:p>
+          <a:p>
+            <a:pPr>
+              <a:spcAft>
+                <a:spcPts val="1400"/>
+              </a:spcAft>
+              <a:defRPr sz="2000">
                 <a:solidFill>
                   <a:srgbClr val="E2E8F0"/>
                 </a:solidFill>
@@ -5861,28 +5978,15 @@
               </a:defRPr>
             </a:pPr>
             <a:r>
-              <a:t>Hapni shfletuesin në arbenl.github.io/#checkin</a:t>
-            </a:r>
-          </a:p>
-          <a:p>
-            <a:pPr>
-              <a:defRPr sz="2100" b="1">
-                <a:solidFill>
-                  <a:srgbClr val="38BDF8"/>
-                </a:solidFill>
-                <a:latin typeface="Inter"/>
-              </a:defRPr>
-            </a:pPr>
-            <a:r>
-              <a:t>2️⃣ Zgjidhni Seancën:</a:t>
-            </a:r>
-          </a:p>
-          <a:p>
-            <a:pPr>
-              <a:spcAft>
-                <a:spcPts val="800"/>
-              </a:spcAft>
-              <a:defRPr sz="1800">
+              <a:t>• 5 Minuta Prezantim Live: Çdo student prezanton me telefonin e vet.</a:t>
+            </a:r>
+          </a:p>
+          <a:p>
+            <a:pPr>
+              <a:spcAft>
+                <a:spcPts val="1400"/>
+              </a:spcAft>
+              <a:defRPr sz="2000">
                 <a:solidFill>
                   <a:srgbClr val="E2E8F0"/>
                 </a:solidFill>
@@ -5890,28 +5994,15 @@
               </a:defRPr>
             </a:pPr>
             <a:r>
-              <a:t>Zgjidhni [ 📚 Ligjëratë ] ose [ 🧪 Ushtrime (Lab) ]</a:t>
-            </a:r>
-          </a:p>
-          <a:p>
-            <a:pPr>
-              <a:defRPr sz="2100" b="1">
-                <a:solidFill>
-                  <a:srgbClr val="38BDF8"/>
-                </a:solidFill>
-                <a:latin typeface="Inter"/>
-              </a:defRPr>
-            </a:pPr>
-            <a:r>
-              <a:t>3️⃣ Shënoni Të Dhënat &amp; PIN-in:</a:t>
-            </a:r>
-          </a:p>
-          <a:p>
-            <a:pPr>
-              <a:spcAft>
-                <a:spcPts val="800"/>
-              </a:spcAft>
-              <a:defRPr sz="1800">
+              <a:t>• Projektori i Madh: Ekrani i celularit pasqyrohet para gjithë sallës.</a:t>
+            </a:r>
+          </a:p>
+          <a:p>
+            <a:pPr>
+              <a:spcAft>
+                <a:spcPts val="1400"/>
+              </a:spcAft>
+              <a:defRPr sz="2000">
                 <a:solidFill>
                   <a:srgbClr val="E2E8F0"/>
                 </a:solidFill>
@@ -5919,7 +6010,23 @@
               </a:defRPr>
             </a:pPr>
             <a:r>
-              <a:t>ID e studentit, emri, emaili AAB dhe kodi PIN.</a:t>
+              <a:t>• Simulim i Porosisë: Kryeni një porosi ose veprim live në kohë reale.</a:t>
+            </a:r>
+          </a:p>
+          <a:p>
+            <a:pPr>
+              <a:spcAft>
+                <a:spcPts val="1400"/>
+              </a:spcAft>
+              <a:defRPr sz="2000">
+                <a:solidFill>
+                  <a:srgbClr val="E2E8F0"/>
+                </a:solidFill>
+                <a:latin typeface="Inter"/>
+              </a:defRPr>
+            </a:pPr>
+            <a:r>
+              <a:t>• Pyetje Teknike: Shpjegoni arkitekturën e kodit para profesorit!</a:t>
             </a:r>
           </a:p>
         </p:txBody>
@@ -5932,105 +6039,8 @@
         </p:nvSpPr>
         <p:spPr>
           <a:xfrm>
-            <a:off x="1005840" y="4572000"/>
-            <a:ext cx="6309360" cy="1645920"/>
-          </a:xfrm>
-          <a:prstGeom prst="roundRect">
-            <a:avLst/>
-          </a:prstGeom>
-          <a:solidFill>
-            <a:srgbClr val="0F172A"/>
-          </a:solidFill>
-          <a:ln w="31750">
-            <a:solidFill>
-              <a:srgbClr val="F59E0B"/>
-            </a:solidFill>
-          </a:ln>
-        </p:spPr>
-        <p:style>
-          <a:lnRef idx="1">
-            <a:schemeClr val="accent1"/>
-          </a:lnRef>
-          <a:fillRef idx="3">
-            <a:schemeClr val="accent1"/>
-          </a:fillRef>
-          <a:effectRef idx="2">
-            <a:schemeClr val="accent1"/>
-          </a:effectRef>
-          <a:fontRef idx="minor">
-            <a:schemeClr val="lt1"/>
-          </a:fontRef>
-        </p:style>
-        <p:txBody>
-          <a:bodyPr rtlCol="0" anchor="ctr"/>
-          <a:lstStyle/>
-          <a:p>
-            <a:pPr algn="ctr"/>
-          </a:p>
-        </p:txBody>
-      </p:sp>
-      <p:sp>
-        <p:nvSpPr>
-          <p:cNvPr id="9" name="TextBox 8"/>
-          <p:cNvSpPr txBox="1"/>
-          <p:nvPr/>
-        </p:nvSpPr>
-        <p:spPr>
-          <a:xfrm>
-            <a:off x="1097280" y="4663440"/>
-            <a:ext cx="6126480" cy="1463040"/>
-          </a:xfrm>
-          <a:prstGeom prst="rect">
-            <a:avLst/>
-          </a:prstGeom>
-          <a:noFill/>
-        </p:spPr>
-        <p:txBody>
-          <a:bodyPr wrap="square">
-            <a:spAutoFit/>
-          </a:bodyPr>
-          <a:lstStyle/>
-          <a:p>
-            <a:pPr algn="ctr">
-              <a:spcAft>
-                <a:spcPts val="400"/>
-              </a:spcAft>
-              <a:defRPr sz="1600" b="1">
-                <a:solidFill>
-                  <a:srgbClr val="F59E0B"/>
-                </a:solidFill>
-                <a:latin typeface="Inter"/>
-              </a:defRPr>
-            </a:pPr>
-            <a:r>
-              <a:t>🔑 KODI PIN I SEANCËS SOT (DRITARE 2 MINUTA):</a:t>
-            </a:r>
-          </a:p>
-          <a:p>
-            <a:pPr algn="ctr">
-              <a:defRPr sz="4400" b="1">
-                <a:solidFill>
-                  <a:srgbClr val="FFFFFF"/>
-                </a:solidFill>
-                <a:latin typeface="Inter"/>
-              </a:defRPr>
-            </a:pPr>
-            <a:r>
-              <a:t>8 4 9 2</a:t>
-            </a:r>
-          </a:p>
-        </p:txBody>
-      </p:sp>
-      <p:sp>
-        <p:nvSpPr>
-          <p:cNvPr id="10" name="Rounded Rectangle 9"/>
-          <p:cNvSpPr/>
-          <p:nvPr/>
-        </p:nvSpPr>
-        <p:spPr>
-          <a:xfrm>
-            <a:off x="7955279" y="2011680"/>
-            <a:ext cx="3474720" cy="4389120"/>
+            <a:off x="6309360" y="2011680"/>
+            <a:ext cx="5120640" cy="4389120"/>
           </a:xfrm>
           <a:prstGeom prst="roundRect">
             <a:avLst/>
@@ -6066,40 +6076,16 @@
           </a:p>
         </p:txBody>
       </p:sp>
-      <p:pic>
-        <p:nvPicPr>
-          <p:cNvPr id="11" name="Picture 10" descr="qr_master_checkin.png"/>
-          <p:cNvPicPr>
-            <a:picLocks noChangeAspect="1"/>
-          </p:cNvPicPr>
-          <p:nvPr/>
-        </p:nvPicPr>
-        <p:blipFill>
-          <a:blip r:embed="rId2"/>
-          <a:stretch>
-            <a:fillRect/>
-          </a:stretch>
-        </p:blipFill>
-        <p:spPr>
-          <a:xfrm>
-            <a:off x="8321040" y="2286000"/>
-            <a:ext cx="2743200" cy="2743200"/>
-          </a:xfrm>
-          <a:prstGeom prst="rect">
-            <a:avLst/>
-          </a:prstGeom>
-        </p:spPr>
-      </p:pic>
-      <p:sp>
-        <p:nvSpPr>
-          <p:cNvPr id="12" name="TextBox 11"/>
+      <p:sp>
+        <p:nvSpPr>
+          <p:cNvPr id="9" name="TextBox 8"/>
           <p:cNvSpPr txBox="1"/>
           <p:nvPr/>
         </p:nvSpPr>
         <p:spPr>
           <a:xfrm>
-            <a:off x="8046720" y="5120640"/>
-            <a:ext cx="3291840" cy="1097280"/>
+            <a:off x="6583680" y="2286000"/>
+            <a:ext cx="4572000" cy="3840480"/>
           </a:xfrm>
           <a:prstGeom prst="rect">
             <a:avLst/>
@@ -6112,8 +6098,11 @@
           </a:bodyPr>
           <a:lstStyle/>
           <a:p>
-            <a:pPr algn="ctr">
-              <a:defRPr sz="2000" b="1">
+            <a:pPr>
+              <a:spcAft>
+                <a:spcPts val="1600"/>
+              </a:spcAft>
+              <a:defRPr sz="2500" b="1">
                 <a:solidFill>
                   <a:srgbClr val="10B981"/>
                 </a:solidFill>
@@ -6121,20 +6110,71 @@
               </a:defRPr>
             </a:pPr>
             <a:r>
-              <a:t>SKANO PËR CHECK-IN</a:t>
-            </a:r>
-          </a:p>
-          <a:p>
-            <a:pPr algn="ctr">
-              <a:defRPr sz="1600">
-                <a:solidFill>
-                  <a:srgbClr val="FFFFFF"/>
-                </a:solidFill>
-                <a:latin typeface="Inter"/>
-              </a:defRPr>
-            </a:pPr>
-            <a:r>
-              <a:t>arbenl.github.io/#checkin</a:t>
+              <a:t>🌟 Çfarë Fitoni në Fund?</a:t>
+            </a:r>
+          </a:p>
+          <a:p>
+            <a:pPr>
+              <a:spcAft>
+                <a:spcPts val="1400"/>
+              </a:spcAft>
+              <a:defRPr sz="2000">
+                <a:solidFill>
+                  <a:srgbClr val="E2E8F0"/>
+                </a:solidFill>
+                <a:latin typeface="Inter"/>
+              </a:defRPr>
+            </a:pPr>
+            <a:r>
+              <a:t>• Notë Maksimale: Vlerësim i merituar për kodin dhe punën tuaj reale.</a:t>
+            </a:r>
+          </a:p>
+          <a:p>
+            <a:pPr>
+              <a:spcAft>
+                <a:spcPts val="1400"/>
+              </a:spcAft>
+              <a:defRPr sz="2000">
+                <a:solidFill>
+                  <a:srgbClr val="E2E8F0"/>
+                </a:solidFill>
+                <a:latin typeface="Inter"/>
+              </a:defRPr>
+            </a:pPr>
+            <a:r>
+              <a:t>• Zgjidhje për Biznesin: Biznesi familjar/lokal fiton një sistem funksional.</a:t>
+            </a:r>
+          </a:p>
+          <a:p>
+            <a:pPr>
+              <a:spcAft>
+                <a:spcPts val="1400"/>
+              </a:spcAft>
+              <a:defRPr sz="2000">
+                <a:solidFill>
+                  <a:srgbClr val="E2E8F0"/>
+                </a:solidFill>
+                <a:latin typeface="Inter"/>
+              </a:defRPr>
+            </a:pPr>
+            <a:r>
+              <a:t>• Portofol Digjital: Një link publik në internet për rezymenë tuaj.</a:t>
+            </a:r>
+          </a:p>
+          <a:p>
+            <a:pPr>
+              <a:spcAft>
+                <a:spcPts val="1400"/>
+              </a:spcAft>
+              <a:defRPr sz="2000">
+                <a:solidFill>
+                  <a:srgbClr val="E2E8F0"/>
+                </a:solidFill>
+                <a:latin typeface="Inter"/>
+              </a:defRPr>
+            </a:pPr>
+            <a:r>
+              <a:t>• Besim i Plotë: Bindja se mund të ndërtoni çdo softuer nga fillimi!</a:t>
             </a:r>
           </a:p>
         </p:txBody>
@@ -6231,7 +6271,7 @@
               </a:defRPr>
             </a:pPr>
             <a:r>
-              <a:t>AKSIONI FILLON TANI</a:t>
+              <a:t>EVIDENCA ZYRTARE E ORËS</a:t>
             </a:r>
           </a:p>
         </p:txBody>
@@ -6267,7 +6307,7 @@
               </a:defRPr>
             </a:pPr>
             <a:r>
-              <a:t>Sprinti Praktik: Gati për Semestrin!</a:t>
+              <a:t>Nxirrni Telefonat: Check-In i Pjesëmarrjes!</a:t>
             </a:r>
           </a:p>
         </p:txBody>
@@ -6303,7 +6343,7 @@
               </a:defRPr>
             </a:pPr>
             <a:r>
-              <a:t>Në 15 minutat e ardhshme lidhim të gjitha platformat zhvillimore në telefon.</a:t>
+              <a:t>Regjistroni praninë tuaj në ligjëratë ose laborator brenda dritares 2-minutëshe.</a:t>
             </a:r>
           </a:p>
         </p:txBody>
@@ -6362,7 +6402,7 @@
         <p:spPr>
           <a:xfrm>
             <a:off x="1005840" y="2194560"/>
-            <a:ext cx="6309360" cy="4023360"/>
+            <a:ext cx="6309360" cy="2286000"/>
           </a:xfrm>
           <a:prstGeom prst="rect">
             <a:avLst/>
@@ -6376,7 +6416,7 @@
           <a:lstStyle/>
           <a:p>
             <a:pPr>
-              <a:defRPr sz="2300" b="1">
+              <a:defRPr sz="2100" b="1">
                 <a:solidFill>
                   <a:srgbClr val="38BDF8"/>
                 </a:solidFill>
@@ -6384,15 +6424,15 @@
               </a:defRPr>
             </a:pPr>
             <a:r>
-              <a:t>1️⃣ GitHub Student Pack:</a:t>
-            </a:r>
-          </a:p>
-          <a:p>
-            <a:pPr>
-              <a:spcAft>
-                <a:spcPts val="1400"/>
-              </a:spcAft>
-              <a:defRPr sz="2000">
+              <a:t>1️⃣ Skanoni QR Kodin:</a:t>
+            </a:r>
+          </a:p>
+          <a:p>
+            <a:pPr>
+              <a:spcAft>
+                <a:spcPts val="800"/>
+              </a:spcAft>
+              <a:defRPr sz="1800">
                 <a:solidFill>
                   <a:srgbClr val="E2E8F0"/>
                 </a:solidFill>
@@ -6400,12 +6440,12 @@
               </a:defRPr>
             </a:pPr>
             <a:r>
-              <a:t>Përfitoni Copilot Pro Falas me emailin AAB</a:t>
-            </a:r>
-          </a:p>
-          <a:p>
-            <a:pPr>
-              <a:defRPr sz="2300" b="1">
+              <a:t>Hapni shfletuesin në arbenl.github.io/#checkin</a:t>
+            </a:r>
+          </a:p>
+          <a:p>
+            <a:pPr>
+              <a:defRPr sz="2100" b="1">
                 <a:solidFill>
                   <a:srgbClr val="38BDF8"/>
                 </a:solidFill>
@@ -6413,15 +6453,15 @@
               </a:defRPr>
             </a:pPr>
             <a:r>
-              <a:t>2️⃣ Supabase Cloud:</a:t>
-            </a:r>
-          </a:p>
-          <a:p>
-            <a:pPr>
-              <a:spcAft>
-                <a:spcPts val="1400"/>
-              </a:spcAft>
-              <a:defRPr sz="2000">
+              <a:t>2️⃣ Zgjidhni Seancën:</a:t>
+            </a:r>
+          </a:p>
+          <a:p>
+            <a:pPr>
+              <a:spcAft>
+                <a:spcPts val="800"/>
+              </a:spcAft>
+              <a:defRPr sz="1800">
                 <a:solidFill>
                   <a:srgbClr val="E2E8F0"/>
                 </a:solidFill>
@@ -6429,12 +6469,12 @@
               </a:defRPr>
             </a:pPr>
             <a:r>
-              <a:t>Kyçuni me 1 klik (Sign in with GitHub)</a:t>
-            </a:r>
-          </a:p>
-          <a:p>
-            <a:pPr>
-              <a:defRPr sz="2300" b="1">
+              <a:t>Zgjidhni [ 📚 Ligjëratë ] ose [ 🧪 Ushtrime (Lab) ]</a:t>
+            </a:r>
+          </a:p>
+          <a:p>
+            <a:pPr>
+              <a:defRPr sz="2100" b="1">
                 <a:solidFill>
                   <a:srgbClr val="38BDF8"/>
                 </a:solidFill>
@@ -6442,15 +6482,15 @@
               </a:defRPr>
             </a:pPr>
             <a:r>
-              <a:t>3️⃣ Vercel Deployment:</a:t>
-            </a:r>
-          </a:p>
-          <a:p>
-            <a:pPr>
-              <a:spcAft>
-                <a:spcPts val="1400"/>
-              </a:spcAft>
-              <a:defRPr sz="2000">
+              <a:t>3️⃣ Shënoni Të Dhënat &amp; PIN-in:</a:t>
+            </a:r>
+          </a:p>
+          <a:p>
+            <a:pPr>
+              <a:spcAft>
+                <a:spcPts val="800"/>
+              </a:spcAft>
+              <a:defRPr sz="1800">
                 <a:solidFill>
                   <a:srgbClr val="E2E8F0"/>
                 </a:solidFill>
@@ -6458,36 +6498,7 @@
               </a:defRPr>
             </a:pPr>
             <a:r>
-              <a:t>Lidhni llogarinë për deploy live me git push</a:t>
-            </a:r>
-          </a:p>
-          <a:p>
-            <a:pPr>
-              <a:defRPr sz="2300" b="1">
-                <a:solidFill>
-                  <a:srgbClr val="38BDF8"/>
-                </a:solidFill>
-                <a:latin typeface="Inter"/>
-              </a:defRPr>
-            </a:pPr>
-            <a:r>
-              <a:t>🌐 Ruani Portalin:</a:t>
-            </a:r>
-          </a:p>
-          <a:p>
-            <a:pPr>
-              <a:spcAft>
-                <a:spcPts val="1400"/>
-              </a:spcAft>
-              <a:defRPr sz="2000">
-                <a:solidFill>
-                  <a:srgbClr val="E2E8F0"/>
-                </a:solidFill>
-                <a:latin typeface="Inter"/>
-              </a:defRPr>
-            </a:pPr>
-            <a:r>
-              <a:t>Shtoni arbenl.github.io në Homescreen të telefonit!</a:t>
+              <a:t>ID e studentit, emri, emaili AAB dhe kodi PIN.</a:t>
             </a:r>
           </a:p>
         </p:txBody>
@@ -6495,6 +6506,103 @@
       <p:sp>
         <p:nvSpPr>
           <p:cNvPr id="8" name="Rounded Rectangle 7"/>
+          <p:cNvSpPr/>
+          <p:nvPr/>
+        </p:nvSpPr>
+        <p:spPr>
+          <a:xfrm>
+            <a:off x="1005840" y="4572000"/>
+            <a:ext cx="6309360" cy="1645920"/>
+          </a:xfrm>
+          <a:prstGeom prst="roundRect">
+            <a:avLst/>
+          </a:prstGeom>
+          <a:solidFill>
+            <a:srgbClr val="0F172A"/>
+          </a:solidFill>
+          <a:ln w="31750">
+            <a:solidFill>
+              <a:srgbClr val="F59E0B"/>
+            </a:solidFill>
+          </a:ln>
+        </p:spPr>
+        <p:style>
+          <a:lnRef idx="1">
+            <a:schemeClr val="accent1"/>
+          </a:lnRef>
+          <a:fillRef idx="3">
+            <a:schemeClr val="accent1"/>
+          </a:fillRef>
+          <a:effectRef idx="2">
+            <a:schemeClr val="accent1"/>
+          </a:effectRef>
+          <a:fontRef idx="minor">
+            <a:schemeClr val="lt1"/>
+          </a:fontRef>
+        </p:style>
+        <p:txBody>
+          <a:bodyPr rtlCol="0" anchor="ctr"/>
+          <a:lstStyle/>
+          <a:p>
+            <a:pPr algn="ctr"/>
+          </a:p>
+        </p:txBody>
+      </p:sp>
+      <p:sp>
+        <p:nvSpPr>
+          <p:cNvPr id="9" name="TextBox 8"/>
+          <p:cNvSpPr txBox="1"/>
+          <p:nvPr/>
+        </p:nvSpPr>
+        <p:spPr>
+          <a:xfrm>
+            <a:off x="1097280" y="4663440"/>
+            <a:ext cx="6126480" cy="1463040"/>
+          </a:xfrm>
+          <a:prstGeom prst="rect">
+            <a:avLst/>
+          </a:prstGeom>
+          <a:noFill/>
+        </p:spPr>
+        <p:txBody>
+          <a:bodyPr wrap="square">
+            <a:spAutoFit/>
+          </a:bodyPr>
+          <a:lstStyle/>
+          <a:p>
+            <a:pPr algn="ctr">
+              <a:spcAft>
+                <a:spcPts val="400"/>
+              </a:spcAft>
+              <a:defRPr sz="1600" b="1">
+                <a:solidFill>
+                  <a:srgbClr val="F59E0B"/>
+                </a:solidFill>
+                <a:latin typeface="Inter"/>
+              </a:defRPr>
+            </a:pPr>
+            <a:r>
+              <a:t>🔑 KODI PIN I SEANCËS SOT (DRITARE 2 MINUTA):</a:t>
+            </a:r>
+          </a:p>
+          <a:p>
+            <a:pPr algn="ctr">
+              <a:defRPr sz="4400" b="1">
+                <a:solidFill>
+                  <a:srgbClr val="FFFFFF"/>
+                </a:solidFill>
+                <a:latin typeface="Inter"/>
+              </a:defRPr>
+            </a:pPr>
+            <a:r>
+              <a:t>8 4 9 2</a:t>
+            </a:r>
+          </a:p>
+        </p:txBody>
+      </p:sp>
+      <p:sp>
+        <p:nvSpPr>
+          <p:cNvPr id="10" name="Rounded Rectangle 9"/>
           <p:cNvSpPr/>
           <p:nvPr/>
         </p:nvSpPr>
@@ -6539,7 +6647,7 @@
       </p:sp>
       <p:pic>
         <p:nvPicPr>
-          <p:cNvPr id="9" name="Picture 8" descr="qr_master_portal.png"/>
+          <p:cNvPr id="11" name="Picture 10" descr="qr_master_checkin.png"/>
           <p:cNvPicPr>
             <a:picLocks noChangeAspect="1"/>
           </p:cNvPicPr>
@@ -6553,8 +6661,8 @@
         </p:blipFill>
         <p:spPr>
           <a:xfrm>
-            <a:off x="8412480" y="2286000"/>
-            <a:ext cx="2560320" cy="2560320"/>
+            <a:off x="8321040" y="2286000"/>
+            <a:ext cx="2743200" cy="2743200"/>
           </a:xfrm>
           <a:prstGeom prst="rect">
             <a:avLst/>
@@ -6563,14 +6671,14 @@
       </p:pic>
       <p:sp>
         <p:nvSpPr>
-          <p:cNvPr id="10" name="TextBox 9"/>
+          <p:cNvPr id="12" name="TextBox 11"/>
           <p:cNvSpPr txBox="1"/>
           <p:nvPr/>
         </p:nvSpPr>
         <p:spPr>
           <a:xfrm>
-            <a:off x="8046720" y="4937760"/>
-            <a:ext cx="3291840" cy="1280160"/>
+            <a:off x="8046720" y="5120640"/>
+            <a:ext cx="3291840" cy="1097280"/>
           </a:xfrm>
           <a:prstGeom prst="rect">
             <a:avLst/>
@@ -6592,12 +6700,12 @@
               </a:defRPr>
             </a:pPr>
             <a:r>
-              <a:t>SKANO PORTALIN</a:t>
+              <a:t>SKANO PËR CHECK-IN</a:t>
             </a:r>
           </a:p>
           <a:p>
             <a:pPr algn="ctr">
-              <a:defRPr sz="1700">
+              <a:defRPr sz="1600">
                 <a:solidFill>
                   <a:srgbClr val="FFFFFF"/>
                 </a:solidFill>
@@ -6605,11 +6713,7 @@
               </a:defRPr>
             </a:pPr>
             <a:r>
-              <a:t>Hapni portalin e kursit</a:t>
-            </a:r>
-            <a:br/>
-            <a:r>
-              <a:t>arbenl.github.io</a:t>
+              <a:t>arbenl.github.io/#checkin</a:t>
             </a:r>
           </a:p>
         </p:txBody>
@@ -6706,7 +6810,7 @@
               </a:defRPr>
             </a:pPr>
             <a:r>
-              <a:t>HAPI 1 • PAKOJA E STUDENTIT</a:t>
+              <a:t>AKSIONI FILLON TANI</a:t>
             </a:r>
           </a:p>
         </p:txBody>
@@ -6742,7 +6846,7 @@
               </a:defRPr>
             </a:pPr>
             <a:r>
-              <a:t>Aktivizoni GitHub Copilot Pro Falas</a:t>
+              <a:t>Sprinti Praktik: Gati për Semestrin!</a:t>
             </a:r>
           </a:p>
         </p:txBody>
@@ -6778,7 +6882,7 @@
               </a:defRPr>
             </a:pPr>
             <a:r>
-              <a:t>Përfitoni paketën me vlerë 100$/vit pa pagesë përmes Kolegjit AAB.</a:t>
+              <a:t>Në 15 minutat e ardhshme lidhim të gjitha platformat zhvillimore në telefon.</a:t>
             </a:r>
           </a:p>
         </p:txBody>
@@ -6802,7 +6906,7 @@
           </a:solidFill>
           <a:ln w="31750">
             <a:solidFill>
-              <a:srgbClr val="6366F1"/>
+              <a:srgbClr val="38BDF8"/>
             </a:solidFill>
           </a:ln>
         </p:spPr>
@@ -6853,19 +6957,19 @@
             <a:pPr>
               <a:defRPr sz="2300" b="1">
                 <a:solidFill>
-                  <a:srgbClr val="FFFFFF"/>
-                </a:solidFill>
-                <a:latin typeface="Inter"/>
-              </a:defRPr>
-            </a:pPr>
-            <a:r>
-              <a:t>✉️ Përdorni Emailin Zyrtar AAB:</a:t>
-            </a:r>
-          </a:p>
-          <a:p>
-            <a:pPr>
-              <a:spcAft>
-                <a:spcPts val="1800"/>
+                  <a:srgbClr val="38BDF8"/>
+                </a:solidFill>
+                <a:latin typeface="Inter"/>
+              </a:defRPr>
+            </a:pPr>
+            <a:r>
+              <a:t>1️⃣ GitHub Student Pack:</a:t>
+            </a:r>
+          </a:p>
+          <a:p>
+            <a:pPr>
+              <a:spcAft>
+                <a:spcPts val="1400"/>
               </a:spcAft>
               <a:defRPr sz="2000">
                 <a:solidFill>
@@ -6875,26 +6979,26 @@
               </a:defRPr>
             </a:pPr>
             <a:r>
-              <a:t>Format: emri.mbiemri@universitetiaab.com në llogarinë tuaj GitHub.</a:t>
+              <a:t>Përfitoni Copilot Pro Falas me emailin AAB</a:t>
             </a:r>
           </a:p>
           <a:p>
             <a:pPr>
               <a:defRPr sz="2300" b="1">
                 <a:solidFill>
-                  <a:srgbClr val="FFFFFF"/>
-                </a:solidFill>
-                <a:latin typeface="Inter"/>
-              </a:defRPr>
-            </a:pPr>
-            <a:r>
-              <a:t>🎓 Klikoni 'Get Student Benefits':</a:t>
-            </a:r>
-          </a:p>
-          <a:p>
-            <a:pPr>
-              <a:spcAft>
-                <a:spcPts val="1800"/>
+                  <a:srgbClr val="38BDF8"/>
+                </a:solidFill>
+                <a:latin typeface="Inter"/>
+              </a:defRPr>
+            </a:pPr>
+            <a:r>
+              <a:t>2️⃣ Supabase Cloud:</a:t>
+            </a:r>
+          </a:p>
+          <a:p>
+            <a:pPr>
+              <a:spcAft>
+                <a:spcPts val="1400"/>
               </a:spcAft>
               <a:defRPr sz="2000">
                 <a:solidFill>
@@ -6904,26 +7008,26 @@
               </a:defRPr>
             </a:pPr>
             <a:r>
-              <a:t>Ngarkoni foton e kartelës studentore ose vërtetimin e vitit.</a:t>
+              <a:t>Kyçuni me 1 klik (Sign in with GitHub)</a:t>
             </a:r>
           </a:p>
           <a:p>
             <a:pPr>
               <a:defRPr sz="2300" b="1">
                 <a:solidFill>
-                  <a:srgbClr val="FFFFFF"/>
-                </a:solidFill>
-                <a:latin typeface="Inter"/>
-              </a:defRPr>
-            </a:pPr>
-            <a:r>
-              <a:t>🤖 Copilot Aktivizohet Menjëherë:</a:t>
-            </a:r>
-          </a:p>
-          <a:p>
-            <a:pPr>
-              <a:spcAft>
-                <a:spcPts val="1800"/>
+                  <a:srgbClr val="38BDF8"/>
+                </a:solidFill>
+                <a:latin typeface="Inter"/>
+              </a:defRPr>
+            </a:pPr>
+            <a:r>
+              <a:t>3️⃣ Vercel Deployment:</a:t>
+            </a:r>
+          </a:p>
+          <a:p>
+            <a:pPr>
+              <a:spcAft>
+                <a:spcPts val="1400"/>
               </a:spcAft>
               <a:defRPr sz="2000">
                 <a:solidFill>
@@ -6933,7 +7037,36 @@
               </a:defRPr>
             </a:pPr>
             <a:r>
-              <a:t>Akses falas i pakufizuar në VS Code për gjatë gjithë studimeve!</a:t>
+              <a:t>Lidhni llogarinë për deploy live me git push</a:t>
+            </a:r>
+          </a:p>
+          <a:p>
+            <a:pPr>
+              <a:defRPr sz="2300" b="1">
+                <a:solidFill>
+                  <a:srgbClr val="38BDF8"/>
+                </a:solidFill>
+                <a:latin typeface="Inter"/>
+              </a:defRPr>
+            </a:pPr>
+            <a:r>
+              <a:t>🌐 Ruani Portalin:</a:t>
+            </a:r>
+          </a:p>
+          <a:p>
+            <a:pPr>
+              <a:spcAft>
+                <a:spcPts val="1400"/>
+              </a:spcAft>
+              <a:defRPr sz="2000">
+                <a:solidFill>
+                  <a:srgbClr val="E2E8F0"/>
+                </a:solidFill>
+                <a:latin typeface="Inter"/>
+              </a:defRPr>
+            </a:pPr>
+            <a:r>
+              <a:t>Shtoni arbenl.github.io në Homescreen të telefonit!</a:t>
             </a:r>
           </a:p>
         </p:txBody>
@@ -6985,7 +7118,7 @@
       </p:sp>
       <p:pic>
         <p:nvPicPr>
-          <p:cNvPr id="9" name="Picture 8" descr="qr_master_github_pack.png"/>
+          <p:cNvPr id="9" name="Picture 8" descr="qr_master_portal.png"/>
           <p:cNvPicPr>
             <a:picLocks noChangeAspect="1"/>
           </p:cNvPicPr>
@@ -6999,8 +7132,8 @@
         </p:blipFill>
         <p:spPr>
           <a:xfrm>
-            <a:off x="8321040" y="2286000"/>
-            <a:ext cx="2743200" cy="2743200"/>
+            <a:off x="8412480" y="2286000"/>
+            <a:ext cx="2560320" cy="2560320"/>
           </a:xfrm>
           <a:prstGeom prst="rect">
             <a:avLst/>
@@ -7015,8 +7148,8 @@
         </p:nvSpPr>
         <p:spPr>
           <a:xfrm>
-            <a:off x="8046720" y="5120640"/>
-            <a:ext cx="3291840" cy="1097280"/>
+            <a:off x="8046720" y="4937760"/>
+            <a:ext cx="3291840" cy="1280160"/>
           </a:xfrm>
           <a:prstGeom prst="rect">
             <a:avLst/>
@@ -7038,7 +7171,24 @@
               </a:defRPr>
             </a:pPr>
             <a:r>
-              <a:t>SKANO PËR COPILOT</a:t>
+              <a:t>SKANO PORTALIN</a:t>
+            </a:r>
+          </a:p>
+          <a:p>
+            <a:pPr algn="ctr">
+              <a:defRPr sz="1700">
+                <a:solidFill>
+                  <a:srgbClr val="FFFFFF"/>
+                </a:solidFill>
+                <a:latin typeface="Inter"/>
+              </a:defRPr>
+            </a:pPr>
+            <a:r>
+              <a:t>Hapni portalin e kursit</a:t>
+            </a:r>
+            <a:br/>
+            <a:r>
+              <a:t>arbenl.github.io</a:t>
             </a:r>
           </a:p>
         </p:txBody>
@@ -7135,7 +7285,7 @@
               </a:defRPr>
             </a:pPr>
             <a:r>
-              <a:t>HAPAT 2 &amp; 3 • INFRASTRUKTURA CLOUD</a:t>
+              <a:t>HAPI 1 • PAKOJA E STUDENTIT</a:t>
             </a:r>
           </a:p>
         </p:txBody>
@@ -7171,7 +7321,7 @@
               </a:defRPr>
             </a:pPr>
             <a:r>
-              <a:t>Supabase &amp; Vercel: Kyçja me 1-Kliko</a:t>
+              <a:t>Aktivizoni GitHub Copilot Pro Falas</a:t>
             </a:r>
           </a:p>
         </p:txBody>
@@ -7207,7 +7357,7 @@
               </a:defRPr>
             </a:pPr>
             <a:r>
-              <a:t>Nuk keni nevojë për fjalëkalime të reja — zgjidhni 'Continue with GitHub'.</a:t>
+              <a:t>Përfitoni paketën me vlerë 100$/vit pa pagesë përmes Kolegjit AAB.</a:t>
             </a:r>
           </a:p>
         </p:txBody>
@@ -7221,7 +7371,162 @@
         <p:spPr>
           <a:xfrm>
             <a:off x="731520" y="2011680"/>
-            <a:ext cx="5120640" cy="4389120"/>
+            <a:ext cx="6858000" cy="4389120"/>
+          </a:xfrm>
+          <a:prstGeom prst="roundRect">
+            <a:avLst/>
+          </a:prstGeom>
+          <a:solidFill>
+            <a:srgbClr val="141E34"/>
+          </a:solidFill>
+          <a:ln w="31750">
+            <a:solidFill>
+              <a:srgbClr val="6366F1"/>
+            </a:solidFill>
+          </a:ln>
+        </p:spPr>
+        <p:style>
+          <a:lnRef idx="1">
+            <a:schemeClr val="accent1"/>
+          </a:lnRef>
+          <a:fillRef idx="3">
+            <a:schemeClr val="accent1"/>
+          </a:fillRef>
+          <a:effectRef idx="2">
+            <a:schemeClr val="accent1"/>
+          </a:effectRef>
+          <a:fontRef idx="minor">
+            <a:schemeClr val="lt1"/>
+          </a:fontRef>
+        </p:style>
+        <p:txBody>
+          <a:bodyPr rtlCol="0" anchor="ctr"/>
+          <a:lstStyle/>
+          <a:p>
+            <a:pPr algn="ctr"/>
+          </a:p>
+        </p:txBody>
+      </p:sp>
+      <p:sp>
+        <p:nvSpPr>
+          <p:cNvPr id="7" name="TextBox 6"/>
+          <p:cNvSpPr txBox="1"/>
+          <p:nvPr/>
+        </p:nvSpPr>
+        <p:spPr>
+          <a:xfrm>
+            <a:off x="1005840" y="2194560"/>
+            <a:ext cx="6309360" cy="4023360"/>
+          </a:xfrm>
+          <a:prstGeom prst="rect">
+            <a:avLst/>
+          </a:prstGeom>
+          <a:noFill/>
+        </p:spPr>
+        <p:txBody>
+          <a:bodyPr wrap="square">
+            <a:spAutoFit/>
+          </a:bodyPr>
+          <a:lstStyle/>
+          <a:p>
+            <a:pPr>
+              <a:defRPr sz="2300" b="1">
+                <a:solidFill>
+                  <a:srgbClr val="FFFFFF"/>
+                </a:solidFill>
+                <a:latin typeface="Inter"/>
+              </a:defRPr>
+            </a:pPr>
+            <a:r>
+              <a:t>✉️ Përdorni Emailin Zyrtar AAB:</a:t>
+            </a:r>
+          </a:p>
+          <a:p>
+            <a:pPr>
+              <a:spcAft>
+                <a:spcPts val="1800"/>
+              </a:spcAft>
+              <a:defRPr sz="2000">
+                <a:solidFill>
+                  <a:srgbClr val="E2E8F0"/>
+                </a:solidFill>
+                <a:latin typeface="Inter"/>
+              </a:defRPr>
+            </a:pPr>
+            <a:r>
+              <a:t>Format: emri.mbiemri@universitetiaab.com në llogarinë tuaj GitHub.</a:t>
+            </a:r>
+          </a:p>
+          <a:p>
+            <a:pPr>
+              <a:defRPr sz="2300" b="1">
+                <a:solidFill>
+                  <a:srgbClr val="FFFFFF"/>
+                </a:solidFill>
+                <a:latin typeface="Inter"/>
+              </a:defRPr>
+            </a:pPr>
+            <a:r>
+              <a:t>🎓 Klikoni 'Get Student Benefits':</a:t>
+            </a:r>
+          </a:p>
+          <a:p>
+            <a:pPr>
+              <a:spcAft>
+                <a:spcPts val="1800"/>
+              </a:spcAft>
+              <a:defRPr sz="2000">
+                <a:solidFill>
+                  <a:srgbClr val="E2E8F0"/>
+                </a:solidFill>
+                <a:latin typeface="Inter"/>
+              </a:defRPr>
+            </a:pPr>
+            <a:r>
+              <a:t>Ngarkoni foton e kartelës studentore ose vërtetimin e vitit.</a:t>
+            </a:r>
+          </a:p>
+          <a:p>
+            <a:pPr>
+              <a:defRPr sz="2300" b="1">
+                <a:solidFill>
+                  <a:srgbClr val="FFFFFF"/>
+                </a:solidFill>
+                <a:latin typeface="Inter"/>
+              </a:defRPr>
+            </a:pPr>
+            <a:r>
+              <a:t>🤖 Copilot Aktivizohet Menjëherë:</a:t>
+            </a:r>
+          </a:p>
+          <a:p>
+            <a:pPr>
+              <a:spcAft>
+                <a:spcPts val="1800"/>
+              </a:spcAft>
+              <a:defRPr sz="2000">
+                <a:solidFill>
+                  <a:srgbClr val="E2E8F0"/>
+                </a:solidFill>
+                <a:latin typeface="Inter"/>
+              </a:defRPr>
+            </a:pPr>
+            <a:r>
+              <a:t>Akses falas i pakufizuar në VS Code për gjatë gjithë studimeve!</a:t>
+            </a:r>
+          </a:p>
+        </p:txBody>
+      </p:sp>
+      <p:sp>
+        <p:nvSpPr>
+          <p:cNvPr id="8" name="Rounded Rectangle 7"/>
+          <p:cNvSpPr/>
+          <p:nvPr/>
+        </p:nvSpPr>
+        <p:spPr>
+          <a:xfrm>
+            <a:off x="7955279" y="2011680"/>
+            <a:ext cx="3474720" cy="4389120"/>
           </a:xfrm>
           <a:prstGeom prst="roundRect">
             <a:avLst/>
@@ -7259,7 +7564,7 @@
       </p:sp>
       <p:pic>
         <p:nvPicPr>
-          <p:cNvPr id="7" name="Picture 6" descr="qr_master_supabase.png"/>
+          <p:cNvPr id="9" name="Picture 8" descr="qr_master_github_pack.png"/>
           <p:cNvPicPr>
             <a:picLocks noChangeAspect="1"/>
           </p:cNvPicPr>
@@ -7273,8 +7578,8 @@
         </p:blipFill>
         <p:spPr>
           <a:xfrm>
-            <a:off x="1005840" y="2286000"/>
-            <a:ext cx="2194560" cy="2194560"/>
+            <a:off x="8321040" y="2286000"/>
+            <a:ext cx="2743200" cy="2743200"/>
           </a:xfrm>
           <a:prstGeom prst="rect">
             <a:avLst/>
@@ -7283,14 +7588,14 @@
       </p:pic>
       <p:sp>
         <p:nvSpPr>
-          <p:cNvPr id="8" name="TextBox 7"/>
+          <p:cNvPr id="10" name="TextBox 9"/>
           <p:cNvSpPr txBox="1"/>
           <p:nvPr/>
         </p:nvSpPr>
         <p:spPr>
           <a:xfrm>
-            <a:off x="3383280" y="2194560"/>
-            <a:ext cx="2286000" cy="4023360"/>
+            <a:off x="8046720" y="5120640"/>
+            <a:ext cx="3291840" cy="1097280"/>
           </a:xfrm>
           <a:prstGeom prst="rect">
             <a:avLst/>
@@ -7303,11 +7608,8 @@
           </a:bodyPr>
           <a:lstStyle/>
           <a:p>
-            <a:pPr>
-              <a:spcAft>
-                <a:spcPts val="1200"/>
-              </a:spcAft>
-              <a:defRPr sz="2400" b="1">
+            <a:pPr algn="ctr">
+              <a:defRPr sz="2000" b="1">
                 <a:solidFill>
                   <a:srgbClr val="10B981"/>
                 </a:solidFill>
@@ -7315,157 +7617,7 @@
               </a:defRPr>
             </a:pPr>
             <a:r>
-              <a:t>🗄️ SUPABASE</a:t>
-            </a:r>
-          </a:p>
-          <a:p>
-            <a:pPr>
-              <a:defRPr sz="1900">
-                <a:solidFill>
-                  <a:srgbClr val="E2E8F0"/>
-                </a:solidFill>
-                <a:latin typeface="Inter"/>
-              </a:defRPr>
-            </a:pPr>
-            <a:r>
-              <a:t>• Skanoni QR kodin</a:t>
-            </a:r>
-            <a:br/>
-            <a:r>
-              <a:t>• 'Sign in with GitHub'</a:t>
-            </a:r>
-            <a:br/>
-            <a:r>
-              <a:t>• Databaza PostgreSQL &amp; Auth gati për aplikacionin tuaj!</a:t>
-            </a:r>
-          </a:p>
-        </p:txBody>
-      </p:sp>
-      <p:sp>
-        <p:nvSpPr>
-          <p:cNvPr id="9" name="Rounded Rectangle 8"/>
-          <p:cNvSpPr/>
-          <p:nvPr/>
-        </p:nvSpPr>
-        <p:spPr>
-          <a:xfrm>
-            <a:off x="6309360" y="2011680"/>
-            <a:ext cx="5120640" cy="4389120"/>
-          </a:xfrm>
-          <a:prstGeom prst="roundRect">
-            <a:avLst/>
-          </a:prstGeom>
-          <a:solidFill>
-            <a:srgbClr val="141E34"/>
-          </a:solidFill>
-          <a:ln w="31750">
-            <a:solidFill>
-              <a:srgbClr val="38BDF8"/>
-            </a:solidFill>
-          </a:ln>
-        </p:spPr>
-        <p:style>
-          <a:lnRef idx="1">
-            <a:schemeClr val="accent1"/>
-          </a:lnRef>
-          <a:fillRef idx="3">
-            <a:schemeClr val="accent1"/>
-          </a:fillRef>
-          <a:effectRef idx="2">
-            <a:schemeClr val="accent1"/>
-          </a:effectRef>
-          <a:fontRef idx="minor">
-            <a:schemeClr val="lt1"/>
-          </a:fontRef>
-        </p:style>
-        <p:txBody>
-          <a:bodyPr rtlCol="0" anchor="ctr"/>
-          <a:lstStyle/>
-          <a:p>
-            <a:pPr algn="ctr"/>
-          </a:p>
-        </p:txBody>
-      </p:sp>
-      <p:pic>
-        <p:nvPicPr>
-          <p:cNvPr id="10" name="Picture 9" descr="qr_master_vercel.png"/>
-          <p:cNvPicPr>
-            <a:picLocks noChangeAspect="1"/>
-          </p:cNvPicPr>
-          <p:nvPr/>
-        </p:nvPicPr>
-        <p:blipFill>
-          <a:blip r:embed="rId3"/>
-          <a:stretch>
-            <a:fillRect/>
-          </a:stretch>
-        </p:blipFill>
-        <p:spPr>
-          <a:xfrm>
-            <a:off x="6583680" y="2286000"/>
-            <a:ext cx="2194560" cy="2194560"/>
-          </a:xfrm>
-          <a:prstGeom prst="rect">
-            <a:avLst/>
-          </a:prstGeom>
-        </p:spPr>
-      </p:pic>
-      <p:sp>
-        <p:nvSpPr>
-          <p:cNvPr id="11" name="TextBox 10"/>
-          <p:cNvSpPr txBox="1"/>
-          <p:nvPr/>
-        </p:nvSpPr>
-        <p:spPr>
-          <a:xfrm>
-            <a:off x="8961120" y="2194560"/>
-            <a:ext cx="2286000" cy="4023360"/>
-          </a:xfrm>
-          <a:prstGeom prst="rect">
-            <a:avLst/>
-          </a:prstGeom>
-          <a:noFill/>
-        </p:spPr>
-        <p:txBody>
-          <a:bodyPr wrap="square">
-            <a:spAutoFit/>
-          </a:bodyPr>
-          <a:lstStyle/>
-          <a:p>
-            <a:pPr>
-              <a:spcAft>
-                <a:spcPts val="1200"/>
-              </a:spcAft>
-              <a:defRPr sz="2400" b="1">
-                <a:solidFill>
-                  <a:srgbClr val="38BDF8"/>
-                </a:solidFill>
-                <a:latin typeface="Inter"/>
-              </a:defRPr>
-            </a:pPr>
-            <a:r>
-              <a:t>🚀 VERCEL</a:t>
-            </a:r>
-          </a:p>
-          <a:p>
-            <a:pPr>
-              <a:defRPr sz="1900">
-                <a:solidFill>
-                  <a:srgbClr val="E2E8F0"/>
-                </a:solidFill>
-                <a:latin typeface="Inter"/>
-              </a:defRPr>
-            </a:pPr>
-            <a:r>
-              <a:t>• Skanoni QR kodin</a:t>
-            </a:r>
-            <a:br/>
-            <a:r>
-              <a:t>• 'Continue with GitHub'</a:t>
-            </a:r>
-            <a:br/>
-            <a:r>
-              <a:t>• Publikimi live bëhet automatik me çdo git push!</a:t>
+              <a:t>SKANO PËR COPILOT</a:t>
             </a:r>
           </a:p>
         </p:txBody>
@@ -7479,6 +7631,433 @@
 </file>
 
 <file path=ppt/slides/slide18.xml><?xml version="1.0" encoding="utf-8"?>
+<p:sld xmlns:a="http://schemas.openxmlformats.org/drawingml/2006/main" xmlns:p="http://schemas.openxmlformats.org/presentationml/2006/main" xmlns:r="http://schemas.openxmlformats.org/officeDocument/2006/relationships">
+  <p:cSld>
+    <p:spTree>
+      <p:nvGrpSpPr>
+        <p:cNvPr id="1" name=""/>
+        <p:cNvGrpSpPr/>
+        <p:nvPr/>
+      </p:nvGrpSpPr>
+      <p:grpSpPr/>
+      <p:sp>
+        <p:nvSpPr>
+          <p:cNvPr id="2" name="Rectangle 1"/>
+          <p:cNvSpPr/>
+          <p:nvPr/>
+        </p:nvSpPr>
+        <p:spPr>
+          <a:xfrm>
+            <a:off x="0" y="0"/>
+            <a:ext cx="12191695" cy="6858000"/>
+          </a:xfrm>
+          <a:prstGeom prst="rect">
+            <a:avLst/>
+          </a:prstGeom>
+          <a:solidFill>
+            <a:srgbClr val="0B1120"/>
+          </a:solidFill>
+          <a:ln>
+            <a:noFill/>
+          </a:ln>
+        </p:spPr>
+        <p:style>
+          <a:lnRef idx="1">
+            <a:schemeClr val="accent1"/>
+          </a:lnRef>
+          <a:fillRef idx="3">
+            <a:schemeClr val="accent1"/>
+          </a:fillRef>
+          <a:effectRef idx="2">
+            <a:schemeClr val="accent1"/>
+          </a:effectRef>
+          <a:fontRef idx="minor">
+            <a:schemeClr val="lt1"/>
+          </a:fontRef>
+        </p:style>
+        <p:txBody>
+          <a:bodyPr rtlCol="0" anchor="ctr"/>
+          <a:lstStyle/>
+          <a:p>
+            <a:pPr algn="ctr"/>
+          </a:p>
+        </p:txBody>
+      </p:sp>
+      <p:sp>
+        <p:nvSpPr>
+          <p:cNvPr id="3" name="TextBox 2"/>
+          <p:cNvSpPr txBox="1"/>
+          <p:nvPr/>
+        </p:nvSpPr>
+        <p:spPr>
+          <a:xfrm>
+            <a:off x="731520" y="365760"/>
+            <a:ext cx="10698480" cy="320040"/>
+          </a:xfrm>
+          <a:prstGeom prst="rect">
+            <a:avLst/>
+          </a:prstGeom>
+          <a:noFill/>
+        </p:spPr>
+        <p:txBody>
+          <a:bodyPr wrap="square">
+            <a:spAutoFit/>
+          </a:bodyPr>
+          <a:lstStyle/>
+          <a:p>
+            <a:pPr>
+              <a:defRPr sz="1500" b="1">
+                <a:solidFill>
+                  <a:srgbClr val="38BDF8"/>
+                </a:solidFill>
+                <a:latin typeface="Inter"/>
+              </a:defRPr>
+            </a:pPr>
+            <a:r>
+              <a:t>HAPAT 2 &amp; 3 • INFRASTRUKTURA CLOUD</a:t>
+            </a:r>
+          </a:p>
+        </p:txBody>
+      </p:sp>
+      <p:sp>
+        <p:nvSpPr>
+          <p:cNvPr id="4" name="TextBox 3"/>
+          <p:cNvSpPr txBox="1"/>
+          <p:nvPr/>
+        </p:nvSpPr>
+        <p:spPr>
+          <a:xfrm>
+            <a:off x="731520" y="685800"/>
+            <a:ext cx="10698480" cy="777240"/>
+          </a:xfrm>
+          <a:prstGeom prst="rect">
+            <a:avLst/>
+          </a:prstGeom>
+          <a:noFill/>
+        </p:spPr>
+        <p:txBody>
+          <a:bodyPr wrap="square">
+            <a:spAutoFit/>
+          </a:bodyPr>
+          <a:lstStyle/>
+          <a:p>
+            <a:pPr>
+              <a:defRPr sz="3800" b="1">
+                <a:solidFill>
+                  <a:srgbClr val="FFFFFF"/>
+                </a:solidFill>
+                <a:latin typeface="Inter"/>
+              </a:defRPr>
+            </a:pPr>
+            <a:r>
+              <a:t>Supabase &amp; Vercel: Kyçja me 1-Kliko</a:t>
+            </a:r>
+          </a:p>
+        </p:txBody>
+      </p:sp>
+      <p:sp>
+        <p:nvSpPr>
+          <p:cNvPr id="5" name="TextBox 4"/>
+          <p:cNvSpPr txBox="1"/>
+          <p:nvPr/>
+        </p:nvSpPr>
+        <p:spPr>
+          <a:xfrm>
+            <a:off x="731520" y="1444752"/>
+            <a:ext cx="10698480" cy="502920"/>
+          </a:xfrm>
+          <a:prstGeom prst="rect">
+            <a:avLst/>
+          </a:prstGeom>
+          <a:noFill/>
+        </p:spPr>
+        <p:txBody>
+          <a:bodyPr wrap="square">
+            <a:spAutoFit/>
+          </a:bodyPr>
+          <a:lstStyle/>
+          <a:p>
+            <a:pPr>
+              <a:defRPr sz="2200">
+                <a:solidFill>
+                  <a:srgbClr val="E2E8F0"/>
+                </a:solidFill>
+                <a:latin typeface="Inter"/>
+              </a:defRPr>
+            </a:pPr>
+            <a:r>
+              <a:t>Nuk keni nevojë për fjalëkalime të reja — zgjidhni 'Continue with GitHub'.</a:t>
+            </a:r>
+          </a:p>
+        </p:txBody>
+      </p:sp>
+      <p:sp>
+        <p:nvSpPr>
+          <p:cNvPr id="6" name="Rounded Rectangle 5"/>
+          <p:cNvSpPr/>
+          <p:nvPr/>
+        </p:nvSpPr>
+        <p:spPr>
+          <a:xfrm>
+            <a:off x="731520" y="2011680"/>
+            <a:ext cx="5120640" cy="4389120"/>
+          </a:xfrm>
+          <a:prstGeom prst="roundRect">
+            <a:avLst/>
+          </a:prstGeom>
+          <a:solidFill>
+            <a:srgbClr val="141E34"/>
+          </a:solidFill>
+          <a:ln w="31750">
+            <a:solidFill>
+              <a:srgbClr val="10B981"/>
+            </a:solidFill>
+          </a:ln>
+        </p:spPr>
+        <p:style>
+          <a:lnRef idx="1">
+            <a:schemeClr val="accent1"/>
+          </a:lnRef>
+          <a:fillRef idx="3">
+            <a:schemeClr val="accent1"/>
+          </a:fillRef>
+          <a:effectRef idx="2">
+            <a:schemeClr val="accent1"/>
+          </a:effectRef>
+          <a:fontRef idx="minor">
+            <a:schemeClr val="lt1"/>
+          </a:fontRef>
+        </p:style>
+        <p:txBody>
+          <a:bodyPr rtlCol="0" anchor="ctr"/>
+          <a:lstStyle/>
+          <a:p>
+            <a:pPr algn="ctr"/>
+          </a:p>
+        </p:txBody>
+      </p:sp>
+      <p:pic>
+        <p:nvPicPr>
+          <p:cNvPr id="7" name="Picture 6" descr="qr_master_supabase.png"/>
+          <p:cNvPicPr>
+            <a:picLocks noChangeAspect="1"/>
+          </p:cNvPicPr>
+          <p:nvPr/>
+        </p:nvPicPr>
+        <p:blipFill>
+          <a:blip r:embed="rId2"/>
+          <a:stretch>
+            <a:fillRect/>
+          </a:stretch>
+        </p:blipFill>
+        <p:spPr>
+          <a:xfrm>
+            <a:off x="1005840" y="2286000"/>
+            <a:ext cx="2194560" cy="2194560"/>
+          </a:xfrm>
+          <a:prstGeom prst="rect">
+            <a:avLst/>
+          </a:prstGeom>
+        </p:spPr>
+      </p:pic>
+      <p:sp>
+        <p:nvSpPr>
+          <p:cNvPr id="8" name="TextBox 7"/>
+          <p:cNvSpPr txBox="1"/>
+          <p:nvPr/>
+        </p:nvSpPr>
+        <p:spPr>
+          <a:xfrm>
+            <a:off x="3383280" y="2194560"/>
+            <a:ext cx="2286000" cy="4023360"/>
+          </a:xfrm>
+          <a:prstGeom prst="rect">
+            <a:avLst/>
+          </a:prstGeom>
+          <a:noFill/>
+        </p:spPr>
+        <p:txBody>
+          <a:bodyPr wrap="square">
+            <a:spAutoFit/>
+          </a:bodyPr>
+          <a:lstStyle/>
+          <a:p>
+            <a:pPr>
+              <a:spcAft>
+                <a:spcPts val="1200"/>
+              </a:spcAft>
+              <a:defRPr sz="2400" b="1">
+                <a:solidFill>
+                  <a:srgbClr val="10B981"/>
+                </a:solidFill>
+                <a:latin typeface="Inter"/>
+              </a:defRPr>
+            </a:pPr>
+            <a:r>
+              <a:t>🗄️ SUPABASE</a:t>
+            </a:r>
+          </a:p>
+          <a:p>
+            <a:pPr>
+              <a:defRPr sz="1900">
+                <a:solidFill>
+                  <a:srgbClr val="E2E8F0"/>
+                </a:solidFill>
+                <a:latin typeface="Inter"/>
+              </a:defRPr>
+            </a:pPr>
+            <a:r>
+              <a:t>• Skanoni QR kodin</a:t>
+            </a:r>
+            <a:br/>
+            <a:r>
+              <a:t>• 'Sign in with GitHub'</a:t>
+            </a:r>
+            <a:br/>
+            <a:r>
+              <a:t>• Databaza PostgreSQL &amp; Auth gati për aplikacionin tuaj!</a:t>
+            </a:r>
+          </a:p>
+        </p:txBody>
+      </p:sp>
+      <p:sp>
+        <p:nvSpPr>
+          <p:cNvPr id="9" name="Rounded Rectangle 8"/>
+          <p:cNvSpPr/>
+          <p:nvPr/>
+        </p:nvSpPr>
+        <p:spPr>
+          <a:xfrm>
+            <a:off x="6309360" y="2011680"/>
+            <a:ext cx="5120640" cy="4389120"/>
+          </a:xfrm>
+          <a:prstGeom prst="roundRect">
+            <a:avLst/>
+          </a:prstGeom>
+          <a:solidFill>
+            <a:srgbClr val="141E34"/>
+          </a:solidFill>
+          <a:ln w="31750">
+            <a:solidFill>
+              <a:srgbClr val="38BDF8"/>
+            </a:solidFill>
+          </a:ln>
+        </p:spPr>
+        <p:style>
+          <a:lnRef idx="1">
+            <a:schemeClr val="accent1"/>
+          </a:lnRef>
+          <a:fillRef idx="3">
+            <a:schemeClr val="accent1"/>
+          </a:fillRef>
+          <a:effectRef idx="2">
+            <a:schemeClr val="accent1"/>
+          </a:effectRef>
+          <a:fontRef idx="minor">
+            <a:schemeClr val="lt1"/>
+          </a:fontRef>
+        </p:style>
+        <p:txBody>
+          <a:bodyPr rtlCol="0" anchor="ctr"/>
+          <a:lstStyle/>
+          <a:p>
+            <a:pPr algn="ctr"/>
+          </a:p>
+        </p:txBody>
+      </p:sp>
+      <p:pic>
+        <p:nvPicPr>
+          <p:cNvPr id="10" name="Picture 9" descr="qr_master_vercel.png"/>
+          <p:cNvPicPr>
+            <a:picLocks noChangeAspect="1"/>
+          </p:cNvPicPr>
+          <p:nvPr/>
+        </p:nvPicPr>
+        <p:blipFill>
+          <a:blip r:embed="rId3"/>
+          <a:stretch>
+            <a:fillRect/>
+          </a:stretch>
+        </p:blipFill>
+        <p:spPr>
+          <a:xfrm>
+            <a:off x="6583680" y="2286000"/>
+            <a:ext cx="2194560" cy="2194560"/>
+          </a:xfrm>
+          <a:prstGeom prst="rect">
+            <a:avLst/>
+          </a:prstGeom>
+        </p:spPr>
+      </p:pic>
+      <p:sp>
+        <p:nvSpPr>
+          <p:cNvPr id="11" name="TextBox 10"/>
+          <p:cNvSpPr txBox="1"/>
+          <p:nvPr/>
+        </p:nvSpPr>
+        <p:spPr>
+          <a:xfrm>
+            <a:off x="8961120" y="2194560"/>
+            <a:ext cx="2286000" cy="4023360"/>
+          </a:xfrm>
+          <a:prstGeom prst="rect">
+            <a:avLst/>
+          </a:prstGeom>
+          <a:noFill/>
+        </p:spPr>
+        <p:txBody>
+          <a:bodyPr wrap="square">
+            <a:spAutoFit/>
+          </a:bodyPr>
+          <a:lstStyle/>
+          <a:p>
+            <a:pPr>
+              <a:spcAft>
+                <a:spcPts val="1200"/>
+              </a:spcAft>
+              <a:defRPr sz="2400" b="1">
+                <a:solidFill>
+                  <a:srgbClr val="38BDF8"/>
+                </a:solidFill>
+                <a:latin typeface="Inter"/>
+              </a:defRPr>
+            </a:pPr>
+            <a:r>
+              <a:t>🚀 VERCEL</a:t>
+            </a:r>
+          </a:p>
+          <a:p>
+            <a:pPr>
+              <a:defRPr sz="1900">
+                <a:solidFill>
+                  <a:srgbClr val="E2E8F0"/>
+                </a:solidFill>
+                <a:latin typeface="Inter"/>
+              </a:defRPr>
+            </a:pPr>
+            <a:r>
+              <a:t>• Skanoni QR kodin</a:t>
+            </a:r>
+            <a:br/>
+            <a:r>
+              <a:t>• 'Continue with GitHub'</a:t>
+            </a:r>
+            <a:br/>
+            <a:r>
+              <a:t>• Publikimi live bëhet automatik me çdo git push!</a:t>
+            </a:r>
+          </a:p>
+        </p:txBody>
+      </p:sp>
+    </p:spTree>
+  </p:cSld>
+  <p:clrMapOvr>
+    <a:masterClrMapping/>
+  </p:clrMapOvr>
+</p:sld>
+</file>
+
+<file path=ppt/slides/slide19.xml><?xml version="1.0" encoding="utf-8"?>
 <p:sld xmlns:a="http://schemas.openxmlformats.org/drawingml/2006/main" xmlns:p="http://schemas.openxmlformats.org/presentationml/2006/main" xmlns:r="http://schemas.openxmlformats.org/officeDocument/2006/relationships">
   <p:cSld>
     <p:spTree>

--- a/Jave1_Hyrje_Nextjs_PWA_Copilot_2026.pptx
+++ b/Jave1_Hyrje_Nextjs_PWA_Copilot_2026.pptx
@@ -3278,7 +3278,7 @@
               <a:spcAft>
                 <a:spcPts val="2400"/>
               </a:spcAft>
-              <a:defRPr sz="2400" b="1">
+              <a:defRPr sz="2300" b="1">
                 <a:solidFill>
                   <a:srgbClr val="10B981"/>
                 </a:solidFill>
@@ -3286,7 +3286,7 @@
               </a:defRPr>
             </a:pPr>
             <a:r>
-              <a:t>The Founder's Expedition: Nga Ideja Lokale në Mobile PWA me AI</a:t>
+              <a:t>The Founder's Expedition: Nga Skica në Letër te Mobile PWA me AI</a:t>
             </a:r>
           </a:p>
           <a:p>
@@ -3522,7 +3522,7 @@
               </a:defRPr>
             </a:pPr>
             <a:r>
-              <a:t>MJETET PROFESIONALE</a:t>
+              <a:t>EKOSISTEMI I ZHVILLIMIT</a:t>
             </a:r>
           </a:p>
         </p:txBody>
@@ -3558,7 +3558,7 @@
               </a:defRPr>
             </a:pPr>
             <a:r>
-              <a:t>Fluksi i Plotë Teknologjik i Kursit</a:t>
+              <a:t>Staku Teknologjik: Mjetet Profesionale të Kursit</a:t>
             </a:r>
           </a:p>
         </p:txBody>
@@ -3586,15 +3586,15 @@
           <a:lstStyle/>
           <a:p>
             <a:pPr>
-              <a:defRPr sz="2200">
-                <a:solidFill>
-                  <a:srgbClr val="E2E8F0"/>
-                </a:solidFill>
-                <a:latin typeface="Inter"/>
-              </a:defRPr>
-            </a:pPr>
-            <a:r>
-              <a:t>Arkitektura moderne që lidh kodimin me AI deri te publikimi live në cloud.</a:t>
+              <a:defRPr sz="2100">
+                <a:solidFill>
+                  <a:srgbClr val="E2E8F0"/>
+                </a:solidFill>
+                <a:latin typeface="Inter"/>
+              </a:defRPr>
+            </a:pPr>
+            <a:r>
+              <a:t>Katër shtyllat teknologjike që do të zotëroni gjatë 15 javëve të semestrit.</a:t>
             </a:r>
           </a:p>
         </p:txBody>
@@ -3608,7 +3608,7 @@
         <p:spPr>
           <a:xfrm>
             <a:off x="731520" y="2011680"/>
-            <a:ext cx="2468880" cy="4389120"/>
+            <a:ext cx="2514600" cy="4389120"/>
           </a:xfrm>
           <a:prstGeom prst="roundRect">
             <a:avLst/>
@@ -3652,8 +3652,8 @@
         </p:nvSpPr>
         <p:spPr>
           <a:xfrm>
-            <a:off x="896112" y="2194560"/>
-            <a:ext cx="2139696" cy="4023360"/>
+            <a:off x="868680" y="2194560"/>
+            <a:ext cx="2240280" cy="4023360"/>
           </a:xfrm>
           <a:prstGeom prst="rect">
             <a:avLst/>
@@ -3667,10 +3667,23 @@
           <a:lstStyle/>
           <a:p>
             <a:pPr>
-              <a:spcAft>
-                <a:spcPts val="800"/>
-              </a:spcAft>
-              <a:defRPr sz="1500" b="1">
+              <a:defRPr sz="2200" b="1">
+                <a:solidFill>
+                  <a:srgbClr val="FFFFFF"/>
+                </a:solidFill>
+                <a:latin typeface="Inter"/>
+              </a:defRPr>
+            </a:pPr>
+            <a:r>
+              <a:t>⚡ Next.js 15</a:t>
+            </a:r>
+          </a:p>
+          <a:p>
+            <a:pPr>
+              <a:spcAft>
+                <a:spcPts val="1400"/>
+              </a:spcAft>
+              <a:defRPr sz="1400">
                 <a:solidFill>
                   <a:srgbClr val="6366F1"/>
                 </a:solidFill>
@@ -3678,48 +3691,71 @@
               </a:defRPr>
             </a:pPr>
             <a:r>
-              <a:t>1. AI PAIRING</a:t>
-            </a:r>
-          </a:p>
-          <a:p>
-            <a:pPr>
-              <a:spcAft>
-                <a:spcPts val="1800"/>
-              </a:spcAft>
-              <a:defRPr sz="2200" b="1">
-                <a:solidFill>
-                  <a:srgbClr val="FFFFFF"/>
-                </a:solidFill>
-                <a:latin typeface="Inter"/>
-              </a:defRPr>
-            </a:pPr>
-            <a:r>
-              <a:t>🤖 VS Code &amp;</a:t>
-            </a:r>
-            <a:br/>
-            <a:r>
-              <a:t>GitHub Copilot</a:t>
-            </a:r>
-          </a:p>
-          <a:p>
-            <a:pPr>
-              <a:defRPr sz="1900">
-                <a:solidFill>
-                  <a:srgbClr val="E2E8F0"/>
-                </a:solidFill>
-                <a:latin typeface="Inter"/>
-              </a:defRPr>
-            </a:pPr>
-            <a:r>
-              <a:t>Kodi me ndihmën e AI.</a:t>
-            </a:r>
-            <a:br/>
-            <a:r>
-              <a:t>Shkruajmë prompt-e</a:t>
-            </a:r>
-            <a:br/>
-            <a:r>
-              <a:t>dhe logjikë biznesi.</a:t>
+              <a:t>Frontend &amp; Fullstack</a:t>
+            </a:r>
+          </a:p>
+          <a:p>
+            <a:pPr>
+              <a:spcAft>
+                <a:spcPts val="1000"/>
+              </a:spcAft>
+              <a:defRPr sz="1700">
+                <a:solidFill>
+                  <a:srgbClr val="E2E8F0"/>
+                </a:solidFill>
+                <a:latin typeface="Inter"/>
+              </a:defRPr>
+            </a:pPr>
+            <a:r>
+              <a:t>• React 19 &amp; App Router</a:t>
+            </a:r>
+          </a:p>
+          <a:p>
+            <a:pPr>
+              <a:spcAft>
+                <a:spcPts val="1000"/>
+              </a:spcAft>
+              <a:defRPr sz="1700">
+                <a:solidFill>
+                  <a:srgbClr val="E2E8F0"/>
+                </a:solidFill>
+                <a:latin typeface="Inter"/>
+              </a:defRPr>
+            </a:pPr>
+            <a:r>
+              <a:t>• Server Components për shpejtësi maksimale</a:t>
+            </a:r>
+          </a:p>
+          <a:p>
+            <a:pPr>
+              <a:spcAft>
+                <a:spcPts val="1000"/>
+              </a:spcAft>
+              <a:defRPr sz="1700">
+                <a:solidFill>
+                  <a:srgbClr val="E2E8F0"/>
+                </a:solidFill>
+                <a:latin typeface="Inter"/>
+              </a:defRPr>
+            </a:pPr>
+            <a:r>
+              <a:t>• PWA Manifest &amp; Service Workers</a:t>
+            </a:r>
+          </a:p>
+          <a:p>
+            <a:pPr>
+              <a:spcAft>
+                <a:spcPts val="1000"/>
+              </a:spcAft>
+              <a:defRPr sz="1700">
+                <a:solidFill>
+                  <a:srgbClr val="E2E8F0"/>
+                </a:solidFill>
+                <a:latin typeface="Inter"/>
+              </a:defRPr>
+            </a:pPr>
+            <a:r>
+              <a:t>• Optimizim Touch-First me Tailwind</a:t>
             </a:r>
           </a:p>
         </p:txBody>
@@ -3732,8 +3768,169 @@
         </p:nvSpPr>
         <p:spPr>
           <a:xfrm>
-            <a:off x="3456432" y="2011680"/>
-            <a:ext cx="2468880" cy="4389120"/>
+            <a:off x="3465576" y="2011680"/>
+            <a:ext cx="2514600" cy="4389120"/>
+          </a:xfrm>
+          <a:prstGeom prst="roundRect">
+            <a:avLst/>
+          </a:prstGeom>
+          <a:solidFill>
+            <a:srgbClr val="141E34"/>
+          </a:solidFill>
+          <a:ln w="31750">
+            <a:solidFill>
+              <a:srgbClr val="10B981"/>
+            </a:solidFill>
+          </a:ln>
+        </p:spPr>
+        <p:style>
+          <a:lnRef idx="1">
+            <a:schemeClr val="accent1"/>
+          </a:lnRef>
+          <a:fillRef idx="3">
+            <a:schemeClr val="accent1"/>
+          </a:fillRef>
+          <a:effectRef idx="2">
+            <a:schemeClr val="accent1"/>
+          </a:effectRef>
+          <a:fontRef idx="minor">
+            <a:schemeClr val="lt1"/>
+          </a:fontRef>
+        </p:style>
+        <p:txBody>
+          <a:bodyPr rtlCol="0" anchor="ctr"/>
+          <a:lstStyle/>
+          <a:p>
+            <a:pPr algn="ctr"/>
+          </a:p>
+        </p:txBody>
+      </p:sp>
+      <p:sp>
+        <p:nvSpPr>
+          <p:cNvPr id="9" name="TextBox 8"/>
+          <p:cNvSpPr txBox="1"/>
+          <p:nvPr/>
+        </p:nvSpPr>
+        <p:spPr>
+          <a:xfrm>
+            <a:off x="3602736" y="2194560"/>
+            <a:ext cx="2240280" cy="4023360"/>
+          </a:xfrm>
+          <a:prstGeom prst="rect">
+            <a:avLst/>
+          </a:prstGeom>
+          <a:noFill/>
+        </p:spPr>
+        <p:txBody>
+          <a:bodyPr wrap="square">
+            <a:spAutoFit/>
+          </a:bodyPr>
+          <a:lstStyle/>
+          <a:p>
+            <a:pPr>
+              <a:defRPr sz="2200" b="1">
+                <a:solidFill>
+                  <a:srgbClr val="FFFFFF"/>
+                </a:solidFill>
+                <a:latin typeface="Inter"/>
+              </a:defRPr>
+            </a:pPr>
+            <a:r>
+              <a:t>🗄️ Supabase</a:t>
+            </a:r>
+          </a:p>
+          <a:p>
+            <a:pPr>
+              <a:spcAft>
+                <a:spcPts val="1400"/>
+              </a:spcAft>
+              <a:defRPr sz="1400">
+                <a:solidFill>
+                  <a:srgbClr val="10B981"/>
+                </a:solidFill>
+                <a:latin typeface="Inter"/>
+              </a:defRPr>
+            </a:pPr>
+            <a:r>
+              <a:t>Baza e të Dhënave &amp; Auth</a:t>
+            </a:r>
+          </a:p>
+          <a:p>
+            <a:pPr>
+              <a:spcAft>
+                <a:spcPts val="1000"/>
+              </a:spcAft>
+              <a:defRPr sz="1700">
+                <a:solidFill>
+                  <a:srgbClr val="E2E8F0"/>
+                </a:solidFill>
+                <a:latin typeface="Inter"/>
+              </a:defRPr>
+            </a:pPr>
+            <a:r>
+              <a:t>• PostgreSQL me performancë të lartë</a:t>
+            </a:r>
+          </a:p>
+          <a:p>
+            <a:pPr>
+              <a:spcAft>
+                <a:spcPts val="1000"/>
+              </a:spcAft>
+              <a:defRPr sz="1700">
+                <a:solidFill>
+                  <a:srgbClr val="E2E8F0"/>
+                </a:solidFill>
+                <a:latin typeface="Inter"/>
+              </a:defRPr>
+            </a:pPr>
+            <a:r>
+              <a:t>• Row-Level Security (RLS) për siguri</a:t>
+            </a:r>
+          </a:p>
+          <a:p>
+            <a:pPr>
+              <a:spcAft>
+                <a:spcPts val="1000"/>
+              </a:spcAft>
+              <a:defRPr sz="1700">
+                <a:solidFill>
+                  <a:srgbClr val="E2E8F0"/>
+                </a:solidFill>
+                <a:latin typeface="Inter"/>
+              </a:defRPr>
+            </a:pPr>
+            <a:r>
+              <a:t>• Autentikim i plotë (Email, Google, Phone)</a:t>
+            </a:r>
+          </a:p>
+          <a:p>
+            <a:pPr>
+              <a:spcAft>
+                <a:spcPts val="1000"/>
+              </a:spcAft>
+              <a:defRPr sz="1700">
+                <a:solidFill>
+                  <a:srgbClr val="E2E8F0"/>
+                </a:solidFill>
+                <a:latin typeface="Inter"/>
+              </a:defRPr>
+            </a:pPr>
+            <a:r>
+              <a:t>• Realtime Subscriptions për porositë</a:t>
+            </a:r>
+          </a:p>
+        </p:txBody>
+      </p:sp>
+      <p:sp>
+        <p:nvSpPr>
+          <p:cNvPr id="10" name="Rounded Rectangle 9"/>
+          <p:cNvSpPr/>
+          <p:nvPr/>
+        </p:nvSpPr>
+        <p:spPr>
+          <a:xfrm>
+            <a:off x="6199632" y="2011680"/>
+            <a:ext cx="2514600" cy="4389120"/>
           </a:xfrm>
           <a:prstGeom prst="roundRect">
             <a:avLst/>
@@ -3771,14 +3968,14 @@
       </p:sp>
       <p:sp>
         <p:nvSpPr>
-          <p:cNvPr id="9" name="TextBox 8"/>
+          <p:cNvPr id="11" name="TextBox 10"/>
           <p:cNvSpPr txBox="1"/>
           <p:nvPr/>
         </p:nvSpPr>
         <p:spPr>
           <a:xfrm>
-            <a:off x="3621024" y="2194560"/>
-            <a:ext cx="2139696" cy="4023360"/>
+            <a:off x="6336792" y="2194560"/>
+            <a:ext cx="2240280" cy="4023360"/>
           </a:xfrm>
           <a:prstGeom prst="rect">
             <a:avLst/>
@@ -3792,10 +3989,23 @@
           <a:lstStyle/>
           <a:p>
             <a:pPr>
-              <a:spcAft>
-                <a:spcPts val="800"/>
-              </a:spcAft>
-              <a:defRPr sz="1500" b="1">
+              <a:defRPr sz="2200" b="1">
+                <a:solidFill>
+                  <a:srgbClr val="FFFFFF"/>
+                </a:solidFill>
+                <a:latin typeface="Inter"/>
+              </a:defRPr>
+            </a:pPr>
+            <a:r>
+              <a:t>🤖 GitHub Copilot</a:t>
+            </a:r>
+          </a:p>
+          <a:p>
+            <a:pPr>
+              <a:spcAft>
+                <a:spcPts val="1400"/>
+              </a:spcAft>
+              <a:defRPr sz="1400">
                 <a:solidFill>
                   <a:srgbClr val="38BDF8"/>
                 </a:solidFill>
@@ -3803,173 +4013,71 @@
               </a:defRPr>
             </a:pPr>
             <a:r>
-              <a:t>2. KORNIZA</a:t>
-            </a:r>
-          </a:p>
-          <a:p>
-            <a:pPr>
-              <a:spcAft>
-                <a:spcPts val="1800"/>
-              </a:spcAft>
-              <a:defRPr sz="2200" b="1">
-                <a:solidFill>
-                  <a:srgbClr val="FFFFFF"/>
-                </a:solidFill>
-                <a:latin typeface="Inter"/>
-              </a:defRPr>
-            </a:pPr>
-            <a:r>
-              <a:t>⚡ Next.js 15 &amp;</a:t>
-            </a:r>
-            <a:br/>
-            <a:r>
-              <a:t>React 19</a:t>
-            </a:r>
-          </a:p>
-          <a:p>
-            <a:pPr>
-              <a:defRPr sz="1900">
-                <a:solidFill>
-                  <a:srgbClr val="E2E8F0"/>
-                </a:solidFill>
-                <a:latin typeface="Inter"/>
-              </a:defRPr>
-            </a:pPr>
-            <a:r>
-              <a:t>App Router modern,</a:t>
-            </a:r>
-            <a:br/>
-            <a:r>
-              <a:t>Tailwind CSS, dhe</a:t>
-            </a:r>
-            <a:br/>
-            <a:r>
-              <a:t>Touch-First UI (48px).</a:t>
-            </a:r>
-          </a:p>
-        </p:txBody>
-      </p:sp>
-      <p:sp>
-        <p:nvSpPr>
-          <p:cNvPr id="10" name="Rounded Rectangle 9"/>
-          <p:cNvSpPr/>
-          <p:nvPr/>
-        </p:nvSpPr>
-        <p:spPr>
-          <a:xfrm>
-            <a:off x="6181344" y="2011680"/>
-            <a:ext cx="2468880" cy="4389120"/>
-          </a:xfrm>
-          <a:prstGeom prst="roundRect">
-            <a:avLst/>
-          </a:prstGeom>
-          <a:solidFill>
-            <a:srgbClr val="141E34"/>
-          </a:solidFill>
-          <a:ln w="31750">
-            <a:solidFill>
-              <a:srgbClr val="10B981"/>
-            </a:solidFill>
-          </a:ln>
-        </p:spPr>
-        <p:style>
-          <a:lnRef idx="1">
-            <a:schemeClr val="accent1"/>
-          </a:lnRef>
-          <a:fillRef idx="3">
-            <a:schemeClr val="accent1"/>
-          </a:fillRef>
-          <a:effectRef idx="2">
-            <a:schemeClr val="accent1"/>
-          </a:effectRef>
-          <a:fontRef idx="minor">
-            <a:schemeClr val="lt1"/>
-          </a:fontRef>
-        </p:style>
-        <p:txBody>
-          <a:bodyPr rtlCol="0" anchor="ctr"/>
-          <a:lstStyle/>
-          <a:p>
-            <a:pPr algn="ctr"/>
-          </a:p>
-        </p:txBody>
-      </p:sp>
-      <p:sp>
-        <p:nvSpPr>
-          <p:cNvPr id="11" name="TextBox 10"/>
-          <p:cNvSpPr txBox="1"/>
-          <p:nvPr/>
-        </p:nvSpPr>
-        <p:spPr>
-          <a:xfrm>
-            <a:off x="6345936" y="2194560"/>
-            <a:ext cx="2139696" cy="4023360"/>
-          </a:xfrm>
-          <a:prstGeom prst="rect">
-            <a:avLst/>
-          </a:prstGeom>
-          <a:noFill/>
-        </p:spPr>
-        <p:txBody>
-          <a:bodyPr wrap="square">
-            <a:spAutoFit/>
-          </a:bodyPr>
-          <a:lstStyle/>
-          <a:p>
-            <a:pPr>
-              <a:spcAft>
-                <a:spcPts val="800"/>
-              </a:spcAft>
-              <a:defRPr sz="1500" b="1">
-                <a:solidFill>
-                  <a:srgbClr val="10B981"/>
-                </a:solidFill>
-                <a:latin typeface="Inter"/>
-              </a:defRPr>
-            </a:pPr>
-            <a:r>
-              <a:t>3. DATABAZA</a:t>
-            </a:r>
-          </a:p>
-          <a:p>
-            <a:pPr>
-              <a:spcAft>
-                <a:spcPts val="1800"/>
-              </a:spcAft>
-              <a:defRPr sz="2200" b="1">
-                <a:solidFill>
-                  <a:srgbClr val="FFFFFF"/>
-                </a:solidFill>
-                <a:latin typeface="Inter"/>
-              </a:defRPr>
-            </a:pPr>
-            <a:r>
-              <a:t>🗄️ Supabase</a:t>
-            </a:r>
-            <a:br/>
-            <a:r>
-              <a:t>(PostgreSQL)</a:t>
-            </a:r>
-          </a:p>
-          <a:p>
-            <a:pPr>
-              <a:defRPr sz="1900">
-                <a:solidFill>
-                  <a:srgbClr val="E2E8F0"/>
-                </a:solidFill>
-                <a:latin typeface="Inter"/>
-              </a:defRPr>
-            </a:pPr>
-            <a:r>
-              <a:t>Databaza në Cloud,</a:t>
-            </a:r>
-            <a:br/>
-            <a:r>
-              <a:t>Autentikim i gatshëm</a:t>
-            </a:r>
-            <a:br/>
-            <a:r>
-              <a:t>dhe Row-Level Security.</a:t>
+              <a:t>AI Pair Programmer</a:t>
+            </a:r>
+          </a:p>
+          <a:p>
+            <a:pPr>
+              <a:spcAft>
+                <a:spcPts val="1000"/>
+              </a:spcAft>
+              <a:defRPr sz="1700">
+                <a:solidFill>
+                  <a:srgbClr val="E2E8F0"/>
+                </a:solidFill>
+                <a:latin typeface="Inter"/>
+              </a:defRPr>
+            </a:pPr>
+            <a:r>
+              <a:t>• Asistencë inteligjente në çdo rresht kodi</a:t>
+            </a:r>
+          </a:p>
+          <a:p>
+            <a:pPr>
+              <a:spcAft>
+                <a:spcPts val="1000"/>
+              </a:spcAft>
+              <a:defRPr sz="1700">
+                <a:solidFill>
+                  <a:srgbClr val="E2E8F0"/>
+                </a:solidFill>
+                <a:latin typeface="Inter"/>
+              </a:defRPr>
+            </a:pPr>
+            <a:r>
+              <a:t>• Gjenerim i skemave SQL dhe testeve</a:t>
+            </a:r>
+          </a:p>
+          <a:p>
+            <a:pPr>
+              <a:spcAft>
+                <a:spcPts val="1000"/>
+              </a:spcAft>
+              <a:defRPr sz="1700">
+                <a:solidFill>
+                  <a:srgbClr val="E2E8F0"/>
+                </a:solidFill>
+                <a:latin typeface="Inter"/>
+              </a:defRPr>
+            </a:pPr>
+            <a:r>
+              <a:t>• Përshpejton zhvillimin e veçorive 3x</a:t>
+            </a:r>
+          </a:p>
+          <a:p>
+            <a:pPr>
+              <a:spcAft>
+                <a:spcPts val="1000"/>
+              </a:spcAft>
+              <a:defRPr sz="1700">
+                <a:solidFill>
+                  <a:srgbClr val="E2E8F0"/>
+                </a:solidFill>
+                <a:latin typeface="Inter"/>
+              </a:defRPr>
+            </a:pPr>
+            <a:r>
+              <a:t>• Mjet profesional i industrisë globale</a:t>
             </a:r>
           </a:p>
         </p:txBody>
@@ -3982,8 +4090,8 @@
         </p:nvSpPr>
         <p:spPr>
           <a:xfrm>
-            <a:off x="8906256" y="2011680"/>
-            <a:ext cx="2468880" cy="4389120"/>
+            <a:off x="8933688" y="2011680"/>
+            <a:ext cx="2514600" cy="4389120"/>
           </a:xfrm>
           <a:prstGeom prst="roundRect">
             <a:avLst/>
@@ -4028,7 +4136,7 @@
         <p:spPr>
           <a:xfrm>
             <a:off x="9070848" y="2194560"/>
-            <a:ext cx="2139696" cy="4023360"/>
+            <a:ext cx="2240280" cy="4023360"/>
           </a:xfrm>
           <a:prstGeom prst="rect">
             <a:avLst/>
@@ -4042,10 +4150,23 @@
           <a:lstStyle/>
           <a:p>
             <a:pPr>
-              <a:spcAft>
-                <a:spcPts val="800"/>
-              </a:spcAft>
-              <a:defRPr sz="1500" b="1">
+              <a:defRPr sz="2200" b="1">
+                <a:solidFill>
+                  <a:srgbClr val="FFFFFF"/>
+                </a:solidFill>
+                <a:latin typeface="Inter"/>
+              </a:defRPr>
+            </a:pPr>
+            <a:r>
+              <a:t>▲ Vercel Cloud</a:t>
+            </a:r>
+          </a:p>
+          <a:p>
+            <a:pPr>
+              <a:spcAft>
+                <a:spcPts val="1400"/>
+              </a:spcAft>
+              <a:defRPr sz="1400">
                 <a:solidFill>
                   <a:srgbClr val="F59E0B"/>
                 </a:solidFill>
@@ -4053,48 +4174,71 @@
               </a:defRPr>
             </a:pPr>
             <a:r>
-              <a:t>4. DEPLOYMENT</a:t>
-            </a:r>
-          </a:p>
-          <a:p>
-            <a:pPr>
-              <a:spcAft>
-                <a:spcPts val="1800"/>
-              </a:spcAft>
-              <a:defRPr sz="2200" b="1">
-                <a:solidFill>
-                  <a:srgbClr val="FFFFFF"/>
-                </a:solidFill>
-                <a:latin typeface="Inter"/>
-              </a:defRPr>
-            </a:pPr>
-            <a:r>
-              <a:t>🚀 Vercel Cloud</a:t>
-            </a:r>
-            <a:br/>
-            <a:r>
-              <a:t>Global Edge</a:t>
-            </a:r>
-          </a:p>
-          <a:p>
-            <a:pPr>
-              <a:defRPr sz="1900">
-                <a:solidFill>
-                  <a:srgbClr val="E2E8F0"/>
-                </a:solidFill>
-                <a:latin typeface="Inter"/>
-              </a:defRPr>
-            </a:pPr>
-            <a:r>
-              <a:t>Publikim automatik me</a:t>
-            </a:r>
-            <a:br/>
-            <a:r>
-              <a:t>çdo git push direkt në</a:t>
-            </a:r>
-            <a:br/>
-            <a:r>
-              <a:t>telefonat e përdoruesve.</a:t>
+              <a:t>Publikimi &amp; CI/CD</a:t>
+            </a:r>
+          </a:p>
+          <a:p>
+            <a:pPr>
+              <a:spcAft>
+                <a:spcPts val="1000"/>
+              </a:spcAft>
+              <a:defRPr sz="1700">
+                <a:solidFill>
+                  <a:srgbClr val="E2E8F0"/>
+                </a:solidFill>
+                <a:latin typeface="Inter"/>
+              </a:defRPr>
+            </a:pPr>
+            <a:r>
+              <a:t>• Vendosje globale në Edge Network</a:t>
+            </a:r>
+          </a:p>
+          <a:p>
+            <a:pPr>
+              <a:spcAft>
+                <a:spcPts val="1000"/>
+              </a:spcAft>
+              <a:defRPr sz="1700">
+                <a:solidFill>
+                  <a:srgbClr val="E2E8F0"/>
+                </a:solidFill>
+                <a:latin typeface="Inter"/>
+              </a:defRPr>
+            </a:pPr>
+            <a:r>
+              <a:t>• Publikim automatik në çdo git push</a:t>
+            </a:r>
+          </a:p>
+          <a:p>
+            <a:pPr>
+              <a:spcAft>
+                <a:spcPts val="1000"/>
+              </a:spcAft>
+              <a:defRPr sz="1700">
+                <a:solidFill>
+                  <a:srgbClr val="E2E8F0"/>
+                </a:solidFill>
+                <a:latin typeface="Inter"/>
+              </a:defRPr>
+            </a:pPr>
+            <a:r>
+              <a:t>• Certifikatë SSL (HTTPS) falas</a:t>
+            </a:r>
+          </a:p>
+          <a:p>
+            <a:pPr>
+              <a:spcAft>
+                <a:spcPts val="1000"/>
+              </a:spcAft>
+              <a:defRPr sz="1700">
+                <a:solidFill>
+                  <a:srgbClr val="E2E8F0"/>
+                </a:solidFill>
+                <a:latin typeface="Inter"/>
+              </a:defRPr>
+            </a:pPr>
+            <a:r>
+              <a:t>• Lighthouse Score 100/100</a:t>
             </a:r>
           </a:p>
         </p:txBody>
@@ -4191,7 +4335,7 @@
               </a:defRPr>
             </a:pPr>
             <a:r>
-              <a:t>INTEGRITETI &amp; ETIKA</a:t>
+              <a:t>INTELIGJENCA ARTIFICIALE NË KODIM</a:t>
             </a:r>
           </a:p>
         </p:txBody>
@@ -4227,7 +4371,7 @@
               </a:defRPr>
             </a:pPr>
             <a:r>
-              <a:t>Ju jeni Arkitekti, Copilot është Ndihmësi!</a:t>
+              <a:t>GitHub Copilot: Bashkë-Piloti Juaj, Jo Zëvendësuesi!</a:t>
             </a:r>
           </a:p>
         </p:txBody>
@@ -4255,15 +4399,15 @@
           <a:lstStyle/>
           <a:p>
             <a:pPr>
-              <a:defRPr sz="2200">
-                <a:solidFill>
-                  <a:srgbClr val="E2E8F0"/>
-                </a:solidFill>
-                <a:latin typeface="Inter"/>
-              </a:defRPr>
-            </a:pPr>
-            <a:r>
-              <a:t>Politika e qartë e Kolegjit AAB për përdorimin profesional të AI në zhvillim.</a:t>
+              <a:defRPr sz="2100">
+                <a:solidFill>
+                  <a:srgbClr val="E2E8F0"/>
+                </a:solidFill>
+                <a:latin typeface="Inter"/>
+              </a:defRPr>
+            </a:pPr>
+            <a:r>
+              <a:t>Përdorni AI si përshpejtues profesional — por kodi dhe vendimet mbeten tuajat.</a:t>
             </a:r>
           </a:p>
         </p:txBody>
@@ -4287,7 +4431,7 @@
           </a:solidFill>
           <a:ln w="31750">
             <a:solidFill>
-              <a:srgbClr val="10B981"/>
+              <a:srgbClr val="38BDF8"/>
             </a:solidFill>
           </a:ln>
         </p:spPr>
@@ -4341,61 +4485,77 @@
               </a:spcAft>
               <a:defRPr sz="2500" b="1">
                 <a:solidFill>
-                  <a:srgbClr val="10B981"/>
-                </a:solidFill>
-                <a:latin typeface="Inter"/>
-              </a:defRPr>
-            </a:pPr>
-            <a:r>
-              <a:t>✅ Si Duhet Përdorur Copilot</a:t>
-            </a:r>
-          </a:p>
-          <a:p>
-            <a:pPr>
-              <a:spcAft>
-                <a:spcPts val="1400"/>
-              </a:spcAft>
-              <a:defRPr sz="2000">
-                <a:solidFill>
-                  <a:srgbClr val="E2E8F0"/>
-                </a:solidFill>
-                <a:latin typeface="Inter"/>
-              </a:defRPr>
-            </a:pPr>
-            <a:r>
-              <a:t>• Për të përshpejtuar shkrimin e sintaksës dhe kodeve standarde.</a:t>
-            </a:r>
-          </a:p>
-          <a:p>
-            <a:pPr>
-              <a:spcAft>
-                <a:spcPts val="1400"/>
-              </a:spcAft>
-              <a:defRPr sz="2000">
-                <a:solidFill>
-                  <a:srgbClr val="E2E8F0"/>
-                </a:solidFill>
-                <a:latin typeface="Inter"/>
-              </a:defRPr>
-            </a:pPr>
-            <a:r>
-              <a:t>• Për të kërkuar ide, optimizime dhe shpjegime të gabimeve teknike.</a:t>
-            </a:r>
-          </a:p>
-          <a:p>
-            <a:pPr>
-              <a:spcAft>
-                <a:spcPts val="1400"/>
-              </a:spcAft>
-              <a:defRPr sz="2000">
-                <a:solidFill>
-                  <a:srgbClr val="E2E8F0"/>
-                </a:solidFill>
-                <a:latin typeface="Inter"/>
-              </a:defRPr>
-            </a:pPr>
-            <a:r>
-              <a:t>• Rregulla e Artë: Çdo rresht kod duhet ta kuptoni 100% dhe të jeni gati ta shpjegoni para profesorit!</a:t>
+                  <a:srgbClr val="38BDF8"/>
+                </a:solidFill>
+                <a:latin typeface="Inter"/>
+              </a:defRPr>
+            </a:pPr>
+            <a:r>
+              <a:t>✅ Si Ta Përdorni me Sukses?</a:t>
+            </a:r>
+          </a:p>
+          <a:p>
+            <a:pPr>
+              <a:spcAft>
+                <a:spcPts val="1200"/>
+              </a:spcAft>
+              <a:defRPr sz="1800">
+                <a:solidFill>
+                  <a:srgbClr val="E2E8F0"/>
+                </a:solidFill>
+                <a:latin typeface="Inter"/>
+              </a:defRPr>
+            </a:pPr>
+            <a:r>
+              <a:t>• Gjenerim Komponentësh: Përshkruani UI-në në koment dhe lini Copilot të gjenerojë skeleton-in me Tailwind.</a:t>
+            </a:r>
+          </a:p>
+          <a:p>
+            <a:pPr>
+              <a:spcAft>
+                <a:spcPts val="1200"/>
+              </a:spcAft>
+              <a:defRPr sz="1800">
+                <a:solidFill>
+                  <a:srgbClr val="E2E8F0"/>
+                </a:solidFill>
+                <a:latin typeface="Inter"/>
+              </a:defRPr>
+            </a:pPr>
+            <a:r>
+              <a:t>• Skema dhe Query SQL: Ndihmon në shkrimin e query-ve komplekse për Supabase.</a:t>
+            </a:r>
+          </a:p>
+          <a:p>
+            <a:pPr>
+              <a:spcAft>
+                <a:spcPts val="1200"/>
+              </a:spcAft>
+              <a:defRPr sz="1800">
+                <a:solidFill>
+                  <a:srgbClr val="E2E8F0"/>
+                </a:solidFill>
+                <a:latin typeface="Inter"/>
+              </a:defRPr>
+            </a:pPr>
+            <a:r>
+              <a:t>• Zgjidhje të Shpejta: Shpjegon gabimet në konzollë dhe propozon zgjidhje të menjëhershme.</a:t>
+            </a:r>
+          </a:p>
+          <a:p>
+            <a:pPr>
+              <a:spcAft>
+                <a:spcPts val="1200"/>
+              </a:spcAft>
+              <a:defRPr sz="1800">
+                <a:solidFill>
+                  <a:srgbClr val="E2E8F0"/>
+                </a:solidFill>
+                <a:latin typeface="Inter"/>
+              </a:defRPr>
+            </a:pPr>
+            <a:r>
+              <a:t>• Testim i Automatizuar: Gjeneron teste njësi dhe teste integrimi me Playwright.</a:t>
             </a:r>
           </a:p>
         </p:txBody>
@@ -4419,7 +4579,7 @@
           </a:solidFill>
           <a:ln w="31750">
             <a:solidFill>
-              <a:srgbClr val="EF4444"/>
+              <a:srgbClr val="F59E0B"/>
             </a:solidFill>
           </a:ln>
         </p:spPr>
@@ -4473,61 +4633,77 @@
               </a:spcAft>
               <a:defRPr sz="2500" b="1">
                 <a:solidFill>
-                  <a:srgbClr val="EF4444"/>
-                </a:solidFill>
-                <a:latin typeface="Inter"/>
-              </a:defRPr>
-            </a:pPr>
-            <a:r>
-              <a:t>❌ Çfarë Çon në Dështim</a:t>
-            </a:r>
-          </a:p>
-          <a:p>
-            <a:pPr>
-              <a:spcAft>
-                <a:spcPts val="1400"/>
-              </a:spcAft>
-              <a:defRPr sz="2000">
-                <a:solidFill>
-                  <a:srgbClr val="E2E8F0"/>
-                </a:solidFill>
-                <a:latin typeface="Inter"/>
-              </a:defRPr>
-            </a:pPr>
-            <a:r>
-              <a:t>• Kopjimi i verbër i kodit të gjeneruar pa e ditur si funksionon.</a:t>
-            </a:r>
-          </a:p>
-          <a:p>
-            <a:pPr>
-              <a:spcAft>
-                <a:spcPts val="1400"/>
-              </a:spcAft>
-              <a:defRPr sz="2000">
-                <a:solidFill>
-                  <a:srgbClr val="E2E8F0"/>
-                </a:solidFill>
-                <a:latin typeface="Inter"/>
-              </a:defRPr>
-            </a:pPr>
-            <a:r>
-              <a:t>• Mungesa e njohurive për të mbrojtur logjikën në Demo Day.</a:t>
-            </a:r>
-          </a:p>
-          <a:p>
-            <a:pPr>
-              <a:spcAft>
-                <a:spcPts val="1400"/>
-              </a:spcAft>
-              <a:defRPr sz="2000">
-                <a:solidFill>
-                  <a:srgbClr val="E2E8F0"/>
-                </a:solidFill>
-                <a:latin typeface="Inter"/>
-              </a:defRPr>
-            </a:pPr>
-            <a:r>
-              <a:t>• Kujtesë: Në mbrojtjen finale nuk vlerësohet kush gjeneroi më shumë kod, por KUPTIMI TEKNIK!</a:t>
+                  <a:srgbClr val="F59E0B"/>
+                </a:solidFill>
+                <a:latin typeface="Inter"/>
+              </a:defRPr>
+            </a:pPr>
+            <a:r>
+              <a:t>⚠️ Rregulli i Artë në Demo Day</a:t>
+            </a:r>
+          </a:p>
+          <a:p>
+            <a:pPr>
+              <a:spcAft>
+                <a:spcPts val="1200"/>
+              </a:spcAft>
+              <a:defRPr sz="1800">
+                <a:solidFill>
+                  <a:srgbClr val="E2E8F0"/>
+                </a:solidFill>
+                <a:latin typeface="Inter"/>
+              </a:defRPr>
+            </a:pPr>
+            <a:r>
+              <a:t>• Ju Mbani Përgjegjësi: Nëse Copilot shkruan një rresht kodi, ju duhet të dini ta shpjegoni çdo simbol të tij.</a:t>
+            </a:r>
+          </a:p>
+          <a:p>
+            <a:pPr>
+              <a:spcAft>
+                <a:spcPts val="1200"/>
+              </a:spcAft>
+              <a:defRPr sz="1800">
+                <a:solidFill>
+                  <a:srgbClr val="E2E8F0"/>
+                </a:solidFill>
+                <a:latin typeface="Inter"/>
+              </a:defRPr>
+            </a:pPr>
+            <a:r>
+              <a:t>• Pyetje Teknike Individuale: Gjatë mbrojtjes, pyetjet do të fokusohen te arkitektura: 'Pse ky hook?', 'Si funksionon RLS?'</a:t>
+            </a:r>
+          </a:p>
+          <a:p>
+            <a:pPr>
+              <a:spcAft>
+                <a:spcPts val="1200"/>
+              </a:spcAft>
+              <a:defRPr sz="1800">
+                <a:solidFill>
+                  <a:srgbClr val="E2E8F0"/>
+                </a:solidFill>
+                <a:latin typeface="Inter"/>
+              </a:defRPr>
+            </a:pPr>
+            <a:r>
+              <a:t>• Kodi pa Kuptim Zbret Pikë: Kodi i kopjuar verbërisht pa u kuptuar rezulton në penalizim të menjëhershëm.</a:t>
+            </a:r>
+          </a:p>
+          <a:p>
+            <a:pPr>
+              <a:spcAft>
+                <a:spcPts val="1200"/>
+              </a:spcAft>
+              <a:defRPr sz="1800">
+                <a:solidFill>
+                  <a:srgbClr val="E2E8F0"/>
+                </a:solidFill>
+                <a:latin typeface="Inter"/>
+              </a:defRPr>
+            </a:pPr>
+            <a:r>
+              <a:t>• Ju Jeni Inxhinieri: Copilot është thjesht një kalkulator i avancuar. Inxhinieri i vërtetë jeni JU!</a:t>
             </a:r>
           </a:p>
         </p:txBody>
@@ -4688,15 +4864,15 @@
           <a:lstStyle/>
           <a:p>
             <a:pPr>
-              <a:defRPr sz="2200">
-                <a:solidFill>
-                  <a:srgbClr val="E2E8F0"/>
-                </a:solidFill>
-                <a:latin typeface="Inter"/>
-              </a:defRPr>
-            </a:pPr>
-            <a:r>
-              <a:t>Llogaridhënie e qartë — diferencojmë vijueshmërinë nga ata që kërkojnë vetëm një notë.</a:t>
+              <a:defRPr sz="2100">
+                <a:solidFill>
+                  <a:srgbClr val="E2E8F0"/>
+                </a:solidFill>
+                <a:latin typeface="Inter"/>
+              </a:defRPr>
+            </a:pPr>
+            <a:r>
+              <a:t>Llogaridhënie e qartë — diferencojmë vijueshmërinë aktive nga ata që kërkojnë vetëm një notë.</a:t>
             </a:r>
           </a:p>
         </p:txBody>
@@ -4754,8 +4930,8 @@
         </p:nvSpPr>
         <p:spPr>
           <a:xfrm>
-            <a:off x="914400" y="2194560"/>
-            <a:ext cx="3017520" cy="4023360"/>
+            <a:off x="868680" y="2194560"/>
+            <a:ext cx="2240280" cy="4023360"/>
           </a:xfrm>
           <a:prstGeom prst="rect">
             <a:avLst/>
@@ -4769,7 +4945,7 @@
           <a:lstStyle/>
           <a:p>
             <a:pPr>
-              <a:defRPr sz="5400" b="1">
+              <a:defRPr sz="5000" b="1">
                 <a:solidFill>
                   <a:srgbClr val="10B981"/>
                 </a:solidFill>
@@ -4783,9 +4959,9 @@
           <a:p>
             <a:pPr>
               <a:spcAft>
-                <a:spcPts val="1400"/>
-              </a:spcAft>
-              <a:defRPr sz="2400" b="1">
+                <a:spcPts val="1200"/>
+              </a:spcAft>
+              <a:defRPr sz="2100" b="1">
                 <a:solidFill>
                   <a:srgbClr val="FFFFFF"/>
                 </a:solidFill>
@@ -4799,9 +4975,9 @@
           <a:p>
             <a:pPr>
               <a:spcAft>
-                <a:spcPts val="1000"/>
-              </a:spcAft>
-              <a:defRPr sz="2000">
+                <a:spcPts val="800"/>
+              </a:spcAft>
+              <a:defRPr sz="1700">
                 <a:solidFill>
                   <a:srgbClr val="E2E8F0"/>
                 </a:solidFill>
@@ -4815,9 +4991,9 @@
           <a:p>
             <a:pPr>
               <a:spcAft>
-                <a:spcPts val="1000"/>
-              </a:spcAft>
-              <a:defRPr sz="2000">
+                <a:spcPts val="800"/>
+              </a:spcAft>
+              <a:defRPr sz="1700">
                 <a:solidFill>
                   <a:srgbClr val="E2E8F0"/>
                 </a:solidFill>
@@ -4831,9 +5007,9 @@
           <a:p>
             <a:pPr>
               <a:spcAft>
-                <a:spcPts val="1000"/>
-              </a:spcAft>
-              <a:defRPr sz="2000">
+                <a:spcPts val="800"/>
+              </a:spcAft>
+              <a:defRPr sz="1700">
                 <a:solidFill>
                   <a:srgbClr val="E2E8F0"/>
                 </a:solidFill>
@@ -4899,8 +5075,8 @@
         </p:nvSpPr>
         <p:spPr>
           <a:xfrm>
-            <a:off x="3648456" y="2194560"/>
-            <a:ext cx="3017520" cy="4023360"/>
+            <a:off x="3602736" y="2194560"/>
+            <a:ext cx="2240280" cy="4023360"/>
           </a:xfrm>
           <a:prstGeom prst="rect">
             <a:avLst/>
@@ -4914,7 +5090,7 @@
           <a:lstStyle/>
           <a:p>
             <a:pPr>
-              <a:defRPr sz="5400" b="1">
+              <a:defRPr sz="5000" b="1">
                 <a:solidFill>
                   <a:srgbClr val="6366F1"/>
                 </a:solidFill>
@@ -4928,9 +5104,9 @@
           <a:p>
             <a:pPr>
               <a:spcAft>
-                <a:spcPts val="1400"/>
-              </a:spcAft>
-              <a:defRPr sz="2400" b="1">
+                <a:spcPts val="1200"/>
+              </a:spcAft>
+              <a:defRPr sz="2100" b="1">
                 <a:solidFill>
                   <a:srgbClr val="FFFFFF"/>
                 </a:solidFill>
@@ -4944,9 +5120,9 @@
           <a:p>
             <a:pPr>
               <a:spcAft>
-                <a:spcPts val="1000"/>
-              </a:spcAft>
-              <a:defRPr sz="2000">
+                <a:spcPts val="800"/>
+              </a:spcAft>
+              <a:defRPr sz="1700">
                 <a:solidFill>
                   <a:srgbClr val="E2E8F0"/>
                 </a:solidFill>
@@ -4960,9 +5136,9 @@
           <a:p>
             <a:pPr>
               <a:spcAft>
-                <a:spcPts val="1000"/>
-              </a:spcAft>
-              <a:defRPr sz="2000">
+                <a:spcPts val="800"/>
+              </a:spcAft>
+              <a:defRPr sz="1700">
                 <a:solidFill>
                   <a:srgbClr val="E2E8F0"/>
                 </a:solidFill>
@@ -4976,9 +5152,9 @@
           <a:p>
             <a:pPr>
               <a:spcAft>
-                <a:spcPts val="1000"/>
-              </a:spcAft>
-              <a:defRPr sz="2000">
+                <a:spcPts val="800"/>
+              </a:spcAft>
+              <a:defRPr sz="1700">
                 <a:solidFill>
                   <a:srgbClr val="E2E8F0"/>
                 </a:solidFill>
@@ -5044,8 +5220,8 @@
         </p:nvSpPr>
         <p:spPr>
           <a:xfrm>
-            <a:off x="6382512" y="2194560"/>
-            <a:ext cx="3017520" cy="4023360"/>
+            <a:off x="6336792" y="2194560"/>
+            <a:ext cx="2240280" cy="4023360"/>
           </a:xfrm>
           <a:prstGeom prst="rect">
             <a:avLst/>
@@ -5059,7 +5235,7 @@
           <a:lstStyle/>
           <a:p>
             <a:pPr>
-              <a:defRPr sz="5400" b="1">
+              <a:defRPr sz="5000" b="1">
                 <a:solidFill>
                   <a:srgbClr val="F59E0B"/>
                 </a:solidFill>
@@ -5073,9 +5249,9 @@
           <a:p>
             <a:pPr>
               <a:spcAft>
-                <a:spcPts val="1400"/>
-              </a:spcAft>
-              <a:defRPr sz="2400" b="1">
+                <a:spcPts val="1200"/>
+              </a:spcAft>
+              <a:defRPr sz="2100" b="1">
                 <a:solidFill>
                   <a:srgbClr val="FFFFFF"/>
                 </a:solidFill>
@@ -5089,9 +5265,9 @@
           <a:p>
             <a:pPr>
               <a:spcAft>
-                <a:spcPts val="1000"/>
-              </a:spcAft>
-              <a:defRPr sz="2000">
+                <a:spcPts val="800"/>
+              </a:spcAft>
+              <a:defRPr sz="1700">
                 <a:solidFill>
                   <a:srgbClr val="E2E8F0"/>
                 </a:solidFill>
@@ -5105,9 +5281,9 @@
           <a:p>
             <a:pPr>
               <a:spcAft>
-                <a:spcPts val="1000"/>
-              </a:spcAft>
-              <a:defRPr sz="2000">
+                <a:spcPts val="800"/>
+              </a:spcAft>
+              <a:defRPr sz="1700">
                 <a:solidFill>
                   <a:srgbClr val="E2E8F0"/>
                 </a:solidFill>
@@ -5121,9 +5297,9 @@
           <a:p>
             <a:pPr>
               <a:spcAft>
-                <a:spcPts val="1000"/>
-              </a:spcAft>
-              <a:defRPr sz="2000">
+                <a:spcPts val="800"/>
+              </a:spcAft>
+              <a:defRPr sz="1700">
                 <a:solidFill>
                   <a:srgbClr val="E2E8F0"/>
                 </a:solidFill>
@@ -5189,8 +5365,8 @@
         </p:nvSpPr>
         <p:spPr>
           <a:xfrm>
-            <a:off x="9116568" y="2194560"/>
-            <a:ext cx="3017520" cy="4023360"/>
+            <a:off x="9070848" y="2194560"/>
+            <a:ext cx="2240280" cy="4023360"/>
           </a:xfrm>
           <a:prstGeom prst="rect">
             <a:avLst/>
@@ -5204,7 +5380,7 @@
           <a:lstStyle/>
           <a:p>
             <a:pPr>
-              <a:defRPr sz="5400" b="1">
+              <a:defRPr sz="5000" b="1">
                 <a:solidFill>
                   <a:srgbClr val="38BDF8"/>
                 </a:solidFill>
@@ -5218,9 +5394,9 @@
           <a:p>
             <a:pPr>
               <a:spcAft>
-                <a:spcPts val="1400"/>
-              </a:spcAft>
-              <a:defRPr sz="2400" b="1">
+                <a:spcPts val="1200"/>
+              </a:spcAft>
+              <a:defRPr sz="2100" b="1">
                 <a:solidFill>
                   <a:srgbClr val="FFFFFF"/>
                 </a:solidFill>
@@ -5234,9 +5410,9 @@
           <a:p>
             <a:pPr>
               <a:spcAft>
-                <a:spcPts val="1000"/>
-              </a:spcAft>
-              <a:defRPr sz="2000">
+                <a:spcPts val="800"/>
+              </a:spcAft>
+              <a:defRPr sz="1700">
                 <a:solidFill>
                   <a:srgbClr val="E2E8F0"/>
                 </a:solidFill>
@@ -5250,9 +5426,9 @@
           <a:p>
             <a:pPr>
               <a:spcAft>
-                <a:spcPts val="1000"/>
-              </a:spcAft>
-              <a:defRPr sz="2000">
+                <a:spcPts val="800"/>
+              </a:spcAft>
+              <a:defRPr sz="1700">
                 <a:solidFill>
                   <a:srgbClr val="E2E8F0"/>
                 </a:solidFill>
@@ -5266,9 +5442,9 @@
           <a:p>
             <a:pPr>
               <a:spcAft>
-                <a:spcPts val="1000"/>
-              </a:spcAft>
-              <a:defRPr sz="2000">
+                <a:spcPts val="800"/>
+              </a:spcAft>
+              <a:defRPr sz="1700">
                 <a:solidFill>
                   <a:srgbClr val="E2E8F0"/>
                 </a:solidFill>
@@ -5437,7 +5613,7 @@
           <a:lstStyle/>
           <a:p>
             <a:pPr>
-              <a:defRPr sz="2200">
+              <a:defRPr sz="2100">
                 <a:solidFill>
                   <a:srgbClr val="E2E8F0"/>
                 </a:solidFill>
@@ -5870,7 +6046,7 @@
           <a:lstStyle/>
           <a:p>
             <a:pPr>
-              <a:defRPr sz="2200">
+              <a:defRPr sz="2100">
                 <a:solidFill>
                   <a:srgbClr val="E2E8F0"/>
                 </a:solidFill>
@@ -5956,7 +6132,7 @@
               </a:spcAft>
               <a:defRPr sz="2500" b="1">
                 <a:solidFill>
-                  <a:srgbClr val="38BDF8"/>
+                  <a:srgbClr val="FFFFFF"/>
                 </a:solidFill>
                 <a:latin typeface="Inter"/>
               </a:defRPr>
@@ -5968,65 +6144,65 @@
           <a:p>
             <a:pPr>
               <a:spcAft>
-                <a:spcPts val="1400"/>
-              </a:spcAft>
-              <a:defRPr sz="2000">
-                <a:solidFill>
-                  <a:srgbClr val="E2E8F0"/>
-                </a:solidFill>
-                <a:latin typeface="Inter"/>
-              </a:defRPr>
-            </a:pPr>
-            <a:r>
-              <a:t>• 5 Minuta Prezantim Live: Çdo student prezanton me telefonin e vet.</a:t>
-            </a:r>
-          </a:p>
-          <a:p>
-            <a:pPr>
-              <a:spcAft>
-                <a:spcPts val="1400"/>
-              </a:spcAft>
-              <a:defRPr sz="2000">
-                <a:solidFill>
-                  <a:srgbClr val="E2E8F0"/>
-                </a:solidFill>
-                <a:latin typeface="Inter"/>
-              </a:defRPr>
-            </a:pPr>
-            <a:r>
-              <a:t>• Projektori i Madh: Ekrani i celularit pasqyrohet para gjithë sallës.</a:t>
-            </a:r>
-          </a:p>
-          <a:p>
-            <a:pPr>
-              <a:spcAft>
-                <a:spcPts val="1400"/>
-              </a:spcAft>
-              <a:defRPr sz="2000">
-                <a:solidFill>
-                  <a:srgbClr val="E2E8F0"/>
-                </a:solidFill>
-                <a:latin typeface="Inter"/>
-              </a:defRPr>
-            </a:pPr>
-            <a:r>
-              <a:t>• Simulim i Porosisë: Kryeni një porosi ose veprim live në kohë reale.</a:t>
-            </a:r>
-          </a:p>
-          <a:p>
-            <a:pPr>
-              <a:spcAft>
-                <a:spcPts val="1400"/>
-              </a:spcAft>
-              <a:defRPr sz="2000">
-                <a:solidFill>
-                  <a:srgbClr val="E2E8F0"/>
-                </a:solidFill>
-                <a:latin typeface="Inter"/>
-              </a:defRPr>
-            </a:pPr>
-            <a:r>
-              <a:t>• Pyetje Teknike: Shpjegoni arkitekturën e kodit para profesorit!</a:t>
+                <a:spcPts val="1200"/>
+              </a:spcAft>
+              <a:defRPr sz="1800">
+                <a:solidFill>
+                  <a:srgbClr val="E2E8F0"/>
+                </a:solidFill>
+                <a:latin typeface="Inter"/>
+              </a:defRPr>
+            </a:pPr>
+            <a:r>
+              <a:t>• 5 Minuta Live: Prezantoni aplikacionin direkt nga telefoni juaj celular para sallës.</a:t>
+            </a:r>
+          </a:p>
+          <a:p>
+            <a:pPr>
+              <a:spcAft>
+                <a:spcPts val="1200"/>
+              </a:spcAft>
+              <a:defRPr sz="1800">
+                <a:solidFill>
+                  <a:srgbClr val="E2E8F0"/>
+                </a:solidFill>
+                <a:latin typeface="Inter"/>
+              </a:defRPr>
+            </a:pPr>
+            <a:r>
+              <a:t>• Biznesi Real: Tregoni biznesin që keni zgjedhur dhe problemin kryesor që zgjidh aplikacioni.</a:t>
+            </a:r>
+          </a:p>
+          <a:p>
+            <a:pPr>
+              <a:spcAft>
+                <a:spcPts val="1200"/>
+              </a:spcAft>
+              <a:defRPr sz="1800">
+                <a:solidFill>
+                  <a:srgbClr val="E2E8F0"/>
+                </a:solidFill>
+                <a:latin typeface="Inter"/>
+              </a:defRPr>
+            </a:pPr>
+            <a:r>
+              <a:t>• Demonstrim i Veçorive: Kryeni një porosi me 'Click &amp; Collect' live, tregoni modin offline dhe RLS në Supabase.</a:t>
+            </a:r>
+          </a:p>
+          <a:p>
+            <a:pPr>
+              <a:spcAft>
+                <a:spcPts val="1200"/>
+              </a:spcAft>
+              <a:defRPr sz="1800">
+                <a:solidFill>
+                  <a:srgbClr val="E2E8F0"/>
+                </a:solidFill>
+                <a:latin typeface="Inter"/>
+              </a:defRPr>
+            </a:pPr>
+            <a:r>
+              <a:t>• Mbrojtja Teknike: Përgjigjuni 2 pyetjeve të shkurtra teknike mbi arkitekturën e kodit tuaj.</a:t>
             </a:r>
           </a:p>
         </p:txBody>
@@ -6110,71 +6286,71 @@
               </a:defRPr>
             </a:pPr>
             <a:r>
-              <a:t>🌟 Çfarë Fitoni në Fund?</a:t>
-            </a:r>
-          </a:p>
-          <a:p>
-            <a:pPr>
-              <a:spcAft>
-                <a:spcPts val="1400"/>
-              </a:spcAft>
-              <a:defRPr sz="2000">
-                <a:solidFill>
-                  <a:srgbClr val="E2E8F0"/>
-                </a:solidFill>
-                <a:latin typeface="Inter"/>
-              </a:defRPr>
-            </a:pPr>
-            <a:r>
-              <a:t>• Notë Maksimale: Vlerësim i merituar për kodin dhe punën tuaj reale.</a:t>
-            </a:r>
-          </a:p>
-          <a:p>
-            <a:pPr>
-              <a:spcAft>
-                <a:spcPts val="1400"/>
-              </a:spcAft>
-              <a:defRPr sz="2000">
-                <a:solidFill>
-                  <a:srgbClr val="E2E8F0"/>
-                </a:solidFill>
-                <a:latin typeface="Inter"/>
-              </a:defRPr>
-            </a:pPr>
-            <a:r>
-              <a:t>• Zgjidhje për Biznesin: Biznesi familjar/lokal fiton një sistem funksional.</a:t>
-            </a:r>
-          </a:p>
-          <a:p>
-            <a:pPr>
-              <a:spcAft>
-                <a:spcPts val="1400"/>
-              </a:spcAft>
-              <a:defRPr sz="2000">
-                <a:solidFill>
-                  <a:srgbClr val="E2E8F0"/>
-                </a:solidFill>
-                <a:latin typeface="Inter"/>
-              </a:defRPr>
-            </a:pPr>
-            <a:r>
-              <a:t>• Portofol Digjital: Një link publik në internet për rezymenë tuaj.</a:t>
-            </a:r>
-          </a:p>
-          <a:p>
-            <a:pPr>
-              <a:spcAft>
-                <a:spcPts val="1400"/>
-              </a:spcAft>
-              <a:defRPr sz="2000">
-                <a:solidFill>
-                  <a:srgbClr val="E2E8F0"/>
-                </a:solidFill>
-                <a:latin typeface="Inter"/>
-              </a:defRPr>
-            </a:pPr>
-            <a:r>
-              <a:t>• Besim i Plotë: Bindja se mund të ndërtoni çdo softuer nga fillimi!</a:t>
+              <a:t>🌟 Çfarë Fitoni në Përfundim?</a:t>
+            </a:r>
+          </a:p>
+          <a:p>
+            <a:pPr>
+              <a:spcAft>
+                <a:spcPts val="1200"/>
+              </a:spcAft>
+              <a:defRPr sz="1800">
+                <a:solidFill>
+                  <a:srgbClr val="E2E8F0"/>
+                </a:solidFill>
+                <a:latin typeface="Inter"/>
+              </a:defRPr>
+            </a:pPr>
+            <a:r>
+              <a:t>• Portofol Real në GitHub: Një projekt i plotë production-ready që e vendosni menjëherë në CV dhe LinkedIn.</a:t>
+            </a:r>
+          </a:p>
+          <a:p>
+            <a:pPr>
+              <a:spcAft>
+                <a:spcPts val="1200"/>
+              </a:spcAft>
+              <a:defRPr sz="1800">
+                <a:solidFill>
+                  <a:srgbClr val="E2E8F0"/>
+                </a:solidFill>
+                <a:latin typeface="Inter"/>
+              </a:defRPr>
+            </a:pPr>
+            <a:r>
+              <a:t>• Zgjidhje për Familjen: Biznesi i prindërve ose të afërmve tuaj merr një vegël digjitale që kursen para çdo ditë.</a:t>
+            </a:r>
+          </a:p>
+          <a:p>
+            <a:pPr>
+              <a:spcAft>
+                <a:spcPts val="1200"/>
+              </a:spcAft>
+              <a:defRPr sz="1800">
+                <a:solidFill>
+                  <a:srgbClr val="E2E8F0"/>
+                </a:solidFill>
+                <a:latin typeface="Inter"/>
+              </a:defRPr>
+            </a:pPr>
+            <a:r>
+              <a:t>• Gati për Tregun e Punës: Përvojë praktike me teknologjitë më të kërkuara në kompanitë ndërkombëtare.</a:t>
+            </a:r>
+          </a:p>
+          <a:p>
+            <a:pPr>
+              <a:spcAft>
+                <a:spcPts val="1200"/>
+              </a:spcAft>
+              <a:defRPr sz="1800">
+                <a:solidFill>
+                  <a:srgbClr val="E2E8F0"/>
+                </a:solidFill>
+                <a:latin typeface="Inter"/>
+              </a:defRPr>
+            </a:pPr>
+            <a:r>
+              <a:t>• Notë e Merituar (10): Kushdo që dorëzon projektin dhe e mbron me pasion kualifikohet për vlerësim maksimal!</a:t>
             </a:r>
           </a:p>
         </p:txBody>
@@ -6271,7 +6447,7 @@
               </a:defRPr>
             </a:pPr>
             <a:r>
-              <a:t>EVIDENCA ZYRTARE E ORËS</a:t>
+              <a:t>EVIDENCA ZYRTARE</a:t>
             </a:r>
           </a:p>
         </p:txBody>
@@ -6307,7 +6483,7 @@
               </a:defRPr>
             </a:pPr>
             <a:r>
-              <a:t>Nxirrni Telefonat: Check-In i Pjesëmarrjes!</a:t>
+              <a:t>Regjistrimi i Pranisë: Check-In Live në Portal</a:t>
             </a:r>
           </a:p>
         </p:txBody>
@@ -6335,15 +6511,15 @@
           <a:lstStyle/>
           <a:p>
             <a:pPr>
-              <a:defRPr sz="2200">
-                <a:solidFill>
-                  <a:srgbClr val="E2E8F0"/>
-                </a:solidFill>
-                <a:latin typeface="Inter"/>
-              </a:defRPr>
-            </a:pPr>
-            <a:r>
-              <a:t>Regjistroni praninë tuaj në ligjëratë ose laborator brenda dritares 2-minutëshe.</a:t>
+              <a:defRPr sz="2100">
+                <a:solidFill>
+                  <a:srgbClr val="E2E8F0"/>
+                </a:solidFill>
+                <a:latin typeface="Inter"/>
+              </a:defRPr>
+            </a:pPr>
+            <a:r>
+              <a:t>Skanoni kodin QR me telefonin tuaj për të regjistruar pjesëmarrjen brenda 2 minutave.</a:t>
             </a:r>
           </a:p>
         </p:txBody>
@@ -6357,7 +6533,116 @@
         <p:spPr>
           <a:xfrm>
             <a:off x="731520" y="2011680"/>
-            <a:ext cx="6858000" cy="4389120"/>
+            <a:ext cx="4114800" cy="4389120"/>
+          </a:xfrm>
+          <a:prstGeom prst="roundRect">
+            <a:avLst/>
+          </a:prstGeom>
+          <a:solidFill>
+            <a:srgbClr val="141E34"/>
+          </a:solidFill>
+          <a:ln w="31750">
+            <a:solidFill>
+              <a:srgbClr val="10B981"/>
+            </a:solidFill>
+          </a:ln>
+        </p:spPr>
+        <p:style>
+          <a:lnRef idx="1">
+            <a:schemeClr val="accent1"/>
+          </a:lnRef>
+          <a:fillRef idx="3">
+            <a:schemeClr val="accent1"/>
+          </a:fillRef>
+          <a:effectRef idx="2">
+            <a:schemeClr val="accent1"/>
+          </a:effectRef>
+          <a:fontRef idx="minor">
+            <a:schemeClr val="lt1"/>
+          </a:fontRef>
+        </p:style>
+        <p:txBody>
+          <a:bodyPr rtlCol="0" anchor="ctr"/>
+          <a:lstStyle/>
+          <a:p>
+            <a:pPr algn="ctr"/>
+          </a:p>
+        </p:txBody>
+      </p:sp>
+      <p:pic>
+        <p:nvPicPr>
+          <p:cNvPr id="7" name="Picture 6" descr="qr_master_checkin.png"/>
+          <p:cNvPicPr>
+            <a:picLocks noChangeAspect="1"/>
+          </p:cNvPicPr>
+          <p:nvPr/>
+        </p:nvPicPr>
+        <p:blipFill>
+          <a:blip r:embed="rId2"/>
+          <a:stretch>
+            <a:fillRect/>
+          </a:stretch>
+        </p:blipFill>
+        <p:spPr>
+          <a:xfrm>
+            <a:off x="1188720" y="2286000"/>
+            <a:ext cx="3200400" cy="3200400"/>
+          </a:xfrm>
+          <a:prstGeom prst="rect">
+            <a:avLst/>
+          </a:prstGeom>
+        </p:spPr>
+      </p:pic>
+      <p:sp>
+        <p:nvSpPr>
+          <p:cNvPr id="8" name="TextBox 7"/>
+          <p:cNvSpPr txBox="1"/>
+          <p:nvPr/>
+        </p:nvSpPr>
+        <p:spPr>
+          <a:xfrm>
+            <a:off x="914400" y="5577840"/>
+            <a:ext cx="3749039" cy="731520"/>
+          </a:xfrm>
+          <a:prstGeom prst="rect">
+            <a:avLst/>
+          </a:prstGeom>
+          <a:noFill/>
+        </p:spPr>
+        <p:txBody>
+          <a:bodyPr wrap="square">
+            <a:spAutoFit/>
+          </a:bodyPr>
+          <a:lstStyle/>
+          <a:p>
+            <a:pPr algn="ctr">
+              <a:defRPr sz="1600" b="1">
+                <a:solidFill>
+                  <a:srgbClr val="10B981"/>
+                </a:solidFill>
+                <a:latin typeface="Inter"/>
+              </a:defRPr>
+            </a:pPr>
+            <a:r>
+              <a:t>SKANO PËR CHECK-IN LIVE</a:t>
+            </a:r>
+            <a:br/>
+            <a:r>
+              <a:t>arbenl.github.io/#checkin</a:t>
+            </a:r>
+          </a:p>
+        </p:txBody>
+      </p:sp>
+      <p:sp>
+        <p:nvSpPr>
+          <p:cNvPr id="9" name="Rounded Rectangle 8"/>
+          <p:cNvSpPr/>
+          <p:nvPr/>
+        </p:nvSpPr>
+        <p:spPr>
+          <a:xfrm>
+            <a:off x="5120640" y="2011680"/>
+            <a:ext cx="6309360" cy="4389120"/>
           </a:xfrm>
           <a:prstGeom prst="roundRect">
             <a:avLst/>
@@ -6395,14 +6680,14 @@
       </p:sp>
       <p:sp>
         <p:nvSpPr>
-          <p:cNvPr id="7" name="TextBox 6"/>
+          <p:cNvPr id="10" name="TextBox 9"/>
           <p:cNvSpPr txBox="1"/>
           <p:nvPr/>
         </p:nvSpPr>
         <p:spPr>
           <a:xfrm>
-            <a:off x="1005840" y="2194560"/>
-            <a:ext cx="6309360" cy="2286000"/>
+            <a:off x="5394960" y="2194560"/>
+            <a:ext cx="5760720" cy="4023360"/>
           </a:xfrm>
           <a:prstGeom prst="rect">
             <a:avLst/>
@@ -6416,21 +6701,24 @@
           <a:lstStyle/>
           <a:p>
             <a:pPr>
-              <a:defRPr sz="2100" b="1">
-                <a:solidFill>
-                  <a:srgbClr val="38BDF8"/>
-                </a:solidFill>
-                <a:latin typeface="Inter"/>
-              </a:defRPr>
-            </a:pPr>
-            <a:r>
-              <a:t>1️⃣ Skanoni QR Kodin:</a:t>
-            </a:r>
-          </a:p>
-          <a:p>
-            <a:pPr>
-              <a:spcAft>
-                <a:spcPts val="800"/>
+              <a:spcAft>
+                <a:spcPts val="1400"/>
+              </a:spcAft>
+              <a:defRPr sz="2500" b="1">
+                <a:solidFill>
+                  <a:srgbClr val="FFFFFF"/>
+                </a:solidFill>
+                <a:latin typeface="Inter"/>
+              </a:defRPr>
+            </a:pPr>
+            <a:r>
+              <a:t>⏱️ Rregullat e Check-In (2 Minuta)</a:t>
+            </a:r>
+          </a:p>
+          <a:p>
+            <a:pPr>
+              <a:spcAft>
+                <a:spcPts val="1000"/>
               </a:spcAft>
               <a:defRPr sz="1800">
                 <a:solidFill>
@@ -6440,26 +6728,13 @@
               </a:defRPr>
             </a:pPr>
             <a:r>
-              <a:t>Hapni shfletuesin në arbenl.github.io/#checkin</a:t>
-            </a:r>
-          </a:p>
-          <a:p>
-            <a:pPr>
-              <a:defRPr sz="2100" b="1">
-                <a:solidFill>
-                  <a:srgbClr val="38BDF8"/>
-                </a:solidFill>
-                <a:latin typeface="Inter"/>
-              </a:defRPr>
-            </a:pPr>
-            <a:r>
-              <a:t>2️⃣ Zgjidhni Seancën:</a:t>
-            </a:r>
-          </a:p>
-          <a:p>
-            <a:pPr>
-              <a:spcAft>
-                <a:spcPts val="800"/>
+              <a:t>• Kodi PIN i Orës: Shfaqet në projektor nga profesori: PIN = 8492. Pa këtë kod nuk mund të regjistroheni.</a:t>
+            </a:r>
+          </a:p>
+          <a:p>
+            <a:pPr>
+              <a:spcAft>
+                <a:spcPts val="1000"/>
               </a:spcAft>
               <a:defRPr sz="1800">
                 <a:solidFill>
@@ -6469,26 +6744,13 @@
               </a:defRPr>
             </a:pPr>
             <a:r>
-              <a:t>Zgjidhni [ 📚 Ligjëratë ] ose [ 🧪 Ushtrime (Lab) ]</a:t>
-            </a:r>
-          </a:p>
-          <a:p>
-            <a:pPr>
-              <a:defRPr sz="2100" b="1">
-                <a:solidFill>
-                  <a:srgbClr val="38BDF8"/>
-                </a:solidFill>
-                <a:latin typeface="Inter"/>
-              </a:defRPr>
-            </a:pPr>
-            <a:r>
-              <a:t>3️⃣ Shënoni Të Dhënat &amp; PIN-in:</a:t>
-            </a:r>
-          </a:p>
-          <a:p>
-            <a:pPr>
-              <a:spcAft>
-                <a:spcPts val="800"/>
+              <a:t>• Koha e Kufizuar: Forma e pranimit mbyllet ekzaktësisht 2 minuta pas shfaqjes në ekran për të parandaluar regjistrimet nga jashtë.</a:t>
+            </a:r>
+          </a:p>
+          <a:p>
+            <a:pPr>
+              <a:spcAft>
+                <a:spcPts val="1000"/>
               </a:spcAft>
               <a:defRPr sz="1800">
                 <a:solidFill>
@@ -6498,222 +6760,23 @@
               </a:defRPr>
             </a:pPr>
             <a:r>
-              <a:t>ID e studentit, emri, emaili AAB dhe kodi PIN.</a:t>
-            </a:r>
-          </a:p>
-        </p:txBody>
-      </p:sp>
-      <p:sp>
-        <p:nvSpPr>
-          <p:cNvPr id="8" name="Rounded Rectangle 7"/>
-          <p:cNvSpPr/>
-          <p:nvPr/>
-        </p:nvSpPr>
-        <p:spPr>
-          <a:xfrm>
-            <a:off x="1005840" y="4572000"/>
-            <a:ext cx="6309360" cy="1645920"/>
-          </a:xfrm>
-          <a:prstGeom prst="roundRect">
-            <a:avLst/>
-          </a:prstGeom>
-          <a:solidFill>
-            <a:srgbClr val="0F172A"/>
-          </a:solidFill>
-          <a:ln w="31750">
-            <a:solidFill>
-              <a:srgbClr val="F59E0B"/>
-            </a:solidFill>
-          </a:ln>
-        </p:spPr>
-        <p:style>
-          <a:lnRef idx="1">
-            <a:schemeClr val="accent1"/>
-          </a:lnRef>
-          <a:fillRef idx="3">
-            <a:schemeClr val="accent1"/>
-          </a:fillRef>
-          <a:effectRef idx="2">
-            <a:schemeClr val="accent1"/>
-          </a:effectRef>
-          <a:fontRef idx="minor">
-            <a:schemeClr val="lt1"/>
-          </a:fontRef>
-        </p:style>
-        <p:txBody>
-          <a:bodyPr rtlCol="0" anchor="ctr"/>
-          <a:lstStyle/>
-          <a:p>
-            <a:pPr algn="ctr"/>
-          </a:p>
-        </p:txBody>
-      </p:sp>
-      <p:sp>
-        <p:nvSpPr>
-          <p:cNvPr id="9" name="TextBox 8"/>
-          <p:cNvSpPr txBox="1"/>
-          <p:nvPr/>
-        </p:nvSpPr>
-        <p:spPr>
-          <a:xfrm>
-            <a:off x="1097280" y="4663440"/>
-            <a:ext cx="6126480" cy="1463040"/>
-          </a:xfrm>
-          <a:prstGeom prst="rect">
-            <a:avLst/>
-          </a:prstGeom>
-          <a:noFill/>
-        </p:spPr>
-        <p:txBody>
-          <a:bodyPr wrap="square">
-            <a:spAutoFit/>
-          </a:bodyPr>
-          <a:lstStyle/>
-          <a:p>
-            <a:pPr algn="ctr">
-              <a:spcAft>
-                <a:spcPts val="400"/>
-              </a:spcAft>
-              <a:defRPr sz="1600" b="1">
-                <a:solidFill>
-                  <a:srgbClr val="F59E0B"/>
-                </a:solidFill>
-                <a:latin typeface="Inter"/>
-              </a:defRPr>
-            </a:pPr>
-            <a:r>
-              <a:t>🔑 KODI PIN I SEANCËS SOT (DRITARE 2 MINUTA):</a:t>
-            </a:r>
-          </a:p>
-          <a:p>
-            <a:pPr algn="ctr">
-              <a:defRPr sz="4400" b="1">
-                <a:solidFill>
-                  <a:srgbClr val="FFFFFF"/>
-                </a:solidFill>
-                <a:latin typeface="Inter"/>
-              </a:defRPr>
-            </a:pPr>
-            <a:r>
-              <a:t>8 4 9 2</a:t>
-            </a:r>
-          </a:p>
-        </p:txBody>
-      </p:sp>
-      <p:sp>
-        <p:nvSpPr>
-          <p:cNvPr id="10" name="Rounded Rectangle 9"/>
-          <p:cNvSpPr/>
-          <p:nvPr/>
-        </p:nvSpPr>
-        <p:spPr>
-          <a:xfrm>
-            <a:off x="7955279" y="2011680"/>
-            <a:ext cx="3474720" cy="4389120"/>
-          </a:xfrm>
-          <a:prstGeom prst="roundRect">
-            <a:avLst/>
-          </a:prstGeom>
-          <a:solidFill>
-            <a:srgbClr val="141E34"/>
-          </a:solidFill>
-          <a:ln w="31750">
-            <a:solidFill>
-              <a:srgbClr val="10B981"/>
-            </a:solidFill>
-          </a:ln>
-        </p:spPr>
-        <p:style>
-          <a:lnRef idx="1">
-            <a:schemeClr val="accent1"/>
-          </a:lnRef>
-          <a:fillRef idx="3">
-            <a:schemeClr val="accent1"/>
-          </a:fillRef>
-          <a:effectRef idx="2">
-            <a:schemeClr val="accent1"/>
-          </a:effectRef>
-          <a:fontRef idx="minor">
-            <a:schemeClr val="lt1"/>
-          </a:fontRef>
-        </p:style>
-        <p:txBody>
-          <a:bodyPr rtlCol="0" anchor="ctr"/>
-          <a:lstStyle/>
-          <a:p>
-            <a:pPr algn="ctr"/>
-          </a:p>
-        </p:txBody>
-      </p:sp>
-      <p:pic>
-        <p:nvPicPr>
-          <p:cNvPr id="11" name="Picture 10" descr="qr_master_checkin.png"/>
-          <p:cNvPicPr>
-            <a:picLocks noChangeAspect="1"/>
-          </p:cNvPicPr>
-          <p:nvPr/>
-        </p:nvPicPr>
-        <p:blipFill>
-          <a:blip r:embed="rId2"/>
-          <a:stretch>
-            <a:fillRect/>
-          </a:stretch>
-        </p:blipFill>
-        <p:spPr>
-          <a:xfrm>
-            <a:off x="8321040" y="2286000"/>
-            <a:ext cx="2743200" cy="2743200"/>
-          </a:xfrm>
-          <a:prstGeom prst="rect">
-            <a:avLst/>
-          </a:prstGeom>
-        </p:spPr>
-      </p:pic>
-      <p:sp>
-        <p:nvSpPr>
-          <p:cNvPr id="12" name="TextBox 11"/>
-          <p:cNvSpPr txBox="1"/>
-          <p:nvPr/>
-        </p:nvSpPr>
-        <p:spPr>
-          <a:xfrm>
-            <a:off x="8046720" y="5120640"/>
-            <a:ext cx="3291840" cy="1097280"/>
-          </a:xfrm>
-          <a:prstGeom prst="rect">
-            <a:avLst/>
-          </a:prstGeom>
-          <a:noFill/>
-        </p:spPr>
-        <p:txBody>
-          <a:bodyPr wrap="square">
-            <a:spAutoFit/>
-          </a:bodyPr>
-          <a:lstStyle/>
-          <a:p>
-            <a:pPr algn="ctr">
-              <a:defRPr sz="2000" b="1">
-                <a:solidFill>
-                  <a:srgbClr val="10B981"/>
-                </a:solidFill>
-                <a:latin typeface="Inter"/>
-              </a:defRPr>
-            </a:pPr>
-            <a:r>
-              <a:t>SKANO PËR CHECK-IN</a:t>
-            </a:r>
-          </a:p>
-          <a:p>
-            <a:pPr algn="ctr">
-              <a:defRPr sz="1600">
-                <a:solidFill>
-                  <a:srgbClr val="FFFFFF"/>
-                </a:solidFill>
-                <a:latin typeface="Inter"/>
-              </a:defRPr>
-            </a:pPr>
-            <a:r>
-              <a:t>arbenl.github.io/#checkin</a:t>
+              <a:t>• Të Dhënat Zyrtare: Plotësoni ID-në e studentit, emrin e plotë dhe emailin tuaj zyrtar të Kolegjit AAB.</a:t>
+            </a:r>
+          </a:p>
+          <a:p>
+            <a:pPr>
+              <a:spcAft>
+                <a:spcPts val="1000"/>
+              </a:spcAft>
+              <a:defRPr sz="1800">
+                <a:solidFill>
+                  <a:srgbClr val="E2E8F0"/>
+                </a:solidFill>
+                <a:latin typeface="Inter"/>
+              </a:defRPr>
+            </a:pPr>
+            <a:r>
+              <a:t>• Transparencë e Plotë: Lista e të pranishmëve eksportohet në çast në Excel (CSV) për administratën e fakultetit.</a:t>
             </a:r>
           </a:p>
         </p:txBody>
@@ -6810,7 +6873,7 @@
               </a:defRPr>
             </a:pPr>
             <a:r>
-              <a:t>AKSIONI FILLON TANI</a:t>
+              <a:t>AKSIONI NË SALLË</a:t>
             </a:r>
           </a:p>
         </p:txBody>
@@ -6846,7 +6909,7 @@
               </a:defRPr>
             </a:pPr>
             <a:r>
-              <a:t>Sprinti Praktik: Gati për Semestrin!</a:t>
+              <a:t>Sprinti Praktik: Nxirrni Telefonat Celularë!</a:t>
             </a:r>
           </a:p>
         </p:txBody>
@@ -6874,15 +6937,15 @@
           <a:lstStyle/>
           <a:p>
             <a:pPr>
-              <a:defRPr sz="2200">
-                <a:solidFill>
-                  <a:srgbClr val="E2E8F0"/>
-                </a:solidFill>
-                <a:latin typeface="Inter"/>
-              </a:defRPr>
-            </a:pPr>
-            <a:r>
-              <a:t>Në 15 minutat e ardhshme lidhim të gjitha platformat zhvillimore në telefon.</a:t>
+              <a:defRPr sz="2100">
+                <a:solidFill>
+                  <a:srgbClr val="E2E8F0"/>
+                </a:solidFill>
+                <a:latin typeface="Inter"/>
+              </a:defRPr>
+            </a:pPr>
+            <a:r>
+              <a:t>10 minuta punë aktive në auditor për konfigurimin e mjedisit tuaj të punës.</a:t>
             </a:r>
           </a:p>
         </p:txBody>
@@ -6896,7 +6959,7 @@
         <p:spPr>
           <a:xfrm>
             <a:off x="731520" y="2011680"/>
-            <a:ext cx="6858000" cy="4389120"/>
+            <a:ext cx="3383280" cy="4389120"/>
           </a:xfrm>
           <a:prstGeom prst="roundRect">
             <a:avLst/>
@@ -6940,8 +7003,8 @@
         </p:nvSpPr>
         <p:spPr>
           <a:xfrm>
-            <a:off x="1005840" y="2194560"/>
-            <a:ext cx="6309360" cy="4023360"/>
+            <a:off x="914400" y="2194560"/>
+            <a:ext cx="3017520" cy="4023360"/>
           </a:xfrm>
           <a:prstGeom prst="rect">
             <a:avLst/>
@@ -6955,7 +7018,10 @@
           <a:lstStyle/>
           <a:p>
             <a:pPr>
-              <a:defRPr sz="2300" b="1">
+              <a:spcAft>
+                <a:spcPts val="600"/>
+              </a:spcAft>
+              <a:defRPr sz="1400" b="1">
                 <a:solidFill>
                   <a:srgbClr val="38BDF8"/>
                 </a:solidFill>
@@ -6963,7 +7029,7 @@
               </a:defRPr>
             </a:pPr>
             <a:r>
-              <a:t>1️⃣ GitHub Student Pack:</a:t>
+              <a:t>1️⃣ Hapi 1 (Min 0–3)</a:t>
             </a:r>
           </a:p>
           <a:p>
@@ -6971,102 +7037,79 @@
               <a:spcAft>
                 <a:spcPts val="1400"/>
               </a:spcAft>
-              <a:defRPr sz="2000">
-                <a:solidFill>
-                  <a:srgbClr val="E2E8F0"/>
-                </a:solidFill>
-                <a:latin typeface="Inter"/>
-              </a:defRPr>
-            </a:pPr>
-            <a:r>
-              <a:t>Përfitoni Copilot Pro Falas me emailin AAB</a:t>
-            </a:r>
-          </a:p>
-          <a:p>
-            <a:pPr>
-              <a:defRPr sz="2300" b="1">
-                <a:solidFill>
-                  <a:srgbClr val="38BDF8"/>
-                </a:solidFill>
-                <a:latin typeface="Inter"/>
-              </a:defRPr>
-            </a:pPr>
-            <a:r>
-              <a:t>2️⃣ Supabase Cloud:</a:t>
-            </a:r>
-          </a:p>
-          <a:p>
-            <a:pPr>
-              <a:spcAft>
-                <a:spcPts val="1400"/>
-              </a:spcAft>
-              <a:defRPr sz="2000">
-                <a:solidFill>
-                  <a:srgbClr val="E2E8F0"/>
-                </a:solidFill>
-                <a:latin typeface="Inter"/>
-              </a:defRPr>
-            </a:pPr>
-            <a:r>
-              <a:t>Kyçuni me 1 klik (Sign in with GitHub)</a:t>
-            </a:r>
-          </a:p>
-          <a:p>
-            <a:pPr>
-              <a:defRPr sz="2300" b="1">
-                <a:solidFill>
-                  <a:srgbClr val="38BDF8"/>
-                </a:solidFill>
-                <a:latin typeface="Inter"/>
-              </a:defRPr>
-            </a:pPr>
-            <a:r>
-              <a:t>3️⃣ Vercel Deployment:</a:t>
-            </a:r>
-          </a:p>
-          <a:p>
-            <a:pPr>
-              <a:spcAft>
-                <a:spcPts val="1400"/>
-              </a:spcAft>
-              <a:defRPr sz="2000">
-                <a:solidFill>
-                  <a:srgbClr val="E2E8F0"/>
-                </a:solidFill>
-                <a:latin typeface="Inter"/>
-              </a:defRPr>
-            </a:pPr>
-            <a:r>
-              <a:t>Lidhni llogarinë për deploy live me git push</a:t>
-            </a:r>
-          </a:p>
-          <a:p>
-            <a:pPr>
-              <a:defRPr sz="2300" b="1">
-                <a:solidFill>
-                  <a:srgbClr val="38BDF8"/>
-                </a:solidFill>
-                <a:latin typeface="Inter"/>
-              </a:defRPr>
-            </a:pPr>
-            <a:r>
-              <a:t>🌐 Ruani Portalin:</a:t>
-            </a:r>
-          </a:p>
-          <a:p>
-            <a:pPr>
-              <a:spcAft>
-                <a:spcPts val="1400"/>
-              </a:spcAft>
-              <a:defRPr sz="2000">
-                <a:solidFill>
-                  <a:srgbClr val="E2E8F0"/>
-                </a:solidFill>
-                <a:latin typeface="Inter"/>
-              </a:defRPr>
-            </a:pPr>
-            <a:r>
-              <a:t>Shtoni arbenl.github.io në Homescreen të telefonit!</a:t>
+              <a:defRPr sz="2200" b="1">
+                <a:solidFill>
+                  <a:srgbClr val="FFFFFF"/>
+                </a:solidFill>
+                <a:latin typeface="Inter"/>
+              </a:defRPr>
+            </a:pPr>
+            <a:r>
+              <a:t>Skanoni dhe Hyni</a:t>
+            </a:r>
+          </a:p>
+          <a:p>
+            <a:pPr>
+              <a:spcAft>
+                <a:spcPts val="1000"/>
+              </a:spcAft>
+              <a:defRPr sz="1800">
+                <a:solidFill>
+                  <a:srgbClr val="E2E8F0"/>
+                </a:solidFill>
+                <a:latin typeface="Inter"/>
+              </a:defRPr>
+            </a:pPr>
+            <a:r>
+              <a:t>• Hapni kamerën e telefonit</a:t>
+            </a:r>
+          </a:p>
+          <a:p>
+            <a:pPr>
+              <a:spcAft>
+                <a:spcPts val="1000"/>
+              </a:spcAft>
+              <a:defRPr sz="1800">
+                <a:solidFill>
+                  <a:srgbClr val="E2E8F0"/>
+                </a:solidFill>
+                <a:latin typeface="Inter"/>
+              </a:defRPr>
+            </a:pPr>
+            <a:r>
+              <a:t>• Skanoni kodin QR në ekran</a:t>
+            </a:r>
+          </a:p>
+          <a:p>
+            <a:pPr>
+              <a:spcAft>
+                <a:spcPts val="1000"/>
+              </a:spcAft>
+              <a:defRPr sz="1800">
+                <a:solidFill>
+                  <a:srgbClr val="E2E8F0"/>
+                </a:solidFill>
+                <a:latin typeface="Inter"/>
+              </a:defRPr>
+            </a:pPr>
+            <a:r>
+              <a:t>• Regjistroni praninë me PIN-in e ditës</a:t>
+            </a:r>
+          </a:p>
+          <a:p>
+            <a:pPr>
+              <a:spcAft>
+                <a:spcPts val="1000"/>
+              </a:spcAft>
+              <a:defRPr sz="1800">
+                <a:solidFill>
+                  <a:srgbClr val="E2E8F0"/>
+                </a:solidFill>
+                <a:latin typeface="Inter"/>
+              </a:defRPr>
+            </a:pPr>
+            <a:r>
+              <a:t>• Ruani faqen në 'Home Screen'</a:t>
             </a:r>
           </a:p>
         </p:txBody>
@@ -7079,8 +7122,172 @@
         </p:nvSpPr>
         <p:spPr>
           <a:xfrm>
-            <a:off x="7955279" y="2011680"/>
-            <a:ext cx="3474720" cy="4389120"/>
+            <a:off x="4389120" y="2011680"/>
+            <a:ext cx="3383280" cy="4389120"/>
+          </a:xfrm>
+          <a:prstGeom prst="roundRect">
+            <a:avLst/>
+          </a:prstGeom>
+          <a:solidFill>
+            <a:srgbClr val="141E34"/>
+          </a:solidFill>
+          <a:ln w="31750">
+            <a:solidFill>
+              <a:srgbClr val="6366F1"/>
+            </a:solidFill>
+          </a:ln>
+        </p:spPr>
+        <p:style>
+          <a:lnRef idx="1">
+            <a:schemeClr val="accent1"/>
+          </a:lnRef>
+          <a:fillRef idx="3">
+            <a:schemeClr val="accent1"/>
+          </a:fillRef>
+          <a:effectRef idx="2">
+            <a:schemeClr val="accent1"/>
+          </a:effectRef>
+          <a:fontRef idx="minor">
+            <a:schemeClr val="lt1"/>
+          </a:fontRef>
+        </p:style>
+        <p:txBody>
+          <a:bodyPr rtlCol="0" anchor="ctr"/>
+          <a:lstStyle/>
+          <a:p>
+            <a:pPr algn="ctr"/>
+          </a:p>
+        </p:txBody>
+      </p:sp>
+      <p:sp>
+        <p:nvSpPr>
+          <p:cNvPr id="9" name="TextBox 8"/>
+          <p:cNvSpPr txBox="1"/>
+          <p:nvPr/>
+        </p:nvSpPr>
+        <p:spPr>
+          <a:xfrm>
+            <a:off x="4572000" y="2194560"/>
+            <a:ext cx="3017520" cy="4023360"/>
+          </a:xfrm>
+          <a:prstGeom prst="rect">
+            <a:avLst/>
+          </a:prstGeom>
+          <a:noFill/>
+        </p:spPr>
+        <p:txBody>
+          <a:bodyPr wrap="square">
+            <a:spAutoFit/>
+          </a:bodyPr>
+          <a:lstStyle/>
+          <a:p>
+            <a:pPr>
+              <a:spcAft>
+                <a:spcPts val="600"/>
+              </a:spcAft>
+              <a:defRPr sz="1400" b="1">
+                <a:solidFill>
+                  <a:srgbClr val="6366F1"/>
+                </a:solidFill>
+                <a:latin typeface="Inter"/>
+              </a:defRPr>
+            </a:pPr>
+            <a:r>
+              <a:t>2️⃣ Hapi 2 (Min 3–7)</a:t>
+            </a:r>
+          </a:p>
+          <a:p>
+            <a:pPr>
+              <a:spcAft>
+                <a:spcPts val="1400"/>
+              </a:spcAft>
+              <a:defRPr sz="2200" b="1">
+                <a:solidFill>
+                  <a:srgbClr val="FFFFFF"/>
+                </a:solidFill>
+                <a:latin typeface="Inter"/>
+              </a:defRPr>
+            </a:pPr>
+            <a:r>
+              <a:t>Aktivizoni GitHub Pack</a:t>
+            </a:r>
+          </a:p>
+          <a:p>
+            <a:pPr>
+              <a:spcAft>
+                <a:spcPts val="1000"/>
+              </a:spcAft>
+              <a:defRPr sz="1800">
+                <a:solidFill>
+                  <a:srgbClr val="E2E8F0"/>
+                </a:solidFill>
+                <a:latin typeface="Inter"/>
+              </a:defRPr>
+            </a:pPr>
+            <a:r>
+              <a:t>• Kyçuni me emailin studentor AAB</a:t>
+            </a:r>
+          </a:p>
+          <a:p>
+            <a:pPr>
+              <a:spcAft>
+                <a:spcPts val="1000"/>
+              </a:spcAft>
+              <a:defRPr sz="1800">
+                <a:solidFill>
+                  <a:srgbClr val="E2E8F0"/>
+                </a:solidFill>
+                <a:latin typeface="Inter"/>
+              </a:defRPr>
+            </a:pPr>
+            <a:r>
+              <a:t>• Përfitoni GitHub Copilot Pro falas</a:t>
+            </a:r>
+          </a:p>
+          <a:p>
+            <a:pPr>
+              <a:spcAft>
+                <a:spcPts val="1000"/>
+              </a:spcAft>
+              <a:defRPr sz="1800">
+                <a:solidFill>
+                  <a:srgbClr val="E2E8F0"/>
+                </a:solidFill>
+                <a:latin typeface="Inter"/>
+              </a:defRPr>
+            </a:pPr>
+            <a:r>
+              <a:t>• Verifikoni statusin në llogarinë tuaj</a:t>
+            </a:r>
+          </a:p>
+          <a:p>
+            <a:pPr>
+              <a:spcAft>
+                <a:spcPts val="1000"/>
+              </a:spcAft>
+              <a:defRPr sz="1800">
+                <a:solidFill>
+                  <a:srgbClr val="E2E8F0"/>
+                </a:solidFill>
+                <a:latin typeface="Inter"/>
+              </a:defRPr>
+            </a:pPr>
+            <a:r>
+              <a:t>• Kjo ju kursen 120$/vit!</a:t>
+            </a:r>
+          </a:p>
+        </p:txBody>
+      </p:sp>
+      <p:sp>
+        <p:nvSpPr>
+          <p:cNvPr id="10" name="Rounded Rectangle 9"/>
+          <p:cNvSpPr/>
+          <p:nvPr/>
+        </p:nvSpPr>
+        <p:spPr>
+          <a:xfrm>
+            <a:off x="8046720" y="2011680"/>
+            <a:ext cx="3383280" cy="4389120"/>
           </a:xfrm>
           <a:prstGeom prst="roundRect">
             <a:avLst/>
@@ -7116,40 +7323,16 @@
           </a:p>
         </p:txBody>
       </p:sp>
-      <p:pic>
-        <p:nvPicPr>
-          <p:cNvPr id="9" name="Picture 8" descr="qr_master_portal.png"/>
-          <p:cNvPicPr>
-            <a:picLocks noChangeAspect="1"/>
-          </p:cNvPicPr>
-          <p:nvPr/>
-        </p:nvPicPr>
-        <p:blipFill>
-          <a:blip r:embed="rId2"/>
-          <a:stretch>
-            <a:fillRect/>
-          </a:stretch>
-        </p:blipFill>
-        <p:spPr>
-          <a:xfrm>
-            <a:off x="8412480" y="2286000"/>
-            <a:ext cx="2560320" cy="2560320"/>
-          </a:xfrm>
-          <a:prstGeom prst="rect">
-            <a:avLst/>
-          </a:prstGeom>
-        </p:spPr>
-      </p:pic>
-      <p:sp>
-        <p:nvSpPr>
-          <p:cNvPr id="10" name="TextBox 9"/>
+      <p:sp>
+        <p:nvSpPr>
+          <p:cNvPr id="11" name="TextBox 10"/>
           <p:cNvSpPr txBox="1"/>
           <p:nvPr/>
         </p:nvSpPr>
         <p:spPr>
           <a:xfrm>
-            <a:off x="8046720" y="4937760"/>
-            <a:ext cx="3291840" cy="1280160"/>
+            <a:off x="8229600" y="2194560"/>
+            <a:ext cx="3017520" cy="4023360"/>
           </a:xfrm>
           <a:prstGeom prst="rect">
             <a:avLst/>
@@ -7162,8 +7345,11 @@
           </a:bodyPr>
           <a:lstStyle/>
           <a:p>
-            <a:pPr algn="ctr">
-              <a:defRPr sz="2000" b="1">
+            <a:pPr>
+              <a:spcAft>
+                <a:spcPts val="600"/>
+              </a:spcAft>
+              <a:defRPr sz="1400" b="1">
                 <a:solidFill>
                   <a:srgbClr val="10B981"/>
                 </a:solidFill>
@@ -7171,12 +7357,15 @@
               </a:defRPr>
             </a:pPr>
             <a:r>
-              <a:t>SKANO PORTALIN</a:t>
-            </a:r>
-          </a:p>
-          <a:p>
-            <a:pPr algn="ctr">
-              <a:defRPr sz="1700">
+              <a:t>3️⃣ Hapi 3 (Min 7–10)</a:t>
+            </a:r>
+          </a:p>
+          <a:p>
+            <a:pPr>
+              <a:spcAft>
+                <a:spcPts val="1400"/>
+              </a:spcAft>
+              <a:defRPr sz="2200" b="1">
                 <a:solidFill>
                   <a:srgbClr val="FFFFFF"/>
                 </a:solidFill>
@@ -7184,11 +7373,71 @@
               </a:defRPr>
             </a:pPr>
             <a:r>
-              <a:t>Hapni portalin e kursit</a:t>
-            </a:r>
-            <a:br/>
-            <a:r>
-              <a:t>arbenl.github.io</a:t>
+              <a:t>Hapni Supabase &amp; Vercel</a:t>
+            </a:r>
+          </a:p>
+          <a:p>
+            <a:pPr>
+              <a:spcAft>
+                <a:spcPts val="1000"/>
+              </a:spcAft>
+              <a:defRPr sz="1800">
+                <a:solidFill>
+                  <a:srgbClr val="E2E8F0"/>
+                </a:solidFill>
+                <a:latin typeface="Inter"/>
+              </a:defRPr>
+            </a:pPr>
+            <a:r>
+              <a:t>• Kyçje me 1-klik përmes GitHub</a:t>
+            </a:r>
+          </a:p>
+          <a:p>
+            <a:pPr>
+              <a:spcAft>
+                <a:spcPts val="1000"/>
+              </a:spcAft>
+              <a:defRPr sz="1800">
+                <a:solidFill>
+                  <a:srgbClr val="E2E8F0"/>
+                </a:solidFill>
+                <a:latin typeface="Inter"/>
+              </a:defRPr>
+            </a:pPr>
+            <a:r>
+              <a:t>• Krijoni projektin e parë në Supabase</a:t>
+            </a:r>
+          </a:p>
+          <a:p>
+            <a:pPr>
+              <a:spcAft>
+                <a:spcPts val="1000"/>
+              </a:spcAft>
+              <a:defRPr sz="1800">
+                <a:solidFill>
+                  <a:srgbClr val="E2E8F0"/>
+                </a:solidFill>
+                <a:latin typeface="Inter"/>
+              </a:defRPr>
+            </a:pPr>
+            <a:r>
+              <a:t>• Lidhni profilin në Vercel</a:t>
+            </a:r>
+          </a:p>
+          <a:p>
+            <a:pPr>
+              <a:spcAft>
+                <a:spcPts val="1000"/>
+              </a:spcAft>
+              <a:defRPr sz="1800">
+                <a:solidFill>
+                  <a:srgbClr val="E2E8F0"/>
+                </a:solidFill>
+                <a:latin typeface="Inter"/>
+              </a:defRPr>
+            </a:pPr>
+            <a:r>
+              <a:t>• Mjedisi juaj cloud është gati!</a:t>
             </a:r>
           </a:p>
         </p:txBody>
@@ -7285,7 +7534,7 @@
               </a:defRPr>
             </a:pPr>
             <a:r>
-              <a:t>HAPI 1 • PAKOJA E STUDENTIT</a:t>
+              <a:t>MJETET FALAS PËR STUDENTË</a:t>
             </a:r>
           </a:p>
         </p:txBody>
@@ -7321,7 +7570,7 @@
               </a:defRPr>
             </a:pPr>
             <a:r>
-              <a:t>Aktivizoni GitHub Copilot Pro Falas</a:t>
+              <a:t>GitHub Student Pack &amp; Copilot Pro Falas</a:t>
             </a:r>
           </a:p>
         </p:txBody>
@@ -7349,15 +7598,15 @@
           <a:lstStyle/>
           <a:p>
             <a:pPr>
-              <a:defRPr sz="2200">
-                <a:solidFill>
-                  <a:srgbClr val="E2E8F0"/>
-                </a:solidFill>
-                <a:latin typeface="Inter"/>
-              </a:defRPr>
-            </a:pPr>
-            <a:r>
-              <a:t>Përfitoni paketën me vlerë 100$/vit pa pagesë përmes Kolegjit AAB.</a:t>
+              <a:defRPr sz="2100">
+                <a:solidFill>
+                  <a:srgbClr val="E2E8F0"/>
+                </a:solidFill>
+                <a:latin typeface="Inter"/>
+              </a:defRPr>
+            </a:pPr>
+            <a:r>
+              <a:t>Përfitoni pakon me vlerë mbi 200,000$ falas me emailin tuaj zyrtar të Kolegjit AAB.</a:t>
             </a:r>
           </a:p>
         </p:txBody>
@@ -7371,7 +7620,7 @@
         <p:spPr>
           <a:xfrm>
             <a:off x="731520" y="2011680"/>
-            <a:ext cx="6858000" cy="4389120"/>
+            <a:ext cx="4114800" cy="4389120"/>
           </a:xfrm>
           <a:prstGeom prst="roundRect">
             <a:avLst/>
@@ -7407,164 +7656,9 @@
           </a:p>
         </p:txBody>
       </p:sp>
-      <p:sp>
-        <p:nvSpPr>
-          <p:cNvPr id="7" name="TextBox 6"/>
-          <p:cNvSpPr txBox="1"/>
-          <p:nvPr/>
-        </p:nvSpPr>
-        <p:spPr>
-          <a:xfrm>
-            <a:off x="1005840" y="2194560"/>
-            <a:ext cx="6309360" cy="4023360"/>
-          </a:xfrm>
-          <a:prstGeom prst="rect">
-            <a:avLst/>
-          </a:prstGeom>
-          <a:noFill/>
-        </p:spPr>
-        <p:txBody>
-          <a:bodyPr wrap="square">
-            <a:spAutoFit/>
-          </a:bodyPr>
-          <a:lstStyle/>
-          <a:p>
-            <a:pPr>
-              <a:defRPr sz="2300" b="1">
-                <a:solidFill>
-                  <a:srgbClr val="FFFFFF"/>
-                </a:solidFill>
-                <a:latin typeface="Inter"/>
-              </a:defRPr>
-            </a:pPr>
-            <a:r>
-              <a:t>✉️ Përdorni Emailin Zyrtar AAB:</a:t>
-            </a:r>
-          </a:p>
-          <a:p>
-            <a:pPr>
-              <a:spcAft>
-                <a:spcPts val="1800"/>
-              </a:spcAft>
-              <a:defRPr sz="2000">
-                <a:solidFill>
-                  <a:srgbClr val="E2E8F0"/>
-                </a:solidFill>
-                <a:latin typeface="Inter"/>
-              </a:defRPr>
-            </a:pPr>
-            <a:r>
-              <a:t>Format: emri.mbiemri@universitetiaab.com në llogarinë tuaj GitHub.</a:t>
-            </a:r>
-          </a:p>
-          <a:p>
-            <a:pPr>
-              <a:defRPr sz="2300" b="1">
-                <a:solidFill>
-                  <a:srgbClr val="FFFFFF"/>
-                </a:solidFill>
-                <a:latin typeface="Inter"/>
-              </a:defRPr>
-            </a:pPr>
-            <a:r>
-              <a:t>🎓 Klikoni 'Get Student Benefits':</a:t>
-            </a:r>
-          </a:p>
-          <a:p>
-            <a:pPr>
-              <a:spcAft>
-                <a:spcPts val="1800"/>
-              </a:spcAft>
-              <a:defRPr sz="2000">
-                <a:solidFill>
-                  <a:srgbClr val="E2E8F0"/>
-                </a:solidFill>
-                <a:latin typeface="Inter"/>
-              </a:defRPr>
-            </a:pPr>
-            <a:r>
-              <a:t>Ngarkoni foton e kartelës studentore ose vërtetimin e vitit.</a:t>
-            </a:r>
-          </a:p>
-          <a:p>
-            <a:pPr>
-              <a:defRPr sz="2300" b="1">
-                <a:solidFill>
-                  <a:srgbClr val="FFFFFF"/>
-                </a:solidFill>
-                <a:latin typeface="Inter"/>
-              </a:defRPr>
-            </a:pPr>
-            <a:r>
-              <a:t>🤖 Copilot Aktivizohet Menjëherë:</a:t>
-            </a:r>
-          </a:p>
-          <a:p>
-            <a:pPr>
-              <a:spcAft>
-                <a:spcPts val="1800"/>
-              </a:spcAft>
-              <a:defRPr sz="2000">
-                <a:solidFill>
-                  <a:srgbClr val="E2E8F0"/>
-                </a:solidFill>
-                <a:latin typeface="Inter"/>
-              </a:defRPr>
-            </a:pPr>
-            <a:r>
-              <a:t>Akses falas i pakufizuar në VS Code për gjatë gjithë studimeve!</a:t>
-            </a:r>
-          </a:p>
-        </p:txBody>
-      </p:sp>
-      <p:sp>
-        <p:nvSpPr>
-          <p:cNvPr id="8" name="Rounded Rectangle 7"/>
-          <p:cNvSpPr/>
-          <p:nvPr/>
-        </p:nvSpPr>
-        <p:spPr>
-          <a:xfrm>
-            <a:off x="7955279" y="2011680"/>
-            <a:ext cx="3474720" cy="4389120"/>
-          </a:xfrm>
-          <a:prstGeom prst="roundRect">
-            <a:avLst/>
-          </a:prstGeom>
-          <a:solidFill>
-            <a:srgbClr val="141E34"/>
-          </a:solidFill>
-          <a:ln w="31750">
-            <a:solidFill>
-              <a:srgbClr val="10B981"/>
-            </a:solidFill>
-          </a:ln>
-        </p:spPr>
-        <p:style>
-          <a:lnRef idx="1">
-            <a:schemeClr val="accent1"/>
-          </a:lnRef>
-          <a:fillRef idx="3">
-            <a:schemeClr val="accent1"/>
-          </a:fillRef>
-          <a:effectRef idx="2">
-            <a:schemeClr val="accent1"/>
-          </a:effectRef>
-          <a:fontRef idx="minor">
-            <a:schemeClr val="lt1"/>
-          </a:fontRef>
-        </p:style>
-        <p:txBody>
-          <a:bodyPr rtlCol="0" anchor="ctr"/>
-          <a:lstStyle/>
-          <a:p>
-            <a:pPr algn="ctr"/>
-          </a:p>
-        </p:txBody>
-      </p:sp>
       <p:pic>
         <p:nvPicPr>
-          <p:cNvPr id="9" name="Picture 8" descr="qr_master_github_pack.png"/>
+          <p:cNvPr id="7" name="Picture 6" descr="qr_master_github_pack.png"/>
           <p:cNvPicPr>
             <a:picLocks noChangeAspect="1"/>
           </p:cNvPicPr>
@@ -7578,8 +7672,8 @@
         </p:blipFill>
         <p:spPr>
           <a:xfrm>
-            <a:off x="8321040" y="2286000"/>
-            <a:ext cx="2743200" cy="2743200"/>
+            <a:off x="1188720" y="2286000"/>
+            <a:ext cx="3200400" cy="3200400"/>
           </a:xfrm>
           <a:prstGeom prst="rect">
             <a:avLst/>
@@ -7588,14 +7682,14 @@
       </p:pic>
       <p:sp>
         <p:nvSpPr>
-          <p:cNvPr id="10" name="TextBox 9"/>
+          <p:cNvPr id="8" name="TextBox 7"/>
           <p:cNvSpPr txBox="1"/>
           <p:nvPr/>
         </p:nvSpPr>
         <p:spPr>
           <a:xfrm>
-            <a:off x="8046720" y="5120640"/>
-            <a:ext cx="3291840" cy="1097280"/>
+            <a:off x="914400" y="5577840"/>
+            <a:ext cx="3749039" cy="731520"/>
           </a:xfrm>
           <a:prstGeom prst="rect">
             <a:avLst/>
@@ -7609,15 +7703,167 @@
           <a:lstStyle/>
           <a:p>
             <a:pPr algn="ctr">
-              <a:defRPr sz="2000" b="1">
-                <a:solidFill>
-                  <a:srgbClr val="10B981"/>
-                </a:solidFill>
-                <a:latin typeface="Inter"/>
-              </a:defRPr>
-            </a:pPr>
-            <a:r>
-              <a:t>SKANO PËR COPILOT</a:t>
+              <a:defRPr sz="1600" b="1">
+                <a:solidFill>
+                  <a:srgbClr val="38BDF8"/>
+                </a:solidFill>
+                <a:latin typeface="Inter"/>
+              </a:defRPr>
+            </a:pPr>
+            <a:r>
+              <a:t>AKTIVIZO COPILOT PRO</a:t>
+            </a:r>
+            <a:br/>
+            <a:r>
+              <a:t>education.github.com/pack</a:t>
+            </a:r>
+          </a:p>
+        </p:txBody>
+      </p:sp>
+      <p:sp>
+        <p:nvSpPr>
+          <p:cNvPr id="9" name="Rounded Rectangle 8"/>
+          <p:cNvSpPr/>
+          <p:nvPr/>
+        </p:nvSpPr>
+        <p:spPr>
+          <a:xfrm>
+            <a:off x="5120640" y="2011680"/>
+            <a:ext cx="6309360" cy="4389120"/>
+          </a:xfrm>
+          <a:prstGeom prst="roundRect">
+            <a:avLst/>
+          </a:prstGeom>
+          <a:solidFill>
+            <a:srgbClr val="141E34"/>
+          </a:solidFill>
+          <a:ln w="31750">
+            <a:solidFill>
+              <a:srgbClr val="38BDF8"/>
+            </a:solidFill>
+          </a:ln>
+        </p:spPr>
+        <p:style>
+          <a:lnRef idx="1">
+            <a:schemeClr val="accent1"/>
+          </a:lnRef>
+          <a:fillRef idx="3">
+            <a:schemeClr val="accent1"/>
+          </a:fillRef>
+          <a:effectRef idx="2">
+            <a:schemeClr val="accent1"/>
+          </a:effectRef>
+          <a:fontRef idx="minor">
+            <a:schemeClr val="lt1"/>
+          </a:fontRef>
+        </p:style>
+        <p:txBody>
+          <a:bodyPr rtlCol="0" anchor="ctr"/>
+          <a:lstStyle/>
+          <a:p>
+            <a:pPr algn="ctr"/>
+          </a:p>
+        </p:txBody>
+      </p:sp>
+      <p:sp>
+        <p:nvSpPr>
+          <p:cNvPr id="10" name="TextBox 9"/>
+          <p:cNvSpPr txBox="1"/>
+          <p:nvPr/>
+        </p:nvSpPr>
+        <p:spPr>
+          <a:xfrm>
+            <a:off x="5394960" y="2194560"/>
+            <a:ext cx="5760720" cy="4023360"/>
+          </a:xfrm>
+          <a:prstGeom prst="rect">
+            <a:avLst/>
+          </a:prstGeom>
+          <a:noFill/>
+        </p:spPr>
+        <p:txBody>
+          <a:bodyPr wrap="square">
+            <a:spAutoFit/>
+          </a:bodyPr>
+          <a:lstStyle/>
+          <a:p>
+            <a:pPr>
+              <a:spcAft>
+                <a:spcPts val="1400"/>
+              </a:spcAft>
+              <a:defRPr sz="2500" b="1">
+                <a:solidFill>
+                  <a:srgbClr val="FFFFFF"/>
+                </a:solidFill>
+                <a:latin typeface="Inter"/>
+              </a:defRPr>
+            </a:pPr>
+            <a:r>
+              <a:t>🎁 Çfarë Përfshin Pakoja Studentore?</a:t>
+            </a:r>
+          </a:p>
+          <a:p>
+            <a:pPr>
+              <a:spcAft>
+                <a:spcPts val="1000"/>
+              </a:spcAft>
+              <a:defRPr sz="1800">
+                <a:solidFill>
+                  <a:srgbClr val="E2E8F0"/>
+                </a:solidFill>
+                <a:latin typeface="Inter"/>
+              </a:defRPr>
+            </a:pPr>
+            <a:r>
+              <a:t>• GitHub Copilot Pro: Qasje falas e pakufizuar në AI më të avancuar për kodim (vlerë 120$/vit).</a:t>
+            </a:r>
+          </a:p>
+          <a:p>
+            <a:pPr>
+              <a:spcAft>
+                <a:spcPts val="1000"/>
+              </a:spcAft>
+              <a:defRPr sz="1800">
+                <a:solidFill>
+                  <a:srgbClr val="E2E8F0"/>
+                </a:solidFill>
+                <a:latin typeface="Inter"/>
+              </a:defRPr>
+            </a:pPr>
+            <a:r>
+              <a:t>• GitHub Codespaces: Mjedis zhvillimi i plotë në cloud — kodo direkt nga shfletuesi pa instaluar asgjë lokalisht.</a:t>
+            </a:r>
+          </a:p>
+          <a:p>
+            <a:pPr>
+              <a:spcAft>
+                <a:spcPts val="1000"/>
+              </a:spcAft>
+              <a:defRPr sz="1800">
+                <a:solidFill>
+                  <a:srgbClr val="E2E8F0"/>
+                </a:solidFill>
+                <a:latin typeface="Inter"/>
+              </a:defRPr>
+            </a:pPr>
+            <a:r>
+              <a:t>• Domain &amp; SSL Falas: Emër domeni personal (.me / .tech) falas për 1 vit për portofolin tuaj personal.</a:t>
+            </a:r>
+          </a:p>
+          <a:p>
+            <a:pPr>
+              <a:spcAft>
+                <a:spcPts val="1000"/>
+              </a:spcAft>
+              <a:defRPr sz="1800">
+                <a:solidFill>
+                  <a:srgbClr val="E2E8F0"/>
+                </a:solidFill>
+                <a:latin typeface="Inter"/>
+              </a:defRPr>
+            </a:pPr>
+            <a:r>
+              <a:t>• Kredi Cloud: Kredi falas në Microsoft Azure, DigitalOcean dhe platforma të tjera partnere.</a:t>
             </a:r>
           </a:p>
         </p:txBody>
@@ -7714,7 +7960,7 @@
               </a:defRPr>
             </a:pPr>
             <a:r>
-              <a:t>HAPAT 2 &amp; 3 • INFRASTRUKTURA CLOUD</a:t>
+              <a:t>INFRASTRUKTURA NË RE</a:t>
             </a:r>
           </a:p>
         </p:txBody>
@@ -7750,7 +7996,7 @@
               </a:defRPr>
             </a:pPr>
             <a:r>
-              <a:t>Supabase &amp; Vercel: Kyçja me 1-Kliko</a:t>
+              <a:t>Aktivizimi i Supabase &amp; Vercel me 1-Klik</a:t>
             </a:r>
           </a:p>
         </p:txBody>
@@ -7778,15 +8024,15 @@
           <a:lstStyle/>
           <a:p>
             <a:pPr>
-              <a:defRPr sz="2200">
-                <a:solidFill>
-                  <a:srgbClr val="E2E8F0"/>
-                </a:solidFill>
-                <a:latin typeface="Inter"/>
-              </a:defRPr>
-            </a:pPr>
-            <a:r>
-              <a:t>Nuk keni nevojë për fjalëkalime të reja — zgjidhni 'Continue with GitHub'.</a:t>
+              <a:defRPr sz="2100">
+                <a:solidFill>
+                  <a:srgbClr val="E2E8F0"/>
+                </a:solidFill>
+                <a:latin typeface="Inter"/>
+              </a:defRPr>
+            </a:pPr>
+            <a:r>
+              <a:t>Dy platformat kryesore cloud që fuqizojnë bazën e të dhënave dhe publikimin e aplikacionit tuaj.</a:t>
             </a:r>
           </a:p>
         </p:txBody>
@@ -7852,8 +8098,8 @@
         </p:blipFill>
         <p:spPr>
           <a:xfrm>
-            <a:off x="1005840" y="2286000"/>
-            <a:ext cx="2194560" cy="2194560"/>
+            <a:off x="1097280" y="2286000"/>
+            <a:ext cx="2377440" cy="2377440"/>
           </a:xfrm>
           <a:prstGeom prst="rect">
             <a:avLst/>
@@ -7868,8 +8114,8 @@
         </p:nvSpPr>
         <p:spPr>
           <a:xfrm>
-            <a:off x="3383280" y="2194560"/>
-            <a:ext cx="2286000" cy="4023360"/>
+            <a:off x="3566160" y="2194560"/>
+            <a:ext cx="2194560" cy="3840480"/>
           </a:xfrm>
           <a:prstGeom prst="rect">
             <a:avLst/>
@@ -7884,9 +8130,9 @@
           <a:p>
             <a:pPr>
               <a:spcAft>
-                <a:spcPts val="1200"/>
-              </a:spcAft>
-              <a:defRPr sz="2400" b="1">
+                <a:spcPts val="1000"/>
+              </a:spcAft>
+              <a:defRPr sz="2200" b="1">
                 <a:solidFill>
                   <a:srgbClr val="10B981"/>
                 </a:solidFill>
@@ -7894,28 +8140,71 @@
               </a:defRPr>
             </a:pPr>
             <a:r>
-              <a:t>🗄️ SUPABASE</a:t>
-            </a:r>
-          </a:p>
-          <a:p>
-            <a:pPr>
-              <a:defRPr sz="1900">
-                <a:solidFill>
-                  <a:srgbClr val="E2E8F0"/>
-                </a:solidFill>
-                <a:latin typeface="Inter"/>
-              </a:defRPr>
-            </a:pPr>
-            <a:r>
-              <a:t>• Skanoni QR kodin</a:t>
-            </a:r>
-            <a:br/>
-            <a:r>
-              <a:t>• 'Sign in with GitHub'</a:t>
-            </a:r>
-            <a:br/>
-            <a:r>
-              <a:t>• Databaza PostgreSQL &amp; Auth gati për aplikacionin tuaj!</a:t>
+              <a:t>🗄️ Supabase Cloud</a:t>
+            </a:r>
+          </a:p>
+          <a:p>
+            <a:pPr>
+              <a:spcAft>
+                <a:spcPts val="600"/>
+              </a:spcAft>
+              <a:defRPr sz="1600">
+                <a:solidFill>
+                  <a:srgbClr val="E2E8F0"/>
+                </a:solidFill>
+                <a:latin typeface="Inter"/>
+              </a:defRPr>
+            </a:pPr>
+            <a:r>
+              <a:t>• Kyçje me GitHub</a:t>
+            </a:r>
+          </a:p>
+          <a:p>
+            <a:pPr>
+              <a:spcAft>
+                <a:spcPts val="600"/>
+              </a:spcAft>
+              <a:defRPr sz="1600">
+                <a:solidFill>
+                  <a:srgbClr val="E2E8F0"/>
+                </a:solidFill>
+                <a:latin typeface="Inter"/>
+              </a:defRPr>
+            </a:pPr>
+            <a:r>
+              <a:t>• PostgreSQL falas</a:t>
+            </a:r>
+          </a:p>
+          <a:p>
+            <a:pPr>
+              <a:spcAft>
+                <a:spcPts val="600"/>
+              </a:spcAft>
+              <a:defRPr sz="1600">
+                <a:solidFill>
+                  <a:srgbClr val="E2E8F0"/>
+                </a:solidFill>
+                <a:latin typeface="Inter"/>
+              </a:defRPr>
+            </a:pPr>
+            <a:r>
+              <a:t>• Auth &amp; Siguria RLS</a:t>
+            </a:r>
+          </a:p>
+          <a:p>
+            <a:pPr>
+              <a:spcAft>
+                <a:spcPts val="600"/>
+              </a:spcAft>
+              <a:defRPr sz="1600">
+                <a:solidFill>
+                  <a:srgbClr val="E2E8F0"/>
+                </a:solidFill>
+                <a:latin typeface="Inter"/>
+              </a:defRPr>
+            </a:pPr>
+            <a:r>
+              <a:t>• Realtime sync</a:t>
             </a:r>
           </a:p>
         </p:txBody>
@@ -7939,7 +8228,7 @@
           </a:solidFill>
           <a:ln w="31750">
             <a:solidFill>
-              <a:srgbClr val="38BDF8"/>
+              <a:srgbClr val="F59E0B"/>
             </a:solidFill>
           </a:ln>
         </p:spPr>
@@ -7981,8 +8270,8 @@
         </p:blipFill>
         <p:spPr>
           <a:xfrm>
-            <a:off x="6583680" y="2286000"/>
-            <a:ext cx="2194560" cy="2194560"/>
+            <a:off x="6675120" y="2286000"/>
+            <a:ext cx="2377440" cy="2377440"/>
           </a:xfrm>
           <a:prstGeom prst="rect">
             <a:avLst/>
@@ -7997,8 +8286,8 @@
         </p:nvSpPr>
         <p:spPr>
           <a:xfrm>
-            <a:off x="8961120" y="2194560"/>
-            <a:ext cx="2286000" cy="4023360"/>
+            <a:off x="9144000" y="2194560"/>
+            <a:ext cx="2194560" cy="3840480"/>
           </a:xfrm>
           <a:prstGeom prst="rect">
             <a:avLst/>
@@ -8013,38 +8302,81 @@
           <a:p>
             <a:pPr>
               <a:spcAft>
-                <a:spcPts val="1200"/>
-              </a:spcAft>
-              <a:defRPr sz="2400" b="1">
-                <a:solidFill>
-                  <a:srgbClr val="38BDF8"/>
-                </a:solidFill>
-                <a:latin typeface="Inter"/>
-              </a:defRPr>
-            </a:pPr>
-            <a:r>
-              <a:t>🚀 VERCEL</a:t>
-            </a:r>
-          </a:p>
-          <a:p>
-            <a:pPr>
-              <a:defRPr sz="1900">
-                <a:solidFill>
-                  <a:srgbClr val="E2E8F0"/>
-                </a:solidFill>
-                <a:latin typeface="Inter"/>
-              </a:defRPr>
-            </a:pPr>
-            <a:r>
-              <a:t>• Skanoni QR kodin</a:t>
-            </a:r>
-            <a:br/>
-            <a:r>
-              <a:t>• 'Continue with GitHub'</a:t>
-            </a:r>
-            <a:br/>
-            <a:r>
-              <a:t>• Publikimi live bëhet automatik me çdo git push!</a:t>
+                <a:spcPts val="1000"/>
+              </a:spcAft>
+              <a:defRPr sz="2200" b="1">
+                <a:solidFill>
+                  <a:srgbClr val="F59E0B"/>
+                </a:solidFill>
+                <a:latin typeface="Inter"/>
+              </a:defRPr>
+            </a:pPr>
+            <a:r>
+              <a:t>▲ Vercel Platform</a:t>
+            </a:r>
+          </a:p>
+          <a:p>
+            <a:pPr>
+              <a:spcAft>
+                <a:spcPts val="600"/>
+              </a:spcAft>
+              <a:defRPr sz="1600">
+                <a:solidFill>
+                  <a:srgbClr val="E2E8F0"/>
+                </a:solidFill>
+                <a:latin typeface="Inter"/>
+              </a:defRPr>
+            </a:pPr>
+            <a:r>
+              <a:t>• Kyçje me GitHub</a:t>
+            </a:r>
+          </a:p>
+          <a:p>
+            <a:pPr>
+              <a:spcAft>
+                <a:spcPts val="600"/>
+              </a:spcAft>
+              <a:defRPr sz="1600">
+                <a:solidFill>
+                  <a:srgbClr val="E2E8F0"/>
+                </a:solidFill>
+                <a:latin typeface="Inter"/>
+              </a:defRPr>
+            </a:pPr>
+            <a:r>
+              <a:t>• Publikim me 1 klik</a:t>
+            </a:r>
+          </a:p>
+          <a:p>
+            <a:pPr>
+              <a:spcAft>
+                <a:spcPts val="600"/>
+              </a:spcAft>
+              <a:defRPr sz="1600">
+                <a:solidFill>
+                  <a:srgbClr val="E2E8F0"/>
+                </a:solidFill>
+                <a:latin typeface="Inter"/>
+              </a:defRPr>
+            </a:pPr>
+            <a:r>
+              <a:t>• Domain .vercel.app</a:t>
+            </a:r>
+          </a:p>
+          <a:p>
+            <a:pPr>
+              <a:spcAft>
+                <a:spcPts val="600"/>
+              </a:spcAft>
+              <a:defRPr sz="1600">
+                <a:solidFill>
+                  <a:srgbClr val="E2E8F0"/>
+                </a:solidFill>
+                <a:latin typeface="Inter"/>
+              </a:defRPr>
+            </a:pPr>
+            <a:r>
+              <a:t>• Edge Network global</a:t>
             </a:r>
           </a:p>
         </p:txBody>
@@ -8141,7 +8473,7 @@
               </a:defRPr>
             </a:pPr>
             <a:r>
-              <a:t>PLANI I VEPRIMIT</a:t>
+              <a:t>HAPAT E RADHËS</a:t>
             </a:r>
           </a:p>
         </p:txBody>
@@ -8177,7 +8509,7 @@
               </a:defRPr>
             </a:pPr>
             <a:r>
-              <a:t>Gati për Javën e Dytë në Laborator!</a:t>
+              <a:t>Detyrat për Javën 2: Hapi i Parë Drejt Produktit</a:t>
             </a:r>
           </a:p>
         </p:txBody>
@@ -8205,15 +8537,15 @@
           <a:lstStyle/>
           <a:p>
             <a:pPr>
-              <a:defRPr sz="2200">
-                <a:solidFill>
-                  <a:srgbClr val="E2E8F0"/>
-                </a:solidFill>
-                <a:latin typeface="Inter"/>
-              </a:defRPr>
-            </a:pPr>
-            <a:r>
-              <a:t>Hapat konkretë deri në takimin tonë të ardhshëm praktik.</a:t>
+              <a:defRPr sz="2100">
+                <a:solidFill>
+                  <a:srgbClr val="E2E8F0"/>
+                </a:solidFill>
+                <a:latin typeface="Inter"/>
+              </a:defRPr>
+            </a:pPr>
+            <a:r>
+              <a:t>Çfarë duhet të përgatisni për takimin e radhës në ligjëratë dhe ushtrime.</a:t>
             </a:r>
           </a:p>
         </p:txBody>
@@ -8227,7 +8559,303 @@
         <p:spPr>
           <a:xfrm>
             <a:off x="731520" y="2011680"/>
-            <a:ext cx="5120640" cy="4389120"/>
+            <a:ext cx="3383280" cy="4389120"/>
+          </a:xfrm>
+          <a:prstGeom prst="roundRect">
+            <a:avLst/>
+          </a:prstGeom>
+          <a:solidFill>
+            <a:srgbClr val="141E34"/>
+          </a:solidFill>
+          <a:ln w="31750">
+            <a:solidFill>
+              <a:srgbClr val="38BDF8"/>
+            </a:solidFill>
+          </a:ln>
+        </p:spPr>
+        <p:style>
+          <a:lnRef idx="1">
+            <a:schemeClr val="accent1"/>
+          </a:lnRef>
+          <a:fillRef idx="3">
+            <a:schemeClr val="accent1"/>
+          </a:fillRef>
+          <a:effectRef idx="2">
+            <a:schemeClr val="accent1"/>
+          </a:effectRef>
+          <a:fontRef idx="minor">
+            <a:schemeClr val="lt1"/>
+          </a:fontRef>
+        </p:style>
+        <p:txBody>
+          <a:bodyPr rtlCol="0" anchor="ctr"/>
+          <a:lstStyle/>
+          <a:p>
+            <a:pPr algn="ctr"/>
+          </a:p>
+        </p:txBody>
+      </p:sp>
+      <p:sp>
+        <p:nvSpPr>
+          <p:cNvPr id="7" name="TextBox 6"/>
+          <p:cNvSpPr txBox="1"/>
+          <p:nvPr/>
+        </p:nvSpPr>
+        <p:spPr>
+          <a:xfrm>
+            <a:off x="914400" y="2194560"/>
+            <a:ext cx="3017520" cy="4023360"/>
+          </a:xfrm>
+          <a:prstGeom prst="rect">
+            <a:avLst/>
+          </a:prstGeom>
+          <a:noFill/>
+        </p:spPr>
+        <p:txBody>
+          <a:bodyPr wrap="square">
+            <a:spAutoFit/>
+          </a:bodyPr>
+          <a:lstStyle/>
+          <a:p>
+            <a:pPr>
+              <a:spcAft>
+                <a:spcPts val="600"/>
+              </a:spcAft>
+              <a:defRPr sz="1400" b="1">
+                <a:solidFill>
+                  <a:srgbClr val="38BDF8"/>
+                </a:solidFill>
+                <a:latin typeface="Inter"/>
+              </a:defRPr>
+            </a:pPr>
+            <a:r>
+              <a:t>1️⃣ Detyra 1</a:t>
+            </a:r>
+          </a:p>
+          <a:p>
+            <a:pPr>
+              <a:spcAft>
+                <a:spcPts val="1400"/>
+              </a:spcAft>
+              <a:defRPr sz="2200" b="1">
+                <a:solidFill>
+                  <a:srgbClr val="FFFFFF"/>
+                </a:solidFill>
+                <a:latin typeface="Inter"/>
+              </a:defRPr>
+            </a:pPr>
+            <a:r>
+              <a:t>Zgjidhni Biznesin</a:t>
+            </a:r>
+          </a:p>
+          <a:p>
+            <a:pPr>
+              <a:spcAft>
+                <a:spcPts val="1000"/>
+              </a:spcAft>
+              <a:defRPr sz="1800">
+                <a:solidFill>
+                  <a:srgbClr val="E2E8F0"/>
+                </a:solidFill>
+                <a:latin typeface="Inter"/>
+              </a:defRPr>
+            </a:pPr>
+            <a:r>
+              <a:t>• Flisni me një biznes familjar, punishte mobiliesh, kafene apo servis lokal.</a:t>
+            </a:r>
+          </a:p>
+          <a:p>
+            <a:pPr>
+              <a:spcAft>
+                <a:spcPts val="1000"/>
+              </a:spcAft>
+              <a:defRPr sz="1800">
+                <a:solidFill>
+                  <a:srgbClr val="E2E8F0"/>
+                </a:solidFill>
+                <a:latin typeface="Inter"/>
+              </a:defRPr>
+            </a:pPr>
+            <a:r>
+              <a:t>• Zbuloni problemin e tyre kryesor ditor (inventari, porositë, mungesa e pjesëve).</a:t>
+            </a:r>
+          </a:p>
+          <a:p>
+            <a:pPr>
+              <a:spcAft>
+                <a:spcPts val="1000"/>
+              </a:spcAft>
+              <a:defRPr sz="1800">
+                <a:solidFill>
+                  <a:srgbClr val="E2E8F0"/>
+                </a:solidFill>
+                <a:latin typeface="Inter"/>
+              </a:defRPr>
+            </a:pPr>
+            <a:r>
+              <a:t>• Regjistroni temën tuaj në portal te Katalogu i Temave.</a:t>
+            </a:r>
+          </a:p>
+        </p:txBody>
+      </p:sp>
+      <p:sp>
+        <p:nvSpPr>
+          <p:cNvPr id="8" name="Rounded Rectangle 7"/>
+          <p:cNvSpPr/>
+          <p:nvPr/>
+        </p:nvSpPr>
+        <p:spPr>
+          <a:xfrm>
+            <a:off x="4389120" y="2011680"/>
+            <a:ext cx="3383280" cy="4389120"/>
+          </a:xfrm>
+          <a:prstGeom prst="roundRect">
+            <a:avLst/>
+          </a:prstGeom>
+          <a:solidFill>
+            <a:srgbClr val="141E34"/>
+          </a:solidFill>
+          <a:ln w="31750">
+            <a:solidFill>
+              <a:srgbClr val="6366F1"/>
+            </a:solidFill>
+          </a:ln>
+        </p:spPr>
+        <p:style>
+          <a:lnRef idx="1">
+            <a:schemeClr val="accent1"/>
+          </a:lnRef>
+          <a:fillRef idx="3">
+            <a:schemeClr val="accent1"/>
+          </a:fillRef>
+          <a:effectRef idx="2">
+            <a:schemeClr val="accent1"/>
+          </a:effectRef>
+          <a:fontRef idx="minor">
+            <a:schemeClr val="lt1"/>
+          </a:fontRef>
+        </p:style>
+        <p:txBody>
+          <a:bodyPr rtlCol="0" anchor="ctr"/>
+          <a:lstStyle/>
+          <a:p>
+            <a:pPr algn="ctr"/>
+          </a:p>
+        </p:txBody>
+      </p:sp>
+      <p:sp>
+        <p:nvSpPr>
+          <p:cNvPr id="9" name="TextBox 8"/>
+          <p:cNvSpPr txBox="1"/>
+          <p:nvPr/>
+        </p:nvSpPr>
+        <p:spPr>
+          <a:xfrm>
+            <a:off x="4572000" y="2194560"/>
+            <a:ext cx="3017520" cy="4023360"/>
+          </a:xfrm>
+          <a:prstGeom prst="rect">
+            <a:avLst/>
+          </a:prstGeom>
+          <a:noFill/>
+        </p:spPr>
+        <p:txBody>
+          <a:bodyPr wrap="square">
+            <a:spAutoFit/>
+          </a:bodyPr>
+          <a:lstStyle/>
+          <a:p>
+            <a:pPr>
+              <a:spcAft>
+                <a:spcPts val="600"/>
+              </a:spcAft>
+              <a:defRPr sz="1400" b="1">
+                <a:solidFill>
+                  <a:srgbClr val="6366F1"/>
+                </a:solidFill>
+                <a:latin typeface="Inter"/>
+              </a:defRPr>
+            </a:pPr>
+            <a:r>
+              <a:t>2️⃣ Detyra 2</a:t>
+            </a:r>
+          </a:p>
+          <a:p>
+            <a:pPr>
+              <a:spcAft>
+                <a:spcPts val="1400"/>
+              </a:spcAft>
+              <a:defRPr sz="2200" b="1">
+                <a:solidFill>
+                  <a:srgbClr val="FFFFFF"/>
+                </a:solidFill>
+                <a:latin typeface="Inter"/>
+              </a:defRPr>
+            </a:pPr>
+            <a:r>
+              <a:t>Skica e Parë në Letër</a:t>
+            </a:r>
+          </a:p>
+          <a:p>
+            <a:pPr>
+              <a:spcAft>
+                <a:spcPts val="1000"/>
+              </a:spcAft>
+              <a:defRPr sz="1800">
+                <a:solidFill>
+                  <a:srgbClr val="E2E8F0"/>
+                </a:solidFill>
+                <a:latin typeface="Inter"/>
+              </a:defRPr>
+            </a:pPr>
+            <a:r>
+              <a:t>• Merrni një fletë të bardhë dhe skiconi 3 ekranet kryesore të aplikacionit.</a:t>
+            </a:r>
+          </a:p>
+          <a:p>
+            <a:pPr>
+              <a:spcAft>
+                <a:spcPts val="1000"/>
+              </a:spcAft>
+              <a:defRPr sz="1800">
+                <a:solidFill>
+                  <a:srgbClr val="E2E8F0"/>
+                </a:solidFill>
+                <a:latin typeface="Inter"/>
+              </a:defRPr>
+            </a:pPr>
+            <a:r>
+              <a:t>• Identifikoni 3 pjesët kryesore të inventarit që duhen skanuar.</a:t>
+            </a:r>
+          </a:p>
+          <a:p>
+            <a:pPr>
+              <a:spcAft>
+                <a:spcPts val="1000"/>
+              </a:spcAft>
+              <a:defRPr sz="1800">
+                <a:solidFill>
+                  <a:srgbClr val="E2E8F0"/>
+                </a:solidFill>
+                <a:latin typeface="Inter"/>
+              </a:defRPr>
+            </a:pPr>
+            <a:r>
+              <a:t>• Përcaktoni butonin kryesor që do të përdorë klienti ose punëtori.</a:t>
+            </a:r>
+          </a:p>
+        </p:txBody>
+      </p:sp>
+      <p:sp>
+        <p:nvSpPr>
+          <p:cNvPr id="10" name="Rounded Rectangle 9"/>
+          <p:cNvSpPr/>
+          <p:nvPr/>
+        </p:nvSpPr>
+        <p:spPr>
+          <a:xfrm>
+            <a:off x="8046720" y="2011680"/>
+            <a:ext cx="3383280" cy="4389120"/>
           </a:xfrm>
           <a:prstGeom prst="roundRect">
             <a:avLst/>
@@ -8265,14 +8893,14 @@
       </p:sp>
       <p:sp>
         <p:nvSpPr>
-          <p:cNvPr id="7" name="TextBox 6"/>
+          <p:cNvPr id="11" name="TextBox 10"/>
           <p:cNvSpPr txBox="1"/>
           <p:nvPr/>
         </p:nvSpPr>
         <p:spPr>
           <a:xfrm>
-            <a:off x="1005840" y="2286000"/>
-            <a:ext cx="4572000" cy="3840480"/>
+            <a:off x="8229600" y="2194560"/>
+            <a:ext cx="3017520" cy="4023360"/>
           </a:xfrm>
           <a:prstGeom prst="rect">
             <a:avLst/>
@@ -8287,9 +8915,9 @@
           <a:p>
             <a:pPr>
               <a:spcAft>
-                <a:spcPts val="1600"/>
-              </a:spcAft>
-              <a:defRPr sz="2500" b="1">
+                <a:spcPts val="600"/>
+              </a:spcAft>
+              <a:defRPr sz="1400" b="1">
                 <a:solidFill>
                   <a:srgbClr val="10B981"/>
                 </a:solidFill>
@@ -8297,251 +8925,71 @@
               </a:defRPr>
             </a:pPr>
             <a:r>
-              <a:t>📋 Detyrat para Javës 2:</a:t>
-            </a:r>
-          </a:p>
-          <a:p>
-            <a:pPr>
-              <a:spcAft>
-                <a:spcPts val="1200"/>
-              </a:spcAft>
-              <a:defRPr sz="2000">
-                <a:solidFill>
-                  <a:srgbClr val="E2E8F0"/>
-                </a:solidFill>
-                <a:latin typeface="Inter"/>
-              </a:defRPr>
-            </a:pPr>
-            <a:r>
-              <a:t>• Zgjidhni biznesin lokal (familjar, mik, apo lokal në lagje).</a:t>
-            </a:r>
-          </a:p>
-          <a:p>
-            <a:pPr>
-              <a:spcAft>
-                <a:spcPts val="1200"/>
-              </a:spcAft>
-              <a:defRPr sz="2000">
-                <a:solidFill>
-                  <a:srgbClr val="E2E8F0"/>
-                </a:solidFill>
-                <a:latin typeface="Inter"/>
-              </a:defRPr>
-            </a:pPr>
-            <a:r>
-              <a:t>• Bisedoni me ta: Cili është procesi që duan ta digjitalizojnë?</a:t>
-            </a:r>
-          </a:p>
-          <a:p>
-            <a:pPr>
-              <a:spcAft>
-                <a:spcPts val="1200"/>
-              </a:spcAft>
-              <a:defRPr sz="2000">
-                <a:solidFill>
-                  <a:srgbClr val="E2E8F0"/>
-                </a:solidFill>
-                <a:latin typeface="Inter"/>
-              </a:defRPr>
-            </a:pPr>
-            <a:r>
-              <a:t>• Verifikoni miratimin e GitHub Student Pack në email.</a:t>
-            </a:r>
-          </a:p>
-          <a:p>
-            <a:pPr>
-              <a:spcAft>
-                <a:spcPts val="1200"/>
-              </a:spcAft>
-              <a:defRPr sz="2000">
-                <a:solidFill>
-                  <a:srgbClr val="E2E8F0"/>
-                </a:solidFill>
-                <a:latin typeface="Inter"/>
-              </a:defRPr>
-            </a:pPr>
-            <a:r>
-              <a:t>• Instaloni VS Code &amp; GitHub Copilot Extension në laptop.</a:t>
-            </a:r>
-          </a:p>
-          <a:p>
-            <a:pPr>
-              <a:spcAft>
-                <a:spcPts val="1200"/>
-              </a:spcAft>
-              <a:defRPr sz="2000">
-                <a:solidFill>
-                  <a:srgbClr val="E2E8F0"/>
-                </a:solidFill>
-                <a:latin typeface="Inter"/>
-              </a:defRPr>
-            </a:pPr>
-            <a:r>
-              <a:t>• Ruani portalin arbenl.github.io në Homescreen të telefonit!</a:t>
-            </a:r>
-          </a:p>
-        </p:txBody>
-      </p:sp>
-      <p:sp>
-        <p:nvSpPr>
-          <p:cNvPr id="8" name="Rounded Rectangle 7"/>
-          <p:cNvSpPr/>
-          <p:nvPr/>
-        </p:nvSpPr>
-        <p:spPr>
-          <a:xfrm>
-            <a:off x="6309360" y="2011680"/>
-            <a:ext cx="5120640" cy="4389120"/>
-          </a:xfrm>
-          <a:prstGeom prst="roundRect">
-            <a:avLst/>
-          </a:prstGeom>
-          <a:solidFill>
-            <a:srgbClr val="141E34"/>
-          </a:solidFill>
-          <a:ln w="31750">
-            <a:solidFill>
-              <a:srgbClr val="38BDF8"/>
-            </a:solidFill>
-          </a:ln>
-        </p:spPr>
-        <p:style>
-          <a:lnRef idx="1">
-            <a:schemeClr val="accent1"/>
-          </a:lnRef>
-          <a:fillRef idx="3">
-            <a:schemeClr val="accent1"/>
-          </a:fillRef>
-          <a:effectRef idx="2">
-            <a:schemeClr val="accent1"/>
-          </a:effectRef>
-          <a:fontRef idx="minor">
-            <a:schemeClr val="lt1"/>
-          </a:fontRef>
-        </p:style>
-        <p:txBody>
-          <a:bodyPr rtlCol="0" anchor="ctr"/>
-          <a:lstStyle/>
-          <a:p>
-            <a:pPr algn="ctr"/>
-          </a:p>
-        </p:txBody>
-      </p:sp>
-      <p:sp>
-        <p:nvSpPr>
-          <p:cNvPr id="9" name="TextBox 8"/>
-          <p:cNvSpPr txBox="1"/>
-          <p:nvPr/>
-        </p:nvSpPr>
-        <p:spPr>
-          <a:xfrm>
-            <a:off x="6583680" y="2286000"/>
-            <a:ext cx="4572000" cy="3840480"/>
-          </a:xfrm>
-          <a:prstGeom prst="rect">
-            <a:avLst/>
-          </a:prstGeom>
-          <a:noFill/>
-        </p:spPr>
-        <p:txBody>
-          <a:bodyPr wrap="square">
-            <a:spAutoFit/>
-          </a:bodyPr>
-          <a:lstStyle/>
-          <a:p>
-            <a:pPr>
-              <a:spcAft>
-                <a:spcPts val="1600"/>
-              </a:spcAft>
-              <a:defRPr sz="2500" b="1">
-                <a:solidFill>
-                  <a:srgbClr val="38BDF8"/>
-                </a:solidFill>
-                <a:latin typeface="Inter"/>
-              </a:defRPr>
-            </a:pPr>
-            <a:r>
-              <a:t>🏛️ Burimet &amp; Mbështetja:</a:t>
-            </a:r>
-          </a:p>
-          <a:p>
-            <a:pPr>
-              <a:spcAft>
-                <a:spcPts val="1200"/>
-              </a:spcAft>
-              <a:defRPr sz="2000">
-                <a:solidFill>
-                  <a:srgbClr val="E2E8F0"/>
-                </a:solidFill>
-                <a:latin typeface="Inter"/>
-              </a:defRPr>
-            </a:pPr>
-            <a:r>
-              <a:t>🌐 Portali Zyrtar: arbenl.github.io</a:t>
-            </a:r>
-          </a:p>
-          <a:p>
-            <a:pPr>
-              <a:spcAft>
-                <a:spcPts val="1200"/>
-              </a:spcAft>
-              <a:defRPr sz="2000">
-                <a:solidFill>
-                  <a:srgbClr val="E2E8F0"/>
-                </a:solidFill>
-                <a:latin typeface="Inter"/>
-              </a:defRPr>
-            </a:pPr>
-            <a:r>
-              <a:t>✉️ E-maili Zyrtar: arben.lila@universitetiaab.com</a:t>
-            </a:r>
-          </a:p>
-          <a:p>
-            <a:pPr>
-              <a:spcAft>
-                <a:spcPts val="1200"/>
-              </a:spcAft>
-              <a:defRPr sz="2000">
-                <a:solidFill>
-                  <a:srgbClr val="E2E8F0"/>
-                </a:solidFill>
-                <a:latin typeface="Inter"/>
-              </a:defRPr>
-            </a:pPr>
-            <a:r>
-              <a:t>⏱️ Konsultat Online: Mërkurë, 15:00 — 16:30</a:t>
-            </a:r>
-          </a:p>
-          <a:p>
-            <a:pPr>
-              <a:spcAft>
-                <a:spcPts val="1200"/>
-              </a:spcAft>
-              <a:defRPr sz="2000">
-                <a:solidFill>
-                  <a:srgbClr val="E2E8F0"/>
-                </a:solidFill>
-                <a:latin typeface="Inter"/>
-              </a:defRPr>
-            </a:pPr>
-            <a:r>
-              <a:t>🏫 Laboratori AAB: Prishtinë, Salla e Kompjuterëve</a:t>
-            </a:r>
-          </a:p>
-          <a:p>
-            <a:pPr>
-              <a:spcAft>
-                <a:spcPts val="1200"/>
-              </a:spcAft>
-              <a:defRPr sz="2000">
-                <a:solidFill>
-                  <a:srgbClr val="E2E8F0"/>
-                </a:solidFill>
-                <a:latin typeface="Inter"/>
-              </a:defRPr>
-            </a:pPr>
-            <a:r>
-              <a:t>🚀 Java 2: Fillojmë direkt me kodimin e Next.js 15!</a:t>
+              <a:t>3️⃣ Detyra 3</a:t>
+            </a:r>
+          </a:p>
+          <a:p>
+            <a:pPr>
+              <a:spcAft>
+                <a:spcPts val="1400"/>
+              </a:spcAft>
+              <a:defRPr sz="2200" b="1">
+                <a:solidFill>
+                  <a:srgbClr val="FFFFFF"/>
+                </a:solidFill>
+                <a:latin typeface="Inter"/>
+              </a:defRPr>
+            </a:pPr>
+            <a:r>
+              <a:t>Mjedisi i Zhvillimit</a:t>
+            </a:r>
+          </a:p>
+          <a:p>
+            <a:pPr>
+              <a:spcAft>
+                <a:spcPts val="1000"/>
+              </a:spcAft>
+              <a:defRPr sz="1800">
+                <a:solidFill>
+                  <a:srgbClr val="E2E8F0"/>
+                </a:solidFill>
+                <a:latin typeface="Inter"/>
+              </a:defRPr>
+            </a:pPr>
+            <a:r>
+              <a:t>• Aktivizoni GitHub Copilot Pro me emailin @universitetiaab.com.</a:t>
+            </a:r>
+          </a:p>
+          <a:p>
+            <a:pPr>
+              <a:spcAft>
+                <a:spcPts val="1000"/>
+              </a:spcAft>
+              <a:defRPr sz="1800">
+                <a:solidFill>
+                  <a:srgbClr val="E2E8F0"/>
+                </a:solidFill>
+                <a:latin typeface="Inter"/>
+              </a:defRPr>
+            </a:pPr>
+            <a:r>
+              <a:t>• Klononi depon fillestare të Javës 1 nga GitHub Classroom.</a:t>
+            </a:r>
+          </a:p>
+          <a:p>
+            <a:pPr>
+              <a:spcAft>
+                <a:spcPts val="1000"/>
+              </a:spcAft>
+              <a:defRPr sz="1800">
+                <a:solidFill>
+                  <a:srgbClr val="E2E8F0"/>
+                </a:solidFill>
+                <a:latin typeface="Inter"/>
+              </a:defRPr>
+            </a:pPr>
+            <a:r>
+              <a:t>• Bëni push-in e parë për të verifikuar pikët e autograding!</a:t>
             </a:r>
           </a:p>
         </p:txBody>
@@ -8638,7 +9086,7 @@
               </a:defRPr>
             </a:pPr>
             <a:r>
-              <a:t>HISTORIA &amp; REALITETI</a:t>
+              <a:t>HISTORIA &amp; FILLESA</a:t>
             </a:r>
           </a:p>
         </p:txBody>
@@ -8674,7 +9122,7 @@
               </a:defRPr>
             </a:pPr>
             <a:r>
-              <a:t>Shikoni Rreth Jush: Bizneset Tona Lokale</a:t>
+              <a:t>Çdo Gjë Fillon me një Skicë në Letër &amp; një Ëndërr!</a:t>
             </a:r>
           </a:p>
         </p:txBody>
@@ -8702,15 +9150,15 @@
           <a:lstStyle/>
           <a:p>
             <a:pPr>
-              <a:defRPr sz="2200">
-                <a:solidFill>
-                  <a:srgbClr val="E2E8F0"/>
-                </a:solidFill>
-                <a:latin typeface="Inter"/>
-              </a:defRPr>
-            </a:pPr>
-            <a:r>
-              <a:t>Furra e lagjes, kafeneja e qytetit, klinika mjekësore apo dyqani i familjes suaj.</a:t>
+              <a:defRPr sz="2100">
+                <a:solidFill>
+                  <a:srgbClr val="E2E8F0"/>
+                </a:solidFill>
+                <a:latin typeface="Inter"/>
+              </a:defRPr>
+            </a:pPr>
+            <a:r>
+              <a:t>Si lindi ideja e një studenti për të modernizuar punishtën e karrigeve me celular.</a:t>
             </a:r>
           </a:p>
         </p:txBody>
@@ -8724,7 +9172,76 @@
         <p:spPr>
           <a:xfrm>
             <a:off x="731520" y="2011680"/>
-            <a:ext cx="5120640" cy="4389120"/>
+            <a:ext cx="5852160" cy="4389120"/>
+          </a:xfrm>
+          <a:prstGeom prst="roundRect">
+            <a:avLst/>
+          </a:prstGeom>
+          <a:solidFill>
+            <a:srgbClr val="FFFFFF"/>
+          </a:solidFill>
+          <a:ln w="31750">
+            <a:solidFill>
+              <a:srgbClr val="38BDF8"/>
+            </a:solidFill>
+          </a:ln>
+        </p:spPr>
+        <p:style>
+          <a:lnRef idx="1">
+            <a:schemeClr val="accent1"/>
+          </a:lnRef>
+          <a:fillRef idx="3">
+            <a:schemeClr val="accent1"/>
+          </a:fillRef>
+          <a:effectRef idx="2">
+            <a:schemeClr val="accent1"/>
+          </a:effectRef>
+          <a:fontRef idx="minor">
+            <a:schemeClr val="lt1"/>
+          </a:fontRef>
+        </p:style>
+        <p:txBody>
+          <a:bodyPr rtlCol="0" anchor="ctr"/>
+          <a:lstStyle/>
+          <a:p>
+            <a:pPr algn="ctr"/>
+          </a:p>
+        </p:txBody>
+      </p:sp>
+      <p:pic>
+        <p:nvPicPr>
+          <p:cNvPr id="7" name="Picture 6" descr="chair_business_sketch_dream.jpg"/>
+          <p:cNvPicPr>
+            <a:picLocks noChangeAspect="1"/>
+          </p:cNvPicPr>
+          <p:nvPr/>
+        </p:nvPicPr>
+        <p:blipFill>
+          <a:blip r:embed="rId2"/>
+          <a:stretch>
+            <a:fillRect/>
+          </a:stretch>
+        </p:blipFill>
+        <p:spPr>
+          <a:xfrm>
+            <a:off x="777240" y="2057400"/>
+            <a:ext cx="5760720" cy="4297680"/>
+          </a:xfrm>
+          <a:prstGeom prst="rect">
+            <a:avLst/>
+          </a:prstGeom>
+        </p:spPr>
+      </p:pic>
+      <p:sp>
+        <p:nvSpPr>
+          <p:cNvPr id="8" name="Rounded Rectangle 7"/>
+          <p:cNvSpPr/>
+          <p:nvPr/>
+        </p:nvSpPr>
+        <p:spPr>
+          <a:xfrm>
+            <a:off x="6858000" y="2011680"/>
+            <a:ext cx="4572000" cy="4389120"/>
           </a:xfrm>
           <a:prstGeom prst="roundRect">
             <a:avLst/>
@@ -8734,7 +9251,7 @@
           </a:solidFill>
           <a:ln w="31750">
             <a:solidFill>
-              <a:srgbClr val="F59E0B"/>
+              <a:srgbClr val="6366F1"/>
             </a:solidFill>
           </a:ln>
         </p:spPr>
@@ -8762,14 +9279,14 @@
       </p:sp>
       <p:sp>
         <p:nvSpPr>
-          <p:cNvPr id="7" name="TextBox 6"/>
+          <p:cNvPr id="9" name="TextBox 8"/>
           <p:cNvSpPr txBox="1"/>
           <p:nvPr/>
         </p:nvSpPr>
         <p:spPr>
           <a:xfrm>
-            <a:off x="1005840" y="2286000"/>
-            <a:ext cx="4572000" cy="3840480"/>
+            <a:off x="7040880" y="2194560"/>
+            <a:ext cx="4206240" cy="4023360"/>
           </a:xfrm>
           <a:prstGeom prst="rect">
             <a:avLst/>
@@ -8784,229 +9301,81 @@
           <a:p>
             <a:pPr>
               <a:spcAft>
-                <a:spcPts val="1800"/>
-              </a:spcAft>
-              <a:defRPr sz="2600" b="1">
-                <a:solidFill>
-                  <a:srgbClr val="F59E0B"/>
-                </a:solidFill>
-                <a:latin typeface="Inter"/>
-              </a:defRPr>
-            </a:pPr>
-            <a:r>
-              <a:t>📝 Si Funksionojnë Sot?</a:t>
-            </a:r>
-          </a:p>
-          <a:p>
-            <a:pPr>
-              <a:spcAft>
                 <a:spcPts val="1400"/>
               </a:spcAft>
-              <a:defRPr sz="2000">
-                <a:solidFill>
-                  <a:srgbClr val="E2E8F0"/>
-                </a:solidFill>
-                <a:latin typeface="Inter"/>
-              </a:defRPr>
-            </a:pPr>
-            <a:r>
-              <a:t>• Fletore me dorë për shënime të porosive dhe borxheve.</a:t>
-            </a:r>
-          </a:p>
-          <a:p>
-            <a:pPr>
-              <a:spcAft>
-                <a:spcPts val="1400"/>
-              </a:spcAft>
-              <a:defRPr sz="2000">
-                <a:solidFill>
-                  <a:srgbClr val="E2E8F0"/>
-                </a:solidFill>
-                <a:latin typeface="Inter"/>
-              </a:defRPr>
-            </a:pPr>
-            <a:r>
-              <a:t>• Telefonata të vazhdueshme dhe mesazhe kaotike në Viber/WhatsApp.</a:t>
-            </a:r>
-          </a:p>
-          <a:p>
-            <a:pPr>
-              <a:spcAft>
-                <a:spcPts val="1400"/>
-              </a:spcAft>
-              <a:defRPr sz="2000">
-                <a:solidFill>
-                  <a:srgbClr val="E2E8F0"/>
-                </a:solidFill>
-                <a:latin typeface="Inter"/>
-              </a:defRPr>
-            </a:pPr>
-            <a:r>
-              <a:t>• Klientët presin në radhë për të parë menunë ose për të marrë shërbim.</a:t>
-            </a:r>
-          </a:p>
-          <a:p>
-            <a:pPr>
-              <a:spcAft>
-                <a:spcPts val="1400"/>
-              </a:spcAft>
-              <a:defRPr sz="2000">
-                <a:solidFill>
-                  <a:srgbClr val="E2E8F0"/>
-                </a:solidFill>
-                <a:latin typeface="Inter"/>
-              </a:defRPr>
-            </a:pPr>
-            <a:r>
-              <a:t>• Humbje kohe dhe gabime të përditshme njerëzore në llogari.</a:t>
-            </a:r>
-          </a:p>
-        </p:txBody>
-      </p:sp>
-      <p:sp>
-        <p:nvSpPr>
-          <p:cNvPr id="8" name="Rounded Rectangle 7"/>
-          <p:cNvSpPr/>
-          <p:nvPr/>
-        </p:nvSpPr>
-        <p:spPr>
-          <a:xfrm>
-            <a:off x="6309360" y="2011680"/>
-            <a:ext cx="5120640" cy="4389120"/>
-          </a:xfrm>
-          <a:prstGeom prst="roundRect">
-            <a:avLst/>
-          </a:prstGeom>
-          <a:solidFill>
-            <a:srgbClr val="141E34"/>
-          </a:solidFill>
-          <a:ln w="31750">
-            <a:solidFill>
-              <a:srgbClr val="EF4444"/>
-            </a:solidFill>
-          </a:ln>
-        </p:spPr>
-        <p:style>
-          <a:lnRef idx="1">
-            <a:schemeClr val="accent1"/>
-          </a:lnRef>
-          <a:fillRef idx="3">
-            <a:schemeClr val="accent1"/>
-          </a:fillRef>
-          <a:effectRef idx="2">
-            <a:schemeClr val="accent1"/>
-          </a:effectRef>
-          <a:fontRef idx="minor">
-            <a:schemeClr val="lt1"/>
-          </a:fontRef>
-        </p:style>
-        <p:txBody>
-          <a:bodyPr rtlCol="0" anchor="ctr"/>
-          <a:lstStyle/>
-          <a:p>
-            <a:pPr algn="ctr"/>
-          </a:p>
-        </p:txBody>
-      </p:sp>
-      <p:sp>
-        <p:nvSpPr>
-          <p:cNvPr id="9" name="TextBox 8"/>
-          <p:cNvSpPr txBox="1"/>
-          <p:nvPr/>
-        </p:nvSpPr>
-        <p:spPr>
-          <a:xfrm>
-            <a:off x="6583680" y="2286000"/>
-            <a:ext cx="4572000" cy="3840480"/>
-          </a:xfrm>
-          <a:prstGeom prst="rect">
-            <a:avLst/>
-          </a:prstGeom>
-          <a:noFill/>
-        </p:spPr>
-        <p:txBody>
-          <a:bodyPr wrap="square">
-            <a:spAutoFit/>
-          </a:bodyPr>
-          <a:lstStyle/>
-          <a:p>
-            <a:pPr>
-              <a:spcAft>
-                <a:spcPts val="1800"/>
-              </a:spcAft>
-              <a:defRPr sz="2600" b="1">
-                <a:solidFill>
-                  <a:srgbClr val="EF4444"/>
-                </a:solidFill>
-                <a:latin typeface="Inter"/>
-              </a:defRPr>
-            </a:pPr>
-            <a:r>
-              <a:t>❓ Pse Nuk Kanë Aplikacion?</a:t>
-            </a:r>
-          </a:p>
-          <a:p>
-            <a:pPr>
-              <a:spcAft>
-                <a:spcPts val="1400"/>
-              </a:spcAft>
-              <a:defRPr sz="2000">
-                <a:solidFill>
-                  <a:srgbClr val="E2E8F0"/>
-                </a:solidFill>
-                <a:latin typeface="Inter"/>
-              </a:defRPr>
-            </a:pPr>
-            <a:r>
-              <a:t>• Një agjenci u kërkon 5,000€ — 10,000€ për një aplikacion celular.</a:t>
-            </a:r>
-          </a:p>
-          <a:p>
-            <a:pPr>
-              <a:spcAft>
-                <a:spcPts val="1400"/>
-              </a:spcAft>
-              <a:defRPr sz="2000">
-                <a:solidFill>
-                  <a:srgbClr val="E2E8F0"/>
-                </a:solidFill>
-                <a:latin typeface="Inter"/>
-              </a:defRPr>
-            </a:pPr>
-            <a:r>
-              <a:t>• Kërkon mirëmbajtje të shtrenjtë dhe muaj të tërë zhvillim.</a:t>
-            </a:r>
-          </a:p>
-          <a:p>
-            <a:pPr>
-              <a:spcAft>
-                <a:spcPts val="1400"/>
-              </a:spcAft>
-              <a:defRPr sz="2000">
-                <a:solidFill>
-                  <a:srgbClr val="E2E8F0"/>
-                </a:solidFill>
-                <a:latin typeface="Inter"/>
-              </a:defRPr>
-            </a:pPr>
-            <a:r>
-              <a:t>• Klientët e zakonshëm refuzojnë të shkarkojnë 150MB nga App Store.</a:t>
-            </a:r>
-          </a:p>
-          <a:p>
-            <a:pPr>
-              <a:spcAft>
-                <a:spcPts val="1400"/>
-              </a:spcAft>
-              <a:defRPr sz="2000">
-                <a:solidFill>
-                  <a:srgbClr val="E2E8F0"/>
-                </a:solidFill>
-                <a:latin typeface="Inter"/>
-              </a:defRPr>
-            </a:pPr>
-            <a:r>
-              <a:t>• Përfundimi: Biznesi mbetet prapa, i bllokuar në metodat e vjetra!</a:t>
+              <a:defRPr sz="2400" b="1">
+                <a:solidFill>
+                  <a:srgbClr val="38BDF8"/>
+                </a:solidFill>
+                <a:latin typeface="Inter"/>
+              </a:defRPr>
+            </a:pPr>
+            <a:r>
+              <a:t>🪵 Ëndrra e Një Inxhinieri të Ri</a:t>
+            </a:r>
+          </a:p>
+          <a:p>
+            <a:pPr>
+              <a:spcAft>
+                <a:spcPts val="1000"/>
+              </a:spcAft>
+              <a:defRPr sz="1700">
+                <a:solidFill>
+                  <a:srgbClr val="E2E8F0"/>
+                </a:solidFill>
+                <a:latin typeface="Inter"/>
+              </a:defRPr>
+            </a:pPr>
+            <a:r>
+              <a:t>• Realiteti në Punishte: Prindërit punojnë me pasion duke prodhuar karrige cilësore, por stoqet shënohen me laps në fletore dhe porositë humbasin në thirrje telefonike.</a:t>
+            </a:r>
+          </a:p>
+          <a:p>
+            <a:pPr>
+              <a:spcAft>
+                <a:spcPts val="1000"/>
+              </a:spcAft>
+              <a:defRPr sz="1700">
+                <a:solidFill>
+                  <a:srgbClr val="E2E8F0"/>
+                </a:solidFill>
+                <a:latin typeface="Inter"/>
+              </a:defRPr>
+            </a:pPr>
+            <a:r>
+              <a:t>• Skica e Parë: Studenti ulet me një fletë të bardhë dhe skicon karrigen, pjesët e saj (druri, këmbët metalike, vidat) dhe një ndërfaqe të thjeshtë telefoni.</a:t>
+            </a:r>
+          </a:p>
+          <a:p>
+            <a:pPr>
+              <a:spcAft>
+                <a:spcPts val="1000"/>
+              </a:spcAft>
+              <a:defRPr sz="1700">
+                <a:solidFill>
+                  <a:srgbClr val="E2E8F0"/>
+                </a:solidFill>
+                <a:latin typeface="Inter"/>
+              </a:defRPr>
+            </a:pPr>
+            <a:r>
+              <a:t>• Pyetja Visionare: 'Po sikur punëtori të skanojë pjesët me telefon, baza të alarmojë kur mbarojnë vidat, dhe klienti të porosisë karrigen e personalizuar online?'</a:t>
+            </a:r>
+          </a:p>
+          <a:p>
+            <a:pPr>
+              <a:spcAft>
+                <a:spcPts val="1000"/>
+              </a:spcAft>
+              <a:defRPr sz="1700">
+                <a:solidFill>
+                  <a:srgbClr val="E2E8F0"/>
+                </a:solidFill>
+                <a:latin typeface="Inter"/>
+              </a:defRPr>
+            </a:pPr>
+            <a:r>
+              <a:t>• Misioni Ynë: Kjo ëndërr sot nuk kërkon 50,000€. Kërkon vetëm kodin dhe veglat që do të mësoni në këtë kurs!</a:t>
             </a:r>
           </a:p>
         </p:txBody>
@@ -9103,7 +9472,7 @@
               </a:defRPr>
             </a:pPr>
             <a:r>
-              <a:t>MISIONI &amp; MOTIVIMI</a:t>
+              <a:t>REVOLUCIONI I VEGLAVE</a:t>
             </a:r>
           </a:p>
         </p:txBody>
@@ -9139,7 +9508,7 @@
               </a:defRPr>
             </a:pPr>
             <a:r>
-              <a:t>Ju Nuk Jeni Thjesht Studentë — Ju Jeni 'Founders'!</a:t>
+              <a:t>Nga Skica te Realiteti: Fuqia e Veglave në Vitin 2026</a:t>
             </a:r>
           </a:p>
         </p:txBody>
@@ -9167,15 +9536,15 @@
           <a:lstStyle/>
           <a:p>
             <a:pPr>
-              <a:defRPr sz="2200">
-                <a:solidFill>
-                  <a:srgbClr val="E2E8F0"/>
-                </a:solidFill>
-                <a:latin typeface="Inter"/>
-              </a:defRPr>
-            </a:pPr>
-            <a:r>
-              <a:t>Fuqia e inxhinierit modern të softuerit për të sjellë ndryshim të menjëhershëm.</a:t>
+              <a:defRPr sz="2100">
+                <a:solidFill>
+                  <a:srgbClr val="E2E8F0"/>
+                </a:solidFill>
+                <a:latin typeface="Inter"/>
+              </a:defRPr>
+            </a:pPr>
+            <a:r>
+              <a:t>Pse ajo që merrte 1 vit dhe ekipe të tëra, sot ndërtohet nga një student i vetëm.</a:t>
             </a:r>
           </a:p>
         </p:txBody>
@@ -9189,7 +9558,7 @@
         <p:spPr>
           <a:xfrm>
             <a:off x="731520" y="2011680"/>
-            <a:ext cx="3383280" cy="4389120"/>
+            <a:ext cx="5120640" cy="4389120"/>
           </a:xfrm>
           <a:prstGeom prst="roundRect">
             <a:avLst/>
@@ -9199,7 +9568,7 @@
           </a:solidFill>
           <a:ln w="31750">
             <a:solidFill>
-              <a:srgbClr val="38BDF8"/>
+              <a:srgbClr val="EF4444"/>
             </a:solidFill>
           </a:ln>
         </p:spPr>
@@ -9233,8 +9602,8 @@
         </p:nvSpPr>
         <p:spPr>
           <a:xfrm>
-            <a:off x="914400" y="2194560"/>
-            <a:ext cx="3017520" cy="4023360"/>
+            <a:off x="1005840" y="2286000"/>
+            <a:ext cx="4572000" cy="3840480"/>
           </a:xfrm>
           <a:prstGeom prst="rect">
             <a:avLst/>
@@ -9249,23 +9618,23 @@
           <a:p>
             <a:pPr>
               <a:spcAft>
-                <a:spcPts val="1400"/>
-              </a:spcAft>
-              <a:defRPr sz="2400" b="1">
-                <a:solidFill>
-                  <a:srgbClr val="38BDF8"/>
-                </a:solidFill>
-                <a:latin typeface="Inter"/>
-              </a:defRPr>
-            </a:pPr>
-            <a:r>
-              <a:t>💡 Zgjidhni një Problem</a:t>
-            </a:r>
-          </a:p>
-          <a:p>
-            <a:pPr>
-              <a:spcAft>
-                <a:spcPts val="1200"/>
+                <a:spcPts val="1600"/>
+              </a:spcAft>
+              <a:defRPr sz="2500" b="1">
+                <a:solidFill>
+                  <a:srgbClr val="EF4444"/>
+                </a:solidFill>
+                <a:latin typeface="Inter"/>
+              </a:defRPr>
+            </a:pPr>
+            <a:r>
+              <a:t>⏳ Dje: Pengesat e Mëdha</a:t>
+            </a:r>
+          </a:p>
+          <a:p>
+            <a:pPr>
+              <a:spcAft>
+                <a:spcPts val="1000"/>
               </a:spcAft>
               <a:defRPr sz="1900">
                 <a:solidFill>
@@ -9275,13 +9644,13 @@
               </a:defRPr>
             </a:pPr>
             <a:r>
-              <a:t>• Mendoni për biznesin e prindërve, axhës, apo mikut tuaj.</a:t>
-            </a:r>
-          </a:p>
-          <a:p>
-            <a:pPr>
-              <a:spcAft>
-                <a:spcPts val="1200"/>
+              <a:t>• Kërkoheshin 6–12 muaj zhvillim për një prototip.</a:t>
+            </a:r>
+          </a:p>
+          <a:p>
+            <a:pPr>
+              <a:spcAft>
+                <a:spcPts val="1000"/>
               </a:spcAft>
               <a:defRPr sz="1900">
                 <a:solidFill>
@@ -9291,13 +9660,13 @@
               </a:defRPr>
             </a:pPr>
             <a:r>
-              <a:t>• Bisedoni me ta: 'Cila është gjëja më e lodhshme që bëni me dorë çdo ditë?'</a:t>
-            </a:r>
-          </a:p>
-          <a:p>
-            <a:pPr>
-              <a:spcAft>
-                <a:spcPts val="1200"/>
+              <a:t>• Buxhet prej 20,000€ — 50,000€ me agjenci të jashtme.</a:t>
+            </a:r>
+          </a:p>
+          <a:p>
+            <a:pPr>
+              <a:spcAft>
+                <a:spcPts val="1000"/>
               </a:spcAft>
               <a:defRPr sz="1900">
                 <a:solidFill>
@@ -9307,7 +9676,39 @@
               </a:defRPr>
             </a:pPr>
             <a:r>
-              <a:t>• Ai problem bëhet kërkesa e projektit tuaj këtë semestër.</a:t>
+              <a:t>• Ekipe të mëdha: zhvillues iOS, Android dhe backend.</a:t>
+            </a:r>
+          </a:p>
+          <a:p>
+            <a:pPr>
+              <a:spcAft>
+                <a:spcPts val="1000"/>
+              </a:spcAft>
+              <a:defRPr sz="1900">
+                <a:solidFill>
+                  <a:srgbClr val="E2E8F0"/>
+                </a:solidFill>
+                <a:latin typeface="Inter"/>
+              </a:defRPr>
+            </a:pPr>
+            <a:r>
+              <a:t>• Serverë të shtrenjtë dhe mirëmbajtje komplekse.</a:t>
+            </a:r>
+          </a:p>
+          <a:p>
+            <a:pPr>
+              <a:spcAft>
+                <a:spcPts val="1000"/>
+              </a:spcAft>
+              <a:defRPr sz="1900">
+                <a:solidFill>
+                  <a:srgbClr val="E2E8F0"/>
+                </a:solidFill>
+                <a:latin typeface="Inter"/>
+              </a:defRPr>
+            </a:pPr>
+            <a:r>
+              <a:t>• Rezultati: Shumica e bizneseve lokale mbeteshin me fletore!</a:t>
             </a:r>
           </a:p>
         </p:txBody>
@@ -9320,8 +9721,8 @@
         </p:nvSpPr>
         <p:spPr>
           <a:xfrm>
-            <a:off x="4389120" y="2011680"/>
-            <a:ext cx="3383280" cy="4389120"/>
+            <a:off x="6309360" y="2011680"/>
+            <a:ext cx="5120640" cy="4389120"/>
           </a:xfrm>
           <a:prstGeom prst="roundRect">
             <a:avLst/>
@@ -9365,8 +9766,8 @@
         </p:nvSpPr>
         <p:spPr>
           <a:xfrm>
-            <a:off x="4572000" y="2194560"/>
-            <a:ext cx="3017520" cy="4023360"/>
+            <a:off x="6583680" y="2286000"/>
+            <a:ext cx="4572000" cy="3840480"/>
           </a:xfrm>
           <a:prstGeom prst="rect">
             <a:avLst/>
@@ -9381,9 +9782,9 @@
           <a:p>
             <a:pPr>
               <a:spcAft>
-                <a:spcPts val="1400"/>
-              </a:spcAft>
-              <a:defRPr sz="2400" b="1">
+                <a:spcPts val="1600"/>
+              </a:spcAft>
+              <a:defRPr sz="2500" b="1">
                 <a:solidFill>
                   <a:srgbClr val="10B981"/>
                 </a:solidFill>
@@ -9391,13 +9792,13 @@
               </a:defRPr>
             </a:pPr>
             <a:r>
-              <a:t>🚀 Ndërtoni Zgjidhjen</a:t>
-            </a:r>
-          </a:p>
-          <a:p>
-            <a:pPr>
-              <a:spcAft>
-                <a:spcPts val="1200"/>
+              <a:t>🚀 Sot: Fuqia e Inxhinierit të Ri</a:t>
+            </a:r>
+          </a:p>
+          <a:p>
+            <a:pPr>
+              <a:spcAft>
+                <a:spcPts val="1000"/>
               </a:spcAft>
               <a:defRPr sz="1900">
                 <a:solidFill>
@@ -9407,13 +9808,13 @@
               </a:defRPr>
             </a:pPr>
             <a:r>
-              <a:t>• Përdorni Next.js 15, AI dhe Supabase për të ndërtuar shpejt.</a:t>
-            </a:r>
-          </a:p>
-          <a:p>
-            <a:pPr>
-              <a:spcAft>
-                <a:spcPts val="1200"/>
+              <a:t>• Next.js 15 PWA: Një kod i vetëm për çdo celular, tablet e PC.</a:t>
+            </a:r>
+          </a:p>
+          <a:p>
+            <a:pPr>
+              <a:spcAft>
+                <a:spcPts val="1000"/>
               </a:spcAft>
               <a:defRPr sz="1900">
                 <a:solidFill>
@@ -9423,13 +9824,13 @@
               </a:defRPr>
             </a:pPr>
             <a:r>
-              <a:t>• Zgjidhja instalohet në telefonat e tyre me një QR kod në tavolinë.</a:t>
-            </a:r>
-          </a:p>
-          <a:p>
-            <a:pPr>
-              <a:spcAft>
-                <a:spcPts val="1200"/>
+              <a:t>• GitHub Copilot: Partner programues që shkruan kodin 3x më shpejt.</a:t>
+            </a:r>
+          </a:p>
+          <a:p>
+            <a:pPr>
+              <a:spcAft>
+                <a:spcPts val="1000"/>
               </a:spcAft>
               <a:defRPr sz="1900">
                 <a:solidFill>
@@ -9439,97 +9840,13 @@
               </a:defRPr>
             </a:pPr>
             <a:r>
-              <a:t>• Porositë dhe rezervimet shkojnë direkt në panelin e tyre live!</a:t>
-            </a:r>
-          </a:p>
-        </p:txBody>
-      </p:sp>
-      <p:sp>
-        <p:nvSpPr>
-          <p:cNvPr id="10" name="Rounded Rectangle 9"/>
-          <p:cNvSpPr/>
-          <p:nvPr/>
-        </p:nvSpPr>
-        <p:spPr>
-          <a:xfrm>
-            <a:off x="8046720" y="2011680"/>
-            <a:ext cx="3383280" cy="4389120"/>
-          </a:xfrm>
-          <a:prstGeom prst="roundRect">
-            <a:avLst/>
-          </a:prstGeom>
-          <a:solidFill>
-            <a:srgbClr val="141E34"/>
-          </a:solidFill>
-          <a:ln w="31750">
-            <a:solidFill>
-              <a:srgbClr val="6366F1"/>
-            </a:solidFill>
-          </a:ln>
-        </p:spPr>
-        <p:style>
-          <a:lnRef idx="1">
-            <a:schemeClr val="accent1"/>
-          </a:lnRef>
-          <a:fillRef idx="3">
-            <a:schemeClr val="accent1"/>
-          </a:fillRef>
-          <a:effectRef idx="2">
-            <a:schemeClr val="accent1"/>
-          </a:effectRef>
-          <a:fontRef idx="minor">
-            <a:schemeClr val="lt1"/>
-          </a:fontRef>
-        </p:style>
-        <p:txBody>
-          <a:bodyPr rtlCol="0" anchor="ctr"/>
-          <a:lstStyle/>
-          <a:p>
-            <a:pPr algn="ctr"/>
-          </a:p>
-        </p:txBody>
-      </p:sp>
-      <p:sp>
-        <p:nvSpPr>
-          <p:cNvPr id="11" name="TextBox 10"/>
-          <p:cNvSpPr txBox="1"/>
-          <p:nvPr/>
-        </p:nvSpPr>
-        <p:spPr>
-          <a:xfrm>
-            <a:off x="8229600" y="2194560"/>
-            <a:ext cx="3017520" cy="4023360"/>
-          </a:xfrm>
-          <a:prstGeom prst="rect">
-            <a:avLst/>
-          </a:prstGeom>
-          <a:noFill/>
-        </p:spPr>
-        <p:txBody>
-          <a:bodyPr wrap="square">
-            <a:spAutoFit/>
-          </a:bodyPr>
-          <a:lstStyle/>
-          <a:p>
-            <a:pPr>
-              <a:spcAft>
-                <a:spcPts val="1400"/>
-              </a:spcAft>
-              <a:defRPr sz="2400" b="1">
-                <a:solidFill>
-                  <a:srgbClr val="6366F1"/>
-                </a:solidFill>
-                <a:latin typeface="Inter"/>
-              </a:defRPr>
-            </a:pPr>
-            <a:r>
-              <a:t>🏆 Portofol Real Pune</a:t>
-            </a:r>
-          </a:p>
-          <a:p>
-            <a:pPr>
-              <a:spcAft>
-                <a:spcPts val="1200"/>
+              <a:t>• Supabase Cloud: Baza e të dhënave, auth dhe RLS me 0€ kosto fillestare.</a:t>
+            </a:r>
+          </a:p>
+          <a:p>
+            <a:pPr>
+              <a:spcAft>
+                <a:spcPts val="1000"/>
               </a:spcAft>
               <a:defRPr sz="1900">
                 <a:solidFill>
@@ -9539,13 +9856,13 @@
               </a:defRPr>
             </a:pPr>
             <a:r>
-              <a:t>• Kur të aplikoni për punë, ju nuk tregoni një 'detyrë kursi'.</a:t>
-            </a:r>
-          </a:p>
-          <a:p>
-            <a:pPr>
-              <a:spcAft>
-                <a:spcPts val="1200"/>
+              <a:t>• Vercel Deployment: Publikim global në internet me një 'git push'.</a:t>
+            </a:r>
+          </a:p>
+          <a:p>
+            <a:pPr>
+              <a:spcAft>
+                <a:spcPts val="1000"/>
               </a:spcAft>
               <a:defRPr sz="1900">
                 <a:solidFill>
@@ -9555,23 +9872,7 @@
               </a:defRPr>
             </a:pPr>
             <a:r>
-              <a:t>• Ju thoni: 'Ja aplikacioni që ndërtova, ka 50 përdorues aktivë çdo ditë.'</a:t>
-            </a:r>
-          </a:p>
-          <a:p>
-            <a:pPr>
-              <a:spcAft>
-                <a:spcPts val="1200"/>
-              </a:spcAft>
-              <a:defRPr sz="1900">
-                <a:solidFill>
-                  <a:srgbClr val="E2E8F0"/>
-                </a:solidFill>
-                <a:latin typeface="Inter"/>
-              </a:defRPr>
-            </a:pPr>
-            <a:r>
-              <a:t>• Kjo është diferenca mes një studenti dhe një inxhinieri të kërkuar!</a:t>
+              <a:t>• Rezultati: Ju e ktheni skicën në produkt funksional brenda semestrit!</a:t>
             </a:r>
           </a:p>
         </p:txBody>
@@ -9668,7 +9969,7 @@
               </a:defRPr>
             </a:pPr>
             <a:r>
-              <a:t>SHEMBUJ TË ZBATUESHËM</a:t>
+              <a:t>RASTI I STUDIMIT</a:t>
             </a:r>
           </a:p>
         </p:txBody>
@@ -9704,7 +10005,7 @@
               </a:defRPr>
             </a:pPr>
             <a:r>
-              <a:t>Çfarë Mund të Ndërtoni? 4 Profile Konkrete</a:t>
+              <a:t>Zgjidhja Softuerike: Fabrika e Karrigeve 'WoodCraft'</a:t>
             </a:r>
           </a:p>
         </p:txBody>
@@ -9732,15 +10033,15 @@
           <a:lstStyle/>
           <a:p>
             <a:pPr>
-              <a:defRPr sz="2200">
-                <a:solidFill>
-                  <a:srgbClr val="E2E8F0"/>
-                </a:solidFill>
-                <a:latin typeface="Inter"/>
-              </a:defRPr>
-            </a:pPr>
-            <a:r>
-              <a:t>Zgjidhni njërin prej tyre ose sillni idenë e biznesit tuaj familjar.</a:t>
+              <a:defRPr sz="2100">
+                <a:solidFill>
+                  <a:srgbClr val="E2E8F0"/>
+                </a:solidFill>
+                <a:latin typeface="Inter"/>
+              </a:defRPr>
+            </a:pPr>
+            <a:r>
+              <a:t>3 shtyllat kryesore që automatizojnë punishtën nga lënda e parë te klienti.</a:t>
             </a:r>
           </a:p>
         </p:txBody>
@@ -9754,7 +10055,7 @@
         <p:spPr>
           <a:xfrm>
             <a:off x="731520" y="2011680"/>
-            <a:ext cx="5120640" cy="2057400"/>
+            <a:ext cx="3383280" cy="4389120"/>
           </a:xfrm>
           <a:prstGeom prst="roundRect">
             <a:avLst/>
@@ -9764,7 +10065,7 @@
           </a:solidFill>
           <a:ln w="31750">
             <a:solidFill>
-              <a:srgbClr val="38BDF8"/>
+              <a:srgbClr val="6366F1"/>
             </a:solidFill>
           </a:ln>
         </p:spPr>
@@ -9798,8 +10099,8 @@
         </p:nvSpPr>
         <p:spPr>
           <a:xfrm>
-            <a:off x="914400" y="2148840"/>
-            <a:ext cx="4754880" cy="1783080"/>
+            <a:off x="914400" y="2194560"/>
+            <a:ext cx="3017520" cy="4023360"/>
           </a:xfrm>
           <a:prstGeom prst="rect">
             <a:avLst/>
@@ -9814,21 +10115,24 @@
           <a:p>
             <a:pPr>
               <a:spcAft>
-                <a:spcPts val="600"/>
+                <a:spcPts val="1400"/>
               </a:spcAft>
               <a:defRPr sz="2200" b="1">
                 <a:solidFill>
-                  <a:srgbClr val="38BDF8"/>
-                </a:solidFill>
-                <a:latin typeface="Inter"/>
-              </a:defRPr>
-            </a:pPr>
-            <a:r>
-              <a:t>☕ Kafene / Lounge Bar</a:t>
-            </a:r>
-          </a:p>
-          <a:p>
-            <a:pPr>
+                  <a:srgbClr val="FFFFFF"/>
+                </a:solidFill>
+                <a:latin typeface="Inter"/>
+              </a:defRPr>
+            </a:pPr>
+            <a:r>
+              <a:t>🪵 1. Inventari i Pjesëve</a:t>
+            </a:r>
+          </a:p>
+          <a:p>
+            <a:pPr>
+              <a:spcAft>
+                <a:spcPts val="1000"/>
+              </a:spcAft>
               <a:defRPr sz="1800">
                 <a:solidFill>
                   <a:srgbClr val="E2E8F0"/>
@@ -9837,7 +10141,55 @@
               </a:defRPr>
             </a:pPr>
             <a:r>
-              <a:t>Porosi në tavolinë përmes QR kodit. Kamarieri sheh porosinë live, klienti paguan ose kërkon faturën pa pritur.</a:t>
+              <a:t>• Skanim me telefon në punishte</a:t>
+            </a:r>
+          </a:p>
+          <a:p>
+            <a:pPr>
+              <a:spcAft>
+                <a:spcPts val="1000"/>
+              </a:spcAft>
+              <a:defRPr sz="1800">
+                <a:solidFill>
+                  <a:srgbClr val="E2E8F0"/>
+                </a:solidFill>
+                <a:latin typeface="Inter"/>
+              </a:defRPr>
+            </a:pPr>
+            <a:r>
+              <a:t>• Evidentim i drurit, këmbëve &amp; vidave</a:t>
+            </a:r>
+          </a:p>
+          <a:p>
+            <a:pPr>
+              <a:spcAft>
+                <a:spcPts val="1000"/>
+              </a:spcAft>
+              <a:defRPr sz="1800">
+                <a:solidFill>
+                  <a:srgbClr val="E2E8F0"/>
+                </a:solidFill>
+                <a:latin typeface="Inter"/>
+              </a:defRPr>
+            </a:pPr>
+            <a:r>
+              <a:t>• Pjesët zbriten automatikisht gjatë montimit</a:t>
+            </a:r>
+          </a:p>
+          <a:p>
+            <a:pPr>
+              <a:spcAft>
+                <a:spcPts val="1000"/>
+              </a:spcAft>
+              <a:defRPr sz="1800">
+                <a:solidFill>
+                  <a:srgbClr val="E2E8F0"/>
+                </a:solidFill>
+                <a:latin typeface="Inter"/>
+              </a:defRPr>
+            </a:pPr>
+            <a:r>
+              <a:t>• Zero fletore dhe zero gabime njerëzore</a:t>
             </a:r>
           </a:p>
         </p:txBody>
@@ -9850,8 +10202,8 @@
         </p:nvSpPr>
         <p:spPr>
           <a:xfrm>
-            <a:off x="6309360" y="2011680"/>
-            <a:ext cx="5120640" cy="2057400"/>
+            <a:off x="4389120" y="2011680"/>
+            <a:ext cx="3383280" cy="4389120"/>
           </a:xfrm>
           <a:prstGeom prst="roundRect">
             <a:avLst/>
@@ -9895,8 +10247,8 @@
         </p:nvSpPr>
         <p:spPr>
           <a:xfrm>
-            <a:off x="6492240" y="2148840"/>
-            <a:ext cx="4754880" cy="1783080"/>
+            <a:off x="4572000" y="2194560"/>
+            <a:ext cx="3017520" cy="4023360"/>
           </a:xfrm>
           <a:prstGeom prst="rect">
             <a:avLst/>
@@ -9911,21 +10263,24 @@
           <a:p>
             <a:pPr>
               <a:spcAft>
-                <a:spcPts val="600"/>
+                <a:spcPts val="1400"/>
               </a:spcAft>
               <a:defRPr sz="2200" b="1">
                 <a:solidFill>
-                  <a:srgbClr val="F59E0B"/>
-                </a:solidFill>
-                <a:latin typeface="Inter"/>
-              </a:defRPr>
-            </a:pPr>
-            <a:r>
-              <a:t>🥖 Furrë Buke / Pastiçeri</a:t>
-            </a:r>
-          </a:p>
-          <a:p>
-            <a:pPr>
+                  <a:srgbClr val="FFFFFF"/>
+                </a:solidFill>
+                <a:latin typeface="Inter"/>
+              </a:defRPr>
+            </a:pPr>
+            <a:r>
+              <a:t>🔄 2. Porositja e Furnizimeve</a:t>
+            </a:r>
+          </a:p>
+          <a:p>
+            <a:pPr>
+              <a:spcAft>
+                <a:spcPts val="1000"/>
+              </a:spcAft>
               <a:defRPr sz="1800">
                 <a:solidFill>
                   <a:srgbClr val="E2E8F0"/>
@@ -9934,7 +10289,55 @@
               </a:defRPr>
             </a:pPr>
             <a:r>
-              <a:t>Para-porosi e ëmbëlsirave apo bukëve speciale. Klienti zgjedh orën e marrjes, shmang radhën e mëngjesit.</a:t>
+              <a:t>• Alarme kur stoku bie nën minimum (p.sh. &lt;20 këmbë)</a:t>
+            </a:r>
+          </a:p>
+          <a:p>
+            <a:pPr>
+              <a:spcAft>
+                <a:spcPts val="1000"/>
+              </a:spcAft>
+              <a:defRPr sz="1800">
+                <a:solidFill>
+                  <a:srgbClr val="E2E8F0"/>
+                </a:solidFill>
+                <a:latin typeface="Inter"/>
+              </a:defRPr>
+            </a:pPr>
+            <a:r>
+              <a:t>• Gjenerim i fletës së porosisë me 1-klik</a:t>
+            </a:r>
+          </a:p>
+          <a:p>
+            <a:pPr>
+              <a:spcAft>
+                <a:spcPts val="1000"/>
+              </a:spcAft>
+              <a:defRPr sz="1800">
+                <a:solidFill>
+                  <a:srgbClr val="E2E8F0"/>
+                </a:solidFill>
+                <a:latin typeface="Inter"/>
+              </a:defRPr>
+            </a:pPr>
+            <a:r>
+              <a:t>• Lidhje direkte me furnitorët lokalë</a:t>
+            </a:r>
+          </a:p>
+          <a:p>
+            <a:pPr>
+              <a:spcAft>
+                <a:spcPts val="1000"/>
+              </a:spcAft>
+              <a:defRPr sz="1800">
+                <a:solidFill>
+                  <a:srgbClr val="E2E8F0"/>
+                </a:solidFill>
+                <a:latin typeface="Inter"/>
+              </a:defRPr>
+            </a:pPr>
+            <a:r>
+              <a:t>• Punishtja nuk bllokohet kurrë nga mungesa e pjesëve</a:t>
             </a:r>
           </a:p>
         </p:txBody>
@@ -9947,8 +10350,8 @@
         </p:nvSpPr>
         <p:spPr>
           <a:xfrm>
-            <a:off x="731520" y="4343400"/>
-            <a:ext cx="5120640" cy="2057400"/>
+            <a:off x="8046720" y="2011680"/>
+            <a:ext cx="3383280" cy="4389120"/>
           </a:xfrm>
           <a:prstGeom prst="roundRect">
             <a:avLst/>
@@ -9992,8 +10395,8 @@
         </p:nvSpPr>
         <p:spPr>
           <a:xfrm>
-            <a:off x="914400" y="4480560"/>
-            <a:ext cx="4754880" cy="1783080"/>
+            <a:off x="8229600" y="2194560"/>
+            <a:ext cx="3017520" cy="4023360"/>
           </a:xfrm>
           <a:prstGeom prst="rect">
             <a:avLst/>
@@ -10008,21 +10411,24 @@
           <a:p>
             <a:pPr>
               <a:spcAft>
-                <a:spcPts val="600"/>
+                <a:spcPts val="1400"/>
               </a:spcAft>
               <a:defRPr sz="2200" b="1">
                 <a:solidFill>
-                  <a:srgbClr val="10B981"/>
-                </a:solidFill>
-                <a:latin typeface="Inter"/>
-              </a:defRPr>
-            </a:pPr>
-            <a:r>
-              <a:t>🏥 Klinikë / Sallon Bukurie</a:t>
-            </a:r>
-          </a:p>
-          <a:p>
-            <a:pPr>
+                  <a:srgbClr val="FFFFFF"/>
+                </a:solidFill>
+                <a:latin typeface="Inter"/>
+              </a:defRPr>
+            </a:pPr>
+            <a:r>
+              <a:t>🛒 3. Shitjet &amp; Porositë B2B</a:t>
+            </a:r>
+          </a:p>
+          <a:p>
+            <a:pPr>
+              <a:spcAft>
+                <a:spcPts val="1000"/>
+              </a:spcAft>
               <a:defRPr sz="1800">
                 <a:solidFill>
                   <a:srgbClr val="E2E8F0"/>
@@ -10031,95 +10437,14 @@
               </a:defRPr>
             </a:pPr>
             <a:r>
-              <a:t>Rezervim i orarit online në kohë reale. Zgjedhja e mjekut/stilit dhe njoftime me SMS/mesazh për konfirmim.</a:t>
-            </a:r>
-          </a:p>
-        </p:txBody>
-      </p:sp>
-      <p:sp>
-        <p:nvSpPr>
-          <p:cNvPr id="12" name="Rounded Rectangle 11"/>
-          <p:cNvSpPr/>
-          <p:nvPr/>
-        </p:nvSpPr>
-        <p:spPr>
-          <a:xfrm>
-            <a:off x="6309360" y="4343400"/>
-            <a:ext cx="5120640" cy="2057400"/>
-          </a:xfrm>
-          <a:prstGeom prst="roundRect">
-            <a:avLst/>
-          </a:prstGeom>
-          <a:solidFill>
-            <a:srgbClr val="141E34"/>
-          </a:solidFill>
-          <a:ln w="31750">
-            <a:solidFill>
-              <a:srgbClr val="6366F1"/>
-            </a:solidFill>
-          </a:ln>
-        </p:spPr>
-        <p:style>
-          <a:lnRef idx="1">
-            <a:schemeClr val="accent1"/>
-          </a:lnRef>
-          <a:fillRef idx="3">
-            <a:schemeClr val="accent1"/>
-          </a:fillRef>
-          <a:effectRef idx="2">
-            <a:schemeClr val="accent1"/>
-          </a:effectRef>
-          <a:fontRef idx="minor">
-            <a:schemeClr val="lt1"/>
-          </a:fontRef>
-        </p:style>
-        <p:txBody>
-          <a:bodyPr rtlCol="0" anchor="ctr"/>
-          <a:lstStyle/>
-          <a:p>
-            <a:pPr algn="ctr"/>
-          </a:p>
-        </p:txBody>
-      </p:sp>
-      <p:sp>
-        <p:nvSpPr>
-          <p:cNvPr id="13" name="TextBox 12"/>
-          <p:cNvSpPr txBox="1"/>
-          <p:nvPr/>
-        </p:nvSpPr>
-        <p:spPr>
-          <a:xfrm>
-            <a:off x="6492240" y="4480560"/>
-            <a:ext cx="4754880" cy="1783080"/>
-          </a:xfrm>
-          <a:prstGeom prst="rect">
-            <a:avLst/>
-          </a:prstGeom>
-          <a:noFill/>
-        </p:spPr>
-        <p:txBody>
-          <a:bodyPr wrap="square">
-            <a:spAutoFit/>
-          </a:bodyPr>
-          <a:lstStyle/>
-          <a:p>
-            <a:pPr>
-              <a:spcAft>
-                <a:spcPts val="600"/>
-              </a:spcAft>
-              <a:defRPr sz="2200" b="1">
-                <a:solidFill>
-                  <a:srgbClr val="6366F1"/>
-                </a:solidFill>
-                <a:latin typeface="Inter"/>
-              </a:defRPr>
-            </a:pPr>
-            <a:r>
-              <a:t>🔧 Auto-Servis / Zejtari</a:t>
-            </a:r>
-          </a:p>
-          <a:p>
-            <a:pPr>
+              <a:t>• Katalog mobil për restorante e klientë</a:t>
+            </a:r>
+          </a:p>
+          <a:p>
+            <a:pPr>
+              <a:spcAft>
+                <a:spcPts val="1000"/>
+              </a:spcAft>
               <a:defRPr sz="1800">
                 <a:solidFill>
                   <a:srgbClr val="E2E8F0"/>
@@ -10128,7 +10453,39 @@
               </a:defRPr>
             </a:pPr>
             <a:r>
-              <a:t>Ndjekje e statusit të riparimit për veturën. Klienti fut targën dhe sheh fotot dhe fazën e riparimit live!</a:t>
+              <a:t>• Zgjedhja e modelit, llojit të drurit dhe pëlhurës</a:t>
+            </a:r>
+          </a:p>
+          <a:p>
+            <a:pPr>
+              <a:spcAft>
+                <a:spcPts val="1000"/>
+              </a:spcAft>
+              <a:defRPr sz="1800">
+                <a:solidFill>
+                  <a:srgbClr val="E2E8F0"/>
+                </a:solidFill>
+                <a:latin typeface="Inter"/>
+              </a:defRPr>
+            </a:pPr>
+            <a:r>
+              <a:t>• Llogaritje e menjëhershme e çmimit &amp; afatit</a:t>
+            </a:r>
+          </a:p>
+          <a:p>
+            <a:pPr>
+              <a:spcAft>
+                <a:spcPts val="1000"/>
+              </a:spcAft>
+              <a:defRPr sz="1800">
+                <a:solidFill>
+                  <a:srgbClr val="E2E8F0"/>
+                </a:solidFill>
+                <a:latin typeface="Inter"/>
+              </a:defRPr>
+            </a:pPr>
+            <a:r>
+              <a:t>• Statusi live: [Në Prerje] ➔ [Montim] ➔ [Gati]</a:t>
             </a:r>
           </a:p>
         </p:txBody>
@@ -10261,7 +10618,7 @@
               </a:defRPr>
             </a:pPr>
             <a:r>
-              <a:t>Anatomia e një Biznesi Familjar: Nga Dhimbja te Vlera</a:t>
+              <a:t>Anatomia e një Biznesi Prodhes: Nga Dhimbja te Vlera</a:t>
             </a:r>
           </a:p>
         </p:txBody>
@@ -10289,15 +10646,15 @@
           <a:lstStyle/>
           <a:p>
             <a:pPr>
-              <a:defRPr sz="2200">
-                <a:solidFill>
-                  <a:srgbClr val="E2E8F0"/>
-                </a:solidFill>
-                <a:latin typeface="Inter"/>
-              </a:defRPr>
-            </a:pPr>
-            <a:r>
-              <a:t>Lidhja mes problemeve ekonomike në treg dhe zgjidhjes softuerike që ndërtoni ju.</a:t>
+              <a:defRPr sz="2100">
+                <a:solidFill>
+                  <a:srgbClr val="E2E8F0"/>
+                </a:solidFill>
+                <a:latin typeface="Inter"/>
+              </a:defRPr>
+            </a:pPr>
+            <a:r>
+              <a:t>Lidhja mes problemeve të punishtes dhe zgjidhjes softuerike që ndërtoni ju.</a:t>
             </a:r>
           </a:p>
         </p:txBody>
@@ -10397,7 +10754,7 @@
               </a:defRPr>
             </a:pPr>
             <a:r>
-              <a:t>Humbja nga Radhët e Mëngjesit</a:t>
+              <a:t>Kaosi në Montim &amp; Pjesët që Mungojnë</a:t>
             </a:r>
           </a:p>
           <a:p>
@@ -10413,7 +10770,7 @@
               </a:defRPr>
             </a:pPr>
             <a:r>
-              <a:t>• Në orën 07:30-08:30 radhët te furra/kafeneja bllokohen.</a:t>
+              <a:t>• Punëtori nis montimin e 40 karrigeve dhe zbulon se mungojnë vidat speciale.</a:t>
             </a:r>
           </a:p>
           <a:p>
@@ -10429,7 +10786,7 @@
               </a:defRPr>
             </a:pPr>
             <a:r>
-              <a:t>• Klientët me nxitim ikin te konkurrenca pa blerë.</a:t>
+              <a:t>• Porositë e restoranteve regjistrohen në copa letre dhe ngatërrohen ngjyrat.</a:t>
             </a:r>
           </a:p>
           <a:p>
@@ -10445,7 +10802,7 @@
               </a:defRPr>
             </a:pPr>
             <a:r>
-              <a:t>• Humbje direkte: ~20% e xhiros ditore nga koha e humbur.</a:t>
+              <a:t>• Humbje direkte: ~25% e kohës dhe materialit të shkuar dëm.</a:t>
             </a:r>
           </a:p>
           <a:p>
@@ -10461,7 +10818,7 @@
               </a:defRPr>
             </a:pPr>
             <a:r>
-              <a:t>• Gabime njerëzore në llogari dhe porosi të ngatërruara.</a:t>
+              <a:t>• Klientët e pakënaqur telefonojnë vazhdimisht: 'A janë bërë gati karriget?'</a:t>
             </a:r>
           </a:p>
         </p:txBody>
@@ -10561,7 +10918,7 @@
               </a:defRPr>
             </a:pPr>
             <a:r>
-              <a:t>Modeli 'Click &amp; Collect' pa Radhë</a:t>
+              <a:t>PWA Mobile: Punishtja e Dixhitalizuar</a:t>
             </a:r>
           </a:p>
           <a:p>
@@ -10577,7 +10934,7 @@
               </a:defRPr>
             </a:pPr>
             <a:r>
-              <a:t>• Klienti porosit në 07:00 nga krevati me 2 prekje.</a:t>
+              <a:t>• Punëtori skanon me telefon barkodin e pakos me pjesë brenda 1 sekonde.</a:t>
             </a:r>
           </a:p>
           <a:p>
@@ -10593,7 +10950,7 @@
               </a:defRPr>
             </a:pPr>
             <a:r>
-              <a:t>• Përzgjedh orën ekzakte të marrjes: '07:35'.</a:t>
+              <a:t>• Klienti konfigurues karrigen e tij (ngjyrën, drurin) nga celulari.</a:t>
             </a:r>
           </a:p>
           <a:p>
@@ -10609,7 +10966,7 @@
               </a:defRPr>
             </a:pPr>
             <a:r>
-              <a:t>• Kalon te dera, e merr qesen e paketuar në çast!</a:t>
+              <a:t>• Përcjellje transparente e statusit: [Prerje] ➔ [Montim] ➔ [Gati].</a:t>
             </a:r>
           </a:p>
           <a:p>
@@ -10625,7 +10982,7 @@
               </a:defRPr>
             </a:pPr>
             <a:r>
-              <a:t>• Zero fërkim: Pa shkarkuar asnjë aplikacion nga App Store.</a:t>
+              <a:t>• Zero fërkim: Pa shkarkuar asnjë aplikacion të rëndë nga App Store.</a:t>
             </a:r>
           </a:p>
         </p:txBody>
@@ -10725,7 +11082,7 @@
               </a:defRPr>
             </a:pPr>
             <a:r>
-              <a:t>Margjinë 100% Neto pa Komisione</a:t>
+              <a:t>Margjinë e Lartë &amp; Zero Komisione</a:t>
             </a:r>
           </a:p>
           <a:p>
@@ -10741,7 +11098,7 @@
               </a:defRPr>
             </a:pPr>
             <a:r>
-              <a:t>• Pa komisione 30% të Apple/Google dhe pa ndërmjetës.</a:t>
+              <a:t>• Pa licenca të shtrenjta ERP: 0€ me Vercel &amp; Supabase Free Tier.</a:t>
             </a:r>
           </a:p>
           <a:p>
@@ -10757,7 +11114,7 @@
               </a:defRPr>
             </a:pPr>
             <a:r>
-              <a:t>• Kosto e platformës: 0€ me Vercel &amp; Supabase Free Tier.</a:t>
+              <a:t>• Zvogëlimi i stoqeve të fjetura dhe dorëzim 2x më i shpejtë te klientët.</a:t>
             </a:r>
           </a:p>
           <a:p>
@@ -10773,7 +11130,7 @@
               </a:defRPr>
             </a:pPr>
             <a:r>
-              <a:t>• Rritje e Shportës Mesatare (AOV) me rekomandime vizuale.</a:t>
+              <a:t>• Porositë automatike parandalojnë ndaljen e prodhimit në fabrikë.</a:t>
             </a:r>
           </a:p>
           <a:p>
@@ -10789,7 +11146,7 @@
               </a:defRPr>
             </a:pPr>
             <a:r>
-              <a:t>• Fitimi mbetet 100% brenda buxhetit të familjes!</a:t>
+              <a:t>• Fitimi mbetet 100% brenda biznesit prodhues lokal!</a:t>
             </a:r>
           </a:p>
         </p:txBody>
@@ -10886,7 +11243,7 @@
               </a:defRPr>
             </a:pPr>
             <a:r>
-              <a:t>ARKITEKTURA NË VEPRIM</a:t>
+              <a:t>ARKITEKTURA TEKNIKE</a:t>
             </a:r>
           </a:p>
         </p:txBody>
@@ -10922,7 +11279,7 @@
               </a:defRPr>
             </a:pPr>
             <a:r>
-              <a:t>Si Del në Jetë Produkti: Nga Telefoni te Banaku</a:t>
+              <a:t>Arkitektura në Veprim: Skica Vektoriale e Fluksit të të Dhënave</a:t>
             </a:r>
           </a:p>
         </p:txBody>
@@ -10950,15 +11307,15 @@
           <a:lstStyle/>
           <a:p>
             <a:pPr>
-              <a:defRPr sz="2200">
-                <a:solidFill>
-                  <a:srgbClr val="E2E8F0"/>
-                </a:solidFill>
-                <a:latin typeface="Inter"/>
-              </a:defRPr>
-            </a:pPr>
-            <a:r>
-              <a:t>Fluksi real: Klienti porosit në celular ➔ Cloud-i sinkronizon ➔ Prindërit paketojnë në çast.</a:t>
+              <a:defRPr sz="2100">
+                <a:solidFill>
+                  <a:srgbClr val="E2E8F0"/>
+                </a:solidFill>
+                <a:latin typeface="Inter"/>
+              </a:defRPr>
+            </a:pPr>
+            <a:r>
+              <a:t>Skicë e pastër teknike me vija dhe kuti: Nga punishtja fizike te cloud-i dhe klienti.</a:t>
             </a:r>
           </a:p>
         </p:txBody>
@@ -10972,7 +11329,139 @@
         <p:spPr>
           <a:xfrm>
             <a:off x="731520" y="2011680"/>
-            <a:ext cx="4389120" cy="4389120"/>
+            <a:ext cx="5120640" cy="4389120"/>
+          </a:xfrm>
+          <a:prstGeom prst="roundRect">
+            <a:avLst/>
+          </a:prstGeom>
+          <a:solidFill>
+            <a:srgbClr val="141E34"/>
+          </a:solidFill>
+          <a:ln w="31750">
+            <a:solidFill>
+              <a:srgbClr val="6366F1"/>
+            </a:solidFill>
+          </a:ln>
+        </p:spPr>
+        <p:style>
+          <a:lnRef idx="1">
+            <a:schemeClr val="accent1"/>
+          </a:lnRef>
+          <a:fillRef idx="3">
+            <a:schemeClr val="accent1"/>
+          </a:fillRef>
+          <a:effectRef idx="2">
+            <a:schemeClr val="accent1"/>
+          </a:effectRef>
+          <a:fontRef idx="minor">
+            <a:schemeClr val="lt1"/>
+          </a:fontRef>
+        </p:style>
+        <p:txBody>
+          <a:bodyPr rtlCol="0" anchor="ctr"/>
+          <a:lstStyle/>
+          <a:p>
+            <a:pPr algn="ctr"/>
+          </a:p>
+        </p:txBody>
+      </p:sp>
+      <p:sp>
+        <p:nvSpPr>
+          <p:cNvPr id="7" name="TextBox 6"/>
+          <p:cNvSpPr txBox="1"/>
+          <p:nvPr/>
+        </p:nvSpPr>
+        <p:spPr>
+          <a:xfrm>
+            <a:off x="914400" y="2194560"/>
+            <a:ext cx="4754880" cy="4023360"/>
+          </a:xfrm>
+          <a:prstGeom prst="rect">
+            <a:avLst/>
+          </a:prstGeom>
+          <a:noFill/>
+        </p:spPr>
+        <p:txBody>
+          <a:bodyPr wrap="square">
+            <a:spAutoFit/>
+          </a:bodyPr>
+          <a:lstStyle/>
+          <a:p>
+            <a:pPr>
+              <a:spcAft>
+                <a:spcPts val="1400"/>
+              </a:spcAft>
+              <a:defRPr sz="2200" b="1">
+                <a:solidFill>
+                  <a:srgbClr val="38BDF8"/>
+                </a:solidFill>
+                <a:latin typeface="Inter"/>
+              </a:defRPr>
+            </a:pPr>
+            <a:r>
+              <a:t>🏭 1. Punishtja &amp; Skanimi me Telefon</a:t>
+            </a:r>
+          </a:p>
+          <a:p>
+            <a:pPr>
+              <a:spcAft>
+                <a:spcPts val="1000"/>
+              </a:spcAft>
+              <a:defRPr sz="1700">
+                <a:solidFill>
+                  <a:srgbClr val="E2E8F0"/>
+                </a:solidFill>
+                <a:latin typeface="Inter"/>
+              </a:defRPr>
+            </a:pPr>
+            <a:r>
+              <a:t>• Skanim me Kamerë (PWA): Punëtori përdor celularin e tij për të skanuar barkodin e drurit, këmbëve ose vidave gjatë montimit të karriges.</a:t>
+            </a:r>
+          </a:p>
+          <a:p>
+            <a:pPr>
+              <a:spcAft>
+                <a:spcPts val="1000"/>
+              </a:spcAft>
+              <a:defRPr sz="1700">
+                <a:solidFill>
+                  <a:srgbClr val="E2E8F0"/>
+                </a:solidFill>
+                <a:latin typeface="Inter"/>
+              </a:defRPr>
+            </a:pPr>
+            <a:r>
+              <a:t>• Regjistrim Offline: Nëse punishtja ka sinjal të dobët, Service Worker ruan veprimin lokalisht dhe e sinkronizon sapo lidhet me WiFi.</a:t>
+            </a:r>
+          </a:p>
+          <a:p>
+            <a:pPr>
+              <a:spcAft>
+                <a:spcPts val="1000"/>
+              </a:spcAft>
+              <a:defRPr sz="1700">
+                <a:solidFill>
+                  <a:srgbClr val="E2E8F0"/>
+                </a:solidFill>
+                <a:latin typeface="Inter"/>
+              </a:defRPr>
+            </a:pPr>
+            <a:r>
+              <a:t>• Ndryshimi i Statusit: Me 1 prekje në ekran punëtori kalon karrigen nga [Në Prerje] në [Në Montim] dhe [Në Tapiceri].</a:t>
+            </a:r>
+          </a:p>
+        </p:txBody>
+      </p:sp>
+      <p:sp>
+        <p:nvSpPr>
+          <p:cNvPr id="8" name="Rounded Rectangle 7"/>
+          <p:cNvSpPr/>
+          <p:nvPr/>
+        </p:nvSpPr>
+        <p:spPr>
+          <a:xfrm>
+            <a:off x="6309360" y="2011680"/>
+            <a:ext cx="5120640" cy="4389120"/>
           </a:xfrm>
           <a:prstGeom prst="roundRect">
             <a:avLst/>
@@ -11010,14 +11499,14 @@
       </p:sp>
       <p:sp>
         <p:nvSpPr>
-          <p:cNvPr id="7" name="TextBox 6"/>
+          <p:cNvPr id="9" name="TextBox 8"/>
           <p:cNvSpPr txBox="1"/>
           <p:nvPr/>
         </p:nvSpPr>
         <p:spPr>
           <a:xfrm>
-            <a:off x="914400" y="2148840"/>
-            <a:ext cx="4023360" cy="4069080"/>
+            <a:off x="6492240" y="2194560"/>
+            <a:ext cx="4754880" cy="4023360"/>
           </a:xfrm>
           <a:prstGeom prst="rect">
             <a:avLst/>
@@ -11031,15 +11520,18 @@
           <a:lstStyle/>
           <a:p>
             <a:pPr>
-              <a:defRPr sz="1800" b="1">
-                <a:solidFill>
-                  <a:srgbClr val="38BDF8"/>
-                </a:solidFill>
-                <a:latin typeface="Inter"/>
-              </a:defRPr>
-            </a:pPr>
-            <a:r>
-              <a:t>1️⃣ Celulari i Klientit (PWA):</a:t>
+              <a:spcAft>
+                <a:spcPts val="1400"/>
+              </a:spcAft>
+              <a:defRPr sz="2200" b="1">
+                <a:solidFill>
+                  <a:srgbClr val="10B981"/>
+                </a:solidFill>
+                <a:latin typeface="Inter"/>
+              </a:defRPr>
+            </a:pPr>
+            <a:r>
+              <a:t>☁️ 2. Supabase Cloud, Furnizimi &amp; Klienti</a:t>
             </a:r>
           </a:p>
           <a:p>
@@ -11047,28 +11539,15 @@
               <a:spcAft>
                 <a:spcPts val="1000"/>
               </a:spcAft>
-              <a:defRPr sz="1600">
-                <a:solidFill>
-                  <a:srgbClr val="E2E8F0"/>
-                </a:solidFill>
-                <a:latin typeface="Inter"/>
-              </a:defRPr>
-            </a:pPr>
-            <a:r>
-              <a:t>Skanon QR në banak ose Instagram. Shikon menunë me foto, çmime dhe statusin e bukës së nxehtë. Zgjedh orën dhe porosit!</a:t>
-            </a:r>
-          </a:p>
-          <a:p>
-            <a:pPr>
-              <a:defRPr sz="1800" b="1">
-                <a:solidFill>
-                  <a:srgbClr val="38BDF8"/>
-                </a:solidFill>
-                <a:latin typeface="Inter"/>
-              </a:defRPr>
-            </a:pPr>
-            <a:r>
-              <a:t>2️⃣ Motori në Cloud (Next.js + DB):</a:t>
+              <a:defRPr sz="1700">
+                <a:solidFill>
+                  <a:srgbClr val="E2E8F0"/>
+                </a:solidFill>
+                <a:latin typeface="Inter"/>
+              </a:defRPr>
+            </a:pPr>
+            <a:r>
+              <a:t>• Sinkronizim në Çast (0.2s): Supabase PostgreSQL përditëson stoqet me Row-Level Security (punëtorët shohin punishten, menaxheri gjithçka).</a:t>
             </a:r>
           </a:p>
           <a:p>
@@ -11076,28 +11555,15 @@
               <a:spcAft>
                 <a:spcPts val="1000"/>
               </a:spcAft>
-              <a:defRPr sz="1600">
-                <a:solidFill>
-                  <a:srgbClr val="E2E8F0"/>
-                </a:solidFill>
-                <a:latin typeface="Inter"/>
-              </a:defRPr>
-            </a:pPr>
-            <a:r>
-              <a:t>Next.js 15 &amp; Supabase regjistrojnë porosinë për 0.2 sekonda. Dërgojnë njoftim live (WebSocket) te dyqani.</a:t>
-            </a:r>
-          </a:p>
-          <a:p>
-            <a:pPr>
-              <a:defRPr sz="1800" b="1">
-                <a:solidFill>
-                  <a:srgbClr val="38BDF8"/>
-                </a:solidFill>
-                <a:latin typeface="Inter"/>
-              </a:defRPr>
-            </a:pPr>
-            <a:r>
-              <a:t>3️⃣ Tableti te Banaku i Furrës:</a:t>
+              <a:defRPr sz="1700">
+                <a:solidFill>
+                  <a:srgbClr val="E2E8F0"/>
+                </a:solidFill>
+                <a:latin typeface="Inter"/>
+              </a:defRPr>
+            </a:pPr>
+            <a:r>
+              <a:t>• Alarmi i Auto-Porosisë: Kur stoku i këmbëve metalike bie nën 20 copë, sistemi dërgon automatikisht kërkesën për furnizim te furnitori.</a:t>
             </a:r>
           </a:p>
           <a:p>
@@ -11105,88 +11571,19 @@
               <a:spcAft>
                 <a:spcPts val="1000"/>
               </a:spcAft>
-              <a:defRPr sz="1600">
-                <a:solidFill>
-                  <a:srgbClr val="E2E8F0"/>
-                </a:solidFill>
-                <a:latin typeface="Inter"/>
-              </a:defRPr>
-            </a:pPr>
-            <a:r>
-              <a:t>Tableti bën 'Bip!'. Prindi sheh emrin dhe qesen që duhet bërë gati. Shtyp vetëm 1 buton: [ Gati për Marrje ].</a:t>
-            </a:r>
-          </a:p>
-        </p:txBody>
-      </p:sp>
-      <p:sp>
-        <p:nvSpPr>
-          <p:cNvPr id="8" name="Rounded Rectangle 7"/>
-          <p:cNvSpPr/>
-          <p:nvPr/>
-        </p:nvSpPr>
-        <p:spPr>
-          <a:xfrm>
-            <a:off x="5394960" y="2011680"/>
-            <a:ext cx="6035040" cy="4389120"/>
-          </a:xfrm>
-          <a:prstGeom prst="roundRect">
-            <a:avLst/>
-          </a:prstGeom>
-          <a:solidFill>
-            <a:srgbClr val="141E34"/>
-          </a:solidFill>
-          <a:ln w="31750">
-            <a:solidFill>
-              <a:srgbClr val="6366F1"/>
-            </a:solidFill>
-          </a:ln>
-        </p:spPr>
-        <p:style>
-          <a:lnRef idx="1">
-            <a:schemeClr val="accent1"/>
-          </a:lnRef>
-          <a:fillRef idx="3">
-            <a:schemeClr val="accent1"/>
-          </a:fillRef>
-          <a:effectRef idx="2">
-            <a:schemeClr val="accent1"/>
-          </a:effectRef>
-          <a:fontRef idx="minor">
-            <a:schemeClr val="lt1"/>
-          </a:fontRef>
-        </p:style>
-        <p:txBody>
-          <a:bodyPr rtlCol="0" anchor="ctr"/>
-          <a:lstStyle/>
-          <a:p>
-            <a:pPr algn="ctr"/>
-          </a:p>
-        </p:txBody>
-      </p:sp>
-      <p:pic>
-        <p:nvPicPr>
-          <p:cNvPr id="9" name="Picture 8" descr="family_business_pwa_flow_1789568631666.jpg"/>
-          <p:cNvPicPr>
-            <a:picLocks noChangeAspect="1"/>
-          </p:cNvPicPr>
-          <p:nvPr/>
-        </p:nvPicPr>
-        <p:blipFill>
-          <a:blip r:embed="rId2"/>
-          <a:stretch>
-            <a:fillRect/>
-          </a:stretch>
-        </p:blipFill>
-        <p:spPr>
-          <a:xfrm>
-            <a:off x="5486400" y="2103120"/>
-            <a:ext cx="5852160" cy="4206240"/>
-          </a:xfrm>
-          <a:prstGeom prst="rect">
-            <a:avLst/>
-          </a:prstGeom>
-        </p:spPr>
-      </p:pic>
+              <a:defRPr sz="1700">
+                <a:solidFill>
+                  <a:srgbClr val="E2E8F0"/>
+                </a:solidFill>
+                <a:latin typeface="Inter"/>
+              </a:defRPr>
+            </a:pPr>
+            <a:r>
+              <a:t>• Portali i Klientit (B2B): Restoranti që ka porositur 50 karrige sheh në telefon përparimin në kohë reale pa telefonuar asnjëherë menaxherin.</a:t>
+            </a:r>
+          </a:p>
+        </p:txBody>
+      </p:sp>
     </p:spTree>
   </p:cSld>
   <p:clrMapOvr>
@@ -11315,7 +11712,7 @@
               </a:defRPr>
             </a:pPr>
             <a:r>
-              <a:t>5 Hapat: Nga Ideja Familjare te Demo Day</a:t>
+              <a:t>5 Hapat: Nga Skica në Letër te Demo Day</a:t>
             </a:r>
           </a:p>
         </p:txBody>
@@ -11343,7 +11740,7 @@
           <a:lstStyle/>
           <a:p>
             <a:pPr>
-              <a:defRPr sz="2200">
+              <a:defRPr sz="2100">
                 <a:solidFill>
                   <a:srgbClr val="E2E8F0"/>
                 </a:solidFill>
@@ -11423,22 +11820,17 @@
           </a:bodyPr>
           <a:lstStyle/>
           <a:p>
-            <a:pPr>
-              <a:spcAft>
-                <a:spcPts val="400"/>
-              </a:spcAft>
-              <a:defRPr sz="2800">
-                <a:latin typeface="Inter"/>
-              </a:defRPr>
+            <a:pPr algn="ctr">
+              <a:defRPr sz="3600"/>
             </a:pPr>
             <a:r>
               <a:t>1️⃣</a:t>
             </a:r>
           </a:p>
           <a:p>
-            <a:pPr>
-              <a:spcAft>
-                <a:spcPts val="800"/>
+            <a:pPr algn="ctr">
+              <a:spcAft>
+                <a:spcPts val="600"/>
               </a:spcAft>
               <a:defRPr sz="1300" b="1">
                 <a:solidFill>
@@ -11452,9 +11844,9 @@
             </a:r>
           </a:p>
           <a:p>
-            <a:pPr>
-              <a:spcAft>
-                <a:spcPts val="1400"/>
+            <a:pPr algn="ctr">
+              <a:spcAft>
+                <a:spcPts val="1200"/>
               </a:spcAft>
               <a:defRPr sz="1900" b="1">
                 <a:solidFill>
@@ -11464,15 +11856,15 @@
               </a:defRPr>
             </a:pPr>
             <a:r>
-              <a:t>Intervista</a:t>
+              <a:t>Intervista &amp;</a:t>
             </a:r>
             <a:br/>
             <a:r>
-              <a:t>Familjare</a:t>
-            </a:r>
-          </a:p>
-          <a:p>
-            <a:pPr>
+              <a:t>Skica</a:t>
+            </a:r>
+          </a:p>
+          <a:p>
+            <a:pPr algn="l">
               <a:defRPr sz="1600">
                 <a:solidFill>
                   <a:srgbClr val="E2E8F0"/>
@@ -11481,7 +11873,7 @@
               </a:defRPr>
             </a:pPr>
             <a:r>
-              <a:t>Bisedoni me familjen: Cili është problemi më i lodhshëm ditor? Zgjidhni fushën e projektit.</a:t>
+              <a:t>Bisedoni me biznesin/punishten: Cilat pjesë vonohen më shumë? Skiconi modelin në letër.</a:t>
             </a:r>
           </a:p>
         </p:txBody>
@@ -11553,22 +11945,17 @@
           </a:bodyPr>
           <a:lstStyle/>
           <a:p>
-            <a:pPr>
-              <a:spcAft>
-                <a:spcPts val="400"/>
-              </a:spcAft>
-              <a:defRPr sz="2800">
-                <a:latin typeface="Inter"/>
-              </a:defRPr>
+            <a:pPr algn="ctr">
+              <a:defRPr sz="3600"/>
             </a:pPr>
             <a:r>
               <a:t>2️⃣</a:t>
             </a:r>
           </a:p>
           <a:p>
-            <a:pPr>
-              <a:spcAft>
-                <a:spcPts val="800"/>
+            <a:pPr algn="ctr">
+              <a:spcAft>
+                <a:spcPts val="600"/>
               </a:spcAft>
               <a:defRPr sz="1300" b="1">
                 <a:solidFill>
@@ -11582,9 +11969,9 @@
             </a:r>
           </a:p>
           <a:p>
-            <a:pPr>
-              <a:spcAft>
-                <a:spcPts val="1400"/>
+            <a:pPr algn="ctr">
+              <a:spcAft>
+                <a:spcPts val="1200"/>
               </a:spcAft>
               <a:defRPr sz="1900" b="1">
                 <a:solidFill>
@@ -11602,7 +11989,7 @@
             </a:r>
           </a:p>
           <a:p>
-            <a:pPr>
+            <a:pPr algn="l">
               <a:defRPr sz="1600">
                 <a:solidFill>
                   <a:srgbClr val="E2E8F0"/>
@@ -11611,7 +11998,7 @@
               </a:defRPr>
             </a:pPr>
             <a:r>
-              <a:t>Ndërtoni ndërfaqen mobile me Tailwind CSS. Butona Touch-First (48px) lehtë për t'u përdorur.</a:t>
+              <a:t>Ndërtoni ndërfaqen mobile me Tailwind CSS. Butona Touch-First (48px) të përshtatshëm për punishte.</a:t>
             </a:r>
           </a:p>
         </p:txBody>
@@ -11683,22 +12070,17 @@
           </a:bodyPr>
           <a:lstStyle/>
           <a:p>
-            <a:pPr>
-              <a:spcAft>
-                <a:spcPts val="400"/>
-              </a:spcAft>
-              <a:defRPr sz="2800">
-                <a:latin typeface="Inter"/>
-              </a:defRPr>
+            <a:pPr algn="ctr">
+              <a:defRPr sz="3600"/>
             </a:pPr>
             <a:r>
               <a:t>3️⃣</a:t>
             </a:r>
           </a:p>
           <a:p>
-            <a:pPr>
-              <a:spcAft>
-                <a:spcPts val="800"/>
+            <a:pPr algn="ctr">
+              <a:spcAft>
+                <a:spcPts val="600"/>
               </a:spcAft>
               <a:defRPr sz="1300" b="1">
                 <a:solidFill>
@@ -11712,9 +12094,9 @@
             </a:r>
           </a:p>
           <a:p>
-            <a:pPr>
-              <a:spcAft>
-                <a:spcPts val="1400"/>
+            <a:pPr algn="ctr">
+              <a:spcAft>
+                <a:spcPts val="1200"/>
               </a:spcAft>
               <a:defRPr sz="1900" b="1">
                 <a:solidFill>
@@ -11732,7 +12114,7 @@
             </a:r>
           </a:p>
           <a:p>
-            <a:pPr>
+            <a:pPr algn="l">
               <a:defRPr sz="1600">
                 <a:solidFill>
                   <a:srgbClr val="E2E8F0"/>
@@ -11741,7 +12123,7 @@
               </a:defRPr>
             </a:pPr>
             <a:r>
-              <a:t>Lidhni bazën PostgreSQL në cloud. Ruani menunë, klientët dhe porositë me siguri të plotë (RLS).</a:t>
+              <a:t>Krijoni tabelat (karriget, pjesët, furnitorët, porositë). Mbroni të dhënat me siguri të plotë (RLS).</a:t>
             </a:r>
           </a:p>
         </p:txBody>
@@ -11813,22 +12195,17 @@
           </a:bodyPr>
           <a:lstStyle/>
           <a:p>
-            <a:pPr>
-              <a:spcAft>
-                <a:spcPts val="400"/>
-              </a:spcAft>
-              <a:defRPr sz="2800">
-                <a:latin typeface="Inter"/>
-              </a:defRPr>
+            <a:pPr algn="ctr">
+              <a:defRPr sz="3600"/>
             </a:pPr>
             <a:r>
               <a:t>4️⃣</a:t>
             </a:r>
           </a:p>
           <a:p>
-            <a:pPr>
-              <a:spcAft>
-                <a:spcPts val="800"/>
+            <a:pPr algn="ctr">
+              <a:spcAft>
+                <a:spcPts val="600"/>
               </a:spcAft>
               <a:defRPr sz="1300" b="1">
                 <a:solidFill>
@@ -11842,9 +12219,9 @@
             </a:r>
           </a:p>
           <a:p>
-            <a:pPr>
-              <a:spcAft>
-                <a:spcPts val="1400"/>
+            <a:pPr algn="ctr">
+              <a:spcAft>
+                <a:spcPts val="1200"/>
               </a:spcAft>
               <a:defRPr sz="1900" b="1">
                 <a:solidFill>
@@ -11854,15 +12231,15 @@
               </a:defRPr>
             </a:pPr>
             <a:r>
-              <a:t>Testimi në</a:t>
+              <a:t>Skanimi &amp;</a:t>
             </a:r>
             <a:br/>
             <a:r>
-              <a:t>Dyqan</a:t>
-            </a:r>
-          </a:p>
-          <a:p>
-            <a:pPr>
+              <a:t>Testimi</a:t>
+            </a:r>
+          </a:p>
+          <a:p>
+            <a:pPr algn="l">
               <a:defRPr sz="1600">
                 <a:solidFill>
                   <a:srgbClr val="E2E8F0"/>
@@ -11871,7 +12248,7 @@
               </a:defRPr>
             </a:pPr>
             <a:r>
-              <a:t>Vendosni QR kodin në banakun e lokalit. Testoni aplikacionin me 10 klientët e parë të vërtetë!</a:t>
+              <a:t>Integroni kamerën e telefonit për leximin e barkodeve/QR dhe testimin e auto-porosive.</a:t>
             </a:r>
           </a:p>
         </p:txBody>
@@ -11943,22 +12320,17 @@
           </a:bodyPr>
           <a:lstStyle/>
           <a:p>
-            <a:pPr>
-              <a:spcAft>
-                <a:spcPts val="400"/>
-              </a:spcAft>
-              <a:defRPr sz="2800">
-                <a:latin typeface="Inter"/>
-              </a:defRPr>
+            <a:pPr algn="ctr">
+              <a:defRPr sz="3600"/>
             </a:pPr>
             <a:r>
               <a:t>5️⃣</a:t>
             </a:r>
           </a:p>
           <a:p>
-            <a:pPr>
-              <a:spcAft>
-                <a:spcPts val="800"/>
+            <a:pPr algn="ctr">
+              <a:spcAft>
+                <a:spcPts val="600"/>
               </a:spcAft>
               <a:defRPr sz="1300" b="1">
                 <a:solidFill>
@@ -11972,9 +12344,9 @@
             </a:r>
           </a:p>
           <a:p>
-            <a:pPr>
-              <a:spcAft>
-                <a:spcPts val="1400"/>
+            <a:pPr algn="ctr">
+              <a:spcAft>
+                <a:spcPts val="1200"/>
               </a:spcAft>
               <a:defRPr sz="1900" b="1">
                 <a:solidFill>
@@ -11992,7 +12364,7 @@
             </a:r>
           </a:p>
           <a:p>
-            <a:pPr>
+            <a:pPr algn="l">
               <a:defRPr sz="1600">
                 <a:solidFill>
                   <a:srgbClr val="E2E8F0"/>
@@ -12098,7 +12470,7 @@
               </a:defRPr>
             </a:pPr>
             <a:r>
-              <a:t>ZGJIDHJA TEKNOLOGJIKE</a:t>
+              <a:t>TEKNOLOGJIA KRYESORE</a:t>
             </a:r>
           </a:p>
         </p:txBody>
@@ -12134,7 +12506,7 @@
               </a:defRPr>
             </a:pPr>
             <a:r>
-              <a:t>Pse PWA është Ideale për Bizneset Lokale?</a:t>
+              <a:t>Pse Progressive Web Apps (PWA)?</a:t>
             </a:r>
           </a:p>
         </p:txBody>
@@ -12162,15 +12534,15 @@
           <a:lstStyle/>
           <a:p>
             <a:pPr>
-              <a:defRPr sz="2200">
-                <a:solidFill>
-                  <a:srgbClr val="E2E8F0"/>
-                </a:solidFill>
-                <a:latin typeface="Inter"/>
-              </a:defRPr>
-            </a:pPr>
-            <a:r>
-              <a:t>Teknologjia që largon barrierat mes biznesit dhe konsumatorit.</a:t>
+              <a:defRPr sz="2100">
+                <a:solidFill>
+                  <a:srgbClr val="E2E8F0"/>
+                </a:solidFill>
+                <a:latin typeface="Inter"/>
+              </a:defRPr>
+            </a:pPr>
+            <a:r>
+              <a:t>Kombinimi më i fuqishëm i uebit dhe aplikacioneve celulare pa kufizime.</a:t>
             </a:r>
           </a:p>
         </p:txBody>
@@ -12184,7 +12556,139 @@
         <p:spPr>
           <a:xfrm>
             <a:off x="731520" y="2011680"/>
-            <a:ext cx="5120640" cy="4389120"/>
+            <a:ext cx="3383280" cy="4389120"/>
+          </a:xfrm>
+          <a:prstGeom prst="roundRect">
+            <a:avLst/>
+          </a:prstGeom>
+          <a:solidFill>
+            <a:srgbClr val="141E34"/>
+          </a:solidFill>
+          <a:ln w="31750">
+            <a:solidFill>
+              <a:srgbClr val="38BDF8"/>
+            </a:solidFill>
+          </a:ln>
+        </p:spPr>
+        <p:style>
+          <a:lnRef idx="1">
+            <a:schemeClr val="accent1"/>
+          </a:lnRef>
+          <a:fillRef idx="3">
+            <a:schemeClr val="accent1"/>
+          </a:fillRef>
+          <a:effectRef idx="2">
+            <a:schemeClr val="accent1"/>
+          </a:effectRef>
+          <a:fontRef idx="minor">
+            <a:schemeClr val="lt1"/>
+          </a:fontRef>
+        </p:style>
+        <p:txBody>
+          <a:bodyPr rtlCol="0" anchor="ctr"/>
+          <a:lstStyle/>
+          <a:p>
+            <a:pPr algn="ctr"/>
+          </a:p>
+        </p:txBody>
+      </p:sp>
+      <p:sp>
+        <p:nvSpPr>
+          <p:cNvPr id="7" name="TextBox 6"/>
+          <p:cNvSpPr txBox="1"/>
+          <p:nvPr/>
+        </p:nvSpPr>
+        <p:spPr>
+          <a:xfrm>
+            <a:off x="914400" y="2194560"/>
+            <a:ext cx="3017520" cy="4023360"/>
+          </a:xfrm>
+          <a:prstGeom prst="rect">
+            <a:avLst/>
+          </a:prstGeom>
+          <a:noFill/>
+        </p:spPr>
+        <p:txBody>
+          <a:bodyPr wrap="square">
+            <a:spAutoFit/>
+          </a:bodyPr>
+          <a:lstStyle/>
+          <a:p>
+            <a:pPr>
+              <a:spcAft>
+                <a:spcPts val="1600"/>
+              </a:spcAft>
+              <a:defRPr sz="2300" b="1">
+                <a:solidFill>
+                  <a:srgbClr val="FFFFFF"/>
+                </a:solidFill>
+                <a:latin typeface="Inter"/>
+              </a:defRPr>
+            </a:pPr>
+            <a:r>
+              <a:t>⚡ Pa Instalime nga App Store</a:t>
+            </a:r>
+          </a:p>
+          <a:p>
+            <a:pPr>
+              <a:spcAft>
+                <a:spcPts val="1200"/>
+              </a:spcAft>
+              <a:defRPr sz="1800">
+                <a:solidFill>
+                  <a:srgbClr val="E2E8F0"/>
+                </a:solidFill>
+                <a:latin typeface="Inter"/>
+              </a:defRPr>
+            </a:pPr>
+            <a:r>
+              <a:t>• Klienti ose punëtori hap vetëm një link ose skanon QR.</a:t>
+            </a:r>
+          </a:p>
+          <a:p>
+            <a:pPr>
+              <a:spcAft>
+                <a:spcPts val="1200"/>
+              </a:spcAft>
+              <a:defRPr sz="1800">
+                <a:solidFill>
+                  <a:srgbClr val="E2E8F0"/>
+                </a:solidFill>
+                <a:latin typeface="Inter"/>
+              </a:defRPr>
+            </a:pPr>
+            <a:r>
+              <a:t>• Shtohet në Home Screen me një prekje brenda 2 sekondave.</a:t>
+            </a:r>
+          </a:p>
+          <a:p>
+            <a:pPr>
+              <a:spcAft>
+                <a:spcPts val="1200"/>
+              </a:spcAft>
+              <a:defRPr sz="1800">
+                <a:solidFill>
+                  <a:srgbClr val="E2E8F0"/>
+                </a:solidFill>
+                <a:latin typeface="Inter"/>
+              </a:defRPr>
+            </a:pPr>
+            <a:r>
+              <a:t>• Zë më pak se 2MB memorie në pajisje (krahasuar me 150MB të app-eve native).</a:t>
+            </a:r>
+          </a:p>
+        </p:txBody>
+      </p:sp>
+      <p:sp>
+        <p:nvSpPr>
+          <p:cNvPr id="8" name="Rounded Rectangle 7"/>
+          <p:cNvSpPr/>
+          <p:nvPr/>
+        </p:nvSpPr>
+        <p:spPr>
+          <a:xfrm>
+            <a:off x="4389120" y="2011680"/>
+            <a:ext cx="3383280" cy="4389120"/>
           </a:xfrm>
           <a:prstGeom prst="roundRect">
             <a:avLst/>
@@ -12222,14 +12726,14 @@
       </p:sp>
       <p:sp>
         <p:nvSpPr>
-          <p:cNvPr id="7" name="TextBox 6"/>
+          <p:cNvPr id="9" name="TextBox 8"/>
           <p:cNvSpPr txBox="1"/>
           <p:nvPr/>
         </p:nvSpPr>
         <p:spPr>
           <a:xfrm>
-            <a:off x="1005840" y="2286000"/>
-            <a:ext cx="4572000" cy="3840480"/>
+            <a:off x="4572000" y="2194560"/>
+            <a:ext cx="3017520" cy="4023360"/>
           </a:xfrm>
           <a:prstGeom prst="rect">
             <a:avLst/>
@@ -12246,93 +12750,77 @@
               <a:spcAft>
                 <a:spcPts val="1600"/>
               </a:spcAft>
-              <a:defRPr sz="2500" b="1">
-                <a:solidFill>
-                  <a:srgbClr val="10B981"/>
-                </a:solidFill>
-                <a:latin typeface="Inter"/>
-              </a:defRPr>
-            </a:pPr>
-            <a:r>
-              <a:t>⚡ Përvojë pa Fërkime (Zero Friction)</a:t>
-            </a:r>
-          </a:p>
-          <a:p>
-            <a:pPr>
-              <a:spcAft>
-                <a:spcPts val="1400"/>
-              </a:spcAft>
-              <a:defRPr sz="2000">
-                <a:solidFill>
-                  <a:srgbClr val="E2E8F0"/>
-                </a:solidFill>
-                <a:latin typeface="Inter"/>
-              </a:defRPr>
-            </a:pPr>
-            <a:r>
-              <a:t>• Zero Shkarkim: Klienti nuk shkon në App Store dhe nuk pret me minuta.</a:t>
-            </a:r>
-          </a:p>
-          <a:p>
-            <a:pPr>
-              <a:spcAft>
-                <a:spcPts val="1400"/>
-              </a:spcAft>
-              <a:defRPr sz="2000">
-                <a:solidFill>
-                  <a:srgbClr val="E2E8F0"/>
-                </a:solidFill>
-                <a:latin typeface="Inter"/>
-              </a:defRPr>
-            </a:pPr>
-            <a:r>
-              <a:t>• QR Instalim: Skanon kodin në banak dhe aplikacioni shfaqet menjëherë.</a:t>
-            </a:r>
-          </a:p>
-          <a:p>
-            <a:pPr>
-              <a:spcAft>
-                <a:spcPts val="1400"/>
-              </a:spcAft>
-              <a:defRPr sz="2000">
-                <a:solidFill>
-                  <a:srgbClr val="E2E8F0"/>
-                </a:solidFill>
-                <a:latin typeface="Inter"/>
-              </a:defRPr>
-            </a:pPr>
-            <a:r>
-              <a:t>• Add to Home Screen: Ikona vendoset në ekranin kryesor të telefonit të tyre.</a:t>
-            </a:r>
-          </a:p>
-          <a:p>
-            <a:pPr>
-              <a:spcAft>
-                <a:spcPts val="1400"/>
-              </a:spcAft>
-              <a:defRPr sz="2000">
-                <a:solidFill>
-                  <a:srgbClr val="E2E8F0"/>
-                </a:solidFill>
-                <a:latin typeface="Inter"/>
-              </a:defRPr>
-            </a:pPr>
-            <a:r>
-              <a:t>• Peshë minimale: Ngarkohet për &lt; 1 sekondë edhe me rrjet të ngadaltë!</a:t>
-            </a:r>
-          </a:p>
-        </p:txBody>
-      </p:sp>
-      <p:sp>
-        <p:nvSpPr>
-          <p:cNvPr id="8" name="Rounded Rectangle 7"/>
+              <a:defRPr sz="2300" b="1">
+                <a:solidFill>
+                  <a:srgbClr val="FFFFFF"/>
+                </a:solidFill>
+                <a:latin typeface="Inter"/>
+              </a:defRPr>
+            </a:pPr>
+            <a:r>
+              <a:t>📶 Funksionon Edhe Offline</a:t>
+            </a:r>
+          </a:p>
+          <a:p>
+            <a:pPr>
+              <a:spcAft>
+                <a:spcPts val="1200"/>
+              </a:spcAft>
+              <a:defRPr sz="1800">
+                <a:solidFill>
+                  <a:srgbClr val="E2E8F0"/>
+                </a:solidFill>
+                <a:latin typeface="Inter"/>
+              </a:defRPr>
+            </a:pPr>
+            <a:r>
+              <a:t>• Punishtja e drurit mund të mos ketë WiFi në çdo cep.</a:t>
+            </a:r>
+          </a:p>
+          <a:p>
+            <a:pPr>
+              <a:spcAft>
+                <a:spcPts val="1200"/>
+              </a:spcAft>
+              <a:defRPr sz="1800">
+                <a:solidFill>
+                  <a:srgbClr val="E2E8F0"/>
+                </a:solidFill>
+                <a:latin typeface="Inter"/>
+              </a:defRPr>
+            </a:pPr>
+            <a:r>
+              <a:t>• Service Worker ruan të dhënat dhe mundëson skanim të pandërprerë.</a:t>
+            </a:r>
+          </a:p>
+          <a:p>
+            <a:pPr>
+              <a:spcAft>
+                <a:spcPts val="1200"/>
+              </a:spcAft>
+              <a:defRPr sz="1800">
+                <a:solidFill>
+                  <a:srgbClr val="E2E8F0"/>
+                </a:solidFill>
+                <a:latin typeface="Inter"/>
+              </a:defRPr>
+            </a:pPr>
+            <a:r>
+              <a:t>• Sinkronizim automatik në sfond sapo rikthehet lidhja në internet.</a:t>
+            </a:r>
+          </a:p>
+        </p:txBody>
+      </p:sp>
+      <p:sp>
+        <p:nvSpPr>
+          <p:cNvPr id="10" name="Rounded Rectangle 9"/>
           <p:cNvSpPr/>
           <p:nvPr/>
         </p:nvSpPr>
         <p:spPr>
           <a:xfrm>
-            <a:off x="6309360" y="2011680"/>
-            <a:ext cx="5120640" cy="4389120"/>
+            <a:off x="8046720" y="2011680"/>
+            <a:ext cx="3383280" cy="4389120"/>
           </a:xfrm>
           <a:prstGeom prst="roundRect">
             <a:avLst/>
@@ -12342,7 +12830,7 @@
           </a:solidFill>
           <a:ln w="31750">
             <a:solidFill>
-              <a:srgbClr val="38BDF8"/>
+              <a:srgbClr val="6366F1"/>
             </a:solidFill>
           </a:ln>
         </p:spPr>
@@ -12370,14 +12858,14 @@
       </p:sp>
       <p:sp>
         <p:nvSpPr>
-          <p:cNvPr id="9" name="TextBox 8"/>
+          <p:cNvPr id="11" name="TextBox 10"/>
           <p:cNvSpPr txBox="1"/>
           <p:nvPr/>
         </p:nvSpPr>
         <p:spPr>
           <a:xfrm>
-            <a:off x="6583680" y="2286000"/>
-            <a:ext cx="4572000" cy="3840480"/>
+            <a:off x="8229600" y="2194560"/>
+            <a:ext cx="3017520" cy="4023360"/>
           </a:xfrm>
           <a:prstGeom prst="rect">
             <a:avLst/>
@@ -12394,79 +12882,63 @@
               <a:spcAft>
                 <a:spcPts val="1600"/>
               </a:spcAft>
-              <a:defRPr sz="2500" b="1">
-                <a:solidFill>
-                  <a:srgbClr val="38BDF8"/>
-                </a:solidFill>
-                <a:latin typeface="Inter"/>
-              </a:defRPr>
-            </a:pPr>
-            <a:r>
-              <a:t>📶 Punon Offline &amp; Njoftime Push</a:t>
-            </a:r>
-          </a:p>
-          <a:p>
-            <a:pPr>
-              <a:spcAft>
-                <a:spcPts val="1400"/>
-              </a:spcAft>
-              <a:defRPr sz="2000">
-                <a:solidFill>
-                  <a:srgbClr val="E2E8F0"/>
-                </a:solidFill>
-                <a:latin typeface="Inter"/>
-              </a:defRPr>
-            </a:pPr>
-            <a:r>
-              <a:t>• Service Worker: Ruan menunë dhe fotot në memorien e telefonit.</a:t>
-            </a:r>
-          </a:p>
-          <a:p>
-            <a:pPr>
-              <a:spcAft>
-                <a:spcPts val="1400"/>
-              </a:spcAft>
-              <a:defRPr sz="2000">
-                <a:solidFill>
-                  <a:srgbClr val="E2E8F0"/>
-                </a:solidFill>
-                <a:latin typeface="Inter"/>
-              </a:defRPr>
-            </a:pPr>
-            <a:r>
-              <a:t>• Pa Internet: Klienti mund të shfletojë produktet edhe kur i ikën rrjeti.</a:t>
-            </a:r>
-          </a:p>
-          <a:p>
-            <a:pPr>
-              <a:spcAft>
-                <a:spcPts val="1400"/>
-              </a:spcAft>
-              <a:defRPr sz="2000">
-                <a:solidFill>
-                  <a:srgbClr val="E2E8F0"/>
-                </a:solidFill>
-                <a:latin typeface="Inter"/>
-              </a:defRPr>
-            </a:pPr>
-            <a:r>
-              <a:t>• Sinkronizim Automatik: Sapo vjen interneti, porosia regjistrohet në çast.</a:t>
-            </a:r>
-          </a:p>
-          <a:p>
-            <a:pPr>
-              <a:spcAft>
-                <a:spcPts val="1400"/>
-              </a:spcAft>
-              <a:defRPr sz="2000">
-                <a:solidFill>
-                  <a:srgbClr val="E2E8F0"/>
-                </a:solidFill>
-                <a:latin typeface="Inter"/>
-              </a:defRPr>
-            </a:pPr>
-            <a:r>
-              <a:t>• Njoftime Direkte: Biznesi mund t'i dërgojë klientit njoftim për ofertat!</a:t>
+              <a:defRPr sz="2300" b="1">
+                <a:solidFill>
+                  <a:srgbClr val="FFFFFF"/>
+                </a:solidFill>
+                <a:latin typeface="Inter"/>
+              </a:defRPr>
+            </a:pPr>
+            <a:r>
+              <a:t>📱 Qasje në Hardware të Telefonit</a:t>
+            </a:r>
+          </a:p>
+          <a:p>
+            <a:pPr>
+              <a:spcAft>
+                <a:spcPts val="1200"/>
+              </a:spcAft>
+              <a:defRPr sz="1800">
+                <a:solidFill>
+                  <a:srgbClr val="E2E8F0"/>
+                </a:solidFill>
+                <a:latin typeface="Inter"/>
+              </a:defRPr>
+            </a:pPr>
+            <a:r>
+              <a:t>• Kamera përdoret për skanimin e barkodeve të pjesëve të karrigeve.</a:t>
+            </a:r>
+          </a:p>
+          <a:p>
+            <a:pPr>
+              <a:spcAft>
+                <a:spcPts val="1200"/>
+              </a:spcAft>
+              <a:defRPr sz="1800">
+                <a:solidFill>
+                  <a:srgbClr val="E2E8F0"/>
+                </a:solidFill>
+                <a:latin typeface="Inter"/>
+              </a:defRPr>
+            </a:pPr>
+            <a:r>
+              <a:t>• Njoftimet Push paralajmërojnë stafin kur mungojnë vidat apo këmbët.</a:t>
+            </a:r>
+          </a:p>
+          <a:p>
+            <a:pPr>
+              <a:spcAft>
+                <a:spcPts val="1200"/>
+              </a:spcAft>
+              <a:defRPr sz="1800">
+                <a:solidFill>
+                  <a:srgbClr val="E2E8F0"/>
+                </a:solidFill>
+                <a:latin typeface="Inter"/>
+              </a:defRPr>
+            </a:pPr>
+            <a:r>
+              <a:t>• Gjeolokacioni ndihmon shoferin e furgonit për dorëzimin e porosive.</a:t>
             </a:r>
           </a:p>
         </p:txBody>
@@ -12563,7 +13035,7 @@
               </a:defRPr>
             </a:pPr>
             <a:r>
-              <a:t>ARKITEKTURA SOFTUERIKE</a:t>
+              <a:t>KRAHASIMI TEKNIK</a:t>
             </a:r>
           </a:p>
         </p:txBody>
@@ -12599,7 +13071,7 @@
               </a:defRPr>
             </a:pPr>
             <a:r>
-              <a:t>Pse PWA në vend të Native të Vjetër?</a:t>
+              <a:t>PWA vs Zhvillimi Tradicional Native</a:t>
             </a:r>
           </a:p>
         </p:txBody>
@@ -12627,15 +13099,15 @@
           <a:lstStyle/>
           <a:p>
             <a:pPr>
-              <a:defRPr sz="2200">
-                <a:solidFill>
-                  <a:srgbClr val="E2E8F0"/>
-                </a:solidFill>
-                <a:latin typeface="Inter"/>
-              </a:defRPr>
-            </a:pPr>
-            <a:r>
-              <a:t>Krahasimi teknik mes zhvillimit klasik Native dhe arkitekturës moderne PWA.</a:t>
+              <a:defRPr sz="2100">
+                <a:solidFill>
+                  <a:srgbClr val="E2E8F0"/>
+                </a:solidFill>
+                <a:latin typeface="Inter"/>
+              </a:defRPr>
+            </a:pPr>
+            <a:r>
+              <a:t>Pse teknologjia PWA është zgjedhja ideale për tregun e Kosovës dhe SME-të.</a:t>
             </a:r>
           </a:p>
         </p:txBody>
@@ -12649,7 +13121,7 @@
         <p:spPr>
           <a:xfrm>
             <a:off x="731520" y="2011680"/>
-            <a:ext cx="3383280" cy="4389120"/>
+            <a:ext cx="10698480" cy="4389120"/>
           </a:xfrm>
           <a:prstGeom prst="roundRect">
             <a:avLst/>
@@ -12657,9 +13129,9 @@
           <a:solidFill>
             <a:srgbClr val="141E34"/>
           </a:solidFill>
-          <a:ln w="31750">
+          <a:ln w="25400">
             <a:solidFill>
-              <a:srgbClr val="EF4444"/>
+              <a:srgbClr val="2E4066"/>
             </a:solidFill>
           </a:ln>
         </p:spPr>
@@ -12693,8 +13165,8 @@
         </p:nvSpPr>
         <p:spPr>
           <a:xfrm>
-            <a:off x="914400" y="2194560"/>
-            <a:ext cx="3017520" cy="4023360"/>
+            <a:off x="914400" y="2148840"/>
+            <a:ext cx="10332720" cy="4114800"/>
           </a:xfrm>
           <a:prstGeom prst="rect">
             <a:avLst/>
@@ -12709,365 +13181,113 @@
           <a:p>
             <a:pPr>
               <a:spcAft>
-                <a:spcPts val="2000"/>
-              </a:spcAft>
-              <a:defRPr sz="2500" b="1">
-                <a:solidFill>
-                  <a:srgbClr val="EF4444"/>
-                </a:solidFill>
-                <a:latin typeface="Inter"/>
-              </a:defRPr>
-            </a:pPr>
-            <a:r>
-              <a:t>❌ Native Klasik</a:t>
-            </a:r>
-          </a:p>
-          <a:p>
-            <a:pPr>
-              <a:spcAft>
-                <a:spcPts val="1600"/>
-              </a:spcAft>
-              <a:defRPr sz="2000">
-                <a:solidFill>
-                  <a:srgbClr val="E2E8F0"/>
-                </a:solidFill>
-                <a:latin typeface="Inter"/>
-              </a:defRPr>
-            </a:pPr>
-            <a:r>
-              <a:t>• 2 kode krejtësisht të ndara:</a:t>
-            </a:r>
-            <a:br/>
-            <a:r>
-              <a:t>Swift (iOS) &amp; Kotlin (Android)</a:t>
-            </a:r>
-          </a:p>
-          <a:p>
-            <a:pPr>
-              <a:spcAft>
-                <a:spcPts val="1600"/>
-              </a:spcAft>
-              <a:defRPr sz="2000">
-                <a:solidFill>
-                  <a:srgbClr val="E2E8F0"/>
-                </a:solidFill>
-                <a:latin typeface="Inter"/>
-              </a:defRPr>
-            </a:pPr>
-            <a:r>
-              <a:t>• Pritje 7-14 ditë për</a:t>
-            </a:r>
-            <a:br/>
-            <a:r>
-              <a:t>aprovim në App Store</a:t>
-            </a:r>
-          </a:p>
-          <a:p>
-            <a:pPr>
-              <a:spcAft>
-                <a:spcPts val="1600"/>
-              </a:spcAft>
-              <a:defRPr sz="2000">
-                <a:solidFill>
-                  <a:srgbClr val="E2E8F0"/>
-                </a:solidFill>
-                <a:latin typeface="Inter"/>
-              </a:defRPr>
-            </a:pPr>
-            <a:r>
-              <a:t>• Mirëmbajtje e dyfishtë</a:t>
-            </a:r>
-            <a:br/>
-            <a:r>
-              <a:t>dhe kosto marramendëse</a:t>
-            </a:r>
-          </a:p>
-        </p:txBody>
-      </p:sp>
-      <p:sp>
-        <p:nvSpPr>
-          <p:cNvPr id="8" name="Rounded Rectangle 7"/>
-          <p:cNvSpPr/>
-          <p:nvPr/>
-        </p:nvSpPr>
-        <p:spPr>
-          <a:xfrm>
-            <a:off x="4389120" y="2011680"/>
-            <a:ext cx="3383280" cy="4389120"/>
-          </a:xfrm>
-          <a:prstGeom prst="roundRect">
-            <a:avLst/>
-          </a:prstGeom>
-          <a:solidFill>
-            <a:srgbClr val="141E34"/>
-          </a:solidFill>
-          <a:ln w="31750">
-            <a:solidFill>
-              <a:srgbClr val="F59E0B"/>
-            </a:solidFill>
-          </a:ln>
-        </p:spPr>
-        <p:style>
-          <a:lnRef idx="1">
-            <a:schemeClr val="accent1"/>
-          </a:lnRef>
-          <a:fillRef idx="3">
-            <a:schemeClr val="accent1"/>
-          </a:fillRef>
-          <a:effectRef idx="2">
-            <a:schemeClr val="accent1"/>
-          </a:effectRef>
-          <a:fontRef idx="minor">
-            <a:schemeClr val="lt1"/>
-          </a:fontRef>
-        </p:style>
-        <p:txBody>
-          <a:bodyPr rtlCol="0" anchor="ctr"/>
-          <a:lstStyle/>
-          <a:p>
-            <a:pPr algn="ctr"/>
-          </a:p>
-        </p:txBody>
-      </p:sp>
-      <p:sp>
-        <p:nvSpPr>
-          <p:cNvPr id="9" name="TextBox 8"/>
-          <p:cNvSpPr txBox="1"/>
-          <p:nvPr/>
-        </p:nvSpPr>
-        <p:spPr>
-          <a:xfrm>
-            <a:off x="4572000" y="2194560"/>
-            <a:ext cx="3017520" cy="4023360"/>
-          </a:xfrm>
-          <a:prstGeom prst="rect">
-            <a:avLst/>
-          </a:prstGeom>
-          <a:noFill/>
-        </p:spPr>
-        <p:txBody>
-          <a:bodyPr wrap="square">
-            <a:spAutoFit/>
-          </a:bodyPr>
-          <a:lstStyle/>
-          <a:p>
-            <a:pPr>
-              <a:spcAft>
-                <a:spcPts val="2000"/>
-              </a:spcAft>
-              <a:defRPr sz="2500" b="1">
-                <a:solidFill>
-                  <a:srgbClr val="F59E0B"/>
-                </a:solidFill>
-                <a:latin typeface="Inter"/>
-              </a:defRPr>
-            </a:pPr>
-            <a:r>
-              <a:t>⚠️ Web Tradicional</a:t>
-            </a:r>
-          </a:p>
-          <a:p>
-            <a:pPr>
-              <a:spcAft>
-                <a:spcPts val="1600"/>
-              </a:spcAft>
-              <a:defRPr sz="2000">
-                <a:solidFill>
-                  <a:srgbClr val="E2E8F0"/>
-                </a:solidFill>
-                <a:latin typeface="Inter"/>
-              </a:defRPr>
-            </a:pPr>
-            <a:r>
-              <a:t>• Nuk funksionon pa internet</a:t>
-            </a:r>
-            <a:br/>
-            <a:r>
-              <a:t>(Zero Offline Mode)</a:t>
-            </a:r>
-          </a:p>
-          <a:p>
-            <a:pPr>
-              <a:spcAft>
-                <a:spcPts val="1600"/>
-              </a:spcAft>
-              <a:defRPr sz="2000">
-                <a:solidFill>
-                  <a:srgbClr val="E2E8F0"/>
-                </a:solidFill>
-                <a:latin typeface="Inter"/>
-              </a:defRPr>
-            </a:pPr>
-            <a:r>
-              <a:t>• Nuk instalohet dot në</a:t>
-            </a:r>
-            <a:br/>
-            <a:r>
-              <a:t>ekranin e telefonit</a:t>
-            </a:r>
-          </a:p>
-          <a:p>
-            <a:pPr>
-              <a:spcAft>
-                <a:spcPts val="1600"/>
-              </a:spcAft>
-              <a:defRPr sz="2000">
-                <a:solidFill>
-                  <a:srgbClr val="E2E8F0"/>
-                </a:solidFill>
-                <a:latin typeface="Inter"/>
-              </a:defRPr>
-            </a:pPr>
-            <a:r>
-              <a:t>• Ringarkim i plotë i faqes</a:t>
-            </a:r>
-            <a:br/>
-            <a:r>
-              <a:t>i ngadaltë në celular</a:t>
-            </a:r>
-          </a:p>
-        </p:txBody>
-      </p:sp>
-      <p:sp>
-        <p:nvSpPr>
-          <p:cNvPr id="10" name="Rounded Rectangle 9"/>
-          <p:cNvSpPr/>
-          <p:nvPr/>
-        </p:nvSpPr>
-        <p:spPr>
-          <a:xfrm>
-            <a:off x="8046720" y="2011680"/>
-            <a:ext cx="3383280" cy="4389120"/>
-          </a:xfrm>
-          <a:prstGeom prst="roundRect">
-            <a:avLst/>
-          </a:prstGeom>
-          <a:solidFill>
-            <a:srgbClr val="141E34"/>
-          </a:solidFill>
-          <a:ln w="31750">
-            <a:solidFill>
-              <a:srgbClr val="10B981"/>
-            </a:solidFill>
-          </a:ln>
-        </p:spPr>
-        <p:style>
-          <a:lnRef idx="1">
-            <a:schemeClr val="accent1"/>
-          </a:lnRef>
-          <a:fillRef idx="3">
-            <a:schemeClr val="accent1"/>
-          </a:fillRef>
-          <a:effectRef idx="2">
-            <a:schemeClr val="accent1"/>
-          </a:effectRef>
-          <a:fontRef idx="minor">
-            <a:schemeClr val="lt1"/>
-          </a:fontRef>
-        </p:style>
-        <p:txBody>
-          <a:bodyPr rtlCol="0" anchor="ctr"/>
-          <a:lstStyle/>
-          <a:p>
-            <a:pPr algn="ctr"/>
-          </a:p>
-        </p:txBody>
-      </p:sp>
-      <p:sp>
-        <p:nvSpPr>
-          <p:cNvPr id="11" name="TextBox 10"/>
-          <p:cNvSpPr txBox="1"/>
-          <p:nvPr/>
-        </p:nvSpPr>
-        <p:spPr>
-          <a:xfrm>
-            <a:off x="8229600" y="2194560"/>
-            <a:ext cx="3017520" cy="4023360"/>
-          </a:xfrm>
-          <a:prstGeom prst="rect">
-            <a:avLst/>
-          </a:prstGeom>
-          <a:noFill/>
-        </p:spPr>
-        <p:txBody>
-          <a:bodyPr wrap="square">
-            <a:spAutoFit/>
-          </a:bodyPr>
-          <a:lstStyle/>
-          <a:p>
-            <a:pPr>
-              <a:spcAft>
-                <a:spcPts val="2000"/>
-              </a:spcAft>
-              <a:defRPr sz="2500" b="1">
-                <a:solidFill>
-                  <a:srgbClr val="10B981"/>
-                </a:solidFill>
-                <a:latin typeface="Inter"/>
-              </a:defRPr>
-            </a:pPr>
-            <a:r>
-              <a:t>⚡ Modern Next.js PWA</a:t>
-            </a:r>
-          </a:p>
-          <a:p>
-            <a:pPr>
-              <a:spcAft>
-                <a:spcPts val="1600"/>
-              </a:spcAft>
-              <a:defRPr sz="2000">
-                <a:solidFill>
-                  <a:srgbClr val="E2E8F0"/>
-                </a:solidFill>
-                <a:latin typeface="Inter"/>
-              </a:defRPr>
-            </a:pPr>
-            <a:r>
-              <a:t>• 1 kod i vetëm i unifikuar</a:t>
-            </a:r>
-            <a:br/>
-            <a:r>
-              <a:t>për të gjitha platformat</a:t>
-            </a:r>
-          </a:p>
-          <a:p>
-            <a:pPr>
-              <a:spcAft>
-                <a:spcPts val="1600"/>
-              </a:spcAft>
-              <a:defRPr sz="2000">
-                <a:solidFill>
-                  <a:srgbClr val="E2E8F0"/>
-                </a:solidFill>
-                <a:latin typeface="Inter"/>
-              </a:defRPr>
-            </a:pPr>
-            <a:r>
-              <a:t>• Instalohet me 1-klik direkt</a:t>
-            </a:r>
-            <a:br/>
-            <a:r>
-              <a:t>nga shfletuesi në celular</a:t>
-            </a:r>
-          </a:p>
-          <a:p>
-            <a:pPr>
-              <a:spcAft>
-                <a:spcPts val="1600"/>
-              </a:spcAft>
-              <a:defRPr sz="2000">
-                <a:solidFill>
-                  <a:srgbClr val="E2E8F0"/>
-                </a:solidFill>
-                <a:latin typeface="Inter"/>
-              </a:defRPr>
-            </a:pPr>
-            <a:r>
-              <a:t>• Service Worker &amp; Cache:</a:t>
-            </a:r>
-            <a:br/>
-            <a:r>
-              <a:t>Shpejtësi maksimale &amp; Offline!</a:t>
+                <a:spcPts val="800"/>
+              </a:spcAft>
+              <a:defRPr sz="1600" b="1">
+                <a:solidFill>
+                  <a:srgbClr val="38BDF8"/>
+                </a:solidFill>
+                <a:latin typeface="Monaco"/>
+              </a:defRPr>
+            </a:pPr>
+            <a:r>
+              <a:t>Kriteri Teknik             | Zhvillimi Tradicional (Native)                   | Next.js 15 PWA (Qasja Jonë)</a:t>
+            </a:r>
+          </a:p>
+          <a:p>
+            <a:pPr>
+              <a:spcAft>
+                <a:spcPts val="800"/>
+              </a:spcAft>
+              <a:defRPr sz="1500" b="0">
+                <a:solidFill>
+                  <a:srgbClr val="FFFFFF"/>
+                </a:solidFill>
+                <a:latin typeface="Monaco"/>
+              </a:defRPr>
+            </a:pPr>
+            <a:r>
+              <a:t>Gjuhët e Programimit       | Swift (iOS) + Kotlin (Android) — Dy kode të ndryshme | TypeScript + React — Një kod i vetëm për të gjitha</a:t>
+            </a:r>
+          </a:p>
+          <a:p>
+            <a:pPr>
+              <a:spcAft>
+                <a:spcPts val="800"/>
+              </a:spcAft>
+              <a:defRPr sz="1500" b="0">
+                <a:solidFill>
+                  <a:srgbClr val="E2E8F0"/>
+                </a:solidFill>
+                <a:latin typeface="Monaco"/>
+              </a:defRPr>
+            </a:pPr>
+            <a:r>
+              <a:t>Kosto e Shpërndarjes       | 99$/vit për Apple + 25$ Google Play              | 0€ — Publikim i menjëhershëm me Vercel / GitHub</a:t>
+            </a:r>
+          </a:p>
+          <a:p>
+            <a:pPr>
+              <a:spcAft>
+                <a:spcPts val="800"/>
+              </a:spcAft>
+              <a:defRPr sz="1500" b="0">
+                <a:solidFill>
+                  <a:srgbClr val="FFFFFF"/>
+                </a:solidFill>
+                <a:latin typeface="Monaco"/>
+              </a:defRPr>
+            </a:pPr>
+            <a:r>
+              <a:t>Aprovimi i Aplikacionit    | Pritje 3–7 ditë nga Apple për çdo përditësim kodi | I menjëhershëm (Instant) me çdo git push</a:t>
+            </a:r>
+          </a:p>
+          <a:p>
+            <a:pPr>
+              <a:spcAft>
+                <a:spcPts val="800"/>
+              </a:spcAft>
+              <a:defRPr sz="1500" b="0">
+                <a:solidFill>
+                  <a:srgbClr val="E2E8F0"/>
+                </a:solidFill>
+                <a:latin typeface="Monaco"/>
+              </a:defRPr>
+            </a:pPr>
+            <a:r>
+              <a:t>Madhësia e Aplikacionit    | 100MB — 250MB (Pengesë për shkarkim nga klienti) | &lt; 2MB (Hapet me 1 klikim pa zënë memorien)</a:t>
+            </a:r>
+          </a:p>
+          <a:p>
+            <a:pPr>
+              <a:spcAft>
+                <a:spcPts val="800"/>
+              </a:spcAft>
+              <a:defRPr sz="1500" b="0">
+                <a:solidFill>
+                  <a:srgbClr val="FFFFFF"/>
+                </a:solidFill>
+                <a:latin typeface="Monaco"/>
+              </a:defRPr>
+            </a:pPr>
+            <a:r>
+              <a:t>Funksionimi Offline        | I mundur por kërkon arkitekturë të rëndë lokale  | I integruar me Cache API &amp; Service Workers</a:t>
+            </a:r>
+          </a:p>
+          <a:p>
+            <a:pPr>
+              <a:spcAft>
+                <a:spcPts val="800"/>
+              </a:spcAft>
+              <a:defRPr sz="1500" b="0">
+                <a:solidFill>
+                  <a:srgbClr val="E2E8F0"/>
+                </a:solidFill>
+                <a:latin typeface="Monaco"/>
+              </a:defRPr>
+            </a:pPr>
+            <a:r>
+              <a:t>E Përshtatshme për Biznese | E papërballueshme për shumicën e bizneseve tona  | Zgjidhja ideale me kosto zero dhe efikasitet maksimal</a:t>
             </a:r>
           </a:p>
         </p:txBody>

--- a/Jave1_Hyrje_Nextjs_PWA_Copilot_2026.pptx
+++ b/Jave1_Hyrje_Nextjs_PWA_Copilot_2026.pptx
@@ -3723,7 +3723,7 @@
               </a:defRPr>
             </a:pPr>
             <a:r>
-              <a:t>• Server Components për shpejtësi maksimale</a:t>
+              <a:t>• Server Components për shpejtësi</a:t>
             </a:r>
           </a:p>
           <a:p>
@@ -3755,7 +3755,7 @@
               </a:defRPr>
             </a:pPr>
             <a:r>
-              <a:t>• Optimizim Touch-First me Tailwind</a:t>
+              <a:t>• Dizajn Touch-First me Tailwind</a:t>
             </a:r>
           </a:p>
         </p:txBody>
@@ -3900,7 +3900,7 @@
               </a:defRPr>
             </a:pPr>
             <a:r>
-              <a:t>• Autentikim i plotë (Email, Google, Phone)</a:t>
+              <a:t>• Auth i dedikuar me email @universitetiaab.com</a:t>
             </a:r>
           </a:p>
           <a:p>
@@ -3916,7 +3916,7 @@
               </a:defRPr>
             </a:pPr>
             <a:r>
-              <a:t>• Realtime Subscriptions për porositë</a:t>
+              <a:t>• Realtime Subscriptions për vendet e lira</a:t>
             </a:r>
           </a:p>
         </p:txBody>
@@ -4045,7 +4045,7 @@
               </a:defRPr>
             </a:pPr>
             <a:r>
-              <a:t>• Gjenerim i skemave SQL dhe testeve</a:t>
+              <a:t>• Gjenerim i shpejtë i skemave SQL dhe testeve</a:t>
             </a:r>
           </a:p>
           <a:p>
@@ -4061,7 +4061,7 @@
               </a:defRPr>
             </a:pPr>
             <a:r>
-              <a:t>• Përshpejton zhvillimin e veçorive 3x</a:t>
+              <a:t>• Përshpejton zhvillimin 3x më shpejt</a:t>
             </a:r>
           </a:p>
           <a:p>
@@ -4077,7 +4077,7 @@
               </a:defRPr>
             </a:pPr>
             <a:r>
-              <a:t>• Mjet profesional i industrisë globale</a:t>
+              <a:t>• Mjet profesional i standardeve globale</a:t>
             </a:r>
           </a:p>
         </p:txBody>
@@ -4238,7 +4238,7 @@
               </a:defRPr>
             </a:pPr>
             <a:r>
-              <a:t>• Lighthouse Score 100/100</a:t>
+              <a:t>• Shpejtësi maksimale në çdo celular</a:t>
             </a:r>
           </a:p>
         </p:txBody>
@@ -4507,7 +4507,7 @@
               </a:defRPr>
             </a:pPr>
             <a:r>
-              <a:t>• Gjenerim Komponentësh: Përshkruani UI-në në koment dhe lini Copilot të gjenerojë skeleton-in me Tailwind.</a:t>
+              <a:t>• Gjenerim Komponentësh: Përshkruani kartelën e udhëtimit në koment dhe lini Copilot të gjenerojë kodin Tailwind.</a:t>
             </a:r>
           </a:p>
           <a:p>
@@ -4523,7 +4523,7 @@
               </a:defRPr>
             </a:pPr>
             <a:r>
-              <a:t>• Skema dhe Query SQL: Ndihmon në shkrimin e query-ve komplekse për Supabase.</a:t>
+              <a:t>• Skema dhe Query SQL: Ndihmon në shkrimin e query-ve për filtrimin e vendeve të lira sipas orës.</a:t>
             </a:r>
           </a:p>
           <a:p>
@@ -4703,7 +4703,7 @@
               </a:defRPr>
             </a:pPr>
             <a:r>
-              <a:t>• Ju Jeni Inxhinieri: Copilot është thjesht një kalkulator i avancuar. Inxhinieri i vërtetë jeni JU!</a:t>
+              <a:t>• Ju Jeni Inxhinieri: Copilot është thjesht një asistent i avancuar. Inxhinieri i vërtetë jeni JU!</a:t>
             </a:r>
           </a:p>
         </p:txBody>
@@ -5275,7 +5275,7 @@
               </a:defRPr>
             </a:pPr>
             <a:r>
-              <a:t>• PWA mobile për biznes real familjar</a:t>
+              <a:t>• PWA mobile për një rast real (si RideShare)</a:t>
             </a:r>
           </a:p>
           <a:p>
@@ -6170,7 +6170,7 @@
               </a:defRPr>
             </a:pPr>
             <a:r>
-              <a:t>• Biznesi Real: Tregoni biznesin që keni zgjedhur dhe problemin kryesor që zgjidh aplikacioni.</a:t>
+              <a:t>• Problemi Real: Tregoni problemin që keni zgjedhur (p.sh. transporti me AAB RideShare ose biznesi lokal).</a:t>
             </a:r>
           </a:p>
           <a:p>
@@ -6186,7 +6186,7 @@
               </a:defRPr>
             </a:pPr>
             <a:r>
-              <a:t>• Demonstrim i Veçorive: Kryeni një porosi me 'Click &amp; Collect' live, tregoni modin offline dhe RLS në Supabase.</a:t>
+              <a:t>• Demonstrim i Veçorive: Kryeni një rezervim live, tregoni modin offline dhe RLS në Supabase.</a:t>
             </a:r>
           </a:p>
           <a:p>
@@ -6318,7 +6318,7 @@
               </a:defRPr>
             </a:pPr>
             <a:r>
-              <a:t>• Zgjidhje për Familjen: Biznesi i prindërve ose të afërmve tuaj merr një vegël digjitale që kursen para çdo ditë.</a:t>
+              <a:t>• Zgjidhje për Komunitetin: Një vegël digjitale që zgjidh një problem të prekshëm për kolegët ose bizneset tona.</a:t>
             </a:r>
           </a:p>
           <a:p>
@@ -6334,7 +6334,7 @@
               </a:defRPr>
             </a:pPr>
             <a:r>
-              <a:t>• Gati për Tregun e Punës: Përvojë praktike me teknologjitë më të kërkuara në kompanitë ndërkombëtare.</a:t>
+              <a:t>• Gati për Tregun e Punës: Përvojë praktike me teknologjitë më të kërkuara në kompanitë moderne globale.</a:t>
             </a:r>
           </a:p>
           <a:p>
@@ -8645,7 +8645,7 @@
               </a:defRPr>
             </a:pPr>
             <a:r>
-              <a:t>Zgjidhni Biznesin</a:t>
+              <a:t>Përzgjidhni Temën</a:t>
             </a:r>
           </a:p>
           <a:p>
@@ -8661,7 +8661,7 @@
               </a:defRPr>
             </a:pPr>
             <a:r>
-              <a:t>• Flisni me një biznes familjar, punishte mobiliesh, kafene apo servis lokal.</a:t>
+              <a:t>• Zgjidhni një problem real studentor ose biznes lokal (si AAB RideShare ose shërbim lokal).</a:t>
             </a:r>
           </a:p>
           <a:p>
@@ -8677,7 +8677,7 @@
               </a:defRPr>
             </a:pPr>
             <a:r>
-              <a:t>• Zbuloni problemin e tyre kryesor ditor (inventari, porositë, mungesa e pjesëve).</a:t>
+              <a:t>• Përcaktoni cili është problemi kryesor që zgjidh aplikacioni juaj.</a:t>
             </a:r>
           </a:p>
           <a:p>
@@ -8809,7 +8809,7 @@
               </a:defRPr>
             </a:pPr>
             <a:r>
-              <a:t>• Merrni një fletë të bardhë dhe skiconi 3 ekranet kryesore të aplikacionit.</a:t>
+              <a:t>• Merrni një fletë të bardhë dhe skiconi me dorë 3 ekranet kryesore të aplikacionit.</a:t>
             </a:r>
           </a:p>
           <a:p>
@@ -8825,7 +8825,7 @@
               </a:defRPr>
             </a:pPr>
             <a:r>
-              <a:t>• Identifikoni 3 pjesët kryesore të inventarit që duhen skanuar.</a:t>
+              <a:t>• Përcaktoni butonin kryesor që do të klikojë përdoruesi (p.sh. 'Rezervo Vendin').</a:t>
             </a:r>
           </a:p>
           <a:p>
@@ -8841,7 +8841,7 @@
               </a:defRPr>
             </a:pPr>
             <a:r>
-              <a:t>• Përcaktoni butonin kryesor që do të përdorë klienti ose punëtori.</a:t>
+              <a:t>• Bëni një foto skicës suaj për ta pasur udhërrëfyes gjatë kodimit.</a:t>
             </a:r>
           </a:p>
         </p:txBody>
@@ -8989,7 +8989,7 @@
               </a:defRPr>
             </a:pPr>
             <a:r>
-              <a:t>• Bëni push-in e parë për të verifikuar pikët e autograding!</a:t>
+              <a:t>• Bëni push-in e parë me 'git push' për të testuar pikët e para të autograding!</a:t>
             </a:r>
           </a:p>
         </p:txBody>
@@ -9158,7 +9158,7 @@
               </a:defRPr>
             </a:pPr>
             <a:r>
-              <a:t>Si lindi ideja e një studenti për të modernizuar punishtën e karrigeve me celular.</a:t>
+              <a:t>Si lindi ideja e një studenti për të zgjidhur problemin e transportit për në Kolegjin AAB.</a:t>
             </a:r>
           </a:p>
         </p:txBody>
@@ -9210,7 +9210,7 @@
       </p:sp>
       <p:pic>
         <p:nvPicPr>
-          <p:cNvPr id="7" name="Picture 6" descr="chair_business_sketch_dream.jpg"/>
+          <p:cNvPr id="7" name="Picture 6" descr="aab_rideshare_sketch_dream.png"/>
           <p:cNvPicPr>
             <a:picLocks noChangeAspect="1"/>
           </p:cNvPicPr>
@@ -9311,7 +9311,7 @@
               </a:defRPr>
             </a:pPr>
             <a:r>
-              <a:t>🪵 Ëndrra e Një Inxhinieri të Ri</a:t>
+              <a:t>🚗 Tregimi Real i Studentit</a:t>
             </a:r>
           </a:p>
           <a:p>
@@ -9327,7 +9327,7 @@
               </a:defRPr>
             </a:pPr>
             <a:r>
-              <a:t>• Realiteti në Punishte: Prindërit punojnë me pasion duke prodhuar karrige cilësore, por stoqet shënohen me laps në fletore dhe porositë humbasin në thirrje telefonike.</a:t>
+              <a:t>• Realiteti i Mëngjesit: Në orën 07:30, qindra studentë nisen për në AAB nga Ferizaji, Gjilani, Podujeva, Mitrovica e Peja.</a:t>
             </a:r>
           </a:p>
           <a:p>
@@ -9343,7 +9343,7 @@
               </a:defRPr>
             </a:pPr>
             <a:r>
-              <a:t>• Skica e Parë: Studenti ulet me një fletë të bardhë dhe skicon karrigen, pjesët e saj (druri, këmbët metalike, vidat) dhe një ndërfaqe të thjeshtë telefoni.</a:t>
+              <a:t>• Paradoksi në Rrugë: Dhjetëra studentë shkojnë me makinë me 3 vende krejt të zbrazëta duke paguar 10€ naftë vetëm. Ndërkohë, shokët e tyre presin autobusin në shi ose vonohen në ligjëratë.</a:t>
             </a:r>
           </a:p>
           <a:p>
@@ -9359,7 +9359,7 @@
               </a:defRPr>
             </a:pPr>
             <a:r>
-              <a:t>• Pyetja Visionare: 'Po sikur punëtori të skanojë pjesët me telefon, baza të alarmojë kur mbarojnë vidat, dhe klienti të porosisë karrigen e personalizuar online?'</a:t>
+              <a:t>• Skica e Parë: Një student merr një fletë të bardhë dhe vizaton skicën: 'Po sikur të lidhim shoferin me studentët e së njëjtës rrugë përmes një aplikacioni të thjeshtë në celular?'</a:t>
             </a:r>
           </a:p>
           <a:p>
@@ -9708,7 +9708,7 @@
               </a:defRPr>
             </a:pPr>
             <a:r>
-              <a:t>• Rezultati: Shumica e bizneseve lokale mbeteshin me fletore!</a:t>
+              <a:t>• Rezultati: Shumica e ideve të mira mbeteshin vetëm në letër!</a:t>
             </a:r>
           </a:p>
         </p:txBody>
@@ -9808,7 +9808,7 @@
               </a:defRPr>
             </a:pPr>
             <a:r>
-              <a:t>• Next.js 15 PWA: Një kod i vetëm për çdo celular, tablet e PC.</a:t>
+              <a:t>• Next.js 15 PWA: Një kod i vetëm për çdo celular (iOS &amp; Android).</a:t>
             </a:r>
           </a:p>
           <a:p>
@@ -9840,7 +9840,7 @@
               </a:defRPr>
             </a:pPr>
             <a:r>
-              <a:t>• Supabase Cloud: Baza e të dhënave, auth dhe RLS me 0€ kosto fillestare.</a:t>
+              <a:t>• Supabase Cloud: Baza e të dhënave dhe Auth me email AAB falas.</a:t>
             </a:r>
           </a:p>
           <a:p>
@@ -9969,7 +9969,7 @@
               </a:defRPr>
             </a:pPr>
             <a:r>
-              <a:t>RASTI I STUDIMIT</a:t>
+              <a:t>RASTI KONKRET I STUDIMIT</a:t>
             </a:r>
           </a:p>
         </p:txBody>
@@ -10005,7 +10005,7 @@
               </a:defRPr>
             </a:pPr>
             <a:r>
-              <a:t>Zgjidhja Softuerike: Fabrika e Karrigeve 'WoodCraft'</a:t>
+              <a:t>Zgjidhja Softuerike: 'AAB RideShare' me 3 Ekrane</a:t>
             </a:r>
           </a:p>
         </p:txBody>
@@ -10041,7 +10041,7 @@
               </a:defRPr>
             </a:pPr>
             <a:r>
-              <a:t>3 shtyllat kryesore që automatizojnë punishtën nga lënda e parë te klienti.</a:t>
+              <a:t>Arkitekturë e pastër dhe e thjeshtë që çdo student mund ta ndërtojë dhe zotërojë lehtë.</a:t>
             </a:r>
           </a:p>
         </p:txBody>
@@ -10125,7 +10125,7 @@
               </a:defRPr>
             </a:pPr>
             <a:r>
-              <a:t>🪵 1. Inventari i Pjesëve</a:t>
+              <a:t>🔍 1. Kërkimi i Udhëtimit</a:t>
             </a:r>
           </a:p>
           <a:p>
@@ -10141,7 +10141,7 @@
               </a:defRPr>
             </a:pPr>
             <a:r>
-              <a:t>• Skanim me telefon në punishte</a:t>
+              <a:t>• Zgjedh qytetin e nisjes (p.sh. Gjilan)</a:t>
             </a:r>
           </a:p>
           <a:p>
@@ -10157,7 +10157,7 @@
               </a:defRPr>
             </a:pPr>
             <a:r>
-              <a:t>• Evidentim i drurit, këmbëve &amp; vidave</a:t>
+              <a:t>• Destinacioni automatik: Kampusi AAB</a:t>
             </a:r>
           </a:p>
           <a:p>
@@ -10173,7 +10173,7 @@
               </a:defRPr>
             </a:pPr>
             <a:r>
-              <a:t>• Pjesët zbriten automatikisht gjatë montimit</a:t>
+              <a:t>• Përzgjedh orën e dëshiruar (p.sh. 08:00)</a:t>
             </a:r>
           </a:p>
           <a:p>
@@ -10189,7 +10189,7 @@
               </a:defRPr>
             </a:pPr>
             <a:r>
-              <a:t>• Zero fletore dhe zero gabime njerëzore</a:t>
+              <a:t>• Filtër i shpejtë me 1 prekje në ekran</a:t>
             </a:r>
           </a:p>
         </p:txBody>
@@ -10273,7 +10273,7 @@
               </a:defRPr>
             </a:pPr>
             <a:r>
-              <a:t>🔄 2. Porositja e Furnizimeve</a:t>
+              <a:t>📋 2. Lista e Veturave të Lira</a:t>
             </a:r>
           </a:p>
           <a:p>
@@ -10289,7 +10289,7 @@
               </a:defRPr>
             </a:pPr>
             <a:r>
-              <a:t>• Alarme kur stoku bie nën minimum (p.sh. &lt;20 këmbë)</a:t>
+              <a:t>• Sheh studentin shofer &amp; vitin e studimit</a:t>
             </a:r>
           </a:p>
           <a:p>
@@ -10305,7 +10305,7 @@
               </a:defRPr>
             </a:pPr>
             <a:r>
-              <a:t>• Gjenerim i fletës së porosisë me 1-klik</a:t>
+              <a:t>• Modelin e makinës (p.sh. Golf 7, Audi A3)</a:t>
             </a:r>
           </a:p>
           <a:p>
@@ -10321,7 +10321,7 @@
               </a:defRPr>
             </a:pPr>
             <a:r>
-              <a:t>• Lidhje direkte me furnitorët lokalë</a:t>
+              <a:t>• Numrin e vendeve të lira (p.sh. 2 vende)</a:t>
             </a:r>
           </a:p>
           <a:p>
@@ -10337,7 +10337,7 @@
               </a:defRPr>
             </a:pPr>
             <a:r>
-              <a:t>• Punishtja nuk bllokohet kurrë nga mungesa e pjesëve</a:t>
+              <a:t>• Kontributin për karburant (p.sh. 1.50€)</a:t>
             </a:r>
           </a:p>
         </p:txBody>
@@ -10421,7 +10421,7 @@
               </a:defRPr>
             </a:pPr>
             <a:r>
-              <a:t>🛒 3. Shitjet &amp; Porositë B2B</a:t>
+              <a:t>📲 3. Rezervo &amp; Lidhja</a:t>
             </a:r>
           </a:p>
           <a:p>
@@ -10437,7 +10437,7 @@
               </a:defRPr>
             </a:pPr>
             <a:r>
-              <a:t>• Katalog mobil për restorante e klientë</a:t>
+              <a:t>• Rezervim i menjëhershëm me 1-klik</a:t>
             </a:r>
           </a:p>
           <a:p>
@@ -10453,7 +10453,7 @@
               </a:defRPr>
             </a:pPr>
             <a:r>
-              <a:t>• Zgjedhja e modelit, llojit të drurit dhe pëlhurës</a:t>
+              <a:t>• Shoferi merr njoftim live në telefon</a:t>
             </a:r>
           </a:p>
           <a:p>
@@ -10469,7 +10469,7 @@
               </a:defRPr>
             </a:pPr>
             <a:r>
-              <a:t>• Llogaritje e menjëhershme e çmimit &amp; afatit</a:t>
+              <a:t>• Lidhje direkte në WhatsApp për vendin e takimit</a:t>
             </a:r>
           </a:p>
           <a:p>
@@ -10485,7 +10485,7 @@
               </a:defRPr>
             </a:pPr>
             <a:r>
-              <a:t>• Statusi live: [Në Prerje] ➔ [Montim] ➔ [Gati]</a:t>
+              <a:t>• Statusi: [I Rezervuar] ➔ [Gati për Nisje]</a:t>
             </a:r>
           </a:p>
         </p:txBody>
@@ -10618,7 +10618,7 @@
               </a:defRPr>
             </a:pPr>
             <a:r>
-              <a:t>Anatomia e një Biznesi Prodhes: Nga Dhimbja te Vlera</a:t>
+              <a:t>Nga Dhimbja te Vlera: Pse Ka Sukses 'AAB RideShare'?</a:t>
             </a:r>
           </a:p>
         </p:txBody>
@@ -10654,7 +10654,7 @@
               </a:defRPr>
             </a:pPr>
             <a:r>
-              <a:t>Lidhja mes problemeve të punishtes dhe zgjidhjes softuerike që ndërtoni ju.</a:t>
+              <a:t>Lidhja mes problemit të përditshëm të studentëve dhe zgjidhjes softuerike.</a:t>
             </a:r>
           </a:p>
         </p:txBody>
@@ -10754,7 +10754,7 @@
               </a:defRPr>
             </a:pPr>
             <a:r>
-              <a:t>Kaosi në Montim &amp; Pjesët që Mungojnë</a:t>
+              <a:t>Kosto e Lartë &amp; Humbje Kohe</a:t>
             </a:r>
           </a:p>
           <a:p>
@@ -10770,7 +10770,7 @@
               </a:defRPr>
             </a:pPr>
             <a:r>
-              <a:t>• Punëtori nis montimin e 40 karrigeve dhe zbulon se mungojnë vidat speciale.</a:t>
+              <a:t>• Shoferi paguan 100% të naftës i vetëm (10€-15€ në ditë).</a:t>
             </a:r>
           </a:p>
           <a:p>
@@ -10786,7 +10786,7 @@
               </a:defRPr>
             </a:pPr>
             <a:r>
-              <a:t>• Porositë e restoranteve regjistrohen në copa letre dhe ngatërrohen ngjyrat.</a:t>
+              <a:t>• Studentët pa makinë presin autobusin në shi dhe në të ftohtë.</a:t>
             </a:r>
           </a:p>
           <a:p>
@@ -10802,7 +10802,7 @@
               </a:defRPr>
             </a:pPr>
             <a:r>
-              <a:t>• Humbje direkte: ~25% e kohës dhe materialit të shkuar dëm.</a:t>
+              <a:t>• Udhëtimi me autobus merr shpesh 1 orë e gjysmë në trafik.</a:t>
             </a:r>
           </a:p>
           <a:p>
@@ -10818,7 +10818,7 @@
               </a:defRPr>
             </a:pPr>
             <a:r>
-              <a:t>• Klientët e pakënaqur telefonojnë vazhdimisht: 'A janë bërë gati karriget?'</a:t>
+              <a:t>• Vonesa të shpeshta në ligjëratën e orës 09:00 në fakultet.</a:t>
             </a:r>
           </a:p>
         </p:txBody>
@@ -10918,7 +10918,7 @@
               </a:defRPr>
             </a:pPr>
             <a:r>
-              <a:t>PWA Mobile: Punishtja e Dixhitalizuar</a:t>
+              <a:t>Udhëtim i Shpejtë, i Lirë &amp; Social</a:t>
             </a:r>
           </a:p>
           <a:p>
@@ -10934,7 +10934,7 @@
               </a:defRPr>
             </a:pPr>
             <a:r>
-              <a:t>• Punëtori skanon me telefon barkodin e pakos me pjesë brenda 1 sekonde.</a:t>
+              <a:t>• Studenti arrin në AAB 45 minuta më shpejt se me autobus.</a:t>
             </a:r>
           </a:p>
           <a:p>
@@ -10950,7 +10950,7 @@
               </a:defRPr>
             </a:pPr>
             <a:r>
-              <a:t>• Klienti konfigurues karrigen e tij (ngjyrën, drurin) nga celulari.</a:t>
+              <a:t>• Kosto e ndarë dhe minimale: vetëm 1.00€ — 1.50€ për rrugë.</a:t>
             </a:r>
           </a:p>
           <a:p>
@@ -10966,7 +10966,7 @@
               </a:defRPr>
             </a:pPr>
             <a:r>
-              <a:t>• Përcjellje transparente e statusit: [Prerje] ➔ [Montim] ➔ [Gati].</a:t>
+              <a:t>• Përvojë sociale: shoqërohesh me kolegë të fakultetit gjatë rrugës.</a:t>
             </a:r>
           </a:p>
           <a:p>
@@ -10982,7 +10982,7 @@
               </a:defRPr>
             </a:pPr>
             <a:r>
-              <a:t>• Zero fërkim: Pa shkarkuar asnjë aplikacion të rëndë nga App Store.</a:t>
+              <a:t>• Zero fërkim: PWA hapet me link pa shkarkuar 150MB nga App Store.</a:t>
             </a:r>
           </a:p>
         </p:txBody>
@@ -11066,7 +11066,7 @@
               </a:defRPr>
             </a:pPr>
             <a:r>
-              <a:t>💰 Ekonomia e Njësisë (Economics)</a:t>
+              <a:t>💰 Siguria &amp; Modeli (Economics &amp; Trust)</a:t>
             </a:r>
           </a:p>
           <a:p>
@@ -11082,7 +11082,7 @@
               </a:defRPr>
             </a:pPr>
             <a:r>
-              <a:t>Margjinë e Lartë &amp; Zero Komisione</a:t>
+              <a:t>Komunitet i Besueshëm me Email AAB</a:t>
             </a:r>
           </a:p>
           <a:p>
@@ -11098,7 +11098,7 @@
               </a:defRPr>
             </a:pPr>
             <a:r>
-              <a:t>• Pa licenca të shtrenjta ERP: 0€ me Vercel &amp; Supabase Free Tier.</a:t>
+              <a:t>• Kyçje e sigurt: lejohen vetëm studentët me email zyrtar AAB.</a:t>
             </a:r>
           </a:p>
           <a:p>
@@ -11114,7 +11114,7 @@
               </a:defRPr>
             </a:pPr>
             <a:r>
-              <a:t>• Zvogëlimi i stoqeve të fjetura dhe dorëzim 2x më i shpejtë te klientët.</a:t>
+              <a:t>• Zero komisione: kursimi shkon 100% për xhepin e studentëve.</a:t>
             </a:r>
           </a:p>
           <a:p>
@@ -11130,7 +11130,7 @@
               </a:defRPr>
             </a:pPr>
             <a:r>
-              <a:t>• Porositë automatike parandalojnë ndaljen e prodhimit në fabrikë.</a:t>
+              <a:t>• Zvogëlim i trafikut në hyrje të Prishtinës dhe më pak ndotje.</a:t>
             </a:r>
           </a:p>
           <a:p>
@@ -11146,7 +11146,7 @@
               </a:defRPr>
             </a:pPr>
             <a:r>
-              <a:t>• Fitimi mbetet 100% brenda biznesit prodhues lokal!</a:t>
+              <a:t>• Infrastruktura softuerike: 0€ kosto me Supabase &amp; Vercel Free Tier!</a:t>
             </a:r>
           </a:p>
         </p:txBody>
@@ -11279,7 +11279,7 @@
               </a:defRPr>
             </a:pPr>
             <a:r>
-              <a:t>Arkitektura në Veprim: Skica Vektoriale e Fluksit të të Dhënave</a:t>
+              <a:t>Arkitektura në Veprim: Skica Teknike e Të Dhënave</a:t>
             </a:r>
           </a:p>
         </p:txBody>
@@ -11315,7 +11315,7 @@
               </a:defRPr>
             </a:pPr>
             <a:r>
-              <a:t>Skicë e pastër teknike me vija dhe kuti: Nga punishtja fizike te cloud-i dhe klienti.</a:t>
+              <a:t>Skicë e pastër me vija dhe kuti: Nga celulari i studentit te cloud-i dhe lidhja live.</a:t>
             </a:r>
           </a:p>
         </p:txBody>
@@ -11399,7 +11399,7 @@
               </a:defRPr>
             </a:pPr>
             <a:r>
-              <a:t>🏭 1. Punishtja &amp; Skanimi me Telefon</a:t>
+              <a:t>📱 1. Ndërfaqja Mobile PWA (Frontend)</a:t>
             </a:r>
           </a:p>
           <a:p>
@@ -11415,7 +11415,7 @@
               </a:defRPr>
             </a:pPr>
             <a:r>
-              <a:t>• Skanim me Kamerë (PWA): Punëtori përdor celularin e tij për të skanuar barkodin e drurit, këmbëve ose vidave gjatë montimit të karriges.</a:t>
+              <a:t>• Moduli i Shoferit: Formë 1-faqëshe me 3 fusha: Qyteti i nisjes, ora dhe numri i vendeve të lira (p.sh. 3 vende).</a:t>
             </a:r>
           </a:p>
           <a:p>
@@ -11431,7 +11431,7 @@
               </a:defRPr>
             </a:pPr>
             <a:r>
-              <a:t>• Regjistrim Offline: Nëse punishtja ka sinjal të dobët, Service Worker ruan veprimin lokalisht dhe e sinkronizon sapo lidhet me WiFi.</a:t>
+              <a:t>• Moduli i Udhëtarit: Kërkim i menjëhershëm sipas qytetit dhe lista me kartela të qarta me çmimin dhe vendet.</a:t>
             </a:r>
           </a:p>
           <a:p>
@@ -11447,7 +11447,23 @@
               </a:defRPr>
             </a:pPr>
             <a:r>
-              <a:t>• Ndryshimi i Statusit: Me 1 prekje në ekran punëtori kalon karrigen nga [Në Prerje] në [Në Montim] dhe [Në Tapiceri].</a:t>
+              <a:t>• Touch-First me Tailwind: Butona të mëdhenj (48px) që klikohen lehtë me gisht gjatë lëvizjes.</a:t>
+            </a:r>
+          </a:p>
+          <a:p>
+            <a:pPr>
+              <a:spcAft>
+                <a:spcPts val="1000"/>
+              </a:spcAft>
+              <a:defRPr sz="1700">
+                <a:solidFill>
+                  <a:srgbClr val="E2E8F0"/>
+                </a:solidFill>
+                <a:latin typeface="Inter"/>
+              </a:defRPr>
+            </a:pPr>
+            <a:r>
+              <a:t>• Instalueshmëria PWA: Ruhet në Home Screen me ikonën zyrtare të Kolegjit AAB pa kaluar nga App Store.</a:t>
             </a:r>
           </a:p>
         </p:txBody>
@@ -11531,7 +11547,7 @@
               </a:defRPr>
             </a:pPr>
             <a:r>
-              <a:t>☁️ 2. Supabase Cloud, Furnizimi &amp; Klienti</a:t>
+              <a:t>☁️ 2. Supabase Cloud DB &amp; Auth (Backend)</a:t>
             </a:r>
           </a:p>
           <a:p>
@@ -11547,7 +11563,7 @@
               </a:defRPr>
             </a:pPr>
             <a:r>
-              <a:t>• Sinkronizim në Çast (0.2s): Supabase PostgreSQL përditëson stoqet me Row-Level Security (punëtorët shohin punishten, menaxheri gjithçka).</a:t>
+              <a:t>• Autentikimi me Email AAB: Lejohen vetëm regjistrimet me prapashtesën @universitetiaab.com për siguri maksimale.</a:t>
             </a:r>
           </a:p>
           <a:p>
@@ -11563,7 +11579,7 @@
               </a:defRPr>
             </a:pPr>
             <a:r>
-              <a:t>• Alarmi i Auto-Porosisë: Kur stoku i këmbëve metalike bie nën 20 copë, sistemi dërgon automatikisht kërkesën për furnizim te furnitori.</a:t>
+              <a:t>• Tabela 'rides' (PostgreSQL): Ruan: shoferin, qytetin, orën, vendet e lira dhe çmimin e karburantit.</a:t>
             </a:r>
           </a:p>
           <a:p>
@@ -11579,7 +11595,23 @@
               </a:defRPr>
             </a:pPr>
             <a:r>
-              <a:t>• Portali i Klientit (B2B): Restoranti që ka porositur 50 karrige sheh në telefon përparimin në kohë reale pa telefonuar asnjëherë menaxherin.</a:t>
+              <a:t>• Realtime Subscriptions: Sapo një student rezervon vendin, numri i vendeve të lira bie në çast për të gjithë përdoruesit!</a:t>
+            </a:r>
+          </a:p>
+          <a:p>
+            <a:pPr>
+              <a:spcAft>
+                <a:spcPts val="1000"/>
+              </a:spcAft>
+              <a:defRPr sz="1700">
+                <a:solidFill>
+                  <a:srgbClr val="E2E8F0"/>
+                </a:solidFill>
+                <a:latin typeface="Inter"/>
+              </a:defRPr>
+            </a:pPr>
+            <a:r>
+              <a:t>• Row-Level Security (RLS): Shoferi mund të modifikojë ose fshijë vetëm udhëtimet e tij personale.</a:t>
             </a:r>
           </a:p>
         </p:txBody>
@@ -11873,7 +11905,7 @@
               </a:defRPr>
             </a:pPr>
             <a:r>
-              <a:t>Bisedoni me biznesin/punishten: Cilat pjesë vonohen më shumë? Skiconi modelin në letër.</a:t>
+              <a:t>Bisedoni me kolegët: Nga cili qytet udhëtoni? Sa vende ka makina? Skiconi idenë në letër.</a:t>
             </a:r>
           </a:p>
         </p:txBody>
@@ -11998,7 +12030,7 @@
               </a:defRPr>
             </a:pPr>
             <a:r>
-              <a:t>Ndërtoni ndërfaqen mobile me Tailwind CSS. Butona Touch-First (48px) të përshtatshëm për punishte.</a:t>
+              <a:t>Ndërtoni ndërfaqen mobile me Tailwind CSS. Krijoni kartelat e makinave dhe butonat e kërkimit.</a:t>
             </a:r>
           </a:p>
         </p:txBody>
@@ -12123,7 +12155,7 @@
               </a:defRPr>
             </a:pPr>
             <a:r>
-              <a:t>Krijoni tabelat (karriget, pjesët, furnitorët, porositë). Mbroni të dhënat me siguri të plotë (RLS).</a:t>
+              <a:t>Krijoni tabelat 'rides' dhe 'bookings'. Mbroni të dhënat me siguri të plotë (RLS) dhe email AAB.</a:t>
             </a:r>
           </a:p>
         </p:txBody>
@@ -12231,11 +12263,11 @@
               </a:defRPr>
             </a:pPr>
             <a:r>
-              <a:t>Skanimi &amp;</a:t>
+              <a:t>Realtime &amp;</a:t>
             </a:r>
             <a:br/>
             <a:r>
-              <a:t>Testimi</a:t>
+              <a:t>Njoftimet</a:t>
             </a:r>
           </a:p>
           <a:p>
@@ -12248,7 +12280,7 @@
               </a:defRPr>
             </a:pPr>
             <a:r>
-              <a:t>Integroni kamerën e telefonit për leximin e barkodeve/QR dhe testimin e auto-porosive.</a:t>
+              <a:t>Lidhni përditësimin live të vendeve të lira dhe njoftimet push kur studenti konfirmon vendin.</a:t>
             </a:r>
           </a:p>
         </p:txBody>
@@ -12642,7 +12674,7 @@
               </a:defRPr>
             </a:pPr>
             <a:r>
-              <a:t>• Klienti ose punëtori hap vetëm një link ose skanon QR.</a:t>
+              <a:t>• Studenti hap vetëm linkun në shfletues.</a:t>
             </a:r>
           </a:p>
           <a:p>
@@ -12674,7 +12706,7 @@
               </a:defRPr>
             </a:pPr>
             <a:r>
-              <a:t>• Zë më pak se 2MB memorie në pajisje (krahasuar me 150MB të app-eve native).</a:t>
+              <a:t>• Zë më pak se 2MB memorie në telefon (krahasuar me 150MB të app-eve native).</a:t>
             </a:r>
           </a:p>
         </p:txBody>
@@ -12758,7 +12790,7 @@
               </a:defRPr>
             </a:pPr>
             <a:r>
-              <a:t>📶 Funksionon Edhe Offline</a:t>
+              <a:t>📶 Funksionon Edhe me Rrjet të Dobët</a:t>
             </a:r>
           </a:p>
           <a:p>
@@ -12774,7 +12806,7 @@
               </a:defRPr>
             </a:pPr>
             <a:r>
-              <a:t>• Punishtja e drurit mund të mos ketë WiFi në çdo cep.</a:t>
+              <a:t>• Rruga mes qyteteve shpesh ka zona me mbulim të dobët interneti.</a:t>
             </a:r>
           </a:p>
           <a:p>
@@ -12790,7 +12822,7 @@
               </a:defRPr>
             </a:pPr>
             <a:r>
-              <a:t>• Service Worker ruan të dhënat dhe mundëson skanim të pandërprerë.</a:t>
+              <a:t>• Service Worker ruan të dhënat e fundit lokalisht në telefon.</a:t>
             </a:r>
           </a:p>
           <a:p>
@@ -12806,7 +12838,7 @@
               </a:defRPr>
             </a:pPr>
             <a:r>
-              <a:t>• Sinkronizim automatik në sfond sapo rikthehet lidhja në internet.</a:t>
+              <a:t>• Sinkronizohet automatikisht sapo rifitohet lidhja 4G/5G.</a:t>
             </a:r>
           </a:p>
         </p:txBody>
@@ -12890,7 +12922,7 @@
               </a:defRPr>
             </a:pPr>
             <a:r>
-              <a:t>📱 Qasje në Hardware të Telefonit</a:t>
+              <a:t>📱 Qasje në Karakteristikat Celulare</a:t>
             </a:r>
           </a:p>
           <a:p>
@@ -12906,7 +12938,7 @@
               </a:defRPr>
             </a:pPr>
             <a:r>
-              <a:t>• Kamera përdoret për skanimin e barkodeve të pjesëve të karrigeve.</a:t>
+              <a:t>• Njoftime Push sapo shoferi të konfirmojë rezervimin tuaj.</a:t>
             </a:r>
           </a:p>
           <a:p>
@@ -12922,7 +12954,7 @@
               </a:defRPr>
             </a:pPr>
             <a:r>
-              <a:t>• Njoftimet Push paralajmërojnë stafin kur mungojnë vidat apo këmbët.</a:t>
+              <a:t>• Gjeolokacion për të parë distancën deri te pika e takimit.</a:t>
             </a:r>
           </a:p>
           <a:p>
@@ -12938,7 +12970,7 @@
               </a:defRPr>
             </a:pPr>
             <a:r>
-              <a:t>• Gjeolokacioni ndihmon shoferin e furgonit për dorëzimin e porosive.</a:t>
+              <a:t>• Telefonatë ose mesazh direkt me 1-prekje nga ekrani.</a:t>
             </a:r>
           </a:p>
         </p:txBody>
@@ -13107,7 +13139,7 @@
               </a:defRPr>
             </a:pPr>
             <a:r>
-              <a:t>Pse teknologjia PWA është zgjedhja ideale për tregun e Kosovës dhe SME-të.</a:t>
+              <a:t>Pse teknologjia PWA është zgjedhja ideale për tregun e Kosovës dhe projektet studentore.</a:t>
             </a:r>
           </a:p>
         </p:txBody>
@@ -13255,7 +13287,7 @@
               </a:defRPr>
             </a:pPr>
             <a:r>
-              <a:t>Madhësia e Aplikacionit    | 100MB — 250MB (Pengesë për shkarkim nga klienti) | &lt; 2MB (Hapet me 1 klikim pa zënë memorien)</a:t>
+              <a:t>Madhësia e Aplikacionit    | 100MB — 250MB (Pengesë për shkarkim nga studenti) | &lt; 2MB (Hapet me 1 klikim pa zënë memorien)</a:t>
             </a:r>
           </a:p>
           <a:p>
@@ -13287,7 +13319,7 @@
               </a:defRPr>
             </a:pPr>
             <a:r>
-              <a:t>E Përshtatshme për Biznese | E papërballueshme për shumicën e bizneseve tona  | Zgjidhja ideale me kosto zero dhe efikasitet maksimal</a:t>
+              <a:t>E Përshtatshme për Ne      | E papërballueshme për shumicën e ideve fillestare | Zgjidhja ideale me kosto zero dhe efikasitet maksimal</a:t>
             </a:r>
           </a:p>
         </p:txBody>

--- a/Jave1_Hyrje_Nextjs_PWA_Copilot_2026.pptx
+++ b/Jave1_Hyrje_Nextjs_PWA_Copilot_2026.pptx
@@ -25,6 +25,7 @@
     <p:sldId id="273" r:id="rId24"/>
     <p:sldId id="274" r:id="rId25"/>
     <p:sldId id="275" r:id="rId26"/>
+    <p:sldId id="276" r:id="rId27"/>
   </p:sldIdLst>
   <p:sldSz cx="12191695" cy="6858000" type="screen4x3"/>
   <p:notesSz cx="6858000" cy="9144000"/>
@@ -7223,7 +7224,7 @@
               </a:defRPr>
             </a:pPr>
             <a:r>
-              <a:t>AKSIONI NË SALLË</a:t>
+              <a:t>LABORATORI PRAKTIK 1 (USHTRIMET)</a:t>
             </a:r>
           </a:p>
         </p:txBody>
@@ -7259,7 +7260,7 @@
               </a:defRPr>
             </a:pPr>
             <a:r>
-              <a:t>Sprinti Praktik: Nxirrni Telefonat Celularë!</a:t>
+              <a:t>Ora 1 e Ushtrimeve: Toolchain-i i Themeluesit (How to Start a Startup 🚀)</a:t>
             </a:r>
           </a:p>
         </p:txBody>
@@ -7295,7 +7296,7 @@
               </a:defRPr>
             </a:pPr>
             <a:r>
-              <a:t>10 minuta punë aktive në auditor për konfigurimin e mjedisit tuaj të punës.</a:t>
+              <a:t>Pajisja e çdo studenti me veglat moderne: Git, VS Code, GitHub Copilot, Supabase &amp; Vercel.</a:t>
             </a:r>
           </a:p>
         </p:txBody>
@@ -7379,7 +7380,7 @@
               </a:defRPr>
             </a:pPr>
             <a:r>
-              <a:t>1️⃣ Hapi 1 (Min 0–3)</a:t>
+              <a:t>1️⃣ Veglat Lokale</a:t>
             </a:r>
           </a:p>
           <a:p>
@@ -7395,7 +7396,7 @@
               </a:defRPr>
             </a:pPr>
             <a:r>
-              <a:t>Skanoni dhe Hyni</a:t>
+              <a:t>VS Code &amp; Git i Konfiguruar</a:t>
             </a:r>
           </a:p>
           <a:p>
@@ -7403,15 +7404,15 @@
               <a:spcAft>
                 <a:spcPts val="1000"/>
               </a:spcAft>
-              <a:defRPr sz="1800">
-                <a:solidFill>
-                  <a:srgbClr val="E2E8F0"/>
-                </a:solidFill>
-                <a:latin typeface="Inter"/>
-              </a:defRPr>
-            </a:pPr>
-            <a:r>
-              <a:t>• Hapni kamerën e telefonit</a:t>
+              <a:defRPr sz="1700">
+                <a:solidFill>
+                  <a:srgbClr val="E2E8F0"/>
+                </a:solidFill>
+                <a:latin typeface="Inter"/>
+              </a:defRPr>
+            </a:pPr>
+            <a:r>
+              <a:t>• Instalimi dhe konfigurimi i VS Code me shtojcat thelbësore.</a:t>
             </a:r>
           </a:p>
           <a:p>
@@ -7419,15 +7420,15 @@
               <a:spcAft>
                 <a:spcPts val="1000"/>
               </a:spcAft>
-              <a:defRPr sz="1800">
-                <a:solidFill>
-                  <a:srgbClr val="E2E8F0"/>
-                </a:solidFill>
-                <a:latin typeface="Inter"/>
-              </a:defRPr>
-            </a:pPr>
-            <a:r>
-              <a:t>• Skanoni kodin QR në ekran</a:t>
+              <a:defRPr sz="1700">
+                <a:solidFill>
+                  <a:srgbClr val="E2E8F0"/>
+                </a:solidFill>
+                <a:latin typeface="Inter"/>
+              </a:defRPr>
+            </a:pPr>
+            <a:r>
+              <a:t>• Lidhja e llogarisë zyrtare të GitHub dhe vendosja e çelësave SSH.</a:t>
             </a:r>
           </a:p>
           <a:p>
@@ -7435,15 +7436,15 @@
               <a:spcAft>
                 <a:spcPts val="1000"/>
               </a:spcAft>
-              <a:defRPr sz="1800">
-                <a:solidFill>
-                  <a:srgbClr val="E2E8F0"/>
-                </a:solidFill>
-                <a:latin typeface="Inter"/>
-              </a:defRPr>
-            </a:pPr>
-            <a:r>
-              <a:t>• Regjistroni praninë me PIN-in e ditës</a:t>
+              <a:defRPr sz="1700">
+                <a:solidFill>
+                  <a:srgbClr val="E2E8F0"/>
+                </a:solidFill>
+                <a:latin typeface="Inter"/>
+              </a:defRPr>
+            </a:pPr>
+            <a:r>
+              <a:t>• Klonimi i repos fillestare nga GitHub Classroom.</a:t>
             </a:r>
           </a:p>
           <a:p>
@@ -7451,15 +7452,15 @@
               <a:spcAft>
                 <a:spcPts val="1000"/>
               </a:spcAft>
-              <a:defRPr sz="1800">
-                <a:solidFill>
-                  <a:srgbClr val="E2E8F0"/>
-                </a:solidFill>
-                <a:latin typeface="Inter"/>
-              </a:defRPr>
-            </a:pPr>
-            <a:r>
-              <a:t>• Ruani faqen në 'Home Screen'</a:t>
+              <a:defRPr sz="1700">
+                <a:solidFill>
+                  <a:srgbClr val="E2E8F0"/>
+                </a:solidFill>
+                <a:latin typeface="Inter"/>
+              </a:defRPr>
+            </a:pPr>
+            <a:r>
+              <a:t>• Verifikimi që terminali dhe Git funksionojnë 100% lokalisht.</a:t>
             </a:r>
           </a:p>
         </p:txBody>
@@ -7543,7 +7544,7 @@
               </a:defRPr>
             </a:pPr>
             <a:r>
-              <a:t>2️⃣ Hapi 2 (Min 3–7)</a:t>
+              <a:t>2️⃣ AI &amp; Cloud Falas</a:t>
             </a:r>
           </a:p>
           <a:p>
@@ -7559,7 +7560,7 @@
               </a:defRPr>
             </a:pPr>
             <a:r>
-              <a:t>Aktivizoni GitHub Pack</a:t>
+              <a:t>Copilot Pro, Supabase &amp; Vercel</a:t>
             </a:r>
           </a:p>
           <a:p>
@@ -7567,15 +7568,15 @@
               <a:spcAft>
                 <a:spcPts val="1000"/>
               </a:spcAft>
-              <a:defRPr sz="1800">
-                <a:solidFill>
-                  <a:srgbClr val="E2E8F0"/>
-                </a:solidFill>
-                <a:latin typeface="Inter"/>
-              </a:defRPr>
-            </a:pPr>
-            <a:r>
-              <a:t>• Kyçuni me emailin studentor AAB</a:t>
+              <a:defRPr sz="1700">
+                <a:solidFill>
+                  <a:srgbClr val="E2E8F0"/>
+                </a:solidFill>
+                <a:latin typeface="Inter"/>
+              </a:defRPr>
+            </a:pPr>
+            <a:r>
+              <a:t>• Aktivizimi i GitHub Student Developer Pack me email AAB.</a:t>
             </a:r>
           </a:p>
           <a:p>
@@ -7583,15 +7584,15 @@
               <a:spcAft>
                 <a:spcPts val="1000"/>
               </a:spcAft>
-              <a:defRPr sz="1800">
-                <a:solidFill>
-                  <a:srgbClr val="E2E8F0"/>
-                </a:solidFill>
-                <a:latin typeface="Inter"/>
-              </a:defRPr>
-            </a:pPr>
-            <a:r>
-              <a:t>• Përfitoni GitHub Copilot Pro falas</a:t>
+              <a:defRPr sz="1700">
+                <a:solidFill>
+                  <a:srgbClr val="E2E8F0"/>
+                </a:solidFill>
+                <a:latin typeface="Inter"/>
+              </a:defRPr>
+            </a:pPr>
+            <a:r>
+              <a:t>• GitHub Copilot Pro aktiv falas (kursen 120$/vit për studentët).</a:t>
             </a:r>
           </a:p>
           <a:p>
@@ -7599,15 +7600,15 @@
               <a:spcAft>
                 <a:spcPts val="1000"/>
               </a:spcAft>
-              <a:defRPr sz="1800">
-                <a:solidFill>
-                  <a:srgbClr val="E2E8F0"/>
-                </a:solidFill>
-                <a:latin typeface="Inter"/>
-              </a:defRPr>
-            </a:pPr>
-            <a:r>
-              <a:t>• Verifikoni statusin në llogarinë tuaj</a:t>
+              <a:defRPr sz="1700">
+                <a:solidFill>
+                  <a:srgbClr val="E2E8F0"/>
+                </a:solidFill>
+                <a:latin typeface="Inter"/>
+              </a:defRPr>
+            </a:pPr>
+            <a:r>
+              <a:t>• Hapja e llogarisë në Supabase Cloud (PostgreSQL falas).</a:t>
             </a:r>
           </a:p>
           <a:p>
@@ -7615,15 +7616,15 @@
               <a:spcAft>
                 <a:spcPts val="1000"/>
               </a:spcAft>
-              <a:defRPr sz="1800">
-                <a:solidFill>
-                  <a:srgbClr val="E2E8F0"/>
-                </a:solidFill>
-                <a:latin typeface="Inter"/>
-              </a:defRPr>
-            </a:pPr>
-            <a:r>
-              <a:t>• Kjo ju kursen 120$/vit!</a:t>
+              <a:defRPr sz="1700">
+                <a:solidFill>
+                  <a:srgbClr val="E2E8F0"/>
+                </a:solidFill>
+                <a:latin typeface="Inter"/>
+              </a:defRPr>
+            </a:pPr>
+            <a:r>
+              <a:t>• Lidhja e Vercel me GitHub për deploy me 1-klik.</a:t>
             </a:r>
           </a:p>
         </p:txBody>
@@ -7707,7 +7708,7 @@
               </a:defRPr>
             </a:pPr>
             <a:r>
-              <a:t>3️⃣ Hapi 3 (Min 7–10)</a:t>
+              <a:t>3️⃣ Startup Mindset</a:t>
             </a:r>
           </a:p>
           <a:p>
@@ -7723,7 +7724,7 @@
               </a:defRPr>
             </a:pPr>
             <a:r>
-              <a:t>Hapni Supabase &amp; Vercel</a:t>
+              <a:t>Si Fillon një Startup Sot?</a:t>
             </a:r>
           </a:p>
           <a:p>
@@ -7731,15 +7732,15 @@
               <a:spcAft>
                 <a:spcPts val="1000"/>
               </a:spcAft>
-              <a:defRPr sz="1800">
-                <a:solidFill>
-                  <a:srgbClr val="E2E8F0"/>
-                </a:solidFill>
-                <a:latin typeface="Inter"/>
-              </a:defRPr>
-            </a:pPr>
-            <a:r>
-              <a:t>• Kyçje me 1-klik përmes GitHub</a:t>
+              <a:defRPr sz="1700">
+                <a:solidFill>
+                  <a:srgbClr val="E2E8F0"/>
+                </a:solidFill>
+                <a:latin typeface="Inter"/>
+              </a:defRPr>
+            </a:pPr>
+            <a:r>
+              <a:t>• Nuk blejmë servera fizikë: Përdorim infrastrukturë globale cloud.</a:t>
             </a:r>
           </a:p>
           <a:p>
@@ -7747,15 +7748,15 @@
               <a:spcAft>
                 <a:spcPts val="1000"/>
               </a:spcAft>
-              <a:defRPr sz="1800">
-                <a:solidFill>
-                  <a:srgbClr val="E2E8F0"/>
-                </a:solidFill>
-                <a:latin typeface="Inter"/>
-              </a:defRPr>
-            </a:pPr>
-            <a:r>
-              <a:t>• Krijoni projektin e parë në Supabase</a:t>
+              <a:defRPr sz="1700">
+                <a:solidFill>
+                  <a:srgbClr val="E2E8F0"/>
+                </a:solidFill>
+                <a:latin typeface="Inter"/>
+              </a:defRPr>
+            </a:pPr>
+            <a:r>
+              <a:t>• Kosto operative 0 EUR gjatë fazës së zhvillimit dhe testimit.</a:t>
             </a:r>
           </a:p>
           <a:p>
@@ -7763,15 +7764,15 @@
               <a:spcAft>
                 <a:spcPts val="1000"/>
               </a:spcAft>
-              <a:defRPr sz="1800">
-                <a:solidFill>
-                  <a:srgbClr val="E2E8F0"/>
-                </a:solidFill>
-                <a:latin typeface="Inter"/>
-              </a:defRPr>
-            </a:pPr>
-            <a:r>
-              <a:t>• Lidhni profilin në Vercel</a:t>
+              <a:defRPr sz="1700">
+                <a:solidFill>
+                  <a:srgbClr val="E2E8F0"/>
+                </a:solidFill>
+                <a:latin typeface="Inter"/>
+              </a:defRPr>
+            </a:pPr>
+            <a:r>
+              <a:t>• Ekzekutimi i 'git push' të parë që shkon live në Vercel.</a:t>
             </a:r>
           </a:p>
           <a:p>
@@ -7779,15 +7780,15 @@
               <a:spcAft>
                 <a:spcPts val="1000"/>
               </a:spcAft>
-              <a:defRPr sz="1800">
-                <a:solidFill>
-                  <a:srgbClr val="E2E8F0"/>
-                </a:solidFill>
-                <a:latin typeface="Inter"/>
-              </a:defRPr>
-            </a:pPr>
-            <a:r>
-              <a:t>• Mjedisi juaj cloud është gati!</a:t>
+              <a:defRPr sz="1700">
+                <a:solidFill>
+                  <a:srgbClr val="E2E8F0"/>
+                </a:solidFill>
+                <a:latin typeface="Inter"/>
+              </a:defRPr>
+            </a:pPr>
+            <a:r>
+              <a:t>• Çdo student largohet nga laboratori me mjedis të plotë gati!</a:t>
             </a:r>
           </a:p>
         </p:txBody>
@@ -8978,6 +8979,667 @@
 </file>
 
 <file path=ppt/slides/slide20.xml><?xml version="1.0" encoding="utf-8"?>
+<p:sld xmlns:a="http://schemas.openxmlformats.org/drawingml/2006/main" xmlns:p="http://schemas.openxmlformats.org/presentationml/2006/main" xmlns:r="http://schemas.openxmlformats.org/officeDocument/2006/relationships">
+  <p:cSld>
+    <p:spTree>
+      <p:nvGrpSpPr>
+        <p:cNvPr id="1" name=""/>
+        <p:cNvGrpSpPr/>
+        <p:nvPr/>
+      </p:nvGrpSpPr>
+      <p:grpSpPr/>
+      <p:sp>
+        <p:nvSpPr>
+          <p:cNvPr id="2" name="Rectangle 1"/>
+          <p:cNvSpPr/>
+          <p:nvPr/>
+        </p:nvSpPr>
+        <p:spPr>
+          <a:xfrm>
+            <a:off x="0" y="0"/>
+            <a:ext cx="12191695" cy="6858000"/>
+          </a:xfrm>
+          <a:prstGeom prst="rect">
+            <a:avLst/>
+          </a:prstGeom>
+          <a:solidFill>
+            <a:srgbClr val="0B1120"/>
+          </a:solidFill>
+          <a:ln>
+            <a:noFill/>
+          </a:ln>
+        </p:spPr>
+        <p:style>
+          <a:lnRef idx="1">
+            <a:schemeClr val="accent1"/>
+          </a:lnRef>
+          <a:fillRef idx="3">
+            <a:schemeClr val="accent1"/>
+          </a:fillRef>
+          <a:effectRef idx="2">
+            <a:schemeClr val="accent1"/>
+          </a:effectRef>
+          <a:fontRef idx="minor">
+            <a:schemeClr val="lt1"/>
+          </a:fontRef>
+        </p:style>
+        <p:txBody>
+          <a:bodyPr rtlCol="0" anchor="ctr"/>
+          <a:lstStyle/>
+          <a:p>
+            <a:pPr algn="ctr"/>
+          </a:p>
+        </p:txBody>
+      </p:sp>
+      <p:sp>
+        <p:nvSpPr>
+          <p:cNvPr id="3" name="TextBox 2"/>
+          <p:cNvSpPr txBox="1"/>
+          <p:nvPr/>
+        </p:nvSpPr>
+        <p:spPr>
+          <a:xfrm>
+            <a:off x="731520" y="365760"/>
+            <a:ext cx="10698480" cy="320040"/>
+          </a:xfrm>
+          <a:prstGeom prst="rect">
+            <a:avLst/>
+          </a:prstGeom>
+          <a:noFill/>
+        </p:spPr>
+        <p:txBody>
+          <a:bodyPr wrap="square">
+            <a:spAutoFit/>
+          </a:bodyPr>
+          <a:lstStyle/>
+          <a:p>
+            <a:pPr>
+              <a:defRPr sz="1500" b="1">
+                <a:solidFill>
+                  <a:srgbClr val="38BDF8"/>
+                </a:solidFill>
+                <a:latin typeface="Inter"/>
+              </a:defRPr>
+            </a:pPr>
+            <a:r>
+              <a:t>PLANI PËR LIGJËRATËN 2</a:t>
+            </a:r>
+          </a:p>
+        </p:txBody>
+      </p:sp>
+      <p:sp>
+        <p:nvSpPr>
+          <p:cNvPr id="4" name="TextBox 3"/>
+          <p:cNvSpPr txBox="1"/>
+          <p:nvPr/>
+        </p:nvSpPr>
+        <p:spPr>
+          <a:xfrm>
+            <a:off x="731520" y="685800"/>
+            <a:ext cx="10698480" cy="777240"/>
+          </a:xfrm>
+          <a:prstGeom prst="rect">
+            <a:avLst/>
+          </a:prstGeom>
+          <a:noFill/>
+        </p:spPr>
+        <p:txBody>
+          <a:bodyPr wrap="square">
+            <a:spAutoFit/>
+          </a:bodyPr>
+          <a:lstStyle/>
+          <a:p>
+            <a:pPr>
+              <a:defRPr sz="3600" b="1">
+                <a:solidFill>
+                  <a:srgbClr val="FFFFFF"/>
+                </a:solidFill>
+                <a:latin typeface="Inter"/>
+              </a:defRPr>
+            </a:pPr>
+            <a:r>
+              <a:t>Ligjërata 2: Si të Ndërtojmë Idenë, Specifikat &amp; Arkitekturën?</a:t>
+            </a:r>
+          </a:p>
+        </p:txBody>
+      </p:sp>
+      <p:sp>
+        <p:nvSpPr>
+          <p:cNvPr id="5" name="TextBox 4"/>
+          <p:cNvSpPr txBox="1"/>
+          <p:nvPr/>
+        </p:nvSpPr>
+        <p:spPr>
+          <a:xfrm>
+            <a:off x="731520" y="1444752"/>
+            <a:ext cx="10698480" cy="502920"/>
+          </a:xfrm>
+          <a:prstGeom prst="rect">
+            <a:avLst/>
+          </a:prstGeom>
+          <a:noFill/>
+        </p:spPr>
+        <p:txBody>
+          <a:bodyPr wrap="square">
+            <a:spAutoFit/>
+          </a:bodyPr>
+          <a:lstStyle/>
+          <a:p>
+            <a:pPr>
+              <a:defRPr sz="2100">
+                <a:solidFill>
+                  <a:srgbClr val="E2E8F0"/>
+                </a:solidFill>
+                <a:latin typeface="Inter"/>
+              </a:defRPr>
+            </a:pPr>
+            <a:r>
+              <a:t>Jo menjëherë në zhvillim! Secili zgjedh një problem real dhe ndërton arkitekturën para kodit.</a:t>
+            </a:r>
+          </a:p>
+        </p:txBody>
+      </p:sp>
+      <p:sp>
+        <p:nvSpPr>
+          <p:cNvPr id="6" name="Rounded Rectangle 5"/>
+          <p:cNvSpPr/>
+          <p:nvPr/>
+        </p:nvSpPr>
+        <p:spPr>
+          <a:xfrm>
+            <a:off x="731520" y="2011680"/>
+            <a:ext cx="3383280" cy="4389120"/>
+          </a:xfrm>
+          <a:prstGeom prst="roundRect">
+            <a:avLst/>
+          </a:prstGeom>
+          <a:solidFill>
+            <a:srgbClr val="141E34"/>
+          </a:solidFill>
+          <a:ln w="31750">
+            <a:solidFill>
+              <a:srgbClr val="38BDF8"/>
+            </a:solidFill>
+          </a:ln>
+        </p:spPr>
+        <p:style>
+          <a:lnRef idx="1">
+            <a:schemeClr val="accent1"/>
+          </a:lnRef>
+          <a:fillRef idx="3">
+            <a:schemeClr val="accent1"/>
+          </a:fillRef>
+          <a:effectRef idx="2">
+            <a:schemeClr val="accent1"/>
+          </a:effectRef>
+          <a:fontRef idx="minor">
+            <a:schemeClr val="lt1"/>
+          </a:fontRef>
+        </p:style>
+        <p:txBody>
+          <a:bodyPr rtlCol="0" anchor="ctr"/>
+          <a:lstStyle/>
+          <a:p>
+            <a:pPr algn="ctr"/>
+          </a:p>
+        </p:txBody>
+      </p:sp>
+      <p:sp>
+        <p:nvSpPr>
+          <p:cNvPr id="7" name="TextBox 6"/>
+          <p:cNvSpPr txBox="1"/>
+          <p:nvPr/>
+        </p:nvSpPr>
+        <p:spPr>
+          <a:xfrm>
+            <a:off x="914400" y="2194560"/>
+            <a:ext cx="3017520" cy="4023360"/>
+          </a:xfrm>
+          <a:prstGeom prst="rect">
+            <a:avLst/>
+          </a:prstGeom>
+          <a:noFill/>
+        </p:spPr>
+        <p:txBody>
+          <a:bodyPr wrap="square">
+            <a:spAutoFit/>
+          </a:bodyPr>
+          <a:lstStyle/>
+          <a:p>
+            <a:pPr>
+              <a:spcAft>
+                <a:spcPts val="600"/>
+              </a:spcAft>
+              <a:defRPr sz="1400" b="1">
+                <a:solidFill>
+                  <a:srgbClr val="38BDF8"/>
+                </a:solidFill>
+                <a:latin typeface="Inter"/>
+              </a:defRPr>
+            </a:pPr>
+            <a:r>
+              <a:t>💡 1. Përzgjedhja e Idesë</a:t>
+            </a:r>
+          </a:p>
+          <a:p>
+            <a:pPr>
+              <a:spcAft>
+                <a:spcPts val="1400"/>
+              </a:spcAft>
+              <a:defRPr sz="2200" b="1">
+                <a:solidFill>
+                  <a:srgbClr val="FFFFFF"/>
+                </a:solidFill>
+                <a:latin typeface="Inter"/>
+              </a:defRPr>
+            </a:pPr>
+            <a:r>
+              <a:t>Biznesi / Problemi Real</a:t>
+            </a:r>
+          </a:p>
+          <a:p>
+            <a:pPr>
+              <a:spcAft>
+                <a:spcPts val="1000"/>
+              </a:spcAft>
+              <a:defRPr sz="1700">
+                <a:solidFill>
+                  <a:srgbClr val="E2E8F0"/>
+                </a:solidFill>
+                <a:latin typeface="Inter"/>
+              </a:defRPr>
+            </a:pPr>
+            <a:r>
+              <a:t>• Çdo student ose grup përzgjedh një SME lokale ose nevojë reale.</a:t>
+            </a:r>
+          </a:p>
+          <a:p>
+            <a:pPr>
+              <a:spcAft>
+                <a:spcPts val="1000"/>
+              </a:spcAft>
+              <a:defRPr sz="1700">
+                <a:solidFill>
+                  <a:srgbClr val="E2E8F0"/>
+                </a:solidFill>
+                <a:latin typeface="Inter"/>
+              </a:defRPr>
+            </a:pPr>
+            <a:r>
+              <a:t>• Shembuj: RideShare, Furrë buke, Mobileri, Porosi studentore, Servis.</a:t>
+            </a:r>
+          </a:p>
+          <a:p>
+            <a:pPr>
+              <a:spcAft>
+                <a:spcPts val="1000"/>
+              </a:spcAft>
+              <a:defRPr sz="1700">
+                <a:solidFill>
+                  <a:srgbClr val="E2E8F0"/>
+                </a:solidFill>
+                <a:latin typeface="Inter"/>
+              </a:defRPr>
+            </a:pPr>
+            <a:r>
+              <a:t>• Formulimi i saktë i 'Dhimbjes' (Pain) dhe 'Përfitimit' (Value).</a:t>
+            </a:r>
+          </a:p>
+          <a:p>
+            <a:pPr>
+              <a:spcAft>
+                <a:spcPts val="1000"/>
+              </a:spcAft>
+              <a:defRPr sz="1700">
+                <a:solidFill>
+                  <a:srgbClr val="E2E8F0"/>
+                </a:solidFill>
+                <a:latin typeface="Inter"/>
+              </a:defRPr>
+            </a:pPr>
+            <a:r>
+              <a:t>• Pse zgjidhja me celular sjell efiçiencë dhe fitim të matshëm.</a:t>
+            </a:r>
+          </a:p>
+        </p:txBody>
+      </p:sp>
+      <p:sp>
+        <p:nvSpPr>
+          <p:cNvPr id="8" name="Rounded Rectangle 7"/>
+          <p:cNvSpPr/>
+          <p:nvPr/>
+        </p:nvSpPr>
+        <p:spPr>
+          <a:xfrm>
+            <a:off x="4389120" y="2011680"/>
+            <a:ext cx="3383280" cy="4389120"/>
+          </a:xfrm>
+          <a:prstGeom prst="roundRect">
+            <a:avLst/>
+          </a:prstGeom>
+          <a:solidFill>
+            <a:srgbClr val="141E34"/>
+          </a:solidFill>
+          <a:ln w="31750">
+            <a:solidFill>
+              <a:srgbClr val="10B981"/>
+            </a:solidFill>
+          </a:ln>
+        </p:spPr>
+        <p:style>
+          <a:lnRef idx="1">
+            <a:schemeClr val="accent1"/>
+          </a:lnRef>
+          <a:fillRef idx="3">
+            <a:schemeClr val="accent1"/>
+          </a:fillRef>
+          <a:effectRef idx="2">
+            <a:schemeClr val="accent1"/>
+          </a:effectRef>
+          <a:fontRef idx="minor">
+            <a:schemeClr val="lt1"/>
+          </a:fontRef>
+        </p:style>
+        <p:txBody>
+          <a:bodyPr rtlCol="0" anchor="ctr"/>
+          <a:lstStyle/>
+          <a:p>
+            <a:pPr algn="ctr"/>
+          </a:p>
+        </p:txBody>
+      </p:sp>
+      <p:sp>
+        <p:nvSpPr>
+          <p:cNvPr id="9" name="TextBox 8"/>
+          <p:cNvSpPr txBox="1"/>
+          <p:nvPr/>
+        </p:nvSpPr>
+        <p:spPr>
+          <a:xfrm>
+            <a:off x="4572000" y="2194560"/>
+            <a:ext cx="3017520" cy="4023360"/>
+          </a:xfrm>
+          <a:prstGeom prst="rect">
+            <a:avLst/>
+          </a:prstGeom>
+          <a:noFill/>
+        </p:spPr>
+        <p:txBody>
+          <a:bodyPr wrap="square">
+            <a:spAutoFit/>
+          </a:bodyPr>
+          <a:lstStyle/>
+          <a:p>
+            <a:pPr>
+              <a:spcAft>
+                <a:spcPts val="600"/>
+              </a:spcAft>
+              <a:defRPr sz="1400" b="1">
+                <a:solidFill>
+                  <a:srgbClr val="10B981"/>
+                </a:solidFill>
+                <a:latin typeface="Inter"/>
+              </a:defRPr>
+            </a:pPr>
+            <a:r>
+              <a:t>📋 2. Hartimi i Specifikave</a:t>
+            </a:r>
+          </a:p>
+          <a:p>
+            <a:pPr>
+              <a:spcAft>
+                <a:spcPts val="1400"/>
+              </a:spcAft>
+              <a:defRPr sz="2200" b="1">
+                <a:solidFill>
+                  <a:srgbClr val="FFFFFF"/>
+                </a:solidFill>
+                <a:latin typeface="Inter"/>
+              </a:defRPr>
+            </a:pPr>
+            <a:r>
+              <a:t>Kërkesat &amp; Kufijtë (PRD)</a:t>
+            </a:r>
+          </a:p>
+          <a:p>
+            <a:pPr>
+              <a:spcAft>
+                <a:spcPts val="1000"/>
+              </a:spcAft>
+              <a:defRPr sz="1700">
+                <a:solidFill>
+                  <a:srgbClr val="E2E8F0"/>
+                </a:solidFill>
+                <a:latin typeface="Inter"/>
+              </a:defRPr>
+            </a:pPr>
+            <a:r>
+              <a:t>• Përcaktimi i saktë i aktorëve (kush e përdor dhe pse).</a:t>
+            </a:r>
+          </a:p>
+          <a:p>
+            <a:pPr>
+              <a:spcAft>
+                <a:spcPts val="1000"/>
+              </a:spcAft>
+              <a:defRPr sz="1700">
+                <a:solidFill>
+                  <a:srgbClr val="E2E8F0"/>
+                </a:solidFill>
+                <a:latin typeface="Inter"/>
+              </a:defRPr>
+            </a:pPr>
+            <a:r>
+              <a:t>• Features Must-Have (funksionalitetet thelbësore të MVP-së).</a:t>
+            </a:r>
+          </a:p>
+          <a:p>
+            <a:pPr>
+              <a:spcAft>
+                <a:spcPts val="1000"/>
+              </a:spcAft>
+              <a:defRPr sz="1700">
+                <a:solidFill>
+                  <a:srgbClr val="E2E8F0"/>
+                </a:solidFill>
+                <a:latin typeface="Inter"/>
+              </a:defRPr>
+            </a:pPr>
+            <a:r>
+              <a:t>• Përjashtimet Out-of-Scope (çfarë NUK bëjmë për të shmangur dështimin).</a:t>
+            </a:r>
+          </a:p>
+          <a:p>
+            <a:pPr>
+              <a:spcAft>
+                <a:spcPts val="1000"/>
+              </a:spcAft>
+              <a:defRPr sz="1700">
+                <a:solidFill>
+                  <a:srgbClr val="E2E8F0"/>
+                </a:solidFill>
+                <a:latin typeface="Inter"/>
+              </a:defRPr>
+            </a:pPr>
+            <a:r>
+              <a:t>• Rregulli: 80% e projekteve dështojnë nga fryrja e kërkesave!</a:t>
+            </a:r>
+          </a:p>
+        </p:txBody>
+      </p:sp>
+      <p:sp>
+        <p:nvSpPr>
+          <p:cNvPr id="10" name="Rounded Rectangle 9"/>
+          <p:cNvSpPr/>
+          <p:nvPr/>
+        </p:nvSpPr>
+        <p:spPr>
+          <a:xfrm>
+            <a:off x="8046720" y="2011680"/>
+            <a:ext cx="3383280" cy="4389120"/>
+          </a:xfrm>
+          <a:prstGeom prst="roundRect">
+            <a:avLst/>
+          </a:prstGeom>
+          <a:solidFill>
+            <a:srgbClr val="141E34"/>
+          </a:solidFill>
+          <a:ln w="31750">
+            <a:solidFill>
+              <a:srgbClr val="F59E0B"/>
+            </a:solidFill>
+          </a:ln>
+        </p:spPr>
+        <p:style>
+          <a:lnRef idx="1">
+            <a:schemeClr val="accent1"/>
+          </a:lnRef>
+          <a:fillRef idx="3">
+            <a:schemeClr val="accent1"/>
+          </a:fillRef>
+          <a:effectRef idx="2">
+            <a:schemeClr val="accent1"/>
+          </a:effectRef>
+          <a:fontRef idx="minor">
+            <a:schemeClr val="lt1"/>
+          </a:fontRef>
+        </p:style>
+        <p:txBody>
+          <a:bodyPr rtlCol="0" anchor="ctr"/>
+          <a:lstStyle/>
+          <a:p>
+            <a:pPr algn="ctr"/>
+          </a:p>
+        </p:txBody>
+      </p:sp>
+      <p:sp>
+        <p:nvSpPr>
+          <p:cNvPr id="11" name="TextBox 10"/>
+          <p:cNvSpPr txBox="1"/>
+          <p:nvPr/>
+        </p:nvSpPr>
+        <p:spPr>
+          <a:xfrm>
+            <a:off x="8229600" y="2194560"/>
+            <a:ext cx="3017520" cy="4023360"/>
+          </a:xfrm>
+          <a:prstGeom prst="rect">
+            <a:avLst/>
+          </a:prstGeom>
+          <a:noFill/>
+        </p:spPr>
+        <p:txBody>
+          <a:bodyPr wrap="square">
+            <a:spAutoFit/>
+          </a:bodyPr>
+          <a:lstStyle/>
+          <a:p>
+            <a:pPr>
+              <a:spcAft>
+                <a:spcPts val="600"/>
+              </a:spcAft>
+              <a:defRPr sz="1400" b="1">
+                <a:solidFill>
+                  <a:srgbClr val="F59E0B"/>
+                </a:solidFill>
+                <a:latin typeface="Inter"/>
+              </a:defRPr>
+            </a:pPr>
+            <a:r>
+              <a:t>📐 3. Arkitektura &amp; Skica</a:t>
+            </a:r>
+          </a:p>
+          <a:p>
+            <a:pPr>
+              <a:spcAft>
+                <a:spcPts val="1400"/>
+              </a:spcAft>
+              <a:defRPr sz="2200" b="1">
+                <a:solidFill>
+                  <a:srgbClr val="FFFFFF"/>
+                </a:solidFill>
+                <a:latin typeface="Inter"/>
+              </a:defRPr>
+            </a:pPr>
+            <a:r>
+              <a:t>Kutitë &amp; Komponentët</a:t>
+            </a:r>
+          </a:p>
+          <a:p>
+            <a:pPr>
+              <a:spcAft>
+                <a:spcPts val="1000"/>
+              </a:spcAft>
+              <a:defRPr sz="1700">
+                <a:solidFill>
+                  <a:srgbClr val="E2E8F0"/>
+                </a:solidFill>
+                <a:latin typeface="Inter"/>
+              </a:defRPr>
+            </a:pPr>
+            <a:r>
+              <a:t>• Skicimi i kutive dhe shigjetave: Klienti PWA, Supabase DB, Auth.</a:t>
+            </a:r>
+          </a:p>
+          <a:p>
+            <a:pPr>
+              <a:spcAft>
+                <a:spcPts val="1000"/>
+              </a:spcAft>
+              <a:defRPr sz="1700">
+                <a:solidFill>
+                  <a:srgbClr val="E2E8F0"/>
+                </a:solidFill>
+                <a:latin typeface="Inter"/>
+              </a:defRPr>
+            </a:pPr>
+            <a:r>
+              <a:t>• Modelimi i tabelave kryesore (p.sh. tabelat 'rides', 'orders').</a:t>
+            </a:r>
+          </a:p>
+          <a:p>
+            <a:pPr>
+              <a:spcAft>
+                <a:spcPts val="1000"/>
+              </a:spcAft>
+              <a:defRPr sz="1700">
+                <a:solidFill>
+                  <a:srgbClr val="E2E8F0"/>
+                </a:solidFill>
+                <a:latin typeface="Inter"/>
+              </a:defRPr>
+            </a:pPr>
+            <a:r>
+              <a:t>• Vizatimi i ekraneve me dorë në letër (Wireframing).</a:t>
+            </a:r>
+          </a:p>
+          <a:p>
+            <a:pPr>
+              <a:spcAft>
+                <a:spcPts val="1000"/>
+              </a:spcAft>
+              <a:defRPr sz="1700">
+                <a:solidFill>
+                  <a:srgbClr val="E2E8F0"/>
+                </a:solidFill>
+                <a:latin typeface="Inter"/>
+              </a:defRPr>
+            </a:pPr>
+            <a:r>
+              <a:t>• Parimi i Hekurt: Asnjë rresht kod pa arkitekturë të miratuar!</a:t>
+            </a:r>
+          </a:p>
+        </p:txBody>
+      </p:sp>
+    </p:spTree>
+  </p:cSld>
+  <p:clrMapOvr>
+    <a:masterClrMapping/>
+  </p:clrMapOvr>
+</p:sld>
+</file>
+
+<file path=ppt/slides/slide21.xml><?xml version="1.0" encoding="utf-8"?>
 <p:sld xmlns:a="http://schemas.openxmlformats.org/drawingml/2006/main" xmlns:p="http://schemas.openxmlformats.org/presentationml/2006/main" xmlns:r="http://schemas.openxmlformats.org/officeDocument/2006/relationships">
   <p:cSld>
     <p:spTree>

--- a/Jave1_Hyrje_Nextjs_PWA_Copilot_2026.pptx
+++ b/Jave1_Hyrje_Nextjs_PWA_Copilot_2026.pptx
@@ -10421,8 +10421,8 @@
         </p:nvSpPr>
         <p:spPr>
           <a:xfrm>
-            <a:off x="731520" y="2011680"/>
-            <a:ext cx="5852160" cy="4389120"/>
+            <a:off x="731520" y="1965960"/>
+            <a:ext cx="5303520" cy="4480560"/>
           </a:xfrm>
           <a:prstGeom prst="roundRect">
             <a:avLst/>
@@ -10460,7 +10460,7 @@
       </p:sp>
       <p:pic>
         <p:nvPicPr>
-          <p:cNvPr id="7" name="Picture 6" descr="aab_rideshare_grand_architecture_sketch.png"/>
+          <p:cNvPr id="7" name="Picture 6" descr="slide3_sketch_ideja_problemi.png"/>
           <p:cNvPicPr>
             <a:picLocks noChangeAspect="1"/>
           </p:cNvPicPr>
@@ -10474,8 +10474,8 @@
         </p:blipFill>
         <p:spPr>
           <a:xfrm>
-            <a:off x="777240" y="2057400"/>
-            <a:ext cx="5760720" cy="4297680"/>
+            <a:off x="777240" y="2011680"/>
+            <a:ext cx="5212080" cy="4389120"/>
           </a:xfrm>
           <a:prstGeom prst="rect">
             <a:avLst/>
@@ -10490,8 +10490,8 @@
         </p:nvSpPr>
         <p:spPr>
           <a:xfrm>
-            <a:off x="6858000" y="2011680"/>
-            <a:ext cx="4572000" cy="4389120"/>
+            <a:off x="6217920" y="1965960"/>
+            <a:ext cx="5303520" cy="4480560"/>
           </a:xfrm>
           <a:prstGeom prst="roundRect">
             <a:avLst/>
@@ -10535,8 +10535,8 @@
         </p:nvSpPr>
         <p:spPr>
           <a:xfrm>
-            <a:off x="7040880" y="2194560"/>
-            <a:ext cx="4206240" cy="4023360"/>
+            <a:off x="6400800" y="2148840"/>
+            <a:ext cx="4937760" cy="4114800"/>
           </a:xfrm>
           <a:prstGeom prst="rect">
             <a:avLst/>
@@ -10609,7 +10609,7 @@
               </a:defRPr>
             </a:pPr>
             <a:r>
-              <a:t>• Skica e Parë: Një student merr një fletë të bardhë dhe vizaton skicën me laps: '1 Makinë me 3 vende të lira + 3 shokë që ndajnë rrugën.'</a:t>
+              <a:t>• Skica e Parë në Letër: Një student merr një fletë dhe vizaton skicën me laps: '1 Makinë me 3 vende të lira + 3 shokë që ndajnë rrugën.'</a:t>
             </a:r>
           </a:p>
           <a:p>
@@ -10625,7 +10625,7 @@
               </a:defRPr>
             </a:pPr>
             <a:r>
-              <a:t>• Përfundimi Inxhinierik: Nuk nisim me kod të gatshëm. Nisim me të kuptuarit e thellë të problemit!</a:t>
+              <a:t>• Përfundimi Inxhinierik: Nuk nisim me kod të gatshëm! Nisim me të kuptuarit e thellë të problemit dhe zgjidhjen që krijon vlerë.</a:t>
             </a:r>
           </a:p>
         </p:txBody>
@@ -10807,18 +10807,18 @@
         </p:nvSpPr>
         <p:spPr>
           <a:xfrm>
-            <a:off x="731520" y="2011680"/>
-            <a:ext cx="3383280" cy="4389120"/>
+            <a:off x="731520" y="1965960"/>
+            <a:ext cx="5303520" cy="4480560"/>
           </a:xfrm>
           <a:prstGeom prst="roundRect">
             <a:avLst/>
           </a:prstGeom>
           <a:solidFill>
-            <a:srgbClr val="141E34"/>
+            <a:srgbClr val="FFFFFF"/>
           </a:solidFill>
           <a:ln w="31750">
             <a:solidFill>
-              <a:srgbClr val="6366F1"/>
+              <a:srgbClr val="38BDF8"/>
             </a:solidFill>
           </a:ln>
         </p:spPr>
@@ -10844,109 +10844,30 @@
           </a:p>
         </p:txBody>
       </p:sp>
-      <p:sp>
-        <p:nvSpPr>
-          <p:cNvPr id="7" name="TextBox 6"/>
-          <p:cNvSpPr txBox="1"/>
-          <p:nvPr/>
-        </p:nvSpPr>
-        <p:spPr>
-          <a:xfrm>
-            <a:off x="914400" y="2194560"/>
-            <a:ext cx="3017520" cy="4023360"/>
-          </a:xfrm>
-          <a:prstGeom prst="rect">
-            <a:avLst/>
-          </a:prstGeom>
-          <a:noFill/>
-        </p:spPr>
-        <p:txBody>
-          <a:bodyPr wrap="square">
-            <a:spAutoFit/>
-          </a:bodyPr>
-          <a:lstStyle/>
-          <a:p>
-            <a:pPr>
-              <a:spcAft>
-                <a:spcPts val="1400"/>
-              </a:spcAft>
-              <a:defRPr sz="2100" b="1">
-                <a:solidFill>
-                  <a:srgbClr val="FFFFFF"/>
-                </a:solidFill>
-                <a:latin typeface="Inter"/>
-              </a:defRPr>
-            </a:pPr>
-            <a:r>
-              <a:t>👥 1. Përdoruesit (Aktorët)</a:t>
-            </a:r>
-          </a:p>
-          <a:p>
-            <a:pPr>
-              <a:spcAft>
-                <a:spcPts val="1000"/>
-              </a:spcAft>
-              <a:defRPr sz="1700">
-                <a:solidFill>
-                  <a:srgbClr val="E2E8F0"/>
-                </a:solidFill>
-                <a:latin typeface="Inter"/>
-              </a:defRPr>
-            </a:pPr>
-            <a:r>
-              <a:t>• Shoferi (Studenti):</a:t>
-            </a:r>
-          </a:p>
-          <a:p>
-            <a:pPr>
-              <a:spcAft>
-                <a:spcPts val="1000"/>
-              </a:spcAft>
-              <a:defRPr sz="1700">
-                <a:solidFill>
-                  <a:srgbClr val="E2E8F0"/>
-                </a:solidFill>
-                <a:latin typeface="Inter"/>
-              </a:defRPr>
-            </a:pPr>
-            <a:r>
-              <a:t>• Ka veturë, udhëton përditë, kërkon të ndajë koston e karburantit.</a:t>
-            </a:r>
-          </a:p>
-          <a:p>
-            <a:pPr>
-              <a:spcAft>
-                <a:spcPts val="1000"/>
-              </a:spcAft>
-              <a:defRPr sz="1700">
-                <a:solidFill>
-                  <a:srgbClr val="E2E8F0"/>
-                </a:solidFill>
-                <a:latin typeface="Inter"/>
-              </a:defRPr>
-            </a:pPr>
-            <a:r>
-              <a:t>• Udhëtari (Kolegu):</a:t>
-            </a:r>
-          </a:p>
-          <a:p>
-            <a:pPr>
-              <a:spcAft>
-                <a:spcPts val="1000"/>
-              </a:spcAft>
-              <a:defRPr sz="1700">
-                <a:solidFill>
-                  <a:srgbClr val="E2E8F0"/>
-                </a:solidFill>
-                <a:latin typeface="Inter"/>
-              </a:defRPr>
-            </a:pPr>
-            <a:r>
-              <a:t>• Nuk ka veturë, kërkon udhëtim më të shpejtë e të rehatshëm se autobusi.</a:t>
-            </a:r>
-          </a:p>
-        </p:txBody>
-      </p:sp>
+      <p:pic>
+        <p:nvPicPr>
+          <p:cNvPr id="7" name="Picture 6" descr="slide4_sketch_specifikat_prd.png"/>
+          <p:cNvPicPr>
+            <a:picLocks noChangeAspect="1"/>
+          </p:cNvPicPr>
+          <p:nvPr/>
+        </p:nvPicPr>
+        <p:blipFill>
+          <a:blip r:embed="rId2"/>
+          <a:stretch>
+            <a:fillRect/>
+          </a:stretch>
+        </p:blipFill>
+        <p:spPr>
+          <a:xfrm>
+            <a:off x="777240" y="2011680"/>
+            <a:ext cx="5212080" cy="4389120"/>
+          </a:xfrm>
+          <a:prstGeom prst="rect">
+            <a:avLst/>
+          </a:prstGeom>
+        </p:spPr>
+      </p:pic>
       <p:sp>
         <p:nvSpPr>
           <p:cNvPr id="8" name="Rounded Rectangle 7"/>
@@ -10955,8 +10876,8 @@
         </p:nvSpPr>
         <p:spPr>
           <a:xfrm>
-            <a:off x="4389120" y="2011680"/>
-            <a:ext cx="3383280" cy="4389120"/>
+            <a:off x="6217920" y="1965960"/>
+            <a:ext cx="5303520" cy="4480560"/>
           </a:xfrm>
           <a:prstGeom prst="roundRect">
             <a:avLst/>
@@ -11000,8 +10921,8 @@
         </p:nvSpPr>
         <p:spPr>
           <a:xfrm>
-            <a:off x="4572000" y="2194560"/>
-            <a:ext cx="3017520" cy="4023360"/>
+            <a:off x="6400800" y="2148840"/>
+            <a:ext cx="4937760" cy="4114800"/>
           </a:xfrm>
           <a:prstGeom prst="rect">
             <a:avLst/>
@@ -11016,17 +10937,17 @@
           <a:p>
             <a:pPr>
               <a:spcAft>
-                <a:spcPts val="1400"/>
-              </a:spcAft>
-              <a:defRPr sz="2100" b="1">
-                <a:solidFill>
-                  <a:srgbClr val="FFFFFF"/>
-                </a:solidFill>
-                <a:latin typeface="Inter"/>
-              </a:defRPr>
-            </a:pPr>
-            <a:r>
-              <a:t>📋 2. Kërkesat Kyçe (Must-Have)</a:t>
+                <a:spcPts val="1200"/>
+              </a:spcAft>
+              <a:defRPr sz="2300" b="1">
+                <a:solidFill>
+                  <a:srgbClr val="10B981"/>
+                </a:solidFill>
+                <a:latin typeface="Inter"/>
+              </a:defRPr>
+            </a:pPr>
+            <a:r>
+              <a:t>📋 Disiplina e Kufijve të Projektit (Scope)</a:t>
             </a:r>
           </a:p>
           <a:p>
@@ -11042,7 +10963,7 @@
               </a:defRPr>
             </a:pPr>
             <a:r>
-              <a:t>• Specifika 1: Shoferi poston rrugën, orën dhe vendet e lira (p.sh. 3 vende).</a:t>
+              <a:t>• Aktorët e Qartë: Shoferi që poston udhëtimin dhe Udhëtari që rezervon vendin.</a:t>
             </a:r>
           </a:p>
           <a:p>
@@ -11058,7 +10979,7 @@
               </a:defRPr>
             </a:pPr>
             <a:r>
-              <a:t>• Specifika 2: Udhëtari kërkon sipas qytetit dhe rezervon me 1-klik.</a:t>
+              <a:t>• Kërkesat Must-Have (MVP): Postimi me 3 fusha, filtrimi sipas qytetit, rezervimi me 1-prekje, koordinimi në WhatsApp, dhe kyçja me @universitetiaab.com.</a:t>
             </a:r>
           </a:p>
           <a:p>
@@ -11074,91 +10995,7 @@
               </a:defRPr>
             </a:pPr>
             <a:r>
-              <a:t>• Specifika 3: Lidhje direkte në WhatsApp me numrin e telefonit për pikën e takimit.</a:t>
-            </a:r>
-          </a:p>
-        </p:txBody>
-      </p:sp>
-      <p:sp>
-        <p:nvSpPr>
-          <p:cNvPr id="10" name="Rounded Rectangle 9"/>
-          <p:cNvSpPr/>
-          <p:nvPr/>
-        </p:nvSpPr>
-        <p:spPr>
-          <a:xfrm>
-            <a:off x="8046720" y="2011680"/>
-            <a:ext cx="3383280" cy="4389120"/>
-          </a:xfrm>
-          <a:prstGeom prst="roundRect">
-            <a:avLst/>
-          </a:prstGeom>
-          <a:solidFill>
-            <a:srgbClr val="141E34"/>
-          </a:solidFill>
-          <a:ln w="31750">
-            <a:solidFill>
-              <a:srgbClr val="F59E0B"/>
-            </a:solidFill>
-          </a:ln>
-        </p:spPr>
-        <p:style>
-          <a:lnRef idx="1">
-            <a:schemeClr val="accent1"/>
-          </a:lnRef>
-          <a:fillRef idx="3">
-            <a:schemeClr val="accent1"/>
-          </a:fillRef>
-          <a:effectRef idx="2">
-            <a:schemeClr val="accent1"/>
-          </a:effectRef>
-          <a:fontRef idx="minor">
-            <a:schemeClr val="lt1"/>
-          </a:fontRef>
-        </p:style>
-        <p:txBody>
-          <a:bodyPr rtlCol="0" anchor="ctr"/>
-          <a:lstStyle/>
-          <a:p>
-            <a:pPr algn="ctr"/>
-          </a:p>
-        </p:txBody>
-      </p:sp>
-      <p:sp>
-        <p:nvSpPr>
-          <p:cNvPr id="11" name="TextBox 10"/>
-          <p:cNvSpPr txBox="1"/>
-          <p:nvPr/>
-        </p:nvSpPr>
-        <p:spPr>
-          <a:xfrm>
-            <a:off x="8229600" y="2194560"/>
-            <a:ext cx="3017520" cy="4023360"/>
-          </a:xfrm>
-          <a:prstGeom prst="rect">
-            <a:avLst/>
-          </a:prstGeom>
-          <a:noFill/>
-        </p:spPr>
-        <p:txBody>
-          <a:bodyPr wrap="square">
-            <a:spAutoFit/>
-          </a:bodyPr>
-          <a:lstStyle/>
-          <a:p>
-            <a:pPr>
-              <a:spcAft>
-                <a:spcPts val="1400"/>
-              </a:spcAft>
-              <a:defRPr sz="2100" b="1">
-                <a:solidFill>
-                  <a:srgbClr val="FFFFFF"/>
-                </a:solidFill>
-                <a:latin typeface="Inter"/>
-              </a:defRPr>
-            </a:pPr>
-            <a:r>
-              <a:t>🚫 3. Jashtë Kufijve (Out-of-Scope)</a:t>
+              <a:t>• Kufijtë Out-of-Scope (Çfarë NUK Bëjmë): JO pagesa me kartela (ndarja e parave bëhet kesh në makinë), JO GPS tracking kompleks satelitor.</a:t>
             </a:r>
           </a:p>
           <a:p>
@@ -11174,39 +11011,7 @@
               </a:defRPr>
             </a:pPr>
             <a:r>
-              <a:t>• JO pagesa me kartela bankare (ndarja e parave bëhet kesh në makinë).</a:t>
-            </a:r>
-          </a:p>
-          <a:p>
-            <a:pPr>
-              <a:spcAft>
-                <a:spcPts val="1000"/>
-              </a:spcAft>
-              <a:defRPr sz="1700">
-                <a:solidFill>
-                  <a:srgbClr val="E2E8F0"/>
-                </a:solidFill>
-                <a:latin typeface="Inter"/>
-              </a:defRPr>
-            </a:pPr>
-            <a:r>
-              <a:t>• JO navigim kompleks satelitor me GPS (kursen kohë zhvillimi).</a:t>
-            </a:r>
-          </a:p>
-          <a:p>
-            <a:pPr>
-              <a:spcAft>
-                <a:spcPts val="1000"/>
-              </a:spcAft>
-              <a:defRPr sz="1700">
-                <a:solidFill>
-                  <a:srgbClr val="E2E8F0"/>
-                </a:solidFill>
-                <a:latin typeface="Inter"/>
-              </a:defRPr>
-            </a:pPr>
-            <a:r>
-              <a:t>• Rregulli i Artë: Fillojmë të thjeshtë, funksional dhe të realizueshëm brenda semestrit!</a:t>
+              <a:t>• Mësimi për Themeluesit: 80% e projekteve studentore dështojnë nga 'Scope Creep' (fryrja e kërkesave). Ne ndërtojmë një bërthamë të hekurt që funksionon 100%!</a:t>
             </a:r>
           </a:p>
         </p:txBody>
@@ -11388,8 +11193,77 @@
         </p:nvSpPr>
         <p:spPr>
           <a:xfrm>
-            <a:off x="731520" y="2011680"/>
-            <a:ext cx="5120640" cy="4389120"/>
+            <a:off x="731520" y="1965960"/>
+            <a:ext cx="5303520" cy="4480560"/>
+          </a:xfrm>
+          <a:prstGeom prst="roundRect">
+            <a:avLst/>
+          </a:prstGeom>
+          <a:solidFill>
+            <a:srgbClr val="FFFFFF"/>
+          </a:solidFill>
+          <a:ln w="31750">
+            <a:solidFill>
+              <a:srgbClr val="38BDF8"/>
+            </a:solidFill>
+          </a:ln>
+        </p:spPr>
+        <p:style>
+          <a:lnRef idx="1">
+            <a:schemeClr val="accent1"/>
+          </a:lnRef>
+          <a:fillRef idx="3">
+            <a:schemeClr val="accent1"/>
+          </a:fillRef>
+          <a:effectRef idx="2">
+            <a:schemeClr val="accent1"/>
+          </a:effectRef>
+          <a:fontRef idx="minor">
+            <a:schemeClr val="lt1"/>
+          </a:fontRef>
+        </p:style>
+        <p:txBody>
+          <a:bodyPr rtlCol="0" anchor="ctr"/>
+          <a:lstStyle/>
+          <a:p>
+            <a:pPr algn="ctr"/>
+          </a:p>
+        </p:txBody>
+      </p:sp>
+      <p:pic>
+        <p:nvPicPr>
+          <p:cNvPr id="7" name="Picture 6" descr="slide5_sketch_arkitektura_blloqet.png"/>
+          <p:cNvPicPr>
+            <a:picLocks noChangeAspect="1"/>
+          </p:cNvPicPr>
+          <p:nvPr/>
+        </p:nvPicPr>
+        <p:blipFill>
+          <a:blip r:embed="rId2"/>
+          <a:stretch>
+            <a:fillRect/>
+          </a:stretch>
+        </p:blipFill>
+        <p:spPr>
+          <a:xfrm>
+            <a:off x="777240" y="2011680"/>
+            <a:ext cx="5212080" cy="4389120"/>
+          </a:xfrm>
+          <a:prstGeom prst="rect">
+            <a:avLst/>
+          </a:prstGeom>
+        </p:spPr>
+      </p:pic>
+      <p:sp>
+        <p:nvSpPr>
+          <p:cNvPr id="8" name="Rounded Rectangle 7"/>
+          <p:cNvSpPr/>
+          <p:nvPr/>
+        </p:nvSpPr>
+        <p:spPr>
+          <a:xfrm>
+            <a:off x="6217920" y="1965960"/>
+            <a:ext cx="5303520" cy="4480560"/>
           </a:xfrm>
           <a:prstGeom prst="roundRect">
             <a:avLst/>
@@ -11427,14 +11301,14 @@
       </p:sp>
       <p:sp>
         <p:nvSpPr>
-          <p:cNvPr id="7" name="TextBox 6"/>
+          <p:cNvPr id="9" name="TextBox 8"/>
           <p:cNvSpPr txBox="1"/>
           <p:nvPr/>
         </p:nvSpPr>
         <p:spPr>
           <a:xfrm>
-            <a:off x="1005840" y="2286000"/>
-            <a:ext cx="4572000" cy="3840480"/>
+            <a:off x="6400800" y="2148840"/>
+            <a:ext cx="4937760" cy="4114800"/>
           </a:xfrm>
           <a:prstGeom prst="rect">
             <a:avLst/>
@@ -11449,9 +11323,9 @@
           <a:p>
             <a:pPr>
               <a:spcAft>
-                <a:spcPts val="1600"/>
-              </a:spcAft>
-              <a:defRPr sz="2400" b="1">
+                <a:spcPts val="1200"/>
+              </a:spcAft>
+              <a:defRPr sz="2300" b="1">
                 <a:solidFill>
                   <a:srgbClr val="38BDF8"/>
                 </a:solidFill>
@@ -11459,219 +11333,71 @@
               </a:defRPr>
             </a:pPr>
             <a:r>
-              <a:t>📱 Ndërfaqja Mobile (Next.js PWA)</a:t>
-            </a:r>
-          </a:p>
-          <a:p>
-            <a:pPr>
-              <a:spcAft>
-                <a:spcPts val="1200"/>
-              </a:spcAft>
-              <a:defRPr sz="1800">
-                <a:solidFill>
-                  <a:srgbClr val="E2E8F0"/>
-                </a:solidFill>
-                <a:latin typeface="Inter"/>
-              </a:defRPr>
-            </a:pPr>
-            <a:r>
-              <a:t>• Ekrani 1: Kërko Udhëtim: Zgjedhja e qytetit dhe orës nga udhëtari.</a:t>
-            </a:r>
-          </a:p>
-          <a:p>
-            <a:pPr>
-              <a:spcAft>
-                <a:spcPts val="1200"/>
-              </a:spcAft>
-              <a:defRPr sz="1800">
-                <a:solidFill>
-                  <a:srgbClr val="E2E8F0"/>
-                </a:solidFill>
-                <a:latin typeface="Inter"/>
-              </a:defRPr>
-            </a:pPr>
-            <a:r>
-              <a:t>• Ekrani 2: Lista e Veturave: Kartelat e shoferëve me vendet e lira dhe çmimin.</a:t>
-            </a:r>
-          </a:p>
-          <a:p>
-            <a:pPr>
-              <a:spcAft>
-                <a:spcPts val="1200"/>
-              </a:spcAft>
-              <a:defRPr sz="1800">
-                <a:solidFill>
-                  <a:srgbClr val="E2E8F0"/>
-                </a:solidFill>
-                <a:latin typeface="Inter"/>
-              </a:defRPr>
-            </a:pPr>
-            <a:r>
-              <a:t>• Ekrani 3: Posto Rrugën: Formë e shpejtë për shoferin me 3 fusha.</a:t>
-            </a:r>
-          </a:p>
-          <a:p>
-            <a:pPr>
-              <a:spcAft>
-                <a:spcPts val="1200"/>
-              </a:spcAft>
-              <a:defRPr sz="1800">
-                <a:solidFill>
-                  <a:srgbClr val="E2E8F0"/>
-                </a:solidFill>
-                <a:latin typeface="Inter"/>
-              </a:defRPr>
-            </a:pPr>
-            <a:r>
-              <a:t>• Teknologjia:: Next.js 15 App Router + Tailwind CSS (Touch-First 48px).</a:t>
-            </a:r>
-          </a:p>
-        </p:txBody>
-      </p:sp>
-      <p:sp>
-        <p:nvSpPr>
-          <p:cNvPr id="8" name="Rounded Rectangle 7"/>
-          <p:cNvSpPr/>
-          <p:nvPr/>
-        </p:nvSpPr>
-        <p:spPr>
-          <a:xfrm>
-            <a:off x="6309360" y="2011680"/>
-            <a:ext cx="5120640" cy="4389120"/>
-          </a:xfrm>
-          <a:prstGeom prst="roundRect">
-            <a:avLst/>
-          </a:prstGeom>
-          <a:solidFill>
-            <a:srgbClr val="141E34"/>
-          </a:solidFill>
-          <a:ln w="31750">
-            <a:solidFill>
-              <a:srgbClr val="10B981"/>
-            </a:solidFill>
-          </a:ln>
-        </p:spPr>
-        <p:style>
-          <a:lnRef idx="1">
-            <a:schemeClr val="accent1"/>
-          </a:lnRef>
-          <a:fillRef idx="3">
-            <a:schemeClr val="accent1"/>
-          </a:fillRef>
-          <a:effectRef idx="2">
-            <a:schemeClr val="accent1"/>
-          </a:effectRef>
-          <a:fontRef idx="minor">
-            <a:schemeClr val="lt1"/>
-          </a:fontRef>
-        </p:style>
-        <p:txBody>
-          <a:bodyPr rtlCol="0" anchor="ctr"/>
-          <a:lstStyle/>
-          <a:p>
-            <a:pPr algn="ctr"/>
-          </a:p>
-        </p:txBody>
-      </p:sp>
-      <p:sp>
-        <p:nvSpPr>
-          <p:cNvPr id="9" name="TextBox 8"/>
-          <p:cNvSpPr txBox="1"/>
-          <p:nvPr/>
-        </p:nvSpPr>
-        <p:spPr>
-          <a:xfrm>
-            <a:off x="6583680" y="2286000"/>
-            <a:ext cx="4572000" cy="3840480"/>
-          </a:xfrm>
-          <a:prstGeom prst="rect">
-            <a:avLst/>
-          </a:prstGeom>
-          <a:noFill/>
-        </p:spPr>
-        <p:txBody>
-          <a:bodyPr wrap="square">
-            <a:spAutoFit/>
-          </a:bodyPr>
-          <a:lstStyle/>
-          <a:p>
-            <a:pPr>
-              <a:spcAft>
-                <a:spcPts val="1600"/>
-              </a:spcAft>
-              <a:defRPr sz="2400" b="1">
-                <a:solidFill>
-                  <a:srgbClr val="10B981"/>
-                </a:solidFill>
-                <a:latin typeface="Inter"/>
-              </a:defRPr>
-            </a:pPr>
-            <a:r>
-              <a:t>☁️ Baza &amp; Siguria (Supabase Cloud)</a:t>
-            </a:r>
-          </a:p>
-          <a:p>
-            <a:pPr>
-              <a:spcAft>
-                <a:spcPts val="1200"/>
-              </a:spcAft>
-              <a:defRPr sz="1800">
-                <a:solidFill>
-                  <a:srgbClr val="E2E8F0"/>
-                </a:solidFill>
-                <a:latin typeface="Inter"/>
-              </a:defRPr>
-            </a:pPr>
-            <a:r>
-              <a:t>• Tabela 'rides': id, driver_id, origin, departure_time, seats_available, price.</a:t>
-            </a:r>
-          </a:p>
-          <a:p>
-            <a:pPr>
-              <a:spcAft>
-                <a:spcPts val="1200"/>
-              </a:spcAft>
-              <a:defRPr sz="1800">
-                <a:solidFill>
-                  <a:srgbClr val="E2E8F0"/>
-                </a:solidFill>
-                <a:latin typeface="Inter"/>
-              </a:defRPr>
-            </a:pPr>
-            <a:r>
-              <a:t>• Tabela 'bookings': id, ride_id, passenger_id, status (konfirmuar/anuluar).</a:t>
-            </a:r>
-          </a:p>
-          <a:p>
-            <a:pPr>
-              <a:spcAft>
-                <a:spcPts val="1200"/>
-              </a:spcAft>
-              <a:defRPr sz="1800">
-                <a:solidFill>
-                  <a:srgbClr val="E2E8F0"/>
-                </a:solidFill>
-                <a:latin typeface="Inter"/>
-              </a:defRPr>
-            </a:pPr>
-            <a:r>
-              <a:t>• Siguria me Email AAB: Kyçje vetëm me @universitetiaab.com.</a:t>
-            </a:r>
-          </a:p>
-          <a:p>
-            <a:pPr>
-              <a:spcAft>
-                <a:spcPts val="1200"/>
-              </a:spcAft>
-              <a:defRPr sz="1800">
-                <a:solidFill>
-                  <a:srgbClr val="E2E8F0"/>
-                </a:solidFill>
-                <a:latin typeface="Inter"/>
-              </a:defRPr>
-            </a:pPr>
-            <a:r>
-              <a:t>• Realtime Sync: Vendet e lira zbriten në çast te të gjithë përdoruesit.</a:t>
+              <a:t>🏛️ 3 Blloqet Kryesore të Arkitekturës</a:t>
+            </a:r>
+          </a:p>
+          <a:p>
+            <a:pPr>
+              <a:spcAft>
+                <a:spcPts val="1000"/>
+              </a:spcAft>
+              <a:defRPr sz="1700">
+                <a:solidFill>
+                  <a:srgbClr val="E2E8F0"/>
+                </a:solidFill>
+                <a:latin typeface="Inter"/>
+              </a:defRPr>
+            </a:pPr>
+            <a:r>
+              <a:t>• 1. Klienti Mobile (PWA): Ndërtuar me Next.js 15 dhe Tailwind CSS. Butona me sipërfaqe prekjeje 48px. Service Worker për shpejtësi dhe mbështetje offline.</a:t>
+            </a:r>
+          </a:p>
+          <a:p>
+            <a:pPr>
+              <a:spcAft>
+                <a:spcPts val="1000"/>
+              </a:spcAft>
+              <a:defRPr sz="1700">
+                <a:solidFill>
+                  <a:srgbClr val="E2E8F0"/>
+                </a:solidFill>
+                <a:latin typeface="Inter"/>
+              </a:defRPr>
+            </a:pPr>
+            <a:r>
+              <a:t>• 2. Baza &amp; Siguria (Supabase): Tabela relacionale 'rides' (shoferi, nisja, ora, vendet) dhe 'bookings'. Realtime engine që zbret vendet e lira menjëherë pa rifreskuar faqen.</a:t>
+            </a:r>
+          </a:p>
+          <a:p>
+            <a:pPr>
+              <a:spcAft>
+                <a:spcPts val="1000"/>
+              </a:spcAft>
+              <a:defRPr sz="1700">
+                <a:solidFill>
+                  <a:srgbClr val="E2E8F0"/>
+                </a:solidFill>
+                <a:latin typeface="Inter"/>
+              </a:defRPr>
+            </a:pPr>
+            <a:r>
+              <a:t>• 3. Lidhja e Jashtme (WhatsApp): Deep link 'wa.me' që lidh shoferin dhe pasagjerin për pikën e takimit.</a:t>
+            </a:r>
+          </a:p>
+          <a:p>
+            <a:pPr>
+              <a:spcAft>
+                <a:spcPts val="1000"/>
+              </a:spcAft>
+              <a:defRPr sz="1700">
+                <a:solidFill>
+                  <a:srgbClr val="E2E8F0"/>
+                </a:solidFill>
+                <a:latin typeface="Inter"/>
+              </a:defRPr>
+            </a:pPr>
+            <a:r>
+              <a:t>• Pse Kjo Arkitekturë? Ndërtim modular: PWA bën menaxhimin e të dhënave, Supabase garanton besueshmërinë, WhatsApp koordinimin live!</a:t>
             </a:r>
           </a:p>
         </p:txBody>
@@ -11853,14 +11579,14 @@
         </p:nvSpPr>
         <p:spPr>
           <a:xfrm>
-            <a:off x="731520" y="2011680"/>
-            <a:ext cx="2011680" cy="4389120"/>
+            <a:off x="731520" y="1965960"/>
+            <a:ext cx="5303520" cy="4480560"/>
           </a:xfrm>
           <a:prstGeom prst="roundRect">
             <a:avLst/>
           </a:prstGeom>
           <a:solidFill>
-            <a:srgbClr val="141E34"/>
+            <a:srgbClr val="FFFFFF"/>
           </a:solidFill>
           <a:ln w="31750">
             <a:solidFill>
@@ -11890,86 +11616,30 @@
           </a:p>
         </p:txBody>
       </p:sp>
-      <p:sp>
-        <p:nvSpPr>
-          <p:cNvPr id="7" name="TextBox 6"/>
-          <p:cNvSpPr txBox="1"/>
-          <p:nvPr/>
-        </p:nvSpPr>
-        <p:spPr>
-          <a:xfrm>
-            <a:off x="841248" y="2148840"/>
-            <a:ext cx="1792224" cy="4069080"/>
-          </a:xfrm>
-          <a:prstGeom prst="rect">
-            <a:avLst/>
-          </a:prstGeom>
-          <a:noFill/>
-        </p:spPr>
-        <p:txBody>
-          <a:bodyPr wrap="square">
-            <a:spAutoFit/>
-          </a:bodyPr>
-          <a:lstStyle/>
-          <a:p>
-            <a:pPr algn="ctr">
-              <a:defRPr sz="3600"/>
-            </a:pPr>
-            <a:r>
-              <a:t>1️⃣</a:t>
-            </a:r>
-          </a:p>
-          <a:p>
-            <a:pPr algn="ctr">
-              <a:spcAft>
-                <a:spcPts val="600"/>
-              </a:spcAft>
-              <a:defRPr sz="1300" b="1">
-                <a:solidFill>
-                  <a:srgbClr val="38BDF8"/>
-                </a:solidFill>
-                <a:latin typeface="Inter"/>
-              </a:defRPr>
-            </a:pPr>
-            <a:r>
-              <a:t>JAVËT 1–2</a:t>
-            </a:r>
-          </a:p>
-          <a:p>
-            <a:pPr algn="ctr">
-              <a:spcAft>
-                <a:spcPts val="1200"/>
-              </a:spcAft>
-              <a:defRPr sz="1900" b="1">
-                <a:solidFill>
-                  <a:srgbClr val="FFFFFF"/>
-                </a:solidFill>
-                <a:latin typeface="Inter"/>
-              </a:defRPr>
-            </a:pPr>
-            <a:r>
-              <a:t>Ideja &amp; Skica</a:t>
-            </a:r>
-            <a:br/>
-            <a:r>
-              <a:t>në Letër</a:t>
-            </a:r>
-          </a:p>
-          <a:p>
-            <a:pPr algn="l">
-              <a:defRPr sz="1600">
-                <a:solidFill>
-                  <a:srgbClr val="E2E8F0"/>
-                </a:solidFill>
-                <a:latin typeface="Inter"/>
-              </a:defRPr>
-            </a:pPr>
-            <a:r>
-              <a:t>Vëzhgimi i problemit, përcaktimi i kërkesave dhe vizatimi me dorë i ekraneve.</a:t>
-            </a:r>
-          </a:p>
-        </p:txBody>
-      </p:sp>
+      <p:pic>
+        <p:nvPicPr>
+          <p:cNvPr id="7" name="Picture 6" descr="slide6_sketch_vijueshmeria_ndertimi.png"/>
+          <p:cNvPicPr>
+            <a:picLocks noChangeAspect="1"/>
+          </p:cNvPicPr>
+          <p:nvPr/>
+        </p:nvPicPr>
+        <p:blipFill>
+          <a:blip r:embed="rId2"/>
+          <a:stretch>
+            <a:fillRect/>
+          </a:stretch>
+        </p:blipFill>
+        <p:spPr>
+          <a:xfrm>
+            <a:off x="777240" y="2011680"/>
+            <a:ext cx="5212080" cy="4389120"/>
+          </a:xfrm>
+          <a:prstGeom prst="rect">
+            <a:avLst/>
+          </a:prstGeom>
+        </p:spPr>
+      </p:pic>
       <p:sp>
         <p:nvSpPr>
           <p:cNvPr id="8" name="Rounded Rectangle 7"/>
@@ -11978,133 +11648,8 @@
         </p:nvSpPr>
         <p:spPr>
           <a:xfrm>
-            <a:off x="2907792" y="2011680"/>
-            <a:ext cx="2011680" cy="4389120"/>
-          </a:xfrm>
-          <a:prstGeom prst="roundRect">
-            <a:avLst/>
-          </a:prstGeom>
-          <a:solidFill>
-            <a:srgbClr val="141E34"/>
-          </a:solidFill>
-          <a:ln w="31750">
-            <a:solidFill>
-              <a:srgbClr val="6366F1"/>
-            </a:solidFill>
-          </a:ln>
-        </p:spPr>
-        <p:style>
-          <a:lnRef idx="1">
-            <a:schemeClr val="accent1"/>
-          </a:lnRef>
-          <a:fillRef idx="3">
-            <a:schemeClr val="accent1"/>
-          </a:fillRef>
-          <a:effectRef idx="2">
-            <a:schemeClr val="accent1"/>
-          </a:effectRef>
-          <a:fontRef idx="minor">
-            <a:schemeClr val="lt1"/>
-          </a:fontRef>
-        </p:style>
-        <p:txBody>
-          <a:bodyPr rtlCol="0" anchor="ctr"/>
-          <a:lstStyle/>
-          <a:p>
-            <a:pPr algn="ctr"/>
-          </a:p>
-        </p:txBody>
-      </p:sp>
-      <p:sp>
-        <p:nvSpPr>
-          <p:cNvPr id="9" name="TextBox 8"/>
-          <p:cNvSpPr txBox="1"/>
-          <p:nvPr/>
-        </p:nvSpPr>
-        <p:spPr>
-          <a:xfrm>
-            <a:off x="3017520" y="2148840"/>
-            <a:ext cx="1792224" cy="4069080"/>
-          </a:xfrm>
-          <a:prstGeom prst="rect">
-            <a:avLst/>
-          </a:prstGeom>
-          <a:noFill/>
-        </p:spPr>
-        <p:txBody>
-          <a:bodyPr wrap="square">
-            <a:spAutoFit/>
-          </a:bodyPr>
-          <a:lstStyle/>
-          <a:p>
-            <a:pPr algn="ctr">
-              <a:defRPr sz="3600"/>
-            </a:pPr>
-            <a:r>
-              <a:t>2️⃣</a:t>
-            </a:r>
-          </a:p>
-          <a:p>
-            <a:pPr algn="ctr">
-              <a:spcAft>
-                <a:spcPts val="600"/>
-              </a:spcAft>
-              <a:defRPr sz="1300" b="1">
-                <a:solidFill>
-                  <a:srgbClr val="6366F1"/>
-                </a:solidFill>
-                <a:latin typeface="Inter"/>
-              </a:defRPr>
-            </a:pPr>
-            <a:r>
-              <a:t>JAVËT 3–5</a:t>
-            </a:r>
-          </a:p>
-          <a:p>
-            <a:pPr algn="ctr">
-              <a:spcAft>
-                <a:spcPts val="1200"/>
-              </a:spcAft>
-              <a:defRPr sz="1900" b="1">
-                <a:solidFill>
-                  <a:srgbClr val="FFFFFF"/>
-                </a:solidFill>
-                <a:latin typeface="Inter"/>
-              </a:defRPr>
-            </a:pPr>
-            <a:r>
-              <a:t>Dizajni i UI</a:t>
-            </a:r>
-            <a:br/>
-            <a:r>
-              <a:t>me Tailwind</a:t>
-            </a:r>
-          </a:p>
-          <a:p>
-            <a:pPr algn="l">
-              <a:defRPr sz="1600">
-                <a:solidFill>
-                  <a:srgbClr val="E2E8F0"/>
-                </a:solidFill>
-                <a:latin typeface="Inter"/>
-              </a:defRPr>
-            </a:pPr>
-            <a:r>
-              <a:t>Kthimi i skicës në faqe mobile me Copilot. Krijimi i kartelave dhe butonave.</a:t>
-            </a:r>
-          </a:p>
-        </p:txBody>
-      </p:sp>
-      <p:sp>
-        <p:nvSpPr>
-          <p:cNvPr id="10" name="Rounded Rectangle 9"/>
-          <p:cNvSpPr/>
-          <p:nvPr/>
-        </p:nvSpPr>
-        <p:spPr>
-          <a:xfrm>
-            <a:off x="5084064" y="2011680"/>
-            <a:ext cx="2011680" cy="4389120"/>
+            <a:off x="6217920" y="1965960"/>
+            <a:ext cx="5303520" cy="4480560"/>
           </a:xfrm>
           <a:prstGeom prst="roundRect">
             <a:avLst/>
@@ -12142,14 +11687,14 @@
       </p:sp>
       <p:sp>
         <p:nvSpPr>
-          <p:cNvPr id="11" name="TextBox 10"/>
+          <p:cNvPr id="9" name="TextBox 8"/>
           <p:cNvSpPr txBox="1"/>
           <p:nvPr/>
         </p:nvSpPr>
         <p:spPr>
           <a:xfrm>
-            <a:off x="5193792" y="2148840"/>
-            <a:ext cx="1792224" cy="4069080"/>
+            <a:off x="6400800" y="2148840"/>
+            <a:ext cx="4937760" cy="4114800"/>
           </a:xfrm>
           <a:prstGeom prst="rect">
             <a:avLst/>
@@ -12162,19 +11707,11 @@
           </a:bodyPr>
           <a:lstStyle/>
           <a:p>
-            <a:pPr algn="ctr">
-              <a:defRPr sz="3600"/>
-            </a:pPr>
-            <a:r>
-              <a:t>3️⃣</a:t>
-            </a:r>
-          </a:p>
-          <a:p>
-            <a:pPr algn="ctr">
-              <a:spcAft>
-                <a:spcPts val="600"/>
-              </a:spcAft>
-              <a:defRPr sz="1300" b="1">
+            <a:pPr>
+              <a:spcAft>
+                <a:spcPts val="1200"/>
+              </a:spcAft>
+              <a:defRPr sz="2300" b="1">
                 <a:solidFill>
                   <a:srgbClr val="F59E0B"/>
                 </a:solidFill>
@@ -12182,290 +11719,87 @@
               </a:defRPr>
             </a:pPr>
             <a:r>
-              <a:t>JAVËT 6–9</a:t>
-            </a:r>
-          </a:p>
-          <a:p>
-            <a:pPr algn="ctr">
-              <a:spcAft>
-                <a:spcPts val="1200"/>
-              </a:spcAft>
-              <a:defRPr sz="1900" b="1">
-                <a:solidFill>
-                  <a:srgbClr val="FFFFFF"/>
-                </a:solidFill>
-                <a:latin typeface="Inter"/>
-              </a:defRPr>
-            </a:pPr>
-            <a:r>
-              <a:t>Databaza</a:t>
-            </a:r>
-            <a:br/>
-            <a:r>
-              <a:t>Supabase</a:t>
-            </a:r>
-          </a:p>
-          <a:p>
-            <a:pPr algn="l">
-              <a:defRPr sz="1600">
-                <a:solidFill>
-                  <a:srgbClr val="E2E8F0"/>
-                </a:solidFill>
-                <a:latin typeface="Inter"/>
-              </a:defRPr>
-            </a:pPr>
-            <a:r>
-              <a:t>Krijimi i tabelave në PostgreSQL, lidhja e autentikimit AAB dhe logjika e rezervimit.</a:t>
-            </a:r>
-          </a:p>
-        </p:txBody>
-      </p:sp>
-      <p:sp>
-        <p:nvSpPr>
-          <p:cNvPr id="12" name="Rounded Rectangle 11"/>
-          <p:cNvSpPr/>
-          <p:nvPr/>
-        </p:nvSpPr>
-        <p:spPr>
-          <a:xfrm>
-            <a:off x="7260336" y="2011680"/>
-            <a:ext cx="2011680" cy="4389120"/>
-          </a:xfrm>
-          <a:prstGeom prst="roundRect">
-            <a:avLst/>
-          </a:prstGeom>
-          <a:solidFill>
-            <a:srgbClr val="141E34"/>
-          </a:solidFill>
-          <a:ln w="31750">
-            <a:solidFill>
-              <a:srgbClr val="10B981"/>
-            </a:solidFill>
-          </a:ln>
-        </p:spPr>
-        <p:style>
-          <a:lnRef idx="1">
-            <a:schemeClr val="accent1"/>
-          </a:lnRef>
-          <a:fillRef idx="3">
-            <a:schemeClr val="accent1"/>
-          </a:fillRef>
-          <a:effectRef idx="2">
-            <a:schemeClr val="accent1"/>
-          </a:effectRef>
-          <a:fontRef idx="minor">
-            <a:schemeClr val="lt1"/>
-          </a:fontRef>
-        </p:style>
-        <p:txBody>
-          <a:bodyPr rtlCol="0" anchor="ctr"/>
-          <a:lstStyle/>
-          <a:p>
-            <a:pPr algn="ctr"/>
-          </a:p>
-        </p:txBody>
-      </p:sp>
-      <p:sp>
-        <p:nvSpPr>
-          <p:cNvPr id="13" name="TextBox 12"/>
-          <p:cNvSpPr txBox="1"/>
-          <p:nvPr/>
-        </p:nvSpPr>
-        <p:spPr>
-          <a:xfrm>
-            <a:off x="7370064" y="2148840"/>
-            <a:ext cx="1792224" cy="4069080"/>
-          </a:xfrm>
-          <a:prstGeom prst="rect">
-            <a:avLst/>
-          </a:prstGeom>
-          <a:noFill/>
-        </p:spPr>
-        <p:txBody>
-          <a:bodyPr wrap="square">
-            <a:spAutoFit/>
-          </a:bodyPr>
-          <a:lstStyle/>
-          <a:p>
-            <a:pPr algn="ctr">
-              <a:defRPr sz="3600"/>
-            </a:pPr>
-            <a:r>
-              <a:t>4️⃣</a:t>
-            </a:r>
-          </a:p>
-          <a:p>
-            <a:pPr algn="ctr">
-              <a:spcAft>
-                <a:spcPts val="600"/>
-              </a:spcAft>
-              <a:defRPr sz="1300" b="1">
-                <a:solidFill>
-                  <a:srgbClr val="10B981"/>
-                </a:solidFill>
-                <a:latin typeface="Inter"/>
-              </a:defRPr>
-            </a:pPr>
-            <a:r>
-              <a:t>JAVËT 10–12</a:t>
-            </a:r>
-          </a:p>
-          <a:p>
-            <a:pPr algn="ctr">
-              <a:spcAft>
-                <a:spcPts val="1200"/>
-              </a:spcAft>
-              <a:defRPr sz="1900" b="1">
-                <a:solidFill>
-                  <a:srgbClr val="FFFFFF"/>
-                </a:solidFill>
-                <a:latin typeface="Inter"/>
-              </a:defRPr>
-            </a:pPr>
-            <a:r>
-              <a:t>Realtime &amp;</a:t>
-            </a:r>
-            <a:br/>
-            <a:r>
-              <a:t>PWA Offline</a:t>
-            </a:r>
-          </a:p>
-          <a:p>
-            <a:pPr algn="l">
-              <a:defRPr sz="1600">
-                <a:solidFill>
-                  <a:srgbClr val="E2E8F0"/>
-                </a:solidFill>
-                <a:latin typeface="Inter"/>
-              </a:defRPr>
-            </a:pPr>
-            <a:r>
-              <a:t>Sinkronizimi live i vendeve të lira, njoftimet push dhe instalimi në telefon.</a:t>
-            </a:r>
-          </a:p>
-        </p:txBody>
-      </p:sp>
-      <p:sp>
-        <p:nvSpPr>
-          <p:cNvPr id="14" name="Rounded Rectangle 13"/>
-          <p:cNvSpPr/>
-          <p:nvPr/>
-        </p:nvSpPr>
-        <p:spPr>
-          <a:xfrm>
-            <a:off x="9436608" y="2011680"/>
-            <a:ext cx="2011680" cy="4389120"/>
-          </a:xfrm>
-          <a:prstGeom prst="roundRect">
-            <a:avLst/>
-          </a:prstGeom>
-          <a:solidFill>
-            <a:srgbClr val="141E34"/>
-          </a:solidFill>
-          <a:ln w="31750">
-            <a:solidFill>
-              <a:srgbClr val="EC4899"/>
-            </a:solidFill>
-          </a:ln>
-        </p:spPr>
-        <p:style>
-          <a:lnRef idx="1">
-            <a:schemeClr val="accent1"/>
-          </a:lnRef>
-          <a:fillRef idx="3">
-            <a:schemeClr val="accent1"/>
-          </a:fillRef>
-          <a:effectRef idx="2">
-            <a:schemeClr val="accent1"/>
-          </a:effectRef>
-          <a:fontRef idx="minor">
-            <a:schemeClr val="lt1"/>
-          </a:fontRef>
-        </p:style>
-        <p:txBody>
-          <a:bodyPr rtlCol="0" anchor="ctr"/>
-          <a:lstStyle/>
-          <a:p>
-            <a:pPr algn="ctr"/>
-          </a:p>
-        </p:txBody>
-      </p:sp>
-      <p:sp>
-        <p:nvSpPr>
-          <p:cNvPr id="15" name="TextBox 14"/>
-          <p:cNvSpPr txBox="1"/>
-          <p:nvPr/>
-        </p:nvSpPr>
-        <p:spPr>
-          <a:xfrm>
-            <a:off x="9546336" y="2148840"/>
-            <a:ext cx="1792224" cy="4069080"/>
-          </a:xfrm>
-          <a:prstGeom prst="rect">
-            <a:avLst/>
-          </a:prstGeom>
-          <a:noFill/>
-        </p:spPr>
-        <p:txBody>
-          <a:bodyPr wrap="square">
-            <a:spAutoFit/>
-          </a:bodyPr>
-          <a:lstStyle/>
-          <a:p>
-            <a:pPr algn="ctr">
-              <a:defRPr sz="3600"/>
-            </a:pPr>
-            <a:r>
-              <a:t>5️⃣</a:t>
-            </a:r>
-          </a:p>
-          <a:p>
-            <a:pPr algn="ctr">
-              <a:spcAft>
-                <a:spcPts val="600"/>
-              </a:spcAft>
-              <a:defRPr sz="1300" b="1">
-                <a:solidFill>
-                  <a:srgbClr val="EC4899"/>
-                </a:solidFill>
-                <a:latin typeface="Inter"/>
-              </a:defRPr>
-            </a:pPr>
-            <a:r>
-              <a:t>JAVA 15</a:t>
-            </a:r>
-          </a:p>
-          <a:p>
-            <a:pPr algn="ctr">
-              <a:spcAft>
-                <a:spcPts val="1200"/>
-              </a:spcAft>
-              <a:defRPr sz="1900" b="1">
-                <a:solidFill>
-                  <a:srgbClr val="FFFFFF"/>
-                </a:solidFill>
-                <a:latin typeface="Inter"/>
-              </a:defRPr>
-            </a:pPr>
-            <a:r>
-              <a:t>Demo Day &amp;</a:t>
-            </a:r>
-            <a:br/>
-            <a:r>
-              <a:t>Mbrojtja</a:t>
-            </a:r>
-          </a:p>
-          <a:p>
-            <a:pPr algn="l">
-              <a:defRPr sz="1600">
-                <a:solidFill>
-                  <a:srgbClr val="E2E8F0"/>
-                </a:solidFill>
-                <a:latin typeface="Inter"/>
-              </a:defRPr>
-            </a:pPr>
-            <a:r>
-              <a:t>Prezantimi live para sallës direkt nga telefoni juaj. Notë maksimale dhe festim!</a:t>
+              <a:t>⏳ 'Pastaj Më Vonë Hyjmë në Ndërtim Real!'</a:t>
+            </a:r>
+          </a:p>
+          <a:p>
+            <a:pPr>
+              <a:spcAft>
+                <a:spcPts val="1000"/>
+              </a:spcAft>
+              <a:defRPr sz="1700">
+                <a:solidFill>
+                  <a:srgbClr val="E2E8F0"/>
+                </a:solidFill>
+                <a:latin typeface="Inter"/>
+              </a:defRPr>
+            </a:pPr>
+            <a:r>
+              <a:t>• Javët 1–2 (Ideja &amp; Letra): Vëzhgimi i problemit, zgjedhja e biznesit, specifikat e qarta dhe skicimi me dorë i ekraneve pa shkruar asnjë rresht kod.</a:t>
+            </a:r>
+          </a:p>
+          <a:p>
+            <a:pPr>
+              <a:spcAft>
+                <a:spcPts val="1000"/>
+              </a:spcAft>
+              <a:defRPr sz="1700">
+                <a:solidFill>
+                  <a:srgbClr val="E2E8F0"/>
+                </a:solidFill>
+                <a:latin typeface="Inter"/>
+              </a:defRPr>
+            </a:pPr>
+            <a:r>
+              <a:t>• Javët 3–5 (Dizajni i UI me Tailwind): Kthimi i skicës në faqe mobile me Tailwind CSS dhe ndihmën e GitHub Copilot.</a:t>
+            </a:r>
+          </a:p>
+          <a:p>
+            <a:pPr>
+              <a:spcAft>
+                <a:spcPts val="1000"/>
+              </a:spcAft>
+              <a:defRPr sz="1700">
+                <a:solidFill>
+                  <a:srgbClr val="E2E8F0"/>
+                </a:solidFill>
+                <a:latin typeface="Inter"/>
+              </a:defRPr>
+            </a:pPr>
+            <a:r>
+              <a:t>• Javët 6–9 (Databaza &amp; Auth): Lidhja e Supabase, krijimi i tabelave dhe sistemi i rezervimit me siguri AAB.</a:t>
+            </a:r>
+          </a:p>
+          <a:p>
+            <a:pPr>
+              <a:spcAft>
+                <a:spcPts val="1000"/>
+              </a:spcAft>
+              <a:defRPr sz="1700">
+                <a:solidFill>
+                  <a:srgbClr val="E2E8F0"/>
+                </a:solidFill>
+                <a:latin typeface="Inter"/>
+              </a:defRPr>
+            </a:pPr>
+            <a:r>
+              <a:t>• Javët 10–12 (PWA &amp; Offline): Instalimi në ekran të telefonit, manifest.json dhe sinkronizimi live.</a:t>
+            </a:r>
+          </a:p>
+          <a:p>
+            <a:pPr>
+              <a:spcAft>
+                <a:spcPts val="1000"/>
+              </a:spcAft>
+              <a:defRPr sz="1700">
+                <a:solidFill>
+                  <a:srgbClr val="E2E8F0"/>
+                </a:solidFill>
+                <a:latin typeface="Inter"/>
+              </a:defRPr>
+            </a:pPr>
+            <a:r>
+              <a:t>• Java 15 (Demo Day &amp; Suksesi): Prezantimi live nga telefoni juaj personal para komisionit dhe sallës!</a:t>
             </a:r>
           </a:p>
         </p:txBody>

--- a/Jave1_Hyrje_Nextjs_PWA_Copilot_2026.pptx
+++ b/Jave1_Hyrje_Nextjs_PWA_Copilot_2026.pptx
@@ -10421,8 +10421,8 @@
         </p:nvSpPr>
         <p:spPr>
           <a:xfrm>
-            <a:off x="731520" y="1965960"/>
-            <a:ext cx="5303520" cy="4480560"/>
+            <a:off x="731520" y="1874519"/>
+            <a:ext cx="10728655" cy="4663440"/>
           </a:xfrm>
           <a:prstGeom prst="roundRect">
             <a:avLst/>
@@ -10460,7 +10460,7 @@
       </p:sp>
       <p:pic>
         <p:nvPicPr>
-          <p:cNvPr id="7" name="Picture 6" descr="slide3_sketch_ideja_problemi.png"/>
+          <p:cNvPr id="7" name="Picture 6" descr="slide3_sketch_car_visual_master.png"/>
           <p:cNvPicPr>
             <a:picLocks noChangeAspect="1"/>
           </p:cNvPicPr>
@@ -10474,162 +10474,14 @@
         </p:blipFill>
         <p:spPr>
           <a:xfrm>
-            <a:off x="777240" y="2011680"/>
-            <a:ext cx="5212080" cy="4389120"/>
+            <a:off x="777240" y="1920240"/>
+            <a:ext cx="10637215" cy="4572000"/>
           </a:xfrm>
           <a:prstGeom prst="rect">
             <a:avLst/>
           </a:prstGeom>
         </p:spPr>
       </p:pic>
-      <p:sp>
-        <p:nvSpPr>
-          <p:cNvPr id="8" name="Rounded Rectangle 7"/>
-          <p:cNvSpPr/>
-          <p:nvPr/>
-        </p:nvSpPr>
-        <p:spPr>
-          <a:xfrm>
-            <a:off x="6217920" y="1965960"/>
-            <a:ext cx="5303520" cy="4480560"/>
-          </a:xfrm>
-          <a:prstGeom prst="roundRect">
-            <a:avLst/>
-          </a:prstGeom>
-          <a:solidFill>
-            <a:srgbClr val="141E34"/>
-          </a:solidFill>
-          <a:ln w="31750">
-            <a:solidFill>
-              <a:srgbClr val="6366F1"/>
-            </a:solidFill>
-          </a:ln>
-        </p:spPr>
-        <p:style>
-          <a:lnRef idx="1">
-            <a:schemeClr val="accent1"/>
-          </a:lnRef>
-          <a:fillRef idx="3">
-            <a:schemeClr val="accent1"/>
-          </a:fillRef>
-          <a:effectRef idx="2">
-            <a:schemeClr val="accent1"/>
-          </a:effectRef>
-          <a:fontRef idx="minor">
-            <a:schemeClr val="lt1"/>
-          </a:fontRef>
-        </p:style>
-        <p:txBody>
-          <a:bodyPr rtlCol="0" anchor="ctr"/>
-          <a:lstStyle/>
-          <a:p>
-            <a:pPr algn="ctr"/>
-          </a:p>
-        </p:txBody>
-      </p:sp>
-      <p:sp>
-        <p:nvSpPr>
-          <p:cNvPr id="9" name="TextBox 8"/>
-          <p:cNvSpPr txBox="1"/>
-          <p:nvPr/>
-        </p:nvSpPr>
-        <p:spPr>
-          <a:xfrm>
-            <a:off x="6400800" y="2148840"/>
-            <a:ext cx="4937760" cy="4114800"/>
-          </a:xfrm>
-          <a:prstGeom prst="rect">
-            <a:avLst/>
-          </a:prstGeom>
-          <a:noFill/>
-        </p:spPr>
-        <p:txBody>
-          <a:bodyPr wrap="square">
-            <a:spAutoFit/>
-          </a:bodyPr>
-          <a:lstStyle/>
-          <a:p>
-            <a:pPr>
-              <a:spcAft>
-                <a:spcPts val="1400"/>
-              </a:spcAft>
-              <a:defRPr sz="2400" b="1">
-                <a:solidFill>
-                  <a:srgbClr val="38BDF8"/>
-                </a:solidFill>
-                <a:latin typeface="Inter"/>
-              </a:defRPr>
-            </a:pPr>
-            <a:r>
-              <a:t>💡 Si Lindi 'AAB RideShare'?</a:t>
-            </a:r>
-          </a:p>
-          <a:p>
-            <a:pPr>
-              <a:spcAft>
-                <a:spcPts val="1000"/>
-              </a:spcAft>
-              <a:defRPr sz="1700">
-                <a:solidFill>
-                  <a:srgbClr val="E2E8F0"/>
-                </a:solidFill>
-                <a:latin typeface="Inter"/>
-              </a:defRPr>
-            </a:pPr>
-            <a:r>
-              <a:t>• Vëzhgimi në Terren: Në orën 07:30, qindra studentë nisen drejt AAB-së nga Ferizaji, Gjilani, Podujeva e Mitrovica.</a:t>
-            </a:r>
-          </a:p>
-          <a:p>
-            <a:pPr>
-              <a:spcAft>
-                <a:spcPts val="1000"/>
-              </a:spcAft>
-              <a:defRPr sz="1700">
-                <a:solidFill>
-                  <a:srgbClr val="E2E8F0"/>
-                </a:solidFill>
-                <a:latin typeface="Inter"/>
-              </a:defRPr>
-            </a:pPr>
-            <a:r>
-              <a:t>• Dhimbja (The Pain): Studentët me makinë shkojnë me 3 vende të zbrazëta duke paguar 10€ naftë vetëm. Ndërkohë, shokët e tyre presin autobusin në shi dhe vonohen në ligjëratë.</a:t>
-            </a:r>
-          </a:p>
-          <a:p>
-            <a:pPr>
-              <a:spcAft>
-                <a:spcPts val="1000"/>
-              </a:spcAft>
-              <a:defRPr sz="1700">
-                <a:solidFill>
-                  <a:srgbClr val="E2E8F0"/>
-                </a:solidFill>
-                <a:latin typeface="Inter"/>
-              </a:defRPr>
-            </a:pPr>
-            <a:r>
-              <a:t>• Skica e Parë në Letër: Një student merr një fletë dhe vizaton skicën me laps: '1 Makinë me 3 vende të lira + 3 shokë që ndajnë rrugën.'</a:t>
-            </a:r>
-          </a:p>
-          <a:p>
-            <a:pPr>
-              <a:spcAft>
-                <a:spcPts val="1000"/>
-              </a:spcAft>
-              <a:defRPr sz="1700">
-                <a:solidFill>
-                  <a:srgbClr val="E2E8F0"/>
-                </a:solidFill>
-                <a:latin typeface="Inter"/>
-              </a:defRPr>
-            </a:pPr>
-            <a:r>
-              <a:t>• Përfundimi Inxhinierik: Nuk nisim me kod të gatshëm! Nisim me të kuptuarit e thellë të problemit dhe zgjidhjen që krijon vlerë.</a:t>
-            </a:r>
-          </a:p>
-        </p:txBody>
-      </p:sp>
     </p:spTree>
   </p:cSld>
   <p:clrMapOvr>
@@ -10807,8 +10659,8 @@
         </p:nvSpPr>
         <p:spPr>
           <a:xfrm>
-            <a:off x="731520" y="1965960"/>
-            <a:ext cx="5303520" cy="4480560"/>
+            <a:off x="731520" y="1874519"/>
+            <a:ext cx="10728655" cy="4663440"/>
           </a:xfrm>
           <a:prstGeom prst="roundRect">
             <a:avLst/>
@@ -10846,7 +10698,7 @@
       </p:sp>
       <p:pic>
         <p:nvPicPr>
-          <p:cNvPr id="7" name="Picture 6" descr="slide4_sketch_specifikat_prd.png"/>
+          <p:cNvPr id="7" name="Picture 6" descr="slide4_sketch_wireframe_scope_master.png"/>
           <p:cNvPicPr>
             <a:picLocks noChangeAspect="1"/>
           </p:cNvPicPr>
@@ -10860,162 +10712,14 @@
         </p:blipFill>
         <p:spPr>
           <a:xfrm>
-            <a:off x="777240" y="2011680"/>
-            <a:ext cx="5212080" cy="4389120"/>
+            <a:off x="777240" y="1920240"/>
+            <a:ext cx="10637215" cy="4572000"/>
           </a:xfrm>
           <a:prstGeom prst="rect">
             <a:avLst/>
           </a:prstGeom>
         </p:spPr>
       </p:pic>
-      <p:sp>
-        <p:nvSpPr>
-          <p:cNvPr id="8" name="Rounded Rectangle 7"/>
-          <p:cNvSpPr/>
-          <p:nvPr/>
-        </p:nvSpPr>
-        <p:spPr>
-          <a:xfrm>
-            <a:off x="6217920" y="1965960"/>
-            <a:ext cx="5303520" cy="4480560"/>
-          </a:xfrm>
-          <a:prstGeom prst="roundRect">
-            <a:avLst/>
-          </a:prstGeom>
-          <a:solidFill>
-            <a:srgbClr val="141E34"/>
-          </a:solidFill>
-          <a:ln w="31750">
-            <a:solidFill>
-              <a:srgbClr val="10B981"/>
-            </a:solidFill>
-          </a:ln>
-        </p:spPr>
-        <p:style>
-          <a:lnRef idx="1">
-            <a:schemeClr val="accent1"/>
-          </a:lnRef>
-          <a:fillRef idx="3">
-            <a:schemeClr val="accent1"/>
-          </a:fillRef>
-          <a:effectRef idx="2">
-            <a:schemeClr val="accent1"/>
-          </a:effectRef>
-          <a:fontRef idx="minor">
-            <a:schemeClr val="lt1"/>
-          </a:fontRef>
-        </p:style>
-        <p:txBody>
-          <a:bodyPr rtlCol="0" anchor="ctr"/>
-          <a:lstStyle/>
-          <a:p>
-            <a:pPr algn="ctr"/>
-          </a:p>
-        </p:txBody>
-      </p:sp>
-      <p:sp>
-        <p:nvSpPr>
-          <p:cNvPr id="9" name="TextBox 8"/>
-          <p:cNvSpPr txBox="1"/>
-          <p:nvPr/>
-        </p:nvSpPr>
-        <p:spPr>
-          <a:xfrm>
-            <a:off x="6400800" y="2148840"/>
-            <a:ext cx="4937760" cy="4114800"/>
-          </a:xfrm>
-          <a:prstGeom prst="rect">
-            <a:avLst/>
-          </a:prstGeom>
-          <a:noFill/>
-        </p:spPr>
-        <p:txBody>
-          <a:bodyPr wrap="square">
-            <a:spAutoFit/>
-          </a:bodyPr>
-          <a:lstStyle/>
-          <a:p>
-            <a:pPr>
-              <a:spcAft>
-                <a:spcPts val="1200"/>
-              </a:spcAft>
-              <a:defRPr sz="2300" b="1">
-                <a:solidFill>
-                  <a:srgbClr val="10B981"/>
-                </a:solidFill>
-                <a:latin typeface="Inter"/>
-              </a:defRPr>
-            </a:pPr>
-            <a:r>
-              <a:t>📋 Disiplina e Kufijve të Projektit (Scope)</a:t>
-            </a:r>
-          </a:p>
-          <a:p>
-            <a:pPr>
-              <a:spcAft>
-                <a:spcPts val="1000"/>
-              </a:spcAft>
-              <a:defRPr sz="1700">
-                <a:solidFill>
-                  <a:srgbClr val="E2E8F0"/>
-                </a:solidFill>
-                <a:latin typeface="Inter"/>
-              </a:defRPr>
-            </a:pPr>
-            <a:r>
-              <a:t>• Aktorët e Qartë: Shoferi që poston udhëtimin dhe Udhëtari që rezervon vendin.</a:t>
-            </a:r>
-          </a:p>
-          <a:p>
-            <a:pPr>
-              <a:spcAft>
-                <a:spcPts val="1000"/>
-              </a:spcAft>
-              <a:defRPr sz="1700">
-                <a:solidFill>
-                  <a:srgbClr val="E2E8F0"/>
-                </a:solidFill>
-                <a:latin typeface="Inter"/>
-              </a:defRPr>
-            </a:pPr>
-            <a:r>
-              <a:t>• Kërkesat Must-Have (MVP): Postimi me 3 fusha, filtrimi sipas qytetit, rezervimi me 1-prekje, koordinimi në WhatsApp, dhe kyçja me @universitetiaab.com.</a:t>
-            </a:r>
-          </a:p>
-          <a:p>
-            <a:pPr>
-              <a:spcAft>
-                <a:spcPts val="1000"/>
-              </a:spcAft>
-              <a:defRPr sz="1700">
-                <a:solidFill>
-                  <a:srgbClr val="E2E8F0"/>
-                </a:solidFill>
-                <a:latin typeface="Inter"/>
-              </a:defRPr>
-            </a:pPr>
-            <a:r>
-              <a:t>• Kufijtë Out-of-Scope (Çfarë NUK Bëjmë): JO pagesa me kartela (ndarja e parave bëhet kesh në makinë), JO GPS tracking kompleks satelitor.</a:t>
-            </a:r>
-          </a:p>
-          <a:p>
-            <a:pPr>
-              <a:spcAft>
-                <a:spcPts val="1000"/>
-              </a:spcAft>
-              <a:defRPr sz="1700">
-                <a:solidFill>
-                  <a:srgbClr val="E2E8F0"/>
-                </a:solidFill>
-                <a:latin typeface="Inter"/>
-              </a:defRPr>
-            </a:pPr>
-            <a:r>
-              <a:t>• Mësimi për Themeluesit: 80% e projekteve studentore dështojnë nga 'Scope Creep' (fryrja e kërkesave). Ne ndërtojmë një bërthamë të hekurt që funksionon 100%!</a:t>
-            </a:r>
-          </a:p>
-        </p:txBody>
-      </p:sp>
     </p:spTree>
   </p:cSld>
   <p:clrMapOvr>
@@ -11193,8 +10897,8 @@
         </p:nvSpPr>
         <p:spPr>
           <a:xfrm>
-            <a:off x="731520" y="1965960"/>
-            <a:ext cx="5303520" cy="4480560"/>
+            <a:off x="731520" y="1874519"/>
+            <a:ext cx="10728655" cy="4663440"/>
           </a:xfrm>
           <a:prstGeom prst="roundRect">
             <a:avLst/>
@@ -11232,7 +10936,7 @@
       </p:sp>
       <p:pic>
         <p:nvPicPr>
-          <p:cNvPr id="7" name="Picture 6" descr="slide5_sketch_arkitektura_blloqet.png"/>
+          <p:cNvPr id="7" name="Picture 6" descr="slide5_sketch_architecture_master.png"/>
           <p:cNvPicPr>
             <a:picLocks noChangeAspect="1"/>
           </p:cNvPicPr>
@@ -11246,162 +10950,14 @@
         </p:blipFill>
         <p:spPr>
           <a:xfrm>
-            <a:off x="777240" y="2011680"/>
-            <a:ext cx="5212080" cy="4389120"/>
+            <a:off x="777240" y="1920240"/>
+            <a:ext cx="10637215" cy="4572000"/>
           </a:xfrm>
           <a:prstGeom prst="rect">
             <a:avLst/>
           </a:prstGeom>
         </p:spPr>
       </p:pic>
-      <p:sp>
-        <p:nvSpPr>
-          <p:cNvPr id="8" name="Rounded Rectangle 7"/>
-          <p:cNvSpPr/>
-          <p:nvPr/>
-        </p:nvSpPr>
-        <p:spPr>
-          <a:xfrm>
-            <a:off x="6217920" y="1965960"/>
-            <a:ext cx="5303520" cy="4480560"/>
-          </a:xfrm>
-          <a:prstGeom prst="roundRect">
-            <a:avLst/>
-          </a:prstGeom>
-          <a:solidFill>
-            <a:srgbClr val="141E34"/>
-          </a:solidFill>
-          <a:ln w="31750">
-            <a:solidFill>
-              <a:srgbClr val="38BDF8"/>
-            </a:solidFill>
-          </a:ln>
-        </p:spPr>
-        <p:style>
-          <a:lnRef idx="1">
-            <a:schemeClr val="accent1"/>
-          </a:lnRef>
-          <a:fillRef idx="3">
-            <a:schemeClr val="accent1"/>
-          </a:fillRef>
-          <a:effectRef idx="2">
-            <a:schemeClr val="accent1"/>
-          </a:effectRef>
-          <a:fontRef idx="minor">
-            <a:schemeClr val="lt1"/>
-          </a:fontRef>
-        </p:style>
-        <p:txBody>
-          <a:bodyPr rtlCol="0" anchor="ctr"/>
-          <a:lstStyle/>
-          <a:p>
-            <a:pPr algn="ctr"/>
-          </a:p>
-        </p:txBody>
-      </p:sp>
-      <p:sp>
-        <p:nvSpPr>
-          <p:cNvPr id="9" name="TextBox 8"/>
-          <p:cNvSpPr txBox="1"/>
-          <p:nvPr/>
-        </p:nvSpPr>
-        <p:spPr>
-          <a:xfrm>
-            <a:off x="6400800" y="2148840"/>
-            <a:ext cx="4937760" cy="4114800"/>
-          </a:xfrm>
-          <a:prstGeom prst="rect">
-            <a:avLst/>
-          </a:prstGeom>
-          <a:noFill/>
-        </p:spPr>
-        <p:txBody>
-          <a:bodyPr wrap="square">
-            <a:spAutoFit/>
-          </a:bodyPr>
-          <a:lstStyle/>
-          <a:p>
-            <a:pPr>
-              <a:spcAft>
-                <a:spcPts val="1200"/>
-              </a:spcAft>
-              <a:defRPr sz="2300" b="1">
-                <a:solidFill>
-                  <a:srgbClr val="38BDF8"/>
-                </a:solidFill>
-                <a:latin typeface="Inter"/>
-              </a:defRPr>
-            </a:pPr>
-            <a:r>
-              <a:t>🏛️ 3 Blloqet Kryesore të Arkitekturës</a:t>
-            </a:r>
-          </a:p>
-          <a:p>
-            <a:pPr>
-              <a:spcAft>
-                <a:spcPts val="1000"/>
-              </a:spcAft>
-              <a:defRPr sz="1700">
-                <a:solidFill>
-                  <a:srgbClr val="E2E8F0"/>
-                </a:solidFill>
-                <a:latin typeface="Inter"/>
-              </a:defRPr>
-            </a:pPr>
-            <a:r>
-              <a:t>• 1. Klienti Mobile (PWA): Ndërtuar me Next.js 15 dhe Tailwind CSS. Butona me sipërfaqe prekjeje 48px. Service Worker për shpejtësi dhe mbështetje offline.</a:t>
-            </a:r>
-          </a:p>
-          <a:p>
-            <a:pPr>
-              <a:spcAft>
-                <a:spcPts val="1000"/>
-              </a:spcAft>
-              <a:defRPr sz="1700">
-                <a:solidFill>
-                  <a:srgbClr val="E2E8F0"/>
-                </a:solidFill>
-                <a:latin typeface="Inter"/>
-              </a:defRPr>
-            </a:pPr>
-            <a:r>
-              <a:t>• 2. Baza &amp; Siguria (Supabase): Tabela relacionale 'rides' (shoferi, nisja, ora, vendet) dhe 'bookings'. Realtime engine që zbret vendet e lira menjëherë pa rifreskuar faqen.</a:t>
-            </a:r>
-          </a:p>
-          <a:p>
-            <a:pPr>
-              <a:spcAft>
-                <a:spcPts val="1000"/>
-              </a:spcAft>
-              <a:defRPr sz="1700">
-                <a:solidFill>
-                  <a:srgbClr val="E2E8F0"/>
-                </a:solidFill>
-                <a:latin typeface="Inter"/>
-              </a:defRPr>
-            </a:pPr>
-            <a:r>
-              <a:t>• 3. Lidhja e Jashtme (WhatsApp): Deep link 'wa.me' që lidh shoferin dhe pasagjerin për pikën e takimit.</a:t>
-            </a:r>
-          </a:p>
-          <a:p>
-            <a:pPr>
-              <a:spcAft>
-                <a:spcPts val="1000"/>
-              </a:spcAft>
-              <a:defRPr sz="1700">
-                <a:solidFill>
-                  <a:srgbClr val="E2E8F0"/>
-                </a:solidFill>
-                <a:latin typeface="Inter"/>
-              </a:defRPr>
-            </a:pPr>
-            <a:r>
-              <a:t>• Pse Kjo Arkitekturë? Ndërtim modular: PWA bën menaxhimin e të dhënave, Supabase garanton besueshmërinë, WhatsApp koordinimin live!</a:t>
-            </a:r>
-          </a:p>
-        </p:txBody>
-      </p:sp>
     </p:spTree>
   </p:cSld>
   <p:clrMapOvr>
@@ -11579,8 +11135,8 @@
         </p:nvSpPr>
         <p:spPr>
           <a:xfrm>
-            <a:off x="731520" y="1965960"/>
-            <a:ext cx="5303520" cy="4480560"/>
+            <a:off x="731520" y="1874519"/>
+            <a:ext cx="10728655" cy="4663440"/>
           </a:xfrm>
           <a:prstGeom prst="roundRect">
             <a:avLst/>
@@ -11618,7 +11174,7 @@
       </p:sp>
       <p:pic>
         <p:nvPicPr>
-          <p:cNvPr id="7" name="Picture 6" descr="slide6_sketch_vijueshmeria_ndertimi.png"/>
+          <p:cNvPr id="7" name="Picture 6" descr="slide6_sketch_roadmap_master.png"/>
           <p:cNvPicPr>
             <a:picLocks noChangeAspect="1"/>
           </p:cNvPicPr>
@@ -11632,178 +11188,14 @@
         </p:blipFill>
         <p:spPr>
           <a:xfrm>
-            <a:off x="777240" y="2011680"/>
-            <a:ext cx="5212080" cy="4389120"/>
+            <a:off x="777240" y="1920240"/>
+            <a:ext cx="10637215" cy="4572000"/>
           </a:xfrm>
           <a:prstGeom prst="rect">
             <a:avLst/>
           </a:prstGeom>
         </p:spPr>
       </p:pic>
-      <p:sp>
-        <p:nvSpPr>
-          <p:cNvPr id="8" name="Rounded Rectangle 7"/>
-          <p:cNvSpPr/>
-          <p:nvPr/>
-        </p:nvSpPr>
-        <p:spPr>
-          <a:xfrm>
-            <a:off x="6217920" y="1965960"/>
-            <a:ext cx="5303520" cy="4480560"/>
-          </a:xfrm>
-          <a:prstGeom prst="roundRect">
-            <a:avLst/>
-          </a:prstGeom>
-          <a:solidFill>
-            <a:srgbClr val="141E34"/>
-          </a:solidFill>
-          <a:ln w="31750">
-            <a:solidFill>
-              <a:srgbClr val="F59E0B"/>
-            </a:solidFill>
-          </a:ln>
-        </p:spPr>
-        <p:style>
-          <a:lnRef idx="1">
-            <a:schemeClr val="accent1"/>
-          </a:lnRef>
-          <a:fillRef idx="3">
-            <a:schemeClr val="accent1"/>
-          </a:fillRef>
-          <a:effectRef idx="2">
-            <a:schemeClr val="accent1"/>
-          </a:effectRef>
-          <a:fontRef idx="minor">
-            <a:schemeClr val="lt1"/>
-          </a:fontRef>
-        </p:style>
-        <p:txBody>
-          <a:bodyPr rtlCol="0" anchor="ctr"/>
-          <a:lstStyle/>
-          <a:p>
-            <a:pPr algn="ctr"/>
-          </a:p>
-        </p:txBody>
-      </p:sp>
-      <p:sp>
-        <p:nvSpPr>
-          <p:cNvPr id="9" name="TextBox 8"/>
-          <p:cNvSpPr txBox="1"/>
-          <p:nvPr/>
-        </p:nvSpPr>
-        <p:spPr>
-          <a:xfrm>
-            <a:off x="6400800" y="2148840"/>
-            <a:ext cx="4937760" cy="4114800"/>
-          </a:xfrm>
-          <a:prstGeom prst="rect">
-            <a:avLst/>
-          </a:prstGeom>
-          <a:noFill/>
-        </p:spPr>
-        <p:txBody>
-          <a:bodyPr wrap="square">
-            <a:spAutoFit/>
-          </a:bodyPr>
-          <a:lstStyle/>
-          <a:p>
-            <a:pPr>
-              <a:spcAft>
-                <a:spcPts val="1200"/>
-              </a:spcAft>
-              <a:defRPr sz="2300" b="1">
-                <a:solidFill>
-                  <a:srgbClr val="F59E0B"/>
-                </a:solidFill>
-                <a:latin typeface="Inter"/>
-              </a:defRPr>
-            </a:pPr>
-            <a:r>
-              <a:t>⏳ 'Pastaj Më Vonë Hyjmë në Ndërtim Real!'</a:t>
-            </a:r>
-          </a:p>
-          <a:p>
-            <a:pPr>
-              <a:spcAft>
-                <a:spcPts val="1000"/>
-              </a:spcAft>
-              <a:defRPr sz="1700">
-                <a:solidFill>
-                  <a:srgbClr val="E2E8F0"/>
-                </a:solidFill>
-                <a:latin typeface="Inter"/>
-              </a:defRPr>
-            </a:pPr>
-            <a:r>
-              <a:t>• Javët 1–2 (Ideja &amp; Letra): Vëzhgimi i problemit, zgjedhja e biznesit, specifikat e qarta dhe skicimi me dorë i ekraneve pa shkruar asnjë rresht kod.</a:t>
-            </a:r>
-          </a:p>
-          <a:p>
-            <a:pPr>
-              <a:spcAft>
-                <a:spcPts val="1000"/>
-              </a:spcAft>
-              <a:defRPr sz="1700">
-                <a:solidFill>
-                  <a:srgbClr val="E2E8F0"/>
-                </a:solidFill>
-                <a:latin typeface="Inter"/>
-              </a:defRPr>
-            </a:pPr>
-            <a:r>
-              <a:t>• Javët 3–5 (Dizajni i UI me Tailwind): Kthimi i skicës në faqe mobile me Tailwind CSS dhe ndihmën e GitHub Copilot.</a:t>
-            </a:r>
-          </a:p>
-          <a:p>
-            <a:pPr>
-              <a:spcAft>
-                <a:spcPts val="1000"/>
-              </a:spcAft>
-              <a:defRPr sz="1700">
-                <a:solidFill>
-                  <a:srgbClr val="E2E8F0"/>
-                </a:solidFill>
-                <a:latin typeface="Inter"/>
-              </a:defRPr>
-            </a:pPr>
-            <a:r>
-              <a:t>• Javët 6–9 (Databaza &amp; Auth): Lidhja e Supabase, krijimi i tabelave dhe sistemi i rezervimit me siguri AAB.</a:t>
-            </a:r>
-          </a:p>
-          <a:p>
-            <a:pPr>
-              <a:spcAft>
-                <a:spcPts val="1000"/>
-              </a:spcAft>
-              <a:defRPr sz="1700">
-                <a:solidFill>
-                  <a:srgbClr val="E2E8F0"/>
-                </a:solidFill>
-                <a:latin typeface="Inter"/>
-              </a:defRPr>
-            </a:pPr>
-            <a:r>
-              <a:t>• Javët 10–12 (PWA &amp; Offline): Instalimi në ekran të telefonit, manifest.json dhe sinkronizimi live.</a:t>
-            </a:r>
-          </a:p>
-          <a:p>
-            <a:pPr>
-              <a:spcAft>
-                <a:spcPts val="1000"/>
-              </a:spcAft>
-              <a:defRPr sz="1700">
-                <a:solidFill>
-                  <a:srgbClr val="E2E8F0"/>
-                </a:solidFill>
-                <a:latin typeface="Inter"/>
-              </a:defRPr>
-            </a:pPr>
-            <a:r>
-              <a:t>• Java 15 (Demo Day &amp; Suksesi): Prezantimi live nga telefoni juaj personal para komisionit dhe sallës!</a:t>
-            </a:r>
-          </a:p>
-        </p:txBody>
-      </p:sp>
     </p:spTree>
   </p:cSld>
   <p:clrMapOvr>

--- a/Jave1_Hyrje_Nextjs_PWA_Copilot_2026.pptx
+++ b/Jave1_Hyrje_Nextjs_PWA_Copilot_2026.pptx
@@ -8948,7 +8948,7 @@
       </p:sp>
       <p:pic>
         <p:nvPicPr>
-          <p:cNvPr id="7" name="Picture 6" descr="aab_rideshare_grand_architecture_sketch.png"/>
+          <p:cNvPr id="7" name="Picture 6" descr="aab_rideshare_sketch_dream.png"/>
           <p:cNvPicPr>
             <a:picLocks noChangeAspect="1"/>
           </p:cNvPicPr>

--- a/Jave1_Hyrje_Nextjs_PWA_Copilot_2026.pptx
+++ b/Jave1_Hyrje_Nextjs_PWA_Copilot_2026.pptx
@@ -3226,8 +3226,8 @@
         </p:nvSpPr>
         <p:spPr>
           <a:xfrm>
-            <a:off x="731520" y="1737360"/>
-            <a:ext cx="7132320" cy="4389120"/>
+            <a:off x="731520" y="1645920"/>
+            <a:ext cx="7132320" cy="4572000"/>
           </a:xfrm>
           <a:prstGeom prst="rect">
             <a:avLst/>
@@ -3242,9 +3242,9 @@
           <a:p>
             <a:pPr>
               <a:spcAft>
-                <a:spcPts val="1400"/>
+                <a:spcPts val="1000"/>
               </a:spcAft>
-              <a:defRPr sz="1600" b="1">
+              <a:defRPr sz="1500" b="1">
                 <a:solidFill>
                   <a:srgbClr val="38BDF8"/>
                 </a:solidFill>
@@ -3253,6 +3253,26 @@
             </a:pPr>
             <a:r>
               <a:t>KOLEGJI AAB • SHKENCA KOMPJUTERIKE • 2026/2027</a:t>
+            </a:r>
+          </a:p>
+          <a:p>
+            <a:pPr>
+              <a:spcAft>
+                <a:spcPts val="1200"/>
+              </a:spcAft>
+              <a:defRPr sz="4400" b="1">
+                <a:solidFill>
+                  <a:srgbClr val="FFFFFF"/>
+                </a:solidFill>
+                <a:latin typeface="Inter"/>
+              </a:defRPr>
+            </a:pPr>
+            <a:r>
+              <a:t>Programimi për</a:t>
+            </a:r>
+            <a:br/>
+            <a:r>
+              <a:t>Pajisje Mobile</a:t>
             </a:r>
           </a:p>
           <a:p>
@@ -3260,52 +3280,48 @@
               <a:spcAft>
                 <a:spcPts val="1400"/>
               </a:spcAft>
-              <a:defRPr sz="4600" b="1">
-                <a:solidFill>
-                  <a:srgbClr val="FFFFFF"/>
-                </a:solidFill>
-                <a:latin typeface="Inter"/>
-              </a:defRPr>
-            </a:pPr>
-            <a:r>
-              <a:t>Programimi për</a:t>
+              <a:defRPr sz="2000" b="1">
+                <a:solidFill>
+                  <a:srgbClr val="10B981"/>
+                </a:solidFill>
+                <a:latin typeface="Inter"/>
+              </a:defRPr>
+            </a:pPr>
+            <a:r>
+              <a:t>The Founder's Expedition: Nga Ideja te Specifikat &amp; Mobile PWA me AI</a:t>
+            </a:r>
+          </a:p>
+          <a:p>
+            <a:pPr>
+              <a:spcAft>
+                <a:spcPts val="1400"/>
+              </a:spcAft>
+              <a:defRPr sz="1800">
+                <a:solidFill>
+                  <a:srgbClr val="E2E8F0"/>
+                </a:solidFill>
+                <a:latin typeface="Inter"/>
+              </a:defRPr>
+            </a:pPr>
+            <a:r>
+              <a:t>Prof. Asoc. PhD. C. Arben Lila</a:t>
             </a:r>
             <a:br/>
             <a:r>
-              <a:t>Pajisje Mobile</a:t>
-            </a:r>
-          </a:p>
-          <a:p>
-            <a:pPr>
-              <a:spcAft>
-                <a:spcPts val="2400"/>
-              </a:spcAft>
-              <a:defRPr sz="2200" b="1">
-                <a:solidFill>
-                  <a:srgbClr val="10B981"/>
-                </a:solidFill>
-                <a:latin typeface="Inter"/>
-              </a:defRPr>
-            </a:pPr>
-            <a:r>
-              <a:t>The Founder's Expedition: Nga Ideja te Specifikat &amp; Mobile PWA me AI</a:t>
-            </a:r>
-          </a:p>
-          <a:p>
-            <a:pPr>
-              <a:defRPr sz="2000">
-                <a:solidFill>
-                  <a:srgbClr val="E2E8F0"/>
-                </a:solidFill>
-                <a:latin typeface="Inter"/>
-              </a:defRPr>
-            </a:pPr>
-            <a:r>
-              <a:t>Prof. Asoc. PhD. C. Arben Lila</a:t>
-            </a:r>
-            <a:br/>
-            <a:r>
               <a:t>Semestri V • 6 ECTS • 2h Ligjëratë + 2h Ushtrime</a:t>
+            </a:r>
+          </a:p>
+          <a:p>
+            <a:pPr>
+              <a:defRPr sz="1400">
+                <a:solidFill>
+                  <a:srgbClr val="B4C3D7"/>
+                </a:solidFill>
+                <a:latin typeface="Inter"/>
+              </a:defRPr>
+            </a:pPr>
+            <a:r>
+              <a:t>Premtimi i Kursit: Në fund të semestrit, ju projektoni, ndërtoni dhe argumentoni një Mobile PWA që zgjidh një problem të vërtetë, menaxhon të dhënat me siguri dhe sillet me stabilitet kur rrjeti dështon.</a:t>
             </a:r>
           </a:p>
         </p:txBody>
@@ -3319,7 +3335,7 @@
         <p:spPr>
           <a:xfrm>
             <a:off x="8138160" y="1097280"/>
-            <a:ext cx="3291840" cy="5029200"/>
+            <a:ext cx="3291840" cy="5120640"/>
           </a:xfrm>
           <a:prstGeom prst="roundRect">
             <a:avLst/>
@@ -3371,7 +3387,7 @@
         </p:blipFill>
         <p:spPr>
           <a:xfrm>
-            <a:off x="8503920" y="1463040"/>
+            <a:off x="8503920" y="1371600"/>
             <a:ext cx="2560320" cy="2560320"/>
           </a:xfrm>
           <a:prstGeom prst="rect">
@@ -3387,8 +3403,8 @@
         </p:nvSpPr>
         <p:spPr>
           <a:xfrm>
-            <a:off x="8321040" y="4206240"/>
-            <a:ext cx="2926080" cy="1645920"/>
+            <a:off x="8229600" y="4023360"/>
+            <a:ext cx="3108960" cy="2011680"/>
           </a:xfrm>
           <a:prstGeom prst="rect">
             <a:avLst/>
@@ -3402,7 +3418,7 @@
           <a:lstStyle/>
           <a:p>
             <a:pPr algn="ctr">
-              <a:defRPr sz="2000" b="1">
+              <a:defRPr sz="1800" b="1">
                 <a:solidFill>
                   <a:srgbClr val="38BDF8"/>
                 </a:solidFill>
@@ -3415,7 +3431,10 @@
           </a:p>
           <a:p>
             <a:pPr algn="ctr">
-              <a:defRPr sz="1800">
+              <a:spcAft>
+                <a:spcPts val="800"/>
+              </a:spcAft>
+              <a:defRPr sz="1600">
                 <a:solidFill>
                   <a:srgbClr val="FFFFFF"/>
                 </a:solidFill>
@@ -3428,6 +3447,19 @@
             <a:br/>
             <a:r>
               <a:t>arbenl.github.io</a:t>
+            </a:r>
+          </a:p>
+          <a:p>
+            <a:pPr algn="ctr">
+              <a:defRPr sz="1300">
+                <a:solidFill>
+                  <a:srgbClr val="B4C3D7"/>
+                </a:solidFill>
+                <a:latin typeface="Inter"/>
+              </a:defRPr>
+            </a:pPr>
+            <a:r>
+              <a:t>Materialet, Silabusi, Shabllonet dhe Check-in Live</a:t>
             </a:r>
           </a:p>
         </p:txBody>
@@ -3516,7 +3548,7 @@
           <a:lstStyle/>
           <a:p>
             <a:pPr>
-              <a:defRPr sz="1500" b="1">
+              <a:defRPr sz="1400" b="1">
                 <a:solidFill>
                   <a:srgbClr val="38BDF8"/>
                 </a:solidFill>
@@ -3524,7 +3556,7 @@
               </a:defRPr>
             </a:pPr>
             <a:r>
-              <a:t>KRAHASIMI TEKNIK</a:t>
+              <a:t>PLATFORMA MOBILE</a:t>
             </a:r>
           </a:p>
         </p:txBody>
@@ -3537,7 +3569,7 @@
         </p:nvSpPr>
         <p:spPr>
           <a:xfrm>
-            <a:off x="731520" y="685800"/>
+            <a:off x="731520" y="658368"/>
             <a:ext cx="10698480" cy="777240"/>
           </a:xfrm>
           <a:prstGeom prst="rect">
@@ -3552,7 +3584,7 @@
           <a:lstStyle/>
           <a:p>
             <a:pPr>
-              <a:defRPr sz="3600" b="1">
+              <a:defRPr sz="3400" b="1">
                 <a:solidFill>
                   <a:srgbClr val="FFFFFF"/>
                 </a:solidFill>
@@ -3560,7 +3592,7 @@
               </a:defRPr>
             </a:pPr>
             <a:r>
-              <a:t>PWA vs Zhvillimi Tradicional Native</a:t>
+              <a:t>Pse Progressive Web Apps (PWA) për Studentë dhe Startup-e?</a:t>
             </a:r>
           </a:p>
         </p:txBody>
@@ -3573,7 +3605,7 @@
         </p:nvSpPr>
         <p:spPr>
           <a:xfrm>
-            <a:off x="731520" y="1444752"/>
+            <a:off x="731520" y="1417320"/>
             <a:ext cx="10698480" cy="502920"/>
           </a:xfrm>
           <a:prstGeom prst="rect">
@@ -3588,7 +3620,7 @@
           <a:lstStyle/>
           <a:p>
             <a:pPr>
-              <a:defRPr sz="2100">
+              <a:defRPr sz="1900">
                 <a:solidFill>
                   <a:srgbClr val="E2E8F0"/>
                 </a:solidFill>
@@ -3596,7 +3628,7 @@
               </a:defRPr>
             </a:pPr>
             <a:r>
-              <a:t>Pse teknologjia PWA është zgjedhja ideale për tregun e Kosovës dhe projektet studentore.</a:t>
+              <a:t>Krahasimi real: Zhvillimi i shpejtë dhe pa fërkime përballë dyqaneve tradicionale të aplikacioneve.</a:t>
             </a:r>
           </a:p>
         </p:txBody>
@@ -3609,8 +3641,156 @@
         </p:nvSpPr>
         <p:spPr>
           <a:xfrm>
-            <a:off x="731520" y="2011680"/>
-            <a:ext cx="10698480" cy="4389120"/>
+            <a:off x="731520" y="1920240"/>
+            <a:ext cx="5166360" cy="4480560"/>
+          </a:xfrm>
+          <a:prstGeom prst="roundRect">
+            <a:avLst/>
+          </a:prstGeom>
+          <a:solidFill>
+            <a:srgbClr val="141E34"/>
+          </a:solidFill>
+          <a:ln w="19050">
+            <a:solidFill>
+              <a:srgbClr val="EF4444"/>
+            </a:solidFill>
+          </a:ln>
+        </p:spPr>
+        <p:style>
+          <a:lnRef idx="1">
+            <a:schemeClr val="accent1"/>
+          </a:lnRef>
+          <a:fillRef idx="3">
+            <a:schemeClr val="accent1"/>
+          </a:fillRef>
+          <a:effectRef idx="2">
+            <a:schemeClr val="accent1"/>
+          </a:effectRef>
+          <a:fontRef idx="minor">
+            <a:schemeClr val="lt1"/>
+          </a:fontRef>
+        </p:style>
+        <p:txBody>
+          <a:bodyPr rtlCol="0" anchor="ctr"/>
+          <a:lstStyle/>
+          <a:p>
+            <a:pPr algn="ctr"/>
+          </a:p>
+        </p:txBody>
+      </p:sp>
+      <p:sp>
+        <p:nvSpPr>
+          <p:cNvPr id="7" name="TextBox 6"/>
+          <p:cNvSpPr txBox="1"/>
+          <p:nvPr/>
+        </p:nvSpPr>
+        <p:spPr>
+          <a:xfrm>
+            <a:off x="914400" y="2103120"/>
+            <a:ext cx="4800600" cy="4114800"/>
+          </a:xfrm>
+          <a:prstGeom prst="rect">
+            <a:avLst/>
+          </a:prstGeom>
+          <a:noFill/>
+        </p:spPr>
+        <p:txBody>
+          <a:bodyPr wrap="square">
+            <a:spAutoFit/>
+          </a:bodyPr>
+          <a:lstStyle/>
+          <a:p>
+            <a:pPr>
+              <a:spcAft>
+                <a:spcPts val="1400"/>
+              </a:spcAft>
+              <a:defRPr sz="1800" b="1">
+                <a:solidFill>
+                  <a:srgbClr val="EF4444"/>
+                </a:solidFill>
+                <a:latin typeface="Inter"/>
+              </a:defRPr>
+            </a:pPr>
+            <a:r>
+              <a:t>ZHVILLIMI NATIVE TRADICIONAL</a:t>
+            </a:r>
+          </a:p>
+          <a:p>
+            <a:pPr>
+              <a:spcAft>
+                <a:spcPts val="800"/>
+              </a:spcAft>
+              <a:defRPr sz="1400">
+                <a:solidFill>
+                  <a:srgbClr val="E2E8F0"/>
+                </a:solidFill>
+                <a:latin typeface="Inter"/>
+              </a:defRPr>
+            </a:pPr>
+            <a:r>
+              <a:t>• Pagesë 99$/vit Apple Developer Program.</a:t>
+            </a:r>
+          </a:p>
+          <a:p>
+            <a:pPr>
+              <a:spcAft>
+                <a:spcPts val="800"/>
+              </a:spcAft>
+              <a:defRPr sz="1400">
+                <a:solidFill>
+                  <a:srgbClr val="E2E8F0"/>
+                </a:solidFill>
+                <a:latin typeface="Inter"/>
+              </a:defRPr>
+            </a:pPr>
+            <a:r>
+              <a:t>• 2 javë pritje për rishikim dhe miratim në App Store.</a:t>
+            </a:r>
+          </a:p>
+          <a:p>
+            <a:pPr>
+              <a:spcAft>
+                <a:spcPts val="800"/>
+              </a:spcAft>
+              <a:defRPr sz="1400">
+                <a:solidFill>
+                  <a:srgbClr val="E2E8F0"/>
+                </a:solidFill>
+                <a:latin typeface="Inter"/>
+              </a:defRPr>
+            </a:pPr>
+            <a:r>
+              <a:t>• Baza të dyfishta kodi: Swift (iOS) dhe Kotlin (Android).</a:t>
+            </a:r>
+          </a:p>
+          <a:p>
+            <a:pPr>
+              <a:spcAft>
+                <a:spcPts val="800"/>
+              </a:spcAft>
+              <a:defRPr sz="1400">
+                <a:solidFill>
+                  <a:srgbClr val="E2E8F0"/>
+                </a:solidFill>
+                <a:latin typeface="Inter"/>
+              </a:defRPr>
+            </a:pPr>
+            <a:r>
+              <a:t>• Përditësimet kërkojnë shkarkim nga përdoruesi.</a:t>
+            </a:r>
+          </a:p>
+        </p:txBody>
+      </p:sp>
+      <p:sp>
+        <p:nvSpPr>
+          <p:cNvPr id="8" name="Rounded Rectangle 7"/>
+          <p:cNvSpPr/>
+          <p:nvPr/>
+        </p:nvSpPr>
+        <p:spPr>
+          <a:xfrm>
+            <a:off x="6291072" y="1920240"/>
+            <a:ext cx="5166360" cy="4480560"/>
           </a:xfrm>
           <a:prstGeom prst="roundRect">
             <a:avLst/>
@@ -3620,7 +3800,7 @@
           </a:solidFill>
           <a:ln w="25400">
             <a:solidFill>
-              <a:srgbClr val="2E4066"/>
+              <a:srgbClr val="10B981"/>
             </a:solidFill>
           </a:ln>
         </p:spPr>
@@ -3648,14 +3828,14 @@
       </p:sp>
       <p:sp>
         <p:nvSpPr>
-          <p:cNvPr id="7" name="TextBox 6"/>
+          <p:cNvPr id="9" name="TextBox 8"/>
           <p:cNvSpPr txBox="1"/>
           <p:nvPr/>
         </p:nvSpPr>
         <p:spPr>
           <a:xfrm>
-            <a:off x="914400" y="2148840"/>
-            <a:ext cx="10332720" cy="4114800"/>
+            <a:off x="6473952" y="2103120"/>
+            <a:ext cx="4800600" cy="4114800"/>
           </a:xfrm>
           <a:prstGeom prst="rect">
             <a:avLst/>
@@ -3670,17 +3850,17 @@
           <a:p>
             <a:pPr>
               <a:spcAft>
-                <a:spcPts val="800"/>
+                <a:spcPts val="1400"/>
               </a:spcAft>
-              <a:defRPr sz="1600" b="1">
-                <a:solidFill>
-                  <a:srgbClr val="38BDF8"/>
-                </a:solidFill>
-                <a:latin typeface="Monaco"/>
-              </a:defRPr>
-            </a:pPr>
-            <a:r>
-              <a:t>Kriteri Teknik             | Zhvillimi Tradicional (Native)                   | Next.js 15 PWA (Qasja Jonë)</a:t>
+              <a:defRPr sz="1800" b="1">
+                <a:solidFill>
+                  <a:srgbClr val="10B981"/>
+                </a:solidFill>
+                <a:latin typeface="Inter"/>
+              </a:defRPr>
+            </a:pPr>
+            <a:r>
+              <a:t>PROGRESSIVE WEB APP (NEXT.JS 15)</a:t>
             </a:r>
           </a:p>
           <a:p>
@@ -3688,15 +3868,15 @@
               <a:spcAft>
                 <a:spcPts val="800"/>
               </a:spcAft>
-              <a:defRPr sz="1500" b="0">
+              <a:defRPr sz="1400">
                 <a:solidFill>
                   <a:srgbClr val="FFFFFF"/>
                 </a:solidFill>
-                <a:latin typeface="Monaco"/>
-              </a:defRPr>
-            </a:pPr>
-            <a:r>
-              <a:t>Gjuhët e Programimit       | Swift (iOS) + Kotlin (Android) — Dy kode të ndryshme | TypeScript + React — Një kod i vetëm për të gjitha</a:t>
+                <a:latin typeface="Inter"/>
+              </a:defRPr>
+            </a:pPr>
+            <a:r>
+              <a:t>✓ 0$ kosto: publikohet menjëherë në internet me domain personal.</a:t>
             </a:r>
           </a:p>
           <a:p>
@@ -3704,15 +3884,15 @@
               <a:spcAft>
                 <a:spcPts val="800"/>
               </a:spcAft>
-              <a:defRPr sz="1500" b="0">
-                <a:solidFill>
-                  <a:srgbClr val="E2E8F0"/>
-                </a:solidFill>
-                <a:latin typeface="Monaco"/>
-              </a:defRPr>
-            </a:pPr>
-            <a:r>
-              <a:t>Kosto e Shpërndarjes       | 99$/vit për Apple + 25$ Google Play              | 0€ — Publikim i menjëhershëm me Vercel / GitHub</a:t>
+              <a:defRPr sz="1400">
+                <a:solidFill>
+                  <a:srgbClr val="FFFFFF"/>
+                </a:solidFill>
+                <a:latin typeface="Inter"/>
+              </a:defRPr>
+            </a:pPr>
+            <a:r>
+              <a:t>✓ 0 sekonda vonesë: përditësimet shkojnë live menjëherë me git push.</a:t>
             </a:r>
           </a:p>
           <a:p>
@@ -3720,15 +3900,15 @@
               <a:spcAft>
                 <a:spcPts val="800"/>
               </a:spcAft>
-              <a:defRPr sz="1500" b="0">
+              <a:defRPr sz="1400">
                 <a:solidFill>
                   <a:srgbClr val="FFFFFF"/>
                 </a:solidFill>
-                <a:latin typeface="Monaco"/>
-              </a:defRPr>
-            </a:pPr>
-            <a:r>
-              <a:t>Aprovimi i Aplikacionit    | Pritje 3–7 ditë nga Apple për çdo përditësim kodi | I menjëhershëm (Instant) me çdo git push</a:t>
+                <a:latin typeface="Inter"/>
+              </a:defRPr>
+            </a:pPr>
+            <a:r>
+              <a:t>✓ 1 bazë kodi e vetme: punon njëlloj në iPhone, Android dhe Laptop.</a:t>
             </a:r>
           </a:p>
           <a:p>
@@ -3736,47 +3916,15 @@
               <a:spcAft>
                 <a:spcPts val="800"/>
               </a:spcAft>
-              <a:defRPr sz="1500" b="0">
-                <a:solidFill>
-                  <a:srgbClr val="E2E8F0"/>
-                </a:solidFill>
-                <a:latin typeface="Monaco"/>
-              </a:defRPr>
-            </a:pPr>
-            <a:r>
-              <a:t>Madhësia e Aplikacionit    | 100MB — 250MB (Pengesë për shkarkim nga studenti) | &lt; 2MB (Hapet me 1 klikim pa zënë memorien)</a:t>
-            </a:r>
-          </a:p>
-          <a:p>
-            <a:pPr>
-              <a:spcAft>
-                <a:spcPts val="800"/>
-              </a:spcAft>
-              <a:defRPr sz="1500" b="0">
+              <a:defRPr sz="1400">
                 <a:solidFill>
                   <a:srgbClr val="FFFFFF"/>
                 </a:solidFill>
-                <a:latin typeface="Monaco"/>
-              </a:defRPr>
-            </a:pPr>
-            <a:r>
-              <a:t>Funksionimi Offline        | I mundur por kërkon arkitekturë të rëndë lokale  | I integruar me Cache API &amp; Service Workers</a:t>
-            </a:r>
-          </a:p>
-          <a:p>
-            <a:pPr>
-              <a:spcAft>
-                <a:spcPts val="800"/>
-              </a:spcAft>
-              <a:defRPr sz="1500" b="0">
-                <a:solidFill>
-                  <a:srgbClr val="E2E8F0"/>
-                </a:solidFill>
-                <a:latin typeface="Monaco"/>
-              </a:defRPr>
-            </a:pPr>
-            <a:r>
-              <a:t>E Përshtatshme për Ne      | E papërballueshme për shumicën e ideve fillestare | Zgjidhja ideale me kosto zero dhe efikasitet maksimal</a:t>
+                <a:latin typeface="Inter"/>
+              </a:defRPr>
+            </a:pPr>
+            <a:r>
+              <a:t>✓ Instalim me 1-klik në Home Screen + mbështetje offline dhe push.</a:t>
             </a:r>
           </a:p>
         </p:txBody>
@@ -3865,7 +4013,7 @@
           <a:lstStyle/>
           <a:p>
             <a:pPr>
-              <a:defRPr sz="1500" b="1">
+              <a:defRPr sz="1400" b="1">
                 <a:solidFill>
                   <a:srgbClr val="38BDF8"/>
                 </a:solidFill>
@@ -3873,7 +4021,7 @@
               </a:defRPr>
             </a:pPr>
             <a:r>
-              <a:t>EKOSISTEMI I ZHVILLIMIT</a:t>
+              <a:t>STAKU TEKNOLOGJIK 2026</a:t>
             </a:r>
           </a:p>
         </p:txBody>
@@ -3886,7 +4034,7 @@
         </p:nvSpPr>
         <p:spPr>
           <a:xfrm>
-            <a:off x="731520" y="685800"/>
+            <a:off x="731520" y="658368"/>
             <a:ext cx="10698480" cy="777240"/>
           </a:xfrm>
           <a:prstGeom prst="rect">
@@ -3901,7 +4049,7 @@
           <a:lstStyle/>
           <a:p>
             <a:pPr>
-              <a:defRPr sz="3600" b="1">
+              <a:defRPr sz="3400" b="1">
                 <a:solidFill>
                   <a:srgbClr val="FFFFFF"/>
                 </a:solidFill>
@@ -3909,7 +4057,7 @@
               </a:defRPr>
             </a:pPr>
             <a:r>
-              <a:t>Staku Teknologjik: Mjetet Profesionale të Kursit</a:t>
+              <a:t>Staku i Plotë: Next.js 15, Tailwind, Supabase, Vercel</a:t>
             </a:r>
           </a:p>
         </p:txBody>
@@ -3922,7 +4070,7 @@
         </p:nvSpPr>
         <p:spPr>
           <a:xfrm>
-            <a:off x="731520" y="1444752"/>
+            <a:off x="731520" y="1417320"/>
             <a:ext cx="10698480" cy="502920"/>
           </a:xfrm>
           <a:prstGeom prst="rect">
@@ -3937,7 +4085,7 @@
           <a:lstStyle/>
           <a:p>
             <a:pPr>
-              <a:defRPr sz="2100">
+              <a:defRPr sz="1900">
                 <a:solidFill>
                   <a:srgbClr val="E2E8F0"/>
                 </a:solidFill>
@@ -3945,7 +4093,7 @@
               </a:defRPr>
             </a:pPr>
             <a:r>
-              <a:t>Katër shtyllat teknologjike që do të zotëroni gjatë 15 javëve të semestrit.</a:t>
+              <a:t>Ekosistemi më modern dhe i kërkuar sot në industrinë globale të softuerit.</a:t>
             </a:r>
           </a:p>
         </p:txBody>
@@ -3958,7 +4106,7 @@
         </p:nvSpPr>
         <p:spPr>
           <a:xfrm>
-            <a:off x="731520" y="2011680"/>
+            <a:off x="731520" y="1920240"/>
             <a:ext cx="2514600" cy="4389120"/>
           </a:xfrm>
           <a:prstGeom prst="roundRect">
@@ -3967,9 +4115,9 @@
           <a:solidFill>
             <a:srgbClr val="141E34"/>
           </a:solidFill>
-          <a:ln w="31750">
+          <a:ln w="25400">
             <a:solidFill>
-              <a:srgbClr val="6366F1"/>
+              <a:srgbClr val="38BDF8"/>
             </a:solidFill>
           </a:ln>
         </p:spPr>
@@ -4003,7 +4151,7 @@
         </p:nvSpPr>
         <p:spPr>
           <a:xfrm>
-            <a:off x="868680" y="2194560"/>
+            <a:off x="868680" y="2103120"/>
             <a:ext cx="2240280" cy="4023360"/>
           </a:xfrm>
           <a:prstGeom prst="rect">
@@ -4018,95 +4166,44 @@
           <a:lstStyle/>
           <a:p>
             <a:pPr>
-              <a:defRPr sz="2200" b="1">
-                <a:solidFill>
-                  <a:srgbClr val="FFFFFF"/>
-                </a:solidFill>
-                <a:latin typeface="Inter"/>
-              </a:defRPr>
-            </a:pPr>
-            <a:r>
-              <a:t>⚡ Next.js 15</a:t>
+              <a:defRPr sz="1600" b="1">
+                <a:solidFill>
+                  <a:srgbClr val="38BDF8"/>
+                </a:solidFill>
+                <a:latin typeface="Inter"/>
+              </a:defRPr>
+            </a:pPr>
+            <a:r>
+              <a:t>Next.js 15 + React 19</a:t>
             </a:r>
           </a:p>
           <a:p>
             <a:pPr>
               <a:spcAft>
-                <a:spcPts val="1400"/>
+                <a:spcPts val="1200"/>
               </a:spcAft>
+              <a:defRPr sz="1200">
+                <a:solidFill>
+                  <a:srgbClr val="B4C3D7"/>
+                </a:solidFill>
+                <a:latin typeface="Inter"/>
+              </a:defRPr>
+            </a:pPr>
+            <a:r>
+              <a:t>Frontend &amp; Server Engine</a:t>
+            </a:r>
+          </a:p>
+          <a:p>
+            <a:pPr>
               <a:defRPr sz="1400">
                 <a:solidFill>
-                  <a:srgbClr val="6366F1"/>
-                </a:solidFill>
-                <a:latin typeface="Inter"/>
-              </a:defRPr>
-            </a:pPr>
-            <a:r>
-              <a:t>Frontend &amp; Fullstack</a:t>
-            </a:r>
-          </a:p>
-          <a:p>
-            <a:pPr>
-              <a:spcAft>
-                <a:spcPts val="1000"/>
-              </a:spcAft>
-              <a:defRPr sz="1700">
-                <a:solidFill>
                   <a:srgbClr val="E2E8F0"/>
                 </a:solidFill>
                 <a:latin typeface="Inter"/>
               </a:defRPr>
             </a:pPr>
             <a:r>
-              <a:t>• React 19 &amp; App Router</a:t>
-            </a:r>
-          </a:p>
-          <a:p>
-            <a:pPr>
-              <a:spcAft>
-                <a:spcPts val="1000"/>
-              </a:spcAft>
-              <a:defRPr sz="1700">
-                <a:solidFill>
-                  <a:srgbClr val="E2E8F0"/>
-                </a:solidFill>
-                <a:latin typeface="Inter"/>
-              </a:defRPr>
-            </a:pPr>
-            <a:r>
-              <a:t>• Server Components për shpejtësi</a:t>
-            </a:r>
-          </a:p>
-          <a:p>
-            <a:pPr>
-              <a:spcAft>
-                <a:spcPts val="1000"/>
-              </a:spcAft>
-              <a:defRPr sz="1700">
-                <a:solidFill>
-                  <a:srgbClr val="E2E8F0"/>
-                </a:solidFill>
-                <a:latin typeface="Inter"/>
-              </a:defRPr>
-            </a:pPr>
-            <a:r>
-              <a:t>• PWA Manifest &amp; Service Workers</a:t>
-            </a:r>
-          </a:p>
-          <a:p>
-            <a:pPr>
-              <a:spcAft>
-                <a:spcPts val="1000"/>
-              </a:spcAft>
-              <a:defRPr sz="1700">
-                <a:solidFill>
-                  <a:srgbClr val="E2E8F0"/>
-                </a:solidFill>
-                <a:latin typeface="Inter"/>
-              </a:defRPr>
-            </a:pPr>
-            <a:r>
-              <a:t>• Dizajn Touch-First me Tailwind</a:t>
+              <a:t>App Router, Server Components për shpejtësi maksimale dhe Server Actions për thirrje pa API të lodhshme.</a:t>
             </a:r>
           </a:p>
         </p:txBody>
@@ -4119,7 +4216,7 @@
         </p:nvSpPr>
         <p:spPr>
           <a:xfrm>
-            <a:off x="3465576" y="2011680"/>
+            <a:off x="3465576" y="1920240"/>
             <a:ext cx="2514600" cy="4389120"/>
           </a:xfrm>
           <a:prstGeom prst="roundRect">
@@ -4128,9 +4225,9 @@
           <a:solidFill>
             <a:srgbClr val="141E34"/>
           </a:solidFill>
-          <a:ln w="31750">
+          <a:ln w="25400">
             <a:solidFill>
-              <a:srgbClr val="10B981"/>
+              <a:srgbClr val="6366F1"/>
             </a:solidFill>
           </a:ln>
         </p:spPr>
@@ -4164,7 +4261,7 @@
         </p:nvSpPr>
         <p:spPr>
           <a:xfrm>
-            <a:off x="3602736" y="2194560"/>
+            <a:off x="3602736" y="2103120"/>
             <a:ext cx="2240280" cy="4023360"/>
           </a:xfrm>
           <a:prstGeom prst="rect">
@@ -4179,95 +4276,44 @@
           <a:lstStyle/>
           <a:p>
             <a:pPr>
-              <a:defRPr sz="2200" b="1">
-                <a:solidFill>
-                  <a:srgbClr val="FFFFFF"/>
-                </a:solidFill>
-                <a:latin typeface="Inter"/>
-              </a:defRPr>
-            </a:pPr>
-            <a:r>
-              <a:t>🗄️ Supabase</a:t>
+              <a:defRPr sz="1600" b="1">
+                <a:solidFill>
+                  <a:srgbClr val="6366F1"/>
+                </a:solidFill>
+                <a:latin typeface="Inter"/>
+              </a:defRPr>
+            </a:pPr>
+            <a:r>
+              <a:t>Tailwind CSS</a:t>
             </a:r>
           </a:p>
           <a:p>
             <a:pPr>
               <a:spcAft>
-                <a:spcPts val="1400"/>
+                <a:spcPts val="1200"/>
               </a:spcAft>
+              <a:defRPr sz="1200">
+                <a:solidFill>
+                  <a:srgbClr val="B4C3D7"/>
+                </a:solidFill>
+                <a:latin typeface="Inter"/>
+              </a:defRPr>
+            </a:pPr>
+            <a:r>
+              <a:t>Dizajni i Përgjegjshëm</a:t>
+            </a:r>
+          </a:p>
+          <a:p>
+            <a:pPr>
               <a:defRPr sz="1400">
                 <a:solidFill>
-                  <a:srgbClr val="10B981"/>
-                </a:solidFill>
-                <a:latin typeface="Inter"/>
-              </a:defRPr>
-            </a:pPr>
-            <a:r>
-              <a:t>Baza e të Dhënave &amp; Auth</a:t>
-            </a:r>
-          </a:p>
-          <a:p>
-            <a:pPr>
-              <a:spcAft>
-                <a:spcPts val="1000"/>
-              </a:spcAft>
-              <a:defRPr sz="1700">
-                <a:solidFill>
                   <a:srgbClr val="E2E8F0"/>
                 </a:solidFill>
                 <a:latin typeface="Inter"/>
               </a:defRPr>
             </a:pPr>
             <a:r>
-              <a:t>• PostgreSQL me performancë të lartë</a:t>
-            </a:r>
-          </a:p>
-          <a:p>
-            <a:pPr>
-              <a:spcAft>
-                <a:spcPts val="1000"/>
-              </a:spcAft>
-              <a:defRPr sz="1700">
-                <a:solidFill>
-                  <a:srgbClr val="E2E8F0"/>
-                </a:solidFill>
-                <a:latin typeface="Inter"/>
-              </a:defRPr>
-            </a:pPr>
-            <a:r>
-              <a:t>• Row-Level Security (RLS) për siguri</a:t>
-            </a:r>
-          </a:p>
-          <a:p>
-            <a:pPr>
-              <a:spcAft>
-                <a:spcPts val="1000"/>
-              </a:spcAft>
-              <a:defRPr sz="1700">
-                <a:solidFill>
-                  <a:srgbClr val="E2E8F0"/>
-                </a:solidFill>
-                <a:latin typeface="Inter"/>
-              </a:defRPr>
-            </a:pPr>
-            <a:r>
-              <a:t>• Auth i dedikuar me email @universitetiaab.com</a:t>
-            </a:r>
-          </a:p>
-          <a:p>
-            <a:pPr>
-              <a:spcAft>
-                <a:spcPts val="1000"/>
-              </a:spcAft>
-              <a:defRPr sz="1700">
-                <a:solidFill>
-                  <a:srgbClr val="E2E8F0"/>
-                </a:solidFill>
-                <a:latin typeface="Inter"/>
-              </a:defRPr>
-            </a:pPr>
-            <a:r>
-              <a:t>• Realtime Subscriptions për vendet e lira</a:t>
+              <a:t>Stilim i shpejtë celular, mbështetje e plotë dark/light mode dhe tranzicione të lëmuara pa shkruar CSS nga e para.</a:t>
             </a:r>
           </a:p>
         </p:txBody>
@@ -4280,7 +4326,7 @@
         </p:nvSpPr>
         <p:spPr>
           <a:xfrm>
-            <a:off x="6199632" y="2011680"/>
+            <a:off x="6199632" y="1920240"/>
             <a:ext cx="2514600" cy="4389120"/>
           </a:xfrm>
           <a:prstGeom prst="roundRect">
@@ -4289,9 +4335,9 @@
           <a:solidFill>
             <a:srgbClr val="141E34"/>
           </a:solidFill>
-          <a:ln w="31750">
+          <a:ln w="25400">
             <a:solidFill>
-              <a:srgbClr val="38BDF8"/>
+              <a:srgbClr val="10B981"/>
             </a:solidFill>
           </a:ln>
         </p:spPr>
@@ -4325,7 +4371,7 @@
         </p:nvSpPr>
         <p:spPr>
           <a:xfrm>
-            <a:off x="6336792" y="2194560"/>
+            <a:off x="6336792" y="2103120"/>
             <a:ext cx="2240280" cy="4023360"/>
           </a:xfrm>
           <a:prstGeom prst="rect">
@@ -4340,95 +4386,44 @@
           <a:lstStyle/>
           <a:p>
             <a:pPr>
-              <a:defRPr sz="2200" b="1">
-                <a:solidFill>
-                  <a:srgbClr val="FFFFFF"/>
-                </a:solidFill>
-                <a:latin typeface="Inter"/>
-              </a:defRPr>
-            </a:pPr>
-            <a:r>
-              <a:t>🤖 GitHub Copilot</a:t>
+              <a:defRPr sz="1600" b="1">
+                <a:solidFill>
+                  <a:srgbClr val="10B981"/>
+                </a:solidFill>
+                <a:latin typeface="Inter"/>
+              </a:defRPr>
+            </a:pPr>
+            <a:r>
+              <a:t>Supabase</a:t>
             </a:r>
           </a:p>
           <a:p>
             <a:pPr>
               <a:spcAft>
-                <a:spcPts val="1400"/>
+                <a:spcPts val="1200"/>
               </a:spcAft>
+              <a:defRPr sz="1200">
+                <a:solidFill>
+                  <a:srgbClr val="B4C3D7"/>
+                </a:solidFill>
+                <a:latin typeface="Inter"/>
+              </a:defRPr>
+            </a:pPr>
+            <a:r>
+              <a:t>Baza &amp; Autentikimi</a:t>
+            </a:r>
+          </a:p>
+          <a:p>
+            <a:pPr>
               <a:defRPr sz="1400">
                 <a:solidFill>
-                  <a:srgbClr val="38BDF8"/>
-                </a:solidFill>
-                <a:latin typeface="Inter"/>
-              </a:defRPr>
-            </a:pPr>
-            <a:r>
-              <a:t>AI Pair Programmer</a:t>
-            </a:r>
-          </a:p>
-          <a:p>
-            <a:pPr>
-              <a:spcAft>
-                <a:spcPts val="1000"/>
-              </a:spcAft>
-              <a:defRPr sz="1700">
-                <a:solidFill>
                   <a:srgbClr val="E2E8F0"/>
                 </a:solidFill>
                 <a:latin typeface="Inter"/>
               </a:defRPr>
             </a:pPr>
             <a:r>
-              <a:t>• Asistencë inteligjente në çdo rresht kodi</a:t>
-            </a:r>
-          </a:p>
-          <a:p>
-            <a:pPr>
-              <a:spcAft>
-                <a:spcPts val="1000"/>
-              </a:spcAft>
-              <a:defRPr sz="1700">
-                <a:solidFill>
-                  <a:srgbClr val="E2E8F0"/>
-                </a:solidFill>
-                <a:latin typeface="Inter"/>
-              </a:defRPr>
-            </a:pPr>
-            <a:r>
-              <a:t>• Gjenerim i shpejtë i skemave SQL dhe testeve</a:t>
-            </a:r>
-          </a:p>
-          <a:p>
-            <a:pPr>
-              <a:spcAft>
-                <a:spcPts val="1000"/>
-              </a:spcAft>
-              <a:defRPr sz="1700">
-                <a:solidFill>
-                  <a:srgbClr val="E2E8F0"/>
-                </a:solidFill>
-                <a:latin typeface="Inter"/>
-              </a:defRPr>
-            </a:pPr>
-            <a:r>
-              <a:t>• Përshpejton zhvillimin 3x më shpejt</a:t>
-            </a:r>
-          </a:p>
-          <a:p>
-            <a:pPr>
-              <a:spcAft>
-                <a:spcPts val="1000"/>
-              </a:spcAft>
-              <a:defRPr sz="1700">
-                <a:solidFill>
-                  <a:srgbClr val="E2E8F0"/>
-                </a:solidFill>
-                <a:latin typeface="Inter"/>
-              </a:defRPr>
-            </a:pPr>
-            <a:r>
-              <a:t>• Mjet profesional i standardeve globale</a:t>
+              <a:t>PostgreSQL e plotë, verifikim i sigurt me email AAB, dhe përditësime në kohë reale pa servera të veçantë websocket.</a:t>
             </a:r>
           </a:p>
         </p:txBody>
@@ -4441,7 +4436,7 @@
         </p:nvSpPr>
         <p:spPr>
           <a:xfrm>
-            <a:off x="8933688" y="2011680"/>
+            <a:off x="8933688" y="1920240"/>
             <a:ext cx="2514600" cy="4389120"/>
           </a:xfrm>
           <a:prstGeom prst="roundRect">
@@ -4450,7 +4445,7 @@
           <a:solidFill>
             <a:srgbClr val="141E34"/>
           </a:solidFill>
-          <a:ln w="31750">
+          <a:ln w="25400">
             <a:solidFill>
               <a:srgbClr val="F59E0B"/>
             </a:solidFill>
@@ -4486,7 +4481,7 @@
         </p:nvSpPr>
         <p:spPr>
           <a:xfrm>
-            <a:off x="9070848" y="2194560"/>
+            <a:off x="9070848" y="2103120"/>
             <a:ext cx="2240280" cy="4023360"/>
           </a:xfrm>
           <a:prstGeom prst="rect">
@@ -4501,95 +4496,44 @@
           <a:lstStyle/>
           <a:p>
             <a:pPr>
-              <a:defRPr sz="2200" b="1">
-                <a:solidFill>
-                  <a:srgbClr val="FFFFFF"/>
-                </a:solidFill>
-                <a:latin typeface="Inter"/>
-              </a:defRPr>
-            </a:pPr>
-            <a:r>
-              <a:t>▲ Vercel Cloud</a:t>
+              <a:defRPr sz="1600" b="1">
+                <a:solidFill>
+                  <a:srgbClr val="F59E0B"/>
+                </a:solidFill>
+                <a:latin typeface="Inter"/>
+              </a:defRPr>
+            </a:pPr>
+            <a:r>
+              <a:t>Vercel + GitHub</a:t>
             </a:r>
           </a:p>
           <a:p>
             <a:pPr>
               <a:spcAft>
-                <a:spcPts val="1400"/>
+                <a:spcPts val="1200"/>
               </a:spcAft>
+              <a:defRPr sz="1200">
+                <a:solidFill>
+                  <a:srgbClr val="B4C3D7"/>
+                </a:solidFill>
+                <a:latin typeface="Inter"/>
+              </a:defRPr>
+            </a:pPr>
+            <a:r>
+              <a:t>Infrastruktura &amp; CI/CD</a:t>
+            </a:r>
+          </a:p>
+          <a:p>
+            <a:pPr>
               <a:defRPr sz="1400">
                 <a:solidFill>
-                  <a:srgbClr val="F59E0B"/>
-                </a:solidFill>
-                <a:latin typeface="Inter"/>
-              </a:defRPr>
-            </a:pPr>
-            <a:r>
-              <a:t>Publikimi &amp; CI/CD</a:t>
-            </a:r>
-          </a:p>
-          <a:p>
-            <a:pPr>
-              <a:spcAft>
-                <a:spcPts val="1000"/>
-              </a:spcAft>
-              <a:defRPr sz="1700">
-                <a:solidFill>
                   <a:srgbClr val="E2E8F0"/>
                 </a:solidFill>
                 <a:latin typeface="Inter"/>
               </a:defRPr>
             </a:pPr>
             <a:r>
-              <a:t>• Vendosje globale në Edge Network</a:t>
-            </a:r>
-          </a:p>
-          <a:p>
-            <a:pPr>
-              <a:spcAft>
-                <a:spcPts val="1000"/>
-              </a:spcAft>
-              <a:defRPr sz="1700">
-                <a:solidFill>
-                  <a:srgbClr val="E2E8F0"/>
-                </a:solidFill>
-                <a:latin typeface="Inter"/>
-              </a:defRPr>
-            </a:pPr>
-            <a:r>
-              <a:t>• Publikim automatik në çdo git push</a:t>
-            </a:r>
-          </a:p>
-          <a:p>
-            <a:pPr>
-              <a:spcAft>
-                <a:spcPts val="1000"/>
-              </a:spcAft>
-              <a:defRPr sz="1700">
-                <a:solidFill>
-                  <a:srgbClr val="E2E8F0"/>
-                </a:solidFill>
-                <a:latin typeface="Inter"/>
-              </a:defRPr>
-            </a:pPr>
-            <a:r>
-              <a:t>• Certifikatë SSL (HTTPS) falas</a:t>
-            </a:r>
-          </a:p>
-          <a:p>
-            <a:pPr>
-              <a:spcAft>
-                <a:spcPts val="1000"/>
-              </a:spcAft>
-              <a:defRPr sz="1700">
-                <a:solidFill>
-                  <a:srgbClr val="E2E8F0"/>
-                </a:solidFill>
-                <a:latin typeface="Inter"/>
-              </a:defRPr>
-            </a:pPr>
-            <a:r>
-              <a:t>• Shpejtësi maksimale në çdo celular</a:t>
+              <a:t>Publikim automatik në rrjetin global në çdo git push dhe kontroll i cilësisë përmes GitHub Actions.</a:t>
             </a:r>
           </a:p>
         </p:txBody>
@@ -4678,7 +4622,7 @@
           <a:lstStyle/>
           <a:p>
             <a:pPr>
-              <a:defRPr sz="1500" b="1">
+              <a:defRPr sz="1400" b="1">
                 <a:solidFill>
                   <a:srgbClr val="38BDF8"/>
                 </a:solidFill>
@@ -4686,7 +4630,7 @@
               </a:defRPr>
             </a:pPr>
             <a:r>
-              <a:t>INTELIGJENCA ARTIFICIALE NË KODIM</a:t>
+              <a:t>QËNDRUESHMËRIA (RESILIENCE)</a:t>
             </a:r>
           </a:p>
         </p:txBody>
@@ -4699,7 +4643,7 @@
         </p:nvSpPr>
         <p:spPr>
           <a:xfrm>
-            <a:off x="731520" y="685800"/>
+            <a:off x="731520" y="658368"/>
             <a:ext cx="10698480" cy="777240"/>
           </a:xfrm>
           <a:prstGeom prst="rect">
@@ -4714,7 +4658,7 @@
           <a:lstStyle/>
           <a:p>
             <a:pPr>
-              <a:defRPr sz="3600" b="1">
+              <a:defRPr sz="3400" b="1">
                 <a:solidFill>
                   <a:srgbClr val="FFFFFF"/>
                 </a:solidFill>
@@ -4722,7 +4666,7 @@
               </a:defRPr>
             </a:pPr>
             <a:r>
-              <a:t>GitHub Copilot: Bashkë-Piloti Juaj, Jo Zëvendësuesi!</a:t>
+              <a:t>Arkitektura e Qëndrueshme: Çfarë Ndodh kur Rrjeti Dështon?</a:t>
             </a:r>
           </a:p>
         </p:txBody>
@@ -4735,7 +4679,7 @@
         </p:nvSpPr>
         <p:spPr>
           <a:xfrm>
-            <a:off x="731520" y="1444752"/>
+            <a:off x="731520" y="1417320"/>
             <a:ext cx="10698480" cy="502920"/>
           </a:xfrm>
           <a:prstGeom prst="rect">
@@ -4750,7 +4694,7 @@
           <a:lstStyle/>
           <a:p>
             <a:pPr>
-              <a:defRPr sz="2100">
+              <a:defRPr sz="1900">
                 <a:solidFill>
                   <a:srgbClr val="E2E8F0"/>
                 </a:solidFill>
@@ -4758,7 +4702,7 @@
               </a:defRPr>
             </a:pPr>
             <a:r>
-              <a:t>Përdorni AI si përshpejtues profesional — por kodi dhe vendimet mbeten tuajat.</a:t>
+              <a:t>Aplikacioni mobil profesional dallohet nga mënyra se si sillet kur interneti ndërpritet.</a:t>
             </a:r>
           </a:p>
         </p:txBody>
@@ -4771,8 +4715,8 @@
         </p:nvSpPr>
         <p:spPr>
           <a:xfrm>
-            <a:off x="731520" y="2011680"/>
-            <a:ext cx="5120640" cy="4389120"/>
+            <a:off x="731520" y="1920240"/>
+            <a:ext cx="3383280" cy="4389120"/>
           </a:xfrm>
           <a:prstGeom prst="roundRect">
             <a:avLst/>
@@ -4780,9 +4724,9 @@
           <a:solidFill>
             <a:srgbClr val="141E34"/>
           </a:solidFill>
-          <a:ln w="31750">
+          <a:ln w="25400">
             <a:solidFill>
-              <a:srgbClr val="38BDF8"/>
+              <a:srgbClr val="F59E0B"/>
             </a:solidFill>
           </a:ln>
         </p:spPr>
@@ -4816,8 +4760,8 @@
         </p:nvSpPr>
         <p:spPr>
           <a:xfrm>
-            <a:off x="1005840" y="2286000"/>
-            <a:ext cx="4572000" cy="3840480"/>
+            <a:off x="914400" y="2103120"/>
+            <a:ext cx="3017520" cy="4023360"/>
           </a:xfrm>
           <a:prstGeom prst="rect">
             <a:avLst/>
@@ -4831,26 +4775,36 @@
           <a:lstStyle/>
           <a:p>
             <a:pPr>
+              <a:defRPr sz="1800" b="1">
+                <a:solidFill>
+                  <a:srgbClr val="F59E0B"/>
+                </a:solidFill>
+                <a:latin typeface="Inter"/>
+              </a:defRPr>
+            </a:pPr>
+            <a:r>
+              <a:t>Dështimi 1: Shkëputja e Valëve</a:t>
+            </a:r>
+          </a:p>
+          <a:p>
+            <a:pPr>
               <a:spcAft>
-                <a:spcPts val="1600"/>
+                <a:spcPts val="1400"/>
               </a:spcAft>
-              <a:defRPr sz="2500" b="1">
-                <a:solidFill>
-                  <a:srgbClr val="38BDF8"/>
-                </a:solidFill>
-                <a:latin typeface="Inter"/>
-              </a:defRPr>
-            </a:pPr>
-            <a:r>
-              <a:t>✅ Si Ta Përdorni me Sukses?</a:t>
-            </a:r>
-          </a:p>
-          <a:p>
-            <a:pPr>
-              <a:spcAft>
-                <a:spcPts val="1200"/>
-              </a:spcAft>
-              <a:defRPr sz="1800">
+              <a:defRPr sz="1300">
+                <a:solidFill>
+                  <a:srgbClr val="B4C3D7"/>
+                </a:solidFill>
+                <a:latin typeface="Inter"/>
+              </a:defRPr>
+            </a:pPr>
+            <a:r>
+              <a:t>Udhëtimi në rrugë pa rrjet</a:t>
+            </a:r>
+          </a:p>
+          <a:p>
+            <a:pPr>
+              <a:defRPr sz="1500">
                 <a:solidFill>
                   <a:srgbClr val="E2E8F0"/>
                 </a:solidFill>
@@ -4858,55 +4812,7 @@
               </a:defRPr>
             </a:pPr>
             <a:r>
-              <a:t>• Gjenerim Komponentësh: Përshkruani kartelën e udhëtimit në koment dhe lini Copilot të gjenerojë kodin Tailwind.</a:t>
-            </a:r>
-          </a:p>
-          <a:p>
-            <a:pPr>
-              <a:spcAft>
-                <a:spcPts val="1200"/>
-              </a:spcAft>
-              <a:defRPr sz="1800">
-                <a:solidFill>
-                  <a:srgbClr val="E2E8F0"/>
-                </a:solidFill>
-                <a:latin typeface="Inter"/>
-              </a:defRPr>
-            </a:pPr>
-            <a:r>
-              <a:t>• Skema dhe Query SQL: Ndihmon në shkrimin e query-ve për filtrimin e vendeve të lira sipas orës.</a:t>
-            </a:r>
-          </a:p>
-          <a:p>
-            <a:pPr>
-              <a:spcAft>
-                <a:spcPts val="1200"/>
-              </a:spcAft>
-              <a:defRPr sz="1800">
-                <a:solidFill>
-                  <a:srgbClr val="E2E8F0"/>
-                </a:solidFill>
-                <a:latin typeface="Inter"/>
-              </a:defRPr>
-            </a:pPr>
-            <a:r>
-              <a:t>• Zgjidhje të Shpejta: Shpjegon gabimet në konzollë dhe propozon zgjidhje të menjëhershme.</a:t>
-            </a:r>
-          </a:p>
-          <a:p>
-            <a:pPr>
-              <a:spcAft>
-                <a:spcPts val="1200"/>
-              </a:spcAft>
-              <a:defRPr sz="1800">
-                <a:solidFill>
-                  <a:srgbClr val="E2E8F0"/>
-                </a:solidFill>
-                <a:latin typeface="Inter"/>
-              </a:defRPr>
-            </a:pPr>
-            <a:r>
-              <a:t>• Testim i Automatizuar: Gjeneron teste njësi dhe teste integrimi me Playwright.</a:t>
+              <a:t>PWA nuk shfaq 'Dinosaurin' apo gabim 404. Service Worker-i shfaq ndërfaqen e ruajtur në cache dhe udhëtimet e fundit.</a:t>
             </a:r>
           </a:p>
         </p:txBody>
@@ -4919,8 +4825,8 @@
         </p:nvSpPr>
         <p:spPr>
           <a:xfrm>
-            <a:off x="6309360" y="2011680"/>
-            <a:ext cx="5120640" cy="4389120"/>
+            <a:off x="4389120" y="1920240"/>
+            <a:ext cx="3383280" cy="4389120"/>
           </a:xfrm>
           <a:prstGeom prst="roundRect">
             <a:avLst/>
@@ -4928,9 +4834,9 @@
           <a:solidFill>
             <a:srgbClr val="141E34"/>
           </a:solidFill>
-          <a:ln w="31750">
+          <a:ln w="25400">
             <a:solidFill>
-              <a:srgbClr val="F59E0B"/>
+              <a:srgbClr val="38BDF8"/>
             </a:solidFill>
           </a:ln>
         </p:spPr>
@@ -4964,8 +4870,8 @@
         </p:nvSpPr>
         <p:spPr>
           <a:xfrm>
-            <a:off x="6583680" y="2286000"/>
-            <a:ext cx="4572000" cy="3840480"/>
+            <a:off x="4572000" y="2103120"/>
+            <a:ext cx="3017520" cy="4023360"/>
           </a:xfrm>
           <a:prstGeom prst="rect">
             <a:avLst/>
@@ -4979,26 +4885,146 @@
           <a:lstStyle/>
           <a:p>
             <a:pPr>
+              <a:defRPr sz="1800" b="1">
+                <a:solidFill>
+                  <a:srgbClr val="38BDF8"/>
+                </a:solidFill>
+                <a:latin typeface="Inter"/>
+              </a:defRPr>
+            </a:pPr>
+            <a:r>
+              <a:t>Dështimi 2: Kërkesa në Pritje</a:t>
+            </a:r>
+          </a:p>
+          <a:p>
+            <a:pPr>
               <a:spcAft>
-                <a:spcPts val="1600"/>
+                <a:spcPts val="1400"/>
               </a:spcAft>
-              <a:defRPr sz="2500" b="1">
-                <a:solidFill>
-                  <a:srgbClr val="F59E0B"/>
-                </a:solidFill>
-                <a:latin typeface="Inter"/>
-              </a:defRPr>
-            </a:pPr>
-            <a:r>
-              <a:t>⚠️ Rregulli i Artë në Demo Day</a:t>
+              <a:defRPr sz="1300">
+                <a:solidFill>
+                  <a:srgbClr val="B4C3D7"/>
+                </a:solidFill>
+                <a:latin typeface="Inter"/>
+              </a:defRPr>
+            </a:pPr>
+            <a:r>
+              <a:t>Studenti rezervoi në tunel</a:t>
+            </a:r>
+          </a:p>
+          <a:p>
+            <a:pPr>
+              <a:defRPr sz="1500">
+                <a:solidFill>
+                  <a:srgbClr val="E2E8F0"/>
+                </a:solidFill>
+                <a:latin typeface="Inter"/>
+              </a:defRPr>
+            </a:pPr>
+            <a:r>
+              <a:t>Aplikacioni regjistron veprimin lokalisht në IndexedDB dhe e dërgon automatikisht në Supabase sapo rikthehet lidhja.</a:t>
+            </a:r>
+          </a:p>
+        </p:txBody>
+      </p:sp>
+      <p:sp>
+        <p:nvSpPr>
+          <p:cNvPr id="10" name="Rounded Rectangle 9"/>
+          <p:cNvSpPr/>
+          <p:nvPr/>
+        </p:nvSpPr>
+        <p:spPr>
+          <a:xfrm>
+            <a:off x="8046720" y="1920240"/>
+            <a:ext cx="3383280" cy="4389120"/>
+          </a:xfrm>
+          <a:prstGeom prst="roundRect">
+            <a:avLst/>
+          </a:prstGeom>
+          <a:solidFill>
+            <a:srgbClr val="141E34"/>
+          </a:solidFill>
+          <a:ln w="25400">
+            <a:solidFill>
+              <a:srgbClr val="EF4444"/>
+            </a:solidFill>
+          </a:ln>
+        </p:spPr>
+        <p:style>
+          <a:lnRef idx="1">
+            <a:schemeClr val="accent1"/>
+          </a:lnRef>
+          <a:fillRef idx="3">
+            <a:schemeClr val="accent1"/>
+          </a:fillRef>
+          <a:effectRef idx="2">
+            <a:schemeClr val="accent1"/>
+          </a:effectRef>
+          <a:fontRef idx="minor">
+            <a:schemeClr val="lt1"/>
+          </a:fontRef>
+        </p:style>
+        <p:txBody>
+          <a:bodyPr rtlCol="0" anchor="ctr"/>
+          <a:lstStyle/>
+          <a:p>
+            <a:pPr algn="ctr"/>
+          </a:p>
+        </p:txBody>
+      </p:sp>
+      <p:sp>
+        <p:nvSpPr>
+          <p:cNvPr id="11" name="TextBox 10"/>
+          <p:cNvSpPr txBox="1"/>
+          <p:nvPr/>
+        </p:nvSpPr>
+        <p:spPr>
+          <a:xfrm>
+            <a:off x="8229600" y="2103120"/>
+            <a:ext cx="3017520" cy="4023360"/>
+          </a:xfrm>
+          <a:prstGeom prst="rect">
+            <a:avLst/>
+          </a:prstGeom>
+          <a:noFill/>
+        </p:spPr>
+        <p:txBody>
+          <a:bodyPr wrap="square">
+            <a:spAutoFit/>
+          </a:bodyPr>
+          <a:lstStyle/>
+          <a:p>
+            <a:pPr>
+              <a:defRPr sz="1800" b="1">
+                <a:solidFill>
+                  <a:srgbClr val="EF4444"/>
+                </a:solidFill>
+                <a:latin typeface="Inter"/>
+              </a:defRPr>
+            </a:pPr>
+            <a:r>
+              <a:t>Dështimi 3: Qasja e Paautorizuar</a:t>
             </a:r>
           </a:p>
           <a:p>
             <a:pPr>
               <a:spcAft>
-                <a:spcPts val="1200"/>
+                <a:spcPts val="1400"/>
               </a:spcAft>
-              <a:defRPr sz="1800">
+              <a:defRPr sz="1300">
+                <a:solidFill>
+                  <a:srgbClr val="B4C3D7"/>
+                </a:solidFill>
+                <a:latin typeface="Inter"/>
+              </a:defRPr>
+            </a:pPr>
+            <a:r>
+              <a:t>Përdoruesi tenton të ndryshojë rolin</a:t>
+            </a:r>
+          </a:p>
+          <a:p>
+            <a:pPr>
+              <a:defRPr sz="1500">
                 <a:solidFill>
                   <a:srgbClr val="E2E8F0"/>
                 </a:solidFill>
@@ -5006,55 +5032,7 @@
               </a:defRPr>
             </a:pPr>
             <a:r>
-              <a:t>• Ju Mbani Përgjegjësi: Nëse Copilot shkruan një rresht kodi, ju duhet të dini ta shpjegoni çdo simbol të tij.</a:t>
-            </a:r>
-          </a:p>
-          <a:p>
-            <a:pPr>
-              <a:spcAft>
-                <a:spcPts val="1200"/>
-              </a:spcAft>
-              <a:defRPr sz="1800">
-                <a:solidFill>
-                  <a:srgbClr val="E2E8F0"/>
-                </a:solidFill>
-                <a:latin typeface="Inter"/>
-              </a:defRPr>
-            </a:pPr>
-            <a:r>
-              <a:t>• Pyetje Teknike Individuale: Gjatë mbrojtjes, pyetjet do të fokusohen te arkitektura: 'Pse ky hook?', 'Si funksionon RLS?'</a:t>
-            </a:r>
-          </a:p>
-          <a:p>
-            <a:pPr>
-              <a:spcAft>
-                <a:spcPts val="1200"/>
-              </a:spcAft>
-              <a:defRPr sz="1800">
-                <a:solidFill>
-                  <a:srgbClr val="E2E8F0"/>
-                </a:solidFill>
-                <a:latin typeface="Inter"/>
-              </a:defRPr>
-            </a:pPr>
-            <a:r>
-              <a:t>• Kodi pa Kuptim Zbret Pikë: Kodi i kopjuar verbërisht pa u kuptuar rezulton në penalizim të menjëhershëm.</a:t>
-            </a:r>
-          </a:p>
-          <a:p>
-            <a:pPr>
-              <a:spcAft>
-                <a:spcPts val="1200"/>
-              </a:spcAft>
-              <a:defRPr sz="1800">
-                <a:solidFill>
-                  <a:srgbClr val="E2E8F0"/>
-                </a:solidFill>
-                <a:latin typeface="Inter"/>
-              </a:defRPr>
-            </a:pPr>
-            <a:r>
-              <a:t>• Ju Jeni Inxhinieri: Copilot është thjesht një asistent i avancuar. Inxhinieri i vërtetë jeni JU!</a:t>
+              <a:t>Supabase RLS bllokon kërkesën në nivel baze të dhënash me kod 403. Asnjë e dhënë nuk komprometohet.</a:t>
             </a:r>
           </a:p>
         </p:txBody>
@@ -5143,7 +5121,7 @@
           <a:lstStyle/>
           <a:p>
             <a:pPr>
-              <a:defRPr sz="1500" b="1">
+              <a:defRPr sz="1400" b="1">
                 <a:solidFill>
                   <a:srgbClr val="38BDF8"/>
                 </a:solidFill>
@@ -5151,7 +5129,7 @@
               </a:defRPr>
             </a:pPr>
             <a:r>
-              <a:t>TRANSPARENCA &amp; VLERËSIMI</a:t>
+              <a:t>ETIKA DHE PËRDORIMI I AI-SË</a:t>
             </a:r>
           </a:p>
         </p:txBody>
@@ -5164,7 +5142,7 @@
         </p:nvSpPr>
         <p:spPr>
           <a:xfrm>
-            <a:off x="731520" y="685800"/>
+            <a:off x="731520" y="658368"/>
             <a:ext cx="10698480" cy="777240"/>
           </a:xfrm>
           <a:prstGeom prst="rect">
@@ -5179,7 +5157,7 @@
           <a:lstStyle/>
           <a:p>
             <a:pPr>
-              <a:defRPr sz="3600" b="1">
+              <a:defRPr sz="3400" b="1">
                 <a:solidFill>
                   <a:srgbClr val="FFFFFF"/>
                 </a:solidFill>
@@ -5187,7 +5165,7 @@
               </a:defRPr>
             </a:pPr>
             <a:r>
-              <a:t>Formula e Notimit: 10% / 30% / 40% / 20%</a:t>
+              <a:t>Rregulli i Artë: Copilot si Bashkë-Pilot, Ju Jeni Arkitekti!</a:t>
             </a:r>
           </a:p>
         </p:txBody>
@@ -5200,7 +5178,7 @@
         </p:nvSpPr>
         <p:spPr>
           <a:xfrm>
-            <a:off x="731520" y="1444752"/>
+            <a:off x="731520" y="1417320"/>
             <a:ext cx="10698480" cy="502920"/>
           </a:xfrm>
           <a:prstGeom prst="rect">
@@ -5215,7 +5193,7 @@
           <a:lstStyle/>
           <a:p>
             <a:pPr>
-              <a:defRPr sz="2100">
+              <a:defRPr sz="1900">
                 <a:solidFill>
                   <a:srgbClr val="E2E8F0"/>
                 </a:solidFill>
@@ -5223,7 +5201,7 @@
               </a:defRPr>
             </a:pPr>
             <a:r>
-              <a:t>Llogaridhënie e qartë — diferencojmë vijueshmërinë aktive nga ata që kërkojnë vetëm një notë.</a:t>
+              <a:t>Lejohet dhe inkurajohet AI për shpejtësi, por ju mbani 100% përgjegjësi për çdo rresht kodi.</a:t>
             </a:r>
           </a:p>
         </p:txBody>
@@ -5236,8 +5214,8 @@
         </p:nvSpPr>
         <p:spPr>
           <a:xfrm>
-            <a:off x="731520" y="2011680"/>
-            <a:ext cx="2514600" cy="4389120"/>
+            <a:off x="731520" y="1920240"/>
+            <a:ext cx="3383280" cy="4389120"/>
           </a:xfrm>
           <a:prstGeom prst="roundRect">
             <a:avLst/>
@@ -5245,9 +5223,9 @@
           <a:solidFill>
             <a:srgbClr val="141E34"/>
           </a:solidFill>
-          <a:ln w="31750">
+          <a:ln w="25400">
             <a:solidFill>
-              <a:srgbClr val="10B981"/>
+              <a:srgbClr val="38BDF8"/>
             </a:solidFill>
           </a:ln>
         </p:spPr>
@@ -5281,8 +5259,8 @@
         </p:nvSpPr>
         <p:spPr>
           <a:xfrm>
-            <a:off x="868680" y="2194560"/>
-            <a:ext cx="2240280" cy="4023360"/>
+            <a:off x="914400" y="2103120"/>
+            <a:ext cx="3017520" cy="4023360"/>
           </a:xfrm>
           <a:prstGeom prst="rect">
             <a:avLst/>
@@ -5296,39 +5274,36 @@
           <a:lstStyle/>
           <a:p>
             <a:pPr>
-              <a:defRPr sz="5000" b="1">
-                <a:solidFill>
-                  <a:srgbClr val="10B981"/>
-                </a:solidFill>
-                <a:latin typeface="Inter"/>
-              </a:defRPr>
-            </a:pPr>
-            <a:r>
-              <a:t>10%</a:t>
+              <a:defRPr sz="1800" b="1">
+                <a:solidFill>
+                  <a:srgbClr val="38BDF8"/>
+                </a:solidFill>
+                <a:latin typeface="Inter"/>
+              </a:defRPr>
+            </a:pPr>
+            <a:r>
+              <a:t>1. Propozimi (AI)</a:t>
             </a:r>
           </a:p>
           <a:p>
             <a:pPr>
               <a:spcAft>
-                <a:spcPts val="1200"/>
+                <a:spcPts val="1400"/>
               </a:spcAft>
-              <a:defRPr sz="2100" b="1">
-                <a:solidFill>
-                  <a:srgbClr val="FFFFFF"/>
-                </a:solidFill>
-                <a:latin typeface="Inter"/>
-              </a:defRPr>
-            </a:pPr>
-            <a:r>
-              <a:t>📡 Vijueshmëria &amp; QR</a:t>
-            </a:r>
-          </a:p>
-          <a:p>
-            <a:pPr>
-              <a:spcAft>
-                <a:spcPts val="800"/>
-              </a:spcAft>
-              <a:defRPr sz="1700">
+              <a:defRPr sz="1300">
+                <a:solidFill>
+                  <a:srgbClr val="B4C3D7"/>
+                </a:solidFill>
+                <a:latin typeface="Inter"/>
+              </a:defRPr>
+            </a:pPr>
+            <a:r>
+              <a:t>Pyetje e Qartë &amp; Kontekst</a:t>
+            </a:r>
+          </a:p>
+          <a:p>
+            <a:pPr>
+              <a:defRPr sz="1500">
                 <a:solidFill>
                   <a:srgbClr val="E2E8F0"/>
                 </a:solidFill>
@@ -5336,39 +5311,7 @@
               </a:defRPr>
             </a:pPr>
             <a:r>
-              <a:t>• Check-In me QR në çdo ligjëratë/lab</a:t>
-            </a:r>
-          </a:p>
-          <a:p>
-            <a:pPr>
-              <a:spcAft>
-                <a:spcPts val="800"/>
-              </a:spcAft>
-              <a:defRPr sz="1700">
-                <a:solidFill>
-                  <a:srgbClr val="E2E8F0"/>
-                </a:solidFill>
-                <a:latin typeface="Inter"/>
-              </a:defRPr>
-            </a:pPr>
-            <a:r>
-              <a:t>• Diferencon vijuesit nga pasivët</a:t>
-            </a:r>
-          </a:p>
-          <a:p>
-            <a:pPr>
-              <a:spcAft>
-                <a:spcPts val="800"/>
-              </a:spcAft>
-              <a:defRPr sz="1700">
-                <a:solidFill>
-                  <a:srgbClr val="E2E8F0"/>
-                </a:solidFill>
-                <a:latin typeface="Inter"/>
-              </a:defRPr>
-            </a:pPr>
-            <a:r>
-              <a:t>• Pragu 70% minimal: Eliminues!</a:t>
+              <a:t>Copilot sugjeron kod bazuar në pyetjen tuaj. Mos pranoni verbërisht me Tab pa e lexuar kodin!</a:t>
             </a:r>
           </a:p>
         </p:txBody>
@@ -5381,8 +5324,8 @@
         </p:nvSpPr>
         <p:spPr>
           <a:xfrm>
-            <a:off x="3465576" y="2011680"/>
-            <a:ext cx="2514600" cy="4389120"/>
+            <a:off x="4389120" y="1920240"/>
+            <a:ext cx="3383280" cy="4389120"/>
           </a:xfrm>
           <a:prstGeom prst="roundRect">
             <a:avLst/>
@@ -5390,9 +5333,9 @@
           <a:solidFill>
             <a:srgbClr val="141E34"/>
           </a:solidFill>
-          <a:ln w="31750">
+          <a:ln w="25400">
             <a:solidFill>
-              <a:srgbClr val="6366F1"/>
+              <a:srgbClr val="F59E0B"/>
             </a:solidFill>
           </a:ln>
         </p:spPr>
@@ -5426,8 +5369,8 @@
         </p:nvSpPr>
         <p:spPr>
           <a:xfrm>
-            <a:off x="3602736" y="2194560"/>
-            <a:ext cx="2240280" cy="4023360"/>
+            <a:off x="4572000" y="2103120"/>
+            <a:ext cx="3017520" cy="4023360"/>
           </a:xfrm>
           <a:prstGeom prst="rect">
             <a:avLst/>
@@ -5441,39 +5384,36 @@
           <a:lstStyle/>
           <a:p>
             <a:pPr>
-              <a:defRPr sz="5000" b="1">
-                <a:solidFill>
-                  <a:srgbClr val="6366F1"/>
-                </a:solidFill>
-                <a:latin typeface="Inter"/>
-              </a:defRPr>
-            </a:pPr>
-            <a:r>
-              <a:t>30%</a:t>
+              <a:defRPr sz="1800" b="1">
+                <a:solidFill>
+                  <a:srgbClr val="F59E0B"/>
+                </a:solidFill>
+                <a:latin typeface="Inter"/>
+              </a:defRPr>
+            </a:pPr>
+            <a:r>
+              <a:t>2. Kontrolli Njerëzor</a:t>
             </a:r>
           </a:p>
           <a:p>
             <a:pPr>
               <a:spcAft>
-                <a:spcPts val="1200"/>
+                <a:spcPts val="1400"/>
               </a:spcAft>
-              <a:defRPr sz="2100" b="1">
-                <a:solidFill>
-                  <a:srgbClr val="FFFFFF"/>
-                </a:solidFill>
-                <a:latin typeface="Inter"/>
-              </a:defRPr>
-            </a:pPr>
-            <a:r>
-              <a:t>⚡ GitHub Autograding</a:t>
-            </a:r>
-          </a:p>
-          <a:p>
-            <a:pPr>
-              <a:spcAft>
-                <a:spcPts val="800"/>
-              </a:spcAft>
-              <a:defRPr sz="1700">
+              <a:defRPr sz="1300">
+                <a:solidFill>
+                  <a:srgbClr val="B4C3D7"/>
+                </a:solidFill>
+                <a:latin typeface="Inter"/>
+              </a:defRPr>
+            </a:pPr>
+            <a:r>
+              <a:t>Kritika &amp; Përmirësimi</a:t>
+            </a:r>
+          </a:p>
+          <a:p>
+            <a:pPr>
+              <a:defRPr sz="1500">
                 <a:solidFill>
                   <a:srgbClr val="E2E8F0"/>
                 </a:solidFill>
@@ -5481,39 +5421,7 @@
               </a:defRPr>
             </a:pPr>
             <a:r>
-              <a:t>• 10 detyra praktike me kod javor</a:t>
-            </a:r>
-          </a:p>
-          <a:p>
-            <a:pPr>
-              <a:spcAft>
-                <a:spcPts val="800"/>
-              </a:spcAft>
-              <a:defRPr sz="1700">
-                <a:solidFill>
-                  <a:srgbClr val="E2E8F0"/>
-                </a:solidFill>
-                <a:latin typeface="Inter"/>
-              </a:defRPr>
-            </a:pPr>
-            <a:r>
-              <a:t>• Vlerësim automatik me GitHub Actions</a:t>
-            </a:r>
-          </a:p>
-          <a:p>
-            <a:pPr>
-              <a:spcAft>
-                <a:spcPts val="800"/>
-              </a:spcAft>
-              <a:defRPr sz="1700">
-                <a:solidFill>
-                  <a:srgbClr val="E2E8F0"/>
-                </a:solidFill>
-                <a:latin typeface="Inter"/>
-              </a:defRPr>
-            </a:pPr>
-            <a:r>
-              <a:t>• Feedback i menjëhershëm në git push</a:t>
+              <a:t>Ju verifikoni tipet në TypeScript, rregulloni logjikën e gabuar dhe siguroni mbrojtjen nga gabimet.</a:t>
             </a:r>
           </a:p>
         </p:txBody>
@@ -5526,8 +5434,8 @@
         </p:nvSpPr>
         <p:spPr>
           <a:xfrm>
-            <a:off x="6199632" y="2011680"/>
-            <a:ext cx="2514600" cy="4389120"/>
+            <a:off x="8046720" y="1920240"/>
+            <a:ext cx="3383280" cy="4389120"/>
           </a:xfrm>
           <a:prstGeom prst="roundRect">
             <a:avLst/>
@@ -5535,9 +5443,9 @@
           <a:solidFill>
             <a:srgbClr val="141E34"/>
           </a:solidFill>
-          <a:ln w="31750">
+          <a:ln w="25400">
             <a:solidFill>
-              <a:srgbClr val="F59E0B"/>
+              <a:srgbClr val="10B981"/>
             </a:solidFill>
           </a:ln>
         </p:spPr>
@@ -5571,8 +5479,8 @@
         </p:nvSpPr>
         <p:spPr>
           <a:xfrm>
-            <a:off x="6336792" y="2194560"/>
-            <a:ext cx="2240280" cy="4023360"/>
+            <a:off x="8229600" y="2103120"/>
+            <a:ext cx="3017520" cy="4023360"/>
           </a:xfrm>
           <a:prstGeom prst="rect">
             <a:avLst/>
@@ -5586,39 +5494,36 @@
           <a:lstStyle/>
           <a:p>
             <a:pPr>
-              <a:defRPr sz="5000" b="1">
-                <a:solidFill>
-                  <a:srgbClr val="F59E0B"/>
-                </a:solidFill>
-                <a:latin typeface="Inter"/>
-              </a:defRPr>
-            </a:pPr>
-            <a:r>
-              <a:t>40%</a:t>
+              <a:defRPr sz="1800" b="1">
+                <a:solidFill>
+                  <a:srgbClr val="10B981"/>
+                </a:solidFill>
+                <a:latin typeface="Inter"/>
+              </a:defRPr>
+            </a:pPr>
+            <a:r>
+              <a:t>3. Shënimi i Verifikimit</a:t>
             </a:r>
           </a:p>
           <a:p>
             <a:pPr>
               <a:spcAft>
-                <a:spcPts val="1200"/>
+                <a:spcPts val="1400"/>
               </a:spcAft>
-              <a:defRPr sz="2100" b="1">
-                <a:solidFill>
-                  <a:srgbClr val="FFFFFF"/>
-                </a:solidFill>
-                <a:latin typeface="Inter"/>
-              </a:defRPr>
-            </a:pPr>
-            <a:r>
-              <a:t>📱 Projekti PWA</a:t>
-            </a:r>
-          </a:p>
-          <a:p>
-            <a:pPr>
-              <a:spcAft>
-                <a:spcPts val="800"/>
-              </a:spcAft>
-              <a:defRPr sz="1700">
+              <a:defRPr sz="1300">
+                <a:solidFill>
+                  <a:srgbClr val="B4C3D7"/>
+                </a:solidFill>
+                <a:latin typeface="Inter"/>
+              </a:defRPr>
+            </a:pPr>
+            <a:r>
+              <a:t>Deklarata Zyrtare e Punës</a:t>
+            </a:r>
+          </a:p>
+          <a:p>
+            <a:pPr>
+              <a:defRPr sz="1500">
                 <a:solidFill>
                   <a:srgbClr val="E2E8F0"/>
                 </a:solidFill>
@@ -5626,184 +5531,7 @@
               </a:defRPr>
             </a:pPr>
             <a:r>
-              <a:t>• PWA mobile për një rast real (si RideShare)</a:t>
-            </a:r>
-          </a:p>
-          <a:p>
-            <a:pPr>
-              <a:spcAft>
-                <a:spcPts val="800"/>
-              </a:spcAft>
-              <a:defRPr sz="1700">
-                <a:solidFill>
-                  <a:srgbClr val="E2E8F0"/>
-                </a:solidFill>
-                <a:latin typeface="Inter"/>
-              </a:defRPr>
-            </a:pPr>
-            <a:r>
-              <a:t>• Supabase DB + Auth + RLS e plotë</a:t>
-            </a:r>
-          </a:p>
-          <a:p>
-            <a:pPr>
-              <a:spcAft>
-                <a:spcPts val="800"/>
-              </a:spcAft>
-              <a:defRPr sz="1700">
-                <a:solidFill>
-                  <a:srgbClr val="E2E8F0"/>
-                </a:solidFill>
-                <a:latin typeface="Inter"/>
-              </a:defRPr>
-            </a:pPr>
-            <a:r>
-              <a:t>• Optimizim Touch-First &amp; Offline Mode</a:t>
-            </a:r>
-          </a:p>
-        </p:txBody>
-      </p:sp>
-      <p:sp>
-        <p:nvSpPr>
-          <p:cNvPr id="12" name="Rounded Rectangle 11"/>
-          <p:cNvSpPr/>
-          <p:nvPr/>
-        </p:nvSpPr>
-        <p:spPr>
-          <a:xfrm>
-            <a:off x="8933688" y="2011680"/>
-            <a:ext cx="2514600" cy="4389120"/>
-          </a:xfrm>
-          <a:prstGeom prst="roundRect">
-            <a:avLst/>
-          </a:prstGeom>
-          <a:solidFill>
-            <a:srgbClr val="141E34"/>
-          </a:solidFill>
-          <a:ln w="31750">
-            <a:solidFill>
-              <a:srgbClr val="38BDF8"/>
-            </a:solidFill>
-          </a:ln>
-        </p:spPr>
-        <p:style>
-          <a:lnRef idx="1">
-            <a:schemeClr val="accent1"/>
-          </a:lnRef>
-          <a:fillRef idx="3">
-            <a:schemeClr val="accent1"/>
-          </a:fillRef>
-          <a:effectRef idx="2">
-            <a:schemeClr val="accent1"/>
-          </a:effectRef>
-          <a:fontRef idx="minor">
-            <a:schemeClr val="lt1"/>
-          </a:fontRef>
-        </p:style>
-        <p:txBody>
-          <a:bodyPr rtlCol="0" anchor="ctr"/>
-          <a:lstStyle/>
-          <a:p>
-            <a:pPr algn="ctr"/>
-          </a:p>
-        </p:txBody>
-      </p:sp>
-      <p:sp>
-        <p:nvSpPr>
-          <p:cNvPr id="13" name="TextBox 12"/>
-          <p:cNvSpPr txBox="1"/>
-          <p:nvPr/>
-        </p:nvSpPr>
-        <p:spPr>
-          <a:xfrm>
-            <a:off x="9070848" y="2194560"/>
-            <a:ext cx="2240280" cy="4023360"/>
-          </a:xfrm>
-          <a:prstGeom prst="rect">
-            <a:avLst/>
-          </a:prstGeom>
-          <a:noFill/>
-        </p:spPr>
-        <p:txBody>
-          <a:bodyPr wrap="square">
-            <a:spAutoFit/>
-          </a:bodyPr>
-          <a:lstStyle/>
-          <a:p>
-            <a:pPr>
-              <a:defRPr sz="5000" b="1">
-                <a:solidFill>
-                  <a:srgbClr val="38BDF8"/>
-                </a:solidFill>
-                <a:latin typeface="Inter"/>
-              </a:defRPr>
-            </a:pPr>
-            <a:r>
-              <a:t>20%</a:t>
-            </a:r>
-          </a:p>
-          <a:p>
-            <a:pPr>
-              <a:spcAft>
-                <a:spcPts val="1200"/>
-              </a:spcAft>
-              <a:defRPr sz="2100" b="1">
-                <a:solidFill>
-                  <a:srgbClr val="FFFFFF"/>
-                </a:solidFill>
-                <a:latin typeface="Inter"/>
-              </a:defRPr>
-            </a:pPr>
-            <a:r>
-              <a:t>🏆 Demo Day Live</a:t>
-            </a:r>
-          </a:p>
-          <a:p>
-            <a:pPr>
-              <a:spcAft>
-                <a:spcPts val="800"/>
-              </a:spcAft>
-              <a:defRPr sz="1700">
-                <a:solidFill>
-                  <a:srgbClr val="E2E8F0"/>
-                </a:solidFill>
-                <a:latin typeface="Inter"/>
-              </a:defRPr>
-            </a:pPr>
-            <a:r>
-              <a:t>• Prezantim 5-minutësh në Javën 15</a:t>
-            </a:r>
-          </a:p>
-          <a:p>
-            <a:pPr>
-              <a:spcAft>
-                <a:spcPts val="800"/>
-              </a:spcAft>
-              <a:defRPr sz="1700">
-                <a:solidFill>
-                  <a:srgbClr val="E2E8F0"/>
-                </a:solidFill>
-                <a:latin typeface="Inter"/>
-              </a:defRPr>
-            </a:pPr>
-            <a:r>
-              <a:t>• Demo live nga telefoni në auditor</a:t>
-            </a:r>
-          </a:p>
-          <a:p>
-            <a:pPr>
-              <a:spcAft>
-                <a:spcPts val="800"/>
-              </a:spcAft>
-              <a:defRPr sz="1700">
-                <a:solidFill>
-                  <a:srgbClr val="E2E8F0"/>
-                </a:solidFill>
-                <a:latin typeface="Inter"/>
-              </a:defRPr>
-            </a:pPr>
-            <a:r>
-              <a:t>• Mbrojtje teknike e thellë e kodit</a:t>
+              <a:t>Për çdo detyrë dorëzoni AI_Usage_Verification_Note.md: çfarë pyetët, çfarë modifikuat dhe si e testuat.</a:t>
             </a:r>
           </a:p>
         </p:txBody>
@@ -5892,7 +5620,7 @@
           <a:lstStyle/>
           <a:p>
             <a:pPr>
-              <a:defRPr sz="1500" b="1">
+              <a:defRPr sz="1400" b="1">
                 <a:solidFill>
                   <a:srgbClr val="38BDF8"/>
                 </a:solidFill>
@@ -5900,7 +5628,7 @@
               </a:defRPr>
             </a:pPr>
             <a:r>
-              <a:t>EFIKASITET &amp; SHPEJTËSI</a:t>
+              <a:t>FORMULA E NOTIMIT</a:t>
             </a:r>
           </a:p>
         </p:txBody>
@@ -5913,7 +5641,7 @@
         </p:nvSpPr>
         <p:spPr>
           <a:xfrm>
-            <a:off x="731520" y="685800"/>
+            <a:off x="731520" y="658368"/>
             <a:ext cx="10698480" cy="777240"/>
           </a:xfrm>
           <a:prstGeom prst="rect">
@@ -5928,7 +5656,7 @@
           <a:lstStyle/>
           <a:p>
             <a:pPr>
-              <a:defRPr sz="3600" b="1">
+              <a:defRPr sz="3400" b="1">
                 <a:solidFill>
                   <a:srgbClr val="FFFFFF"/>
                 </a:solidFill>
@@ -5936,7 +5664,7 @@
               </a:defRPr>
             </a:pPr>
             <a:r>
-              <a:t>Automatizimi i Detyrave Javore: GitHub Autograding</a:t>
+              <a:t>Formula e Vlerësimit: 10% / 30% / 40% / 20%</a:t>
             </a:r>
           </a:p>
         </p:txBody>
@@ -5949,7 +5677,7 @@
         </p:nvSpPr>
         <p:spPr>
           <a:xfrm>
-            <a:off x="731520" y="1444752"/>
+            <a:off x="731520" y="1417320"/>
             <a:ext cx="10698480" cy="502920"/>
           </a:xfrm>
           <a:prstGeom prst="rect">
@@ -5964,7 +5692,7 @@
           <a:lstStyle/>
           <a:p>
             <a:pPr>
-              <a:defRPr sz="2100">
+              <a:defRPr sz="1900">
                 <a:solidFill>
                   <a:srgbClr val="E2E8F0"/>
                 </a:solidFill>
@@ -5972,7 +5700,7 @@
               </a:defRPr>
             </a:pPr>
             <a:r>
-              <a:t>Zero vonesa në korrigjim — çdo 'git push' testohet dhe vlerësohet menjëherë përmes CI/CD.</a:t>
+              <a:t>Bologna 6 ECTS: 150–180 orë ngarkesë reale e ndarë midis orëve të kontaktit dhe projektit.</a:t>
             </a:r>
           </a:p>
         </p:txBody>
@@ -5985,8 +5713,8 @@
         </p:nvSpPr>
         <p:spPr>
           <a:xfrm>
-            <a:off x="731520" y="2011680"/>
-            <a:ext cx="5120640" cy="4389120"/>
+            <a:off x="731520" y="1920240"/>
+            <a:ext cx="2514600" cy="4389120"/>
           </a:xfrm>
           <a:prstGeom prst="roundRect">
             <a:avLst/>
@@ -5994,9 +5722,9 @@
           <a:solidFill>
             <a:srgbClr val="141E34"/>
           </a:solidFill>
-          <a:ln w="31750">
+          <a:ln w="25400">
             <a:solidFill>
-              <a:srgbClr val="6366F1"/>
+              <a:srgbClr val="38BDF8"/>
             </a:solidFill>
           </a:ln>
         </p:spPr>
@@ -6030,8 +5758,8 @@
         </p:nvSpPr>
         <p:spPr>
           <a:xfrm>
-            <a:off x="1005840" y="2286000"/>
-            <a:ext cx="4572000" cy="3840480"/>
+            <a:off x="868680" y="2103120"/>
+            <a:ext cx="2240280" cy="4023360"/>
           </a:xfrm>
           <a:prstGeom prst="rect">
             <a:avLst/>
@@ -6045,18 +5773,15 @@
           <a:lstStyle/>
           <a:p>
             <a:pPr>
-              <a:spcAft>
-                <a:spcPts val="1600"/>
-              </a:spcAft>
-              <a:defRPr sz="2500" b="1">
-                <a:solidFill>
-                  <a:srgbClr val="FFFFFF"/>
-                </a:solidFill>
-                <a:latin typeface="Inter"/>
-              </a:defRPr>
-            </a:pPr>
-            <a:r>
-              <a:t>💻 Fluksi i Studentit në Çdo Javë</a:t>
+              <a:defRPr sz="3600" b="1">
+                <a:solidFill>
+                  <a:srgbClr val="38BDF8"/>
+                </a:solidFill>
+                <a:latin typeface="Inter"/>
+              </a:defRPr>
+            </a:pPr>
+            <a:r>
+              <a:t>10%</a:t>
             </a:r>
           </a:p>
           <a:p>
@@ -6064,7 +5789,20 @@
               <a:spcAft>
                 <a:spcPts val="1200"/>
               </a:spcAft>
-              <a:defRPr sz="1900">
+              <a:defRPr sz="1600" b="1">
+                <a:solidFill>
+                  <a:srgbClr val="FFFFFF"/>
+                </a:solidFill>
+                <a:latin typeface="Inter"/>
+              </a:defRPr>
+            </a:pPr>
+            <a:r>
+              <a:t>Pjesëmarrja &amp; Check-in</a:t>
+            </a:r>
+          </a:p>
+          <a:p>
+            <a:pPr>
+              <a:defRPr sz="1400">
                 <a:solidFill>
                   <a:srgbClr val="E2E8F0"/>
                 </a:solidFill>
@@ -6072,39 +5810,7 @@
               </a:defRPr>
             </a:pPr>
             <a:r>
-              <a:t>1. Prano Detyrën: Klikoni ftesën në GitHub Classroom për të hapur depon tuaj private.</a:t>
-            </a:r>
-          </a:p>
-          <a:p>
-            <a:pPr>
-              <a:spcAft>
-                <a:spcPts val="1200"/>
-              </a:spcAft>
-              <a:defRPr sz="1900">
-                <a:solidFill>
-                  <a:srgbClr val="E2E8F0"/>
-                </a:solidFill>
-                <a:latin typeface="Inter"/>
-              </a:defRPr>
-            </a:pPr>
-            <a:r>
-              <a:t>2. Kodo me Copilot: Zgjidhni kërkesat e ushtrimit (komponentët, logjikën, lidhjen me DB).</a:t>
-            </a:r>
-          </a:p>
-          <a:p>
-            <a:pPr>
-              <a:spcAft>
-                <a:spcPts val="1200"/>
-              </a:spcAft>
-              <a:defRPr sz="1900">
-                <a:solidFill>
-                  <a:srgbClr val="E2E8F0"/>
-                </a:solidFill>
-                <a:latin typeface="Inter"/>
-              </a:defRPr>
-            </a:pPr>
-            <a:r>
-              <a:t>3. Git Push: Ekzekutoni 'git push origin main' drejt depos suaj zyrtare në GitHub.</a:t>
+              <a:t>Evidencë me QR në çdo fillim ligjërate. Politikë transparente për arsyetimin e mungesave mjekësore.</a:t>
             </a:r>
           </a:p>
         </p:txBody>
@@ -6117,8 +5823,8 @@
         </p:nvSpPr>
         <p:spPr>
           <a:xfrm>
-            <a:off x="6309360" y="2011680"/>
-            <a:ext cx="5120640" cy="4389120"/>
+            <a:off x="3465576" y="1920240"/>
+            <a:ext cx="2514600" cy="4389120"/>
           </a:xfrm>
           <a:prstGeom prst="roundRect">
             <a:avLst/>
@@ -6126,9 +5832,9 @@
           <a:solidFill>
             <a:srgbClr val="141E34"/>
           </a:solidFill>
-          <a:ln w="31750">
+          <a:ln w="25400">
             <a:solidFill>
-              <a:srgbClr val="10B981"/>
+              <a:srgbClr val="6366F1"/>
             </a:solidFill>
           </a:ln>
         </p:spPr>
@@ -6162,8 +5868,8 @@
         </p:nvSpPr>
         <p:spPr>
           <a:xfrm>
-            <a:off x="6583680" y="2286000"/>
-            <a:ext cx="4572000" cy="3840480"/>
+            <a:off x="3602736" y="2103120"/>
+            <a:ext cx="2240280" cy="4023360"/>
           </a:xfrm>
           <a:prstGeom prst="rect">
             <a:avLst/>
@@ -6177,18 +5883,15 @@
           <a:lstStyle/>
           <a:p>
             <a:pPr>
-              <a:spcAft>
-                <a:spcPts val="1600"/>
-              </a:spcAft>
-              <a:defRPr sz="2500" b="1">
-                <a:solidFill>
-                  <a:srgbClr val="FFFFFF"/>
-                </a:solidFill>
-                <a:latin typeface="Inter"/>
-              </a:defRPr>
-            </a:pPr>
-            <a:r>
-              <a:t>🤖 Vlerësimi Automat me GitHub Actions</a:t>
+              <a:defRPr sz="3600" b="1">
+                <a:solidFill>
+                  <a:srgbClr val="6366F1"/>
+                </a:solidFill>
+                <a:latin typeface="Inter"/>
+              </a:defRPr>
+            </a:pPr>
+            <a:r>
+              <a:t>30%</a:t>
             </a:r>
           </a:p>
           <a:p>
@@ -6196,7 +5899,20 @@
               <a:spcAft>
                 <a:spcPts val="1200"/>
               </a:spcAft>
-              <a:defRPr sz="1900">
+              <a:defRPr sz="1600" b="1">
+                <a:solidFill>
+                  <a:srgbClr val="FFFFFF"/>
+                </a:solidFill>
+                <a:latin typeface="Inter"/>
+              </a:defRPr>
+            </a:pPr>
+            <a:r>
+              <a:t>Detyrat Javore</a:t>
+            </a:r>
+          </a:p>
+          <a:p>
+            <a:pPr>
+              <a:defRPr sz="1400">
                 <a:solidFill>
                   <a:srgbClr val="E2E8F0"/>
                 </a:solidFill>
@@ -6204,7 +5920,88 @@
               </a:defRPr>
             </a:pPr>
             <a:r>
-              <a:t>• Teste Automatike: Workflow CI/CD verifikon linter-in, tipet dhe funksionalitetin e kodit.</a:t>
+              <a:t>Ushtrime praktike me GitHub Actions. Statusi i gjelbër CI dhe shpjegimi i saktë i zgjidhjes.</a:t>
+            </a:r>
+          </a:p>
+        </p:txBody>
+      </p:sp>
+      <p:sp>
+        <p:nvSpPr>
+          <p:cNvPr id="10" name="Rounded Rectangle 9"/>
+          <p:cNvSpPr/>
+          <p:nvPr/>
+        </p:nvSpPr>
+        <p:spPr>
+          <a:xfrm>
+            <a:off x="6199632" y="1920240"/>
+            <a:ext cx="2514600" cy="4389120"/>
+          </a:xfrm>
+          <a:prstGeom prst="roundRect">
+            <a:avLst/>
+          </a:prstGeom>
+          <a:solidFill>
+            <a:srgbClr val="141E34"/>
+          </a:solidFill>
+          <a:ln w="25400">
+            <a:solidFill>
+              <a:srgbClr val="10B981"/>
+            </a:solidFill>
+          </a:ln>
+        </p:spPr>
+        <p:style>
+          <a:lnRef idx="1">
+            <a:schemeClr val="accent1"/>
+          </a:lnRef>
+          <a:fillRef idx="3">
+            <a:schemeClr val="accent1"/>
+          </a:fillRef>
+          <a:effectRef idx="2">
+            <a:schemeClr val="accent1"/>
+          </a:effectRef>
+          <a:fontRef idx="minor">
+            <a:schemeClr val="lt1"/>
+          </a:fontRef>
+        </p:style>
+        <p:txBody>
+          <a:bodyPr rtlCol="0" anchor="ctr"/>
+          <a:lstStyle/>
+          <a:p>
+            <a:pPr algn="ctr"/>
+          </a:p>
+        </p:txBody>
+      </p:sp>
+      <p:sp>
+        <p:nvSpPr>
+          <p:cNvPr id="11" name="TextBox 10"/>
+          <p:cNvSpPr txBox="1"/>
+          <p:nvPr/>
+        </p:nvSpPr>
+        <p:spPr>
+          <a:xfrm>
+            <a:off x="6336792" y="2103120"/>
+            <a:ext cx="2240280" cy="4023360"/>
+          </a:xfrm>
+          <a:prstGeom prst="rect">
+            <a:avLst/>
+          </a:prstGeom>
+          <a:noFill/>
+        </p:spPr>
+        <p:txBody>
+          <a:bodyPr wrap="square">
+            <a:spAutoFit/>
+          </a:bodyPr>
+          <a:lstStyle/>
+          <a:p>
+            <a:pPr>
+              <a:defRPr sz="3600" b="1">
+                <a:solidFill>
+                  <a:srgbClr val="10B981"/>
+                </a:solidFill>
+                <a:latin typeface="Inter"/>
+              </a:defRPr>
+            </a:pPr>
+            <a:r>
+              <a:t>40%</a:t>
             </a:r>
           </a:p>
           <a:p>
@@ -6212,7 +6009,20 @@
               <a:spcAft>
                 <a:spcPts val="1200"/>
               </a:spcAft>
-              <a:defRPr sz="1900">
+              <a:defRPr sz="1600" b="1">
+                <a:solidFill>
+                  <a:srgbClr val="FFFFFF"/>
+                </a:solidFill>
+                <a:latin typeface="Inter"/>
+              </a:defRPr>
+            </a:pPr>
+            <a:r>
+              <a:t>Projekti PWA</a:t>
+            </a:r>
+          </a:p>
+          <a:p>
+            <a:pPr>
+              <a:defRPr sz="1400">
                 <a:solidFill>
                   <a:srgbClr val="E2E8F0"/>
                 </a:solidFill>
@@ -6220,7 +6030,88 @@
               </a:defRPr>
             </a:pPr>
             <a:r>
-              <a:t>• Rezultat i Menjëhershëm: Pikët (p.sh. 10/10) shfaqen te badge në README brenda 60 sekondave.</a:t>
+              <a:t>Aplikacion mobil i plotë me Next.js, Supabase dhe PWA. Vlerësohet funksionaliteti dhe stabiliteti offline.</a:t>
+            </a:r>
+          </a:p>
+        </p:txBody>
+      </p:sp>
+      <p:sp>
+        <p:nvSpPr>
+          <p:cNvPr id="12" name="Rounded Rectangle 11"/>
+          <p:cNvSpPr/>
+          <p:nvPr/>
+        </p:nvSpPr>
+        <p:spPr>
+          <a:xfrm>
+            <a:off x="8933688" y="1920240"/>
+            <a:ext cx="2514600" cy="4389120"/>
+          </a:xfrm>
+          <a:prstGeom prst="roundRect">
+            <a:avLst/>
+          </a:prstGeom>
+          <a:solidFill>
+            <a:srgbClr val="141E34"/>
+          </a:solidFill>
+          <a:ln w="25400">
+            <a:solidFill>
+              <a:srgbClr val="F59E0B"/>
+            </a:solidFill>
+          </a:ln>
+        </p:spPr>
+        <p:style>
+          <a:lnRef idx="1">
+            <a:schemeClr val="accent1"/>
+          </a:lnRef>
+          <a:fillRef idx="3">
+            <a:schemeClr val="accent1"/>
+          </a:fillRef>
+          <a:effectRef idx="2">
+            <a:schemeClr val="accent1"/>
+          </a:effectRef>
+          <a:fontRef idx="minor">
+            <a:schemeClr val="lt1"/>
+          </a:fontRef>
+        </p:style>
+        <p:txBody>
+          <a:bodyPr rtlCol="0" anchor="ctr"/>
+          <a:lstStyle/>
+          <a:p>
+            <a:pPr algn="ctr"/>
+          </a:p>
+        </p:txBody>
+      </p:sp>
+      <p:sp>
+        <p:nvSpPr>
+          <p:cNvPr id="13" name="TextBox 12"/>
+          <p:cNvSpPr txBox="1"/>
+          <p:nvPr/>
+        </p:nvSpPr>
+        <p:spPr>
+          <a:xfrm>
+            <a:off x="9070848" y="2103120"/>
+            <a:ext cx="2240280" cy="4023360"/>
+          </a:xfrm>
+          <a:prstGeom prst="rect">
+            <a:avLst/>
+          </a:prstGeom>
+          <a:noFill/>
+        </p:spPr>
+        <p:txBody>
+          <a:bodyPr wrap="square">
+            <a:spAutoFit/>
+          </a:bodyPr>
+          <a:lstStyle/>
+          <a:p>
+            <a:pPr>
+              <a:defRPr sz="3600" b="1">
+                <a:solidFill>
+                  <a:srgbClr val="F59E0B"/>
+                </a:solidFill>
+                <a:latin typeface="Inter"/>
+              </a:defRPr>
+            </a:pPr>
+            <a:r>
+              <a:t>20%</a:t>
             </a:r>
           </a:p>
           <a:p>
@@ -6228,7 +6119,20 @@
               <a:spcAft>
                 <a:spcPts val="1200"/>
               </a:spcAft>
-              <a:defRPr sz="1900">
+              <a:defRPr sz="1600" b="1">
+                <a:solidFill>
+                  <a:srgbClr val="FFFFFF"/>
+                </a:solidFill>
+                <a:latin typeface="Inter"/>
+              </a:defRPr>
+            </a:pPr>
+            <a:r>
+              <a:t>Demo Day (Java 15)</a:t>
+            </a:r>
+          </a:p>
+          <a:p>
+            <a:pPr>
+              <a:defRPr sz="1400">
                 <a:solidFill>
                   <a:srgbClr val="E2E8F0"/>
                 </a:solidFill>
@@ -6236,7 +6140,7 @@
               </a:defRPr>
             </a:pPr>
             <a:r>
-              <a:t>• Zero Pritje / Pa Ngarkesë: Notat sinkronizohen në Gradebook CSV të profesorit pa asnjë gabim njerëzor!</a:t>
+              <a:t>Prezantim 3-minutësh para jurisë dhe mbrojtje individuale e kodit dhe vendimeve arkitekturore.</a:t>
             </a:r>
           </a:p>
         </p:txBody>
@@ -6325,7 +6229,7 @@
           <a:lstStyle/>
           <a:p>
             <a:pPr>
-              <a:defRPr sz="1500" b="1">
+              <a:defRPr sz="1400" b="1">
                 <a:solidFill>
                   <a:srgbClr val="38BDF8"/>
                 </a:solidFill>
@@ -6333,7 +6237,7 @@
               </a:defRPr>
             </a:pPr>
             <a:r>
-              <a:t>KULMI I SEMESTRIT</a:t>
+              <a:t>AUTOMATIZIMI I CILËSISË</a:t>
             </a:r>
           </a:p>
         </p:txBody>
@@ -6346,7 +6250,7 @@
         </p:nvSpPr>
         <p:spPr>
           <a:xfrm>
-            <a:off x="731520" y="685800"/>
+            <a:off x="731520" y="658368"/>
             <a:ext cx="10698480" cy="777240"/>
           </a:xfrm>
           <a:prstGeom prst="rect">
@@ -6361,7 +6265,7 @@
           <a:lstStyle/>
           <a:p>
             <a:pPr>
-              <a:defRPr sz="3600" b="1">
+              <a:defRPr sz="3400" b="1">
                 <a:solidFill>
                   <a:srgbClr val="FFFFFF"/>
                 </a:solidFill>
@@ -6369,7 +6273,7 @@
               </a:defRPr>
             </a:pPr>
             <a:r>
-              <a:t>Demo Day në Javën 15: Vizioni i Suksesit!</a:t>
+              <a:t>Feedback i Menjëhershëm: Testet Automate me GitHub Actions</a:t>
             </a:r>
           </a:p>
         </p:txBody>
@@ -6382,7 +6286,7 @@
         </p:nvSpPr>
         <p:spPr>
           <a:xfrm>
-            <a:off x="731520" y="1444752"/>
+            <a:off x="731520" y="1417320"/>
             <a:ext cx="10698480" cy="502920"/>
           </a:xfrm>
           <a:prstGeom prst="rect">
@@ -6397,7 +6301,7 @@
           <a:lstStyle/>
           <a:p>
             <a:pPr>
-              <a:defRPr sz="2100">
+              <a:defRPr sz="1900">
                 <a:solidFill>
                   <a:srgbClr val="E2E8F0"/>
                 </a:solidFill>
@@ -6405,7 +6309,7 @@
               </a:defRPr>
             </a:pPr>
             <a:r>
-              <a:t>Dita kur telefoni juaj kthehet në dëshminë e arritjes suaj profesionale.</a:t>
+              <a:t>Çdo detyrë testohet automatikisht sapo bëni 'git push'. Zero pritje për korrigjim manual.</a:t>
             </a:r>
           </a:p>
         </p:txBody>
@@ -6418,8 +6322,8 @@
         </p:nvSpPr>
         <p:spPr>
           <a:xfrm>
-            <a:off x="731520" y="2011680"/>
-            <a:ext cx="5120640" cy="4389120"/>
+            <a:off x="731520" y="1920240"/>
+            <a:ext cx="2514600" cy="4389120"/>
           </a:xfrm>
           <a:prstGeom prst="roundRect">
             <a:avLst/>
@@ -6427,7 +6331,7 @@
           <a:solidFill>
             <a:srgbClr val="141E34"/>
           </a:solidFill>
-          <a:ln w="31750">
+          <a:ln w="25400">
             <a:solidFill>
               <a:srgbClr val="38BDF8"/>
             </a:solidFill>
@@ -6463,8 +6367,8 @@
         </p:nvSpPr>
         <p:spPr>
           <a:xfrm>
-            <a:off x="1005840" y="2286000"/>
-            <a:ext cx="4572000" cy="3840480"/>
+            <a:off x="868680" y="2103120"/>
+            <a:ext cx="2240280" cy="4023360"/>
           </a:xfrm>
           <a:prstGeom prst="rect">
             <a:avLst/>
@@ -6478,18 +6382,15 @@
           <a:lstStyle/>
           <a:p>
             <a:pPr>
-              <a:spcAft>
-                <a:spcPts val="1600"/>
-              </a:spcAft>
-              <a:defRPr sz="2500" b="1">
-                <a:solidFill>
-                  <a:srgbClr val="FFFFFF"/>
-                </a:solidFill>
-                <a:latin typeface="Inter"/>
-              </a:defRPr>
-            </a:pPr>
-            <a:r>
-              <a:t>🎤 Formati i Prezantimit</a:t>
+              <a:defRPr sz="1600" b="1">
+                <a:solidFill>
+                  <a:srgbClr val="38BDF8"/>
+                </a:solidFill>
+                <a:latin typeface="Inter"/>
+              </a:defRPr>
+            </a:pPr>
+            <a:r>
+              <a:t>Hapi 1: Push në GitHub</a:t>
             </a:r>
           </a:p>
           <a:p>
@@ -6497,7 +6398,20 @@
               <a:spcAft>
                 <a:spcPts val="1200"/>
               </a:spcAft>
-              <a:defRPr sz="1800">
+              <a:defRPr sz="1200">
+                <a:solidFill>
+                  <a:srgbClr val="B4C3D7"/>
+                </a:solidFill>
+                <a:latin typeface="Inter"/>
+              </a:defRPr>
+            </a:pPr>
+            <a:r>
+              <a:t>Kodi ngarkohet në repo</a:t>
+            </a:r>
+          </a:p>
+          <a:p>
+            <a:pPr>
+              <a:defRPr sz="1400">
                 <a:solidFill>
                   <a:srgbClr val="E2E8F0"/>
                 </a:solidFill>
@@ -6505,55 +6419,7 @@
               </a:defRPr>
             </a:pPr>
             <a:r>
-              <a:t>• 5 Minuta Live: Prezantoni aplikacionin direkt nga telefoni juaj celular para sallës.</a:t>
-            </a:r>
-          </a:p>
-          <a:p>
-            <a:pPr>
-              <a:spcAft>
-                <a:spcPts val="1200"/>
-              </a:spcAft>
-              <a:defRPr sz="1800">
-                <a:solidFill>
-                  <a:srgbClr val="E2E8F0"/>
-                </a:solidFill>
-                <a:latin typeface="Inter"/>
-              </a:defRPr>
-            </a:pPr>
-            <a:r>
-              <a:t>• Problemi Real: Tregoni problemin që keni zgjedhur (p.sh. transporti me AAB RideShare ose biznesi lokal).</a:t>
-            </a:r>
-          </a:p>
-          <a:p>
-            <a:pPr>
-              <a:spcAft>
-                <a:spcPts val="1200"/>
-              </a:spcAft>
-              <a:defRPr sz="1800">
-                <a:solidFill>
-                  <a:srgbClr val="E2E8F0"/>
-                </a:solidFill>
-                <a:latin typeface="Inter"/>
-              </a:defRPr>
-            </a:pPr>
-            <a:r>
-              <a:t>• Demonstrim i Veçorive: Kryeni një rezervim live, tregoni modin offline dhe RLS në Supabase.</a:t>
-            </a:r>
-          </a:p>
-          <a:p>
-            <a:pPr>
-              <a:spcAft>
-                <a:spcPts val="1200"/>
-              </a:spcAft>
-              <a:defRPr sz="1800">
-                <a:solidFill>
-                  <a:srgbClr val="E2E8F0"/>
-                </a:solidFill>
-                <a:latin typeface="Inter"/>
-              </a:defRPr>
-            </a:pPr>
-            <a:r>
-              <a:t>• Mbrojtja Teknike: Përgjigjuni 2 pyetjeve të shkurtra teknike mbi arkitekturën e kodit tuaj.</a:t>
+              <a:t>Çdo commit shkakton ekzekutimin e menjëhershëm të skedarit `.github/workflows/ci.yml`.</a:t>
             </a:r>
           </a:p>
         </p:txBody>
@@ -6566,8 +6432,8 @@
         </p:nvSpPr>
         <p:spPr>
           <a:xfrm>
-            <a:off x="6309360" y="2011680"/>
-            <a:ext cx="5120640" cy="4389120"/>
+            <a:off x="3465576" y="1920240"/>
+            <a:ext cx="2514600" cy="4389120"/>
           </a:xfrm>
           <a:prstGeom prst="roundRect">
             <a:avLst/>
@@ -6575,9 +6441,9 @@
           <a:solidFill>
             <a:srgbClr val="141E34"/>
           </a:solidFill>
-          <a:ln w="31750">
+          <a:ln w="25400">
             <a:solidFill>
-              <a:srgbClr val="10B981"/>
+              <a:srgbClr val="6366F1"/>
             </a:solidFill>
           </a:ln>
         </p:spPr>
@@ -6611,8 +6477,8 @@
         </p:nvSpPr>
         <p:spPr>
           <a:xfrm>
-            <a:off x="6583680" y="2286000"/>
-            <a:ext cx="4572000" cy="3840480"/>
+            <a:off x="3602736" y="2103120"/>
+            <a:ext cx="2240280" cy="4023360"/>
           </a:xfrm>
           <a:prstGeom prst="rect">
             <a:avLst/>
@@ -6626,18 +6492,15 @@
           <a:lstStyle/>
           <a:p>
             <a:pPr>
-              <a:spcAft>
-                <a:spcPts val="1600"/>
-              </a:spcAft>
-              <a:defRPr sz="2500" b="1">
-                <a:solidFill>
-                  <a:srgbClr val="10B981"/>
-                </a:solidFill>
-                <a:latin typeface="Inter"/>
-              </a:defRPr>
-            </a:pPr>
-            <a:r>
-              <a:t>🌟 Çfarë Fitoni në Përfundim?</a:t>
+              <a:defRPr sz="1600" b="1">
+                <a:solidFill>
+                  <a:srgbClr val="6366F1"/>
+                </a:solidFill>
+                <a:latin typeface="Inter"/>
+              </a:defRPr>
+            </a:pPr>
+            <a:r>
+              <a:t>Hapi 2: Build &amp; Lint</a:t>
             </a:r>
           </a:p>
           <a:p>
@@ -6645,7 +6508,20 @@
               <a:spcAft>
                 <a:spcPts val="1200"/>
               </a:spcAft>
-              <a:defRPr sz="1800">
+              <a:defRPr sz="1200">
+                <a:solidFill>
+                  <a:srgbClr val="B4C3D7"/>
+                </a:solidFill>
+                <a:latin typeface="Inter"/>
+              </a:defRPr>
+            </a:pPr>
+            <a:r>
+              <a:t>Kontrolli i sintaksës</a:t>
+            </a:r>
+          </a:p>
+          <a:p>
+            <a:pPr>
+              <a:defRPr sz="1400">
                 <a:solidFill>
                   <a:srgbClr val="E2E8F0"/>
                 </a:solidFill>
@@ -6653,7 +6529,88 @@
               </a:defRPr>
             </a:pPr>
             <a:r>
-              <a:t>• Portofol Real në GitHub: Një projekt i plotë production-ready që e vendosni menjëherë në CV dhe LinkedIn.</a:t>
+              <a:t>Serveri i GitHub verifikon tipet në TypeScript, pastërtinë e kodit me ESLint dhe kompilimin me Next.js.</a:t>
+            </a:r>
+          </a:p>
+        </p:txBody>
+      </p:sp>
+      <p:sp>
+        <p:nvSpPr>
+          <p:cNvPr id="10" name="Rounded Rectangle 9"/>
+          <p:cNvSpPr/>
+          <p:nvPr/>
+        </p:nvSpPr>
+        <p:spPr>
+          <a:xfrm>
+            <a:off x="6199632" y="1920240"/>
+            <a:ext cx="2514600" cy="4389120"/>
+          </a:xfrm>
+          <a:prstGeom prst="roundRect">
+            <a:avLst/>
+          </a:prstGeom>
+          <a:solidFill>
+            <a:srgbClr val="141E34"/>
+          </a:solidFill>
+          <a:ln w="25400">
+            <a:solidFill>
+              <a:srgbClr val="10B981"/>
+            </a:solidFill>
+          </a:ln>
+        </p:spPr>
+        <p:style>
+          <a:lnRef idx="1">
+            <a:schemeClr val="accent1"/>
+          </a:lnRef>
+          <a:fillRef idx="3">
+            <a:schemeClr val="accent1"/>
+          </a:fillRef>
+          <a:effectRef idx="2">
+            <a:schemeClr val="accent1"/>
+          </a:effectRef>
+          <a:fontRef idx="minor">
+            <a:schemeClr val="lt1"/>
+          </a:fontRef>
+        </p:style>
+        <p:txBody>
+          <a:bodyPr rtlCol="0" anchor="ctr"/>
+          <a:lstStyle/>
+          <a:p>
+            <a:pPr algn="ctr"/>
+          </a:p>
+        </p:txBody>
+      </p:sp>
+      <p:sp>
+        <p:nvSpPr>
+          <p:cNvPr id="11" name="TextBox 10"/>
+          <p:cNvSpPr txBox="1"/>
+          <p:nvPr/>
+        </p:nvSpPr>
+        <p:spPr>
+          <a:xfrm>
+            <a:off x="6336792" y="2103120"/>
+            <a:ext cx="2240280" cy="4023360"/>
+          </a:xfrm>
+          <a:prstGeom prst="rect">
+            <a:avLst/>
+          </a:prstGeom>
+          <a:noFill/>
+        </p:spPr>
+        <p:txBody>
+          <a:bodyPr wrap="square">
+            <a:spAutoFit/>
+          </a:bodyPr>
+          <a:lstStyle/>
+          <a:p>
+            <a:pPr>
+              <a:defRPr sz="1600" b="1">
+                <a:solidFill>
+                  <a:srgbClr val="10B981"/>
+                </a:solidFill>
+                <a:latin typeface="Inter"/>
+              </a:defRPr>
+            </a:pPr>
+            <a:r>
+              <a:t>Hapi 3: Testimi i PWA</a:t>
             </a:r>
           </a:p>
           <a:p>
@@ -6661,7 +6618,20 @@
               <a:spcAft>
                 <a:spcPts val="1200"/>
               </a:spcAft>
-              <a:defRPr sz="1800">
+              <a:defRPr sz="1200">
+                <a:solidFill>
+                  <a:srgbClr val="B4C3D7"/>
+                </a:solidFill>
+                <a:latin typeface="Inter"/>
+              </a:defRPr>
+            </a:pPr>
+            <a:r>
+              <a:t>Kriteret e Pranimit</a:t>
+            </a:r>
+          </a:p>
+          <a:p>
+            <a:pPr>
+              <a:defRPr sz="1400">
                 <a:solidFill>
                   <a:srgbClr val="E2E8F0"/>
                 </a:solidFill>
@@ -6669,7 +6639,88 @@
               </a:defRPr>
             </a:pPr>
             <a:r>
-              <a:t>• Zgjidhje për Komunitetin: Një vegël digjitale që zgjidh një problem të prekshëm për kolegët ose bizneset tona.</a:t>
+              <a:t>Testohet ekzistenca e manifestit, ikonave dhe konfigurimit të service worker-it pa gabime.</a:t>
+            </a:r>
+          </a:p>
+        </p:txBody>
+      </p:sp>
+      <p:sp>
+        <p:nvSpPr>
+          <p:cNvPr id="12" name="Rounded Rectangle 11"/>
+          <p:cNvSpPr/>
+          <p:nvPr/>
+        </p:nvSpPr>
+        <p:spPr>
+          <a:xfrm>
+            <a:off x="8933688" y="1920240"/>
+            <a:ext cx="2514600" cy="4389120"/>
+          </a:xfrm>
+          <a:prstGeom prst="roundRect">
+            <a:avLst/>
+          </a:prstGeom>
+          <a:solidFill>
+            <a:srgbClr val="141E34"/>
+          </a:solidFill>
+          <a:ln w="25400">
+            <a:solidFill>
+              <a:srgbClr val="F59E0B"/>
+            </a:solidFill>
+          </a:ln>
+        </p:spPr>
+        <p:style>
+          <a:lnRef idx="1">
+            <a:schemeClr val="accent1"/>
+          </a:lnRef>
+          <a:fillRef idx="3">
+            <a:schemeClr val="accent1"/>
+          </a:fillRef>
+          <a:effectRef idx="2">
+            <a:schemeClr val="accent1"/>
+          </a:effectRef>
+          <a:fontRef idx="minor">
+            <a:schemeClr val="lt1"/>
+          </a:fontRef>
+        </p:style>
+        <p:txBody>
+          <a:bodyPr rtlCol="0" anchor="ctr"/>
+          <a:lstStyle/>
+          <a:p>
+            <a:pPr algn="ctr"/>
+          </a:p>
+        </p:txBody>
+      </p:sp>
+      <p:sp>
+        <p:nvSpPr>
+          <p:cNvPr id="13" name="TextBox 12"/>
+          <p:cNvSpPr txBox="1"/>
+          <p:nvPr/>
+        </p:nvSpPr>
+        <p:spPr>
+          <a:xfrm>
+            <a:off x="9070848" y="2103120"/>
+            <a:ext cx="2240280" cy="4023360"/>
+          </a:xfrm>
+          <a:prstGeom prst="rect">
+            <a:avLst/>
+          </a:prstGeom>
+          <a:noFill/>
+        </p:spPr>
+        <p:txBody>
+          <a:bodyPr wrap="square">
+            <a:spAutoFit/>
+          </a:bodyPr>
+          <a:lstStyle/>
+          <a:p>
+            <a:pPr>
+              <a:defRPr sz="1600" b="1">
+                <a:solidFill>
+                  <a:srgbClr val="F59E0B"/>
+                </a:solidFill>
+                <a:latin typeface="Inter"/>
+              </a:defRPr>
+            </a:pPr>
+            <a:r>
+              <a:t>Hapi 4: Statusi ✅</a:t>
             </a:r>
           </a:p>
           <a:p>
@@ -6677,7 +6728,20 @@
               <a:spcAft>
                 <a:spcPts val="1200"/>
               </a:spcAft>
-              <a:defRPr sz="1800">
+              <a:defRPr sz="1200">
+                <a:solidFill>
+                  <a:srgbClr val="B4C3D7"/>
+                </a:solidFill>
+                <a:latin typeface="Inter"/>
+              </a:defRPr>
+            </a:pPr>
+            <a:r>
+              <a:t>Pikët e Regjistruara</a:t>
+            </a:r>
+          </a:p>
+          <a:p>
+            <a:pPr>
+              <a:defRPr sz="1400">
                 <a:solidFill>
                   <a:srgbClr val="E2E8F0"/>
                 </a:solidFill>
@@ -6685,23 +6749,7 @@
               </a:defRPr>
             </a:pPr>
             <a:r>
-              <a:t>• Gati për Tregun e Punës: Përvojë praktike me teknologjitë më të kërkuara në kompanitë moderne globale.</a:t>
-            </a:r>
-          </a:p>
-          <a:p>
-            <a:pPr>
-              <a:spcAft>
-                <a:spcPts val="1200"/>
-              </a:spcAft>
-              <a:defRPr sz="1800">
-                <a:solidFill>
-                  <a:srgbClr val="E2E8F0"/>
-                </a:solidFill>
-                <a:latin typeface="Inter"/>
-              </a:defRPr>
-            </a:pPr>
-            <a:r>
-              <a:t>• Notë e Merituar (10): Kushdo që dorëzon projektin dhe e mbron me pasion kualifikohet për vlerësim maksimal!</a:t>
+              <a:t>Nëse testi kalon, asistenti verifikon shpjegimin tuaj. Nëse dështon, rregulloni gabimin brenda ditës.</a:t>
             </a:r>
           </a:p>
         </p:txBody>
@@ -6790,7 +6838,7 @@
           <a:lstStyle/>
           <a:p>
             <a:pPr>
-              <a:defRPr sz="1500" b="1">
+              <a:defRPr sz="1400" b="1">
                 <a:solidFill>
                   <a:srgbClr val="38BDF8"/>
                 </a:solidFill>
@@ -6798,7 +6846,7 @@
               </a:defRPr>
             </a:pPr>
             <a:r>
-              <a:t>EVIDENCA ZYRTARE</a:t>
+              <a:t>FINALJA E KURSIT</a:t>
             </a:r>
           </a:p>
         </p:txBody>
@@ -6811,7 +6859,7 @@
         </p:nvSpPr>
         <p:spPr>
           <a:xfrm>
-            <a:off x="731520" y="685800"/>
+            <a:off x="731520" y="658368"/>
             <a:ext cx="10698480" cy="777240"/>
           </a:xfrm>
           <a:prstGeom prst="rect">
@@ -6826,7 +6874,7 @@
           <a:lstStyle/>
           <a:p>
             <a:pPr>
-              <a:defRPr sz="3600" b="1">
+              <a:defRPr sz="3400" b="1">
                 <a:solidFill>
                   <a:srgbClr val="FFFFFF"/>
                 </a:solidFill>
@@ -6834,7 +6882,7 @@
               </a:defRPr>
             </a:pPr>
             <a:r>
-              <a:t>Regjistrimi i Pranisë: Check-In Live në Portal</a:t>
+              <a:t>Demo Day në Javën 15: Shark Tank Pitch &amp; Mbrojtje</a:t>
             </a:r>
           </a:p>
         </p:txBody>
@@ -6847,7 +6895,7 @@
         </p:nvSpPr>
         <p:spPr>
           <a:xfrm>
-            <a:off x="731520" y="1444752"/>
+            <a:off x="731520" y="1417320"/>
             <a:ext cx="10698480" cy="502920"/>
           </a:xfrm>
           <a:prstGeom prst="rect">
@@ -6862,7 +6910,7 @@
           <a:lstStyle/>
           <a:p>
             <a:pPr>
-              <a:defRPr sz="2100">
+              <a:defRPr sz="1900">
                 <a:solidFill>
                   <a:srgbClr val="E2E8F0"/>
                 </a:solidFill>
@@ -6870,7 +6918,7 @@
               </a:defRPr>
             </a:pPr>
             <a:r>
-              <a:t>Skanoni kodin QR me telefonin tuaj për të regjistruar pjesëmarrjen brenda 2 minutave.</a:t>
+              <a:t>Përmbyllja madhështore ku çdo ekip demonstron produktin e vërtetë para jurisë së ekspertëve.</a:t>
             </a:r>
           </a:p>
         </p:txBody>
@@ -6883,8 +6931,8 @@
         </p:nvSpPr>
         <p:spPr>
           <a:xfrm>
-            <a:off x="731520" y="2011680"/>
-            <a:ext cx="4114800" cy="4389120"/>
+            <a:off x="731520" y="1920240"/>
+            <a:ext cx="3383280" cy="4389120"/>
           </a:xfrm>
           <a:prstGeom prst="roundRect">
             <a:avLst/>
@@ -6892,9 +6940,9 @@
           <a:solidFill>
             <a:srgbClr val="141E34"/>
           </a:solidFill>
-          <a:ln w="31750">
+          <a:ln w="25400">
             <a:solidFill>
-              <a:srgbClr val="10B981"/>
+              <a:srgbClr val="38BDF8"/>
             </a:solidFill>
           </a:ln>
         </p:spPr>
@@ -6920,40 +6968,16 @@
           </a:p>
         </p:txBody>
       </p:sp>
-      <p:pic>
-        <p:nvPicPr>
-          <p:cNvPr id="7" name="Picture 6" descr="qr_master_checkin.png"/>
-          <p:cNvPicPr>
-            <a:picLocks noChangeAspect="1"/>
-          </p:cNvPicPr>
-          <p:nvPr/>
-        </p:nvPicPr>
-        <p:blipFill>
-          <a:blip r:embed="rId2"/>
-          <a:stretch>
-            <a:fillRect/>
-          </a:stretch>
-        </p:blipFill>
-        <p:spPr>
-          <a:xfrm>
-            <a:off x="1188720" y="2286000"/>
-            <a:ext cx="3200400" cy="3200400"/>
-          </a:xfrm>
-          <a:prstGeom prst="rect">
-            <a:avLst/>
-          </a:prstGeom>
-        </p:spPr>
-      </p:pic>
-      <p:sp>
-        <p:nvSpPr>
-          <p:cNvPr id="8" name="TextBox 7"/>
+      <p:sp>
+        <p:nvSpPr>
+          <p:cNvPr id="7" name="TextBox 6"/>
           <p:cNvSpPr txBox="1"/>
           <p:nvPr/>
         </p:nvSpPr>
         <p:spPr>
           <a:xfrm>
-            <a:off x="914400" y="5577840"/>
-            <a:ext cx="3749039" cy="731520"/>
+            <a:off x="914400" y="2103120"/>
+            <a:ext cx="3017520" cy="4023360"/>
           </a:xfrm>
           <a:prstGeom prst="rect">
             <a:avLst/>
@@ -6966,34 +6990,59 @@
           </a:bodyPr>
           <a:lstStyle/>
           <a:p>
-            <a:pPr algn="ctr">
-              <a:defRPr sz="1600" b="1">
-                <a:solidFill>
-                  <a:srgbClr val="10B981"/>
-                </a:solidFill>
-                <a:latin typeface="Inter"/>
-              </a:defRPr>
-            </a:pPr>
-            <a:r>
-              <a:t>SKANO PËR CHECK-IN LIVE</a:t>
-            </a:r>
-            <a:br/>
-            <a:r>
-              <a:t>arbenl.github.io/#checkin</a:t>
-            </a:r>
-          </a:p>
-        </p:txBody>
-      </p:sp>
-      <p:sp>
-        <p:nvSpPr>
-          <p:cNvPr id="9" name="Rounded Rectangle 8"/>
+            <a:pPr>
+              <a:defRPr sz="1800" b="1">
+                <a:solidFill>
+                  <a:srgbClr val="38BDF8"/>
+                </a:solidFill>
+                <a:latin typeface="Inter"/>
+              </a:defRPr>
+            </a:pPr>
+            <a:r>
+              <a:t>3 Minuta: Pitch</a:t>
+            </a:r>
+          </a:p>
+          <a:p>
+            <a:pPr>
+              <a:spcAft>
+                <a:spcPts val="1400"/>
+              </a:spcAft>
+              <a:defRPr sz="1300">
+                <a:solidFill>
+                  <a:srgbClr val="B4C3D7"/>
+                </a:solidFill>
+                <a:latin typeface="Inter"/>
+              </a:defRPr>
+            </a:pPr>
+            <a:r>
+              <a:t>Problemi &amp; Vlera</a:t>
+            </a:r>
+          </a:p>
+          <a:p>
+            <a:pPr>
+              <a:defRPr sz="1500">
+                <a:solidFill>
+                  <a:srgbClr val="E2E8F0"/>
+                </a:solidFill>
+                <a:latin typeface="Inter"/>
+              </a:defRPr>
+            </a:pPr>
+            <a:r>
+              <a:t>Shpjegoni kujt ia zgjidhët dhimbjen, cila ishte hipoteza dhe pse përdoruesit e duan aplikacionin tuaj.</a:t>
+            </a:r>
+          </a:p>
+        </p:txBody>
+      </p:sp>
+      <p:sp>
+        <p:nvSpPr>
+          <p:cNvPr id="8" name="Rounded Rectangle 7"/>
           <p:cNvSpPr/>
           <p:nvPr/>
         </p:nvSpPr>
         <p:spPr>
           <a:xfrm>
-            <a:off x="5120640" y="2011680"/>
-            <a:ext cx="6309360" cy="4389120"/>
+            <a:off x="4389120" y="1920240"/>
+            <a:ext cx="3383280" cy="4389120"/>
           </a:xfrm>
           <a:prstGeom prst="roundRect">
             <a:avLst/>
@@ -7001,9 +7050,9 @@
           <a:solidFill>
             <a:srgbClr val="141E34"/>
           </a:solidFill>
-          <a:ln w="31750">
+          <a:ln w="25400">
             <a:solidFill>
-              <a:srgbClr val="38BDF8"/>
+              <a:srgbClr val="10B981"/>
             </a:solidFill>
           </a:ln>
         </p:spPr>
@@ -7031,14 +7080,14 @@
       </p:sp>
       <p:sp>
         <p:nvSpPr>
-          <p:cNvPr id="10" name="TextBox 9"/>
+          <p:cNvPr id="9" name="TextBox 8"/>
           <p:cNvSpPr txBox="1"/>
           <p:nvPr/>
         </p:nvSpPr>
         <p:spPr>
           <a:xfrm>
-            <a:off x="5394960" y="2194560"/>
-            <a:ext cx="5760720" cy="4023360"/>
+            <a:off x="4572000" y="2103120"/>
+            <a:ext cx="3017520" cy="4023360"/>
           </a:xfrm>
           <a:prstGeom prst="rect">
             <a:avLst/>
@@ -7052,26 +7101,146 @@
           <a:lstStyle/>
           <a:p>
             <a:pPr>
+              <a:defRPr sz="1800" b="1">
+                <a:solidFill>
+                  <a:srgbClr val="10B981"/>
+                </a:solidFill>
+                <a:latin typeface="Inter"/>
+              </a:defRPr>
+            </a:pPr>
+            <a:r>
+              <a:t>2 Minuta: Live Demo</a:t>
+            </a:r>
+          </a:p>
+          <a:p>
+            <a:pPr>
               <a:spcAft>
                 <a:spcPts val="1400"/>
               </a:spcAft>
-              <a:defRPr sz="2500" b="1">
-                <a:solidFill>
-                  <a:srgbClr val="FFFFFF"/>
-                </a:solidFill>
-                <a:latin typeface="Inter"/>
-              </a:defRPr>
-            </a:pPr>
-            <a:r>
-              <a:t>⏱️ Rregullat e Check-In (2 Minuta)</a:t>
+              <a:defRPr sz="1300">
+                <a:solidFill>
+                  <a:srgbClr val="B4C3D7"/>
+                </a:solidFill>
+                <a:latin typeface="Inter"/>
+              </a:defRPr>
+            </a:pPr>
+            <a:r>
+              <a:t>Në Celularin Real</a:t>
+            </a:r>
+          </a:p>
+          <a:p>
+            <a:pPr>
+              <a:defRPr sz="1500">
+                <a:solidFill>
+                  <a:srgbClr val="E2E8F0"/>
+                </a:solidFill>
+                <a:latin typeface="Inter"/>
+              </a:defRPr>
+            </a:pPr>
+            <a:r>
+              <a:t>Zero slide apo screenshots! Hapni aplikacionin e vërtetë nga ikona në celular dhe kryeni rrjedhën para jurisë.</a:t>
+            </a:r>
+          </a:p>
+        </p:txBody>
+      </p:sp>
+      <p:sp>
+        <p:nvSpPr>
+          <p:cNvPr id="10" name="Rounded Rectangle 9"/>
+          <p:cNvSpPr/>
+          <p:nvPr/>
+        </p:nvSpPr>
+        <p:spPr>
+          <a:xfrm>
+            <a:off x="8046720" y="1920240"/>
+            <a:ext cx="3383280" cy="4389120"/>
+          </a:xfrm>
+          <a:prstGeom prst="roundRect">
+            <a:avLst/>
+          </a:prstGeom>
+          <a:solidFill>
+            <a:srgbClr val="141E34"/>
+          </a:solidFill>
+          <a:ln w="25400">
+            <a:solidFill>
+              <a:srgbClr val="F59E0B"/>
+            </a:solidFill>
+          </a:ln>
+        </p:spPr>
+        <p:style>
+          <a:lnRef idx="1">
+            <a:schemeClr val="accent1"/>
+          </a:lnRef>
+          <a:fillRef idx="3">
+            <a:schemeClr val="accent1"/>
+          </a:fillRef>
+          <a:effectRef idx="2">
+            <a:schemeClr val="accent1"/>
+          </a:effectRef>
+          <a:fontRef idx="minor">
+            <a:schemeClr val="lt1"/>
+          </a:fontRef>
+        </p:style>
+        <p:txBody>
+          <a:bodyPr rtlCol="0" anchor="ctr"/>
+          <a:lstStyle/>
+          <a:p>
+            <a:pPr algn="ctr"/>
+          </a:p>
+        </p:txBody>
+      </p:sp>
+      <p:sp>
+        <p:nvSpPr>
+          <p:cNvPr id="11" name="TextBox 10"/>
+          <p:cNvSpPr txBox="1"/>
+          <p:nvPr/>
+        </p:nvSpPr>
+        <p:spPr>
+          <a:xfrm>
+            <a:off x="8229600" y="2103120"/>
+            <a:ext cx="3017520" cy="4023360"/>
+          </a:xfrm>
+          <a:prstGeom prst="rect">
+            <a:avLst/>
+          </a:prstGeom>
+          <a:noFill/>
+        </p:spPr>
+        <p:txBody>
+          <a:bodyPr wrap="square">
+            <a:spAutoFit/>
+          </a:bodyPr>
+          <a:lstStyle/>
+          <a:p>
+            <a:pPr>
+              <a:defRPr sz="1800" b="1">
+                <a:solidFill>
+                  <a:srgbClr val="F59E0B"/>
+                </a:solidFill>
+                <a:latin typeface="Inter"/>
+              </a:defRPr>
+            </a:pPr>
+            <a:r>
+              <a:t>Mbrojtja Individuale</a:t>
             </a:r>
           </a:p>
           <a:p>
             <a:pPr>
               <a:spcAft>
-                <a:spcPts val="1000"/>
+                <a:spcPts val="1400"/>
               </a:spcAft>
-              <a:defRPr sz="1800">
+              <a:defRPr sz="1300">
+                <a:solidFill>
+                  <a:srgbClr val="B4C3D7"/>
+                </a:solidFill>
+                <a:latin typeface="Inter"/>
+              </a:defRPr>
+            </a:pPr>
+            <a:r>
+              <a:t>Pyetje mbi Kodin</a:t>
+            </a:r>
+          </a:p>
+          <a:p>
+            <a:pPr>
+              <a:defRPr sz="1500">
                 <a:solidFill>
                   <a:srgbClr val="E2E8F0"/>
                 </a:solidFill>
@@ -7079,55 +7248,7 @@
               </a:defRPr>
             </a:pPr>
             <a:r>
-              <a:t>• Kodi PIN i Orës: Shfaqet në projektor nga profesori: PIN = 8492. Pa këtë kod nuk mund të regjistroheni.</a:t>
-            </a:r>
-          </a:p>
-          <a:p>
-            <a:pPr>
-              <a:spcAft>
-                <a:spcPts val="1000"/>
-              </a:spcAft>
-              <a:defRPr sz="1800">
-                <a:solidFill>
-                  <a:srgbClr val="E2E8F0"/>
-                </a:solidFill>
-                <a:latin typeface="Inter"/>
-              </a:defRPr>
-            </a:pPr>
-            <a:r>
-              <a:t>• Koha e Kufizuar: Forma e pranimit mbyllet ekzaktësisht 2 minuta pas shfaqjes në ekran për të parandaluar regjistrimet nga jashtë.</a:t>
-            </a:r>
-          </a:p>
-          <a:p>
-            <a:pPr>
-              <a:spcAft>
-                <a:spcPts val="1000"/>
-              </a:spcAft>
-              <a:defRPr sz="1800">
-                <a:solidFill>
-                  <a:srgbClr val="E2E8F0"/>
-                </a:solidFill>
-                <a:latin typeface="Inter"/>
-              </a:defRPr>
-            </a:pPr>
-            <a:r>
-              <a:t>• Të Dhënat Zyrtare: Plotësoni ID-në e studentit, emrin e plotë dhe emailin tuaj zyrtar të Kolegjit AAB.</a:t>
-            </a:r>
-          </a:p>
-          <a:p>
-            <a:pPr>
-              <a:spcAft>
-                <a:spcPts val="1000"/>
-              </a:spcAft>
-              <a:defRPr sz="1800">
-                <a:solidFill>
-                  <a:srgbClr val="E2E8F0"/>
-                </a:solidFill>
-                <a:latin typeface="Inter"/>
-              </a:defRPr>
-            </a:pPr>
-            <a:r>
-              <a:t>• Transparencë e Plotë: Lista e të pranishmëve eksportohet në çast në Excel (CSV) për administratën e fakultetit.</a:t>
+              <a:t>Çdo anëtar i ekipit pyetet mbi një pjesë të kodit: 'Pse e zgjodhe këtë tabelë? Si e mbron RLS këtë fushë?'</a:t>
             </a:r>
           </a:p>
         </p:txBody>
@@ -7216,7 +7337,7 @@
           <a:lstStyle/>
           <a:p>
             <a:pPr>
-              <a:defRPr sz="1500" b="1">
+              <a:defRPr sz="1400" b="1">
                 <a:solidFill>
                   <a:srgbClr val="38BDF8"/>
                 </a:solidFill>
@@ -7224,7 +7345,7 @@
               </a:defRPr>
             </a:pPr>
             <a:r>
-              <a:t>LABORATORI PRAKTIK 1 (USHTRIMET)</a:t>
+              <a:t>PJESËMARRJA NË LIGJËRATË</a:t>
             </a:r>
           </a:p>
         </p:txBody>
@@ -7237,7 +7358,7 @@
         </p:nvSpPr>
         <p:spPr>
           <a:xfrm>
-            <a:off x="731520" y="685800"/>
+            <a:off x="731520" y="658368"/>
             <a:ext cx="10698480" cy="777240"/>
           </a:xfrm>
           <a:prstGeom prst="rect">
@@ -7252,7 +7373,7 @@
           <a:lstStyle/>
           <a:p>
             <a:pPr>
-              <a:defRPr sz="3600" b="1">
+              <a:defRPr sz="3400" b="1">
                 <a:solidFill>
                   <a:srgbClr val="FFFFFF"/>
                 </a:solidFill>
@@ -7260,7 +7381,7 @@
               </a:defRPr>
             </a:pPr>
             <a:r>
-              <a:t>Ora 1 e Ushtrimeve: Toolchain-i i Themeluesit (How to Start a Startup 🚀)</a:t>
+              <a:t>Check-in Live me QR Code (2 Minuta)</a:t>
             </a:r>
           </a:p>
         </p:txBody>
@@ -7273,7 +7394,7 @@
         </p:nvSpPr>
         <p:spPr>
           <a:xfrm>
-            <a:off x="731520" y="1444752"/>
+            <a:off x="731520" y="1417320"/>
             <a:ext cx="10698480" cy="502920"/>
           </a:xfrm>
           <a:prstGeom prst="rect">
@@ -7288,7 +7409,7 @@
           <a:lstStyle/>
           <a:p>
             <a:pPr>
-              <a:defRPr sz="2100">
+              <a:defRPr sz="1900">
                 <a:solidFill>
                   <a:srgbClr val="E2E8F0"/>
                 </a:solidFill>
@@ -7296,7 +7417,7 @@
               </a:defRPr>
             </a:pPr>
             <a:r>
-              <a:t>Pajisja e çdo studenti me veglat moderne: Git, VS Code, GitHub Copilot, Supabase &amp; Vercel.</a:t>
+              <a:t>Hapni kamerën e celularit, skanoni kodin dhe shënoni praninë tuaj në bazën e të dhënave.</a:t>
             </a:r>
           </a:p>
         </p:txBody>
@@ -7309,8 +7430,8 @@
         </p:nvSpPr>
         <p:spPr>
           <a:xfrm>
-            <a:off x="731520" y="2011680"/>
-            <a:ext cx="3383280" cy="4389120"/>
+            <a:off x="731520" y="1920240"/>
+            <a:ext cx="4114800" cy="4389120"/>
           </a:xfrm>
           <a:prstGeom prst="roundRect">
             <a:avLst/>
@@ -7318,9 +7439,9 @@
           <a:solidFill>
             <a:srgbClr val="141E34"/>
           </a:solidFill>
-          <a:ln w="31750">
+          <a:ln w="25400">
             <a:solidFill>
-              <a:srgbClr val="38BDF8"/>
+              <a:srgbClr val="6366F1"/>
             </a:solidFill>
           </a:ln>
         </p:spPr>
@@ -7346,16 +7467,40 @@
           </a:p>
         </p:txBody>
       </p:sp>
-      <p:sp>
-        <p:nvSpPr>
-          <p:cNvPr id="7" name="TextBox 6"/>
+      <p:pic>
+        <p:nvPicPr>
+          <p:cNvPr id="7" name="Picture 6" descr="qr_master_checkin.png"/>
+          <p:cNvPicPr>
+            <a:picLocks noChangeAspect="1"/>
+          </p:cNvPicPr>
+          <p:nvPr/>
+        </p:nvPicPr>
+        <p:blipFill>
+          <a:blip r:embed="rId2"/>
+          <a:stretch>
+            <a:fillRect/>
+          </a:stretch>
+        </p:blipFill>
+        <p:spPr>
+          <a:xfrm>
+            <a:off x="1188720" y="2194560"/>
+            <a:ext cx="3200400" cy="3200400"/>
+          </a:xfrm>
+          <a:prstGeom prst="rect">
+            <a:avLst/>
+          </a:prstGeom>
+        </p:spPr>
+      </p:pic>
+      <p:sp>
+        <p:nvSpPr>
+          <p:cNvPr id="8" name="TextBox 7"/>
           <p:cNvSpPr txBox="1"/>
           <p:nvPr/>
         </p:nvSpPr>
         <p:spPr>
           <a:xfrm>
-            <a:off x="914400" y="2194560"/>
-            <a:ext cx="3017520" cy="4023360"/>
+            <a:off x="914400" y="5486400"/>
+            <a:ext cx="3749039" cy="640080"/>
           </a:xfrm>
           <a:prstGeom prst="rect">
             <a:avLst/>
@@ -7368,11 +7513,8 @@
           </a:bodyPr>
           <a:lstStyle/>
           <a:p>
-            <a:pPr>
-              <a:spcAft>
-                <a:spcPts val="600"/>
-              </a:spcAft>
-              <a:defRPr sz="1400" b="1">
+            <a:pPr algn="ctr">
+              <a:defRPr sz="1600" b="1">
                 <a:solidFill>
                   <a:srgbClr val="38BDF8"/>
                 </a:solidFill>
@@ -7380,101 +7522,21 @@
               </a:defRPr>
             </a:pPr>
             <a:r>
-              <a:t>1️⃣ Veglat Lokale</a:t>
-            </a:r>
-          </a:p>
-          <a:p>
-            <a:pPr>
-              <a:spcAft>
-                <a:spcPts val="1400"/>
-              </a:spcAft>
-              <a:defRPr sz="2200" b="1">
-                <a:solidFill>
-                  <a:srgbClr val="FFFFFF"/>
-                </a:solidFill>
-                <a:latin typeface="Inter"/>
-              </a:defRPr>
-            </a:pPr>
-            <a:r>
-              <a:t>VS Code &amp; Git i Konfiguruar</a:t>
-            </a:r>
-          </a:p>
-          <a:p>
-            <a:pPr>
-              <a:spcAft>
-                <a:spcPts val="1000"/>
-              </a:spcAft>
-              <a:defRPr sz="1700">
-                <a:solidFill>
-                  <a:srgbClr val="E2E8F0"/>
-                </a:solidFill>
-                <a:latin typeface="Inter"/>
-              </a:defRPr>
-            </a:pPr>
-            <a:r>
-              <a:t>• Instalimi dhe konfigurimi i VS Code me shtojcat thelbësore.</a:t>
-            </a:r>
-          </a:p>
-          <a:p>
-            <a:pPr>
-              <a:spcAft>
-                <a:spcPts val="1000"/>
-              </a:spcAft>
-              <a:defRPr sz="1700">
-                <a:solidFill>
-                  <a:srgbClr val="E2E8F0"/>
-                </a:solidFill>
-                <a:latin typeface="Inter"/>
-              </a:defRPr>
-            </a:pPr>
-            <a:r>
-              <a:t>• Lidhja e llogarisë zyrtare të GitHub dhe vendosja e çelësave SSH.</a:t>
-            </a:r>
-          </a:p>
-          <a:p>
-            <a:pPr>
-              <a:spcAft>
-                <a:spcPts val="1000"/>
-              </a:spcAft>
-              <a:defRPr sz="1700">
-                <a:solidFill>
-                  <a:srgbClr val="E2E8F0"/>
-                </a:solidFill>
-                <a:latin typeface="Inter"/>
-              </a:defRPr>
-            </a:pPr>
-            <a:r>
-              <a:t>• Klonimi i repos fillestare nga GitHub Classroom.</a:t>
-            </a:r>
-          </a:p>
-          <a:p>
-            <a:pPr>
-              <a:spcAft>
-                <a:spcPts val="1000"/>
-              </a:spcAft>
-              <a:defRPr sz="1700">
-                <a:solidFill>
-                  <a:srgbClr val="E2E8F0"/>
-                </a:solidFill>
-                <a:latin typeface="Inter"/>
-              </a:defRPr>
-            </a:pPr>
-            <a:r>
-              <a:t>• Verifikimi që terminali dhe Git funksionojnë 100% lokalisht.</a:t>
-            </a:r>
-          </a:p>
-        </p:txBody>
-      </p:sp>
-      <p:sp>
-        <p:nvSpPr>
-          <p:cNvPr id="8" name="Rounded Rectangle 7"/>
+              <a:t>arbenl.github.io/#checkin</a:t>
+            </a:r>
+          </a:p>
+        </p:txBody>
+      </p:sp>
+      <p:sp>
+        <p:nvSpPr>
+          <p:cNvPr id="9" name="Rounded Rectangle 8"/>
           <p:cNvSpPr/>
           <p:nvPr/>
         </p:nvSpPr>
         <p:spPr>
           <a:xfrm>
-            <a:off x="4389120" y="2011680"/>
-            <a:ext cx="3383280" cy="4389120"/>
+            <a:off x="5120640" y="1920240"/>
+            <a:ext cx="6309360" cy="4389120"/>
           </a:xfrm>
           <a:prstGeom prst="roundRect">
             <a:avLst/>
@@ -7482,9 +7544,9 @@
           <a:solidFill>
             <a:srgbClr val="141E34"/>
           </a:solidFill>
-          <a:ln w="31750">
+          <a:ln w="19050">
             <a:solidFill>
-              <a:srgbClr val="6366F1"/>
+              <a:srgbClr val="2E4066"/>
             </a:solidFill>
           </a:ln>
         </p:spPr>
@@ -7512,14 +7574,14 @@
       </p:sp>
       <p:sp>
         <p:nvSpPr>
-          <p:cNvPr id="9" name="TextBox 8"/>
+          <p:cNvPr id="10" name="TextBox 9"/>
           <p:cNvSpPr txBox="1"/>
           <p:nvPr/>
         </p:nvSpPr>
         <p:spPr>
           <a:xfrm>
-            <a:off x="4572000" y="2194560"/>
-            <a:ext cx="3017520" cy="4023360"/>
+            <a:off x="5394960" y="2103120"/>
+            <a:ext cx="5760720" cy="4023360"/>
           </a:xfrm>
           <a:prstGeom prst="rect">
             <a:avLst/>
@@ -7534,25 +7596,9 @@
           <a:p>
             <a:pPr>
               <a:spcAft>
-                <a:spcPts val="600"/>
-              </a:spcAft>
-              <a:defRPr sz="1400" b="1">
-                <a:solidFill>
-                  <a:srgbClr val="6366F1"/>
-                </a:solidFill>
-                <a:latin typeface="Inter"/>
-              </a:defRPr>
-            </a:pPr>
-            <a:r>
-              <a:t>2️⃣ AI &amp; Cloud Falas</a:t>
-            </a:r>
-          </a:p>
-          <a:p>
-            <a:pPr>
-              <a:spcAft>
                 <a:spcPts val="1400"/>
               </a:spcAft>
-              <a:defRPr sz="2200" b="1">
+              <a:defRPr sz="1800" b="1">
                 <a:solidFill>
                   <a:srgbClr val="FFFFFF"/>
                 </a:solidFill>
@@ -7560,7 +7606,7 @@
               </a:defRPr>
             </a:pPr>
             <a:r>
-              <a:t>Copilot Pro, Supabase &amp; Vercel</a:t>
+              <a:t>RREGULLAT E CHECK-IN LIVE:</a:t>
             </a:r>
           </a:p>
           <a:p>
@@ -7568,7 +7614,7 @@
               <a:spcAft>
                 <a:spcPts val="1000"/>
               </a:spcAft>
-              <a:defRPr sz="1700">
+              <a:defRPr sz="1500">
                 <a:solidFill>
                   <a:srgbClr val="E2E8F0"/>
                 </a:solidFill>
@@ -7576,7 +7622,7 @@
               </a:defRPr>
             </a:pPr>
             <a:r>
-              <a:t>• Aktivizimi i GitHub Student Developer Pack me email AAB.</a:t>
+              <a:t>• 1. Skanoni QR Kodin: Hapet formulari zyrtar i pranisë në telefonin tuaj.</a:t>
             </a:r>
           </a:p>
           <a:p>
@@ -7584,7 +7630,7 @@
               <a:spcAft>
                 <a:spcPts val="1000"/>
               </a:spcAft>
-              <a:defRPr sz="1700">
+              <a:defRPr sz="1500">
                 <a:solidFill>
                   <a:srgbClr val="E2E8F0"/>
                 </a:solidFill>
@@ -7592,7 +7638,7 @@
               </a:defRPr>
             </a:pPr>
             <a:r>
-              <a:t>• GitHub Copilot Pro aktiv falas (kursen 120$/vit për studentët).</a:t>
+              <a:t>• 2. Shënoni Email-in AAB: Përdorni emailin tuaj zyrtar studentor (@universitetiaab.com).</a:t>
             </a:r>
           </a:p>
           <a:p>
@@ -7600,7 +7646,7 @@
               <a:spcAft>
                 <a:spcPts val="1000"/>
               </a:spcAft>
-              <a:defRPr sz="1700">
+              <a:defRPr sz="1500">
                 <a:solidFill>
                   <a:srgbClr val="E2E8F0"/>
                 </a:solidFill>
@@ -7608,7 +7654,7 @@
               </a:defRPr>
             </a:pPr>
             <a:r>
-              <a:t>• Hapja e llogarisë në Supabase Cloud (PostgreSQL falas).</a:t>
+              <a:t>• 3. Konfirmimi në Server: Prania juaj regjistrohet menjëherë në tabelën attendance_records.</a:t>
             </a:r>
           </a:p>
           <a:p>
@@ -7616,7 +7662,7 @@
               <a:spcAft>
                 <a:spcPts val="1000"/>
               </a:spcAft>
-              <a:defRPr sz="1700">
+              <a:defRPr sz="1500">
                 <a:solidFill>
                   <a:srgbClr val="E2E8F0"/>
                 </a:solidFill>
@@ -7624,171 +7670,7 @@
               </a:defRPr>
             </a:pPr>
             <a:r>
-              <a:t>• Lidhja e Vercel me GitHub për deploy me 1-klik.</a:t>
-            </a:r>
-          </a:p>
-        </p:txBody>
-      </p:sp>
-      <p:sp>
-        <p:nvSpPr>
-          <p:cNvPr id="10" name="Rounded Rectangle 9"/>
-          <p:cNvSpPr/>
-          <p:nvPr/>
-        </p:nvSpPr>
-        <p:spPr>
-          <a:xfrm>
-            <a:off x="8046720" y="2011680"/>
-            <a:ext cx="3383280" cy="4389120"/>
-          </a:xfrm>
-          <a:prstGeom prst="roundRect">
-            <a:avLst/>
-          </a:prstGeom>
-          <a:solidFill>
-            <a:srgbClr val="141E34"/>
-          </a:solidFill>
-          <a:ln w="31750">
-            <a:solidFill>
-              <a:srgbClr val="10B981"/>
-            </a:solidFill>
-          </a:ln>
-        </p:spPr>
-        <p:style>
-          <a:lnRef idx="1">
-            <a:schemeClr val="accent1"/>
-          </a:lnRef>
-          <a:fillRef idx="3">
-            <a:schemeClr val="accent1"/>
-          </a:fillRef>
-          <a:effectRef idx="2">
-            <a:schemeClr val="accent1"/>
-          </a:effectRef>
-          <a:fontRef idx="minor">
-            <a:schemeClr val="lt1"/>
-          </a:fontRef>
-        </p:style>
-        <p:txBody>
-          <a:bodyPr rtlCol="0" anchor="ctr"/>
-          <a:lstStyle/>
-          <a:p>
-            <a:pPr algn="ctr"/>
-          </a:p>
-        </p:txBody>
-      </p:sp>
-      <p:sp>
-        <p:nvSpPr>
-          <p:cNvPr id="11" name="TextBox 10"/>
-          <p:cNvSpPr txBox="1"/>
-          <p:nvPr/>
-        </p:nvSpPr>
-        <p:spPr>
-          <a:xfrm>
-            <a:off x="8229600" y="2194560"/>
-            <a:ext cx="3017520" cy="4023360"/>
-          </a:xfrm>
-          <a:prstGeom prst="rect">
-            <a:avLst/>
-          </a:prstGeom>
-          <a:noFill/>
-        </p:spPr>
-        <p:txBody>
-          <a:bodyPr wrap="square">
-            <a:spAutoFit/>
-          </a:bodyPr>
-          <a:lstStyle/>
-          <a:p>
-            <a:pPr>
-              <a:spcAft>
-                <a:spcPts val="600"/>
-              </a:spcAft>
-              <a:defRPr sz="1400" b="1">
-                <a:solidFill>
-                  <a:srgbClr val="10B981"/>
-                </a:solidFill>
-                <a:latin typeface="Inter"/>
-              </a:defRPr>
-            </a:pPr>
-            <a:r>
-              <a:t>3️⃣ Startup Mindset</a:t>
-            </a:r>
-          </a:p>
-          <a:p>
-            <a:pPr>
-              <a:spcAft>
-                <a:spcPts val="1400"/>
-              </a:spcAft>
-              <a:defRPr sz="2200" b="1">
-                <a:solidFill>
-                  <a:srgbClr val="FFFFFF"/>
-                </a:solidFill>
-                <a:latin typeface="Inter"/>
-              </a:defRPr>
-            </a:pPr>
-            <a:r>
-              <a:t>Si Fillon një Startup Sot?</a:t>
-            </a:r>
-          </a:p>
-          <a:p>
-            <a:pPr>
-              <a:spcAft>
-                <a:spcPts val="1000"/>
-              </a:spcAft>
-              <a:defRPr sz="1700">
-                <a:solidFill>
-                  <a:srgbClr val="E2E8F0"/>
-                </a:solidFill>
-                <a:latin typeface="Inter"/>
-              </a:defRPr>
-            </a:pPr>
-            <a:r>
-              <a:t>• Nuk blejmë servera fizikë: Përdorim infrastrukturë globale cloud.</a:t>
-            </a:r>
-          </a:p>
-          <a:p>
-            <a:pPr>
-              <a:spcAft>
-                <a:spcPts val="1000"/>
-              </a:spcAft>
-              <a:defRPr sz="1700">
-                <a:solidFill>
-                  <a:srgbClr val="E2E8F0"/>
-                </a:solidFill>
-                <a:latin typeface="Inter"/>
-              </a:defRPr>
-            </a:pPr>
-            <a:r>
-              <a:t>• Kosto operative 0 EUR gjatë fazës së zhvillimit dhe testimit.</a:t>
-            </a:r>
-          </a:p>
-          <a:p>
-            <a:pPr>
-              <a:spcAft>
-                <a:spcPts val="1000"/>
-              </a:spcAft>
-              <a:defRPr sz="1700">
-                <a:solidFill>
-                  <a:srgbClr val="E2E8F0"/>
-                </a:solidFill>
-                <a:latin typeface="Inter"/>
-              </a:defRPr>
-            </a:pPr>
-            <a:r>
-              <a:t>• Ekzekutimi i 'git push' të parë që shkon live në Vercel.</a:t>
-            </a:r>
-          </a:p>
-          <a:p>
-            <a:pPr>
-              <a:spcAft>
-                <a:spcPts val="1000"/>
-              </a:spcAft>
-              <a:defRPr sz="1700">
-                <a:solidFill>
-                  <a:srgbClr val="E2E8F0"/>
-                </a:solidFill>
-                <a:latin typeface="Inter"/>
-              </a:defRPr>
-            </a:pPr>
-            <a:r>
-              <a:t>• Çdo student largohet nga laboratori me mjedis të plotë gati!</a:t>
+              <a:t>• 4. Rruga Rezervë: Nëse telefoni juaj nuk ka bateri ose internet, lajmëroni asistentin brenda 10 minutave për regjistrim manual.</a:t>
             </a:r>
           </a:p>
         </p:txBody>
@@ -7877,7 +7759,7 @@
           <a:lstStyle/>
           <a:p>
             <a:pPr>
-              <a:defRPr sz="1500" b="1">
+              <a:defRPr sz="1400" b="1">
                 <a:solidFill>
                   <a:srgbClr val="38BDF8"/>
                 </a:solidFill>
@@ -7885,7 +7767,7 @@
               </a:defRPr>
             </a:pPr>
             <a:r>
-              <a:t>MJETET FALAS PËR STUDENTË</a:t>
+              <a:t>ORA E USHTRIMEVE 1</a:t>
             </a:r>
           </a:p>
         </p:txBody>
@@ -7898,7 +7780,7 @@
         </p:nvSpPr>
         <p:spPr>
           <a:xfrm>
-            <a:off x="731520" y="685800"/>
+            <a:off x="731520" y="658368"/>
             <a:ext cx="10698480" cy="777240"/>
           </a:xfrm>
           <a:prstGeom prst="rect">
@@ -7913,7 +7795,7 @@
           <a:lstStyle/>
           <a:p>
             <a:pPr>
-              <a:defRPr sz="3600" b="1">
+              <a:defRPr sz="3400" b="1">
                 <a:solidFill>
                   <a:srgbClr val="FFFFFF"/>
                 </a:solidFill>
@@ -7921,7 +7803,7 @@
               </a:defRPr>
             </a:pPr>
             <a:r>
-              <a:t>GitHub Student Pack &amp; Copilot Pro Falas</a:t>
+              <a:t>Plani 'First Win në 45 Minuta': Nga Zeroja te Publikimi Live</a:t>
             </a:r>
           </a:p>
         </p:txBody>
@@ -7934,7 +7816,7 @@
         </p:nvSpPr>
         <p:spPr>
           <a:xfrm>
-            <a:off x="731520" y="1444752"/>
+            <a:off x="731520" y="1417320"/>
             <a:ext cx="10698480" cy="502920"/>
           </a:xfrm>
           <a:prstGeom prst="rect">
@@ -7949,7 +7831,7 @@
           <a:lstStyle/>
           <a:p>
             <a:pPr>
-              <a:defRPr sz="2100">
+              <a:defRPr sz="1900">
                 <a:solidFill>
                   <a:srgbClr val="E2E8F0"/>
                 </a:solidFill>
@@ -7957,7 +7839,7 @@
               </a:defRPr>
             </a:pPr>
             <a:r>
-              <a:t>Përfitoni pakon me vlerë mbi 200,000$ falas me emailin tuaj zyrtar të Kolegjit AAB.</a:t>
+              <a:t>Cikli i plotë praktik: Çdo student del nga salla me faqen e parë PWA në internet dhe në celular.</a:t>
             </a:r>
           </a:p>
         </p:txBody>
@@ -7970,8 +7852,8 @@
         </p:nvSpPr>
         <p:spPr>
           <a:xfrm>
-            <a:off x="731520" y="2011680"/>
-            <a:ext cx="4114800" cy="4389120"/>
+            <a:off x="731520" y="1920240"/>
+            <a:ext cx="2514600" cy="4389120"/>
           </a:xfrm>
           <a:prstGeom prst="roundRect">
             <a:avLst/>
@@ -7979,9 +7861,9 @@
           <a:solidFill>
             <a:srgbClr val="141E34"/>
           </a:solidFill>
-          <a:ln w="31750">
+          <a:ln w="25400">
             <a:solidFill>
-              <a:srgbClr val="6366F1"/>
+              <a:srgbClr val="38BDF8"/>
             </a:solidFill>
           </a:ln>
         </p:spPr>
@@ -8007,40 +7889,16 @@
           </a:p>
         </p:txBody>
       </p:sp>
-      <p:pic>
-        <p:nvPicPr>
-          <p:cNvPr id="7" name="Picture 6" descr="qr_master_github_pack.png"/>
-          <p:cNvPicPr>
-            <a:picLocks noChangeAspect="1"/>
-          </p:cNvPicPr>
-          <p:nvPr/>
-        </p:nvPicPr>
-        <p:blipFill>
-          <a:blip r:embed="rId2"/>
-          <a:stretch>
-            <a:fillRect/>
-          </a:stretch>
-        </p:blipFill>
-        <p:spPr>
-          <a:xfrm>
-            <a:off x="1188720" y="2286000"/>
-            <a:ext cx="3200400" cy="3200400"/>
-          </a:xfrm>
-          <a:prstGeom prst="rect">
-            <a:avLst/>
-          </a:prstGeom>
-        </p:spPr>
-      </p:pic>
-      <p:sp>
-        <p:nvSpPr>
-          <p:cNvPr id="8" name="TextBox 7"/>
+      <p:sp>
+        <p:nvSpPr>
+          <p:cNvPr id="7" name="TextBox 6"/>
           <p:cNvSpPr txBox="1"/>
           <p:nvPr/>
         </p:nvSpPr>
         <p:spPr>
           <a:xfrm>
-            <a:off x="914400" y="5577840"/>
-            <a:ext cx="3749039" cy="731520"/>
+            <a:off x="868680" y="2103120"/>
+            <a:ext cx="2240280" cy="4023360"/>
           </a:xfrm>
           <a:prstGeom prst="rect">
             <a:avLst/>
@@ -8053,7 +7911,7 @@
           </a:bodyPr>
           <a:lstStyle/>
           <a:p>
-            <a:pPr algn="ctr">
+            <a:pPr>
               <a:defRPr sz="1600" b="1">
                 <a:solidFill>
                   <a:srgbClr val="38BDF8"/>
@@ -8062,25 +7920,50 @@
               </a:defRPr>
             </a:pPr>
             <a:r>
-              <a:t>AKTIVIZO COPILOT PRO</a:t>
-            </a:r>
-            <a:br/>
-            <a:r>
-              <a:t>education.github.com/pack</a:t>
-            </a:r>
-          </a:p>
-        </p:txBody>
-      </p:sp>
-      <p:sp>
-        <p:nvSpPr>
-          <p:cNvPr id="9" name="Rounded Rectangle 8"/>
+              <a:t>Min 00–12</a:t>
+            </a:r>
+          </a:p>
+          <a:p>
+            <a:pPr>
+              <a:spcAft>
+                <a:spcPts val="1200"/>
+              </a:spcAft>
+              <a:defRPr sz="1600" b="1">
+                <a:solidFill>
+                  <a:srgbClr val="FFFFFF"/>
+                </a:solidFill>
+                <a:latin typeface="Inter"/>
+              </a:defRPr>
+            </a:pPr>
+            <a:r>
+              <a:t>Repo nga Template</a:t>
+            </a:r>
+          </a:p>
+          <a:p>
+            <a:pPr>
+              <a:defRPr sz="1400">
+                <a:solidFill>
+                  <a:srgbClr val="E2E8F0"/>
+                </a:solidFill>
+                <a:latin typeface="Inter"/>
+              </a:defRPr>
+            </a:pPr>
+            <a:r>
+              <a:t>Klikoni 'Use this template' në GitHub dhe krijoni repon tuaj personale aab-mobile-pwa-starter.</a:t>
+            </a:r>
+          </a:p>
+        </p:txBody>
+      </p:sp>
+      <p:sp>
+        <p:nvSpPr>
+          <p:cNvPr id="8" name="Rounded Rectangle 7"/>
           <p:cNvSpPr/>
           <p:nvPr/>
         </p:nvSpPr>
         <p:spPr>
           <a:xfrm>
-            <a:off x="5120640" y="2011680"/>
-            <a:ext cx="6309360" cy="4389120"/>
+            <a:off x="3465576" y="1920240"/>
+            <a:ext cx="2514600" cy="4389120"/>
           </a:xfrm>
           <a:prstGeom prst="roundRect">
             <a:avLst/>
@@ -8088,9 +7971,9 @@
           <a:solidFill>
             <a:srgbClr val="141E34"/>
           </a:solidFill>
-          <a:ln w="31750">
+          <a:ln w="25400">
             <a:solidFill>
-              <a:srgbClr val="38BDF8"/>
+              <a:srgbClr val="6366F1"/>
             </a:solidFill>
           </a:ln>
         </p:spPr>
@@ -8118,14 +8001,14 @@
       </p:sp>
       <p:sp>
         <p:nvSpPr>
-          <p:cNvPr id="10" name="TextBox 9"/>
+          <p:cNvPr id="9" name="TextBox 8"/>
           <p:cNvSpPr txBox="1"/>
           <p:nvPr/>
         </p:nvSpPr>
         <p:spPr>
           <a:xfrm>
-            <a:off x="5394960" y="2194560"/>
-            <a:ext cx="5760720" cy="4023360"/>
+            <a:off x="3602736" y="2103120"/>
+            <a:ext cx="2240280" cy="4023360"/>
           </a:xfrm>
           <a:prstGeom prst="rect">
             <a:avLst/>
@@ -8139,10 +8022,23 @@
           <a:lstStyle/>
           <a:p>
             <a:pPr>
+              <a:defRPr sz="1600" b="1">
+                <a:solidFill>
+                  <a:srgbClr val="6366F1"/>
+                </a:solidFill>
+                <a:latin typeface="Inter"/>
+              </a:defRPr>
+            </a:pPr>
+            <a:r>
+              <a:t>Min 12–20</a:t>
+            </a:r>
+          </a:p>
+          <a:p>
+            <a:pPr>
               <a:spcAft>
-                <a:spcPts val="1400"/>
+                <a:spcPts val="1200"/>
               </a:spcAft>
-              <a:defRPr sz="2500" b="1">
+              <a:defRPr sz="1600" b="1">
                 <a:solidFill>
                   <a:srgbClr val="FFFFFF"/>
                 </a:solidFill>
@@ -8150,15 +8046,122 @@
               </a:defRPr>
             </a:pPr>
             <a:r>
-              <a:t>🎁 Çfarë Përfshin Pakoja Studentore?</a:t>
+              <a:t>First Commit</a:t>
+            </a:r>
+          </a:p>
+          <a:p>
+            <a:pPr>
+              <a:defRPr sz="1400">
+                <a:solidFill>
+                  <a:srgbClr val="E2E8F0"/>
+                </a:solidFill>
+                <a:latin typeface="Inter"/>
+              </a:defRPr>
+            </a:pPr>
+            <a:r>
+              <a:t>Ndryshoni titullin dhe shënoni emrin tuaj dhe idenë e parë. Bëni 'commit' në GitHub.</a:t>
+            </a:r>
+          </a:p>
+        </p:txBody>
+      </p:sp>
+      <p:sp>
+        <p:nvSpPr>
+          <p:cNvPr id="10" name="Rounded Rectangle 9"/>
+          <p:cNvSpPr/>
+          <p:nvPr/>
+        </p:nvSpPr>
+        <p:spPr>
+          <a:xfrm>
+            <a:off x="6199632" y="1920240"/>
+            <a:ext cx="2514600" cy="4389120"/>
+          </a:xfrm>
+          <a:prstGeom prst="roundRect">
+            <a:avLst/>
+          </a:prstGeom>
+          <a:solidFill>
+            <a:srgbClr val="141E34"/>
+          </a:solidFill>
+          <a:ln w="25400">
+            <a:solidFill>
+              <a:srgbClr val="10B981"/>
+            </a:solidFill>
+          </a:ln>
+        </p:spPr>
+        <p:style>
+          <a:lnRef idx="1">
+            <a:schemeClr val="accent1"/>
+          </a:lnRef>
+          <a:fillRef idx="3">
+            <a:schemeClr val="accent1"/>
+          </a:fillRef>
+          <a:effectRef idx="2">
+            <a:schemeClr val="accent1"/>
+          </a:effectRef>
+          <a:fontRef idx="minor">
+            <a:schemeClr val="lt1"/>
+          </a:fontRef>
+        </p:style>
+        <p:txBody>
+          <a:bodyPr rtlCol="0" anchor="ctr"/>
+          <a:lstStyle/>
+          <a:p>
+            <a:pPr algn="ctr"/>
+          </a:p>
+        </p:txBody>
+      </p:sp>
+      <p:sp>
+        <p:nvSpPr>
+          <p:cNvPr id="11" name="TextBox 10"/>
+          <p:cNvSpPr txBox="1"/>
+          <p:nvPr/>
+        </p:nvSpPr>
+        <p:spPr>
+          <a:xfrm>
+            <a:off x="6336792" y="2103120"/>
+            <a:ext cx="2240280" cy="4023360"/>
+          </a:xfrm>
+          <a:prstGeom prst="rect">
+            <a:avLst/>
+          </a:prstGeom>
+          <a:noFill/>
+        </p:spPr>
+        <p:txBody>
+          <a:bodyPr wrap="square">
+            <a:spAutoFit/>
+          </a:bodyPr>
+          <a:lstStyle/>
+          <a:p>
+            <a:pPr>
+              <a:defRPr sz="1600" b="1">
+                <a:solidFill>
+                  <a:srgbClr val="10B981"/>
+                </a:solidFill>
+                <a:latin typeface="Inter"/>
+              </a:defRPr>
+            </a:pPr>
+            <a:r>
+              <a:t>Min 20–30</a:t>
             </a:r>
           </a:p>
           <a:p>
             <a:pPr>
               <a:spcAft>
-                <a:spcPts val="1000"/>
+                <a:spcPts val="1200"/>
               </a:spcAft>
-              <a:defRPr sz="1800">
+              <a:defRPr sz="1600" b="1">
+                <a:solidFill>
+                  <a:srgbClr val="FFFFFF"/>
+                </a:solidFill>
+                <a:latin typeface="Inter"/>
+              </a:defRPr>
+            </a:pPr>
+            <a:r>
+              <a:t>Vercel Deploy</a:t>
+            </a:r>
+          </a:p>
+          <a:p>
+            <a:pPr>
+              <a:defRPr sz="1400">
                 <a:solidFill>
                   <a:srgbClr val="E2E8F0"/>
                 </a:solidFill>
@@ -8166,15 +8169,109 @@
               </a:defRPr>
             </a:pPr>
             <a:r>
-              <a:t>• GitHub Copilot Pro: Qasje falas e pakufizuar në AI më të avancuar për kodim (vlerë 120$/vit).</a:t>
+              <a:t>Lidhni repon me Vercel me 1-klik. Projekti ndërtohet dhe merr domain: emri.vercel.app.</a:t>
+            </a:r>
+          </a:p>
+        </p:txBody>
+      </p:sp>
+      <p:sp>
+        <p:nvSpPr>
+          <p:cNvPr id="12" name="Rounded Rectangle 11"/>
+          <p:cNvSpPr/>
+          <p:nvPr/>
+        </p:nvSpPr>
+        <p:spPr>
+          <a:xfrm>
+            <a:off x="8933688" y="1920240"/>
+            <a:ext cx="2514600" cy="4389120"/>
+          </a:xfrm>
+          <a:prstGeom prst="roundRect">
+            <a:avLst/>
+          </a:prstGeom>
+          <a:solidFill>
+            <a:srgbClr val="141E34"/>
+          </a:solidFill>
+          <a:ln w="25400">
+            <a:solidFill>
+              <a:srgbClr val="F59E0B"/>
+            </a:solidFill>
+          </a:ln>
+        </p:spPr>
+        <p:style>
+          <a:lnRef idx="1">
+            <a:schemeClr val="accent1"/>
+          </a:lnRef>
+          <a:fillRef idx="3">
+            <a:schemeClr val="accent1"/>
+          </a:fillRef>
+          <a:effectRef idx="2">
+            <a:schemeClr val="accent1"/>
+          </a:effectRef>
+          <a:fontRef idx="minor">
+            <a:schemeClr val="lt1"/>
+          </a:fontRef>
+        </p:style>
+        <p:txBody>
+          <a:bodyPr rtlCol="0" anchor="ctr"/>
+          <a:lstStyle/>
+          <a:p>
+            <a:pPr algn="ctr"/>
+          </a:p>
+        </p:txBody>
+      </p:sp>
+      <p:sp>
+        <p:nvSpPr>
+          <p:cNvPr id="13" name="TextBox 12"/>
+          <p:cNvSpPr txBox="1"/>
+          <p:nvPr/>
+        </p:nvSpPr>
+        <p:spPr>
+          <a:xfrm>
+            <a:off x="9070848" y="2103120"/>
+            <a:ext cx="2240280" cy="4023360"/>
+          </a:xfrm>
+          <a:prstGeom prst="rect">
+            <a:avLst/>
+          </a:prstGeom>
+          <a:noFill/>
+        </p:spPr>
+        <p:txBody>
+          <a:bodyPr wrap="square">
+            <a:spAutoFit/>
+          </a:bodyPr>
+          <a:lstStyle/>
+          <a:p>
+            <a:pPr>
+              <a:defRPr sz="1600" b="1">
+                <a:solidFill>
+                  <a:srgbClr val="F59E0B"/>
+                </a:solidFill>
+                <a:latin typeface="Inter"/>
+              </a:defRPr>
+            </a:pPr>
+            <a:r>
+              <a:t>Min 30–45</a:t>
             </a:r>
           </a:p>
           <a:p>
             <a:pPr>
               <a:spcAft>
-                <a:spcPts val="1000"/>
+                <a:spcPts val="1200"/>
               </a:spcAft>
-              <a:defRPr sz="1800">
+              <a:defRPr sz="1600" b="1">
+                <a:solidFill>
+                  <a:srgbClr val="FFFFFF"/>
+                </a:solidFill>
+                <a:latin typeface="Inter"/>
+              </a:defRPr>
+            </a:pPr>
+            <a:r>
+              <a:t>Test në Telefon</a:t>
+            </a:r>
+          </a:p>
+          <a:p>
+            <a:pPr>
+              <a:defRPr sz="1400">
                 <a:solidFill>
                   <a:srgbClr val="E2E8F0"/>
                 </a:solidFill>
@@ -8182,39 +8279,7 @@
               </a:defRPr>
             </a:pPr>
             <a:r>
-              <a:t>• GitHub Codespaces: Mjedis zhvillimi i plotë në cloud — kodo direkt nga shfletuesi pa instaluar asgjë lokalisht.</a:t>
-            </a:r>
-          </a:p>
-          <a:p>
-            <a:pPr>
-              <a:spcAft>
-                <a:spcPts val="1000"/>
-              </a:spcAft>
-              <a:defRPr sz="1800">
-                <a:solidFill>
-                  <a:srgbClr val="E2E8F0"/>
-                </a:solidFill>
-                <a:latin typeface="Inter"/>
-              </a:defRPr>
-            </a:pPr>
-            <a:r>
-              <a:t>• Domain &amp; SSL Falas: Emër domeni personal (.me / .tech) falas për 1 vit për portofolin tuaj personal.</a:t>
-            </a:r>
-          </a:p>
-          <a:p>
-            <a:pPr>
-              <a:spcAft>
-                <a:spcPts val="1000"/>
-              </a:spcAft>
-              <a:defRPr sz="1800">
-                <a:solidFill>
-                  <a:srgbClr val="E2E8F0"/>
-                </a:solidFill>
-                <a:latin typeface="Inter"/>
-              </a:defRPr>
-            </a:pPr>
-            <a:r>
-              <a:t>• Kredi Cloud: Kredi falas në Microsoft Azure, DigitalOcean dhe platforma të tjera partnere.</a:t>
+              <a:t>Hapni linkun në celular, shtypni 'Add to Home Screen' dhe dorëzoni linkun tuaj në portal.</a:t>
             </a:r>
           </a:p>
         </p:txBody>
@@ -8303,7 +8368,7 @@
           <a:lstStyle/>
           <a:p>
             <a:pPr>
-              <a:defRPr sz="1500" b="1">
+              <a:defRPr sz="1400" b="1">
                 <a:solidFill>
                   <a:srgbClr val="38BDF8"/>
                 </a:solidFill>
@@ -8311,7 +8376,7 @@
               </a:defRPr>
             </a:pPr>
             <a:r>
-              <a:t>INFRASTRUKTURA NË RE</a:t>
+              <a:t>PROTOKOLLI I NDIHMËS</a:t>
             </a:r>
           </a:p>
         </p:txBody>
@@ -8324,7 +8389,7 @@
         </p:nvSpPr>
         <p:spPr>
           <a:xfrm>
-            <a:off x="731520" y="685800"/>
+            <a:off x="731520" y="658368"/>
             <a:ext cx="10698480" cy="777240"/>
           </a:xfrm>
           <a:prstGeom prst="rect">
@@ -8339,7 +8404,7 @@
           <a:lstStyle/>
           <a:p>
             <a:pPr>
-              <a:defRPr sz="3600" b="1">
+              <a:defRPr sz="3400" b="1">
                 <a:solidFill>
                   <a:srgbClr val="FFFFFF"/>
                 </a:solidFill>
@@ -8347,7 +8412,7 @@
               </a:defRPr>
             </a:pPr>
             <a:r>
-              <a:t>Aktivizimi i Supabase &amp; Vercel me 1-Klik</a:t>
+              <a:t>Asnjë Student i Bllokuar: Protokolli 10-Minutësh</a:t>
             </a:r>
           </a:p>
         </p:txBody>
@@ -8360,7 +8425,7 @@
         </p:nvSpPr>
         <p:spPr>
           <a:xfrm>
-            <a:off x="731520" y="1444752"/>
+            <a:off x="731520" y="1417320"/>
             <a:ext cx="10698480" cy="502920"/>
           </a:xfrm>
           <a:prstGeom prst="rect">
@@ -8375,7 +8440,7 @@
           <a:lstStyle/>
           <a:p>
             <a:pPr>
-              <a:defRPr sz="2100">
+              <a:defRPr sz="1900">
                 <a:solidFill>
                   <a:srgbClr val="E2E8F0"/>
                 </a:solidFill>
@@ -8383,7 +8448,7 @@
               </a:defRPr>
             </a:pPr>
             <a:r>
-              <a:t>Dy platformat kryesore cloud që fuqizojnë bazën e të dhënave dhe publikimin e aplikacionit tuaj.</a:t>
+              <a:t>Asistenti ndjek këtë rregullore të rreptë për të rikthyer studentin në mësim brenda 10 minutave.</a:t>
             </a:r>
           </a:p>
         </p:txBody>
@@ -8396,8 +8461,8 @@
         </p:nvSpPr>
         <p:spPr>
           <a:xfrm>
-            <a:off x="731520" y="2011680"/>
-            <a:ext cx="5120640" cy="4389120"/>
+            <a:off x="731520" y="1920240"/>
+            <a:ext cx="3383280" cy="4389120"/>
           </a:xfrm>
           <a:prstGeom prst="roundRect">
             <a:avLst/>
@@ -8405,9 +8470,9 @@
           <a:solidFill>
             <a:srgbClr val="141E34"/>
           </a:solidFill>
-          <a:ln w="31750">
+          <a:ln w="25400">
             <a:solidFill>
-              <a:srgbClr val="10B981"/>
+              <a:srgbClr val="38BDF8"/>
             </a:solidFill>
           </a:ln>
         </p:spPr>
@@ -8433,40 +8498,16 @@
           </a:p>
         </p:txBody>
       </p:sp>
-      <p:pic>
-        <p:nvPicPr>
-          <p:cNvPr id="7" name="Picture 6" descr="qr_master_supabase.png"/>
-          <p:cNvPicPr>
-            <a:picLocks noChangeAspect="1"/>
-          </p:cNvPicPr>
-          <p:nvPr/>
-        </p:nvPicPr>
-        <p:blipFill>
-          <a:blip r:embed="rId2"/>
-          <a:stretch>
-            <a:fillRect/>
-          </a:stretch>
-        </p:blipFill>
-        <p:spPr>
-          <a:xfrm>
-            <a:off x="1097280" y="2286000"/>
-            <a:ext cx="2377440" cy="2377440"/>
-          </a:xfrm>
-          <a:prstGeom prst="rect">
-            <a:avLst/>
-          </a:prstGeom>
-        </p:spPr>
-      </p:pic>
-      <p:sp>
-        <p:nvSpPr>
-          <p:cNvPr id="8" name="TextBox 7"/>
+      <p:sp>
+        <p:nvSpPr>
+          <p:cNvPr id="7" name="TextBox 6"/>
           <p:cNvSpPr txBox="1"/>
           <p:nvPr/>
         </p:nvSpPr>
         <p:spPr>
           <a:xfrm>
-            <a:off x="3566160" y="2194560"/>
-            <a:ext cx="2194560" cy="3840480"/>
+            <a:off x="914400" y="2103120"/>
+            <a:ext cx="3017520" cy="4023360"/>
           </a:xfrm>
           <a:prstGeom prst="rect">
             <a:avLst/>
@@ -8480,26 +8521,36 @@
           <a:lstStyle/>
           <a:p>
             <a:pPr>
+              <a:defRPr sz="1700" b="1">
+                <a:solidFill>
+                  <a:srgbClr val="38BDF8"/>
+                </a:solidFill>
+                <a:latin typeface="Inter"/>
+              </a:defRPr>
+            </a:pPr>
+            <a:r>
+              <a:t>Pengesa: Copilot në Pritje</a:t>
+            </a:r>
+          </a:p>
+          <a:p>
+            <a:pPr>
               <a:spcAft>
-                <a:spcPts val="1000"/>
+                <a:spcPts val="1400"/>
               </a:spcAft>
-              <a:defRPr sz="2200" b="1">
-                <a:solidFill>
-                  <a:srgbClr val="10B981"/>
-                </a:solidFill>
-                <a:latin typeface="Inter"/>
-              </a:defRPr>
-            </a:pPr>
-            <a:r>
-              <a:t>🗄️ Supabase Cloud</a:t>
-            </a:r>
-          </a:p>
-          <a:p>
-            <a:pPr>
-              <a:spcAft>
-                <a:spcPts val="600"/>
-              </a:spcAft>
-              <a:defRPr sz="1600">
+              <a:defRPr sz="1300">
+                <a:solidFill>
+                  <a:srgbClr val="B4C3D7"/>
+                </a:solidFill>
+                <a:latin typeface="Inter"/>
+              </a:defRPr>
+            </a:pPr>
+            <a:r>
+              <a:t>Aplikimi kërkon 24-48 orë</a:t>
+            </a:r>
+          </a:p>
+          <a:p>
+            <a:pPr>
+              <a:defRPr sz="1500">
                 <a:solidFill>
                   <a:srgbClr val="E2E8F0"/>
                 </a:solidFill>
@@ -8507,69 +8558,21 @@
               </a:defRPr>
             </a:pPr>
             <a:r>
-              <a:t>• Kyçje me GitHub</a:t>
-            </a:r>
-          </a:p>
-          <a:p>
-            <a:pPr>
-              <a:spcAft>
-                <a:spcPts val="600"/>
-              </a:spcAft>
-              <a:defRPr sz="1600">
-                <a:solidFill>
-                  <a:srgbClr val="E2E8F0"/>
-                </a:solidFill>
-                <a:latin typeface="Inter"/>
-              </a:defRPr>
-            </a:pPr>
-            <a:r>
-              <a:t>• PostgreSQL falas</a:t>
-            </a:r>
-          </a:p>
-          <a:p>
-            <a:pPr>
-              <a:spcAft>
-                <a:spcPts val="600"/>
-              </a:spcAft>
-              <a:defRPr sz="1600">
-                <a:solidFill>
-                  <a:srgbClr val="E2E8F0"/>
-                </a:solidFill>
-                <a:latin typeface="Inter"/>
-              </a:defRPr>
-            </a:pPr>
-            <a:r>
-              <a:t>• Auth &amp; Siguria RLS</a:t>
-            </a:r>
-          </a:p>
-          <a:p>
-            <a:pPr>
-              <a:spcAft>
-                <a:spcPts val="600"/>
-              </a:spcAft>
-              <a:defRPr sz="1600">
-                <a:solidFill>
-                  <a:srgbClr val="E2E8F0"/>
-                </a:solidFill>
-                <a:latin typeface="Inter"/>
-              </a:defRPr>
-            </a:pPr>
-            <a:r>
-              <a:t>• Realtime sync</a:t>
-            </a:r>
-          </a:p>
-        </p:txBody>
-      </p:sp>
-      <p:sp>
-        <p:nvSpPr>
-          <p:cNvPr id="9" name="Rounded Rectangle 8"/>
+              <a:t>Mos u bllokoni! Studenti vazhdon ushtrimin 1 pa Copilot. Aktivizimi bëhet gjatë javës.</a:t>
+            </a:r>
+          </a:p>
+        </p:txBody>
+      </p:sp>
+      <p:sp>
+        <p:nvSpPr>
+          <p:cNvPr id="8" name="Rounded Rectangle 7"/>
           <p:cNvSpPr/>
           <p:nvPr/>
         </p:nvSpPr>
         <p:spPr>
           <a:xfrm>
-            <a:off x="6309360" y="2011680"/>
-            <a:ext cx="5120640" cy="4389120"/>
+            <a:off x="4389120" y="1920240"/>
+            <a:ext cx="3383280" cy="4389120"/>
           </a:xfrm>
           <a:prstGeom prst="roundRect">
             <a:avLst/>
@@ -8577,7 +8580,7 @@
           <a:solidFill>
             <a:srgbClr val="141E34"/>
           </a:solidFill>
-          <a:ln w="31750">
+          <a:ln w="25400">
             <a:solidFill>
               <a:srgbClr val="F59E0B"/>
             </a:solidFill>
@@ -8605,40 +8608,16 @@
           </a:p>
         </p:txBody>
       </p:sp>
-      <p:pic>
-        <p:nvPicPr>
-          <p:cNvPr id="10" name="Picture 9" descr="qr_master_vercel.png"/>
-          <p:cNvPicPr>
-            <a:picLocks noChangeAspect="1"/>
-          </p:cNvPicPr>
-          <p:nvPr/>
-        </p:nvPicPr>
-        <p:blipFill>
-          <a:blip r:embed="rId3"/>
-          <a:stretch>
-            <a:fillRect/>
-          </a:stretch>
-        </p:blipFill>
-        <p:spPr>
-          <a:xfrm>
-            <a:off x="6675120" y="2286000"/>
-            <a:ext cx="2377440" cy="2377440"/>
-          </a:xfrm>
-          <a:prstGeom prst="rect">
-            <a:avLst/>
-          </a:prstGeom>
-        </p:spPr>
-      </p:pic>
-      <p:sp>
-        <p:nvSpPr>
-          <p:cNvPr id="11" name="TextBox 10"/>
+      <p:sp>
+        <p:nvSpPr>
+          <p:cNvPr id="9" name="TextBox 8"/>
           <p:cNvSpPr txBox="1"/>
           <p:nvPr/>
         </p:nvSpPr>
         <p:spPr>
           <a:xfrm>
-            <a:off x="9144000" y="2194560"/>
-            <a:ext cx="2194560" cy="3840480"/>
+            <a:off x="4572000" y="2103120"/>
+            <a:ext cx="3017520" cy="4023360"/>
           </a:xfrm>
           <a:prstGeom prst="rect">
             <a:avLst/>
@@ -8652,26 +8631,146 @@
           <a:lstStyle/>
           <a:p>
             <a:pPr>
+              <a:defRPr sz="1700" b="1">
+                <a:solidFill>
+                  <a:srgbClr val="F59E0B"/>
+                </a:solidFill>
+                <a:latin typeface="Inter"/>
+              </a:defRPr>
+            </a:pPr>
+            <a:r>
+              <a:t>Pengesa: Dështim i SSH / Git</a:t>
+            </a:r>
+          </a:p>
+          <a:p>
+            <a:pPr>
               <a:spcAft>
-                <a:spcPts val="1000"/>
+                <a:spcPts val="1400"/>
               </a:spcAft>
-              <a:defRPr sz="2200" b="1">
-                <a:solidFill>
-                  <a:srgbClr val="F59E0B"/>
-                </a:solidFill>
-                <a:latin typeface="Inter"/>
-              </a:defRPr>
-            </a:pPr>
-            <a:r>
-              <a:t>▲ Vercel Platform</a:t>
+              <a:defRPr sz="1300">
+                <a:solidFill>
+                  <a:srgbClr val="B4C3D7"/>
+                </a:solidFill>
+                <a:latin typeface="Inter"/>
+              </a:defRPr>
+            </a:pPr>
+            <a:r>
+              <a:t>Çelësat e terminalit nuk lidhen</a:t>
+            </a:r>
+          </a:p>
+          <a:p>
+            <a:pPr>
+              <a:defRPr sz="1500">
+                <a:solidFill>
+                  <a:srgbClr val="E2E8F0"/>
+                </a:solidFill>
+                <a:latin typeface="Inter"/>
+              </a:defRPr>
+            </a:pPr>
+            <a:r>
+              <a:t>Kaloni menjëherë te HTTPS me Personal Access Token (PAT) ose përdorni GitHub Desktop me 1-klik.</a:t>
+            </a:r>
+          </a:p>
+        </p:txBody>
+      </p:sp>
+      <p:sp>
+        <p:nvSpPr>
+          <p:cNvPr id="10" name="Rounded Rectangle 9"/>
+          <p:cNvSpPr/>
+          <p:nvPr/>
+        </p:nvSpPr>
+        <p:spPr>
+          <a:xfrm>
+            <a:off x="8046720" y="1920240"/>
+            <a:ext cx="3383280" cy="4389120"/>
+          </a:xfrm>
+          <a:prstGeom prst="roundRect">
+            <a:avLst/>
+          </a:prstGeom>
+          <a:solidFill>
+            <a:srgbClr val="141E34"/>
+          </a:solidFill>
+          <a:ln w="25400">
+            <a:solidFill>
+              <a:srgbClr val="10B981"/>
+            </a:solidFill>
+          </a:ln>
+        </p:spPr>
+        <p:style>
+          <a:lnRef idx="1">
+            <a:schemeClr val="accent1"/>
+          </a:lnRef>
+          <a:fillRef idx="3">
+            <a:schemeClr val="accent1"/>
+          </a:fillRef>
+          <a:effectRef idx="2">
+            <a:schemeClr val="accent1"/>
+          </a:effectRef>
+          <a:fontRef idx="minor">
+            <a:schemeClr val="lt1"/>
+          </a:fontRef>
+        </p:style>
+        <p:txBody>
+          <a:bodyPr rtlCol="0" anchor="ctr"/>
+          <a:lstStyle/>
+          <a:p>
+            <a:pPr algn="ctr"/>
+          </a:p>
+        </p:txBody>
+      </p:sp>
+      <p:sp>
+        <p:nvSpPr>
+          <p:cNvPr id="11" name="TextBox 10"/>
+          <p:cNvSpPr txBox="1"/>
+          <p:nvPr/>
+        </p:nvSpPr>
+        <p:spPr>
+          <a:xfrm>
+            <a:off x="8229600" y="2103120"/>
+            <a:ext cx="3017520" cy="4023360"/>
+          </a:xfrm>
+          <a:prstGeom prst="rect">
+            <a:avLst/>
+          </a:prstGeom>
+          <a:noFill/>
+        </p:spPr>
+        <p:txBody>
+          <a:bodyPr wrap="square">
+            <a:spAutoFit/>
+          </a:bodyPr>
+          <a:lstStyle/>
+          <a:p>
+            <a:pPr>
+              <a:defRPr sz="1700" b="1">
+                <a:solidFill>
+                  <a:srgbClr val="10B981"/>
+                </a:solidFill>
+                <a:latin typeface="Inter"/>
+              </a:defRPr>
+            </a:pPr>
+            <a:r>
+              <a:t>Pengesa: Node.js / Windows PATH</a:t>
             </a:r>
           </a:p>
           <a:p>
             <a:pPr>
               <a:spcAft>
-                <a:spcPts val="600"/>
+                <a:spcPts val="1400"/>
               </a:spcAft>
-              <a:defRPr sz="1600">
+              <a:defRPr sz="1300">
+                <a:solidFill>
+                  <a:srgbClr val="B4C3D7"/>
+                </a:solidFill>
+                <a:latin typeface="Inter"/>
+              </a:defRPr>
+            </a:pPr>
+            <a:r>
+              <a:t>Terminali nuk njeh komandën 'node'</a:t>
+            </a:r>
+          </a:p>
+          <a:p>
+            <a:pPr>
+              <a:defRPr sz="1500">
                 <a:solidFill>
                   <a:srgbClr val="E2E8F0"/>
                 </a:solidFill>
@@ -8679,55 +8778,7 @@
               </a:defRPr>
             </a:pPr>
             <a:r>
-              <a:t>• Kyçje me GitHub</a:t>
-            </a:r>
-          </a:p>
-          <a:p>
-            <a:pPr>
-              <a:spcAft>
-                <a:spcPts val="600"/>
-              </a:spcAft>
-              <a:defRPr sz="1600">
-                <a:solidFill>
-                  <a:srgbClr val="E2E8F0"/>
-                </a:solidFill>
-                <a:latin typeface="Inter"/>
-              </a:defRPr>
-            </a:pPr>
-            <a:r>
-              <a:t>• Publikim me 1 klik</a:t>
-            </a:r>
-          </a:p>
-          <a:p>
-            <a:pPr>
-              <a:spcAft>
-                <a:spcPts val="600"/>
-              </a:spcAft>
-              <a:defRPr sz="1600">
-                <a:solidFill>
-                  <a:srgbClr val="E2E8F0"/>
-                </a:solidFill>
-                <a:latin typeface="Inter"/>
-              </a:defRPr>
-            </a:pPr>
-            <a:r>
-              <a:t>• Domain .vercel.app</a:t>
-            </a:r>
-          </a:p>
-          <a:p>
-            <a:pPr>
-              <a:spcAft>
-                <a:spcPts val="600"/>
-              </a:spcAft>
-              <a:defRPr sz="1600">
-                <a:solidFill>
-                  <a:srgbClr val="E2E8F0"/>
-                </a:solidFill>
-                <a:latin typeface="Inter"/>
-              </a:defRPr>
-            </a:pPr>
-            <a:r>
-              <a:t>• Edge Network global</a:t>
+              <a:t>Punohet direkt në shfletues me GitHub Web Editor (shtyp butonin '.') dhe bëhet build në Vercel!</a:t>
             </a:r>
           </a:p>
         </p:txBody>
@@ -8816,7 +8867,7 @@
           <a:lstStyle/>
           <a:p>
             <a:pPr>
-              <a:defRPr sz="1500" b="1">
+              <a:defRPr sz="1400" b="1">
                 <a:solidFill>
                   <a:srgbClr val="38BDF8"/>
                 </a:solidFill>
@@ -8824,7 +8875,7 @@
               </a:defRPr>
             </a:pPr>
             <a:r>
-              <a:t>UDHËRRËFYESI MASTER</a:t>
+              <a:t>ANALOGJIA HYRËSE (2 MINUTA)</a:t>
             </a:r>
           </a:p>
         </p:txBody>
@@ -8837,7 +8888,7 @@
         </p:nvSpPr>
         <p:spPr>
           <a:xfrm>
-            <a:off x="731520" y="685800"/>
+            <a:off x="731520" y="658368"/>
             <a:ext cx="10698480" cy="777240"/>
           </a:xfrm>
           <a:prstGeom prst="rect">
@@ -8852,7 +8903,7 @@
           <a:lstStyle/>
           <a:p>
             <a:pPr>
-              <a:defRPr sz="3600" b="1">
+              <a:defRPr sz="3400" b="1">
                 <a:solidFill>
                   <a:srgbClr val="FFFFFF"/>
                 </a:solidFill>
@@ -8860,7 +8911,7 @@
               </a:defRPr>
             </a:pPr>
             <a:r>
-              <a:t>Skica e Madhe: Nga Ideja te Specifikat &amp; Arkitektura</a:t>
+              <a:t>Para se të Presim Drurin: Çfarë Duhet të Dimë?</a:t>
             </a:r>
           </a:p>
         </p:txBody>
@@ -8873,7 +8924,7 @@
         </p:nvSpPr>
         <p:spPr>
           <a:xfrm>
-            <a:off x="731520" y="1444752"/>
+            <a:off x="731520" y="1417320"/>
             <a:ext cx="10698480" cy="502920"/>
           </a:xfrm>
           <a:prstGeom prst="rect">
@@ -8888,7 +8939,7 @@
           <a:lstStyle/>
           <a:p>
             <a:pPr>
-              <a:defRPr sz="2100">
+              <a:defRPr sz="1900">
                 <a:solidFill>
                   <a:srgbClr val="E2E8F0"/>
                 </a:solidFill>
@@ -8896,7 +8947,7 @@
               </a:defRPr>
             </a:pPr>
             <a:r>
-              <a:t>Metodologjia Inxhinierike: 1. Ideja -&gt; 2. Specifikat (Scope) -&gt; 3. Arkitektura ne Vija te Trasha -&gt; 4. Ndërtimi Real</a:t>
+              <a:t>Para se AI të na shkruajë kod: cilat vendime arkitekturore duhet t'i kemi marrë ne?</a:t>
             </a:r>
           </a:p>
         </p:txBody>
@@ -8948,7 +8999,7 @@
       </p:sp>
       <p:pic>
         <p:nvPicPr>
-          <p:cNvPr id="7" name="Picture 6" descr="aab_rideshare_sketch_dream.png"/>
+          <p:cNvPr id="7" name="Picture 6" descr="sketch_chair_sme_master.png"/>
           <p:cNvPicPr>
             <a:picLocks noChangeAspect="1"/>
           </p:cNvPicPr>
@@ -9054,7 +9105,7 @@
           <a:lstStyle/>
           <a:p>
             <a:pPr>
-              <a:defRPr sz="1500" b="1">
+              <a:defRPr sz="1400" b="1">
                 <a:solidFill>
                   <a:srgbClr val="38BDF8"/>
                 </a:solidFill>
@@ -9062,7 +9113,7 @@
               </a:defRPr>
             </a:pPr>
             <a:r>
-              <a:t>PLANI PËR LIGJËRATËN 2</a:t>
+              <a:t>DETYRAT PËR JAVËN 2</a:t>
             </a:r>
           </a:p>
         </p:txBody>
@@ -9075,7 +9126,7 @@
         </p:nvSpPr>
         <p:spPr>
           <a:xfrm>
-            <a:off x="731520" y="685800"/>
+            <a:off x="731520" y="658368"/>
             <a:ext cx="10698480" cy="777240"/>
           </a:xfrm>
           <a:prstGeom prst="rect">
@@ -9090,7 +9141,7 @@
           <a:lstStyle/>
           <a:p>
             <a:pPr>
-              <a:defRPr sz="3600" b="1">
+              <a:defRPr sz="3400" b="1">
                 <a:solidFill>
                   <a:srgbClr val="FFFFFF"/>
                 </a:solidFill>
@@ -9098,7 +9149,7 @@
               </a:defRPr>
             </a:pPr>
             <a:r>
-              <a:t>Ligjërata 2: Si të Ndërtojmë Idenë, Specifikat &amp; Arkitekturën?</a:t>
+              <a:t>Hapi i Radhës: Gjeni Problemin dhe Dorëzoni PRD-në!</a:t>
             </a:r>
           </a:p>
         </p:txBody>
@@ -9111,7 +9162,7 @@
         </p:nvSpPr>
         <p:spPr>
           <a:xfrm>
-            <a:off x="731520" y="1444752"/>
+            <a:off x="731520" y="1417320"/>
             <a:ext cx="10698480" cy="502920"/>
           </a:xfrm>
           <a:prstGeom prst="rect">
@@ -9126,7 +9177,7 @@
           <a:lstStyle/>
           <a:p>
             <a:pPr>
-              <a:defRPr sz="2100">
+              <a:defRPr sz="1900">
                 <a:solidFill>
                   <a:srgbClr val="E2E8F0"/>
                 </a:solidFill>
@@ -9134,7 +9185,7 @@
               </a:defRPr>
             </a:pPr>
             <a:r>
-              <a:t>Jo menjëherë në zhvillim! Secili zgjedh një problem real dhe ndërton arkitekturën para kodit.</a:t>
+              <a:t>Përgatitja për Javën 2: Krijimi i themeleve të startup-it tuaj para se të shkruani kod.</a:t>
             </a:r>
           </a:p>
         </p:txBody>
@@ -9147,8 +9198,8 @@
         </p:nvSpPr>
         <p:spPr>
           <a:xfrm>
-            <a:off x="731520" y="2011680"/>
-            <a:ext cx="3383280" cy="4389120"/>
+            <a:off x="731520" y="1920240"/>
+            <a:ext cx="5166360" cy="2011680"/>
           </a:xfrm>
           <a:prstGeom prst="roundRect">
             <a:avLst/>
@@ -9156,9 +9207,9 @@
           <a:solidFill>
             <a:srgbClr val="141E34"/>
           </a:solidFill>
-          <a:ln w="31750">
+          <a:ln w="19050">
             <a:solidFill>
-              <a:srgbClr val="38BDF8"/>
+              <a:srgbClr val="2E4066"/>
             </a:solidFill>
           </a:ln>
         </p:spPr>
@@ -9192,8 +9243,8 @@
         </p:nvSpPr>
         <p:spPr>
           <a:xfrm>
-            <a:off x="914400" y="2194560"/>
-            <a:ext cx="3017520" cy="4023360"/>
+            <a:off x="914400" y="2103120"/>
+            <a:ext cx="4800600" cy="1645920"/>
           </a:xfrm>
           <a:prstGeom prst="rect">
             <a:avLst/>
@@ -9208,9 +9259,9 @@
           <a:p>
             <a:pPr>
               <a:spcAft>
-                <a:spcPts val="600"/>
+                <a:spcPts val="800"/>
               </a:spcAft>
-              <a:defRPr sz="1400" b="1">
+              <a:defRPr sz="1800" b="1">
                 <a:solidFill>
                   <a:srgbClr val="38BDF8"/>
                 </a:solidFill>
@@ -9218,31 +9269,12 @@
               </a:defRPr>
             </a:pPr>
             <a:r>
-              <a:t>💡 1. Përzgjedhja e Idesë</a:t>
-            </a:r>
-          </a:p>
-          <a:p>
-            <a:pPr>
-              <a:spcAft>
-                <a:spcPts val="1400"/>
-              </a:spcAft>
-              <a:defRPr sz="2200" b="1">
-                <a:solidFill>
-                  <a:srgbClr val="FFFFFF"/>
-                </a:solidFill>
-                <a:latin typeface="Inter"/>
-              </a:defRPr>
-            </a:pPr>
-            <a:r>
-              <a:t>Biznesi / Problemi Real</a:t>
-            </a:r>
-          </a:p>
-          <a:p>
-            <a:pPr>
-              <a:spcAft>
-                <a:spcPts val="1000"/>
-              </a:spcAft>
-              <a:defRPr sz="1700">
+              <a:t>Detyra 1: Vëzhgimi Real</a:t>
+            </a:r>
+          </a:p>
+          <a:p>
+            <a:pPr>
+              <a:defRPr sz="1500">
                 <a:solidFill>
                   <a:srgbClr val="E2E8F0"/>
                 </a:solidFill>
@@ -9250,55 +9282,7 @@
               </a:defRPr>
             </a:pPr>
             <a:r>
-              <a:t>• Çdo student ose grup përzgjedh një SME lokale ose nevojë reale.</a:t>
-            </a:r>
-          </a:p>
-          <a:p>
-            <a:pPr>
-              <a:spcAft>
-                <a:spcPts val="1000"/>
-              </a:spcAft>
-              <a:defRPr sz="1700">
-                <a:solidFill>
-                  <a:srgbClr val="E2E8F0"/>
-                </a:solidFill>
-                <a:latin typeface="Inter"/>
-              </a:defRPr>
-            </a:pPr>
-            <a:r>
-              <a:t>• Shembuj: RideShare, Furrë buke, Mobileri, Porosi studentore, Servis.</a:t>
-            </a:r>
-          </a:p>
-          <a:p>
-            <a:pPr>
-              <a:spcAft>
-                <a:spcPts val="1000"/>
-              </a:spcAft>
-              <a:defRPr sz="1700">
-                <a:solidFill>
-                  <a:srgbClr val="E2E8F0"/>
-                </a:solidFill>
-                <a:latin typeface="Inter"/>
-              </a:defRPr>
-            </a:pPr>
-            <a:r>
-              <a:t>• Formulimi i saktë i 'Dhimbjes' (Pain) dhe 'Përfitimit' (Value).</a:t>
-            </a:r>
-          </a:p>
-          <a:p>
-            <a:pPr>
-              <a:spcAft>
-                <a:spcPts val="1000"/>
-              </a:spcAft>
-              <a:defRPr sz="1700">
-                <a:solidFill>
-                  <a:srgbClr val="E2E8F0"/>
-                </a:solidFill>
-                <a:latin typeface="Inter"/>
-              </a:defRPr>
-            </a:pPr>
-            <a:r>
-              <a:t>• Pse zgjidhja me celular sjell efiçiencë dhe fitim të matshëm.</a:t>
+              <a:t>Gjeni një problem të prekshëm në jetën studentore ose në një SME vendore në Kosovë.</a:t>
             </a:r>
           </a:p>
         </p:txBody>
@@ -9311,8 +9295,8 @@
         </p:nvSpPr>
         <p:spPr>
           <a:xfrm>
-            <a:off x="4389120" y="2011680"/>
-            <a:ext cx="3383280" cy="4389120"/>
+            <a:off x="6263640" y="1920240"/>
+            <a:ext cx="5166360" cy="2011680"/>
           </a:xfrm>
           <a:prstGeom prst="roundRect">
             <a:avLst/>
@@ -9320,9 +9304,9 @@
           <a:solidFill>
             <a:srgbClr val="141E34"/>
           </a:solidFill>
-          <a:ln w="31750">
+          <a:ln w="19050">
             <a:solidFill>
-              <a:srgbClr val="10B981"/>
+              <a:srgbClr val="2E4066"/>
             </a:solidFill>
           </a:ln>
         </p:spPr>
@@ -9356,8 +9340,8 @@
         </p:nvSpPr>
         <p:spPr>
           <a:xfrm>
-            <a:off x="4572000" y="2194560"/>
-            <a:ext cx="3017520" cy="4023360"/>
+            <a:off x="6446520" y="2103120"/>
+            <a:ext cx="4800600" cy="1645920"/>
           </a:xfrm>
           <a:prstGeom prst="rect">
             <a:avLst/>
@@ -9372,41 +9356,22 @@
           <a:p>
             <a:pPr>
               <a:spcAft>
-                <a:spcPts val="600"/>
+                <a:spcPts val="800"/>
               </a:spcAft>
-              <a:defRPr sz="1400" b="1">
-                <a:solidFill>
-                  <a:srgbClr val="10B981"/>
-                </a:solidFill>
-                <a:latin typeface="Inter"/>
-              </a:defRPr>
-            </a:pPr>
-            <a:r>
-              <a:t>📋 2. Hartimi i Specifikave</a:t>
-            </a:r>
-          </a:p>
-          <a:p>
-            <a:pPr>
-              <a:spcAft>
-                <a:spcPts val="1400"/>
-              </a:spcAft>
-              <a:defRPr sz="2200" b="1">
-                <a:solidFill>
-                  <a:srgbClr val="FFFFFF"/>
-                </a:solidFill>
-                <a:latin typeface="Inter"/>
-              </a:defRPr>
-            </a:pPr>
-            <a:r>
-              <a:t>Kërkesat &amp; Kufijtë (PRD)</a:t>
-            </a:r>
-          </a:p>
-          <a:p>
-            <a:pPr>
-              <a:spcAft>
-                <a:spcPts val="1000"/>
-              </a:spcAft>
-              <a:defRPr sz="1700">
+              <a:defRPr sz="1800" b="1">
+                <a:solidFill>
+                  <a:srgbClr val="38BDF8"/>
+                </a:solidFill>
+                <a:latin typeface="Inter"/>
+              </a:defRPr>
+            </a:pPr>
+            <a:r>
+              <a:t>Detyra 2: 3 Bisedat</a:t>
+            </a:r>
+          </a:p>
+          <a:p>
+            <a:pPr>
+              <a:defRPr sz="1500">
                 <a:solidFill>
                   <a:srgbClr val="E2E8F0"/>
                 </a:solidFill>
@@ -9414,55 +9379,7 @@
               </a:defRPr>
             </a:pPr>
             <a:r>
-              <a:t>• Përcaktimi i saktë i aktorëve (kush e përdor dhe pse).</a:t>
-            </a:r>
-          </a:p>
-          <a:p>
-            <a:pPr>
-              <a:spcAft>
-                <a:spcPts val="1000"/>
-              </a:spcAft>
-              <a:defRPr sz="1700">
-                <a:solidFill>
-                  <a:srgbClr val="E2E8F0"/>
-                </a:solidFill>
-                <a:latin typeface="Inter"/>
-              </a:defRPr>
-            </a:pPr>
-            <a:r>
-              <a:t>• Features Must-Have (funksionalitetet thelbësore të MVP-së).</a:t>
-            </a:r>
-          </a:p>
-          <a:p>
-            <a:pPr>
-              <a:spcAft>
-                <a:spcPts val="1000"/>
-              </a:spcAft>
-              <a:defRPr sz="1700">
-                <a:solidFill>
-                  <a:srgbClr val="E2E8F0"/>
-                </a:solidFill>
-                <a:latin typeface="Inter"/>
-              </a:defRPr>
-            </a:pPr>
-            <a:r>
-              <a:t>• Përjashtimet Out-of-Scope (çfarë NUK bëjmë për të shmangur dështimin).</a:t>
-            </a:r>
-          </a:p>
-          <a:p>
-            <a:pPr>
-              <a:spcAft>
-                <a:spcPts val="1000"/>
-              </a:spcAft>
-              <a:defRPr sz="1700">
-                <a:solidFill>
-                  <a:srgbClr val="E2E8F0"/>
-                </a:solidFill>
-                <a:latin typeface="Inter"/>
-              </a:defRPr>
-            </a:pPr>
-            <a:r>
-              <a:t>• Rregulli: 80% e projekteve dështojnë nga fryrja e kërkesave!</a:t>
+              <a:t>Zhvilloni 3 intervista të shkurtra me përdorues potencialë dhe shënoni citimet e tyre.</a:t>
             </a:r>
           </a:p>
         </p:txBody>
@@ -9475,8 +9392,8 @@
         </p:nvSpPr>
         <p:spPr>
           <a:xfrm>
-            <a:off x="8046720" y="2011680"/>
-            <a:ext cx="3383280" cy="4389120"/>
+            <a:off x="731520" y="4069080"/>
+            <a:ext cx="5166360" cy="2011680"/>
           </a:xfrm>
           <a:prstGeom prst="roundRect">
             <a:avLst/>
@@ -9484,9 +9401,9 @@
           <a:solidFill>
             <a:srgbClr val="141E34"/>
           </a:solidFill>
-          <a:ln w="31750">
+          <a:ln w="19050">
             <a:solidFill>
-              <a:srgbClr val="F59E0B"/>
+              <a:srgbClr val="2E4066"/>
             </a:solidFill>
           </a:ln>
         </p:spPr>
@@ -9520,8 +9437,8 @@
         </p:nvSpPr>
         <p:spPr>
           <a:xfrm>
-            <a:off x="8229600" y="2194560"/>
-            <a:ext cx="3017520" cy="4023360"/>
+            <a:off x="914400" y="4251960"/>
+            <a:ext cx="4800600" cy="1645920"/>
           </a:xfrm>
           <a:prstGeom prst="rect">
             <a:avLst/>
@@ -9536,41 +9453,119 @@
           <a:p>
             <a:pPr>
               <a:spcAft>
-                <a:spcPts val="600"/>
+                <a:spcPts val="800"/>
               </a:spcAft>
-              <a:defRPr sz="1400" b="1">
-                <a:solidFill>
-                  <a:srgbClr val="F59E0B"/>
-                </a:solidFill>
-                <a:latin typeface="Inter"/>
-              </a:defRPr>
-            </a:pPr>
-            <a:r>
-              <a:t>📐 3. Arkitektura &amp; Skica</a:t>
-            </a:r>
-          </a:p>
+              <a:defRPr sz="1800" b="1">
+                <a:solidFill>
+                  <a:srgbClr val="38BDF8"/>
+                </a:solidFill>
+                <a:latin typeface="Inter"/>
+              </a:defRPr>
+            </a:pPr>
+            <a:r>
+              <a:t>Detyra 3: Drafti i PRD-së</a:t>
+            </a:r>
+          </a:p>
+          <a:p>
+            <a:pPr>
+              <a:defRPr sz="1500">
+                <a:solidFill>
+                  <a:srgbClr val="E2E8F0"/>
+                </a:solidFill>
+                <a:latin typeface="Inter"/>
+              </a:defRPr>
+            </a:pPr>
+            <a:r>
+              <a:t>Shkarkoni PRD_Template_AAB_Mobile_2026.md, plotësoni 1 faqe dhe dorëzojeni në portal.</a:t>
+            </a:r>
+          </a:p>
+        </p:txBody>
+      </p:sp>
+      <p:sp>
+        <p:nvSpPr>
+          <p:cNvPr id="12" name="Rounded Rectangle 11"/>
+          <p:cNvSpPr/>
+          <p:nvPr/>
+        </p:nvSpPr>
+        <p:spPr>
+          <a:xfrm>
+            <a:off x="6263640" y="4069080"/>
+            <a:ext cx="5166360" cy="2011680"/>
+          </a:xfrm>
+          <a:prstGeom prst="roundRect">
+            <a:avLst/>
+          </a:prstGeom>
+          <a:solidFill>
+            <a:srgbClr val="141E34"/>
+          </a:solidFill>
+          <a:ln w="19050">
+            <a:solidFill>
+              <a:srgbClr val="2E4066"/>
+            </a:solidFill>
+          </a:ln>
+        </p:spPr>
+        <p:style>
+          <a:lnRef idx="1">
+            <a:schemeClr val="accent1"/>
+          </a:lnRef>
+          <a:fillRef idx="3">
+            <a:schemeClr val="accent1"/>
+          </a:fillRef>
+          <a:effectRef idx="2">
+            <a:schemeClr val="accent1"/>
+          </a:effectRef>
+          <a:fontRef idx="minor">
+            <a:schemeClr val="lt1"/>
+          </a:fontRef>
+        </p:style>
+        <p:txBody>
+          <a:bodyPr rtlCol="0" anchor="ctr"/>
+          <a:lstStyle/>
+          <a:p>
+            <a:pPr algn="ctr"/>
+          </a:p>
+        </p:txBody>
+      </p:sp>
+      <p:sp>
+        <p:nvSpPr>
+          <p:cNvPr id="13" name="TextBox 12"/>
+          <p:cNvSpPr txBox="1"/>
+          <p:nvPr/>
+        </p:nvSpPr>
+        <p:spPr>
+          <a:xfrm>
+            <a:off x="6446520" y="4251960"/>
+            <a:ext cx="4800600" cy="1645920"/>
+          </a:xfrm>
+          <a:prstGeom prst="rect">
+            <a:avLst/>
+          </a:prstGeom>
+          <a:noFill/>
+        </p:spPr>
+        <p:txBody>
+          <a:bodyPr wrap="square">
+            <a:spAutoFit/>
+          </a:bodyPr>
+          <a:lstStyle/>
           <a:p>
             <a:pPr>
               <a:spcAft>
-                <a:spcPts val="1400"/>
+                <a:spcPts val="800"/>
               </a:spcAft>
-              <a:defRPr sz="2200" b="1">
-                <a:solidFill>
-                  <a:srgbClr val="FFFFFF"/>
-                </a:solidFill>
-                <a:latin typeface="Inter"/>
-              </a:defRPr>
-            </a:pPr>
-            <a:r>
-              <a:t>Kutitë &amp; Komponentët</a:t>
-            </a:r>
-          </a:p>
-          <a:p>
-            <a:pPr>
-              <a:spcAft>
-                <a:spcPts val="1000"/>
-              </a:spcAft>
-              <a:defRPr sz="1700">
+              <a:defRPr sz="1800" b="1">
+                <a:solidFill>
+                  <a:srgbClr val="38BDF8"/>
+                </a:solidFill>
+                <a:latin typeface="Inter"/>
+              </a:defRPr>
+            </a:pPr>
+            <a:r>
+              <a:t>Detyra 4: Scope Contract</a:t>
+            </a:r>
+          </a:p>
+          <a:p>
+            <a:pPr>
+              <a:defRPr sz="1500">
                 <a:solidFill>
                   <a:srgbClr val="E2E8F0"/>
                 </a:solidFill>
@@ -9578,55 +9573,7 @@
               </a:defRPr>
             </a:pPr>
             <a:r>
-              <a:t>• Skicimi i kutive dhe shigjetave: Klienti PWA, Supabase DB, Auth.</a:t>
-            </a:r>
-          </a:p>
-          <a:p>
-            <a:pPr>
-              <a:spcAft>
-                <a:spcPts val="1000"/>
-              </a:spcAft>
-              <a:defRPr sz="1700">
-                <a:solidFill>
-                  <a:srgbClr val="E2E8F0"/>
-                </a:solidFill>
-                <a:latin typeface="Inter"/>
-              </a:defRPr>
-            </a:pPr>
-            <a:r>
-              <a:t>• Modelimi i tabelave kryesore (p.sh. tabelat 'rides', 'orders').</a:t>
-            </a:r>
-          </a:p>
-          <a:p>
-            <a:pPr>
-              <a:spcAft>
-                <a:spcPts val="1000"/>
-              </a:spcAft>
-              <a:defRPr sz="1700">
-                <a:solidFill>
-                  <a:srgbClr val="E2E8F0"/>
-                </a:solidFill>
-                <a:latin typeface="Inter"/>
-              </a:defRPr>
-            </a:pPr>
-            <a:r>
-              <a:t>• Vizatimi i ekraneve me dorë në letër (Wireframing).</a:t>
-            </a:r>
-          </a:p>
-          <a:p>
-            <a:pPr>
-              <a:spcAft>
-                <a:spcPts val="1000"/>
-              </a:spcAft>
-              <a:defRPr sz="1700">
-                <a:solidFill>
-                  <a:srgbClr val="E2E8F0"/>
-                </a:solidFill>
-                <a:latin typeface="Inter"/>
-              </a:defRPr>
-            </a:pPr>
-            <a:r>
-              <a:t>• Parimi i Hekurt: Asnjë rresht kod pa arkitekturë të miratuar!</a:t>
+              <a:t>Përcaktoni saktësisht maksimumi 3 veçori brenda MVP-së dhe çfarë përjashtohet qëllimisht.</a:t>
             </a:r>
           </a:p>
         </p:txBody>
@@ -9715,7 +9662,7 @@
           <a:lstStyle/>
           <a:p>
             <a:pPr>
-              <a:defRPr sz="1500" b="1">
+              <a:defRPr sz="1400" b="1">
                 <a:solidFill>
                   <a:srgbClr val="38BDF8"/>
                 </a:solidFill>
@@ -9723,7 +9670,7 @@
               </a:defRPr>
             </a:pPr>
             <a:r>
-              <a:t>HAPAT E RADHËS</a:t>
+              <a:t>EXIT TICKET (2 MINUTA)</a:t>
             </a:r>
           </a:p>
         </p:txBody>
@@ -9736,7 +9683,7 @@
         </p:nvSpPr>
         <p:spPr>
           <a:xfrm>
-            <a:off x="731520" y="685800"/>
+            <a:off x="731520" y="658368"/>
             <a:ext cx="10698480" cy="777240"/>
           </a:xfrm>
           <a:prstGeom prst="rect">
@@ -9751,7 +9698,7 @@
           <a:lstStyle/>
           <a:p>
             <a:pPr>
-              <a:defRPr sz="3600" b="1">
+              <a:defRPr sz="3400" b="1">
                 <a:solidFill>
                   <a:srgbClr val="FFFFFF"/>
                 </a:solidFill>
@@ -9759,7 +9706,7 @@
               </a:defRPr>
             </a:pPr>
             <a:r>
-              <a:t>Detyrat për Javën 2: Hapi i Parë Drejt Produktit</a:t>
+              <a:t>Mbyllja e Orës: 3 Pyetje për Çdo Student</a:t>
             </a:r>
           </a:p>
         </p:txBody>
@@ -9772,7 +9719,7 @@
         </p:nvSpPr>
         <p:spPr>
           <a:xfrm>
-            <a:off x="731520" y="1444752"/>
+            <a:off x="731520" y="1417320"/>
             <a:ext cx="10698480" cy="502920"/>
           </a:xfrm>
           <a:prstGeom prst="rect">
@@ -9787,7 +9734,7 @@
           <a:lstStyle/>
           <a:p>
             <a:pPr>
-              <a:defRPr sz="2100">
+              <a:defRPr sz="1900">
                 <a:solidFill>
                   <a:srgbClr val="E2E8F0"/>
                 </a:solidFill>
@@ -9795,7 +9742,7 @@
               </a:defRPr>
             </a:pPr>
             <a:r>
-              <a:t>Çfarë duhet të përgatisni për takimin e radhës në ligjëratë dhe ushtrime.</a:t>
+              <a:t>Plotësohet në celular ose letër dhe dorëzohet para se të dilni nga salla e ligjëratave.</a:t>
             </a:r>
           </a:p>
         </p:txBody>
@@ -9808,7 +9755,7 @@
         </p:nvSpPr>
         <p:spPr>
           <a:xfrm>
-            <a:off x="731520" y="2011680"/>
+            <a:off x="731520" y="1920240"/>
             <a:ext cx="3383280" cy="4389120"/>
           </a:xfrm>
           <a:prstGeom prst="roundRect">
@@ -9817,7 +9764,7 @@
           <a:solidFill>
             <a:srgbClr val="141E34"/>
           </a:solidFill>
-          <a:ln w="31750">
+          <a:ln w="25400">
             <a:solidFill>
               <a:srgbClr val="38BDF8"/>
             </a:solidFill>
@@ -9853,7 +9800,7 @@
         </p:nvSpPr>
         <p:spPr>
           <a:xfrm>
-            <a:off x="914400" y="2194560"/>
+            <a:off x="914400" y="2103120"/>
             <a:ext cx="3017520" cy="4023360"/>
           </a:xfrm>
           <a:prstGeom prst="rect">
@@ -9869,25 +9816,25 @@
           <a:p>
             <a:pPr>
               <a:spcAft>
-                <a:spcPts val="600"/>
-              </a:spcAft>
-              <a:defRPr sz="1400" b="1">
-                <a:solidFill>
-                  <a:srgbClr val="38BDF8"/>
-                </a:solidFill>
-                <a:latin typeface="Inter"/>
-              </a:defRPr>
-            </a:pPr>
-            <a:r>
-              <a:t>1️⃣ Detyra 1</a:t>
-            </a:r>
-          </a:p>
-          <a:p>
-            <a:pPr>
-              <a:spcAft>
                 <a:spcPts val="1400"/>
               </a:spcAft>
-              <a:defRPr sz="2200" b="1">
+              <a:defRPr sz="1800" b="1">
+                <a:solidFill>
+                  <a:srgbClr val="38BDF8"/>
+                </a:solidFill>
+                <a:latin typeface="Inter"/>
+              </a:defRPr>
+            </a:pPr>
+            <a:r>
+              <a:t>Pyetja 1: Problemi i Vëzhguar</a:t>
+            </a:r>
+          </a:p>
+          <a:p>
+            <a:pPr>
+              <a:spcAft>
+                <a:spcPts val="1600"/>
+              </a:spcAft>
+              <a:defRPr sz="1600">
                 <a:solidFill>
                   <a:srgbClr val="FFFFFF"/>
                 </a:solidFill>
@@ -9895,55 +9842,20 @@
               </a:defRPr>
             </a:pPr>
             <a:r>
-              <a:t>Përzgjidhni Temën</a:t>
-            </a:r>
-          </a:p>
-          <a:p>
-            <a:pPr>
-              <a:spcAft>
-                <a:spcPts val="1000"/>
-              </a:spcAft>
-              <a:defRPr sz="1800">
-                <a:solidFill>
-                  <a:srgbClr val="E2E8F0"/>
-                </a:solidFill>
-                <a:latin typeface="Inter"/>
-              </a:defRPr>
-            </a:pPr>
-            <a:r>
-              <a:t>• Zgjidhni një problem real studentor ose biznes lokal (si AAB RideShare ose shërbim lokal).</a:t>
-            </a:r>
-          </a:p>
-          <a:p>
-            <a:pPr>
-              <a:spcAft>
-                <a:spcPts val="1000"/>
-              </a:spcAft>
-              <a:defRPr sz="1800">
-                <a:solidFill>
-                  <a:srgbClr val="E2E8F0"/>
-                </a:solidFill>
-                <a:latin typeface="Inter"/>
-              </a:defRPr>
-            </a:pPr>
-            <a:r>
-              <a:t>• Përcaktoni cili është problemi kryesor që zgjidh aplikacioni juaj.</a:t>
-            </a:r>
-          </a:p>
-          <a:p>
-            <a:pPr>
-              <a:spcAft>
-                <a:spcPts val="1000"/>
-              </a:spcAft>
-              <a:defRPr sz="1800">
-                <a:solidFill>
-                  <a:srgbClr val="E2E8F0"/>
-                </a:solidFill>
-                <a:latin typeface="Inter"/>
-              </a:defRPr>
-            </a:pPr>
-            <a:r>
-              <a:t>• Regjistroni temën tuaj në portal te Katalogu i Temave.</a:t>
+              <a:t>Në 1 fjali: Cili është një problem i përditshëm në jetën studentore apo në një biznes që mund të zgjidhet me një Mobile PWA?</a:t>
+            </a:r>
+          </a:p>
+          <a:p>
+            <a:pPr>
+              <a:defRPr sz="1200">
+                <a:solidFill>
+                  <a:srgbClr val="B4C3D7"/>
+                </a:solidFill>
+                <a:latin typeface="Inter"/>
+              </a:defRPr>
+            </a:pPr>
+            <a:r>
+              <a:t>Dorëzohet te profesori para daljes ose përmes formularit në arbenl.github.io.</a:t>
             </a:r>
           </a:p>
         </p:txBody>
@@ -9956,7 +9868,7 @@
         </p:nvSpPr>
         <p:spPr>
           <a:xfrm>
-            <a:off x="4389120" y="2011680"/>
+            <a:off x="4389120" y="1920240"/>
             <a:ext cx="3383280" cy="4389120"/>
           </a:xfrm>
           <a:prstGeom prst="roundRect">
@@ -9965,9 +9877,9 @@
           <a:solidFill>
             <a:srgbClr val="141E34"/>
           </a:solidFill>
-          <a:ln w="31750">
+          <a:ln w="25400">
             <a:solidFill>
-              <a:srgbClr val="6366F1"/>
+              <a:srgbClr val="10B981"/>
             </a:solidFill>
           </a:ln>
         </p:spPr>
@@ -10001,7 +9913,7 @@
         </p:nvSpPr>
         <p:spPr>
           <a:xfrm>
-            <a:off x="4572000" y="2194560"/>
+            <a:off x="4572000" y="2103120"/>
             <a:ext cx="3017520" cy="4023360"/>
           </a:xfrm>
           <a:prstGeom prst="rect">
@@ -10017,25 +9929,25 @@
           <a:p>
             <a:pPr>
               <a:spcAft>
-                <a:spcPts val="600"/>
-              </a:spcAft>
-              <a:defRPr sz="1400" b="1">
-                <a:solidFill>
-                  <a:srgbClr val="6366F1"/>
-                </a:solidFill>
-                <a:latin typeface="Inter"/>
-              </a:defRPr>
-            </a:pPr>
-            <a:r>
-              <a:t>2️⃣ Detyra 2</a:t>
-            </a:r>
-          </a:p>
-          <a:p>
-            <a:pPr>
-              <a:spcAft>
                 <a:spcPts val="1400"/>
               </a:spcAft>
-              <a:defRPr sz="2200" b="1">
+              <a:defRPr sz="1800" b="1">
+                <a:solidFill>
+                  <a:srgbClr val="10B981"/>
+                </a:solidFill>
+                <a:latin typeface="Inter"/>
+              </a:defRPr>
+            </a:pPr>
+            <a:r>
+              <a:t>Pyetja 2: Përdoruesi me Dhimbje</a:t>
+            </a:r>
+          </a:p>
+          <a:p>
+            <a:pPr>
+              <a:spcAft>
+                <a:spcPts val="1600"/>
+              </a:spcAft>
+              <a:defRPr sz="1600">
                 <a:solidFill>
                   <a:srgbClr val="FFFFFF"/>
                 </a:solidFill>
@@ -10043,55 +9955,20 @@
               </a:defRPr>
             </a:pPr>
             <a:r>
-              <a:t>Skica &amp; Specifikat</a:t>
-            </a:r>
-          </a:p>
-          <a:p>
-            <a:pPr>
-              <a:spcAft>
-                <a:spcPts val="1000"/>
-              </a:spcAft>
-              <a:defRPr sz="1800">
-                <a:solidFill>
-                  <a:srgbClr val="E2E8F0"/>
-                </a:solidFill>
-                <a:latin typeface="Inter"/>
-              </a:defRPr>
-            </a:pPr>
-            <a:r>
-              <a:t>• Merrni një fletë të bardhë dhe skiconi me dorë 3 ekranet kryesore të aplikacionit.</a:t>
-            </a:r>
-          </a:p>
-          <a:p>
-            <a:pPr>
-              <a:spcAft>
-                <a:spcPts val="1000"/>
-              </a:spcAft>
-              <a:defRPr sz="1800">
-                <a:solidFill>
-                  <a:srgbClr val="E2E8F0"/>
-                </a:solidFill>
-                <a:latin typeface="Inter"/>
-              </a:defRPr>
-            </a:pPr>
-            <a:r>
-              <a:t>• Shkruani 3 specifikat kryesore: Çfarë bën aplikacioni dhe çfarë mbetet jashtë tij.</a:t>
-            </a:r>
-          </a:p>
-          <a:p>
-            <a:pPr>
-              <a:spcAft>
-                <a:spcPts val="1000"/>
-              </a:spcAft>
-              <a:defRPr sz="1800">
-                <a:solidFill>
-                  <a:srgbClr val="E2E8F0"/>
-                </a:solidFill>
-                <a:latin typeface="Inter"/>
-              </a:defRPr>
-            </a:pPr>
-            <a:r>
-              <a:t>• Përcaktoni butonin kryesor që do të klikojë përdoruesi (p.sh. 'Rezervo Vendin').</a:t>
+              <a:t>Kush e vuan më shumë këtë problem sot dhe çfarë kostoje paguan në kohë, para ose stres pa aplikacionin tuaj?</a:t>
+            </a:r>
+          </a:p>
+          <a:p>
+            <a:pPr>
+              <a:defRPr sz="1200">
+                <a:solidFill>
+                  <a:srgbClr val="B4C3D7"/>
+                </a:solidFill>
+                <a:latin typeface="Inter"/>
+              </a:defRPr>
+            </a:pPr>
+            <a:r>
+              <a:t>Dorëzohet te profesori para daljes ose përmes formularit në arbenl.github.io.</a:t>
             </a:r>
           </a:p>
         </p:txBody>
@@ -10104,7 +9981,7 @@
         </p:nvSpPr>
         <p:spPr>
           <a:xfrm>
-            <a:off x="8046720" y="2011680"/>
+            <a:off x="8046720" y="1920240"/>
             <a:ext cx="3383280" cy="4389120"/>
           </a:xfrm>
           <a:prstGeom prst="roundRect">
@@ -10113,9 +9990,9 @@
           <a:solidFill>
             <a:srgbClr val="141E34"/>
           </a:solidFill>
-          <a:ln w="31750">
+          <a:ln w="25400">
             <a:solidFill>
-              <a:srgbClr val="10B981"/>
+              <a:srgbClr val="EF4444"/>
             </a:solidFill>
           </a:ln>
         </p:spPr>
@@ -10149,7 +10026,7 @@
         </p:nvSpPr>
         <p:spPr>
           <a:xfrm>
-            <a:off x="8229600" y="2194560"/>
+            <a:off x="8229600" y="2103120"/>
             <a:ext cx="3017520" cy="4023360"/>
           </a:xfrm>
           <a:prstGeom prst="rect">
@@ -10165,25 +10042,25 @@
           <a:p>
             <a:pPr>
               <a:spcAft>
-                <a:spcPts val="600"/>
-              </a:spcAft>
-              <a:defRPr sz="1400" b="1">
-                <a:solidFill>
-                  <a:srgbClr val="10B981"/>
-                </a:solidFill>
-                <a:latin typeface="Inter"/>
-              </a:defRPr>
-            </a:pPr>
-            <a:r>
-              <a:t>3️⃣ Detyra 3</a:t>
-            </a:r>
-          </a:p>
-          <a:p>
-            <a:pPr>
-              <a:spcAft>
                 <a:spcPts val="1400"/>
               </a:spcAft>
-              <a:defRPr sz="2200" b="1">
+              <a:defRPr sz="1800" b="1">
+                <a:solidFill>
+                  <a:srgbClr val="EF4444"/>
+                </a:solidFill>
+                <a:latin typeface="Inter"/>
+              </a:defRPr>
+            </a:pPr>
+            <a:r>
+              <a:t>Pyetja 3: Kufizimi i MVP-së (Out of Scope)</a:t>
+            </a:r>
+          </a:p>
+          <a:p>
+            <a:pPr>
+              <a:spcAft>
+                <a:spcPts val="1600"/>
+              </a:spcAft>
+              <a:defRPr sz="1600">
                 <a:solidFill>
                   <a:srgbClr val="FFFFFF"/>
                 </a:solidFill>
@@ -10191,55 +10068,20 @@
               </a:defRPr>
             </a:pPr>
             <a:r>
-              <a:t>Mjedisi i Zhvillimit</a:t>
-            </a:r>
-          </a:p>
-          <a:p>
-            <a:pPr>
-              <a:spcAft>
-                <a:spcPts val="1000"/>
-              </a:spcAft>
-              <a:defRPr sz="1800">
-                <a:solidFill>
-                  <a:srgbClr val="E2E8F0"/>
-                </a:solidFill>
-                <a:latin typeface="Inter"/>
-              </a:defRPr>
-            </a:pPr>
-            <a:r>
-              <a:t>• Aktivizoni GitHub Copilot Pro me emailin @universitetiaab.com.</a:t>
-            </a:r>
-          </a:p>
-          <a:p>
-            <a:pPr>
-              <a:spcAft>
-                <a:spcPts val="1000"/>
-              </a:spcAft>
-              <a:defRPr sz="1800">
-                <a:solidFill>
-                  <a:srgbClr val="E2E8F0"/>
-                </a:solidFill>
-                <a:latin typeface="Inter"/>
-              </a:defRPr>
-            </a:pPr>
-            <a:r>
-              <a:t>• Klononi depon fillestare të Javës 1 nga GitHub Classroom.</a:t>
-            </a:r>
-          </a:p>
-          <a:p>
-            <a:pPr>
-              <a:spcAft>
-                <a:spcPts val="1000"/>
-              </a:spcAft>
-              <a:defRPr sz="1800">
-                <a:solidFill>
-                  <a:srgbClr val="E2E8F0"/>
-                </a:solidFill>
-                <a:latin typeface="Inter"/>
-              </a:defRPr>
-            </a:pPr>
-            <a:r>
-              <a:t>• Bëni push-in e parë me 'git push' për të testuar pikët e para të autograding!</a:t>
+              <a:t>Përmendni NJË veçori që keni dëshirë ta ketë aplikacioni, por që ZOTOHENI ta përjashtoni nga MVP-ja për të mos dështuar me kohën!</a:t>
+            </a:r>
+          </a:p>
+          <a:p>
+            <a:pPr>
+              <a:defRPr sz="1200">
+                <a:solidFill>
+                  <a:srgbClr val="B4C3D7"/>
+                </a:solidFill>
+                <a:latin typeface="Inter"/>
+              </a:defRPr>
+            </a:pPr>
+            <a:r>
+              <a:t>Dorëzohet te profesori para daljes ose përmes formularit në arbenl.github.io.</a:t>
             </a:r>
           </a:p>
         </p:txBody>
@@ -10328,7 +10170,7 @@
           <a:lstStyle/>
           <a:p>
             <a:pPr>
-              <a:defRPr sz="1500" b="1">
+              <a:defRPr sz="1400" b="1">
                 <a:solidFill>
                   <a:srgbClr val="38BDF8"/>
                 </a:solidFill>
@@ -10336,7 +10178,7 @@
               </a:defRPr>
             </a:pPr>
             <a:r>
-              <a:t>HAPI 1: IDEJA &amp; SHKËNDIJA</a:t>
+              <a:t>RASTI KRYESOR I KURSIT</a:t>
             </a:r>
           </a:p>
         </p:txBody>
@@ -10349,7 +10191,7 @@
         </p:nvSpPr>
         <p:spPr>
           <a:xfrm>
-            <a:off x="731520" y="685800"/>
+            <a:off x="731520" y="658368"/>
             <a:ext cx="10698480" cy="777240"/>
           </a:xfrm>
           <a:prstGeom prst="rect">
@@ -10364,7 +10206,7 @@
           <a:lstStyle/>
           <a:p>
             <a:pPr>
-              <a:defRPr sz="3600" b="1">
+              <a:defRPr sz="3400" b="1">
                 <a:solidFill>
                   <a:srgbClr val="FFFFFF"/>
                 </a:solidFill>
@@ -10372,7 +10214,7 @@
               </a:defRPr>
             </a:pPr>
             <a:r>
-              <a:t>Si Lind një Ide? Nga Dhimbja e Përditshme te Shkëndija!</a:t>
+              <a:t>AAB RideShare: Nga Problemi Real te Zgjidhja PWA</a:t>
             </a:r>
           </a:p>
         </p:txBody>
@@ -10385,7 +10227,7 @@
         </p:nvSpPr>
         <p:spPr>
           <a:xfrm>
-            <a:off x="731520" y="1444752"/>
+            <a:off x="731520" y="1417320"/>
             <a:ext cx="10698480" cy="502920"/>
           </a:xfrm>
           <a:prstGeom prst="rect">
@@ -10400,7 +10242,7 @@
           <a:lstStyle/>
           <a:p>
             <a:pPr>
-              <a:defRPr sz="2100">
+              <a:defRPr sz="1900">
                 <a:solidFill>
                   <a:srgbClr val="E2E8F0"/>
                 </a:solidFill>
@@ -10408,7 +10250,7 @@
               </a:defRPr>
             </a:pPr>
             <a:r>
-              <a:t>Çdo aplikacion i suksesshëm nis me vëzhgimin e një problemi të vërtetë njerëzor.</a:t>
+              <a:t>Udhëtimi i përbashkët studentor: 1 shofer që paguan 10€ naftë dhe 3 kolegë që presin autobusin në shi.</a:t>
             </a:r>
           </a:p>
         </p:txBody>
@@ -10460,7 +10302,7 @@
       </p:sp>
       <p:pic>
         <p:nvPicPr>
-          <p:cNvPr id="7" name="Picture 6" descr="slide3_sketch_car_visual_master.png"/>
+          <p:cNvPr id="7" name="Picture 6" descr="aab_rideshare_sketch_dream.png"/>
           <p:cNvPicPr>
             <a:picLocks noChangeAspect="1"/>
           </p:cNvPicPr>
@@ -10566,7 +10408,7 @@
           <a:lstStyle/>
           <a:p>
             <a:pPr>
-              <a:defRPr sz="1500" b="1">
+              <a:defRPr sz="1400" b="1">
                 <a:solidFill>
                   <a:srgbClr val="38BDF8"/>
                 </a:solidFill>
@@ -10574,7 +10416,7 @@
               </a:defRPr>
             </a:pPr>
             <a:r>
-              <a:t>HAPI 2: SPECIFIKAT &amp; KËRKESAT</a:t>
+              <a:t>METODOLOGJIA INXHINIERIKE</a:t>
             </a:r>
           </a:p>
         </p:txBody>
@@ -10587,7 +10429,7 @@
         </p:nvSpPr>
         <p:spPr>
           <a:xfrm>
-            <a:off x="731520" y="685800"/>
+            <a:off x="731520" y="658368"/>
             <a:ext cx="10698480" cy="777240"/>
           </a:xfrm>
           <a:prstGeom prst="rect">
@@ -10602,7 +10444,7 @@
           <a:lstStyle/>
           <a:p>
             <a:pPr>
-              <a:defRPr sz="3600" b="1">
+              <a:defRPr sz="3400" b="1">
                 <a:solidFill>
                   <a:srgbClr val="FFFFFF"/>
                 </a:solidFill>
@@ -10610,7 +10452,7 @@
               </a:defRPr>
             </a:pPr>
             <a:r>
-              <a:t>Specifikat e Projektit: Çfarë Bën dhe Çfarë NUK Bën?</a:t>
+              <a:t>Harta: Nga Vëzhgimi te Produkti i Testueshëm</a:t>
             </a:r>
           </a:p>
         </p:txBody>
@@ -10623,7 +10465,7 @@
         </p:nvSpPr>
         <p:spPr>
           <a:xfrm>
-            <a:off x="731520" y="1444752"/>
+            <a:off x="731520" y="1417320"/>
             <a:ext cx="10698480" cy="502920"/>
           </a:xfrm>
           <a:prstGeom prst="rect">
@@ -10638,7 +10480,7 @@
           <a:lstStyle/>
           <a:p>
             <a:pPr>
-              <a:defRPr sz="2100">
+              <a:defRPr sz="1900">
                 <a:solidFill>
                   <a:srgbClr val="E2E8F0"/>
                 </a:solidFill>
@@ -10646,7 +10488,7 @@
               </a:defRPr>
             </a:pPr>
             <a:r>
-              <a:t>Përcaktimi i saktë i kërkesave (Scope) parandalon dështimin e projektit.</a:t>
+              <a:t>Çdo sukses softuerik ndjek këtë cikël rigoroz para se të prekë tastierën.</a:t>
             </a:r>
           </a:p>
         </p:txBody>
@@ -10659,16 +10501,16 @@
         </p:nvSpPr>
         <p:spPr>
           <a:xfrm>
-            <a:off x="731520" y="1874519"/>
-            <a:ext cx="10728655" cy="4663440"/>
+            <a:off x="731520" y="1920240"/>
+            <a:ext cx="2029968" cy="4389120"/>
           </a:xfrm>
           <a:prstGeom prst="roundRect">
             <a:avLst/>
           </a:prstGeom>
           <a:solidFill>
-            <a:srgbClr val="FFFFFF"/>
+            <a:srgbClr val="141E34"/>
           </a:solidFill>
-          <a:ln w="31750">
+          <a:ln w="25400">
             <a:solidFill>
               <a:srgbClr val="38BDF8"/>
             </a:solidFill>
@@ -10696,30 +10538,526 @@
           </a:p>
         </p:txBody>
       </p:sp>
-      <p:pic>
-        <p:nvPicPr>
-          <p:cNvPr id="7" name="Picture 6" descr="slide4_sketch_wireframe_scope_master.png"/>
-          <p:cNvPicPr>
-            <a:picLocks noChangeAspect="1"/>
-          </p:cNvPicPr>
-          <p:nvPr/>
-        </p:nvPicPr>
-        <p:blipFill>
-          <a:blip r:embed="rId2"/>
-          <a:stretch>
-            <a:fillRect/>
-          </a:stretch>
-        </p:blipFill>
-        <p:spPr>
-          <a:xfrm>
-            <a:off x="777240" y="1920240"/>
-            <a:ext cx="10637215" cy="4572000"/>
-          </a:xfrm>
-          <a:prstGeom prst="rect">
-            <a:avLst/>
-          </a:prstGeom>
-        </p:spPr>
-      </p:pic>
+      <p:sp>
+        <p:nvSpPr>
+          <p:cNvPr id="7" name="TextBox 6"/>
+          <p:cNvSpPr txBox="1"/>
+          <p:nvPr/>
+        </p:nvSpPr>
+        <p:spPr>
+          <a:xfrm>
+            <a:off x="868680" y="2103120"/>
+            <a:ext cx="1755648" cy="4023360"/>
+          </a:xfrm>
+          <a:prstGeom prst="rect">
+            <a:avLst/>
+          </a:prstGeom>
+          <a:noFill/>
+        </p:spPr>
+        <p:txBody>
+          <a:bodyPr wrap="square">
+            <a:spAutoFit/>
+          </a:bodyPr>
+          <a:lstStyle/>
+          <a:p>
+            <a:pPr>
+              <a:spcAft>
+                <a:spcPts val="1000"/>
+              </a:spcAft>
+              <a:defRPr sz="1400" b="1">
+                <a:solidFill>
+                  <a:srgbClr val="38BDF8"/>
+                </a:solidFill>
+                <a:latin typeface="Inter"/>
+              </a:defRPr>
+            </a:pPr>
+            <a:r>
+              <a:t>HAPI 1</a:t>
+            </a:r>
+          </a:p>
+          <a:p>
+            <a:pPr>
+              <a:spcAft>
+                <a:spcPts val="1400"/>
+              </a:spcAft>
+              <a:defRPr sz="1800" b="1">
+                <a:solidFill>
+                  <a:srgbClr val="FFFFFF"/>
+                </a:solidFill>
+                <a:latin typeface="Inter"/>
+              </a:defRPr>
+            </a:pPr>
+            <a:r>
+              <a:t>1. Problem i Vëzhguar</a:t>
+            </a:r>
+          </a:p>
+          <a:p>
+            <a:pPr>
+              <a:defRPr sz="1400">
+                <a:solidFill>
+                  <a:srgbClr val="E2E8F0"/>
+                </a:solidFill>
+                <a:latin typeface="Inter"/>
+              </a:defRPr>
+            </a:pPr>
+            <a:r>
+              <a:t>Dhimbje reale e provuar me fakte nga bisedat me 3 përdorues realë.</a:t>
+            </a:r>
+          </a:p>
+        </p:txBody>
+      </p:sp>
+      <p:sp>
+        <p:nvSpPr>
+          <p:cNvPr id="8" name="Rounded Rectangle 7"/>
+          <p:cNvSpPr/>
+          <p:nvPr/>
+        </p:nvSpPr>
+        <p:spPr>
+          <a:xfrm>
+            <a:off x="2898648" y="1920240"/>
+            <a:ext cx="2029968" cy="4389120"/>
+          </a:xfrm>
+          <a:prstGeom prst="roundRect">
+            <a:avLst/>
+          </a:prstGeom>
+          <a:solidFill>
+            <a:srgbClr val="141E34"/>
+          </a:solidFill>
+          <a:ln w="25400">
+            <a:solidFill>
+              <a:srgbClr val="6366F1"/>
+            </a:solidFill>
+          </a:ln>
+        </p:spPr>
+        <p:style>
+          <a:lnRef idx="1">
+            <a:schemeClr val="accent1"/>
+          </a:lnRef>
+          <a:fillRef idx="3">
+            <a:schemeClr val="accent1"/>
+          </a:fillRef>
+          <a:effectRef idx="2">
+            <a:schemeClr val="accent1"/>
+          </a:effectRef>
+          <a:fontRef idx="minor">
+            <a:schemeClr val="lt1"/>
+          </a:fontRef>
+        </p:style>
+        <p:txBody>
+          <a:bodyPr rtlCol="0" anchor="ctr"/>
+          <a:lstStyle/>
+          <a:p>
+            <a:pPr algn="ctr"/>
+          </a:p>
+        </p:txBody>
+      </p:sp>
+      <p:sp>
+        <p:nvSpPr>
+          <p:cNvPr id="9" name="TextBox 8"/>
+          <p:cNvSpPr txBox="1"/>
+          <p:nvPr/>
+        </p:nvSpPr>
+        <p:spPr>
+          <a:xfrm>
+            <a:off x="3035808" y="2103120"/>
+            <a:ext cx="1755648" cy="4023360"/>
+          </a:xfrm>
+          <a:prstGeom prst="rect">
+            <a:avLst/>
+          </a:prstGeom>
+          <a:noFill/>
+        </p:spPr>
+        <p:txBody>
+          <a:bodyPr wrap="square">
+            <a:spAutoFit/>
+          </a:bodyPr>
+          <a:lstStyle/>
+          <a:p>
+            <a:pPr>
+              <a:spcAft>
+                <a:spcPts val="1000"/>
+              </a:spcAft>
+              <a:defRPr sz="1400" b="1">
+                <a:solidFill>
+                  <a:srgbClr val="6366F1"/>
+                </a:solidFill>
+                <a:latin typeface="Inter"/>
+              </a:defRPr>
+            </a:pPr>
+            <a:r>
+              <a:t>HAPI 2</a:t>
+            </a:r>
+          </a:p>
+          <a:p>
+            <a:pPr>
+              <a:spcAft>
+                <a:spcPts val="1400"/>
+              </a:spcAft>
+              <a:defRPr sz="1800" b="1">
+                <a:solidFill>
+                  <a:srgbClr val="FFFFFF"/>
+                </a:solidFill>
+                <a:latin typeface="Inter"/>
+              </a:defRPr>
+            </a:pPr>
+            <a:r>
+              <a:t>2. Hipotezë e Vlerës</a:t>
+            </a:r>
+          </a:p>
+          <a:p>
+            <a:pPr>
+              <a:defRPr sz="1400">
+                <a:solidFill>
+                  <a:srgbClr val="E2E8F0"/>
+                </a:solidFill>
+                <a:latin typeface="Inter"/>
+              </a:defRPr>
+            </a:pPr>
+            <a:r>
+              <a:t>Nëse ofrojmë X me 1-klik, përdoruesi kursen kohë ose para Y.</a:t>
+            </a:r>
+          </a:p>
+        </p:txBody>
+      </p:sp>
+      <p:sp>
+        <p:nvSpPr>
+          <p:cNvPr id="10" name="Rounded Rectangle 9"/>
+          <p:cNvSpPr/>
+          <p:nvPr/>
+        </p:nvSpPr>
+        <p:spPr>
+          <a:xfrm>
+            <a:off x="5065776" y="1920240"/>
+            <a:ext cx="2029968" cy="4389120"/>
+          </a:xfrm>
+          <a:prstGeom prst="roundRect">
+            <a:avLst/>
+          </a:prstGeom>
+          <a:solidFill>
+            <a:srgbClr val="141E34"/>
+          </a:solidFill>
+          <a:ln w="25400">
+            <a:solidFill>
+              <a:srgbClr val="F59E0B"/>
+            </a:solidFill>
+          </a:ln>
+        </p:spPr>
+        <p:style>
+          <a:lnRef idx="1">
+            <a:schemeClr val="accent1"/>
+          </a:lnRef>
+          <a:fillRef idx="3">
+            <a:schemeClr val="accent1"/>
+          </a:fillRef>
+          <a:effectRef idx="2">
+            <a:schemeClr val="accent1"/>
+          </a:effectRef>
+          <a:fontRef idx="minor">
+            <a:schemeClr val="lt1"/>
+          </a:fontRef>
+        </p:style>
+        <p:txBody>
+          <a:bodyPr rtlCol="0" anchor="ctr"/>
+          <a:lstStyle/>
+          <a:p>
+            <a:pPr algn="ctr"/>
+          </a:p>
+        </p:txBody>
+      </p:sp>
+      <p:sp>
+        <p:nvSpPr>
+          <p:cNvPr id="11" name="TextBox 10"/>
+          <p:cNvSpPr txBox="1"/>
+          <p:nvPr/>
+        </p:nvSpPr>
+        <p:spPr>
+          <a:xfrm>
+            <a:off x="5202936" y="2103120"/>
+            <a:ext cx="1755648" cy="4023360"/>
+          </a:xfrm>
+          <a:prstGeom prst="rect">
+            <a:avLst/>
+          </a:prstGeom>
+          <a:noFill/>
+        </p:spPr>
+        <p:txBody>
+          <a:bodyPr wrap="square">
+            <a:spAutoFit/>
+          </a:bodyPr>
+          <a:lstStyle/>
+          <a:p>
+            <a:pPr>
+              <a:spcAft>
+                <a:spcPts val="1000"/>
+              </a:spcAft>
+              <a:defRPr sz="1400" b="1">
+                <a:solidFill>
+                  <a:srgbClr val="F59E0B"/>
+                </a:solidFill>
+                <a:latin typeface="Inter"/>
+              </a:defRPr>
+            </a:pPr>
+            <a:r>
+              <a:t>HAPI 3</a:t>
+            </a:r>
+          </a:p>
+          <a:p>
+            <a:pPr>
+              <a:spcAft>
+                <a:spcPts val="1400"/>
+              </a:spcAft>
+              <a:defRPr sz="1800" b="1">
+                <a:solidFill>
+                  <a:srgbClr val="FFFFFF"/>
+                </a:solidFill>
+                <a:latin typeface="Inter"/>
+              </a:defRPr>
+            </a:pPr>
+            <a:r>
+              <a:t>3. PRD &amp; Wireframe</a:t>
+            </a:r>
+          </a:p>
+          <a:p>
+            <a:pPr>
+              <a:defRPr sz="1400">
+                <a:solidFill>
+                  <a:srgbClr val="E2E8F0"/>
+                </a:solidFill>
+                <a:latin typeface="Inter"/>
+              </a:defRPr>
+            </a:pPr>
+            <a:r>
+              <a:t>Kontratë e fushëveprimit (Scope Contract) me jo më shumë se 3 aftësi.</a:t>
+            </a:r>
+          </a:p>
+        </p:txBody>
+      </p:sp>
+      <p:sp>
+        <p:nvSpPr>
+          <p:cNvPr id="12" name="Rounded Rectangle 11"/>
+          <p:cNvSpPr/>
+          <p:nvPr/>
+        </p:nvSpPr>
+        <p:spPr>
+          <a:xfrm>
+            <a:off x="7232904" y="1920240"/>
+            <a:ext cx="2029968" cy="4389120"/>
+          </a:xfrm>
+          <a:prstGeom prst="roundRect">
+            <a:avLst/>
+          </a:prstGeom>
+          <a:solidFill>
+            <a:srgbClr val="141E34"/>
+          </a:solidFill>
+          <a:ln w="25400">
+            <a:solidFill>
+              <a:srgbClr val="10B981"/>
+            </a:solidFill>
+          </a:ln>
+        </p:spPr>
+        <p:style>
+          <a:lnRef idx="1">
+            <a:schemeClr val="accent1"/>
+          </a:lnRef>
+          <a:fillRef idx="3">
+            <a:schemeClr val="accent1"/>
+          </a:fillRef>
+          <a:effectRef idx="2">
+            <a:schemeClr val="accent1"/>
+          </a:effectRef>
+          <a:fontRef idx="minor">
+            <a:schemeClr val="lt1"/>
+          </a:fontRef>
+        </p:style>
+        <p:txBody>
+          <a:bodyPr rtlCol="0" anchor="ctr"/>
+          <a:lstStyle/>
+          <a:p>
+            <a:pPr algn="ctr"/>
+          </a:p>
+        </p:txBody>
+      </p:sp>
+      <p:sp>
+        <p:nvSpPr>
+          <p:cNvPr id="13" name="TextBox 12"/>
+          <p:cNvSpPr txBox="1"/>
+          <p:nvPr/>
+        </p:nvSpPr>
+        <p:spPr>
+          <a:xfrm>
+            <a:off x="7370064" y="2103120"/>
+            <a:ext cx="1755648" cy="4023360"/>
+          </a:xfrm>
+          <a:prstGeom prst="rect">
+            <a:avLst/>
+          </a:prstGeom>
+          <a:noFill/>
+        </p:spPr>
+        <p:txBody>
+          <a:bodyPr wrap="square">
+            <a:spAutoFit/>
+          </a:bodyPr>
+          <a:lstStyle/>
+          <a:p>
+            <a:pPr>
+              <a:spcAft>
+                <a:spcPts val="1000"/>
+              </a:spcAft>
+              <a:defRPr sz="1400" b="1">
+                <a:solidFill>
+                  <a:srgbClr val="10B981"/>
+                </a:solidFill>
+                <a:latin typeface="Inter"/>
+              </a:defRPr>
+            </a:pPr>
+            <a:r>
+              <a:t>HAPI 4</a:t>
+            </a:r>
+          </a:p>
+          <a:p>
+            <a:pPr>
+              <a:spcAft>
+                <a:spcPts val="1400"/>
+              </a:spcAft>
+              <a:defRPr sz="1800" b="1">
+                <a:solidFill>
+                  <a:srgbClr val="FFFFFF"/>
+                </a:solidFill>
+                <a:latin typeface="Inter"/>
+              </a:defRPr>
+            </a:pPr>
+            <a:r>
+              <a:t>4. Ndërtim me PWA</a:t>
+            </a:r>
+          </a:p>
+          <a:p>
+            <a:pPr>
+              <a:defRPr sz="1400">
+                <a:solidFill>
+                  <a:srgbClr val="E2E8F0"/>
+                </a:solidFill>
+                <a:latin typeface="Inter"/>
+              </a:defRPr>
+            </a:pPr>
+            <a:r>
+              <a:t>Next.js 15, Tailwind, Supabase RLS dhe auto-deploy në Vercel.</a:t>
+            </a:r>
+          </a:p>
+        </p:txBody>
+      </p:sp>
+      <p:sp>
+        <p:nvSpPr>
+          <p:cNvPr id="14" name="Rounded Rectangle 13"/>
+          <p:cNvSpPr/>
+          <p:nvPr/>
+        </p:nvSpPr>
+        <p:spPr>
+          <a:xfrm>
+            <a:off x="9400032" y="1920240"/>
+            <a:ext cx="2029968" cy="4389120"/>
+          </a:xfrm>
+          <a:prstGeom prst="roundRect">
+            <a:avLst/>
+          </a:prstGeom>
+          <a:solidFill>
+            <a:srgbClr val="141E34"/>
+          </a:solidFill>
+          <a:ln w="25400">
+            <a:solidFill>
+              <a:srgbClr val="EF4444"/>
+            </a:solidFill>
+          </a:ln>
+        </p:spPr>
+        <p:style>
+          <a:lnRef idx="1">
+            <a:schemeClr val="accent1"/>
+          </a:lnRef>
+          <a:fillRef idx="3">
+            <a:schemeClr val="accent1"/>
+          </a:fillRef>
+          <a:effectRef idx="2">
+            <a:schemeClr val="accent1"/>
+          </a:effectRef>
+          <a:fontRef idx="minor">
+            <a:schemeClr val="lt1"/>
+          </a:fontRef>
+        </p:style>
+        <p:txBody>
+          <a:bodyPr rtlCol="0" anchor="ctr"/>
+          <a:lstStyle/>
+          <a:p>
+            <a:pPr algn="ctr"/>
+          </a:p>
+        </p:txBody>
+      </p:sp>
+      <p:sp>
+        <p:nvSpPr>
+          <p:cNvPr id="15" name="TextBox 14"/>
+          <p:cNvSpPr txBox="1"/>
+          <p:nvPr/>
+        </p:nvSpPr>
+        <p:spPr>
+          <a:xfrm>
+            <a:off x="9537192" y="2103120"/>
+            <a:ext cx="1755648" cy="4023360"/>
+          </a:xfrm>
+          <a:prstGeom prst="rect">
+            <a:avLst/>
+          </a:prstGeom>
+          <a:noFill/>
+        </p:spPr>
+        <p:txBody>
+          <a:bodyPr wrap="square">
+            <a:spAutoFit/>
+          </a:bodyPr>
+          <a:lstStyle/>
+          <a:p>
+            <a:pPr>
+              <a:spcAft>
+                <a:spcPts val="1000"/>
+              </a:spcAft>
+              <a:defRPr sz="1400" b="1">
+                <a:solidFill>
+                  <a:srgbClr val="EF4444"/>
+                </a:solidFill>
+                <a:latin typeface="Inter"/>
+              </a:defRPr>
+            </a:pPr>
+            <a:r>
+              <a:t>HAPI 5</a:t>
+            </a:r>
+          </a:p>
+          <a:p>
+            <a:pPr>
+              <a:spcAft>
+                <a:spcPts val="1400"/>
+              </a:spcAft>
+              <a:defRPr sz="1800" b="1">
+                <a:solidFill>
+                  <a:srgbClr val="FFFFFF"/>
+                </a:solidFill>
+                <a:latin typeface="Inter"/>
+              </a:defRPr>
+            </a:pPr>
+            <a:r>
+              <a:t>5. Testim &amp; Reflektim</a:t>
+            </a:r>
+          </a:p>
+          <a:p>
+            <a:pPr>
+              <a:defRPr sz="1400">
+                <a:solidFill>
+                  <a:srgbClr val="E2E8F0"/>
+                </a:solidFill>
+                <a:latin typeface="Inter"/>
+              </a:defRPr>
+            </a:pPr>
+            <a:r>
+              <a:t>Verifikim në telefon, demonstrim individual dhe shpjegim i kodit.</a:t>
+            </a:r>
+          </a:p>
+        </p:txBody>
+      </p:sp>
     </p:spTree>
   </p:cSld>
   <p:clrMapOvr>
@@ -10804,7 +11142,7 @@
           <a:lstStyle/>
           <a:p>
             <a:pPr>
-              <a:defRPr sz="1500" b="1">
+              <a:defRPr sz="1400" b="1">
                 <a:solidFill>
                   <a:srgbClr val="38BDF8"/>
                 </a:solidFill>
@@ -10812,7 +11150,7 @@
               </a:defRPr>
             </a:pPr>
             <a:r>
-              <a:t>HAPI 3: ARKITEKTURA NË VIJA TË TRASHA</a:t>
+              <a:t>HAPI 1: EVIDENCA REALE</a:t>
             </a:r>
           </a:p>
         </p:txBody>
@@ -10825,7 +11163,7 @@
         </p:nvSpPr>
         <p:spPr>
           <a:xfrm>
-            <a:off x="731520" y="685800"/>
+            <a:off x="731520" y="658368"/>
             <a:ext cx="10698480" cy="777240"/>
           </a:xfrm>
           <a:prstGeom prst="rect">
@@ -10840,7 +11178,7 @@
           <a:lstStyle/>
           <a:p>
             <a:pPr>
-              <a:defRPr sz="3600" b="1">
+              <a:defRPr sz="3400" b="1">
                 <a:solidFill>
                   <a:srgbClr val="FFFFFF"/>
                 </a:solidFill>
@@ -10848,7 +11186,7 @@
               </a:defRPr>
             </a:pPr>
             <a:r>
-              <a:t>Arkitektura Konceptuale: Skica me Kuti e Shigjeta</a:t>
+              <a:t>Mos Filloni nga Zgjidhja — Filloni nga 3 Bisedat!</a:t>
             </a:r>
           </a:p>
         </p:txBody>
@@ -10861,7 +11199,7 @@
         </p:nvSpPr>
         <p:spPr>
           <a:xfrm>
-            <a:off x="731520" y="1444752"/>
+            <a:off x="731520" y="1417320"/>
             <a:ext cx="10698480" cy="502920"/>
           </a:xfrm>
           <a:prstGeom prst="rect">
@@ -10876,7 +11214,7 @@
           <a:lstStyle/>
           <a:p>
             <a:pPr>
-              <a:defRPr sz="2100">
+              <a:defRPr sz="1900">
                 <a:solidFill>
                   <a:srgbClr val="E2E8F0"/>
                 </a:solidFill>
@@ -10884,7 +11222,7 @@
               </a:defRPr>
             </a:pPr>
             <a:r>
-              <a:t>Si komunikojnë pjesët e sistemit para se të shkruhet rreshti i parë i kodit.</a:t>
+              <a:t>Nëse nuk gjeni 3 studentë që e vuajnë problemin sot, mos shkruani asnjë rresht kod.</a:t>
             </a:r>
           </a:p>
         </p:txBody>
@@ -10897,16 +11235,16 @@
         </p:nvSpPr>
         <p:spPr>
           <a:xfrm>
-            <a:off x="731520" y="1874519"/>
-            <a:ext cx="10728655" cy="4663440"/>
+            <a:off x="731520" y="1920240"/>
+            <a:ext cx="3383280" cy="4389120"/>
           </a:xfrm>
           <a:prstGeom prst="roundRect">
             <a:avLst/>
           </a:prstGeom>
           <a:solidFill>
-            <a:srgbClr val="FFFFFF"/>
+            <a:srgbClr val="141E34"/>
           </a:solidFill>
-          <a:ln w="31750">
+          <a:ln w="25400">
             <a:solidFill>
               <a:srgbClr val="38BDF8"/>
             </a:solidFill>
@@ -10934,30 +11272,339 @@
           </a:p>
         </p:txBody>
       </p:sp>
-      <p:pic>
-        <p:nvPicPr>
-          <p:cNvPr id="7" name="Picture 6" descr="slide5_sketch_architecture_master.png"/>
-          <p:cNvPicPr>
-            <a:picLocks noChangeAspect="1"/>
-          </p:cNvPicPr>
-          <p:nvPr/>
-        </p:nvPicPr>
-        <p:blipFill>
-          <a:blip r:embed="rId2"/>
-          <a:stretch>
-            <a:fillRect/>
-          </a:stretch>
-        </p:blipFill>
-        <p:spPr>
-          <a:xfrm>
-            <a:off x="777240" y="1920240"/>
-            <a:ext cx="10637215" cy="4572000"/>
-          </a:xfrm>
-          <a:prstGeom prst="rect">
-            <a:avLst/>
-          </a:prstGeom>
-        </p:spPr>
-      </p:pic>
+      <p:sp>
+        <p:nvSpPr>
+          <p:cNvPr id="7" name="TextBox 6"/>
+          <p:cNvSpPr txBox="1"/>
+          <p:nvPr/>
+        </p:nvSpPr>
+        <p:spPr>
+          <a:xfrm>
+            <a:off x="914400" y="2103120"/>
+            <a:ext cx="3017520" cy="4023360"/>
+          </a:xfrm>
+          <a:prstGeom prst="rect">
+            <a:avLst/>
+          </a:prstGeom>
+          <a:noFill/>
+        </p:spPr>
+        <p:txBody>
+          <a:bodyPr wrap="square">
+            <a:spAutoFit/>
+          </a:bodyPr>
+          <a:lstStyle/>
+          <a:p>
+            <a:pPr>
+              <a:defRPr sz="1800" b="1">
+                <a:solidFill>
+                  <a:srgbClr val="38BDF8"/>
+                </a:solidFill>
+                <a:latin typeface="Inter"/>
+              </a:defRPr>
+            </a:pPr>
+            <a:r>
+              <a:t>Biseda 1: Shoferi (Viti 3)</a:t>
+            </a:r>
+          </a:p>
+          <a:p>
+            <a:pPr>
+              <a:spcAft>
+                <a:spcPts val="1600"/>
+              </a:spcAft>
+              <a:defRPr sz="1300">
+                <a:solidFill>
+                  <a:srgbClr val="B4C3D7"/>
+                </a:solidFill>
+                <a:latin typeface="Inter"/>
+              </a:defRPr>
+            </a:pPr>
+            <a:r>
+              <a:t>Ferizaj ➔ Kampusi AAB</a:t>
+            </a:r>
+          </a:p>
+          <a:p>
+            <a:pPr>
+              <a:spcAft>
+                <a:spcPts val="1600"/>
+              </a:spcAft>
+              <a:defRPr sz="1600" i="1">
+                <a:solidFill>
+                  <a:srgbClr val="FFFFFF"/>
+                </a:solidFill>
+                <a:latin typeface="Inter"/>
+              </a:defRPr>
+            </a:pPr>
+            <a:r>
+              <a:t>"Shpenzoj 180€ naftë në muaj. Do të merrja me dëshirë kolegë në veturë nëse do të dija kush po vjen në të njëjtën orë në mëngjes."</a:t>
+            </a:r>
+          </a:p>
+          <a:p>
+            <a:pPr>
+              <a:defRPr sz="1300">
+                <a:solidFill>
+                  <a:srgbClr val="E2E8F0"/>
+                </a:solidFill>
+                <a:latin typeface="Inter"/>
+              </a:defRPr>
+            </a:pPr>
+            <a:r>
+              <a:t>Mësimi: Dhimbja ekziston në kohë dhe para. Zgjidhja kërkohet nga të dyja palët.</a:t>
+            </a:r>
+          </a:p>
+        </p:txBody>
+      </p:sp>
+      <p:sp>
+        <p:nvSpPr>
+          <p:cNvPr id="8" name="Rounded Rectangle 7"/>
+          <p:cNvSpPr/>
+          <p:nvPr/>
+        </p:nvSpPr>
+        <p:spPr>
+          <a:xfrm>
+            <a:off x="4389120" y="1920240"/>
+            <a:ext cx="3383280" cy="4389120"/>
+          </a:xfrm>
+          <a:prstGeom prst="roundRect">
+            <a:avLst/>
+          </a:prstGeom>
+          <a:solidFill>
+            <a:srgbClr val="141E34"/>
+          </a:solidFill>
+          <a:ln w="25400">
+            <a:solidFill>
+              <a:srgbClr val="10B981"/>
+            </a:solidFill>
+          </a:ln>
+        </p:spPr>
+        <p:style>
+          <a:lnRef idx="1">
+            <a:schemeClr val="accent1"/>
+          </a:lnRef>
+          <a:fillRef idx="3">
+            <a:schemeClr val="accent1"/>
+          </a:fillRef>
+          <a:effectRef idx="2">
+            <a:schemeClr val="accent1"/>
+          </a:effectRef>
+          <a:fontRef idx="minor">
+            <a:schemeClr val="lt1"/>
+          </a:fontRef>
+        </p:style>
+        <p:txBody>
+          <a:bodyPr rtlCol="0" anchor="ctr"/>
+          <a:lstStyle/>
+          <a:p>
+            <a:pPr algn="ctr"/>
+          </a:p>
+        </p:txBody>
+      </p:sp>
+      <p:sp>
+        <p:nvSpPr>
+          <p:cNvPr id="9" name="TextBox 8"/>
+          <p:cNvSpPr txBox="1"/>
+          <p:nvPr/>
+        </p:nvSpPr>
+        <p:spPr>
+          <a:xfrm>
+            <a:off x="4572000" y="2103120"/>
+            <a:ext cx="3017520" cy="4023360"/>
+          </a:xfrm>
+          <a:prstGeom prst="rect">
+            <a:avLst/>
+          </a:prstGeom>
+          <a:noFill/>
+        </p:spPr>
+        <p:txBody>
+          <a:bodyPr wrap="square">
+            <a:spAutoFit/>
+          </a:bodyPr>
+          <a:lstStyle/>
+          <a:p>
+            <a:pPr>
+              <a:defRPr sz="1800" b="1">
+                <a:solidFill>
+                  <a:srgbClr val="10B981"/>
+                </a:solidFill>
+                <a:latin typeface="Inter"/>
+              </a:defRPr>
+            </a:pPr>
+            <a:r>
+              <a:t>Biseda 2: Udhëtarja (Viti 2)</a:t>
+            </a:r>
+          </a:p>
+          <a:p>
+            <a:pPr>
+              <a:spcAft>
+                <a:spcPts val="1600"/>
+              </a:spcAft>
+              <a:defRPr sz="1300">
+                <a:solidFill>
+                  <a:srgbClr val="B4C3D7"/>
+                </a:solidFill>
+                <a:latin typeface="Inter"/>
+              </a:defRPr>
+            </a:pPr>
+            <a:r>
+              <a:t>Gjilan ➔ Kampusi AAB</a:t>
+            </a:r>
+          </a:p>
+          <a:p>
+            <a:pPr>
+              <a:spcAft>
+                <a:spcPts val="1600"/>
+              </a:spcAft>
+              <a:defRPr sz="1600" i="1">
+                <a:solidFill>
+                  <a:srgbClr val="FFFFFF"/>
+                </a:solidFill>
+                <a:latin typeface="Inter"/>
+              </a:defRPr>
+            </a:pPr>
+            <a:r>
+              <a:t>"Humba testin sepse autobusi u vonua 45 minuta në shi. Preferoj t'i jap 1.5€ një kolegu sesa të ngrij në rrugë!"</a:t>
+            </a:r>
+          </a:p>
+          <a:p>
+            <a:pPr>
+              <a:defRPr sz="1300">
+                <a:solidFill>
+                  <a:srgbClr val="E2E8F0"/>
+                </a:solidFill>
+                <a:latin typeface="Inter"/>
+              </a:defRPr>
+            </a:pPr>
+            <a:r>
+              <a:t>Mësimi: Dhimbja ekziston në kohë dhe para. Zgjidhja kërkohet nga të dyja palët.</a:t>
+            </a:r>
+          </a:p>
+        </p:txBody>
+      </p:sp>
+      <p:sp>
+        <p:nvSpPr>
+          <p:cNvPr id="10" name="Rounded Rectangle 9"/>
+          <p:cNvSpPr/>
+          <p:nvPr/>
+        </p:nvSpPr>
+        <p:spPr>
+          <a:xfrm>
+            <a:off x="8046720" y="1920240"/>
+            <a:ext cx="3383280" cy="4389120"/>
+          </a:xfrm>
+          <a:prstGeom prst="roundRect">
+            <a:avLst/>
+          </a:prstGeom>
+          <a:solidFill>
+            <a:srgbClr val="141E34"/>
+          </a:solidFill>
+          <a:ln w="25400">
+            <a:solidFill>
+              <a:srgbClr val="F59E0B"/>
+            </a:solidFill>
+          </a:ln>
+        </p:spPr>
+        <p:style>
+          <a:lnRef idx="1">
+            <a:schemeClr val="accent1"/>
+          </a:lnRef>
+          <a:fillRef idx="3">
+            <a:schemeClr val="accent1"/>
+          </a:fillRef>
+          <a:effectRef idx="2">
+            <a:schemeClr val="accent1"/>
+          </a:effectRef>
+          <a:fontRef idx="minor">
+            <a:schemeClr val="lt1"/>
+          </a:fontRef>
+        </p:style>
+        <p:txBody>
+          <a:bodyPr rtlCol="0" anchor="ctr"/>
+          <a:lstStyle/>
+          <a:p>
+            <a:pPr algn="ctr"/>
+          </a:p>
+        </p:txBody>
+      </p:sp>
+      <p:sp>
+        <p:nvSpPr>
+          <p:cNvPr id="11" name="TextBox 10"/>
+          <p:cNvSpPr txBox="1"/>
+          <p:nvPr/>
+        </p:nvSpPr>
+        <p:spPr>
+          <a:xfrm>
+            <a:off x="8229600" y="2103120"/>
+            <a:ext cx="3017520" cy="4023360"/>
+          </a:xfrm>
+          <a:prstGeom prst="rect">
+            <a:avLst/>
+          </a:prstGeom>
+          <a:noFill/>
+        </p:spPr>
+        <p:txBody>
+          <a:bodyPr wrap="square">
+            <a:spAutoFit/>
+          </a:bodyPr>
+          <a:lstStyle/>
+          <a:p>
+            <a:pPr>
+              <a:defRPr sz="1800" b="1">
+                <a:solidFill>
+                  <a:srgbClr val="F59E0B"/>
+                </a:solidFill>
+                <a:latin typeface="Inter"/>
+              </a:defRPr>
+            </a:pPr>
+            <a:r>
+              <a:t>Biseda 3: Shoferi (Viti 3)</a:t>
+            </a:r>
+          </a:p>
+          <a:p>
+            <a:pPr>
+              <a:spcAft>
+                <a:spcPts val="1600"/>
+              </a:spcAft>
+              <a:defRPr sz="1300">
+                <a:solidFill>
+                  <a:srgbClr val="B4C3D7"/>
+                </a:solidFill>
+                <a:latin typeface="Inter"/>
+              </a:defRPr>
+            </a:pPr>
+            <a:r>
+              <a:t>Podujevë ➔ Kampusi AAB</a:t>
+            </a:r>
+          </a:p>
+          <a:p>
+            <a:pPr>
+              <a:spcAft>
+                <a:spcPts val="1600"/>
+              </a:spcAft>
+              <a:defRPr sz="1600" i="1">
+                <a:solidFill>
+                  <a:srgbClr val="FFFFFF"/>
+                </a:solidFill>
+                <a:latin typeface="Inter"/>
+              </a:defRPr>
+            </a:pPr>
+            <a:r>
+              <a:t>"Grupet në WhatsApp janë kaotike. Mesazhet humbasin dhe nuk e di kush është i regjistruar vërtet në AAB. Duhet siguri!"</a:t>
+            </a:r>
+          </a:p>
+          <a:p>
+            <a:pPr>
+              <a:defRPr sz="1300">
+                <a:solidFill>
+                  <a:srgbClr val="E2E8F0"/>
+                </a:solidFill>
+                <a:latin typeface="Inter"/>
+              </a:defRPr>
+            </a:pPr>
+            <a:r>
+              <a:t>Mësimi: Dhimbja ekziston në kohë dhe para. Zgjidhja kërkohet nga të dyja palët.</a:t>
+            </a:r>
+          </a:p>
+        </p:txBody>
+      </p:sp>
     </p:spTree>
   </p:cSld>
   <p:clrMapOvr>
@@ -11042,7 +11689,7 @@
           <a:lstStyle/>
           <a:p>
             <a:pPr>
-              <a:defRPr sz="1500" b="1">
+              <a:defRPr sz="1400" b="1">
                 <a:solidFill>
                   <a:srgbClr val="38BDF8"/>
                 </a:solidFill>
@@ -11050,7 +11697,7 @@
               </a:defRPr>
             </a:pPr>
             <a:r>
-              <a:t>HAPI 4: VIJUESHMËRIA E NDËRTIMIT</a:t>
+              <a:t>HAPI 2: SPECIFIKIMI</a:t>
             </a:r>
           </a:p>
         </p:txBody>
@@ -11063,7 +11710,7 @@
         </p:nvSpPr>
         <p:spPr>
           <a:xfrm>
-            <a:off x="731520" y="685800"/>
+            <a:off x="731520" y="658368"/>
             <a:ext cx="10698480" cy="777240"/>
           </a:xfrm>
           <a:prstGeom prst="rect">
@@ -11078,7 +11725,7 @@
           <a:lstStyle/>
           <a:p>
             <a:pPr>
-              <a:defRPr sz="3600" b="1">
+              <a:defRPr sz="3400" b="1">
                 <a:solidFill>
                   <a:srgbClr val="FFFFFF"/>
                 </a:solidFill>
@@ -11086,7 +11733,7 @@
               </a:defRPr>
             </a:pPr>
             <a:r>
-              <a:t>Rruga e Ndërtimit: Nga Skica te Produkti Hap-pas-Hapi</a:t>
+              <a:t>PRD 1-Faqësh: Kontrata Juaj Para se të Kodoni</a:t>
             </a:r>
           </a:p>
         </p:txBody>
@@ -11099,7 +11746,7 @@
         </p:nvSpPr>
         <p:spPr>
           <a:xfrm>
-            <a:off x="731520" y="1444752"/>
+            <a:off x="731520" y="1417320"/>
             <a:ext cx="10698480" cy="502920"/>
           </a:xfrm>
           <a:prstGeom prst="rect">
@@ -11114,7 +11761,7 @@
           <a:lstStyle/>
           <a:p>
             <a:pPr>
-              <a:defRPr sz="2100">
+              <a:defRPr sz="1900">
                 <a:solidFill>
                   <a:srgbClr val="E2E8F0"/>
                 </a:solidFill>
@@ -11122,7 +11769,7 @@
               </a:defRPr>
             </a:pPr>
             <a:r>
-              <a:t>Jo menjëherë produkti i gatshëm — ja si evoluon projekti nga java në javë.</a:t>
+              <a:t>Çdo vendim teknik buron nga kjo faqe. Shkarkohet në: arbenl.github.io/templates</a:t>
             </a:r>
           </a:p>
         </p:txBody>
@@ -11135,18 +11782,18 @@
         </p:nvSpPr>
         <p:spPr>
           <a:xfrm>
-            <a:off x="731520" y="1874519"/>
-            <a:ext cx="10728655" cy="4663440"/>
+            <a:off x="731520" y="1920240"/>
+            <a:ext cx="5166360" cy="2011680"/>
           </a:xfrm>
           <a:prstGeom prst="roundRect">
             <a:avLst/>
           </a:prstGeom>
           <a:solidFill>
-            <a:srgbClr val="FFFFFF"/>
+            <a:srgbClr val="141E34"/>
           </a:solidFill>
-          <a:ln w="31750">
+          <a:ln w="19050">
             <a:solidFill>
-              <a:srgbClr val="38BDF8"/>
+              <a:srgbClr val="2E4066"/>
             </a:solidFill>
           </a:ln>
         </p:spPr>
@@ -11172,30 +11819,349 @@
           </a:p>
         </p:txBody>
       </p:sp>
-      <p:pic>
-        <p:nvPicPr>
-          <p:cNvPr id="7" name="Picture 6" descr="slide6_sketch_roadmap_master.png"/>
-          <p:cNvPicPr>
-            <a:picLocks noChangeAspect="1"/>
-          </p:cNvPicPr>
-          <p:nvPr/>
-        </p:nvPicPr>
-        <p:blipFill>
-          <a:blip r:embed="rId2"/>
-          <a:stretch>
-            <a:fillRect/>
-          </a:stretch>
-        </p:blipFill>
-        <p:spPr>
-          <a:xfrm>
-            <a:off x="777240" y="1920240"/>
-            <a:ext cx="10637215" cy="4572000"/>
-          </a:xfrm>
-          <a:prstGeom prst="rect">
-            <a:avLst/>
-          </a:prstGeom>
-        </p:spPr>
-      </p:pic>
+      <p:sp>
+        <p:nvSpPr>
+          <p:cNvPr id="7" name="TextBox 6"/>
+          <p:cNvSpPr txBox="1"/>
+          <p:nvPr/>
+        </p:nvSpPr>
+        <p:spPr>
+          <a:xfrm>
+            <a:off x="914400" y="2103120"/>
+            <a:ext cx="4800600" cy="1645920"/>
+          </a:xfrm>
+          <a:prstGeom prst="rect">
+            <a:avLst/>
+          </a:prstGeom>
+          <a:noFill/>
+        </p:spPr>
+        <p:txBody>
+          <a:bodyPr wrap="square">
+            <a:spAutoFit/>
+          </a:bodyPr>
+          <a:lstStyle/>
+          <a:p>
+            <a:pPr>
+              <a:spcAft>
+                <a:spcPts val="800"/>
+              </a:spcAft>
+              <a:defRPr sz="1800" b="1">
+                <a:solidFill>
+                  <a:srgbClr val="38BDF8"/>
+                </a:solidFill>
+                <a:latin typeface="Inter"/>
+              </a:defRPr>
+            </a:pPr>
+            <a:r>
+              <a:t>1. Përdoruesi &amp; Dhimbja</a:t>
+            </a:r>
+          </a:p>
+          <a:p>
+            <a:pPr>
+              <a:defRPr sz="1500">
+                <a:solidFill>
+                  <a:srgbClr val="E2E8F0"/>
+                </a:solidFill>
+                <a:latin typeface="Inter"/>
+              </a:defRPr>
+            </a:pPr>
+            <a:r>
+              <a:t>Kush e përjeton? Kur? Si e zgjidh sot? (Fakte nga 3 bisedat e vëzhgimit).</a:t>
+            </a:r>
+          </a:p>
+        </p:txBody>
+      </p:sp>
+      <p:sp>
+        <p:nvSpPr>
+          <p:cNvPr id="8" name="Rounded Rectangle 7"/>
+          <p:cNvSpPr/>
+          <p:nvPr/>
+        </p:nvSpPr>
+        <p:spPr>
+          <a:xfrm>
+            <a:off x="6263640" y="1920240"/>
+            <a:ext cx="5166360" cy="2011680"/>
+          </a:xfrm>
+          <a:prstGeom prst="roundRect">
+            <a:avLst/>
+          </a:prstGeom>
+          <a:solidFill>
+            <a:srgbClr val="141E34"/>
+          </a:solidFill>
+          <a:ln w="19050">
+            <a:solidFill>
+              <a:srgbClr val="2E4066"/>
+            </a:solidFill>
+          </a:ln>
+        </p:spPr>
+        <p:style>
+          <a:lnRef idx="1">
+            <a:schemeClr val="accent1"/>
+          </a:lnRef>
+          <a:fillRef idx="3">
+            <a:schemeClr val="accent1"/>
+          </a:fillRef>
+          <a:effectRef idx="2">
+            <a:schemeClr val="accent1"/>
+          </a:effectRef>
+          <a:fontRef idx="minor">
+            <a:schemeClr val="lt1"/>
+          </a:fontRef>
+        </p:style>
+        <p:txBody>
+          <a:bodyPr rtlCol="0" anchor="ctr"/>
+          <a:lstStyle/>
+          <a:p>
+            <a:pPr algn="ctr"/>
+          </a:p>
+        </p:txBody>
+      </p:sp>
+      <p:sp>
+        <p:nvSpPr>
+          <p:cNvPr id="9" name="TextBox 8"/>
+          <p:cNvSpPr txBox="1"/>
+          <p:nvPr/>
+        </p:nvSpPr>
+        <p:spPr>
+          <a:xfrm>
+            <a:off x="6446520" y="2103120"/>
+            <a:ext cx="4800600" cy="1645920"/>
+          </a:xfrm>
+          <a:prstGeom prst="rect">
+            <a:avLst/>
+          </a:prstGeom>
+          <a:noFill/>
+        </p:spPr>
+        <p:txBody>
+          <a:bodyPr wrap="square">
+            <a:spAutoFit/>
+          </a:bodyPr>
+          <a:lstStyle/>
+          <a:p>
+            <a:pPr>
+              <a:spcAft>
+                <a:spcPts val="800"/>
+              </a:spcAft>
+              <a:defRPr sz="1800" b="1">
+                <a:solidFill>
+                  <a:srgbClr val="38BDF8"/>
+                </a:solidFill>
+                <a:latin typeface="Inter"/>
+              </a:defRPr>
+            </a:pPr>
+            <a:r>
+              <a:t>2. Hipoteza e Vlerës</a:t>
+            </a:r>
+          </a:p>
+          <a:p>
+            <a:pPr>
+              <a:defRPr sz="1500">
+                <a:solidFill>
+                  <a:srgbClr val="E2E8F0"/>
+                </a:solidFill>
+                <a:latin typeface="Inter"/>
+              </a:defRPr>
+            </a:pPr>
+            <a:r>
+              <a:t>Nëse ofrojmë zgjidhjen me 1-klik, atëherë përdoruesi kursen kohë dhe para.</a:t>
+            </a:r>
+          </a:p>
+        </p:txBody>
+      </p:sp>
+      <p:sp>
+        <p:nvSpPr>
+          <p:cNvPr id="10" name="Rounded Rectangle 9"/>
+          <p:cNvSpPr/>
+          <p:nvPr/>
+        </p:nvSpPr>
+        <p:spPr>
+          <a:xfrm>
+            <a:off x="731520" y="4069080"/>
+            <a:ext cx="5166360" cy="2011680"/>
+          </a:xfrm>
+          <a:prstGeom prst="roundRect">
+            <a:avLst/>
+          </a:prstGeom>
+          <a:solidFill>
+            <a:srgbClr val="141E34"/>
+          </a:solidFill>
+          <a:ln w="19050">
+            <a:solidFill>
+              <a:srgbClr val="2E4066"/>
+            </a:solidFill>
+          </a:ln>
+        </p:spPr>
+        <p:style>
+          <a:lnRef idx="1">
+            <a:schemeClr val="accent1"/>
+          </a:lnRef>
+          <a:fillRef idx="3">
+            <a:schemeClr val="accent1"/>
+          </a:fillRef>
+          <a:effectRef idx="2">
+            <a:schemeClr val="accent1"/>
+          </a:effectRef>
+          <a:fontRef idx="minor">
+            <a:schemeClr val="lt1"/>
+          </a:fontRef>
+        </p:style>
+        <p:txBody>
+          <a:bodyPr rtlCol="0" anchor="ctr"/>
+          <a:lstStyle/>
+          <a:p>
+            <a:pPr algn="ctr"/>
+          </a:p>
+        </p:txBody>
+      </p:sp>
+      <p:sp>
+        <p:nvSpPr>
+          <p:cNvPr id="11" name="TextBox 10"/>
+          <p:cNvSpPr txBox="1"/>
+          <p:nvPr/>
+        </p:nvSpPr>
+        <p:spPr>
+          <a:xfrm>
+            <a:off x="914400" y="4251960"/>
+            <a:ext cx="4800600" cy="1645920"/>
+          </a:xfrm>
+          <a:prstGeom prst="rect">
+            <a:avLst/>
+          </a:prstGeom>
+          <a:noFill/>
+        </p:spPr>
+        <p:txBody>
+          <a:bodyPr wrap="square">
+            <a:spAutoFit/>
+          </a:bodyPr>
+          <a:lstStyle/>
+          <a:p>
+            <a:pPr>
+              <a:spcAft>
+                <a:spcPts val="800"/>
+              </a:spcAft>
+              <a:defRPr sz="1800" b="1">
+                <a:solidFill>
+                  <a:srgbClr val="38BDF8"/>
+                </a:solidFill>
+                <a:latin typeface="Inter"/>
+              </a:defRPr>
+            </a:pPr>
+            <a:r>
+              <a:t>3. Rrjedha Kryesore (Max 5)</a:t>
+            </a:r>
+          </a:p>
+          <a:p>
+            <a:pPr>
+              <a:defRPr sz="1500">
+                <a:solidFill>
+                  <a:srgbClr val="E2E8F0"/>
+                </a:solidFill>
+                <a:latin typeface="Inter"/>
+              </a:defRPr>
+            </a:pPr>
+            <a:r>
+              <a:t>Nga hyrja te suksesi në jo më shumë se 5 hapa të thjeshtë në ekran.</a:t>
+            </a:r>
+          </a:p>
+        </p:txBody>
+      </p:sp>
+      <p:sp>
+        <p:nvSpPr>
+          <p:cNvPr id="12" name="Rounded Rectangle 11"/>
+          <p:cNvSpPr/>
+          <p:nvPr/>
+        </p:nvSpPr>
+        <p:spPr>
+          <a:xfrm>
+            <a:off x="6263640" y="4069080"/>
+            <a:ext cx="5166360" cy="2011680"/>
+          </a:xfrm>
+          <a:prstGeom prst="roundRect">
+            <a:avLst/>
+          </a:prstGeom>
+          <a:solidFill>
+            <a:srgbClr val="141E34"/>
+          </a:solidFill>
+          <a:ln w="19050">
+            <a:solidFill>
+              <a:srgbClr val="2E4066"/>
+            </a:solidFill>
+          </a:ln>
+        </p:spPr>
+        <p:style>
+          <a:lnRef idx="1">
+            <a:schemeClr val="accent1"/>
+          </a:lnRef>
+          <a:fillRef idx="3">
+            <a:schemeClr val="accent1"/>
+          </a:fillRef>
+          <a:effectRef idx="2">
+            <a:schemeClr val="accent1"/>
+          </a:effectRef>
+          <a:fontRef idx="minor">
+            <a:schemeClr val="lt1"/>
+          </a:fontRef>
+        </p:style>
+        <p:txBody>
+          <a:bodyPr rtlCol="0" anchor="ctr"/>
+          <a:lstStyle/>
+          <a:p>
+            <a:pPr algn="ctr"/>
+          </a:p>
+        </p:txBody>
+      </p:sp>
+      <p:sp>
+        <p:nvSpPr>
+          <p:cNvPr id="13" name="TextBox 12"/>
+          <p:cNvSpPr txBox="1"/>
+          <p:nvPr/>
+        </p:nvSpPr>
+        <p:spPr>
+          <a:xfrm>
+            <a:off x="6446520" y="4251960"/>
+            <a:ext cx="4800600" cy="1645920"/>
+          </a:xfrm>
+          <a:prstGeom prst="rect">
+            <a:avLst/>
+          </a:prstGeom>
+          <a:noFill/>
+        </p:spPr>
+        <p:txBody>
+          <a:bodyPr wrap="square">
+            <a:spAutoFit/>
+          </a:bodyPr>
+          <a:lstStyle/>
+          <a:p>
+            <a:pPr>
+              <a:spcAft>
+                <a:spcPts val="800"/>
+              </a:spcAft>
+              <a:defRPr sz="1800" b="1">
+                <a:solidFill>
+                  <a:srgbClr val="38BDF8"/>
+                </a:solidFill>
+                <a:latin typeface="Inter"/>
+              </a:defRPr>
+            </a:pPr>
+            <a:r>
+              <a:t>4. Kriteret e Pranimit</a:t>
+            </a:r>
+          </a:p>
+          <a:p>
+            <a:pPr>
+              <a:defRPr sz="1500">
+                <a:solidFill>
+                  <a:srgbClr val="E2E8F0"/>
+                </a:solidFill>
+                <a:latin typeface="Inter"/>
+              </a:defRPr>
+            </a:pPr>
+            <a:r>
+              <a:t>3 deri 5 sjellje të testueshme që provohen me sukses në Demo Day.</a:t>
+            </a:r>
+          </a:p>
+        </p:txBody>
+      </p:sp>
     </p:spTree>
   </p:cSld>
   <p:clrMapOvr>
@@ -11280,7 +12246,7 @@
           <a:lstStyle/>
           <a:p>
             <a:pPr>
-              <a:defRPr sz="1500" b="1">
+              <a:defRPr sz="1400" b="1">
                 <a:solidFill>
                   <a:srgbClr val="38BDF8"/>
                 </a:solidFill>
@@ -11288,7 +12254,7 @@
               </a:defRPr>
             </a:pPr>
             <a:r>
-              <a:t>TERMAT E BIZNESIT</a:t>
+              <a:t>KONTROLLI I FUSHËVEPRIMIT</a:t>
             </a:r>
           </a:p>
         </p:txBody>
@@ -11301,7 +12267,7 @@
         </p:nvSpPr>
         <p:spPr>
           <a:xfrm>
-            <a:off x="731520" y="685800"/>
+            <a:off x="731520" y="658368"/>
             <a:ext cx="10698480" cy="777240"/>
           </a:xfrm>
           <a:prstGeom prst="rect">
@@ -11316,7 +12282,7 @@
           <a:lstStyle/>
           <a:p>
             <a:pPr>
-              <a:defRPr sz="3600" b="1">
+              <a:defRPr sz="3400" b="1">
                 <a:solidFill>
                   <a:srgbClr val="FFFFFF"/>
                 </a:solidFill>
@@ -11324,7 +12290,7 @@
               </a:defRPr>
             </a:pPr>
             <a:r>
-              <a:t>Nga Dhimbja te Vlera: Pse Ka Sukses kjo Ide?</a:t>
+              <a:t>Scope Contract: 'Vrasësi' i Dështimit të Projekteve</a:t>
             </a:r>
           </a:p>
         </p:txBody>
@@ -11337,7 +12303,7 @@
         </p:nvSpPr>
         <p:spPr>
           <a:xfrm>
-            <a:off x="731520" y="1444752"/>
+            <a:off x="731520" y="1417320"/>
             <a:ext cx="10698480" cy="502920"/>
           </a:xfrm>
           <a:prstGeom prst="rect">
@@ -11352,7 +12318,7 @@
           <a:lstStyle/>
           <a:p>
             <a:pPr>
-              <a:defRPr sz="2100">
+              <a:defRPr sz="1900">
                 <a:solidFill>
                   <a:srgbClr val="E2E8F0"/>
                 </a:solidFill>
@@ -11360,7 +12326,7 @@
               </a:defRPr>
             </a:pPr>
             <a:r>
-              <a:t>Lidhja mes problemit të përditshëm të studentëve dhe zgjidhjes softuerike.</a:t>
+              <a:t>Startup-et dështojnë kur premtojnë 20 gjëra dhe asnjëra nuk punon pa gabime.</a:t>
             </a:r>
           </a:p>
         </p:txBody>
@@ -11373,8 +12339,8 @@
         </p:nvSpPr>
         <p:spPr>
           <a:xfrm>
-            <a:off x="731520" y="2011680"/>
-            <a:ext cx="3383280" cy="4389120"/>
+            <a:off x="731520" y="1920240"/>
+            <a:ext cx="5166360" cy="4480560"/>
           </a:xfrm>
           <a:prstGeom prst="roundRect">
             <a:avLst/>
@@ -11382,9 +12348,9 @@
           <a:solidFill>
             <a:srgbClr val="141E34"/>
           </a:solidFill>
-          <a:ln w="31750">
+          <a:ln w="25400">
             <a:solidFill>
-              <a:srgbClr val="EF4444"/>
+              <a:srgbClr val="10B981"/>
             </a:solidFill>
           </a:ln>
         </p:spPr>
@@ -11418,8 +12384,8 @@
         </p:nvSpPr>
         <p:spPr>
           <a:xfrm>
-            <a:off x="914400" y="2194560"/>
-            <a:ext cx="3017520" cy="4023360"/>
+            <a:off x="914400" y="2103120"/>
+            <a:ext cx="4800600" cy="4114800"/>
           </a:xfrm>
           <a:prstGeom prst="rect">
             <a:avLst/>
@@ -11434,17 +12400,17 @@
           <a:p>
             <a:pPr>
               <a:spcAft>
-                <a:spcPts val="400"/>
+                <a:spcPts val="1400"/>
               </a:spcAft>
-              <a:defRPr sz="1400" b="1">
-                <a:solidFill>
-                  <a:srgbClr val="EF4444"/>
-                </a:solidFill>
-                <a:latin typeface="Inter"/>
-              </a:defRPr>
-            </a:pPr>
-            <a:r>
-              <a:t>🛑 Pika e Dhimbjes (Pain Point)</a:t>
+              <a:defRPr sz="2000" b="1">
+                <a:solidFill>
+                  <a:srgbClr val="10B981"/>
+                </a:solidFill>
+                <a:latin typeface="Inter"/>
+              </a:defRPr>
+            </a:pPr>
+            <a:r>
+              <a:t>BRENDA MVP-së (Maksimumi 3 Aftësi)</a:t>
             </a:r>
           </a:p>
           <a:p>
@@ -11452,7 +12418,7 @@
               <a:spcAft>
                 <a:spcPts val="1200"/>
               </a:spcAft>
-              <a:defRPr sz="2000" b="1">
+              <a:defRPr sz="1500">
                 <a:solidFill>
                   <a:srgbClr val="FFFFFF"/>
                 </a:solidFill>
@@ -11460,71 +12426,39 @@
               </a:defRPr>
             </a:pPr>
             <a:r>
-              <a:t>Kosto e Lartë &amp; Humbje Kohe</a:t>
+              <a:t>• 1. Autentikim Zyrtar: Kyçje me email @universitetiaab.com (siguri dhe besim i menjëhershëm).</a:t>
             </a:r>
           </a:p>
           <a:p>
             <a:pPr>
               <a:spcAft>
-                <a:spcPts val="1000"/>
+                <a:spcPts val="1200"/>
               </a:spcAft>
-              <a:defRPr sz="1700">
-                <a:solidFill>
-                  <a:srgbClr val="E2E8F0"/>
-                </a:solidFill>
-                <a:latin typeface="Inter"/>
-              </a:defRPr>
-            </a:pPr>
-            <a:r>
-              <a:t>• Shoferi paguan 100% të naftës i vetëm (10€-15€ në ditë).</a:t>
+              <a:defRPr sz="1500">
+                <a:solidFill>
+                  <a:srgbClr val="FFFFFF"/>
+                </a:solidFill>
+                <a:latin typeface="Inter"/>
+              </a:defRPr>
+            </a:pPr>
+            <a:r>
+              <a:t>• 2. Postim i Thjeshtë: Shoferi vendos orën, qytetin e nisjes dhe sa vende ka të lira.</a:t>
             </a:r>
           </a:p>
           <a:p>
             <a:pPr>
               <a:spcAft>
-                <a:spcPts val="1000"/>
+                <a:spcPts val="1200"/>
               </a:spcAft>
-              <a:defRPr sz="1700">
-                <a:solidFill>
-                  <a:srgbClr val="E2E8F0"/>
-                </a:solidFill>
-                <a:latin typeface="Inter"/>
-              </a:defRPr>
-            </a:pPr>
-            <a:r>
-              <a:t>• Studentët pa makinë presin autobusin në shi dhe në të ftohtë.</a:t>
-            </a:r>
-          </a:p>
-          <a:p>
-            <a:pPr>
-              <a:spcAft>
-                <a:spcPts val="1000"/>
-              </a:spcAft>
-              <a:defRPr sz="1700">
-                <a:solidFill>
-                  <a:srgbClr val="E2E8F0"/>
-                </a:solidFill>
-                <a:latin typeface="Inter"/>
-              </a:defRPr>
-            </a:pPr>
-            <a:r>
-              <a:t>• Udhëtimi me autobus merr shpesh 1 orë e gjysmë në trafik.</a:t>
-            </a:r>
-          </a:p>
-          <a:p>
-            <a:pPr>
-              <a:spcAft>
-                <a:spcPts val="1000"/>
-              </a:spcAft>
-              <a:defRPr sz="1700">
-                <a:solidFill>
-                  <a:srgbClr val="E2E8F0"/>
-                </a:solidFill>
-                <a:latin typeface="Inter"/>
-              </a:defRPr>
-            </a:pPr>
-            <a:r>
-              <a:t>• Vonesa të shpeshta në ligjëratën e orës 09:00 në fakultet.</a:t>
+              <a:defRPr sz="1500">
+                <a:solidFill>
+                  <a:srgbClr val="FFFFFF"/>
+                </a:solidFill>
+                <a:latin typeface="Inter"/>
+              </a:defRPr>
+            </a:pPr>
+            <a:r>
+              <a:t>• 3. Kërkesë me 1-Klik: Studenti rezervon vendin; vendet zbresin në kohë reale me Supabase.</a:t>
             </a:r>
           </a:p>
         </p:txBody>
@@ -11537,8 +12471,8 @@
         </p:nvSpPr>
         <p:spPr>
           <a:xfrm>
-            <a:off x="4389120" y="2011680"/>
-            <a:ext cx="3383280" cy="4389120"/>
+            <a:off x="6291072" y="1920240"/>
+            <a:ext cx="5166360" cy="4480560"/>
           </a:xfrm>
           <a:prstGeom prst="roundRect">
             <a:avLst/>
@@ -11546,9 +12480,9 @@
           <a:solidFill>
             <a:srgbClr val="141E34"/>
           </a:solidFill>
-          <a:ln w="31750">
+          <a:ln w="25400">
             <a:solidFill>
-              <a:srgbClr val="38BDF8"/>
+              <a:srgbClr val="EF4444"/>
             </a:solidFill>
           </a:ln>
         </p:spPr>
@@ -11582,8 +12516,8 @@
         </p:nvSpPr>
         <p:spPr>
           <a:xfrm>
-            <a:off x="4572000" y="2194560"/>
-            <a:ext cx="3017520" cy="4023360"/>
+            <a:off x="6473952" y="2103120"/>
+            <a:ext cx="4800600" cy="4114800"/>
           </a:xfrm>
           <a:prstGeom prst="rect">
             <a:avLst/>
@@ -11598,17 +12532,17 @@
           <a:p>
             <a:pPr>
               <a:spcAft>
-                <a:spcPts val="400"/>
+                <a:spcPts val="1400"/>
               </a:spcAft>
-              <a:defRPr sz="1400" b="1">
-                <a:solidFill>
-                  <a:srgbClr val="38BDF8"/>
-                </a:solidFill>
-                <a:latin typeface="Inter"/>
-              </a:defRPr>
-            </a:pPr>
-            <a:r>
-              <a:t>💡 Propozimi i Vlerës (Value Prop)</a:t>
+              <a:defRPr sz="2000" b="1">
+                <a:solidFill>
+                  <a:srgbClr val="EF4444"/>
+                </a:solidFill>
+                <a:latin typeface="Inter"/>
+              </a:defRPr>
+            </a:pPr>
+            <a:r>
+              <a:t>JASHTË MVP-së (Të Ndaluara në Semestrin 1)</a:t>
             </a:r>
           </a:p>
           <a:p>
@@ -11616,23 +12550,7 @@
               <a:spcAft>
                 <a:spcPts val="1200"/>
               </a:spcAft>
-              <a:defRPr sz="2000" b="1">
-                <a:solidFill>
-                  <a:srgbClr val="FFFFFF"/>
-                </a:solidFill>
-                <a:latin typeface="Inter"/>
-              </a:defRPr>
-            </a:pPr>
-            <a:r>
-              <a:t>Udhëtim i Shpejtë, i Lirë &amp; Social</a:t>
-            </a:r>
-          </a:p>
-          <a:p>
-            <a:pPr>
-              <a:spcAft>
-                <a:spcPts val="1000"/>
-              </a:spcAft>
-              <a:defRPr sz="1700">
+              <a:defRPr sz="1500">
                 <a:solidFill>
                   <a:srgbClr val="E2E8F0"/>
                 </a:solidFill>
@@ -11640,139 +12558,7 @@
               </a:defRPr>
             </a:pPr>
             <a:r>
-              <a:t>• Studenti arrin në AAB 45 minuta më shpejt se me autobus.</a:t>
-            </a:r>
-          </a:p>
-          <a:p>
-            <a:pPr>
-              <a:spcAft>
-                <a:spcPts val="1000"/>
-              </a:spcAft>
-              <a:defRPr sz="1700">
-                <a:solidFill>
-                  <a:srgbClr val="E2E8F0"/>
-                </a:solidFill>
-                <a:latin typeface="Inter"/>
-              </a:defRPr>
-            </a:pPr>
-            <a:r>
-              <a:t>• Kosto e ndarë dhe minimale: vetëm 1.00€ — 1.50€ për rrugë.</a:t>
-            </a:r>
-          </a:p>
-          <a:p>
-            <a:pPr>
-              <a:spcAft>
-                <a:spcPts val="1000"/>
-              </a:spcAft>
-              <a:defRPr sz="1700">
-                <a:solidFill>
-                  <a:srgbClr val="E2E8F0"/>
-                </a:solidFill>
-                <a:latin typeface="Inter"/>
-              </a:defRPr>
-            </a:pPr>
-            <a:r>
-              <a:t>• Përvojë sociale: shoqërohesh me kolegë të fakultetit gjatë rrugës.</a:t>
-            </a:r>
-          </a:p>
-          <a:p>
-            <a:pPr>
-              <a:spcAft>
-                <a:spcPts val="1000"/>
-              </a:spcAft>
-              <a:defRPr sz="1700">
-                <a:solidFill>
-                  <a:srgbClr val="E2E8F0"/>
-                </a:solidFill>
-                <a:latin typeface="Inter"/>
-              </a:defRPr>
-            </a:pPr>
-            <a:r>
-              <a:t>• Zero fërkim: PWA hapet me link pa shkarkuar 150MB nga App Store.</a:t>
-            </a:r>
-          </a:p>
-        </p:txBody>
-      </p:sp>
-      <p:sp>
-        <p:nvSpPr>
-          <p:cNvPr id="10" name="Rounded Rectangle 9"/>
-          <p:cNvSpPr/>
-          <p:nvPr/>
-        </p:nvSpPr>
-        <p:spPr>
-          <a:xfrm>
-            <a:off x="8046720" y="2011680"/>
-            <a:ext cx="3383280" cy="4389120"/>
-          </a:xfrm>
-          <a:prstGeom prst="roundRect">
-            <a:avLst/>
-          </a:prstGeom>
-          <a:solidFill>
-            <a:srgbClr val="141E34"/>
-          </a:solidFill>
-          <a:ln w="31750">
-            <a:solidFill>
-              <a:srgbClr val="10B981"/>
-            </a:solidFill>
-          </a:ln>
-        </p:spPr>
-        <p:style>
-          <a:lnRef idx="1">
-            <a:schemeClr val="accent1"/>
-          </a:lnRef>
-          <a:fillRef idx="3">
-            <a:schemeClr val="accent1"/>
-          </a:fillRef>
-          <a:effectRef idx="2">
-            <a:schemeClr val="accent1"/>
-          </a:effectRef>
-          <a:fontRef idx="minor">
-            <a:schemeClr val="lt1"/>
-          </a:fontRef>
-        </p:style>
-        <p:txBody>
-          <a:bodyPr rtlCol="0" anchor="ctr"/>
-          <a:lstStyle/>
-          <a:p>
-            <a:pPr algn="ctr"/>
-          </a:p>
-        </p:txBody>
-      </p:sp>
-      <p:sp>
-        <p:nvSpPr>
-          <p:cNvPr id="11" name="TextBox 10"/>
-          <p:cNvSpPr txBox="1"/>
-          <p:nvPr/>
-        </p:nvSpPr>
-        <p:spPr>
-          <a:xfrm>
-            <a:off x="8229600" y="2194560"/>
-            <a:ext cx="3017520" cy="4023360"/>
-          </a:xfrm>
-          <a:prstGeom prst="rect">
-            <a:avLst/>
-          </a:prstGeom>
-          <a:noFill/>
-        </p:spPr>
-        <p:txBody>
-          <a:bodyPr wrap="square">
-            <a:spAutoFit/>
-          </a:bodyPr>
-          <a:lstStyle/>
-          <a:p>
-            <a:pPr>
-              <a:spcAft>
-                <a:spcPts val="400"/>
-              </a:spcAft>
-              <a:defRPr sz="1400" b="1">
-                <a:solidFill>
-                  <a:srgbClr val="10B981"/>
-                </a:solidFill>
-                <a:latin typeface="Inter"/>
-              </a:defRPr>
-            </a:pPr>
-            <a:r>
-              <a:t>💰 Modeli i Besimit (Economics &amp; Trust)</a:t>
+              <a:t>✗ Zero Pagesa me Kartelë: Kërkon llogari biznesi dhe certifikime. Përdoret para në dorë (cash).</a:t>
             </a:r>
           </a:p>
           <a:p>
@@ -11780,23 +12566,23 @@
               <a:spcAft>
                 <a:spcPts val="1200"/>
               </a:spcAft>
-              <a:defRPr sz="2000" b="1">
-                <a:solidFill>
-                  <a:srgbClr val="FFFFFF"/>
-                </a:solidFill>
-                <a:latin typeface="Inter"/>
-              </a:defRPr>
-            </a:pPr>
-            <a:r>
-              <a:t>Komunitet i Besueshëm me Email AAB</a:t>
+              <a:defRPr sz="1500">
+                <a:solidFill>
+                  <a:srgbClr val="E2E8F0"/>
+                </a:solidFill>
+                <a:latin typeface="Inter"/>
+              </a:defRPr>
+            </a:pPr>
+            <a:r>
+              <a:t>✗ Zero Harta Live / GPS: Konsumon baterinë dhe shton vonesa rrjeti. Mjafton lista e qyteteve.</a:t>
             </a:r>
           </a:p>
           <a:p>
             <a:pPr>
               <a:spcAft>
-                <a:spcPts val="1000"/>
+                <a:spcPts val="1200"/>
               </a:spcAft>
-              <a:defRPr sz="1700">
+              <a:defRPr sz="1500">
                 <a:solidFill>
                   <a:srgbClr val="E2E8F0"/>
                 </a:solidFill>
@@ -11804,55 +12590,7 @@
               </a:defRPr>
             </a:pPr>
             <a:r>
-              <a:t>• Kyçje e sigurt: lejohen vetëm studentët me email zyrtar AAB.</a:t>
-            </a:r>
-          </a:p>
-          <a:p>
-            <a:pPr>
-              <a:spcAft>
-                <a:spcPts val="1000"/>
-              </a:spcAft>
-              <a:defRPr sz="1700">
-                <a:solidFill>
-                  <a:srgbClr val="E2E8F0"/>
-                </a:solidFill>
-                <a:latin typeface="Inter"/>
-              </a:defRPr>
-            </a:pPr>
-            <a:r>
-              <a:t>• Zero komisione: kursimi shkon 100% për xhepin e studentëve.</a:t>
-            </a:r>
-          </a:p>
-          <a:p>
-            <a:pPr>
-              <a:spcAft>
-                <a:spcPts val="1000"/>
-              </a:spcAft>
-              <a:defRPr sz="1700">
-                <a:solidFill>
-                  <a:srgbClr val="E2E8F0"/>
-                </a:solidFill>
-                <a:latin typeface="Inter"/>
-              </a:defRPr>
-            </a:pPr>
-            <a:r>
-              <a:t>• Zvogëlim i trafikut në hyrje të Prishtinës dhe më pak ndotje.</a:t>
-            </a:r>
-          </a:p>
-          <a:p>
-            <a:pPr>
-              <a:spcAft>
-                <a:spcPts val="1000"/>
-              </a:spcAft>
-              <a:defRPr sz="1700">
-                <a:solidFill>
-                  <a:srgbClr val="E2E8F0"/>
-                </a:solidFill>
-                <a:latin typeface="Inter"/>
-              </a:defRPr>
-            </a:pPr>
-            <a:r>
-              <a:t>• Infrastruktura softuerike: 0€ kosto me Supabase &amp; Vercel Free Tier!</a:t>
+              <a:t>✗ Zero Chat i Brendshëm: Kompleksitet i lartë moderimi. Përdoret telefonatë / SMS direkte.</a:t>
             </a:r>
           </a:p>
         </p:txBody>
@@ -11941,7 +12679,7 @@
           <a:lstStyle/>
           <a:p>
             <a:pPr>
-              <a:defRPr sz="1500" b="1">
+              <a:defRPr sz="1400" b="1">
                 <a:solidFill>
                   <a:srgbClr val="38BDF8"/>
                 </a:solidFill>
@@ -11949,7 +12687,7 @@
               </a:defRPr>
             </a:pPr>
             <a:r>
-              <a:t>REVOLUCIONI I VEGLAVE</a:t>
+              <a:t>DIZAJNI PËR TELEFON</a:t>
             </a:r>
           </a:p>
         </p:txBody>
@@ -11962,7 +12700,7 @@
         </p:nvSpPr>
         <p:spPr>
           <a:xfrm>
-            <a:off x="731520" y="685800"/>
+            <a:off x="731520" y="658368"/>
             <a:ext cx="10698480" cy="777240"/>
           </a:xfrm>
           <a:prstGeom prst="rect">
@@ -11977,7 +12715,7 @@
           <a:lstStyle/>
           <a:p>
             <a:pPr>
-              <a:defRPr sz="3600" b="1">
+              <a:defRPr sz="3400" b="1">
                 <a:solidFill>
                   <a:srgbClr val="FFFFFF"/>
                 </a:solidFill>
@@ -11985,7 +12723,7 @@
               </a:defRPr>
             </a:pPr>
             <a:r>
-              <a:t>Fuqia e Veglave në Vitin 2026: Pse Sot Është e Mundur?</a:t>
+              <a:t>Wireframe Mobile: Vetëm 3 Pamje të Pastra</a:t>
             </a:r>
           </a:p>
         </p:txBody>
@@ -11998,7 +12736,7 @@
         </p:nvSpPr>
         <p:spPr>
           <a:xfrm>
-            <a:off x="731520" y="1444752"/>
+            <a:off x="731520" y="1417320"/>
             <a:ext cx="10698480" cy="502920"/>
           </a:xfrm>
           <a:prstGeom prst="rect">
@@ -12013,7 +12751,7 @@
           <a:lstStyle/>
           <a:p>
             <a:pPr>
-              <a:defRPr sz="2100">
+              <a:defRPr sz="1900">
                 <a:solidFill>
                   <a:srgbClr val="E2E8F0"/>
                 </a:solidFill>
@@ -12021,7 +12759,7 @@
               </a:defRPr>
             </a:pPr>
             <a:r>
-              <a:t>Pse ajo që dje kërkonte muaj dhe ekipe të tëra, sot ndërtohet nga një student i vetëm.</a:t>
+              <a:t>Përpara se të shkruani CSS, skiconi në letër 3 pamjet kyçe të rrugëtimit të përdoruesit.</a:t>
             </a:r>
           </a:p>
         </p:txBody>
@@ -12034,8 +12772,8 @@
         </p:nvSpPr>
         <p:spPr>
           <a:xfrm>
-            <a:off x="731520" y="2011680"/>
-            <a:ext cx="5120640" cy="4389120"/>
+            <a:off x="731520" y="1920240"/>
+            <a:ext cx="3383280" cy="4389120"/>
           </a:xfrm>
           <a:prstGeom prst="roundRect">
             <a:avLst/>
@@ -12043,9 +12781,9 @@
           <a:solidFill>
             <a:srgbClr val="141E34"/>
           </a:solidFill>
-          <a:ln w="31750">
+          <a:ln w="25400">
             <a:solidFill>
-              <a:srgbClr val="EF4444"/>
+              <a:srgbClr val="38BDF8"/>
             </a:solidFill>
           </a:ln>
         </p:spPr>
@@ -12079,8 +12817,8 @@
         </p:nvSpPr>
         <p:spPr>
           <a:xfrm>
-            <a:off x="1005840" y="2286000"/>
-            <a:ext cx="4572000" cy="3840480"/>
+            <a:off x="914400" y="2103120"/>
+            <a:ext cx="3017520" cy="4023360"/>
           </a:xfrm>
           <a:prstGeom prst="rect">
             <a:avLst/>
@@ -12095,25 +12833,41 @@
           <a:p>
             <a:pPr>
               <a:spcAft>
+                <a:spcPts val="600"/>
+              </a:spcAft>
+              <a:defRPr sz="1300" b="1">
+                <a:solidFill>
+                  <a:srgbClr val="38BDF8"/>
+                </a:solidFill>
+                <a:latin typeface="Inter"/>
+              </a:defRPr>
+            </a:pPr>
+            <a:r>
+              <a:t>EKRANI 1</a:t>
+            </a:r>
+          </a:p>
+          <a:p>
+            <a:pPr>
+              <a:spcAft>
+                <a:spcPts val="1400"/>
+              </a:spcAft>
+              <a:defRPr sz="1800" b="1">
+                <a:solidFill>
+                  <a:srgbClr val="FFFFFF"/>
+                </a:solidFill>
+                <a:latin typeface="Inter"/>
+              </a:defRPr>
+            </a:pPr>
+            <a:r>
+              <a:t>Pamja 1: Lista e Udhëtimeve</a:t>
+            </a:r>
+          </a:p>
+          <a:p>
+            <a:pPr>
+              <a:spcAft>
                 <a:spcPts val="1600"/>
               </a:spcAft>
-              <a:defRPr sz="2500" b="1">
-                <a:solidFill>
-                  <a:srgbClr val="EF4444"/>
-                </a:solidFill>
-                <a:latin typeface="Inter"/>
-              </a:defRPr>
-            </a:pPr>
-            <a:r>
-              <a:t>⏳ Dje: Pengesat e Zhvillimit</a:t>
-            </a:r>
-          </a:p>
-          <a:p>
-            <a:pPr>
-              <a:spcAft>
-                <a:spcPts val="1000"/>
-              </a:spcAft>
-              <a:defRPr sz="1900">
+              <a:defRPr sz="1500">
                 <a:solidFill>
                   <a:srgbClr val="E2E8F0"/>
                 </a:solidFill>
@@ -12121,71 +12875,20 @@
               </a:defRPr>
             </a:pPr>
             <a:r>
-              <a:t>• Kërkoheshin 6–12 muaj zhvillim për një prototip të thjeshtë.</a:t>
-            </a:r>
-          </a:p>
-          <a:p>
-            <a:pPr>
-              <a:spcAft>
-                <a:spcPts val="1000"/>
-              </a:spcAft>
-              <a:defRPr sz="1900">
-                <a:solidFill>
-                  <a:srgbClr val="E2E8F0"/>
-                </a:solidFill>
-                <a:latin typeface="Inter"/>
-              </a:defRPr>
-            </a:pPr>
-            <a:r>
-              <a:t>• Buxhet prej dhjetëra mijëra eurosh me agjenci të jashtme.</a:t>
-            </a:r>
-          </a:p>
-          <a:p>
-            <a:pPr>
-              <a:spcAft>
-                <a:spcPts val="1000"/>
-              </a:spcAft>
-              <a:defRPr sz="1900">
-                <a:solidFill>
-                  <a:srgbClr val="E2E8F0"/>
-                </a:solidFill>
-                <a:latin typeface="Inter"/>
-              </a:defRPr>
-            </a:pPr>
-            <a:r>
-              <a:t>• Ekipe të mëdha: zhvillues iOS, Android dhe backend të ndarë.</a:t>
-            </a:r>
-          </a:p>
-          <a:p>
-            <a:pPr>
-              <a:spcAft>
-                <a:spcPts val="1000"/>
-              </a:spcAft>
-              <a:defRPr sz="1900">
-                <a:solidFill>
-                  <a:srgbClr val="E2E8F0"/>
-                </a:solidFill>
-                <a:latin typeface="Inter"/>
-              </a:defRPr>
-            </a:pPr>
-            <a:r>
-              <a:t>• Serverë të shtrenjtë dhe mirëmbajtje komplekse.</a:t>
-            </a:r>
-          </a:p>
-          <a:p>
-            <a:pPr>
-              <a:spcAft>
-                <a:spcPts val="1000"/>
-              </a:spcAft>
-              <a:defRPr sz="1900">
-                <a:solidFill>
-                  <a:srgbClr val="E2E8F0"/>
-                </a:solidFill>
-                <a:latin typeface="Inter"/>
-              </a:defRPr>
-            </a:pPr>
-            <a:r>
-              <a:t>• Rezultati: Shumica e ideve të mira mbeteshin vetëm në letër!</a:t>
+              <a:t>Shfaq kartelat me orën e nisjes, shoferin, modelin e veturës, vendet e lira dhe çmimin simbolik.</a:t>
+            </a:r>
+          </a:p>
+          <a:p>
+            <a:pPr>
+              <a:defRPr sz="1200">
+                <a:solidFill>
+                  <a:srgbClr val="B4C3D7"/>
+                </a:solidFill>
+                <a:latin typeface="Inter"/>
+              </a:defRPr>
+            </a:pPr>
+            <a:r>
+              <a:t>Rregulli: Çdo pamje zgjidh vetëm 1 pyetje të përdoruesit.</a:t>
             </a:r>
           </a:p>
         </p:txBody>
@@ -12198,8 +12901,8 @@
         </p:nvSpPr>
         <p:spPr>
           <a:xfrm>
-            <a:off x="6309360" y="2011680"/>
-            <a:ext cx="5120640" cy="4389120"/>
+            <a:off x="4389120" y="1920240"/>
+            <a:ext cx="3383280" cy="4389120"/>
           </a:xfrm>
           <a:prstGeom prst="roundRect">
             <a:avLst/>
@@ -12207,9 +12910,9 @@
           <a:solidFill>
             <a:srgbClr val="141E34"/>
           </a:solidFill>
-          <a:ln w="31750">
+          <a:ln w="25400">
             <a:solidFill>
-              <a:srgbClr val="10B981"/>
+              <a:srgbClr val="6366F1"/>
             </a:solidFill>
           </a:ln>
         </p:spPr>
@@ -12243,8 +12946,8 @@
         </p:nvSpPr>
         <p:spPr>
           <a:xfrm>
-            <a:off x="6583680" y="2286000"/>
-            <a:ext cx="4572000" cy="3840480"/>
+            <a:off x="4572000" y="2103120"/>
+            <a:ext cx="3017520" cy="4023360"/>
           </a:xfrm>
           <a:prstGeom prst="rect">
             <a:avLst/>
@@ -12259,9 +12962,138 @@
           <a:p>
             <a:pPr>
               <a:spcAft>
+                <a:spcPts val="600"/>
+              </a:spcAft>
+              <a:defRPr sz="1300" b="1">
+                <a:solidFill>
+                  <a:srgbClr val="6366F1"/>
+                </a:solidFill>
+                <a:latin typeface="Inter"/>
+              </a:defRPr>
+            </a:pPr>
+            <a:r>
+              <a:t>EKRANI 2</a:t>
+            </a:r>
+          </a:p>
+          <a:p>
+            <a:pPr>
+              <a:spcAft>
+                <a:spcPts val="1400"/>
+              </a:spcAft>
+              <a:defRPr sz="1800" b="1">
+                <a:solidFill>
+                  <a:srgbClr val="FFFFFF"/>
+                </a:solidFill>
+                <a:latin typeface="Inter"/>
+              </a:defRPr>
+            </a:pPr>
+            <a:r>
+              <a:t>Pamja 2: Detaji i Veturës</a:t>
+            </a:r>
+          </a:p>
+          <a:p>
+            <a:pPr>
+              <a:spcAft>
                 <a:spcPts val="1600"/>
               </a:spcAft>
-              <a:defRPr sz="2500" b="1">
+              <a:defRPr sz="1500">
+                <a:solidFill>
+                  <a:srgbClr val="E2E8F0"/>
+                </a:solidFill>
+                <a:latin typeface="Inter"/>
+              </a:defRPr>
+            </a:pPr>
+            <a:r>
+              <a:t>Shfaq vendin ekzakt të takimit, orën e kthimit dhe rregullat e veturës (jo duhan, valixhe të vogla).</a:t>
+            </a:r>
+          </a:p>
+          <a:p>
+            <a:pPr>
+              <a:defRPr sz="1200">
+                <a:solidFill>
+                  <a:srgbClr val="B4C3D7"/>
+                </a:solidFill>
+                <a:latin typeface="Inter"/>
+              </a:defRPr>
+            </a:pPr>
+            <a:r>
+              <a:t>Rregulli: Çdo pamje zgjidh vetëm 1 pyetje të përdoruesit.</a:t>
+            </a:r>
+          </a:p>
+        </p:txBody>
+      </p:sp>
+      <p:sp>
+        <p:nvSpPr>
+          <p:cNvPr id="10" name="Rounded Rectangle 9"/>
+          <p:cNvSpPr/>
+          <p:nvPr/>
+        </p:nvSpPr>
+        <p:spPr>
+          <a:xfrm>
+            <a:off x="8046720" y="1920240"/>
+            <a:ext cx="3383280" cy="4389120"/>
+          </a:xfrm>
+          <a:prstGeom prst="roundRect">
+            <a:avLst/>
+          </a:prstGeom>
+          <a:solidFill>
+            <a:srgbClr val="141E34"/>
+          </a:solidFill>
+          <a:ln w="25400">
+            <a:solidFill>
+              <a:srgbClr val="10B981"/>
+            </a:solidFill>
+          </a:ln>
+        </p:spPr>
+        <p:style>
+          <a:lnRef idx="1">
+            <a:schemeClr val="accent1"/>
+          </a:lnRef>
+          <a:fillRef idx="3">
+            <a:schemeClr val="accent1"/>
+          </a:fillRef>
+          <a:effectRef idx="2">
+            <a:schemeClr val="accent1"/>
+          </a:effectRef>
+          <a:fontRef idx="minor">
+            <a:schemeClr val="lt1"/>
+          </a:fontRef>
+        </p:style>
+        <p:txBody>
+          <a:bodyPr rtlCol="0" anchor="ctr"/>
+          <a:lstStyle/>
+          <a:p>
+            <a:pPr algn="ctr"/>
+          </a:p>
+        </p:txBody>
+      </p:sp>
+      <p:sp>
+        <p:nvSpPr>
+          <p:cNvPr id="11" name="TextBox 10"/>
+          <p:cNvSpPr txBox="1"/>
+          <p:nvPr/>
+        </p:nvSpPr>
+        <p:spPr>
+          <a:xfrm>
+            <a:off x="8229600" y="2103120"/>
+            <a:ext cx="3017520" cy="4023360"/>
+          </a:xfrm>
+          <a:prstGeom prst="rect">
+            <a:avLst/>
+          </a:prstGeom>
+          <a:noFill/>
+        </p:spPr>
+        <p:txBody>
+          <a:bodyPr wrap="square">
+            <a:spAutoFit/>
+          </a:bodyPr>
+          <a:lstStyle/>
+          <a:p>
+            <a:pPr>
+              <a:spcAft>
+                <a:spcPts val="600"/>
+              </a:spcAft>
+              <a:defRPr sz="1300" b="1">
                 <a:solidFill>
                   <a:srgbClr val="10B981"/>
                 </a:solidFill>
@@ -12269,15 +13101,31 @@
               </a:defRPr>
             </a:pPr>
             <a:r>
-              <a:t>🚀 Sot: Fuqia e Inxhinierit të Ri</a:t>
+              <a:t>EKRANI 3</a:t>
             </a:r>
           </a:p>
           <a:p>
             <a:pPr>
               <a:spcAft>
-                <a:spcPts val="1000"/>
+                <a:spcPts val="1400"/>
               </a:spcAft>
-              <a:defRPr sz="1900">
+              <a:defRPr sz="1800" b="1">
+                <a:solidFill>
+                  <a:srgbClr val="FFFFFF"/>
+                </a:solidFill>
+                <a:latin typeface="Inter"/>
+              </a:defRPr>
+            </a:pPr>
+            <a:r>
+              <a:t>Pamja 3: Veprimi i Shpejtë</a:t>
+            </a:r>
+          </a:p>
+          <a:p>
+            <a:pPr>
+              <a:spcAft>
+                <a:spcPts val="1600"/>
+              </a:spcAft>
+              <a:defRPr sz="1500">
                 <a:solidFill>
                   <a:srgbClr val="E2E8F0"/>
                 </a:solidFill>
@@ -12285,71 +13133,20 @@
               </a:defRPr>
             </a:pPr>
             <a:r>
-              <a:t>• Next.js 15 PWA: Një kod i vetëm për çdo celular (iOS &amp; Android).</a:t>
-            </a:r>
-          </a:p>
-          <a:p>
-            <a:pPr>
-              <a:spcAft>
-                <a:spcPts val="1000"/>
-              </a:spcAft>
-              <a:defRPr sz="1900">
-                <a:solidFill>
-                  <a:srgbClr val="E2E8F0"/>
-                </a:solidFill>
-                <a:latin typeface="Inter"/>
-              </a:defRPr>
-            </a:pPr>
-            <a:r>
-              <a:t>• GitHub Copilot: Partner programues që shkruan kodin 3x më shpejt.</a:t>
-            </a:r>
-          </a:p>
-          <a:p>
-            <a:pPr>
-              <a:spcAft>
-                <a:spcPts val="1000"/>
-              </a:spcAft>
-              <a:defRPr sz="1900">
-                <a:solidFill>
-                  <a:srgbClr val="E2E8F0"/>
-                </a:solidFill>
-                <a:latin typeface="Inter"/>
-              </a:defRPr>
-            </a:pPr>
-            <a:r>
-              <a:t>• Supabase Cloud: Baza e të dhënave dhe Auth me email AAB falas.</a:t>
-            </a:r>
-          </a:p>
-          <a:p>
-            <a:pPr>
-              <a:spcAft>
-                <a:spcPts val="1000"/>
-              </a:spcAft>
-              <a:defRPr sz="1900">
-                <a:solidFill>
-                  <a:srgbClr val="E2E8F0"/>
-                </a:solidFill>
-                <a:latin typeface="Inter"/>
-              </a:defRPr>
-            </a:pPr>
-            <a:r>
-              <a:t>• Vercel Deployment: Publikim global në internet me një 'git push'.</a:t>
-            </a:r>
-          </a:p>
-          <a:p>
-            <a:pPr>
-              <a:spcAft>
-                <a:spcPts val="1000"/>
-              </a:spcAft>
-              <a:defRPr sz="1900">
-                <a:solidFill>
-                  <a:srgbClr val="E2E8F0"/>
-                </a:solidFill>
-                <a:latin typeface="Inter"/>
-              </a:defRPr>
-            </a:pPr>
-            <a:r>
-              <a:t>• Rezultati: Ju e ktheni skicën në produkt funksional brenda semestrit!</a:t>
+              <a:t>Buton i qartë 'Rezervo Vend'. Konfirmimi shfaqet në çast dhe vendi zbritet live pa rifreskuar.</a:t>
+            </a:r>
+          </a:p>
+          <a:p>
+            <a:pPr>
+              <a:defRPr sz="1200">
+                <a:solidFill>
+                  <a:srgbClr val="B4C3D7"/>
+                </a:solidFill>
+                <a:latin typeface="Inter"/>
+              </a:defRPr>
+            </a:pPr>
+            <a:r>
+              <a:t>Rregulli: Çdo pamje zgjidh vetëm 1 pyetje të përdoruesit.</a:t>
             </a:r>
           </a:p>
         </p:txBody>
@@ -12438,7 +13235,7 @@
           <a:lstStyle/>
           <a:p>
             <a:pPr>
-              <a:defRPr sz="1500" b="1">
+              <a:defRPr sz="1400" b="1">
                 <a:solidFill>
                   <a:srgbClr val="38BDF8"/>
                 </a:solidFill>
@@ -12446,7 +13243,7 @@
               </a:defRPr>
             </a:pPr>
             <a:r>
-              <a:t>TEKNOLOGJIA KRYESORE</a:t>
+              <a:t>ARKITEKTURA E SISTEMIT</a:t>
             </a:r>
           </a:p>
         </p:txBody>
@@ -12459,7 +13256,7 @@
         </p:nvSpPr>
         <p:spPr>
           <a:xfrm>
-            <a:off x="731520" y="685800"/>
+            <a:off x="731520" y="658368"/>
             <a:ext cx="10698480" cy="777240"/>
           </a:xfrm>
           <a:prstGeom prst="rect">
@@ -12474,7 +13271,7 @@
           <a:lstStyle/>
           <a:p>
             <a:pPr>
-              <a:defRPr sz="3600" b="1">
+              <a:defRPr sz="3400" b="1">
                 <a:solidFill>
                   <a:srgbClr val="FFFFFF"/>
                 </a:solidFill>
@@ -12482,7 +13279,7 @@
               </a:defRPr>
             </a:pPr>
             <a:r>
-              <a:t>Pse Progressive Web Apps (PWA)?</a:t>
+              <a:t>Arkitektura 2026: Ku Mbaron Shfletuesi dhe Ku Fillon Siguria?</a:t>
             </a:r>
           </a:p>
         </p:txBody>
@@ -12495,7 +13292,7 @@
         </p:nvSpPr>
         <p:spPr>
           <a:xfrm>
-            <a:off x="731520" y="1444752"/>
+            <a:off x="731520" y="1417320"/>
             <a:ext cx="10698480" cy="502920"/>
           </a:xfrm>
           <a:prstGeom prst="rect">
@@ -12510,7 +13307,7 @@
           <a:lstStyle/>
           <a:p>
             <a:pPr>
-              <a:defRPr sz="2100">
+              <a:defRPr sz="1900">
                 <a:solidFill>
                   <a:srgbClr val="E2E8F0"/>
                 </a:solidFill>
@@ -12518,7 +13315,7 @@
               </a:defRPr>
             </a:pPr>
             <a:r>
-              <a:t>Kombinimi më i fuqishëm i uebit dhe aplikacioneve celulare pa kufizime.</a:t>
+              <a:t>Asnjëherë mos i besoni të dhënave që vijnë nga shfletuesi i celularit.</a:t>
             </a:r>
           </a:p>
         </p:txBody>
@@ -12531,7 +13328,7 @@
         </p:nvSpPr>
         <p:spPr>
           <a:xfrm>
-            <a:off x="731520" y="2011680"/>
+            <a:off x="731520" y="1920240"/>
             <a:ext cx="3383280" cy="4389120"/>
           </a:xfrm>
           <a:prstGeom prst="roundRect">
@@ -12540,9 +13337,9 @@
           <a:solidFill>
             <a:srgbClr val="141E34"/>
           </a:solidFill>
-          <a:ln w="31750">
+          <a:ln w="25400">
             <a:solidFill>
-              <a:srgbClr val="38BDF8"/>
+              <a:srgbClr val="F59E0B"/>
             </a:solidFill>
           </a:ln>
         </p:spPr>
@@ -12576,7 +13373,7 @@
         </p:nvSpPr>
         <p:spPr>
           <a:xfrm>
-            <a:off x="914400" y="2194560"/>
+            <a:off x="914400" y="2103120"/>
             <a:ext cx="3017520" cy="4023360"/>
           </a:xfrm>
           <a:prstGeom prst="rect">
@@ -12591,26 +13388,36 @@
           <a:lstStyle/>
           <a:p>
             <a:pPr>
+              <a:defRPr sz="1800" b="1">
+                <a:solidFill>
+                  <a:srgbClr val="F59E0B"/>
+                </a:solidFill>
+                <a:latin typeface="Inter"/>
+              </a:defRPr>
+            </a:pPr>
+            <a:r>
+              <a:t>1. Shfletuesi Mobile (Client)</a:t>
+            </a:r>
+          </a:p>
+          <a:p>
+            <a:pPr>
               <a:spcAft>
-                <a:spcPts val="1600"/>
+                <a:spcPts val="1400"/>
               </a:spcAft>
-              <a:defRPr sz="2300" b="1">
-                <a:solidFill>
-                  <a:srgbClr val="FFFFFF"/>
-                </a:solidFill>
-                <a:latin typeface="Inter"/>
-              </a:defRPr>
-            </a:pPr>
-            <a:r>
-              <a:t>⚡ Pa Instalime nga App Store</a:t>
-            </a:r>
-          </a:p>
-          <a:p>
-            <a:pPr>
-              <a:spcAft>
-                <a:spcPts val="1200"/>
-              </a:spcAft>
-              <a:defRPr sz="1800">
+              <a:defRPr sz="1300">
+                <a:solidFill>
+                  <a:srgbClr val="B4C3D7"/>
+                </a:solidFill>
+                <a:latin typeface="Inter"/>
+              </a:defRPr>
+            </a:pPr>
+            <a:r>
+              <a:t>Zonë e Pabesuar (Untrusted)</a:t>
+            </a:r>
+          </a:p>
+          <a:p>
+            <a:pPr>
+              <a:defRPr sz="1500">
                 <a:solidFill>
                   <a:srgbClr val="E2E8F0"/>
                 </a:solidFill>
@@ -12618,39 +13425,7 @@
               </a:defRPr>
             </a:pPr>
             <a:r>
-              <a:t>• Studenti hap vetëm linkun në shfletues.</a:t>
-            </a:r>
-          </a:p>
-          <a:p>
-            <a:pPr>
-              <a:spcAft>
-                <a:spcPts val="1200"/>
-              </a:spcAft>
-              <a:defRPr sz="1800">
-                <a:solidFill>
-                  <a:srgbClr val="E2E8F0"/>
-                </a:solidFill>
-                <a:latin typeface="Inter"/>
-              </a:defRPr>
-            </a:pPr>
-            <a:r>
-              <a:t>• Shtohet në Home Screen me një prekje brenda 2 sekondave.</a:t>
-            </a:r>
-          </a:p>
-          <a:p>
-            <a:pPr>
-              <a:spcAft>
-                <a:spcPts val="1200"/>
-              </a:spcAft>
-              <a:defRPr sz="1800">
-                <a:solidFill>
-                  <a:srgbClr val="E2E8F0"/>
-                </a:solidFill>
-                <a:latin typeface="Inter"/>
-              </a:defRPr>
-            </a:pPr>
-            <a:r>
-              <a:t>• Zë më pak se 2MB memorie në telefon (krahasuar me 150MB të app-eve native).</a:t>
+              <a:t>Renderon UI me React 19, validon fushat para dërgimit dhe menaxhon Service Worker-in për offline cache.</a:t>
             </a:r>
           </a:p>
         </p:txBody>
@@ -12663,7 +13438,7 @@
         </p:nvSpPr>
         <p:spPr>
           <a:xfrm>
-            <a:off x="4389120" y="2011680"/>
+            <a:off x="4389120" y="1920240"/>
             <a:ext cx="3383280" cy="4389120"/>
           </a:xfrm>
           <a:prstGeom prst="roundRect">
@@ -12672,9 +13447,9 @@
           <a:solidFill>
             <a:srgbClr val="141E34"/>
           </a:solidFill>
-          <a:ln w="31750">
+          <a:ln w="25400">
             <a:solidFill>
-              <a:srgbClr val="10B981"/>
+              <a:srgbClr val="6366F1"/>
             </a:solidFill>
           </a:ln>
         </p:spPr>
@@ -12708,7 +13483,7 @@
         </p:nvSpPr>
         <p:spPr>
           <a:xfrm>
-            <a:off x="4572000" y="2194560"/>
+            <a:off x="4572000" y="2103120"/>
             <a:ext cx="3017520" cy="4023360"/>
           </a:xfrm>
           <a:prstGeom prst="rect">
@@ -12723,26 +13498,36 @@
           <a:lstStyle/>
           <a:p>
             <a:pPr>
+              <a:defRPr sz="1800" b="1">
+                <a:solidFill>
+                  <a:srgbClr val="6366F1"/>
+                </a:solidFill>
+                <a:latin typeface="Inter"/>
+              </a:defRPr>
+            </a:pPr>
+            <a:r>
+              <a:t>2. Next.js 15 Server (Vercel Edge)</a:t>
+            </a:r>
+          </a:p>
+          <a:p>
+            <a:pPr>
               <a:spcAft>
-                <a:spcPts val="1600"/>
+                <a:spcPts val="1400"/>
               </a:spcAft>
-              <a:defRPr sz="2300" b="1">
-                <a:solidFill>
-                  <a:srgbClr val="FFFFFF"/>
-                </a:solidFill>
-                <a:latin typeface="Inter"/>
-              </a:defRPr>
-            </a:pPr>
-            <a:r>
-              <a:t>📶 Funksionon Edhe me Rrjet të Dobët</a:t>
-            </a:r>
-          </a:p>
-          <a:p>
-            <a:pPr>
-              <a:spcAft>
-                <a:spcPts val="1200"/>
-              </a:spcAft>
-              <a:defRPr sz="1800">
+              <a:defRPr sz="1300">
+                <a:solidFill>
+                  <a:srgbClr val="B4C3D7"/>
+                </a:solidFill>
+                <a:latin typeface="Inter"/>
+              </a:defRPr>
+            </a:pPr>
+            <a:r>
+              <a:t>Zonë e Kontrolluar (Trusted)</a:t>
+            </a:r>
+          </a:p>
+          <a:p>
+            <a:pPr>
+              <a:defRPr sz="1500">
                 <a:solidFill>
                   <a:srgbClr val="E2E8F0"/>
                 </a:solidFill>
@@ -12750,39 +13535,7 @@
               </a:defRPr>
             </a:pPr>
             <a:r>
-              <a:t>• Rruga mes qyteteve shpesh ka zona me mbulim të dobët interneti.</a:t>
-            </a:r>
-          </a:p>
-          <a:p>
-            <a:pPr>
-              <a:spcAft>
-                <a:spcPts val="1200"/>
-              </a:spcAft>
-              <a:defRPr sz="1800">
-                <a:solidFill>
-                  <a:srgbClr val="E2E8F0"/>
-                </a:solidFill>
-                <a:latin typeface="Inter"/>
-              </a:defRPr>
-            </a:pPr>
-            <a:r>
-              <a:t>• Service Worker ruan të dhënat e fundit lokalisht në telefon.</a:t>
-            </a:r>
-          </a:p>
-          <a:p>
-            <a:pPr>
-              <a:spcAft>
-                <a:spcPts val="1200"/>
-              </a:spcAft>
-              <a:defRPr sz="1800">
-                <a:solidFill>
-                  <a:srgbClr val="E2E8F0"/>
-                </a:solidFill>
-                <a:latin typeface="Inter"/>
-              </a:defRPr>
-            </a:pPr>
-            <a:r>
-              <a:t>• Sinkronizohet automatikisht sapo rifitohet lidhja 4G/5G.</a:t>
+              <a:t>Ekzekuton Server Actions, ruan çelësat sekretë dhe validon identitetin e studentit para se të prekë bazën.</a:t>
             </a:r>
           </a:p>
         </p:txBody>
@@ -12795,7 +13548,7 @@
         </p:nvSpPr>
         <p:spPr>
           <a:xfrm>
-            <a:off x="8046720" y="2011680"/>
+            <a:off x="8046720" y="1920240"/>
             <a:ext cx="3383280" cy="4389120"/>
           </a:xfrm>
           <a:prstGeom prst="roundRect">
@@ -12804,9 +13557,9 @@
           <a:solidFill>
             <a:srgbClr val="141E34"/>
           </a:solidFill>
-          <a:ln w="31750">
+          <a:ln w="25400">
             <a:solidFill>
-              <a:srgbClr val="6366F1"/>
+              <a:srgbClr val="10B981"/>
             </a:solidFill>
           </a:ln>
         </p:spPr>
@@ -12840,7 +13593,7 @@
         </p:nvSpPr>
         <p:spPr>
           <a:xfrm>
-            <a:off x="8229600" y="2194560"/>
+            <a:off x="8229600" y="2103120"/>
             <a:ext cx="3017520" cy="4023360"/>
           </a:xfrm>
           <a:prstGeom prst="rect">
@@ -12855,26 +13608,36 @@
           <a:lstStyle/>
           <a:p>
             <a:pPr>
+              <a:defRPr sz="1800" b="1">
+                <a:solidFill>
+                  <a:srgbClr val="10B981"/>
+                </a:solidFill>
+                <a:latin typeface="Inter"/>
+              </a:defRPr>
+            </a:pPr>
+            <a:r>
+              <a:t>3. Baza Supabase (PostgreSQL)</a:t>
+            </a:r>
+          </a:p>
+          <a:p>
+            <a:pPr>
               <a:spcAft>
-                <a:spcPts val="1600"/>
+                <a:spcPts val="1400"/>
               </a:spcAft>
-              <a:defRPr sz="2300" b="1">
-                <a:solidFill>
-                  <a:srgbClr val="FFFFFF"/>
-                </a:solidFill>
-                <a:latin typeface="Inter"/>
-              </a:defRPr>
-            </a:pPr>
-            <a:r>
-              <a:t>📱 Qasje në Karakteristikat Celulare</a:t>
-            </a:r>
-          </a:p>
-          <a:p>
-            <a:pPr>
-              <a:spcAft>
-                <a:spcPts val="1200"/>
-              </a:spcAft>
-              <a:defRPr sz="1800">
+              <a:defRPr sz="1300">
+                <a:solidFill>
+                  <a:srgbClr val="B4C3D7"/>
+                </a:solidFill>
+                <a:latin typeface="Inter"/>
+              </a:defRPr>
+            </a:pPr>
+            <a:r>
+              <a:t>Bërthama e Sigurt (Source of Truth)</a:t>
+            </a:r>
+          </a:p>
+          <a:p>
+            <a:pPr>
+              <a:defRPr sz="1500">
                 <a:solidFill>
                   <a:srgbClr val="E2E8F0"/>
                 </a:solidFill>
@@ -12882,39 +13645,7 @@
               </a:defRPr>
             </a:pPr>
             <a:r>
-              <a:t>• Njoftime Push sapo shoferi të konfirmojë rezervimin tuaj.</a:t>
-            </a:r>
-          </a:p>
-          <a:p>
-            <a:pPr>
-              <a:spcAft>
-                <a:spcPts val="1200"/>
-              </a:spcAft>
-              <a:defRPr sz="1800">
-                <a:solidFill>
-                  <a:srgbClr val="E2E8F0"/>
-                </a:solidFill>
-                <a:latin typeface="Inter"/>
-              </a:defRPr>
-            </a:pPr>
-            <a:r>
-              <a:t>• Gjeolokacion për të parë distancën deri te pika e takimit.</a:t>
-            </a:r>
-          </a:p>
-          <a:p>
-            <a:pPr>
-              <a:spcAft>
-                <a:spcPts val="1200"/>
-              </a:spcAft>
-              <a:defRPr sz="1800">
-                <a:solidFill>
-                  <a:srgbClr val="E2E8F0"/>
-                </a:solidFill>
-                <a:latin typeface="Inter"/>
-              </a:defRPr>
-            </a:pPr>
-            <a:r>
-              <a:t>• Telefonatë ose mesazh direkt me 1-prekje nga ekrani.</a:t>
+              <a:t>Politikat RLS (Row Level Security) garantojnë që studenti lexon e modifikon vetëm të dhënat e lejuara zyrtarisht.</a:t>
             </a:r>
           </a:p>
         </p:txBody>

--- a/Jave1_Hyrje_Nextjs_PWA_Copilot_2026.pptx
+++ b/Jave1_Hyrje_Nextjs_PWA_Copilot_2026.pptx
@@ -4,9 +4,6 @@
   <p:sldMasterIdLst>
     <p:sldMasterId xmlns:r="http://schemas.openxmlformats.org/officeDocument/2006/relationships" id="2147483648" r:id="R23ed594d3c874fff"/>
   </p:sldMasterIdLst>
-  <p:notesMasterIdLst>
-    <p:notesMasterId xmlns:r="http://schemas.openxmlformats.org/officeDocument/2006/relationships" r:id="Ra1f16731bfa54551"/>
-  </p:notesMasterIdLst>
   <p:sldIdLst>
     <p:sldId xmlns:r="http://schemas.openxmlformats.org/officeDocument/2006/relationships" id="256" r:id="R680531d7c8d64170"/>
     <p:sldId xmlns:r="http://schemas.openxmlformats.org/officeDocument/2006/relationships" id="257" r:id="Rff792a8fc6b64130"/>
@@ -41,5843 +38,6 @@
   <p:sldSz cx="12192000" cy="6858000"/>
   <p:notesSz cx="6858000" cy="9144000"/>
 </p:presentation>
-</file>
-
-<file path=ppt/notesMasters/notesMaster1.xml><?xml version="1.0" encoding="utf-8"?>
-<p:notesMaster xmlns:p="http://schemas.openxmlformats.org/presentationml/2006/main">
-  <p:cSld>
-    <p:bg>
-      <p:bgRef idx="1001">
-        <a:schemeClr xmlns:a="http://schemas.openxmlformats.org/drawingml/2006/main" val="bg1"/>
-      </p:bgRef>
-    </p:bg>
-    <p:spTree>
-      <p:nvGrpSpPr>
-        <p:cNvPr id="1" name=""/>
-        <p:cNvGrpSpPr/>
-        <p:nvPr/>
-      </p:nvGrpSpPr>
-      <p:grpSpPr>
-        <a:xfrm xmlns:a="http://schemas.openxmlformats.org/drawingml/2006/main"/>
-      </p:grpSpPr>
-      <p:sp>
-        <p:nvSpPr>
-          <p:cNvPr id="2" name="Header Placeholder"/>
-          <p:cNvSpPr/>
-          <p:nvPr>
-            <p:ph type="hdr" sz="quarter"/>
-          </p:nvPr>
-        </p:nvSpPr>
-        <p:spPr>
-          <a:prstGeom xmlns:a="http://schemas.openxmlformats.org/drawingml/2006/main" prst="rect">
-            <a:avLst/>
-          </a:prstGeom>
-        </p:spPr>
-        <p:txBody>
-          <a:bodyPr xmlns:a="http://schemas.openxmlformats.org/drawingml/2006/main"/>
-          <a:lstStyle xmlns:a="http://schemas.openxmlformats.org/drawingml/2006/main"/>
-          <a:p xmlns:a="http://schemas.openxmlformats.org/drawingml/2006/main"/>
-        </p:txBody>
-      </p:sp>
-      <p:sp>
-        <p:nvSpPr>
-          <p:cNvPr id="3" name="Date Placeholder"/>
-          <p:cNvSpPr/>
-          <p:nvPr>
-            <p:ph type="dt" sz="quarter" idx="1"/>
-          </p:nvPr>
-        </p:nvSpPr>
-        <p:spPr>
-          <a:prstGeom xmlns:a="http://schemas.openxmlformats.org/drawingml/2006/main" prst="rect">
-            <a:avLst/>
-          </a:prstGeom>
-        </p:spPr>
-        <p:txBody>
-          <a:bodyPr xmlns:a="http://schemas.openxmlformats.org/drawingml/2006/main"/>
-          <a:lstStyle xmlns:a="http://schemas.openxmlformats.org/drawingml/2006/main"/>
-          <a:p xmlns:a="http://schemas.openxmlformats.org/drawingml/2006/main"/>
-        </p:txBody>
-      </p:sp>
-      <p:sp>
-        <p:nvSpPr>
-          <p:cNvPr id="4" name="Slide Image Placeholder"/>
-          <p:cNvSpPr/>
-          <p:nvPr>
-            <p:ph type="sldImg" idx="2"/>
-          </p:nvPr>
-        </p:nvSpPr>
-        <p:spPr>
-          <a:prstGeom xmlns:a="http://schemas.openxmlformats.org/drawingml/2006/main" prst="rect">
-            <a:avLst/>
-          </a:prstGeom>
-        </p:spPr>
-        <p:txBody>
-          <a:bodyPr xmlns:a="http://schemas.openxmlformats.org/drawingml/2006/main"/>
-          <a:lstStyle xmlns:a="http://schemas.openxmlformats.org/drawingml/2006/main"/>
-          <a:p xmlns:a="http://schemas.openxmlformats.org/drawingml/2006/main"/>
-        </p:txBody>
-      </p:sp>
-      <p:sp>
-        <p:nvSpPr>
-          <p:cNvPr id="5" name="Notes Placeholder"/>
-          <p:cNvSpPr/>
-          <p:nvPr>
-            <p:ph type="body" sz="quarter" idx="3"/>
-          </p:nvPr>
-        </p:nvSpPr>
-        <p:spPr>
-          <a:prstGeom xmlns:a="http://schemas.openxmlformats.org/drawingml/2006/main" prst="rect">
-            <a:avLst/>
-          </a:prstGeom>
-        </p:spPr>
-        <p:txBody>
-          <a:bodyPr xmlns:a="http://schemas.openxmlformats.org/drawingml/2006/main"/>
-          <a:lstStyle xmlns:a="http://schemas.openxmlformats.org/drawingml/2006/main"/>
-          <a:p xmlns:a="http://schemas.openxmlformats.org/drawingml/2006/main"/>
-        </p:txBody>
-      </p:sp>
-      <p:sp>
-        <p:nvSpPr>
-          <p:cNvPr id="6" name="Footer Placeholder"/>
-          <p:cNvSpPr/>
-          <p:nvPr>
-            <p:ph type="ftr" sz="quarter" idx="4"/>
-          </p:nvPr>
-        </p:nvSpPr>
-        <p:spPr>
-          <a:prstGeom xmlns:a="http://schemas.openxmlformats.org/drawingml/2006/main" prst="rect">
-            <a:avLst/>
-          </a:prstGeom>
-        </p:spPr>
-        <p:txBody>
-          <a:bodyPr xmlns:a="http://schemas.openxmlformats.org/drawingml/2006/main"/>
-          <a:lstStyle xmlns:a="http://schemas.openxmlformats.org/drawingml/2006/main"/>
-          <a:p xmlns:a="http://schemas.openxmlformats.org/drawingml/2006/main"/>
-        </p:txBody>
-      </p:sp>
-      <p:sp>
-        <p:nvSpPr>
-          <p:cNvPr id="7" name="Slide Number Placeholder"/>
-          <p:cNvSpPr/>
-          <p:nvPr>
-            <p:ph type="sldNum" sz="quarter" idx="5"/>
-          </p:nvPr>
-        </p:nvSpPr>
-        <p:spPr>
-          <a:prstGeom xmlns:a="http://schemas.openxmlformats.org/drawingml/2006/main" prst="rect">
-            <a:avLst/>
-          </a:prstGeom>
-        </p:spPr>
-        <p:txBody>
-          <a:bodyPr xmlns:a="http://schemas.openxmlformats.org/drawingml/2006/main"/>
-          <a:lstStyle xmlns:a="http://schemas.openxmlformats.org/drawingml/2006/main"/>
-          <a:p xmlns:a="http://schemas.openxmlformats.org/drawingml/2006/main"/>
-        </p:txBody>
-      </p:sp>
-    </p:spTree>
-  </p:cSld>
-  <p:clrMap bg1="lt1" tx1="dk1" bg2="lt2" tx2="dk2" accent1="accent1" accent2="accent2" accent3="accent3" accent4="accent4" accent5="accent5" accent6="accent6" hlink="hlink" folHlink="folHlink"/>
-  <p:notesStyle>
-    <a:lvl1pPr xmlns:a="http://schemas.openxmlformats.org/drawingml/2006/main" marL="0" algn="l" defTabSz="914400" rtl="0" eaLnBrk="1" latinLnBrk="0" hangingPunct="1">
-      <a:defRPr sz="1200" kern="1200"/>
-    </a:lvl1pPr>
-  </p:notesStyle>
-</p:notesMaster>
-</file>
-
-<file path=ppt/notesMasters/theme/theme3.xml><?xml version="1.0" encoding="utf-8"?>
-<a:theme xmlns:a="http://schemas.openxmlformats.org/drawingml/2006/main" name="ChatGPT">
-  <a:themeElements>
-    <a:clrScheme name="ChatGPT">
-      <a:dk1>
-        <a:srgbClr val="000000"/>
-      </a:dk1>
-      <a:lt1>
-        <a:srgbClr val="FFFFFF"/>
-      </a:lt1>
-      <a:dk2>
-        <a:srgbClr val="0E2841"/>
-      </a:dk2>
-      <a:lt2>
-        <a:srgbClr val="E8E8E8"/>
-      </a:lt2>
-      <a:accent1>
-        <a:srgbClr val="156082"/>
-      </a:accent1>
-      <a:accent2>
-        <a:srgbClr val="E97132"/>
-      </a:accent2>
-      <a:accent3>
-        <a:srgbClr val="196B24"/>
-      </a:accent3>
-      <a:accent4>
-        <a:srgbClr val="0F9ED5"/>
-      </a:accent4>
-      <a:accent5>
-        <a:srgbClr val="A02B93"/>
-      </a:accent5>
-      <a:accent6>
-        <a:srgbClr val="4EA72E"/>
-      </a:accent6>
-      <a:hlink>
-        <a:srgbClr val="467886"/>
-      </a:hlink>
-      <a:folHlink>
-        <a:srgbClr val="96607D"/>
-      </a:folHlink>
-    </a:clrScheme>
-    <a:fontScheme name="Office">
-      <a:majorFont>
-        <a:latin typeface="Calibri Light"/>
-        <a:ea typeface="Calibri Light"/>
-        <a:cs typeface="Calibri Light"/>
-      </a:majorFont>
-      <a:minorFont>
-        <a:latin typeface="Calibri"/>
-        <a:ea typeface="Calibri"/>
-        <a:cs typeface="Calibri"/>
-      </a:minorFont>
-    </a:fontScheme>
-    <a:fmtScheme name="ChatGPT">
-      <a:fillStyleLst>
-        <a:solidFill>
-          <a:schemeClr val="phClr"/>
-        </a:solidFill>
-        <a:gradFill>
-          <a:gsLst>
-            <a:gs pos="0">
-              <a:schemeClr val="phClr">
-                <a:tint val="67000"/>
-                <a:lumMod val="110000"/>
-                <a:satMod val="105000"/>
-              </a:schemeClr>
-            </a:gs>
-            <a:gs pos="50000">
-              <a:schemeClr val="phClr">
-                <a:tint val="73000"/>
-                <a:lumMod val="105000"/>
-                <a:satMod val="103000"/>
-              </a:schemeClr>
-            </a:gs>
-            <a:gs pos="100000">
-              <a:schemeClr val="phClr">
-                <a:tint val="81000"/>
-                <a:lumMod val="105000"/>
-                <a:satMod val="109000"/>
-              </a:schemeClr>
-            </a:gs>
-          </a:gsLst>
-          <a:lin ang="5400000" scaled="0"/>
-        </a:gradFill>
-        <a:gradFill>
-          <a:gsLst>
-            <a:gs pos="0">
-              <a:schemeClr val="phClr">
-                <a:tint val="94000"/>
-                <a:lumMod val="102000"/>
-                <a:satMod val="103000"/>
-              </a:schemeClr>
-            </a:gs>
-            <a:gs pos="50000">
-              <a:schemeClr val="phClr">
-                <a:shade val="100000"/>
-                <a:lumMod val="100000"/>
-                <a:satMod val="110000"/>
-              </a:schemeClr>
-            </a:gs>
-            <a:gs pos="100000">
-              <a:schemeClr val="phClr">
-                <a:shade val="78000"/>
-                <a:lumMod val="99000"/>
-                <a:satMod val="120000"/>
-              </a:schemeClr>
-            </a:gs>
-          </a:gsLst>
-          <a:lin ang="5400000" scaled="0"/>
-        </a:gradFill>
-      </a:fillStyleLst>
-      <a:lnStyleLst>
-        <a:ln w="12700">
-          <a:solidFill>
-            <a:schemeClr val="phClr"/>
-          </a:solidFill>
-          <a:prstDash val="solid"/>
-        </a:ln>
-        <a:ln w="19050">
-          <a:solidFill>
-            <a:schemeClr val="phClr"/>
-          </a:solidFill>
-          <a:prstDash val="solid"/>
-        </a:ln>
-        <a:ln w="25400">
-          <a:solidFill>
-            <a:schemeClr val="phClr"/>
-          </a:solidFill>
-          <a:prstDash val="solid"/>
-        </a:ln>
-      </a:lnStyleLst>
-      <a:effectStyleLst>
-        <a:effectStyle>
-          <a:effectLst/>
-        </a:effectStyle>
-        <a:effectStyle>
-          <a:effectLst/>
-        </a:effectStyle>
-        <a:effectStyle>
-          <a:effectLst>
-            <a:outerShdw blurRad="57150" dist="19050" dir="5400000">
-              <a:srgbClr val="000000">
-                <a:alpha val="16000"/>
-              </a:srgbClr>
-            </a:outerShdw>
-          </a:effectLst>
-        </a:effectStyle>
-        <a:effectStyle>
-          <a:effectLst>
-            <a:outerShdw blurRad="19050" dist="9525" dir="5400000">
-              <a:srgbClr val="000000">
-                <a:alpha val="6000"/>
-              </a:srgbClr>
-            </a:outerShdw>
-          </a:effectLst>
-        </a:effectStyle>
-        <a:effectStyle>
-          <a:effectLst>
-            <a:outerShdw blurRad="28575" dist="9525" dir="5400000">
-              <a:srgbClr val="000000">
-                <a:alpha val="8000"/>
-              </a:srgbClr>
-            </a:outerShdw>
-          </a:effectLst>
-        </a:effectStyle>
-        <a:effectStyle>
-          <a:effectLst>
-            <a:outerShdw blurRad="57150" dist="19050" dir="5400000">
-              <a:srgbClr val="000000">
-                <a:alpha val="10000"/>
-              </a:srgbClr>
-            </a:outerShdw>
-          </a:effectLst>
-        </a:effectStyle>
-        <a:effectStyle>
-          <a:effectLst>
-            <a:outerShdw blurRad="114300" dist="38100" dir="5400000">
-              <a:srgbClr val="000000">
-                <a:alpha val="12000"/>
-              </a:srgbClr>
-            </a:outerShdw>
-          </a:effectLst>
-        </a:effectStyle>
-        <a:effectStyle>
-          <a:effectLst>
-            <a:outerShdw blurRad="171450" dist="57150" dir="5400000">
-              <a:srgbClr val="000000">
-                <a:alpha val="16000"/>
-              </a:srgbClr>
-            </a:outerShdw>
-          </a:effectLst>
-        </a:effectStyle>
-        <a:effectStyle>
-          <a:effectLst>
-            <a:outerShdw blurRad="266700" dist="95250" dir="5400000">
-              <a:srgbClr val="000000">
-                <a:alpha val="24000"/>
-              </a:srgbClr>
-            </a:outerShdw>
-          </a:effectLst>
-        </a:effectStyle>
-      </a:effectStyleLst>
-      <a:bgFillStyleLst>
-        <a:solidFill>
-          <a:schemeClr val="phClr"/>
-        </a:solidFill>
-        <a:solidFill>
-          <a:schemeClr val="phClr">
-            <a:tint val="95000"/>
-            <a:satMod val="170000"/>
-          </a:schemeClr>
-        </a:solidFill>
-        <a:gradFill>
-          <a:gsLst>
-            <a:gs pos="0">
-              <a:schemeClr val="phClr">
-                <a:tint val="93000"/>
-                <a:shade val="98000"/>
-                <a:lumMod val="102000"/>
-                <a:satMod val="150000"/>
-              </a:schemeClr>
-            </a:gs>
-            <a:gs pos="50000">
-              <a:schemeClr val="phClr">
-                <a:tint val="98000"/>
-                <a:shade val="90000"/>
-                <a:lumMod val="103000"/>
-                <a:satMod val="130000"/>
-              </a:schemeClr>
-            </a:gs>
-            <a:gs pos="100000">
-              <a:schemeClr val="phClr">
-                <a:shade val="63000"/>
-                <a:satMod val="120000"/>
-              </a:schemeClr>
-            </a:gs>
-          </a:gsLst>
-          <a:lin ang="5400000" scaled="0"/>
-        </a:gradFill>
-      </a:bgFillStyleLst>
-    </a:fmtScheme>
-  </a:themeElements>
-</a:theme>
-</file>
-
-<file path=ppt/notesSlides/notesSlide1.xml><?xml version="1.0" encoding="utf-8"?>
-<p:notes xmlns:p="http://schemas.openxmlformats.org/presentationml/2006/main">
-  <p:cSld>
-    <p:spTree>
-      <p:nvGrpSpPr>
-        <p:cNvPr id="1" name=""/>
-        <p:cNvGrpSpPr/>
-        <p:nvPr/>
-      </p:nvGrpSpPr>
-      <p:grpSpPr>
-        <a:xfrm xmlns:a="http://schemas.openxmlformats.org/drawingml/2006/main"/>
-      </p:grpSpPr>
-      <p:sp>
-        <p:nvSpPr>
-          <p:cNvPr id="2" name="Slide Image Placeholder 1"/>
-          <p:cNvSpPr>
-            <a:spLocks xmlns:a="http://schemas.openxmlformats.org/drawingml/2006/main" noGrp="1"/>
-          </p:cNvSpPr>
-          <p:nvPr>
-            <p:ph type="sldImg" idx="0"/>
-          </p:nvPr>
-        </p:nvSpPr>
-        <p:spPr/>
-      </p:sp>
-      <p:sp>
-        <p:nvSpPr>
-          <p:cNvPr id="3" name="Notes Placeholder 2"/>
-          <p:cNvSpPr>
-            <a:spLocks xmlns:a="http://schemas.openxmlformats.org/drawingml/2006/main" noGrp="1"/>
-          </p:cNvSpPr>
-          <p:nvPr>
-            <p:ph type="body" idx="1"/>
-          </p:nvPr>
-        </p:nvSpPr>
-        <p:spPr/>
-        <p:txBody>
-          <a:bodyPr xmlns:a="http://schemas.openxmlformats.org/drawingml/2006/main"/>
-          <a:lstStyle xmlns:a="http://schemas.openxmlformats.org/drawingml/2006/main"/>
-          <a:p xmlns:a="http://schemas.openxmlformats.org/drawingml/2006/main">
-            <a:r>
-              <a:t>LIGJËRATA 1 — PROGRAMIMI PËR PAJISJE MOBILE</a:t>
-            </a:r>
-          </a:p>
-          <a:p xmlns:a="http://schemas.openxmlformats.org/drawingml/2006/main">
-            <a:r>
-              <a:t>SLAJDI 1: Këtë semestër, ju krijoni</a:t>
-            </a:r>
-          </a:p>
-          <a:p xmlns:a="http://schemas.openxmlformats.org/drawingml/2006/main">
-            <a:r>
-              <a:t>KOHA: 00:00–03:00 | FAZA: Hyrja</a:t>
-            </a:r>
-          </a:p>
-          <a:p xmlns:a="http://schemas.openxmlformats.org/drawingml/2006/main">
-            <a:r>
-              <a:t>Koha përfshin ndërveprimin.</a:t>
-            </a:r>
-          </a:p>
-          <a:p xmlns:a="http://schemas.openxmlformats.org/drawingml/2006/main">
-            <a:r>
-              <a:t/>
-            </a:r>
-          </a:p>
-          <a:p xmlns:a="http://schemas.openxmlformats.org/drawingml/2006/main">
-            <a:r>
-              <a:t>OBJEKTIVI KOGNITIV</a:t>
-            </a:r>
-          </a:p>
-          <a:p xmlns:a="http://schemas.openxmlformats.org/drawingml/2006/main">
-            <a:r>
-              <a:t>Studenti ta shohë telefonin si vend ku mund të shpërndajë zgjidhjen e vet dhe ta lidhë kursin me një problem të përjetuar.</a:t>
-            </a:r>
-          </a:p>
-          <a:p xmlns:a="http://schemas.openxmlformats.org/drawingml/2006/main">
-            <a:r>
-              <a:t/>
-            </a:r>
-          </a:p>
-          <a:p xmlns:a="http://schemas.openxmlformats.org/drawingml/2006/main">
-            <a:r>
-              <a:t>SKENARI I PROFESORIT</a:t>
-            </a:r>
-          </a:p>
-          <a:p xmlns:a="http://schemas.openxmlformats.org/drawingml/2006/main">
-            <a:r>
-              <a:t>Nxirreni telefonin për një moment. Mendoni për aplikacionin e fundit që hapët sot. Dikush ka vendosur çfarë ju shfaqet, çfarë mund të bëni dhe çfarë ndodh kur diçka dështon.</a:t>
-            </a:r>
-          </a:p>
-          <a:p xmlns:a="http://schemas.openxmlformats.org/drawingml/2006/main">
-            <a:r>
-              <a:t/>
-            </a:r>
-          </a:p>
-          <a:p xmlns:a="http://schemas.openxmlformats.org/drawingml/2006/main">
-            <a:r>
-              <a:t>Këtë semestër, këto vendime do t’i merrni ju.</a:t>
-            </a:r>
-          </a:p>
-          <a:p xmlns:a="http://schemas.openxmlformats.org/drawingml/2006/main">
-            <a:r>
-              <a:t/>
-            </a:r>
-          </a:p>
-          <a:p xmlns:a="http://schemas.openxmlformats.org/drawingml/2006/main">
-            <a:r>
-              <a:t>Do të ndërtoni një produkt që hapet në telefon dhe zgjidh një problem të përcaktuar. Do ta provoni me përdorues dhe do të shpjegoni pse funksionon.</a:t>
-            </a:r>
-          </a:p>
-          <a:p xmlns:a="http://schemas.openxmlformats.org/drawingml/2006/main">
-            <a:r>
-              <a:t/>
-            </a:r>
-          </a:p>
-          <a:p xmlns:a="http://schemas.openxmlformats.org/drawingml/2006/main">
-            <a:r>
-              <a:t>Le ta fillojmë nga mëngjesi juaj. Kush ka pasur pasiguri sot rreth transportit, kohës së nisjes ose mbërritjes në kampus?</a:t>
-            </a:r>
-          </a:p>
-          <a:p xmlns:a="http://schemas.openxmlformats.org/drawingml/2006/main">
-            <a:r>
-              <a:t/>
-            </a:r>
-          </a:p>
-          <a:p xmlns:a="http://schemas.openxmlformats.org/drawingml/2006/main">
-            <a:r>
-              <a:t>Mbajeni mend atë moment. Ai mund të jetë fillimi i një kërkese softuerike.</a:t>
-            </a:r>
-          </a:p>
-          <a:p xmlns:a="http://schemas.openxmlformats.org/drawingml/2006/main">
-            <a:r>
-              <a:t/>
-            </a:r>
-          </a:p>
-          <a:p xmlns:a="http://schemas.openxmlformats.org/drawingml/2006/main">
-            <a:r>
-              <a:t>PYETJA INTERAKTIVE</a:t>
-            </a:r>
-          </a:p>
-          <a:p xmlns:a="http://schemas.openxmlformats.org/drawingml/2006/main">
-            <a:r>
-              <a:t>Cili ishte momenti i fundit kur telefoni juaj mund t’ju kishte ndihmuar më mirë gjatë ardhjes në fakultet?</a:t>
-            </a:r>
-          </a:p>
-          <a:p xmlns:a="http://schemas.openxmlformats.org/drawingml/2006/main">
-            <a:r>
-              <a:t/>
-            </a:r>
-          </a:p>
-          <a:p xmlns:a="http://schemas.openxmlformats.org/drawingml/2006/main">
-            <a:r>
-              <a:t>UDHËZIMI</a:t>
-            </a:r>
-          </a:p>
-          <a:p xmlns:a="http://schemas.openxmlformats.org/drawingml/2006/main">
-            <a:r>
-              <a:t>1 minutë. Merrni dy përgjigje dhe kërkoni situatë konkrete.</a:t>
-            </a:r>
-          </a:p>
-          <a:p xmlns:a="http://schemas.openxmlformats.org/drawingml/2006/main">
-            <a:r>
-              <a:t/>
-            </a:r>
-          </a:p>
-          <a:p xmlns:a="http://schemas.openxmlformats.org/drawingml/2006/main">
-            <a:r>
-              <a:t>PARALAJMËRIMI INXHINIERIK</a:t>
-            </a:r>
-          </a:p>
-          <a:p xmlns:a="http://schemas.openxmlformats.org/drawingml/2006/main">
-            <a:r>
-              <a:t>Një ndërfaqe bindëse mund të demonstrojë pamjen e një zgjidhjeje përpara se të ekzistojë zgjidhja.</a:t>
-            </a:r>
-          </a:p>
-          <a:p xmlns:a="http://schemas.openxmlformats.org/drawingml/2006/main">
-            <a:r>
-              <a:t/>
-            </a:r>
-          </a:p>
-          <a:p xmlns:a="http://schemas.openxmlformats.org/drawingml/2006/main">
-            <a:r>
-              <a:t>Të gjitha situatat, oraret, pamjet e aplikacionit dhe identitetet e RideShare janë ilustrime mësimore.</a:t>
-            </a:r>
-          </a:p>
-          <a:p xmlns:a="http://schemas.openxmlformats.org/drawingml/2006/main">
-            <a:r>
-              <a:t/>
-            </a:r>
-          </a:p>
-          <a:p xmlns:a="http://schemas.openxmlformats.org/drawingml/2006/main">
-            <a:r>
-              <a:t>Logo: https://aab-edu.net/wp-content/themes/Kolegji-AAB/dist/img/kolegji-aab-logo.svg</a:t>
-            </a:r>
-          </a:p>
-        </p:txBody>
-      </p:sp>
-      <p:sp>
-        <p:nvSpPr>
-          <p:cNvPr id="4" name="Slide Number Placeholder 3"/>
-          <p:cNvSpPr>
-            <a:spLocks xmlns:a="http://schemas.openxmlformats.org/drawingml/2006/main" noGrp="1"/>
-          </p:cNvSpPr>
-          <p:nvPr>
-            <p:ph type="sldNum" idx="5"/>
-          </p:nvPr>
-        </p:nvSpPr>
-        <p:spPr/>
-        <p:txBody>
-          <a:bodyPr xmlns:a="http://schemas.openxmlformats.org/drawingml/2006/main"/>
-          <a:lstStyle xmlns:a="http://schemas.openxmlformats.org/drawingml/2006/main"/>
-          <a:p xmlns:a="http://schemas.openxmlformats.org/drawingml/2006/main"/>
-        </p:txBody>
-      </p:sp>
-    </p:spTree>
-  </p:cSld>
-  <p:clrMapOvr>
-    <a:masterClrMapping xmlns:a="http://schemas.openxmlformats.org/drawingml/2006/main"/>
-  </p:clrMapOvr>
-</p:notes>
-</file>
-
-<file path=ppt/notesSlides/notesSlide10.xml><?xml version="1.0" encoding="utf-8"?>
-<p:notes xmlns:p="http://schemas.openxmlformats.org/presentationml/2006/main">
-  <p:cSld>
-    <p:spTree>
-      <p:nvGrpSpPr>
-        <p:cNvPr id="1" name=""/>
-        <p:cNvGrpSpPr/>
-        <p:nvPr/>
-      </p:nvGrpSpPr>
-      <p:grpSpPr>
-        <a:xfrm xmlns:a="http://schemas.openxmlformats.org/drawingml/2006/main"/>
-      </p:grpSpPr>
-      <p:sp>
-        <p:nvSpPr>
-          <p:cNvPr id="2" name="Slide Image Placeholder 1"/>
-          <p:cNvSpPr>
-            <a:spLocks xmlns:a="http://schemas.openxmlformats.org/drawingml/2006/main" noGrp="1"/>
-          </p:cNvSpPr>
-          <p:nvPr>
-            <p:ph type="sldImg" idx="0"/>
-          </p:nvPr>
-        </p:nvSpPr>
-        <p:spPr/>
-      </p:sp>
-      <p:sp>
-        <p:nvSpPr>
-          <p:cNvPr id="3" name="Notes Placeholder 2"/>
-          <p:cNvSpPr>
-            <a:spLocks xmlns:a="http://schemas.openxmlformats.org/drawingml/2006/main" noGrp="1"/>
-          </p:cNvSpPr>
-          <p:nvPr>
-            <p:ph type="body" idx="1"/>
-          </p:nvPr>
-        </p:nvSpPr>
-        <p:spPr/>
-        <p:txBody>
-          <a:bodyPr xmlns:a="http://schemas.openxmlformats.org/drawingml/2006/main"/>
-          <a:lstStyle xmlns:a="http://schemas.openxmlformats.org/drawingml/2006/main"/>
-          <a:p xmlns:a="http://schemas.openxmlformats.org/drawingml/2006/main">
-            <a:r>
-              <a:t>LIGJËRATA 1 — PROGRAMIMI PËR PAJISJE MOBILE</a:t>
-            </a:r>
-          </a:p>
-          <a:p xmlns:a="http://schemas.openxmlformats.org/drawingml/2006/main">
-            <a:r>
-              <a:t>SLAJDI 2: Para prerjes, vizatimi</a:t>
-            </a:r>
-          </a:p>
-          <a:p xmlns:a="http://schemas.openxmlformats.org/drawingml/2006/main">
-            <a:r>
-              <a:t>KOHA: 03:00–06:00 | FAZA: Hyrja</a:t>
-            </a:r>
-          </a:p>
-          <a:p xmlns:a="http://schemas.openxmlformats.org/drawingml/2006/main">
-            <a:r>
-              <a:t>Koha përfshin ndërveprimin.</a:t>
-            </a:r>
-          </a:p>
-          <a:p xmlns:a="http://schemas.openxmlformats.org/drawingml/2006/main">
-            <a:r>
-              <a:t/>
-            </a:r>
-          </a:p>
-          <a:p xmlns:a="http://schemas.openxmlformats.org/drawingml/2006/main">
-            <a:r>
-              <a:t>OBJEKTIVI KOGNITIV</a:t>
-            </a:r>
-          </a:p>
-          <a:p xmlns:a="http://schemas.openxmlformats.org/drawingml/2006/main">
-            <a:r>
-              <a:t>Studenti të kuptojë se kërkesat dhe kufizimet paraprijnë ndërtimin, ndërsa specifikimi mund të përmirësohet gjatë punës.</a:t>
-            </a:r>
-          </a:p>
-          <a:p xmlns:a="http://schemas.openxmlformats.org/drawingml/2006/main">
-            <a:r>
-              <a:t/>
-            </a:r>
-          </a:p>
-          <a:p xmlns:a="http://schemas.openxmlformats.org/drawingml/2006/main">
-            <a:r>
-              <a:t>SKENARI I PROFESORIT</a:t>
-            </a:r>
-          </a:p>
-          <a:p xmlns:a="http://schemas.openxmlformats.org/drawingml/2006/main">
-            <a:r>
-              <a:t>Imagjinoni një punishte mobiliesh në Kosovë. Klienti kërkon një karrige. Mjeshtri pyet: për kë është, çfarë ngarkese duhet të mbajë dhe ku do të përdoret?</a:t>
-            </a:r>
-          </a:p>
-          <a:p xmlns:a="http://schemas.openxmlformats.org/drawingml/2006/main">
-            <a:r>
-              <a:t/>
-            </a:r>
-          </a:p>
-          <a:p xmlns:a="http://schemas.openxmlformats.org/drawingml/2006/main">
-            <a:r>
-              <a:t>Përpara prerjes, vizatimi përcakton dimensionet dhe tolerancat. Një lidhje që nuk përshtatet mund ta bëjë të pavlefshëm montimin.</a:t>
-            </a:r>
-          </a:p>
-          <a:p xmlns:a="http://schemas.openxmlformats.org/drawingml/2006/main">
-            <a:r>
-              <a:t/>
-            </a:r>
-          </a:p>
-          <a:p xmlns:a="http://schemas.openxmlformats.org/drawingml/2006/main">
-            <a:r>
-              <a:t>Edhe në softuer kemi lidhje dhe kufizime. Kush kërkon vendin? Kush e miraton? Çfarë ndodh kur nuk ka më vende?</a:t>
-            </a:r>
-          </a:p>
-          <a:p xmlns:a="http://schemas.openxmlformats.org/drawingml/2006/main">
-            <a:r>
-              <a:t/>
-            </a:r>
-          </a:p>
-          <a:p xmlns:a="http://schemas.openxmlformats.org/drawingml/2006/main">
-            <a:r>
-              <a:t>PRD-ja është marrëveshja jonë fillestare për problemin dhe sjelljen e produktit. Kufijtë e besimit përcaktojnë ku kontrollohen kërkesat.</a:t>
-            </a:r>
-          </a:p>
-          <a:p xmlns:a="http://schemas.openxmlformats.org/drawingml/2006/main">
-            <a:r>
-              <a:t/>
-            </a:r>
-          </a:p>
-          <a:p xmlns:a="http://schemas.openxmlformats.org/drawingml/2006/main">
-            <a:r>
-              <a:t>Analogjia ka një kufi: softuerin e ndryshojmë shpesh kur mësojmë diçka të re. Vizatimi na orienton, provat na lejojnë ta korrigjojmë.</a:t>
-            </a:r>
-          </a:p>
-          <a:p xmlns:a="http://schemas.openxmlformats.org/drawingml/2006/main">
-            <a:r>
-              <a:t/>
-            </a:r>
-          </a:p>
-          <a:p xmlns:a="http://schemas.openxmlformats.org/drawingml/2006/main">
-            <a:r>
-              <a:t>PYETJA INTERAKTIVE</a:t>
-            </a:r>
-          </a:p>
-          <a:p xmlns:a="http://schemas.openxmlformats.org/drawingml/2006/main">
-            <a:r>
-              <a:t>Nëse karrigia duket bukur, por lidhja lëviz nën ngarkesë, a është përfunduar produkti? Cila do të ishte lidhja e dobët te RideShare?</a:t>
-            </a:r>
-          </a:p>
-          <a:p xmlns:a="http://schemas.openxmlformats.org/drawingml/2006/main">
-            <a:r>
-              <a:t/>
-            </a:r>
-          </a:p>
-          <a:p xmlns:a="http://schemas.openxmlformats.org/drawingml/2006/main">
-            <a:r>
-              <a:t>UDHËZIMI</a:t>
-            </a:r>
-          </a:p>
-          <a:p xmlns:a="http://schemas.openxmlformats.org/drawingml/2006/main">
-            <a:r>
-              <a:t>1 minutë. Lidhni një përgjigje me kërkesat e softuerit.</a:t>
-            </a:r>
-          </a:p>
-          <a:p xmlns:a="http://schemas.openxmlformats.org/drawingml/2006/main">
-            <a:r>
-              <a:t/>
-            </a:r>
-          </a:p>
-          <a:p xmlns:a="http://schemas.openxmlformats.org/drawingml/2006/main">
-            <a:r>
-              <a:t>PARALAJMËRIMI INXHINIERIK</a:t>
-            </a:r>
-          </a:p>
-          <a:p xmlns:a="http://schemas.openxmlformats.org/drawingml/2006/main">
-            <a:r>
-              <a:t>Pjesët që funksionojnë veçmas mund të dështojnë kur bashkohen.</a:t>
-            </a:r>
-          </a:p>
-          <a:p xmlns:a="http://schemas.openxmlformats.org/drawingml/2006/main">
-            <a:r>
-              <a:t/>
-            </a:r>
-          </a:p>
-          <a:p xmlns:a="http://schemas.openxmlformats.org/drawingml/2006/main">
-            <a:r>
-              <a:t>BURIM / SHËNIM</a:t>
-            </a:r>
-          </a:p>
-          <a:p xmlns:a="http://schemas.openxmlformats.org/drawingml/2006/main">
-            <a:r>
-              <a:t>Skicë konceptuale e gjeneruar me AI për këtë ligjëratë. Nuk është vizatim prodhimi dhe nuk përfaqëson një produkt real të Woodcraft Kosova.</a:t>
-            </a:r>
-          </a:p>
-          <a:p xmlns:a="http://schemas.openxmlformats.org/drawingml/2006/main">
-            <a:r>
-              <a:t/>
-            </a:r>
-          </a:p>
-          <a:p xmlns:a="http://schemas.openxmlformats.org/drawingml/2006/main">
-            <a:r>
-              <a:t>Të gjitha situatat, oraret, pamjet e aplikacionit dhe identitetet e RideShare janë ilustrime mësimore.</a:t>
-            </a:r>
-          </a:p>
-          <a:p xmlns:a="http://schemas.openxmlformats.org/drawingml/2006/main">
-            <a:r>
-              <a:t/>
-            </a:r>
-          </a:p>
-          <a:p xmlns:a="http://schemas.openxmlformats.org/drawingml/2006/main">
-            <a:r>
-              <a:t>Logo: https://aab-edu.net/wp-content/themes/Kolegji-AAB/dist/img/kolegji-aab-logo.svg</a:t>
-            </a:r>
-          </a:p>
-        </p:txBody>
-      </p:sp>
-      <p:sp>
-        <p:nvSpPr>
-          <p:cNvPr id="4" name="Slide Number Placeholder 3"/>
-          <p:cNvSpPr>
-            <a:spLocks xmlns:a="http://schemas.openxmlformats.org/drawingml/2006/main" noGrp="1"/>
-          </p:cNvSpPr>
-          <p:nvPr>
-            <p:ph type="sldNum" idx="5"/>
-          </p:nvPr>
-        </p:nvSpPr>
-        <p:spPr/>
-        <p:txBody>
-          <a:bodyPr xmlns:a="http://schemas.openxmlformats.org/drawingml/2006/main"/>
-          <a:lstStyle xmlns:a="http://schemas.openxmlformats.org/drawingml/2006/main"/>
-          <a:p xmlns:a="http://schemas.openxmlformats.org/drawingml/2006/main"/>
-        </p:txBody>
-      </p:sp>
-    </p:spTree>
-  </p:cSld>
-  <p:clrMapOvr>
-    <a:masterClrMapping xmlns:a="http://schemas.openxmlformats.org/drawingml/2006/main"/>
-  </p:clrMapOvr>
-</p:notes>
-</file>
-
-<file path=ppt/notesSlides/notesSlide11.xml><?xml version="1.0" encoding="utf-8"?>
-<p:notes xmlns:p="http://schemas.openxmlformats.org/presentationml/2006/main">
-  <p:cSld>
-    <p:spTree>
-      <p:nvGrpSpPr>
-        <p:cNvPr id="1" name=""/>
-        <p:cNvGrpSpPr/>
-        <p:nvPr/>
-      </p:nvGrpSpPr>
-      <p:grpSpPr>
-        <a:xfrm xmlns:a="http://schemas.openxmlformats.org/drawingml/2006/main"/>
-      </p:grpSpPr>
-      <p:sp>
-        <p:nvSpPr>
-          <p:cNvPr id="2" name="Slide Image Placeholder 1"/>
-          <p:cNvSpPr>
-            <a:spLocks xmlns:a="http://schemas.openxmlformats.org/drawingml/2006/main" noGrp="1"/>
-          </p:cNvSpPr>
-          <p:nvPr>
-            <p:ph type="sldImg" idx="0"/>
-          </p:nvPr>
-        </p:nvSpPr>
-        <p:spPr/>
-      </p:sp>
-      <p:sp>
-        <p:nvSpPr>
-          <p:cNvPr id="3" name="Notes Placeholder 2"/>
-          <p:cNvSpPr>
-            <a:spLocks xmlns:a="http://schemas.openxmlformats.org/drawingml/2006/main" noGrp="1"/>
-          </p:cNvSpPr>
-          <p:nvPr>
-            <p:ph type="body" idx="1"/>
-          </p:nvPr>
-        </p:nvSpPr>
-        <p:spPr/>
-        <p:txBody>
-          <a:bodyPr xmlns:a="http://schemas.openxmlformats.org/drawingml/2006/main"/>
-          <a:lstStyle xmlns:a="http://schemas.openxmlformats.org/drawingml/2006/main"/>
-          <a:p xmlns:a="http://schemas.openxmlformats.org/drawingml/2006/main">
-            <a:r>
-              <a:t>LIGJËRATA 1 — PROGRAMIMI PËR PAJISJE MOBILE</a:t>
-            </a:r>
-          </a:p>
-          <a:p xmlns:a="http://schemas.openxmlformats.org/drawingml/2006/main">
-            <a:r>
-              <a:t>SLAJDI 3: Çdo vendim kërkon provë</a:t>
-            </a:r>
-          </a:p>
-          <a:p xmlns:a="http://schemas.openxmlformats.org/drawingml/2006/main">
-            <a:r>
-              <a:t>KOHA: 06:00–10:00 | FAZA: Hyrja</a:t>
-            </a:r>
-          </a:p>
-          <a:p xmlns:a="http://schemas.openxmlformats.org/drawingml/2006/main">
-            <a:r>
-              <a:t>Koha përfshin ndërveprimin.</a:t>
-            </a:r>
-          </a:p>
-          <a:p xmlns:a="http://schemas.openxmlformats.org/drawingml/2006/main">
-            <a:r>
-              <a:t/>
-            </a:r>
-          </a:p>
-          <a:p xmlns:a="http://schemas.openxmlformats.org/drawingml/2006/main">
-            <a:r>
-              <a:t>OBJEKTIVI KOGNITIV</a:t>
-            </a:r>
-          </a:p>
-          <a:p xmlns:a="http://schemas.openxmlformats.org/drawingml/2006/main">
-            <a:r>
-              <a:t>Studenti të kuptojë ciklin e punës dhe përgjegjësinë individuale për vendimet.</a:t>
-            </a:r>
-          </a:p>
-          <a:p xmlns:a="http://schemas.openxmlformats.org/drawingml/2006/main">
-            <a:r>
-              <a:t/>
-            </a:r>
-          </a:p>
-          <a:p xmlns:a="http://schemas.openxmlformats.org/drawingml/2006/main">
-            <a:r>
-              <a:t>SKENARI I PROFESORIT</a:t>
-            </a:r>
-          </a:p>
-          <a:p xmlns:a="http://schemas.openxmlformats.org/drawingml/2006/main">
-            <a:r>
-              <a:t>Kjo është marrëveshja jonë për semestrin. Çdo projekt kalon nëpër këto pesë pika.</a:t>
-            </a:r>
-          </a:p>
-          <a:p xmlns:a="http://schemas.openxmlformats.org/drawingml/2006/main">
-            <a:r>
-              <a:t/>
-            </a:r>
-          </a:p>
-          <a:p xmlns:a="http://schemas.openxmlformats.org/drawingml/2006/main">
-            <a:r>
-              <a:t>Fillimisht përshkruani një problem që e keni vëzhguar. Pastaj formuloni çfarë besoni se mund ta përmirësojë. E ktheni atë hipotezë në kërkesa, ndërtoni një pjesë të testueshme dhe shikoni çfarë ndodhi.</a:t>
-            </a:r>
-          </a:p>
-          <a:p xmlns:a="http://schemas.openxmlformats.org/drawingml/2006/main">
-            <a:r>
-              <a:t/>
-            </a:r>
-          </a:p>
-          <a:p xmlns:a="http://schemas.openxmlformats.org/drawingml/2006/main">
-            <a:r>
-              <a:t>Nëse përdoruesi nuk e kupton zgjidhjen, kemi informacion të ri. Nëse hipoteza rrëzohet, ndryshojmë drejtim me argument.</a:t>
-            </a:r>
-          </a:p>
-          <a:p xmlns:a="http://schemas.openxmlformats.org/drawingml/2006/main">
-            <a:r>
-              <a:t/>
-            </a:r>
-          </a:p>
-          <a:p xmlns:a="http://schemas.openxmlformats.org/drawingml/2006/main">
-            <a:r>
-              <a:t>Unë do t’ju kërkoj tri gjëra vazhdimisht: ma trego, ma shpjego dhe ma provo.</a:t>
-            </a:r>
-          </a:p>
-          <a:p xmlns:a="http://schemas.openxmlformats.org/drawingml/2006/main">
-            <a:r>
-              <a:t/>
-            </a:r>
-          </a:p>
-          <a:p xmlns:a="http://schemas.openxmlformats.org/drawingml/2006/main">
-            <a:r>
-              <a:t>Ju mund të përdorni dokumentacion, bashkëpunim dhe AI. Përgjegjësia për atë që dorëzoni mbetet e juaja.</a:t>
-            </a:r>
-          </a:p>
-          <a:p xmlns:a="http://schemas.openxmlformats.org/drawingml/2006/main">
-            <a:r>
-              <a:t/>
-            </a:r>
-          </a:p>
-          <a:p xmlns:a="http://schemas.openxmlformats.org/drawingml/2006/main">
-            <a:r>
-              <a:t>PYETJA INTERAKTIVE</a:t>
-            </a:r>
-          </a:p>
-          <a:p xmlns:a="http://schemas.openxmlformats.org/drawingml/2006/main">
-            <a:r>
-              <a:t>Cila provë është më e fortë: shokëve u pëlqeu ideja apo tre persona e përfunduan detyrën pa ndihmën time? Çfarë na tregon secila?</a:t>
-            </a:r>
-          </a:p>
-          <a:p xmlns:a="http://schemas.openxmlformats.org/drawingml/2006/main">
-            <a:r>
-              <a:t/>
-            </a:r>
-          </a:p>
-          <a:p xmlns:a="http://schemas.openxmlformats.org/drawingml/2006/main">
-            <a:r>
-              <a:t>UDHËZIMI</a:t>
-            </a:r>
-          </a:p>
-          <a:p xmlns:a="http://schemas.openxmlformats.org/drawingml/2006/main">
-            <a:r>
-              <a:t>1 minutë. Kërkoni argumentin, jo vetëm zgjedhjen.</a:t>
-            </a:r>
-          </a:p>
-          <a:p xmlns:a="http://schemas.openxmlformats.org/drawingml/2006/main">
-            <a:r>
-              <a:t/>
-            </a:r>
-          </a:p>
-          <a:p xmlns:a="http://schemas.openxmlformats.org/drawingml/2006/main">
-            <a:r>
-              <a:t>PARALAJMËRIMI INXHINIERIK</a:t>
-            </a:r>
-          </a:p>
-          <a:p xmlns:a="http://schemas.openxmlformats.org/drawingml/2006/main">
-            <a:r>
-              <a:t>Miratimi verbal i një ideje nuk garanton përdorimin e produktit.</a:t>
-            </a:r>
-          </a:p>
-          <a:p xmlns:a="http://schemas.openxmlformats.org/drawingml/2006/main">
-            <a:r>
-              <a:t/>
-            </a:r>
-          </a:p>
-          <a:p xmlns:a="http://schemas.openxmlformats.org/drawingml/2006/main">
-            <a:r>
-              <a:t>Të gjitha situatat, oraret, pamjet e aplikacionit dhe identitetet e RideShare janë ilustrime mësimore.</a:t>
-            </a:r>
-          </a:p>
-          <a:p xmlns:a="http://schemas.openxmlformats.org/drawingml/2006/main">
-            <a:r>
-              <a:t/>
-            </a:r>
-          </a:p>
-          <a:p xmlns:a="http://schemas.openxmlformats.org/drawingml/2006/main">
-            <a:r>
-              <a:t>Logo: https://aab-edu.net/wp-content/themes/Kolegji-AAB/dist/img/kolegji-aab-logo.svg</a:t>
-            </a:r>
-          </a:p>
-        </p:txBody>
-      </p:sp>
-      <p:sp>
-        <p:nvSpPr>
-          <p:cNvPr id="4" name="Slide Number Placeholder 3"/>
-          <p:cNvSpPr>
-            <a:spLocks xmlns:a="http://schemas.openxmlformats.org/drawingml/2006/main" noGrp="1"/>
-          </p:cNvSpPr>
-          <p:nvPr>
-            <p:ph type="sldNum" idx="5"/>
-          </p:nvPr>
-        </p:nvSpPr>
-        <p:spPr/>
-        <p:txBody>
-          <a:bodyPr xmlns:a="http://schemas.openxmlformats.org/drawingml/2006/main"/>
-          <a:lstStyle xmlns:a="http://schemas.openxmlformats.org/drawingml/2006/main"/>
-          <a:p xmlns:a="http://schemas.openxmlformats.org/drawingml/2006/main"/>
-        </p:txBody>
-      </p:sp>
-    </p:spTree>
-  </p:cSld>
-  <p:clrMapOvr>
-    <a:masterClrMapping xmlns:a="http://schemas.openxmlformats.org/drawingml/2006/main"/>
-  </p:clrMapOvr>
-</p:notes>
-</file>
-
-<file path=ppt/notesSlides/notesSlide12.xml><?xml version="1.0" encoding="utf-8"?>
-<p:notes xmlns:p="http://schemas.openxmlformats.org/presentationml/2006/main">
-  <p:cSld>
-    <p:spTree>
-      <p:nvGrpSpPr>
-        <p:cNvPr id="1" name=""/>
-        <p:cNvGrpSpPr/>
-        <p:nvPr/>
-      </p:nvGrpSpPr>
-      <p:grpSpPr>
-        <a:xfrm xmlns:a="http://schemas.openxmlformats.org/drawingml/2006/main"/>
-      </p:grpSpPr>
-      <p:sp>
-        <p:nvSpPr>
-          <p:cNvPr id="2" name="Slide Image Placeholder 1"/>
-          <p:cNvSpPr>
-            <a:spLocks xmlns:a="http://schemas.openxmlformats.org/drawingml/2006/main" noGrp="1"/>
-          </p:cNvSpPr>
-          <p:nvPr>
-            <p:ph type="sldImg" idx="0"/>
-          </p:nvPr>
-        </p:nvSpPr>
-        <p:spPr/>
-      </p:sp>
-      <p:sp>
-        <p:nvSpPr>
-          <p:cNvPr id="3" name="Notes Placeholder 2"/>
-          <p:cNvSpPr>
-            <a:spLocks xmlns:a="http://schemas.openxmlformats.org/drawingml/2006/main" noGrp="1"/>
-          </p:cNvSpPr>
-          <p:nvPr>
-            <p:ph type="body" idx="1"/>
-          </p:nvPr>
-        </p:nvSpPr>
-        <p:spPr/>
-        <p:txBody>
-          <a:bodyPr xmlns:a="http://schemas.openxmlformats.org/drawingml/2006/main"/>
-          <a:lstStyle xmlns:a="http://schemas.openxmlformats.org/drawingml/2006/main"/>
-          <a:p xmlns:a="http://schemas.openxmlformats.org/drawingml/2006/main">
-            <a:r>
-              <a:t>LIGJËRATA 1 — PROGRAMIMI PËR PAJISJE MOBILE</a:t>
-            </a:r>
-          </a:p>
-          <a:p xmlns:a="http://schemas.openxmlformats.org/drawingml/2006/main">
-            <a:r>
-              <a:t>SLAJDI 4: 07:20. Ende pa konfirmim</a:t>
-            </a:r>
-          </a:p>
-          <a:p xmlns:a="http://schemas.openxmlformats.org/drawingml/2006/main">
-            <a:r>
-              <a:t>KOHA: 10:00–15:00 | FAZA: Problemi real</a:t>
-            </a:r>
-          </a:p>
-          <a:p xmlns:a="http://schemas.openxmlformats.org/drawingml/2006/main">
-            <a:r>
-              <a:t>Koha përfshin ndërveprimin.</a:t>
-            </a:r>
-          </a:p>
-          <a:p xmlns:a="http://schemas.openxmlformats.org/drawingml/2006/main">
-            <a:r>
-              <a:t/>
-            </a:r>
-          </a:p>
-          <a:p xmlns:a="http://schemas.openxmlformats.org/drawingml/2006/main">
-            <a:r>
-              <a:t>OBJEKTIVI KOGNITIV</a:t>
-            </a:r>
-          </a:p>
-          <a:p xmlns:a="http://schemas.openxmlformats.org/drawingml/2006/main">
-            <a:r>
-              <a:t>Studenti të ndajë situatën konkrete nga përgjithësimi transporti është problem.</a:t>
-            </a:r>
-          </a:p>
-          <a:p xmlns:a="http://schemas.openxmlformats.org/drawingml/2006/main">
-            <a:r>
-              <a:t/>
-            </a:r>
-          </a:p>
-          <a:p xmlns:a="http://schemas.openxmlformats.org/drawingml/2006/main">
-            <a:r>
-              <a:t>SKENARI I PROFESORIT</a:t>
-            </a:r>
-          </a:p>
-          <a:p xmlns:a="http://schemas.openxmlformats.org/drawingml/2006/main">
-            <a:r>
-              <a:t>Marrim një situatë ilustruese. Një studente në Fushë Kosovë kërkon të vijë në kampus. Një student tjetër do të niset me veturë dhe ka një vend të lirë.</a:t>
-            </a:r>
-          </a:p>
-          <a:p xmlns:a="http://schemas.openxmlformats.org/drawingml/2006/main">
-            <a:r>
-              <a:t/>
-            </a:r>
-          </a:p>
-          <a:p xmlns:a="http://schemas.openxmlformats.org/drawingml/2006/main">
-            <a:r>
-              <a:t>Të dy ekzistojnë. Vendi ekziston. Megjithatë, udhëtimi i përbashkët mund të mos ndodhë.</a:t>
-            </a:r>
-          </a:p>
-          <a:p xmlns:a="http://schemas.openxmlformats.org/drawingml/2006/main">
-            <a:r>
-              <a:t/>
-            </a:r>
-          </a:p>
-          <a:p xmlns:a="http://schemas.openxmlformats.org/drawingml/2006/main">
-            <a:r>
-              <a:t>Pse? Ndoshta nuk e gjejnë njëri-tjetrin. Ndoshta oraret nuk përputhen. Ndoshta kërkesa mbetet pa përgjigje.</a:t>
-            </a:r>
-          </a:p>
-          <a:p xmlns:a="http://schemas.openxmlformats.org/drawingml/2006/main">
-            <a:r>
-              <a:t/>
-            </a:r>
-          </a:p>
-          <a:p xmlns:a="http://schemas.openxmlformats.org/drawingml/2006/main">
-            <a:r>
-              <a:t>Këto janë probleme të ndryshme dhe kërkojnë zgjidhje të ndryshme.</a:t>
-            </a:r>
-          </a:p>
-          <a:p xmlns:a="http://schemas.openxmlformats.org/drawingml/2006/main">
-            <a:r>
-              <a:t/>
-            </a:r>
-          </a:p>
-          <a:p xmlns:a="http://schemas.openxmlformats.org/drawingml/2006/main">
-            <a:r>
-              <a:t>Sot do të shqyrtojmë një pyetje të kufizuar: si mund ta bëjmë më të qartë kërkesën dhe konfirmimin e një vendi?</a:t>
-            </a:r>
-          </a:p>
-          <a:p xmlns:a="http://schemas.openxmlformats.org/drawingml/2006/main">
-            <a:r>
-              <a:t/>
-            </a:r>
-          </a:p>
-          <a:p xmlns:a="http://schemas.openxmlformats.org/drawingml/2006/main">
-            <a:r>
-              <a:t>Nuk kemi ende prova se kjo është pengesa kryesore. Kemi një pikënisje për hetim.</a:t>
-            </a:r>
-          </a:p>
-          <a:p xmlns:a="http://schemas.openxmlformats.org/drawingml/2006/main">
-            <a:r>
-              <a:t/>
-            </a:r>
-          </a:p>
-          <a:p xmlns:a="http://schemas.openxmlformats.org/drawingml/2006/main">
-            <a:r>
-              <a:t>PYETJA INTERAKTIVE</a:t>
-            </a:r>
-          </a:p>
-          <a:p xmlns:a="http://schemas.openxmlformats.org/drawingml/2006/main">
-            <a:r>
-              <a:t>Në çift, përshkruani një rast real: çfarë po përpiqeshit të bënit, çfarë ju pengoi dhe si e zgjidhët?</a:t>
-            </a:r>
-          </a:p>
-          <a:p xmlns:a="http://schemas.openxmlformats.org/drawingml/2006/main">
-            <a:r>
-              <a:t/>
-            </a:r>
-          </a:p>
-          <a:p xmlns:a="http://schemas.openxmlformats.org/drawingml/2006/main">
-            <a:r>
-              <a:t>UDHËZIMI</a:t>
-            </a:r>
-          </a:p>
-          <a:p xmlns:a="http://schemas.openxmlformats.org/drawingml/2006/main">
-            <a:r>
-              <a:t>2 minuta. Ndajeni një shembull në dërrasë në situatë, pengesë, zgjidhje aktuale.</a:t>
-            </a:r>
-          </a:p>
-          <a:p xmlns:a="http://schemas.openxmlformats.org/drawingml/2006/main">
-            <a:r>
-              <a:t/>
-            </a:r>
-          </a:p>
-          <a:p xmlns:a="http://schemas.openxmlformats.org/drawingml/2006/main">
-            <a:r>
-              <a:t>PARALAJMËRIMI INXHINIERIK</a:t>
-            </a:r>
-          </a:p>
-          <a:p xmlns:a="http://schemas.openxmlformats.org/drawingml/2006/main">
-            <a:r>
-              <a:t>Një problem i përshkruar shumë gjerë prodhon një projekt që nuk ka kufi të qartë përfundimi.</a:t>
-            </a:r>
-          </a:p>
-          <a:p xmlns:a="http://schemas.openxmlformats.org/drawingml/2006/main">
-            <a:r>
-              <a:t/>
-            </a:r>
-          </a:p>
-          <a:p xmlns:a="http://schemas.openxmlformats.org/drawingml/2006/main">
-            <a:r>
-              <a:t>Të gjitha situatat, oraret, pamjet e aplikacionit dhe identitetet e RideShare janë ilustrime mësimore.</a:t>
-            </a:r>
-          </a:p>
-          <a:p xmlns:a="http://schemas.openxmlformats.org/drawingml/2006/main">
-            <a:r>
-              <a:t/>
-            </a:r>
-          </a:p>
-          <a:p xmlns:a="http://schemas.openxmlformats.org/drawingml/2006/main">
-            <a:r>
-              <a:t>Logo: https://aab-edu.net/wp-content/themes/Kolegji-AAB/dist/img/kolegji-aab-logo.svg</a:t>
-            </a:r>
-          </a:p>
-        </p:txBody>
-      </p:sp>
-      <p:sp>
-        <p:nvSpPr>
-          <p:cNvPr id="4" name="Slide Number Placeholder 3"/>
-          <p:cNvSpPr>
-            <a:spLocks xmlns:a="http://schemas.openxmlformats.org/drawingml/2006/main" noGrp="1"/>
-          </p:cNvSpPr>
-          <p:nvPr>
-            <p:ph type="sldNum" idx="5"/>
-          </p:nvPr>
-        </p:nvSpPr>
-        <p:spPr/>
-        <p:txBody>
-          <a:bodyPr xmlns:a="http://schemas.openxmlformats.org/drawingml/2006/main"/>
-          <a:lstStyle xmlns:a="http://schemas.openxmlformats.org/drawingml/2006/main"/>
-          <a:p xmlns:a="http://schemas.openxmlformats.org/drawingml/2006/main"/>
-        </p:txBody>
-      </p:sp>
-    </p:spTree>
-  </p:cSld>
-  <p:clrMapOvr>
-    <a:masterClrMapping xmlns:a="http://schemas.openxmlformats.org/drawingml/2006/main"/>
-  </p:clrMapOvr>
-</p:notes>
-</file>
-
-<file path=ppt/notesSlides/notesSlide13.xml><?xml version="1.0" encoding="utf-8"?>
-<p:notes xmlns:p="http://schemas.openxmlformats.org/presentationml/2006/main">
-  <p:cSld>
-    <p:spTree>
-      <p:nvGrpSpPr>
-        <p:cNvPr id="1" name=""/>
-        <p:cNvGrpSpPr/>
-        <p:nvPr/>
-      </p:nvGrpSpPr>
-      <p:grpSpPr>
-        <a:xfrm xmlns:a="http://schemas.openxmlformats.org/drawingml/2006/main"/>
-      </p:grpSpPr>
-      <p:sp>
-        <p:nvSpPr>
-          <p:cNvPr id="2" name="Slide Image Placeholder 1"/>
-          <p:cNvSpPr>
-            <a:spLocks xmlns:a="http://schemas.openxmlformats.org/drawingml/2006/main" noGrp="1"/>
-          </p:cNvSpPr>
-          <p:nvPr>
-            <p:ph type="sldImg" idx="0"/>
-          </p:nvPr>
-        </p:nvSpPr>
-        <p:spPr/>
-      </p:sp>
-      <p:sp>
-        <p:nvSpPr>
-          <p:cNvPr id="3" name="Notes Placeholder 2"/>
-          <p:cNvSpPr>
-            <a:spLocks xmlns:a="http://schemas.openxmlformats.org/drawingml/2006/main" noGrp="1"/>
-          </p:cNvSpPr>
-          <p:nvPr>
-            <p:ph type="body" idx="1"/>
-          </p:nvPr>
-        </p:nvSpPr>
-        <p:spPr/>
-        <p:txBody>
-          <a:bodyPr xmlns:a="http://schemas.openxmlformats.org/drawingml/2006/main"/>
-          <a:lstStyle xmlns:a="http://schemas.openxmlformats.org/drawingml/2006/main"/>
-          <a:p xmlns:a="http://schemas.openxmlformats.org/drawingml/2006/main">
-            <a:r>
-              <a:t>LIGJËRATA 1 — PROGRAMIMI PËR PAJISJE MOBILE</a:t>
-            </a:r>
-          </a:p>
-          <a:p xmlns:a="http://schemas.openxmlformats.org/drawingml/2006/main">
-            <a:r>
-              <a:t>SLAJDI 5: Mesazhi nuk është rezervim</a:t>
-            </a:r>
-          </a:p>
-          <a:p xmlns:a="http://schemas.openxmlformats.org/drawingml/2006/main">
-            <a:r>
-              <a:t>KOHA: 15:00–20:00 | FAZA: Problemi real</a:t>
-            </a:r>
-          </a:p>
-          <a:p xmlns:a="http://schemas.openxmlformats.org/drawingml/2006/main">
-            <a:r>
-              <a:t>Koha përfshin ndërveprimin.</a:t>
-            </a:r>
-          </a:p>
-          <a:p xmlns:a="http://schemas.openxmlformats.org/drawingml/2006/main">
-            <a:r>
-              <a:t/>
-            </a:r>
-          </a:p>
-          <a:p xmlns:a="http://schemas.openxmlformats.org/drawingml/2006/main">
-            <a:r>
-              <a:t>OBJEKTIVI KOGNITIV</a:t>
-            </a:r>
-          </a:p>
-          <a:p xmlns:a="http://schemas.openxmlformats.org/drawingml/2006/main">
-            <a:r>
-              <a:t>Studenti të dallojë komunikimin nga gjendja e strukturuar dhe të mos e nënvlerësojë zgjidhjen që përdoret sot.</a:t>
-            </a:r>
-          </a:p>
-          <a:p xmlns:a="http://schemas.openxmlformats.org/drawingml/2006/main">
-            <a:r>
-              <a:t/>
-            </a:r>
-          </a:p>
-          <a:p xmlns:a="http://schemas.openxmlformats.org/drawingml/2006/main">
-            <a:r>
-              <a:t>SKENARI I PROFESORIT</a:t>
-            </a:r>
-          </a:p>
-          <a:p xmlns:a="http://schemas.openxmlformats.org/drawingml/2006/main">
-            <a:r>
-              <a:t>Një grup në WhatsApp ose Viber ka përparësi të rëndësishme: njerëzit janë aty dhe dinë ta përdorin.</a:t>
-            </a:r>
-          </a:p>
-          <a:p xmlns:a="http://schemas.openxmlformats.org/drawingml/2006/main">
-            <a:r>
-              <a:t/>
-            </a:r>
-          </a:p>
-          <a:p xmlns:a="http://schemas.openxmlformats.org/drawingml/2006/main">
-            <a:r>
-              <a:t>Prandaj, pyetja jonë është serioze: çfarë vlere shtesë do të sillte një aplikacion?</a:t>
-            </a:r>
-          </a:p>
-          <a:p xmlns:a="http://schemas.openxmlformats.org/drawingml/2006/main">
-            <a:r>
-              <a:t/>
-            </a:r>
-          </a:p>
-          <a:p xmlns:a="http://schemas.openxmlformats.org/drawingml/2006/main">
-            <a:r>
-              <a:t>Shikoni bisedën. Dy persona mund ta interpretojnë të njëjtin mesazh si konfirmim. Informacioni për orarin mund të humbasë mes mesazheve të tjera.</a:t>
-            </a:r>
-          </a:p>
-          <a:p xmlns:a="http://schemas.openxmlformats.org/drawingml/2006/main">
-            <a:r>
-              <a:t/>
-            </a:r>
-          </a:p>
-          <a:p xmlns:a="http://schemas.openxmlformats.org/drawingml/2006/main">
-            <a:r>
-              <a:t>Një sistem i strukturuar mund ta ruajë kërkesën me gjendje të qartë: në pritje, e pranuar ose e refuzuar.</a:t>
-            </a:r>
-          </a:p>
-          <a:p xmlns:a="http://schemas.openxmlformats.org/drawingml/2006/main">
-            <a:r>
-              <a:t/>
-            </a:r>
-          </a:p>
-          <a:p xmlns:a="http://schemas.openxmlformats.org/drawingml/2006/main">
-            <a:r>
-              <a:t>Kjo vlerë duhet provuar. Nëse grupi ekzistues e zgjidh nevojën mjaftueshëm mirë, duhet të kemi arsye bindëse për t’u kërkuar njerëzve një mënyrë të re pune.</a:t>
-            </a:r>
-          </a:p>
-          <a:p xmlns:a="http://schemas.openxmlformats.org/drawingml/2006/main">
-            <a:r>
-              <a:t/>
-            </a:r>
-          </a:p>
-          <a:p xmlns:a="http://schemas.openxmlformats.org/drawingml/2006/main">
-            <a:r>
-              <a:t>PYETJA INTERAKTIVE</a:t>
-            </a:r>
-          </a:p>
-          <a:p xmlns:a="http://schemas.openxmlformats.org/drawingml/2006/main">
-            <a:r>
-              <a:t>Cilën do ta përdornit nesër: grupin ku janë të gjithë apo aplikacionin me status të qartë, por me pak përdorues? Çfarë duhet të ndryshojë që të kaloni?</a:t>
-            </a:r>
-          </a:p>
-          <a:p xmlns:a="http://schemas.openxmlformats.org/drawingml/2006/main">
-            <a:r>
-              <a:t/>
-            </a:r>
-          </a:p>
-          <a:p xmlns:a="http://schemas.openxmlformats.org/drawingml/2006/main">
-            <a:r>
-              <a:t>UDHËZIMI</a:t>
-            </a:r>
-          </a:p>
-          <a:p xmlns:a="http://schemas.openxmlformats.org/drawingml/2006/main">
-            <a:r>
-              <a:t>2 minuta. Diskutoni vlerën e rrjetit ekzistues të përdoruesve.</a:t>
-            </a:r>
-          </a:p>
-          <a:p xmlns:a="http://schemas.openxmlformats.org/drawingml/2006/main">
-            <a:r>
-              <a:t/>
-            </a:r>
-          </a:p>
-          <a:p xmlns:a="http://schemas.openxmlformats.org/drawingml/2006/main">
-            <a:r>
-              <a:t>PARALAJMËRIMI INXHINIERIK</a:t>
-            </a:r>
-          </a:p>
-          <a:p xmlns:a="http://schemas.openxmlformats.org/drawingml/2006/main">
-            <a:r>
-              <a:t>Një produkt teknikisht më i rregullt mund të ketë më pak vlerë nëse përdoruesit e nevojshëm mungojnë.</a:t>
-            </a:r>
-          </a:p>
-          <a:p xmlns:a="http://schemas.openxmlformats.org/drawingml/2006/main">
-            <a:r>
-              <a:t/>
-            </a:r>
-          </a:p>
-          <a:p xmlns:a="http://schemas.openxmlformats.org/drawingml/2006/main">
-            <a:r>
-              <a:t>Të gjitha situatat, oraret, pamjet e aplikacionit dhe identitetet e RideShare janë ilustrime mësimore.</a:t>
-            </a:r>
-          </a:p>
-          <a:p xmlns:a="http://schemas.openxmlformats.org/drawingml/2006/main">
-            <a:r>
-              <a:t/>
-            </a:r>
-          </a:p>
-          <a:p xmlns:a="http://schemas.openxmlformats.org/drawingml/2006/main">
-            <a:r>
-              <a:t>Logo: https://aab-edu.net/wp-content/themes/Kolegji-AAB/dist/img/kolegji-aab-logo.svg</a:t>
-            </a:r>
-          </a:p>
-        </p:txBody>
-      </p:sp>
-      <p:sp>
-        <p:nvSpPr>
-          <p:cNvPr id="4" name="Slide Number Placeholder 3"/>
-          <p:cNvSpPr>
-            <a:spLocks xmlns:a="http://schemas.openxmlformats.org/drawingml/2006/main" noGrp="1"/>
-          </p:cNvSpPr>
-          <p:nvPr>
-            <p:ph type="sldNum" idx="5"/>
-          </p:nvPr>
-        </p:nvSpPr>
-        <p:spPr/>
-        <p:txBody>
-          <a:bodyPr xmlns:a="http://schemas.openxmlformats.org/drawingml/2006/main"/>
-          <a:lstStyle xmlns:a="http://schemas.openxmlformats.org/drawingml/2006/main"/>
-          <a:p xmlns:a="http://schemas.openxmlformats.org/drawingml/2006/main"/>
-        </p:txBody>
-      </p:sp>
-    </p:spTree>
-  </p:cSld>
-  <p:clrMapOvr>
-    <a:masterClrMapping xmlns:a="http://schemas.openxmlformats.org/drawingml/2006/main"/>
-  </p:clrMapOvr>
-</p:notes>
-</file>
-
-<file path=ppt/notesSlides/notesSlide14.xml><?xml version="1.0" encoding="utf-8"?>
-<p:notes xmlns:p="http://schemas.openxmlformats.org/presentationml/2006/main">
-  <p:cSld>
-    <p:spTree>
-      <p:nvGrpSpPr>
-        <p:cNvPr id="1" name=""/>
-        <p:cNvGrpSpPr/>
-        <p:nvPr/>
-      </p:nvGrpSpPr>
-      <p:grpSpPr>
-        <a:xfrm xmlns:a="http://schemas.openxmlformats.org/drawingml/2006/main"/>
-      </p:grpSpPr>
-      <p:sp>
-        <p:nvSpPr>
-          <p:cNvPr id="2" name="Slide Image Placeholder 1"/>
-          <p:cNvSpPr>
-            <a:spLocks xmlns:a="http://schemas.openxmlformats.org/drawingml/2006/main" noGrp="1"/>
-          </p:cNvSpPr>
-          <p:nvPr>
-            <p:ph type="sldImg" idx="0"/>
-          </p:nvPr>
-        </p:nvSpPr>
-        <p:spPr/>
-      </p:sp>
-      <p:sp>
-        <p:nvSpPr>
-          <p:cNvPr id="3" name="Notes Placeholder 2"/>
-          <p:cNvSpPr>
-            <a:spLocks xmlns:a="http://schemas.openxmlformats.org/drawingml/2006/main" noGrp="1"/>
-          </p:cNvSpPr>
-          <p:nvPr>
-            <p:ph type="body" idx="1"/>
-          </p:nvPr>
-        </p:nvSpPr>
-        <p:spPr/>
-        <p:txBody>
-          <a:bodyPr xmlns:a="http://schemas.openxmlformats.org/drawingml/2006/main"/>
-          <a:lstStyle xmlns:a="http://schemas.openxmlformats.org/drawingml/2006/main"/>
-          <a:p xmlns:a="http://schemas.openxmlformats.org/drawingml/2006/main">
-            <a:r>
-              <a:t>LIGJËRATA 1 — PROGRAMIMI PËR PAJISJE MOBILE</a:t>
-            </a:r>
-          </a:p>
-          <a:p xmlns:a="http://schemas.openxmlformats.org/drawingml/2006/main">
-            <a:r>
-              <a:t>SLAJDI 6: Hipoteza mund të rrëzohet</a:t>
-            </a:r>
-          </a:p>
-          <a:p xmlns:a="http://schemas.openxmlformats.org/drawingml/2006/main">
-            <a:r>
-              <a:t>KOHA: 20:00–25:00 | FAZA: Problemi real</a:t>
-            </a:r>
-          </a:p>
-          <a:p xmlns:a="http://schemas.openxmlformats.org/drawingml/2006/main">
-            <a:r>
-              <a:t>Koha përfshin ndërveprimin.</a:t>
-            </a:r>
-          </a:p>
-          <a:p xmlns:a="http://schemas.openxmlformats.org/drawingml/2006/main">
-            <a:r>
-              <a:t/>
-            </a:r>
-          </a:p>
-          <a:p xmlns:a="http://schemas.openxmlformats.org/drawingml/2006/main">
-            <a:r>
-              <a:t>OBJEKTIVI KOGNITIV</a:t>
-            </a:r>
-          </a:p>
-          <a:p xmlns:a="http://schemas.openxmlformats.org/drawingml/2006/main">
-            <a:r>
-              <a:t>Studenti të formulojë një hipotezë që mund të testohet dhe të dallojë përdorshmërinë nga kërkesa reale.</a:t>
-            </a:r>
-          </a:p>
-          <a:p xmlns:a="http://schemas.openxmlformats.org/drawingml/2006/main">
-            <a:r>
-              <a:t/>
-            </a:r>
-          </a:p>
-          <a:p xmlns:a="http://schemas.openxmlformats.org/drawingml/2006/main">
-            <a:r>
-              <a:t>SKENARI I PROFESORIT</a:t>
-            </a:r>
-          </a:p>
-          <a:p xmlns:a="http://schemas.openxmlformats.org/drawingml/2006/main">
-            <a:r>
-              <a:t>Hipoteza jonë fillestare është kjo: nëse kërkesa për vend ka një status të qartë, studentët do ta kuptojnë më mirë nëse udhëtimi është konfirmuar.</a:t>
-            </a:r>
-          </a:p>
-          <a:p xmlns:a="http://schemas.openxmlformats.org/drawingml/2006/main">
-            <a:r>
-              <a:t/>
-            </a:r>
-          </a:p>
-          <a:p xmlns:a="http://schemas.openxmlformats.org/drawingml/2006/main">
-            <a:r>
-              <a:t>Mund ta provojmë përpara se të kemi databazë. Ndërtojmë disa pamje dhe u japim pesë personave një detyrë.</a:t>
-            </a:r>
-          </a:p>
-          <a:p xmlns:a="http://schemas.openxmlformats.org/drawingml/2006/main">
-            <a:r>
-              <a:t/>
-            </a:r>
-          </a:p>
-          <a:p xmlns:a="http://schemas.openxmlformats.org/drawingml/2006/main">
-            <a:r>
-              <a:t>Si prag fillestar mësimor mund të vendosim: katër prej pesë personave e dërgojnë kërkesën dhe e interpretojnë statusin pa ndihmën tonë.</a:t>
-            </a:r>
-          </a:p>
-          <a:p xmlns:a="http://schemas.openxmlformats.org/drawingml/2006/main">
-            <a:r>
-              <a:t/>
-            </a:r>
-          </a:p>
-          <a:p xmlns:a="http://schemas.openxmlformats.org/drawingml/2006/main">
-            <a:r>
-              <a:t>Ky test na jep informacion për përdorshmërinë. Nuk provon se kemi treg, se do të ketë shoferë të mjaftueshëm ose se shërbimi do të përdoret çdo ditë.</a:t>
-            </a:r>
-          </a:p>
-          <a:p xmlns:a="http://schemas.openxmlformats.org/drawingml/2006/main">
-            <a:r>
-              <a:t/>
-            </a:r>
-          </a:p>
-          <a:p xmlns:a="http://schemas.openxmlformats.org/drawingml/2006/main">
-            <a:r>
-              <a:t>Për secilën pyetje na duhet prova përkatëse.</a:t>
-            </a:r>
-          </a:p>
-          <a:p xmlns:a="http://schemas.openxmlformats.org/drawingml/2006/main">
-            <a:r>
-              <a:t/>
-            </a:r>
-          </a:p>
-          <a:p xmlns:a="http://schemas.openxmlformats.org/drawingml/2006/main">
-            <a:r>
-              <a:t>PYETJA INTERAKTIVE</a:t>
-            </a:r>
-          </a:p>
-          <a:p xmlns:a="http://schemas.openxmlformats.org/drawingml/2006/main">
-            <a:r>
-              <a:t>Çfarë rezultati do t’ju shtynte ta ndryshonit hipotezën? Shkruani një rezultat që do t’ju zhgënjente, por do t’ju mësonte diçka.</a:t>
-            </a:r>
-          </a:p>
-          <a:p xmlns:a="http://schemas.openxmlformats.org/drawingml/2006/main">
-            <a:r>
-              <a:t/>
-            </a:r>
-          </a:p>
-          <a:p xmlns:a="http://schemas.openxmlformats.org/drawingml/2006/main">
-            <a:r>
-              <a:t>UDHËZIMI</a:t>
-            </a:r>
-          </a:p>
-          <a:p xmlns:a="http://schemas.openxmlformats.org/drawingml/2006/main">
-            <a:r>
-              <a:t>2 minuta. Shkrim individual dhe një përgjigje në sallë.</a:t>
-            </a:r>
-          </a:p>
-          <a:p xmlns:a="http://schemas.openxmlformats.org/drawingml/2006/main">
-            <a:r>
-              <a:t/>
-            </a:r>
-          </a:p>
-          <a:p xmlns:a="http://schemas.openxmlformats.org/drawingml/2006/main">
-            <a:r>
-              <a:t>PARALAJMËRIMI INXHINIERIK</a:t>
-            </a:r>
-          </a:p>
-          <a:p xmlns:a="http://schemas.openxmlformats.org/drawingml/2006/main">
-            <a:r>
-              <a:t>Një test i vogël përdorshmërie nuk provon kërkesën e tregut.</a:t>
-            </a:r>
-          </a:p>
-          <a:p xmlns:a="http://schemas.openxmlformats.org/drawingml/2006/main">
-            <a:r>
-              <a:t/>
-            </a:r>
-          </a:p>
-          <a:p xmlns:a="http://schemas.openxmlformats.org/drawingml/2006/main">
-            <a:r>
-              <a:t>Të gjitha situatat, oraret, pamjet e aplikacionit dhe identitetet e RideShare janë ilustrime mësimore.</a:t>
-            </a:r>
-          </a:p>
-          <a:p xmlns:a="http://schemas.openxmlformats.org/drawingml/2006/main">
-            <a:r>
-              <a:t/>
-            </a:r>
-          </a:p>
-          <a:p xmlns:a="http://schemas.openxmlformats.org/drawingml/2006/main">
-            <a:r>
-              <a:t>Logo: https://aab-edu.net/wp-content/themes/Kolegji-AAB/dist/img/kolegji-aab-logo.svg</a:t>
-            </a:r>
-          </a:p>
-        </p:txBody>
-      </p:sp>
-      <p:sp>
-        <p:nvSpPr>
-          <p:cNvPr id="4" name="Slide Number Placeholder 3"/>
-          <p:cNvSpPr>
-            <a:spLocks xmlns:a="http://schemas.openxmlformats.org/drawingml/2006/main" noGrp="1"/>
-          </p:cNvSpPr>
-          <p:nvPr>
-            <p:ph type="sldNum" idx="5"/>
-          </p:nvPr>
-        </p:nvSpPr>
-        <p:spPr/>
-        <p:txBody>
-          <a:bodyPr xmlns:a="http://schemas.openxmlformats.org/drawingml/2006/main"/>
-          <a:lstStyle xmlns:a="http://schemas.openxmlformats.org/drawingml/2006/main"/>
-          <a:p xmlns:a="http://schemas.openxmlformats.org/drawingml/2006/main"/>
-        </p:txBody>
-      </p:sp>
-    </p:spTree>
-  </p:cSld>
-  <p:clrMapOvr>
-    <a:masterClrMapping xmlns:a="http://schemas.openxmlformats.org/drawingml/2006/main"/>
-  </p:clrMapOvr>
-</p:notes>
-</file>
-
-<file path=ppt/notesSlides/notesSlide15.xml><?xml version="1.0" encoding="utf-8"?>
-<p:notes xmlns:p="http://schemas.openxmlformats.org/presentationml/2006/main">
-  <p:cSld>
-    <p:spTree>
-      <p:nvGrpSpPr>
-        <p:cNvPr id="1" name=""/>
-        <p:cNvGrpSpPr/>
-        <p:nvPr/>
-      </p:nvGrpSpPr>
-      <p:grpSpPr>
-        <a:xfrm xmlns:a="http://schemas.openxmlformats.org/drawingml/2006/main"/>
-      </p:grpSpPr>
-      <p:sp>
-        <p:nvSpPr>
-          <p:cNvPr id="2" name="Slide Image Placeholder 1"/>
-          <p:cNvSpPr>
-            <a:spLocks xmlns:a="http://schemas.openxmlformats.org/drawingml/2006/main" noGrp="1"/>
-          </p:cNvSpPr>
-          <p:nvPr>
-            <p:ph type="sldImg" idx="0"/>
-          </p:nvPr>
-        </p:nvSpPr>
-        <p:spPr/>
-      </p:sp>
-      <p:sp>
-        <p:nvSpPr>
-          <p:cNvPr id="3" name="Notes Placeholder 2"/>
-          <p:cNvSpPr>
-            <a:spLocks xmlns:a="http://schemas.openxmlformats.org/drawingml/2006/main" noGrp="1"/>
-          </p:cNvSpPr>
-          <p:nvPr>
-            <p:ph type="body" idx="1"/>
-          </p:nvPr>
-        </p:nvSpPr>
-        <p:spPr/>
-        <p:txBody>
-          <a:bodyPr xmlns:a="http://schemas.openxmlformats.org/drawingml/2006/main"/>
-          <a:lstStyle xmlns:a="http://schemas.openxmlformats.org/drawingml/2006/main"/>
-          <a:p xmlns:a="http://schemas.openxmlformats.org/drawingml/2006/main">
-            <a:r>
-              <a:t>LIGJËRATA 1 — PROGRAMIMI PËR PAJISJE MOBILE</a:t>
-            </a:r>
-          </a:p>
-          <a:p xmlns:a="http://schemas.openxmlformats.org/drawingml/2006/main">
-            <a:r>
-              <a:t>SLAJDI 7: Një faqe para kodit</a:t>
-            </a:r>
-          </a:p>
-          <a:p xmlns:a="http://schemas.openxmlformats.org/drawingml/2006/main">
-            <a:r>
-              <a:t>KOHA: 25:00–30:00 | FAZA: Specifikimi</a:t>
-            </a:r>
-          </a:p>
-          <a:p xmlns:a="http://schemas.openxmlformats.org/drawingml/2006/main">
-            <a:r>
-              <a:t>Koha përfshin ndërveprimin.</a:t>
-            </a:r>
-          </a:p>
-          <a:p xmlns:a="http://schemas.openxmlformats.org/drawingml/2006/main">
-            <a:r>
-              <a:t/>
-            </a:r>
-          </a:p>
-          <a:p xmlns:a="http://schemas.openxmlformats.org/drawingml/2006/main">
-            <a:r>
-              <a:t>OBJEKTIVI KOGNITIV</a:t>
-            </a:r>
-          </a:p>
-          <a:p xmlns:a="http://schemas.openxmlformats.org/drawingml/2006/main">
-            <a:r>
-              <a:t>Studenti të kuptojë PRD-në si marrëveshje pune që lidh problemin me sjelljen e pritshme.</a:t>
-            </a:r>
-          </a:p>
-          <a:p xmlns:a="http://schemas.openxmlformats.org/drawingml/2006/main">
-            <a:r>
-              <a:t/>
-            </a:r>
-          </a:p>
-          <a:p xmlns:a="http://schemas.openxmlformats.org/drawingml/2006/main">
-            <a:r>
-              <a:t>SKENARI I PROFESORIT</a:t>
-            </a:r>
-          </a:p>
-          <a:p xmlns:a="http://schemas.openxmlformats.org/drawingml/2006/main">
-            <a:r>
-              <a:t>PRD do të thotë dokument i kërkesave të produktit. Për projektin tonë fillestar, një faqe duhet të mjaftojë.</a:t>
-            </a:r>
-          </a:p>
-          <a:p xmlns:a="http://schemas.openxmlformats.org/drawingml/2006/main">
-            <a:r>
-              <a:t/>
-            </a:r>
-          </a:p>
-          <a:p xmlns:a="http://schemas.openxmlformats.org/drawingml/2006/main">
-            <a:r>
-              <a:t>Përdoruesi: student që kërkon një udhëtim drejt kampusit.</a:t>
-            </a:r>
-          </a:p>
-          <a:p xmlns:a="http://schemas.openxmlformats.org/drawingml/2006/main">
-            <a:r>
-              <a:t/>
-            </a:r>
-          </a:p>
-          <a:p xmlns:a="http://schemas.openxmlformats.org/drawingml/2006/main">
-            <a:r>
-              <a:t>Problemi që po hetojmë: nuk e di nëse kërkesa për një vend është pranuar.</a:t>
-            </a:r>
-          </a:p>
-          <a:p xmlns:a="http://schemas.openxmlformats.org/drawingml/2006/main">
-            <a:r>
-              <a:t/>
-            </a:r>
-          </a:p>
-          <a:p xmlns:a="http://schemas.openxmlformats.org/drawingml/2006/main">
-            <a:r>
-              <a:t>Rezultati i dëshiruar: mund të kërkojë vend dhe të shohë përgjigjen.</a:t>
-            </a:r>
-          </a:p>
-          <a:p xmlns:a="http://schemas.openxmlformats.org/drawingml/2006/main">
-            <a:r>
-              <a:t/>
-            </a:r>
-          </a:p>
-          <a:p xmlns:a="http://schemas.openxmlformats.org/drawingml/2006/main">
-            <a:r>
-              <a:t>Pastaj shkruajmë kufijtë dhe kriteret e pranimit.</a:t>
-            </a:r>
-          </a:p>
-          <a:p xmlns:a="http://schemas.openxmlformats.org/drawingml/2006/main">
-            <a:r>
-              <a:t/>
-            </a:r>
-          </a:p>
-          <a:p xmlns:a="http://schemas.openxmlformats.org/drawingml/2006/main">
-            <a:r>
-              <a:t>Nëse zhvilluesi mendon se kërko vend do të thotë rezervim automatik, ndërsa përdoruesi pret miratim nga shoferi, kemi dy produkte të ndryshme brenda së njëjtës fjali.</a:t>
-            </a:r>
-          </a:p>
-          <a:p xmlns:a="http://schemas.openxmlformats.org/drawingml/2006/main">
-            <a:r>
-              <a:t/>
-            </a:r>
-          </a:p>
-          <a:p xmlns:a="http://schemas.openxmlformats.org/drawingml/2006/main">
-            <a:r>
-              <a:t>PRD-ja duhet ta zbulojë këtë mospërputhje herët.</a:t>
-            </a:r>
-          </a:p>
-          <a:p xmlns:a="http://schemas.openxmlformats.org/drawingml/2006/main">
-            <a:r>
-              <a:t/>
-            </a:r>
-          </a:p>
-          <a:p xmlns:a="http://schemas.openxmlformats.org/drawingml/2006/main">
-            <a:r>
-              <a:t>PYETJA INTERAKTIVE</a:t>
-            </a:r>
-          </a:p>
-          <a:p xmlns:a="http://schemas.openxmlformats.org/drawingml/2006/main">
-            <a:r>
-              <a:t>Plotësoni: Për studentin që ___, produkti mundëson ___; e dimë se funksionon kur ___.</a:t>
-            </a:r>
-          </a:p>
-          <a:p xmlns:a="http://schemas.openxmlformats.org/drawingml/2006/main">
-            <a:r>
-              <a:t/>
-            </a:r>
-          </a:p>
-          <a:p xmlns:a="http://schemas.openxmlformats.org/drawingml/2006/main">
-            <a:r>
-              <a:t>UDHËZIMI</a:t>
-            </a:r>
-          </a:p>
-          <a:p xmlns:a="http://schemas.openxmlformats.org/drawingml/2006/main">
-            <a:r>
-              <a:t>2 minuta. Studentët shkruajnë një fjali për problemin e tyre.</a:t>
-            </a:r>
-          </a:p>
-          <a:p xmlns:a="http://schemas.openxmlformats.org/drawingml/2006/main">
-            <a:r>
-              <a:t/>
-            </a:r>
-          </a:p>
-          <a:p xmlns:a="http://schemas.openxmlformats.org/drawingml/2006/main">
-            <a:r>
-              <a:t>PARALAJMËRIMI INXHINIERIK</a:t>
-            </a:r>
-          </a:p>
-          <a:p xmlns:a="http://schemas.openxmlformats.org/drawingml/2006/main">
-            <a:r>
-              <a:t>Një kërkesë e paqartë mund të implementohet saktë sipas një interpretimi të gabuar.</a:t>
-            </a:r>
-          </a:p>
-          <a:p xmlns:a="http://schemas.openxmlformats.org/drawingml/2006/main">
-            <a:r>
-              <a:t/>
-            </a:r>
-          </a:p>
-          <a:p xmlns:a="http://schemas.openxmlformats.org/drawingml/2006/main">
-            <a:r>
-              <a:t>Të gjitha situatat, oraret, pamjet e aplikacionit dhe identitetet e RideShare janë ilustrime mësimore.</a:t>
-            </a:r>
-          </a:p>
-          <a:p xmlns:a="http://schemas.openxmlformats.org/drawingml/2006/main">
-            <a:r>
-              <a:t/>
-            </a:r>
-          </a:p>
-          <a:p xmlns:a="http://schemas.openxmlformats.org/drawingml/2006/main">
-            <a:r>
-              <a:t>Logo: https://aab-edu.net/wp-content/themes/Kolegji-AAB/dist/img/kolegji-aab-logo.svg</a:t>
-            </a:r>
-          </a:p>
-        </p:txBody>
-      </p:sp>
-      <p:sp>
-        <p:nvSpPr>
-          <p:cNvPr id="4" name="Slide Number Placeholder 3"/>
-          <p:cNvSpPr>
-            <a:spLocks xmlns:a="http://schemas.openxmlformats.org/drawingml/2006/main" noGrp="1"/>
-          </p:cNvSpPr>
-          <p:nvPr>
-            <p:ph type="sldNum" idx="5"/>
-          </p:nvPr>
-        </p:nvSpPr>
-        <p:spPr/>
-        <p:txBody>
-          <a:bodyPr xmlns:a="http://schemas.openxmlformats.org/drawingml/2006/main"/>
-          <a:lstStyle xmlns:a="http://schemas.openxmlformats.org/drawingml/2006/main"/>
-          <a:p xmlns:a="http://schemas.openxmlformats.org/drawingml/2006/main"/>
-        </p:txBody>
-      </p:sp>
-    </p:spTree>
-  </p:cSld>
-  <p:clrMapOvr>
-    <a:masterClrMapping xmlns:a="http://schemas.openxmlformats.org/drawingml/2006/main"/>
-  </p:clrMapOvr>
-</p:notes>
-</file>
-
-<file path=ppt/notesSlides/notesSlide16.xml><?xml version="1.0" encoding="utf-8"?>
-<p:notes xmlns:p="http://schemas.openxmlformats.org/presentationml/2006/main">
-  <p:cSld>
-    <p:spTree>
-      <p:nvGrpSpPr>
-        <p:cNvPr id="1" name=""/>
-        <p:cNvGrpSpPr/>
-        <p:nvPr/>
-      </p:nvGrpSpPr>
-      <p:grpSpPr>
-        <a:xfrm xmlns:a="http://schemas.openxmlformats.org/drawingml/2006/main"/>
-      </p:grpSpPr>
-      <p:sp>
-        <p:nvSpPr>
-          <p:cNvPr id="2" name="Slide Image Placeholder 1"/>
-          <p:cNvSpPr>
-            <a:spLocks xmlns:a="http://schemas.openxmlformats.org/drawingml/2006/main" noGrp="1"/>
-          </p:cNvSpPr>
-          <p:nvPr>
-            <p:ph type="sldImg" idx="0"/>
-          </p:nvPr>
-        </p:nvSpPr>
-        <p:spPr/>
-      </p:sp>
-      <p:sp>
-        <p:nvSpPr>
-          <p:cNvPr id="3" name="Notes Placeholder 2"/>
-          <p:cNvSpPr>
-            <a:spLocks xmlns:a="http://schemas.openxmlformats.org/drawingml/2006/main" noGrp="1"/>
-          </p:cNvSpPr>
-          <p:nvPr>
-            <p:ph type="body" idx="1"/>
-          </p:nvPr>
-        </p:nvSpPr>
-        <p:spPr/>
-        <p:txBody>
-          <a:bodyPr xmlns:a="http://schemas.openxmlformats.org/drawingml/2006/main"/>
-          <a:lstStyle xmlns:a="http://schemas.openxmlformats.org/drawingml/2006/main"/>
-          <a:p xmlns:a="http://schemas.openxmlformats.org/drawingml/2006/main">
-            <a:r>
-              <a:t>LIGJËRATA 1 — PROGRAMIMI PËR PAJISJE MOBILE</a:t>
-            </a:r>
-          </a:p>
-          <a:p xmlns:a="http://schemas.openxmlformats.org/drawingml/2006/main">
-            <a:r>
-              <a:t>SLAJDI 8: Tri veçori, një rrjedhë</a:t>
-            </a:r>
-          </a:p>
-          <a:p xmlns:a="http://schemas.openxmlformats.org/drawingml/2006/main">
-            <a:r>
-              <a:t>KOHA: 30:00–35:00 | FAZA: Specifikimi</a:t>
-            </a:r>
-          </a:p>
-          <a:p xmlns:a="http://schemas.openxmlformats.org/drawingml/2006/main">
-            <a:r>
-              <a:t>Koha përfshin ndërveprimin.</a:t>
-            </a:r>
-          </a:p>
-          <a:p xmlns:a="http://schemas.openxmlformats.org/drawingml/2006/main">
-            <a:r>
-              <a:t/>
-            </a:r>
-          </a:p>
-          <a:p xmlns:a="http://schemas.openxmlformats.org/drawingml/2006/main">
-            <a:r>
-              <a:t>OBJEKTIVI KOGNITIV</a:t>
-            </a:r>
-          </a:p>
-          <a:p xmlns:a="http://schemas.openxmlformats.org/drawingml/2006/main">
-            <a:r>
-              <a:t>Studenti të zgjedhë një rrjedhë të plotë dhe të përjashtojë qëllimisht zgjerimet.</a:t>
-            </a:r>
-          </a:p>
-          <a:p xmlns:a="http://schemas.openxmlformats.org/drawingml/2006/main">
-            <a:r>
-              <a:t/>
-            </a:r>
-          </a:p>
-          <a:p xmlns:a="http://schemas.openxmlformats.org/drawingml/2006/main">
-            <a:r>
-              <a:t>SKENARI I PROFESORIT</a:t>
-            </a:r>
-          </a:p>
-          <a:p xmlns:a="http://schemas.openxmlformats.org/drawingml/2006/main">
-            <a:r>
-              <a:t>Për RideShare-in tonë, kontrata fillestare ka tri aftësi: shoferi publikon udhëtimin, studenti kërkon vend, shoferi pranon ose refuzon.</a:t>
-            </a:r>
-          </a:p>
-          <a:p xmlns:a="http://schemas.openxmlformats.org/drawingml/2006/main">
-            <a:r>
-              <a:t/>
-            </a:r>
-          </a:p>
-          <a:p xmlns:a="http://schemas.openxmlformats.org/drawingml/2006/main">
-            <a:r>
-              <a:t>Këto formojnë një rrjedhë që mund ta demonstrojmë nga fillimi në fund.</a:t>
-            </a:r>
-          </a:p>
-          <a:p xmlns:a="http://schemas.openxmlformats.org/drawingml/2006/main">
-            <a:r>
-              <a:t/>
-            </a:r>
-          </a:p>
-          <a:p xmlns:a="http://schemas.openxmlformats.org/drawingml/2006/main">
-            <a:r>
-              <a:t>Pagesat, harta live, chat-i dhe vlerësimet presin.</a:t>
-            </a:r>
-          </a:p>
-          <a:p xmlns:a="http://schemas.openxmlformats.org/drawingml/2006/main">
-            <a:r>
-              <a:t/>
-            </a:r>
-          </a:p>
-          <a:p xmlns:a="http://schemas.openxmlformats.org/drawingml/2006/main">
-            <a:r>
-              <a:t>Tri veçori janë kufizim pedagogjik i këtij projekti. Nuk janë ligj universal për çdo MVP.</a:t>
-            </a:r>
-          </a:p>
-          <a:p xmlns:a="http://schemas.openxmlformats.org/drawingml/2006/main">
-            <a:r>
-              <a:t/>
-            </a:r>
-          </a:p>
-          <a:p xmlns:a="http://schemas.openxmlformats.org/drawingml/2006/main">
-            <a:r>
-              <a:t>Edhe brenda këtij kufiri kemi punë të domosdoshme: identitet, autorizim, validim dhe mesazhe gabimi. Siguria e rrjedhës nuk hiqet nga scope-i për ta bërë listën më të shkurtër.</a:t>
-            </a:r>
-          </a:p>
-          <a:p xmlns:a="http://schemas.openxmlformats.org/drawingml/2006/main">
-            <a:r>
-              <a:t/>
-            </a:r>
-          </a:p>
-          <a:p xmlns:a="http://schemas.openxmlformats.org/drawingml/2006/main">
-            <a:r>
-              <a:t>Kur shtojmë një veçori, duhet të shpjegojmë çfarë vlere sjell dhe çfarë kostoje shton.</a:t>
-            </a:r>
-          </a:p>
-          <a:p xmlns:a="http://schemas.openxmlformats.org/drawingml/2006/main">
-            <a:r>
-              <a:t/>
-            </a:r>
-          </a:p>
-          <a:p xmlns:a="http://schemas.openxmlformats.org/drawingml/2006/main">
-            <a:r>
-              <a:t>PYETJA INTERAKTIVE</a:t>
-            </a:r>
-          </a:p>
-          <a:p xmlns:a="http://schemas.openxmlformats.org/drawingml/2006/main">
-            <a:r>
-              <a:t>Keni kohë vetëm për njërën: hartë live apo refuzim të qartë kur vendi është zënë. Cilën zgjidhni dhe cilin rrezik po ulni?</a:t>
-            </a:r>
-          </a:p>
-          <a:p xmlns:a="http://schemas.openxmlformats.org/drawingml/2006/main">
-            <a:r>
-              <a:t/>
-            </a:r>
-          </a:p>
-          <a:p xmlns:a="http://schemas.openxmlformats.org/drawingml/2006/main">
-            <a:r>
-              <a:t>UDHËZIMI</a:t>
-            </a:r>
-          </a:p>
-          <a:p xmlns:a="http://schemas.openxmlformats.org/drawingml/2006/main">
-            <a:r>
-              <a:t>2 minuta. Zgjedhje me ngritje dore, pastaj argumentim.</a:t>
-            </a:r>
-          </a:p>
-          <a:p xmlns:a="http://schemas.openxmlformats.org/drawingml/2006/main">
-            <a:r>
-              <a:t/>
-            </a:r>
-          </a:p>
-          <a:p xmlns:a="http://schemas.openxmlformats.org/drawingml/2006/main">
-            <a:r>
-              <a:t>PARALAJMËRIMI INXHINIERIK</a:t>
-            </a:r>
-          </a:p>
-          <a:p xmlns:a="http://schemas.openxmlformats.org/drawingml/2006/main">
-            <a:r>
-              <a:t>Çdo veçori shton edhe gjendje, gabime dhe punë mirëmbajtjeje.</a:t>
-            </a:r>
-          </a:p>
-          <a:p xmlns:a="http://schemas.openxmlformats.org/drawingml/2006/main">
-            <a:r>
-              <a:t/>
-            </a:r>
-          </a:p>
-          <a:p xmlns:a="http://schemas.openxmlformats.org/drawingml/2006/main">
-            <a:r>
-              <a:t>Të gjitha situatat, oraret, pamjet e aplikacionit dhe identitetet e RideShare janë ilustrime mësimore.</a:t>
-            </a:r>
-          </a:p>
-          <a:p xmlns:a="http://schemas.openxmlformats.org/drawingml/2006/main">
-            <a:r>
-              <a:t/>
-            </a:r>
-          </a:p>
-          <a:p xmlns:a="http://schemas.openxmlformats.org/drawingml/2006/main">
-            <a:r>
-              <a:t>Logo: https://aab-edu.net/wp-content/themes/Kolegji-AAB/dist/img/kolegji-aab-logo.svg</a:t>
-            </a:r>
-          </a:p>
-        </p:txBody>
-      </p:sp>
-      <p:sp>
-        <p:nvSpPr>
-          <p:cNvPr id="4" name="Slide Number Placeholder 3"/>
-          <p:cNvSpPr>
-            <a:spLocks xmlns:a="http://schemas.openxmlformats.org/drawingml/2006/main" noGrp="1"/>
-          </p:cNvSpPr>
-          <p:nvPr>
-            <p:ph type="sldNum" idx="5"/>
-          </p:nvPr>
-        </p:nvSpPr>
-        <p:spPr/>
-        <p:txBody>
-          <a:bodyPr xmlns:a="http://schemas.openxmlformats.org/drawingml/2006/main"/>
-          <a:lstStyle xmlns:a="http://schemas.openxmlformats.org/drawingml/2006/main"/>
-          <a:p xmlns:a="http://schemas.openxmlformats.org/drawingml/2006/main"/>
-        </p:txBody>
-      </p:sp>
-    </p:spTree>
-  </p:cSld>
-  <p:clrMapOvr>
-    <a:masterClrMapping xmlns:a="http://schemas.openxmlformats.org/drawingml/2006/main"/>
-  </p:clrMapOvr>
-</p:notes>
-</file>
-
-<file path=ppt/notesSlides/notesSlide17.xml><?xml version="1.0" encoding="utf-8"?>
-<p:notes xmlns:p="http://schemas.openxmlformats.org/presentationml/2006/main">
-  <p:cSld>
-    <p:spTree>
-      <p:nvGrpSpPr>
-        <p:cNvPr id="1" name=""/>
-        <p:cNvGrpSpPr/>
-        <p:nvPr/>
-      </p:nvGrpSpPr>
-      <p:grpSpPr>
-        <a:xfrm xmlns:a="http://schemas.openxmlformats.org/drawingml/2006/main"/>
-      </p:grpSpPr>
-      <p:sp>
-        <p:nvSpPr>
-          <p:cNvPr id="2" name="Slide Image Placeholder 1"/>
-          <p:cNvSpPr>
-            <a:spLocks xmlns:a="http://schemas.openxmlformats.org/drawingml/2006/main" noGrp="1"/>
-          </p:cNvSpPr>
-          <p:nvPr>
-            <p:ph type="sldImg" idx="0"/>
-          </p:nvPr>
-        </p:nvSpPr>
-        <p:spPr/>
-      </p:sp>
-      <p:sp>
-        <p:nvSpPr>
-          <p:cNvPr id="3" name="Notes Placeholder 2"/>
-          <p:cNvSpPr>
-            <a:spLocks xmlns:a="http://schemas.openxmlformats.org/drawingml/2006/main" noGrp="1"/>
-          </p:cNvSpPr>
-          <p:nvPr>
-            <p:ph type="body" idx="1"/>
-          </p:nvPr>
-        </p:nvSpPr>
-        <p:spPr/>
-        <p:txBody>
-          <a:bodyPr xmlns:a="http://schemas.openxmlformats.org/drawingml/2006/main"/>
-          <a:lstStyle xmlns:a="http://schemas.openxmlformats.org/drawingml/2006/main"/>
-          <a:p xmlns:a="http://schemas.openxmlformats.org/drawingml/2006/main">
-            <a:r>
-              <a:t>LIGJËRATA 1 — PROGRAMIMI PËR PAJISJE MOBILE</a:t>
-            </a:r>
-          </a:p>
-          <a:p xmlns:a="http://schemas.openxmlformats.org/drawingml/2006/main">
-            <a:r>
-              <a:t>SLAJDI 9: Kur quhet e përfunduar?</a:t>
-            </a:r>
-          </a:p>
-          <a:p xmlns:a="http://schemas.openxmlformats.org/drawingml/2006/main">
-            <a:r>
-              <a:t>KOHA: 35:00–40:00 | FAZA: Specifikimi</a:t>
-            </a:r>
-          </a:p>
-          <a:p xmlns:a="http://schemas.openxmlformats.org/drawingml/2006/main">
-            <a:r>
-              <a:t>Koha përfshin ndërveprimin.</a:t>
-            </a:r>
-          </a:p>
-          <a:p xmlns:a="http://schemas.openxmlformats.org/drawingml/2006/main">
-            <a:r>
-              <a:t/>
-            </a:r>
-          </a:p>
-          <a:p xmlns:a="http://schemas.openxmlformats.org/drawingml/2006/main">
-            <a:r>
-              <a:t>OBJEKTIVI KOGNITIV</a:t>
-            </a:r>
-          </a:p>
-          <a:p xmlns:a="http://schemas.openxmlformats.org/drawingml/2006/main">
-            <a:r>
-              <a:t>Studenti të kthejë kërkesën në sjellje të vëzhgueshme, përfshirë dështimin.</a:t>
-            </a:r>
-          </a:p>
-          <a:p xmlns:a="http://schemas.openxmlformats.org/drawingml/2006/main">
-            <a:r>
-              <a:t/>
-            </a:r>
-          </a:p>
-          <a:p xmlns:a="http://schemas.openxmlformats.org/drawingml/2006/main">
-            <a:r>
-              <a:t>SKENARI I PROFESORIT</a:t>
-            </a:r>
-          </a:p>
-          <a:p xmlns:a="http://schemas.openxmlformats.org/drawingml/2006/main">
-            <a:r>
-              <a:t>Shprehja rezervimi funksionon është shumë e gjerë.</a:t>
-            </a:r>
-          </a:p>
-          <a:p xmlns:a="http://schemas.openxmlformats.org/drawingml/2006/main">
-            <a:r>
-              <a:t/>
-            </a:r>
-          </a:p>
-          <a:p xmlns:a="http://schemas.openxmlformats.org/drawingml/2006/main">
-            <a:r>
-              <a:t>Ja një kriter: duke pasur një student të autentikuar dhe një udhëtim aktiv, kur studenti kërkon vend, sistemi regjistron kërkesën me status në pritje.</a:t>
-            </a:r>
-          </a:p>
-          <a:p xmlns:a="http://schemas.openxmlformats.org/drawingml/2006/main">
-            <a:r>
-              <a:t/>
-            </a:r>
-          </a:p>
-          <a:p xmlns:a="http://schemas.openxmlformats.org/drawingml/2006/main">
-            <a:r>
-              <a:t>Ja një tjetër: kur studenti shtyp dy herë, nuk krijohen dy kërkesa aktive për të njëjtin udhëtim.</a:t>
-            </a:r>
-          </a:p>
-          <a:p xmlns:a="http://schemas.openxmlformats.org/drawingml/2006/main">
-            <a:r>
-              <a:t/>
-            </a:r>
-          </a:p>
-          <a:p xmlns:a="http://schemas.openxmlformats.org/drawingml/2006/main">
-            <a:r>
-              <a:t>Tani rasti i vështirë. Ka një vend dhe dy kërkesa. Shoferi mund të pranojë vetëm aq persona sa lejon kapaciteti.</a:t>
-            </a:r>
-          </a:p>
-          <a:p xmlns:a="http://schemas.openxmlformats.org/drawingml/2006/main">
-            <a:r>
-              <a:t/>
-            </a:r>
-          </a:p>
-          <a:p xmlns:a="http://schemas.openxmlformats.org/drawingml/2006/main">
-            <a:r>
-              <a:t>Këtë rregull duhet ta ruajë operacioni në databazë edhe kur kërkesat mbërrijnë pothuajse njëkohësisht.</a:t>
-            </a:r>
-          </a:p>
-          <a:p xmlns:a="http://schemas.openxmlformats.org/drawingml/2006/main">
-            <a:r>
-              <a:t/>
-            </a:r>
-          </a:p>
-          <a:p xmlns:a="http://schemas.openxmlformats.org/drawingml/2006/main">
-            <a:r>
-              <a:t>Kriteri i pranimit na tregon çfarë do të demonstrojmë. Më vonë do ta kthejmë në test.</a:t>
-            </a:r>
-          </a:p>
-          <a:p xmlns:a="http://schemas.openxmlformats.org/drawingml/2006/main">
-            <a:r>
-              <a:t/>
-            </a:r>
-          </a:p>
-          <a:p xmlns:a="http://schemas.openxmlformats.org/drawingml/2006/main">
-            <a:r>
-              <a:t>PYETJA INTERAKTIVE</a:t>
-            </a:r>
-          </a:p>
-          <a:p xmlns:a="http://schemas.openxmlformats.org/drawingml/2006/main">
-            <a:r>
-              <a:t>Shkruani një kriter për anulimin e një kërkese. Kush e kryen veprimin dhe në cilat gjendje lejohet?</a:t>
-            </a:r>
-          </a:p>
-          <a:p xmlns:a="http://schemas.openxmlformats.org/drawingml/2006/main">
-            <a:r>
-              <a:t/>
-            </a:r>
-          </a:p>
-          <a:p xmlns:a="http://schemas.openxmlformats.org/drawingml/2006/main">
-            <a:r>
-              <a:t>UDHËZIMI</a:t>
-            </a:r>
-          </a:p>
-          <a:p xmlns:a="http://schemas.openxmlformats.org/drawingml/2006/main">
-            <a:r>
-              <a:t>2 minuta. Përdorni formulën Duke pasur / Kur / Atëherë.</a:t>
-            </a:r>
-          </a:p>
-          <a:p xmlns:a="http://schemas.openxmlformats.org/drawingml/2006/main">
-            <a:r>
-              <a:t/>
-            </a:r>
-          </a:p>
-          <a:p xmlns:a="http://schemas.openxmlformats.org/drawingml/2006/main">
-            <a:r>
-              <a:t>PARALAJMËRIMI INXHINIERIK</a:t>
-            </a:r>
-          </a:p>
-          <a:p xmlns:a="http://schemas.openxmlformats.org/drawingml/2006/main">
-            <a:r>
-              <a:t>Një test me një përdorues nuk zbulon domosdoshmërisht gabimet e veprimeve të njëkohshme.</a:t>
-            </a:r>
-          </a:p>
-          <a:p xmlns:a="http://schemas.openxmlformats.org/drawingml/2006/main">
-            <a:r>
-              <a:t/>
-            </a:r>
-          </a:p>
-          <a:p xmlns:a="http://schemas.openxmlformats.org/drawingml/2006/main">
-            <a:r>
-              <a:t>Të gjitha situatat, oraret, pamjet e aplikacionit dhe identitetet e RideShare janë ilustrime mësimore.</a:t>
-            </a:r>
-          </a:p>
-          <a:p xmlns:a="http://schemas.openxmlformats.org/drawingml/2006/main">
-            <a:r>
-              <a:t/>
-            </a:r>
-          </a:p>
-          <a:p xmlns:a="http://schemas.openxmlformats.org/drawingml/2006/main">
-            <a:r>
-              <a:t>Logo: https://aab-edu.net/wp-content/themes/Kolegji-AAB/dist/img/kolegji-aab-logo.svg</a:t>
-            </a:r>
-          </a:p>
-        </p:txBody>
-      </p:sp>
-      <p:sp>
-        <p:nvSpPr>
-          <p:cNvPr id="4" name="Slide Number Placeholder 3"/>
-          <p:cNvSpPr>
-            <a:spLocks xmlns:a="http://schemas.openxmlformats.org/drawingml/2006/main" noGrp="1"/>
-          </p:cNvSpPr>
-          <p:nvPr>
-            <p:ph type="sldNum" idx="5"/>
-          </p:nvPr>
-        </p:nvSpPr>
-        <p:spPr/>
-        <p:txBody>
-          <a:bodyPr xmlns:a="http://schemas.openxmlformats.org/drawingml/2006/main"/>
-          <a:lstStyle xmlns:a="http://schemas.openxmlformats.org/drawingml/2006/main"/>
-          <a:p xmlns:a="http://schemas.openxmlformats.org/drawingml/2006/main"/>
-        </p:txBody>
-      </p:sp>
-    </p:spTree>
-  </p:cSld>
-  <p:clrMapOvr>
-    <a:masterClrMapping xmlns:a="http://schemas.openxmlformats.org/drawingml/2006/main"/>
-  </p:clrMapOvr>
-</p:notes>
-</file>
-
-<file path=ppt/notesSlides/notesSlide18.xml><?xml version="1.0" encoding="utf-8"?>
-<p:notes xmlns:p="http://schemas.openxmlformats.org/presentationml/2006/main">
-  <p:cSld>
-    <p:spTree>
-      <p:nvGrpSpPr>
-        <p:cNvPr id="1" name=""/>
-        <p:cNvGrpSpPr/>
-        <p:nvPr/>
-      </p:nvGrpSpPr>
-      <p:grpSpPr>
-        <a:xfrm xmlns:a="http://schemas.openxmlformats.org/drawingml/2006/main"/>
-      </p:grpSpPr>
-      <p:sp>
-        <p:nvSpPr>
-          <p:cNvPr id="2" name="Slide Image Placeholder 1"/>
-          <p:cNvSpPr>
-            <a:spLocks xmlns:a="http://schemas.openxmlformats.org/drawingml/2006/main" noGrp="1"/>
-          </p:cNvSpPr>
-          <p:nvPr>
-            <p:ph type="sldImg" idx="0"/>
-          </p:nvPr>
-        </p:nvSpPr>
-        <p:spPr/>
-      </p:sp>
-      <p:sp>
-        <p:nvSpPr>
-          <p:cNvPr id="3" name="Notes Placeholder 2"/>
-          <p:cNvSpPr>
-            <a:spLocks xmlns:a="http://schemas.openxmlformats.org/drawingml/2006/main" noGrp="1"/>
-          </p:cNvSpPr>
-          <p:nvPr>
-            <p:ph type="body" idx="1"/>
-          </p:nvPr>
-        </p:nvSpPr>
-        <p:spPr/>
-        <p:txBody>
-          <a:bodyPr xmlns:a="http://schemas.openxmlformats.org/drawingml/2006/main"/>
-          <a:lstStyle xmlns:a="http://schemas.openxmlformats.org/drawingml/2006/main"/>
-          <a:p xmlns:a="http://schemas.openxmlformats.org/drawingml/2006/main">
-            <a:r>
-              <a:t>LIGJËRATA 1 — PROGRAMIMI PËR PAJISJE MOBILE</a:t>
-            </a:r>
-          </a:p>
-          <a:p xmlns:a="http://schemas.openxmlformats.org/drawingml/2006/main">
-            <a:r>
-              <a:t>SLAJDI 10: Testojeni përpara ndërtimit</a:t>
-            </a:r>
-          </a:p>
-          <a:p xmlns:a="http://schemas.openxmlformats.org/drawingml/2006/main">
-            <a:r>
-              <a:t>KOHA: 40:00–45:00 | FAZA: Specifikimi</a:t>
-            </a:r>
-          </a:p>
-          <a:p xmlns:a="http://schemas.openxmlformats.org/drawingml/2006/main">
-            <a:r>
-              <a:t>Koha përfshin ndërveprimin.</a:t>
-            </a:r>
-          </a:p>
-          <a:p xmlns:a="http://schemas.openxmlformats.org/drawingml/2006/main">
-            <a:r>
-              <a:t/>
-            </a:r>
-          </a:p>
-          <a:p xmlns:a="http://schemas.openxmlformats.org/drawingml/2006/main">
-            <a:r>
-              <a:t>OBJEKTIVI KOGNITIV</a:t>
-            </a:r>
-          </a:p>
-          <a:p xmlns:a="http://schemas.openxmlformats.org/drawingml/2006/main">
-            <a:r>
-              <a:t>Studenti të kuptojë se një wireframe mund të zbulojë paqartësi përpara implementimit.</a:t>
-            </a:r>
-          </a:p>
-          <a:p xmlns:a="http://schemas.openxmlformats.org/drawingml/2006/main">
-            <a:r>
-              <a:t/>
-            </a:r>
-          </a:p>
-          <a:p xmlns:a="http://schemas.openxmlformats.org/drawingml/2006/main">
-            <a:r>
-              <a:t>SKENARI I PROFESORIT</a:t>
-            </a:r>
-          </a:p>
-          <a:p xmlns:a="http://schemas.openxmlformats.org/drawingml/2006/main">
-            <a:r>
-              <a:t>Këto janë tri pamje, ende pa kod.</a:t>
-            </a:r>
-          </a:p>
-          <a:p xmlns:a="http://schemas.openxmlformats.org/drawingml/2006/main">
-            <a:r>
-              <a:t/>
-            </a:r>
-          </a:p>
-          <a:p xmlns:a="http://schemas.openxmlformats.org/drawingml/2006/main">
-            <a:r>
-              <a:t>Detyra juaj është të gjeni një udhëtim dhe të kërkoni vend. Pastaj duhet të më thoni nëse vendi është konfirmuar.</a:t>
-            </a:r>
-          </a:p>
-          <a:p xmlns:a="http://schemas.openxmlformats.org/drawingml/2006/main">
-            <a:r>
-              <a:t/>
-            </a:r>
-          </a:p>
-          <a:p xmlns:a="http://schemas.openxmlformats.org/drawingml/2006/main">
-            <a:r>
-              <a:t>Personi që teston nuk merr shpjegime nga projektuesi. Ne vëzhgojmë ku ndalet dhe çfarë interpreton.</a:t>
-            </a:r>
-          </a:p>
-          <a:p xmlns:a="http://schemas.openxmlformats.org/drawingml/2006/main">
-            <a:r>
-              <a:t/>
-            </a:r>
-          </a:p>
-          <a:p xmlns:a="http://schemas.openxmlformats.org/drawingml/2006/main">
-            <a:r>
-              <a:t>Nëse duhet t’i themi shtyp këtu, kemi mësuar se pamja nuk e udhëzon mjaftueshëm.</a:t>
-            </a:r>
-          </a:p>
-          <a:p xmlns:a="http://schemas.openxmlformats.org/drawingml/2006/main">
-            <a:r>
-              <a:t/>
-            </a:r>
-          </a:p>
-          <a:p xmlns:a="http://schemas.openxmlformats.org/drawingml/2006/main">
-            <a:r>
-              <a:t>Nëse lexon kërkesa u dërgua dhe mendon vendi është imi, kemi një gabim me pasoja praktike.</a:t>
-            </a:r>
-          </a:p>
-          <a:p xmlns:a="http://schemas.openxmlformats.org/drawingml/2006/main">
-            <a:r>
-              <a:t/>
-            </a:r>
-          </a:p>
-          <a:p xmlns:a="http://schemas.openxmlformats.org/drawingml/2006/main">
-            <a:r>
-              <a:t>Ndryshimi i këtij mesazhi tani është i thjeshtë. Pas implementimit, mund të prekë ndërfaqen, logjikën dhe testet.</a:t>
-            </a:r>
-          </a:p>
-          <a:p xmlns:a="http://schemas.openxmlformats.org/drawingml/2006/main">
-            <a:r>
-              <a:t/>
-            </a:r>
-          </a:p>
-          <a:p xmlns:a="http://schemas.openxmlformats.org/drawingml/2006/main">
-            <a:r>
-              <a:t>PYETJA INTERAKTIVE</a:t>
-            </a:r>
-          </a:p>
-          <a:p xmlns:a="http://schemas.openxmlformats.org/drawingml/2006/main">
-            <a:r>
-              <a:t>Në cilën pamje mund të lindë bindja e gabuar se vendi është konfirmuar?</a:t>
-            </a:r>
-          </a:p>
-          <a:p xmlns:a="http://schemas.openxmlformats.org/drawingml/2006/main">
-            <a:r>
-              <a:t/>
-            </a:r>
-          </a:p>
-          <a:p xmlns:a="http://schemas.openxmlformats.org/drawingml/2006/main">
-            <a:r>
-              <a:t>UDHËZIMI</a:t>
-            </a:r>
-          </a:p>
-          <a:p xmlns:a="http://schemas.openxmlformats.org/drawingml/2006/main">
-            <a:r>
-              <a:t>2 minuta. Njëri në çift luan përdoruesin, tjetri vëzhguesin.</a:t>
-            </a:r>
-          </a:p>
-          <a:p xmlns:a="http://schemas.openxmlformats.org/drawingml/2006/main">
-            <a:r>
-              <a:t/>
-            </a:r>
-          </a:p>
-          <a:p xmlns:a="http://schemas.openxmlformats.org/drawingml/2006/main">
-            <a:r>
-              <a:t>PARALAJMËRIMI INXHINIERIK</a:t>
-            </a:r>
-          </a:p>
-          <a:p xmlns:a="http://schemas.openxmlformats.org/drawingml/2006/main">
-            <a:r>
-              <a:t>Një prototip i kuptueshëm verifikon një pjesë të përvojës; ende nuk provon funksionimin e backend-it.</a:t>
-            </a:r>
-          </a:p>
-          <a:p xmlns:a="http://schemas.openxmlformats.org/drawingml/2006/main">
-            <a:r>
-              <a:t/>
-            </a:r>
-          </a:p>
-          <a:p xmlns:a="http://schemas.openxmlformats.org/drawingml/2006/main">
-            <a:r>
-              <a:t>Të gjitha situatat, oraret, pamjet e aplikacionit dhe identitetet e RideShare janë ilustrime mësimore.</a:t>
-            </a:r>
-          </a:p>
-          <a:p xmlns:a="http://schemas.openxmlformats.org/drawingml/2006/main">
-            <a:r>
-              <a:t/>
-            </a:r>
-          </a:p>
-          <a:p xmlns:a="http://schemas.openxmlformats.org/drawingml/2006/main">
-            <a:r>
-              <a:t>Logo: https://aab-edu.net/wp-content/themes/Kolegji-AAB/dist/img/kolegji-aab-logo.svg</a:t>
-            </a:r>
-          </a:p>
-        </p:txBody>
-      </p:sp>
-      <p:sp>
-        <p:nvSpPr>
-          <p:cNvPr id="4" name="Slide Number Placeholder 3"/>
-          <p:cNvSpPr>
-            <a:spLocks xmlns:a="http://schemas.openxmlformats.org/drawingml/2006/main" noGrp="1"/>
-          </p:cNvSpPr>
-          <p:nvPr>
-            <p:ph type="sldNum" idx="5"/>
-          </p:nvPr>
-        </p:nvSpPr>
-        <p:spPr/>
-        <p:txBody>
-          <a:bodyPr xmlns:a="http://schemas.openxmlformats.org/drawingml/2006/main"/>
-          <a:lstStyle xmlns:a="http://schemas.openxmlformats.org/drawingml/2006/main"/>
-          <a:p xmlns:a="http://schemas.openxmlformats.org/drawingml/2006/main"/>
-        </p:txBody>
-      </p:sp>
-    </p:spTree>
-  </p:cSld>
-  <p:clrMapOvr>
-    <a:masterClrMapping xmlns:a="http://schemas.openxmlformats.org/drawingml/2006/main"/>
-  </p:clrMapOvr>
-</p:notes>
-</file>
-
-<file path=ppt/notesSlides/notesSlide19.xml><?xml version="1.0" encoding="utf-8"?>
-<p:notes xmlns:p="http://schemas.openxmlformats.org/presentationml/2006/main">
-  <p:cSld>
-    <p:spTree>
-      <p:nvGrpSpPr>
-        <p:cNvPr id="1" name=""/>
-        <p:cNvGrpSpPr/>
-        <p:nvPr/>
-      </p:nvGrpSpPr>
-      <p:grpSpPr>
-        <a:xfrm xmlns:a="http://schemas.openxmlformats.org/drawingml/2006/main"/>
-      </p:grpSpPr>
-      <p:sp>
-        <p:nvSpPr>
-          <p:cNvPr id="2" name="Slide Image Placeholder 1"/>
-          <p:cNvSpPr>
-            <a:spLocks xmlns:a="http://schemas.openxmlformats.org/drawingml/2006/main" noGrp="1"/>
-          </p:cNvSpPr>
-          <p:nvPr>
-            <p:ph type="sldImg" idx="0"/>
-          </p:nvPr>
-        </p:nvSpPr>
-        <p:spPr/>
-      </p:sp>
-      <p:sp>
-        <p:nvSpPr>
-          <p:cNvPr id="3" name="Notes Placeholder 2"/>
-          <p:cNvSpPr>
-            <a:spLocks xmlns:a="http://schemas.openxmlformats.org/drawingml/2006/main" noGrp="1"/>
-          </p:cNvSpPr>
-          <p:nvPr>
-            <p:ph type="body" idx="1"/>
-          </p:nvPr>
-        </p:nvSpPr>
-        <p:spPr/>
-        <p:txBody>
-          <a:bodyPr xmlns:a="http://schemas.openxmlformats.org/drawingml/2006/main"/>
-          <a:lstStyle xmlns:a="http://schemas.openxmlformats.org/drawingml/2006/main"/>
-          <a:p xmlns:a="http://schemas.openxmlformats.org/drawingml/2006/main">
-            <a:r>
-              <a:t>LIGJËRATA 1 — PROGRAMIMI PËR PAJISJE MOBILE</a:t>
-            </a:r>
-          </a:p>
-          <a:p xmlns:a="http://schemas.openxmlformats.org/drawingml/2006/main">
-            <a:r>
-              <a:t>SLAJDI 11: Produkti mbërrin me një lidhje</a:t>
-            </a:r>
-          </a:p>
-          <a:p xmlns:a="http://schemas.openxmlformats.org/drawingml/2006/main">
-            <a:r>
-              <a:t>KOHA: 45:00–49:00 | FAZA: Arkitektura mobile</a:t>
-            </a:r>
-          </a:p>
-          <a:p xmlns:a="http://schemas.openxmlformats.org/drawingml/2006/main">
-            <a:r>
-              <a:t>Koha përfshin ndërveprimin.</a:t>
-            </a:r>
-          </a:p>
-          <a:p xmlns:a="http://schemas.openxmlformats.org/drawingml/2006/main">
-            <a:r>
-              <a:t/>
-            </a:r>
-          </a:p>
-          <a:p xmlns:a="http://schemas.openxmlformats.org/drawingml/2006/main">
-            <a:r>
-              <a:t>OBJEKTIVI KOGNITIV</a:t>
-            </a:r>
-          </a:p>
-          <a:p xmlns:a="http://schemas.openxmlformats.org/drawingml/2006/main">
-            <a:r>
-              <a:t>Studenti të kuptojë pse PWA është zgjedhje e përshtatshme për eksperimentin dhe kur duhet shqyrtuar native.</a:t>
-            </a:r>
-          </a:p>
-          <a:p xmlns:a="http://schemas.openxmlformats.org/drawingml/2006/main">
-            <a:r>
-              <a:t/>
-            </a:r>
-          </a:p>
-          <a:p xmlns:a="http://schemas.openxmlformats.org/drawingml/2006/main">
-            <a:r>
-              <a:t>SKENARI I PROFESORIT</a:t>
-            </a:r>
-          </a:p>
-          <a:p xmlns:a="http://schemas.openxmlformats.org/drawingml/2006/main">
-            <a:r>
-              <a:t>Për eksperimentin tonë duam që studenti ta hapë produktin nga një lidhje dhe ta provojë menjëherë.</a:t>
-            </a:r>
-          </a:p>
-          <a:p xmlns:a="http://schemas.openxmlformats.org/drawingml/2006/main">
-            <a:r>
-              <a:t/>
-            </a:r>
-          </a:p>
-          <a:p xmlns:a="http://schemas.openxmlformats.org/drawingml/2006/main">
-            <a:r>
-              <a:t>Një PWA na lejon ta ndërtojmë këtë përvojë me teknologji web dhe të shtojmë aftësi si instalimi dhe sjellja e projektuar pa rrjet.</a:t>
-            </a:r>
-          </a:p>
-          <a:p xmlns:a="http://schemas.openxmlformats.org/drawingml/2006/main">
-            <a:r>
-              <a:t/>
-            </a:r>
-          </a:p>
-          <a:p xmlns:a="http://schemas.openxmlformats.org/drawingml/2006/main">
-            <a:r>
-              <a:t>Shpërndarja përmes web-it mund të na kursejë hapat e publikimit në dyqane aplikacionesh gjatë provave të para.</a:t>
-            </a:r>
-          </a:p>
-          <a:p xmlns:a="http://schemas.openxmlformats.org/drawingml/2006/main">
-            <a:r>
-              <a:t/>
-            </a:r>
-          </a:p>
-          <a:p xmlns:a="http://schemas.openxmlformats.org/drawingml/2006/main">
-            <a:r>
-              <a:t>Megjithatë, zgjedhja e platformës varet nga kërkesat. Nëse produkti kërkon integrime të thella me pajisjen ose sjellje specifike në sfond, shqyrtojmë kufizimet dhe alternativat native.</a:t>
-            </a:r>
-          </a:p>
-          <a:p xmlns:a="http://schemas.openxmlformats.org/drawingml/2006/main">
-            <a:r>
-              <a:t/>
-            </a:r>
-          </a:p>
-          <a:p xmlns:a="http://schemas.openxmlformats.org/drawingml/2006/main">
-            <a:r>
-              <a:t>Për RideShare-in e kufizuar që përshkruam, fillojmë me PWA dhe testojmë në pajisjet që studentët përdorin realisht.</a:t>
-            </a:r>
-          </a:p>
-          <a:p xmlns:a="http://schemas.openxmlformats.org/drawingml/2006/main">
-            <a:r>
-              <a:t/>
-            </a:r>
-          </a:p>
-          <a:p xmlns:a="http://schemas.openxmlformats.org/drawingml/2006/main">
-            <a:r>
-              <a:t>PYETJA INTERAKTIVE</a:t>
-            </a:r>
-          </a:p>
-          <a:p xmlns:a="http://schemas.openxmlformats.org/drawingml/2006/main">
-            <a:r>
-              <a:t>Cila kërkesë e re do t’ju detyronte ta rishqyrtonit zgjedhjen PWA?</a:t>
-            </a:r>
-          </a:p>
-          <a:p xmlns:a="http://schemas.openxmlformats.org/drawingml/2006/main">
-            <a:r>
-              <a:t/>
-            </a:r>
-          </a:p>
-          <a:p xmlns:a="http://schemas.openxmlformats.org/drawingml/2006/main">
-            <a:r>
-              <a:t>UDHËZIMI</a:t>
-            </a:r>
-          </a:p>
-          <a:p xmlns:a="http://schemas.openxmlformats.org/drawingml/2006/main">
-            <a:r>
-              <a:t>1 minutë. Kërkoni një nevojë të pajisjes ose punë në sfond.</a:t>
-            </a:r>
-          </a:p>
-          <a:p xmlns:a="http://schemas.openxmlformats.org/drawingml/2006/main">
-            <a:r>
-              <a:t/>
-            </a:r>
-          </a:p>
-          <a:p xmlns:a="http://schemas.openxmlformats.org/drawingml/2006/main">
-            <a:r>
-              <a:t>PARALAJMËRIMI INXHINIERIK</a:t>
-            </a:r>
-          </a:p>
-          <a:p xmlns:a="http://schemas.openxmlformats.org/drawingml/2006/main">
-            <a:r>
-              <a:t>Instalimi dhe aftësitë web ndryshojnë sipas shfletuesit dhe sistemit operativ.</a:t>
-            </a:r>
-          </a:p>
-          <a:p xmlns:a="http://schemas.openxmlformats.org/drawingml/2006/main">
-            <a:r>
-              <a:t/>
-            </a:r>
-          </a:p>
-          <a:p xmlns:a="http://schemas.openxmlformats.org/drawingml/2006/main">
-            <a:r>
-              <a:t>BURIM / SHËNIM</a:t>
-            </a:r>
-          </a:p>
-          <a:p xmlns:a="http://schemas.openxmlformats.org/drawingml/2006/main">
-            <a:r>
-              <a:t>https://nextjs.org/docs/app/guides/progressive-web-apps</a:t>
-            </a:r>
-          </a:p>
-          <a:p xmlns:a="http://schemas.openxmlformats.org/drawingml/2006/main">
-            <a:r>
-              <a:t/>
-            </a:r>
-          </a:p>
-          <a:p xmlns:a="http://schemas.openxmlformats.org/drawingml/2006/main">
-            <a:r>
-              <a:t>Të gjitha situatat, oraret, pamjet e aplikacionit dhe identitetet e RideShare janë ilustrime mësimore.</a:t>
-            </a:r>
-          </a:p>
-          <a:p xmlns:a="http://schemas.openxmlformats.org/drawingml/2006/main">
-            <a:r>
-              <a:t/>
-            </a:r>
-          </a:p>
-          <a:p xmlns:a="http://schemas.openxmlformats.org/drawingml/2006/main">
-            <a:r>
-              <a:t>Logo: https://aab-edu.net/wp-content/themes/Kolegji-AAB/dist/img/kolegji-aab-logo.svg</a:t>
-            </a:r>
-          </a:p>
-        </p:txBody>
-      </p:sp>
-      <p:sp>
-        <p:nvSpPr>
-          <p:cNvPr id="4" name="Slide Number Placeholder 3"/>
-          <p:cNvSpPr>
-            <a:spLocks xmlns:a="http://schemas.openxmlformats.org/drawingml/2006/main" noGrp="1"/>
-          </p:cNvSpPr>
-          <p:nvPr>
-            <p:ph type="sldNum" idx="5"/>
-          </p:nvPr>
-        </p:nvSpPr>
-        <p:spPr/>
-        <p:txBody>
-          <a:bodyPr xmlns:a="http://schemas.openxmlformats.org/drawingml/2006/main"/>
-          <a:lstStyle xmlns:a="http://schemas.openxmlformats.org/drawingml/2006/main"/>
-          <a:p xmlns:a="http://schemas.openxmlformats.org/drawingml/2006/main"/>
-        </p:txBody>
-      </p:sp>
-    </p:spTree>
-  </p:cSld>
-  <p:clrMapOvr>
-    <a:masterClrMapping xmlns:a="http://schemas.openxmlformats.org/drawingml/2006/main"/>
-  </p:clrMapOvr>
-</p:notes>
-</file>
-
-<file path=ppt/notesSlides/notesSlide2.xml><?xml version="1.0" encoding="utf-8"?>
-<p:notes xmlns:p="http://schemas.openxmlformats.org/presentationml/2006/main">
-  <p:cSld>
-    <p:spTree>
-      <p:nvGrpSpPr>
-        <p:cNvPr id="1" name=""/>
-        <p:cNvGrpSpPr/>
-        <p:nvPr/>
-      </p:nvGrpSpPr>
-      <p:grpSpPr>
-        <a:xfrm xmlns:a="http://schemas.openxmlformats.org/drawingml/2006/main"/>
-      </p:grpSpPr>
-      <p:sp>
-        <p:nvSpPr>
-          <p:cNvPr id="2" name="Slide Image Placeholder 1"/>
-          <p:cNvSpPr>
-            <a:spLocks xmlns:a="http://schemas.openxmlformats.org/drawingml/2006/main" noGrp="1"/>
-          </p:cNvSpPr>
-          <p:nvPr>
-            <p:ph type="sldImg" idx="0"/>
-          </p:nvPr>
-        </p:nvSpPr>
-        <p:spPr/>
-      </p:sp>
-      <p:sp>
-        <p:nvSpPr>
-          <p:cNvPr id="3" name="Notes Placeholder 2"/>
-          <p:cNvSpPr>
-            <a:spLocks xmlns:a="http://schemas.openxmlformats.org/drawingml/2006/main" noGrp="1"/>
-          </p:cNvSpPr>
-          <p:nvPr>
-            <p:ph type="body" idx="1"/>
-          </p:nvPr>
-        </p:nvSpPr>
-        <p:spPr/>
-        <p:txBody>
-          <a:bodyPr xmlns:a="http://schemas.openxmlformats.org/drawingml/2006/main"/>
-          <a:lstStyle xmlns:a="http://schemas.openxmlformats.org/drawingml/2006/main"/>
-          <a:p xmlns:a="http://schemas.openxmlformats.org/drawingml/2006/main">
-            <a:r>
-              <a:t>Çdo student zgjedh një biznes familjar ose një biznes tjetër me një person kontaktues. Gjatë semestrit zhvilloni individualisht një aplikacion Next.js që zgjidh një nevojë të qartë të tij. Përdorni të njëjtin repository dhe përmirësojeni çdo javë. Në fund demonstroni aplikacionin nga telefoni dhe shpjegoni vendimet tuaja. RideShare mbetet shembulli ynë në ligjërata, jo tema e detyrueshme për të gjithë. Pyetja: cilin biznes mund ta kontaktoni këtë javë?</a:t>
-            </a:r>
-          </a:p>
-          <a:p xmlns:a="http://schemas.openxmlformats.org/drawingml/2006/main">
-            <a:r>
-              <a:t>Logo: https://aab-edu.net/wp-content/themes/Kolegji-AAB/dist/img/kolegji-aab-logo.svg</a:t>
-            </a:r>
-          </a:p>
-        </p:txBody>
-      </p:sp>
-      <p:sp>
-        <p:nvSpPr>
-          <p:cNvPr id="4" name="Slide Number Placeholder 3"/>
-          <p:cNvSpPr>
-            <a:spLocks xmlns:a="http://schemas.openxmlformats.org/drawingml/2006/main" noGrp="1"/>
-          </p:cNvSpPr>
-          <p:nvPr>
-            <p:ph type="sldNum" idx="5"/>
-          </p:nvPr>
-        </p:nvSpPr>
-        <p:spPr/>
-        <p:txBody>
-          <a:bodyPr xmlns:a="http://schemas.openxmlformats.org/drawingml/2006/main"/>
-          <a:lstStyle xmlns:a="http://schemas.openxmlformats.org/drawingml/2006/main"/>
-          <a:p xmlns:a="http://schemas.openxmlformats.org/drawingml/2006/main"/>
-        </p:txBody>
-      </p:sp>
-    </p:spTree>
-  </p:cSld>
-  <p:clrMapOvr>
-    <a:masterClrMapping xmlns:a="http://schemas.openxmlformats.org/drawingml/2006/main"/>
-  </p:clrMapOvr>
-</p:notes>
-</file>
-
-<file path=ppt/notesSlides/notesSlide20.xml><?xml version="1.0" encoding="utf-8"?>
-<p:notes xmlns:p="http://schemas.openxmlformats.org/presentationml/2006/main">
-  <p:cSld>
-    <p:spTree>
-      <p:nvGrpSpPr>
-        <p:cNvPr id="1" name=""/>
-        <p:cNvGrpSpPr/>
-        <p:nvPr/>
-      </p:nvGrpSpPr>
-      <p:grpSpPr>
-        <a:xfrm xmlns:a="http://schemas.openxmlformats.org/drawingml/2006/main"/>
-      </p:grpSpPr>
-      <p:sp>
-        <p:nvSpPr>
-          <p:cNvPr id="2" name="Slide Image Placeholder 1"/>
-          <p:cNvSpPr>
-            <a:spLocks xmlns:a="http://schemas.openxmlformats.org/drawingml/2006/main" noGrp="1"/>
-          </p:cNvSpPr>
-          <p:nvPr>
-            <p:ph type="sldImg" idx="0"/>
-          </p:nvPr>
-        </p:nvSpPr>
-        <p:spPr/>
-      </p:sp>
-      <p:sp>
-        <p:nvSpPr>
-          <p:cNvPr id="3" name="Notes Placeholder 2"/>
-          <p:cNvSpPr>
-            <a:spLocks xmlns:a="http://schemas.openxmlformats.org/drawingml/2006/main" noGrp="1"/>
-          </p:cNvSpPr>
-          <p:nvPr>
-            <p:ph type="body" idx="1"/>
-          </p:nvPr>
-        </p:nvSpPr>
-        <p:spPr/>
-        <p:txBody>
-          <a:bodyPr xmlns:a="http://schemas.openxmlformats.org/drawingml/2006/main"/>
-          <a:lstStyle xmlns:a="http://schemas.openxmlformats.org/drawingml/2006/main"/>
-          <a:p xmlns:a="http://schemas.openxmlformats.org/drawingml/2006/main">
-            <a:r>
-              <a:t>LIGJËRATA 1 — PROGRAMIMI PËR PAJISJE MOBILE</a:t>
-            </a:r>
-          </a:p>
-          <a:p xmlns:a="http://schemas.openxmlformats.org/drawingml/2006/main">
-            <a:r>
-              <a:t>SLAJDI 12: Ku ekzekutohet vendimi?</a:t>
-            </a:r>
-          </a:p>
-          <a:p xmlns:a="http://schemas.openxmlformats.org/drawingml/2006/main">
-            <a:r>
-              <a:t>KOHA: 49:00–53:00 | FAZA: Arkitektura mobile</a:t>
-            </a:r>
-          </a:p>
-          <a:p xmlns:a="http://schemas.openxmlformats.org/drawingml/2006/main">
-            <a:r>
-              <a:t>Koha përfshin ndërveprimin.</a:t>
-            </a:r>
-          </a:p>
-          <a:p xmlns:a="http://schemas.openxmlformats.org/drawingml/2006/main">
-            <a:r>
-              <a:t/>
-            </a:r>
-          </a:p>
-          <a:p xmlns:a="http://schemas.openxmlformats.org/drawingml/2006/main">
-            <a:r>
-              <a:t>OBJEKTIVI KOGNITIV</a:t>
-            </a:r>
-          </a:p>
-          <a:p xmlns:a="http://schemas.openxmlformats.org/drawingml/2006/main">
-            <a:r>
-              <a:t>Studenti të lidhë teknologjitë me përgjegjësi konkrete dhe të dallojë telefonin, serverin dhe databazën.</a:t>
-            </a:r>
-          </a:p>
-          <a:p xmlns:a="http://schemas.openxmlformats.org/drawingml/2006/main">
-            <a:r>
-              <a:t/>
-            </a:r>
-          </a:p>
-          <a:p xmlns:a="http://schemas.openxmlformats.org/drawingml/2006/main">
-            <a:r>
-              <a:t>SKENARI I PROFESORIT</a:t>
-            </a:r>
-          </a:p>
-          <a:p xmlns:a="http://schemas.openxmlformats.org/drawingml/2006/main">
-            <a:r>
-              <a:t>Kur shtypim kërko vend, prekim ndërfaqen në telefon. Kërkesa duhet të arrijë te një operacion që verifikon përdoruesin dhe rregullat.</a:t>
-            </a:r>
-          </a:p>
-          <a:p xmlns:a="http://schemas.openxmlformats.org/drawingml/2006/main">
-            <a:r>
-              <a:t/>
-            </a:r>
-          </a:p>
-          <a:p xmlns:a="http://schemas.openxmlformats.org/drawingml/2006/main">
-            <a:r>
-              <a:t>React ndërton ndërfaqen. Next.js organizon aplikacionin dhe pjesët që ekzekutohen në server. Supabase na jep identitetin dhe ruajtjen e të dhënave.</a:t>
-            </a:r>
-          </a:p>
-          <a:p xmlns:a="http://schemas.openxmlformats.org/drawingml/2006/main">
-            <a:r>
-              <a:t/>
-            </a:r>
-          </a:p>
-          <a:p xmlns:a="http://schemas.openxmlformats.org/drawingml/2006/main">
-            <a:r>
-              <a:t>Server Components ekzekutohen në server. Pjesët interaktive që kërkojnë aftësi të shfletuesit përdorin Client Components. Ndarja na ndihmon të vendosim ku kryhet puna.</a:t>
-            </a:r>
-          </a:p>
-          <a:p xmlns:a="http://schemas.openxmlformats.org/drawingml/2006/main">
-            <a:r>
-              <a:t/>
-            </a:r>
-          </a:p>
-          <a:p xmlns:a="http://schemas.openxmlformats.org/drawingml/2006/main">
-            <a:r>
-              <a:t>TypeScript kontrollon llojet gjatë zhvillimit. Të dhënat që vijnë nga rrjeti ende kërkojnë validim.</a:t>
-            </a:r>
-          </a:p>
-          <a:p xmlns:a="http://schemas.openxmlformats.org/drawingml/2006/main">
-            <a:r>
-              <a:t/>
-            </a:r>
-          </a:p>
-          <a:p xmlns:a="http://schemas.openxmlformats.org/drawingml/2006/main">
-            <a:r>
-              <a:t>Për këtë kurs zgjedhim një rrugë të qartë për ndryshimet kritike: kërkesë e autentikuar, kontroll i rregullave dhe operacion i qëndrueshëm në databazë.</a:t>
-            </a:r>
-          </a:p>
-          <a:p xmlns:a="http://schemas.openxmlformats.org/drawingml/2006/main">
-            <a:r>
-              <a:t/>
-            </a:r>
-          </a:p>
-          <a:p xmlns:a="http://schemas.openxmlformats.org/drawingml/2006/main">
-            <a:r>
-              <a:t>PYETJA INTERAKTIVE</a:t>
-            </a:r>
-          </a:p>
-          <a:p xmlns:a="http://schemas.openxmlformats.org/drawingml/2006/main">
-            <a:r>
-              <a:t>Nëse çmimi ose numri i vendeve ndryshohet në shfletues, cila pjesë duhet të vendosë nëse ndryshimi lejohet?</a:t>
-            </a:r>
-          </a:p>
-          <a:p xmlns:a="http://schemas.openxmlformats.org/drawingml/2006/main">
-            <a:r>
-              <a:t/>
-            </a:r>
-          </a:p>
-          <a:p xmlns:a="http://schemas.openxmlformats.org/drawingml/2006/main">
-            <a:r>
-              <a:t>UDHËZIMI</a:t>
-            </a:r>
-          </a:p>
-          <a:p xmlns:a="http://schemas.openxmlformats.org/drawingml/2006/main">
-            <a:r>
-              <a:t>1 minutë. Ndiqni kërkesën përmes diagramit.</a:t>
-            </a:r>
-          </a:p>
-          <a:p xmlns:a="http://schemas.openxmlformats.org/drawingml/2006/main">
-            <a:r>
-              <a:t/>
-            </a:r>
-          </a:p>
-          <a:p xmlns:a="http://schemas.openxmlformats.org/drawingml/2006/main">
-            <a:r>
-              <a:t>PARALAJMËRIMI INXHINIERIK</a:t>
-            </a:r>
-          </a:p>
-          <a:p xmlns:a="http://schemas.openxmlformats.org/drawingml/2006/main">
-            <a:r>
-              <a:t>Vendndodhja e kodit dhe autoriteti i tij janë vendime që duhet t’i projektojmë shprehimisht.</a:t>
-            </a:r>
-          </a:p>
-          <a:p xmlns:a="http://schemas.openxmlformats.org/drawingml/2006/main">
-            <a:r>
-              <a:t/>
-            </a:r>
-          </a:p>
-          <a:p xmlns:a="http://schemas.openxmlformats.org/drawingml/2006/main">
-            <a:r>
-              <a:t>BURIM / SHËNIM</a:t>
-            </a:r>
-          </a:p>
-          <a:p xmlns:a="http://schemas.openxmlformats.org/drawingml/2006/main">
-            <a:r>
-              <a:t>https://nextjs.org/docs/app/getting-started/server-and-client-components</a:t>
-            </a:r>
-          </a:p>
-          <a:p xmlns:a="http://schemas.openxmlformats.org/drawingml/2006/main">
-            <a:r>
-              <a:t/>
-            </a:r>
-          </a:p>
-          <a:p xmlns:a="http://schemas.openxmlformats.org/drawingml/2006/main">
-            <a:r>
-              <a:t>Të gjitha situatat, oraret, pamjet e aplikacionit dhe identitetet e RideShare janë ilustrime mësimore.</a:t>
-            </a:r>
-          </a:p>
-          <a:p xmlns:a="http://schemas.openxmlformats.org/drawingml/2006/main">
-            <a:r>
-              <a:t/>
-            </a:r>
-          </a:p>
-          <a:p xmlns:a="http://schemas.openxmlformats.org/drawingml/2006/main">
-            <a:r>
-              <a:t>Logo: https://aab-edu.net/wp-content/themes/Kolegji-AAB/dist/img/kolegji-aab-logo.svg</a:t>
-            </a:r>
-          </a:p>
-        </p:txBody>
-      </p:sp>
-      <p:sp>
-        <p:nvSpPr>
-          <p:cNvPr id="4" name="Slide Number Placeholder 3"/>
-          <p:cNvSpPr>
-            <a:spLocks xmlns:a="http://schemas.openxmlformats.org/drawingml/2006/main" noGrp="1"/>
-          </p:cNvSpPr>
-          <p:nvPr>
-            <p:ph type="sldNum" idx="5"/>
-          </p:nvPr>
-        </p:nvSpPr>
-        <p:spPr/>
-        <p:txBody>
-          <a:bodyPr xmlns:a="http://schemas.openxmlformats.org/drawingml/2006/main"/>
-          <a:lstStyle xmlns:a="http://schemas.openxmlformats.org/drawingml/2006/main"/>
-          <a:p xmlns:a="http://schemas.openxmlformats.org/drawingml/2006/main"/>
-        </p:txBody>
-      </p:sp>
-    </p:spTree>
-  </p:cSld>
-  <p:clrMapOvr>
-    <a:masterClrMapping xmlns:a="http://schemas.openxmlformats.org/drawingml/2006/main"/>
-  </p:clrMapOvr>
-</p:notes>
-</file>
-
-<file path=ppt/notesSlides/notesSlide21.xml><?xml version="1.0" encoding="utf-8"?>
-<p:notes xmlns:p="http://schemas.openxmlformats.org/presentationml/2006/main">
-  <p:cSld>
-    <p:spTree>
-      <p:nvGrpSpPr>
-        <p:cNvPr id="1" name=""/>
-        <p:cNvGrpSpPr/>
-        <p:nvPr/>
-      </p:nvGrpSpPr>
-      <p:grpSpPr>
-        <a:xfrm xmlns:a="http://schemas.openxmlformats.org/drawingml/2006/main"/>
-      </p:grpSpPr>
-      <p:sp>
-        <p:nvSpPr>
-          <p:cNvPr id="2" name="Slide Image Placeholder 1"/>
-          <p:cNvSpPr>
-            <a:spLocks xmlns:a="http://schemas.openxmlformats.org/drawingml/2006/main" noGrp="1"/>
-          </p:cNvSpPr>
-          <p:nvPr>
-            <p:ph type="sldImg" idx="0"/>
-          </p:nvPr>
-        </p:nvSpPr>
-        <p:spPr/>
-      </p:sp>
-      <p:sp>
-        <p:nvSpPr>
-          <p:cNvPr id="3" name="Notes Placeholder 2"/>
-          <p:cNvSpPr>
-            <a:spLocks xmlns:a="http://schemas.openxmlformats.org/drawingml/2006/main" noGrp="1"/>
-          </p:cNvSpPr>
-          <p:nvPr>
-            <p:ph type="body" idx="1"/>
-          </p:nvPr>
-        </p:nvSpPr>
-        <p:spPr/>
-        <p:txBody>
-          <a:bodyPr xmlns:a="http://schemas.openxmlformats.org/drawingml/2006/main"/>
-          <a:lstStyle xmlns:a="http://schemas.openxmlformats.org/drawingml/2006/main"/>
-          <a:p xmlns:a="http://schemas.openxmlformats.org/drawingml/2006/main">
-            <a:r>
-              <a:t>LIGJËRATA 1 — PROGRAMIMI PËR PAJISJE MOBILE</a:t>
-            </a:r>
-          </a:p>
-          <a:p xmlns:a="http://schemas.openxmlformats.org/drawingml/2006/main">
-            <a:r>
-              <a:t>SLAJDI 13: Telefoni kërkon. Sistemi verifikon.</a:t>
-            </a:r>
-          </a:p>
-          <a:p xmlns:a="http://schemas.openxmlformats.org/drawingml/2006/main">
-            <a:r>
-              <a:t>KOHA: 53:00–57:00 | FAZA: Arkitektura mobile</a:t>
-            </a:r>
-          </a:p>
-          <a:p xmlns:a="http://schemas.openxmlformats.org/drawingml/2006/main">
-            <a:r>
-              <a:t>Koha përfshin ndërveprimin.</a:t>
-            </a:r>
-          </a:p>
-          <a:p xmlns:a="http://schemas.openxmlformats.org/drawingml/2006/main">
-            <a:r>
-              <a:t/>
-            </a:r>
-          </a:p>
-          <a:p xmlns:a="http://schemas.openxmlformats.org/drawingml/2006/main">
-            <a:r>
-              <a:t>OBJEKTIVI KOGNITIV</a:t>
-            </a:r>
-          </a:p>
-          <a:p xmlns:a="http://schemas.openxmlformats.org/drawingml/2006/main">
-            <a:r>
-              <a:t>Studenti të ndajë autentikimin nga autorizimi dhe të kuptojë se klienti është mjedis i pakontrolluar.</a:t>
-            </a:r>
-          </a:p>
-          <a:p xmlns:a="http://schemas.openxmlformats.org/drawingml/2006/main">
-            <a:r>
-              <a:t/>
-            </a:r>
-          </a:p>
-          <a:p xmlns:a="http://schemas.openxmlformats.org/drawingml/2006/main">
-            <a:r>
-              <a:t>SKENARI I PROFESORIT</a:t>
-            </a:r>
-          </a:p>
-          <a:p xmlns:a="http://schemas.openxmlformats.org/drawingml/2006/main">
-            <a:r>
-              <a:t>Telefoni është jashtë kontrollit tonë. Dikush mund të ndryshojë kërkesën ose ta dërgojë pa përdorur fare butonat tanë.</a:t>
-            </a:r>
-          </a:p>
-          <a:p xmlns:a="http://schemas.openxmlformats.org/drawingml/2006/main">
-            <a:r>
-              <a:t/>
-            </a:r>
-          </a:p>
-          <a:p xmlns:a="http://schemas.openxmlformats.org/drawingml/2006/main">
-            <a:r>
-              <a:t>Autentikimi na tregon kush po kërkon. Autorizimi përcakton çfarë lejohet të bëjë.</a:t>
-            </a:r>
-          </a:p>
-          <a:p xmlns:a="http://schemas.openxmlformats.org/drawingml/2006/main">
-            <a:r>
-              <a:t/>
-            </a:r>
-          </a:p>
-          <a:p xmlns:a="http://schemas.openxmlformats.org/drawingml/2006/main">
-            <a:r>
-              <a:t>Për shembull, një student mund të jetë i identifikuar dhe përsëri të mos ketë të drejtë të ndryshojë udhëtimin e dikujt tjetër.</a:t>
-            </a:r>
-          </a:p>
-          <a:p xmlns:a="http://schemas.openxmlformats.org/drawingml/2006/main">
-            <a:r>
-              <a:t/>
-            </a:r>
-          </a:p>
-          <a:p xmlns:a="http://schemas.openxmlformats.org/drawingml/2006/main">
-            <a:r>
-              <a:t>Me RLS përcaktojmë rregulla të qasjes mbi rreshtat e databazës. Duhet të konfigurojmë edhe privilegjet përkatëse.</a:t>
-            </a:r>
-          </a:p>
-          <a:p xmlns:a="http://schemas.openxmlformats.org/drawingml/2006/main">
-            <a:r>
-              <a:t/>
-            </a:r>
-          </a:p>
-          <a:p xmlns:a="http://schemas.openxmlformats.org/drawingml/2006/main">
-            <a:r>
-              <a:t>Çelësat me privilegje administrative mbahen në server. Ata nuk dërgohen te telefoni.</a:t>
-            </a:r>
-          </a:p>
-          <a:p xmlns:a="http://schemas.openxmlformats.org/drawingml/2006/main">
-            <a:r>
-              <a:t/>
-            </a:r>
-          </a:p>
-          <a:p xmlns:a="http://schemas.openxmlformats.org/drawingml/2006/main">
-            <a:r>
-              <a:t>Identiteti merret nga autentikimi i verifikuar, jo nga fusha unë jam ky përdorues në trupin e kërkesës.</a:t>
-            </a:r>
-          </a:p>
-          <a:p xmlns:a="http://schemas.openxmlformats.org/drawingml/2006/main">
-            <a:r>
-              <a:t/>
-            </a:r>
-          </a:p>
-          <a:p xmlns:a="http://schemas.openxmlformats.org/drawingml/2006/main">
-            <a:r>
-              <a:t>PYETJA INTERAKTIVE</a:t>
-            </a:r>
-          </a:p>
-          <a:p xmlns:a="http://schemas.openxmlformats.org/drawingml/2006/main">
-            <a:r>
-              <a:t>Nëse butoni fshi është i fshehur për studentin, a e kemi ndaluar fshirjen? Ku duhet të refuzohet kërkesa?</a:t>
-            </a:r>
-          </a:p>
-          <a:p xmlns:a="http://schemas.openxmlformats.org/drawingml/2006/main">
-            <a:r>
-              <a:t/>
-            </a:r>
-          </a:p>
-          <a:p xmlns:a="http://schemas.openxmlformats.org/drawingml/2006/main">
-            <a:r>
-              <a:t>UDHËZIMI</a:t>
-            </a:r>
-          </a:p>
-          <a:p xmlns:a="http://schemas.openxmlformats.org/drawingml/2006/main">
-            <a:r>
-              <a:t>1 minutë. Theksoni kontrollin në anën e besuar.</a:t>
-            </a:r>
-          </a:p>
-          <a:p xmlns:a="http://schemas.openxmlformats.org/drawingml/2006/main">
-            <a:r>
-              <a:t/>
-            </a:r>
-          </a:p>
-          <a:p xmlns:a="http://schemas.openxmlformats.org/drawingml/2006/main">
-            <a:r>
-              <a:t>PARALAJMËRIMI INXHINIERIK</a:t>
-            </a:r>
-          </a:p>
-          <a:p xmlns:a="http://schemas.openxmlformats.org/drawingml/2006/main">
-            <a:r>
-              <a:t>RLS mbron qasjen sipas politikave. Integriteti i rezervimeve kërkon edhe kufizime dhe operacione të sakta në databazë.</a:t>
-            </a:r>
-          </a:p>
-          <a:p xmlns:a="http://schemas.openxmlformats.org/drawingml/2006/main">
-            <a:r>
-              <a:t/>
-            </a:r>
-          </a:p>
-          <a:p xmlns:a="http://schemas.openxmlformats.org/drawingml/2006/main">
-            <a:r>
-              <a:t>BURIM / SHËNIM</a:t>
-            </a:r>
-          </a:p>
-          <a:p xmlns:a="http://schemas.openxmlformats.org/drawingml/2006/main">
-            <a:r>
-              <a:t>https://supabase.com/docs/guides/database/postgres/row-level-security</a:t>
-            </a:r>
-          </a:p>
-          <a:p xmlns:a="http://schemas.openxmlformats.org/drawingml/2006/main">
-            <a:r>
-              <a:t/>
-            </a:r>
-          </a:p>
-          <a:p xmlns:a="http://schemas.openxmlformats.org/drawingml/2006/main">
-            <a:r>
-              <a:t>Të gjitha situatat, oraret, pamjet e aplikacionit dhe identitetet e RideShare janë ilustrime mësimore.</a:t>
-            </a:r>
-          </a:p>
-          <a:p xmlns:a="http://schemas.openxmlformats.org/drawingml/2006/main">
-            <a:r>
-              <a:t/>
-            </a:r>
-          </a:p>
-          <a:p xmlns:a="http://schemas.openxmlformats.org/drawingml/2006/main">
-            <a:r>
-              <a:t>Logo: https://aab-edu.net/wp-content/themes/Kolegji-AAB/dist/img/kolegji-aab-logo.svg</a:t>
-            </a:r>
-          </a:p>
-        </p:txBody>
-      </p:sp>
-      <p:sp>
-        <p:nvSpPr>
-          <p:cNvPr id="4" name="Slide Number Placeholder 3"/>
-          <p:cNvSpPr>
-            <a:spLocks xmlns:a="http://schemas.openxmlformats.org/drawingml/2006/main" noGrp="1"/>
-          </p:cNvSpPr>
-          <p:nvPr>
-            <p:ph type="sldNum" idx="5"/>
-          </p:nvPr>
-        </p:nvSpPr>
-        <p:spPr/>
-        <p:txBody>
-          <a:bodyPr xmlns:a="http://schemas.openxmlformats.org/drawingml/2006/main"/>
-          <a:lstStyle xmlns:a="http://schemas.openxmlformats.org/drawingml/2006/main"/>
-          <a:p xmlns:a="http://schemas.openxmlformats.org/drawingml/2006/main"/>
-        </p:txBody>
-      </p:sp>
-    </p:spTree>
-  </p:cSld>
-  <p:clrMapOvr>
-    <a:masterClrMapping xmlns:a="http://schemas.openxmlformats.org/drawingml/2006/main"/>
-  </p:clrMapOvr>
-</p:notes>
-</file>
-
-<file path=ppt/notesSlides/notesSlide22.xml><?xml version="1.0" encoding="utf-8"?>
-<p:notes xmlns:p="http://schemas.openxmlformats.org/presentationml/2006/main">
-  <p:cSld>
-    <p:spTree>
-      <p:nvGrpSpPr>
-        <p:cNvPr id="1" name=""/>
-        <p:cNvGrpSpPr/>
-        <p:nvPr/>
-      </p:nvGrpSpPr>
-      <p:grpSpPr>
-        <a:xfrm xmlns:a="http://schemas.openxmlformats.org/drawingml/2006/main"/>
-      </p:grpSpPr>
-      <p:sp>
-        <p:nvSpPr>
-          <p:cNvPr id="2" name="Slide Image Placeholder 1"/>
-          <p:cNvSpPr>
-            <a:spLocks xmlns:a="http://schemas.openxmlformats.org/drawingml/2006/main" noGrp="1"/>
-          </p:cNvSpPr>
-          <p:nvPr>
-            <p:ph type="sldImg" idx="0"/>
-          </p:nvPr>
-        </p:nvSpPr>
-        <p:spPr/>
-      </p:sp>
-      <p:sp>
-        <p:nvSpPr>
-          <p:cNvPr id="3" name="Notes Placeholder 2"/>
-          <p:cNvSpPr>
-            <a:spLocks xmlns:a="http://schemas.openxmlformats.org/drawingml/2006/main" noGrp="1"/>
-          </p:cNvSpPr>
-          <p:nvPr>
-            <p:ph type="body" idx="1"/>
-          </p:nvPr>
-        </p:nvSpPr>
-        <p:spPr/>
-        <p:txBody>
-          <a:bodyPr xmlns:a="http://schemas.openxmlformats.org/drawingml/2006/main"/>
-          <a:lstStyle xmlns:a="http://schemas.openxmlformats.org/drawingml/2006/main"/>
-          <a:p xmlns:a="http://schemas.openxmlformats.org/drawingml/2006/main">
-            <a:r>
-              <a:t>LIGJËRATA 1 — PROGRAMIMI PËR PAJISJE MOBILE</a:t>
-            </a:r>
-          </a:p>
-          <a:p xmlns:a="http://schemas.openxmlformats.org/drawingml/2006/main">
-            <a:r>
-              <a:t>SLAJDI 14: Rrjeti nuk është premtim</a:t>
-            </a:r>
-          </a:p>
-          <a:p xmlns:a="http://schemas.openxmlformats.org/drawingml/2006/main">
-            <a:r>
-              <a:t>KOHA: 57:00–61:00 | FAZA: Arkitektura mobile</a:t>
-            </a:r>
-          </a:p>
-          <a:p xmlns:a="http://schemas.openxmlformats.org/drawingml/2006/main">
-            <a:r>
-              <a:t>Koha përfshin ndërveprimin.</a:t>
-            </a:r>
-          </a:p>
-          <a:p xmlns:a="http://schemas.openxmlformats.org/drawingml/2006/main">
-            <a:r>
-              <a:t/>
-            </a:r>
-          </a:p>
-          <a:p xmlns:a="http://schemas.openxmlformats.org/drawingml/2006/main">
-            <a:r>
-              <a:t>OBJEKTIVI KOGNITIV</a:t>
-            </a:r>
-          </a:p>
-          <a:p xmlns:a="http://schemas.openxmlformats.org/drawingml/2006/main">
-            <a:r>
-              <a:t>Studenti të kuptojë se puna pa rrjet është sjellje e projektuar, me kufij të dukshëm.</a:t>
-            </a:r>
-          </a:p>
-          <a:p xmlns:a="http://schemas.openxmlformats.org/drawingml/2006/main">
-            <a:r>
-              <a:t/>
-            </a:r>
-          </a:p>
-          <a:p xmlns:a="http://schemas.openxmlformats.org/drawingml/2006/main">
-            <a:r>
-              <a:t>SKENARI I PROFESORIT</a:t>
-            </a:r>
-          </a:p>
-          <a:p xmlns:a="http://schemas.openxmlformats.org/drawingml/2006/main">
-            <a:r>
-              <a:t>Studenti hap aplikacionin, pastaj humbet lidhjen. Çfarë shfaqim?</a:t>
-            </a:r>
-          </a:p>
-          <a:p xmlns:a="http://schemas.openxmlformats.org/drawingml/2006/main">
-            <a:r>
-              <a:t/>
-            </a:r>
-          </a:p>
-          <a:p xmlns:a="http://schemas.openxmlformats.org/drawingml/2006/main">
-            <a:r>
-              <a:t>Service Worker është një mekanizëm që mund të ndërmjetësojë kërkesa dhe të përdorë përgjigje të ruajtura. Cache Storage na ndihmon të ruajmë burime të përzgjedhura.</a:t>
-            </a:r>
-          </a:p>
-          <a:p xmlns:a="http://schemas.openxmlformats.org/drawingml/2006/main">
-            <a:r>
-              <a:t/>
-            </a:r>
-          </a:p>
-          <a:p xmlns:a="http://schemas.openxmlformats.org/drawingml/2006/main">
-            <a:r>
-              <a:t>Duhet të vendosim çfarë ruajmë, për sa kohë dhe si e përditësojmë.</a:t>
-            </a:r>
-          </a:p>
-          <a:p xmlns:a="http://schemas.openxmlformats.org/drawingml/2006/main">
-            <a:r>
-              <a:t/>
-            </a:r>
-          </a:p>
-          <a:p xmlns:a="http://schemas.openxmlformats.org/drawingml/2006/main">
-            <a:r>
-              <a:t>Për versionin tonë fillestar, mund të ruajmë skeletin e aplikacionit dhe një pamje të përshtatshme offline. Të dhënat private nuk futen pa dallim në cache.</a:t>
-            </a:r>
-          </a:p>
-          <a:p xmlns:a="http://schemas.openxmlformats.org/drawingml/2006/main">
-            <a:r>
-              <a:t/>
-            </a:r>
-          </a:p>
-          <a:p xmlns:a="http://schemas.openxmlformats.org/drawingml/2006/main">
-            <a:r>
-              <a:t>Nëse shfaqim një listë të vjetër udhëtimesh, e etiketojmë si të tillë. Konfirmimi i një vendi kërkon komunikim dhe verifikim.</a:t>
-            </a:r>
-          </a:p>
-          <a:p xmlns:a="http://schemas.openxmlformats.org/drawingml/2006/main">
-            <a:r>
-              <a:t/>
-            </a:r>
-          </a:p>
-          <a:p xmlns:a="http://schemas.openxmlformats.org/drawingml/2006/main">
-            <a:r>
-              <a:t>Përdoruesi duhet ta kuptojë dallimin mes asaj që sheh dhe asaj që sistemi ka konfirmuar.</a:t>
-            </a:r>
-          </a:p>
-          <a:p xmlns:a="http://schemas.openxmlformats.org/drawingml/2006/main">
-            <a:r>
-              <a:t/>
-            </a:r>
-          </a:p>
-          <a:p xmlns:a="http://schemas.openxmlformats.org/drawingml/2006/main">
-            <a:r>
-              <a:t>PYETJA INTERAKTIVE</a:t>
-            </a:r>
-          </a:p>
-          <a:p xmlns:a="http://schemas.openxmlformats.org/drawingml/2006/main">
-            <a:r>
-              <a:t>Cilat informacione do të lejonit të shfaqeshin offline dhe cilat veprime do t’i ndalonit?</a:t>
-            </a:r>
-          </a:p>
-          <a:p xmlns:a="http://schemas.openxmlformats.org/drawingml/2006/main">
-            <a:r>
-              <a:t/>
-            </a:r>
-          </a:p>
-          <a:p xmlns:a="http://schemas.openxmlformats.org/drawingml/2006/main">
-            <a:r>
-              <a:t>UDHËZIMI</a:t>
-            </a:r>
-          </a:p>
-          <a:p xmlns:a="http://schemas.openxmlformats.org/drawingml/2006/main">
-            <a:r>
-              <a:t>1 minutë. Ndani leximin nga konfirmimi i veprimit.</a:t>
-            </a:r>
-          </a:p>
-          <a:p xmlns:a="http://schemas.openxmlformats.org/drawingml/2006/main">
-            <a:r>
-              <a:t/>
-            </a:r>
-          </a:p>
-          <a:p xmlns:a="http://schemas.openxmlformats.org/drawingml/2006/main">
-            <a:r>
-              <a:t>PARALAJMËRIMI INXHINIERIK</a:t>
-            </a:r>
-          </a:p>
-          <a:p xmlns:a="http://schemas.openxmlformats.org/drawingml/2006/main">
-            <a:r>
-              <a:t>Një përgjigje e ruajtur mund të jetë e shpejtë dhe njëkohësisht e vjetruar.</a:t>
-            </a:r>
-          </a:p>
-          <a:p xmlns:a="http://schemas.openxmlformats.org/drawingml/2006/main">
-            <a:r>
-              <a:t/>
-            </a:r>
-          </a:p>
-          <a:p xmlns:a="http://schemas.openxmlformats.org/drawingml/2006/main">
-            <a:r>
-              <a:t>BURIM / SHËNIM</a:t>
-            </a:r>
-          </a:p>
-          <a:p xmlns:a="http://schemas.openxmlformats.org/drawingml/2006/main">
-            <a:r>
-              <a:t>https://developer.mozilla.org/en-US/docs/Web/API/Service_Worker_API</a:t>
-            </a:r>
-          </a:p>
-          <a:p xmlns:a="http://schemas.openxmlformats.org/drawingml/2006/main">
-            <a:r>
-              <a:t/>
-            </a:r>
-          </a:p>
-          <a:p xmlns:a="http://schemas.openxmlformats.org/drawingml/2006/main">
-            <a:r>
-              <a:t>Të gjitha situatat, oraret, pamjet e aplikacionit dhe identitetet e RideShare janë ilustrime mësimore.</a:t>
-            </a:r>
-          </a:p>
-          <a:p xmlns:a="http://schemas.openxmlformats.org/drawingml/2006/main">
-            <a:r>
-              <a:t/>
-            </a:r>
-          </a:p>
-          <a:p xmlns:a="http://schemas.openxmlformats.org/drawingml/2006/main">
-            <a:r>
-              <a:t>Logo: https://aab-edu.net/wp-content/themes/Kolegji-AAB/dist/img/kolegji-aab-logo.svg</a:t>
-            </a:r>
-          </a:p>
-        </p:txBody>
-      </p:sp>
-      <p:sp>
-        <p:nvSpPr>
-          <p:cNvPr id="4" name="Slide Number Placeholder 3"/>
-          <p:cNvSpPr>
-            <a:spLocks xmlns:a="http://schemas.openxmlformats.org/drawingml/2006/main" noGrp="1"/>
-          </p:cNvSpPr>
-          <p:nvPr>
-            <p:ph type="sldNum" idx="5"/>
-          </p:nvPr>
-        </p:nvSpPr>
-        <p:spPr/>
-        <p:txBody>
-          <a:bodyPr xmlns:a="http://schemas.openxmlformats.org/drawingml/2006/main"/>
-          <a:lstStyle xmlns:a="http://schemas.openxmlformats.org/drawingml/2006/main"/>
-          <a:p xmlns:a="http://schemas.openxmlformats.org/drawingml/2006/main"/>
-        </p:txBody>
-      </p:sp>
-    </p:spTree>
-  </p:cSld>
-  <p:clrMapOvr>
-    <a:masterClrMapping xmlns:a="http://schemas.openxmlformats.org/drawingml/2006/main"/>
-  </p:clrMapOvr>
-</p:notes>
-</file>
-
-<file path=ppt/notesSlides/notesSlide23.xml><?xml version="1.0" encoding="utf-8"?>
-<p:notes xmlns:p="http://schemas.openxmlformats.org/presentationml/2006/main">
-  <p:cSld>
-    <p:spTree>
-      <p:nvGrpSpPr>
-        <p:cNvPr id="1" name=""/>
-        <p:cNvGrpSpPr/>
-        <p:nvPr/>
-      </p:nvGrpSpPr>
-      <p:grpSpPr>
-        <a:xfrm xmlns:a="http://schemas.openxmlformats.org/drawingml/2006/main"/>
-      </p:grpSpPr>
-      <p:sp>
-        <p:nvSpPr>
-          <p:cNvPr id="2" name="Slide Image Placeholder 1"/>
-          <p:cNvSpPr>
-            <a:spLocks xmlns:a="http://schemas.openxmlformats.org/drawingml/2006/main" noGrp="1"/>
-          </p:cNvSpPr>
-          <p:nvPr>
-            <p:ph type="sldImg" idx="0"/>
-          </p:nvPr>
-        </p:nvSpPr>
-        <p:spPr/>
-      </p:sp>
-      <p:sp>
-        <p:nvSpPr>
-          <p:cNvPr id="3" name="Notes Placeholder 2"/>
-          <p:cNvSpPr>
-            <a:spLocks xmlns:a="http://schemas.openxmlformats.org/drawingml/2006/main" noGrp="1"/>
-          </p:cNvSpPr>
-          <p:nvPr>
-            <p:ph type="body" idx="1"/>
-          </p:nvPr>
-        </p:nvSpPr>
-        <p:spPr/>
-        <p:txBody>
-          <a:bodyPr xmlns:a="http://schemas.openxmlformats.org/drawingml/2006/main"/>
-          <a:lstStyle xmlns:a="http://schemas.openxmlformats.org/drawingml/2006/main"/>
-          <a:p xmlns:a="http://schemas.openxmlformats.org/drawingml/2006/main">
-            <a:r>
-              <a:t>LIGJËRATA 1 — PROGRAMIMI PËR PAJISJE MOBILE</a:t>
-            </a:r>
-          </a:p>
-          <a:p xmlns:a="http://schemas.openxmlformats.org/drawingml/2006/main">
-            <a:r>
-              <a:t>SLAJDI 15: Kërkesa nuk është konfirmim</a:t>
-            </a:r>
-          </a:p>
-          <a:p xmlns:a="http://schemas.openxmlformats.org/drawingml/2006/main">
-            <a:r>
-              <a:t>KOHA: 61:00–65:00 | FAZA: Arkitektura mobile</a:t>
-            </a:r>
-          </a:p>
-          <a:p xmlns:a="http://schemas.openxmlformats.org/drawingml/2006/main">
-            <a:r>
-              <a:t>Koha përfshin ndërveprimin.</a:t>
-            </a:r>
-          </a:p>
-          <a:p xmlns:a="http://schemas.openxmlformats.org/drawingml/2006/main">
-            <a:r>
-              <a:t/>
-            </a:r>
-          </a:p>
-          <a:p xmlns:a="http://schemas.openxmlformats.org/drawingml/2006/main">
-            <a:r>
-              <a:t>OBJEKTIVI KOGNITIV</a:t>
-            </a:r>
-          </a:p>
-          <a:p xmlns:a="http://schemas.openxmlformats.org/drawingml/2006/main">
-            <a:r>
-              <a:t>Studenti të dallojë qëllimin lokal nga rezultati i konfirmuar dhe të kuptojë rrezikun e përsëritjes.</a:t>
-            </a:r>
-          </a:p>
-          <a:p xmlns:a="http://schemas.openxmlformats.org/drawingml/2006/main">
-            <a:r>
-              <a:t/>
-            </a:r>
-          </a:p>
-          <a:p xmlns:a="http://schemas.openxmlformats.org/drawingml/2006/main">
-            <a:r>
-              <a:t>SKENARI I PROFESORIT</a:t>
-            </a:r>
-          </a:p>
-          <a:p xmlns:a="http://schemas.openxmlformats.org/drawingml/2006/main">
-            <a:r>
-              <a:t>Imagjinoni se shtypni butonin. Serveri e regjistron kërkesën, por përgjigjja humbet gjatë rrugës.</a:t>
-            </a:r>
-          </a:p>
-          <a:p xmlns:a="http://schemas.openxmlformats.org/drawingml/2006/main">
-            <a:r>
-              <a:t/>
-            </a:r>
-          </a:p>
-          <a:p xmlns:a="http://schemas.openxmlformats.org/drawingml/2006/main">
-            <a:r>
-              <a:t>Telefoni nuk e di nëse operacioni pati sukses. Nëse përdoruesi provon përsëri, duhet të shmangim krijimin e një kërkese të dytë.</a:t>
-            </a:r>
-          </a:p>
-          <a:p xmlns:a="http://schemas.openxmlformats.org/drawingml/2006/main">
-            <a:r>
-              <a:t/>
-            </a:r>
-          </a:p>
-          <a:p xmlns:a="http://schemas.openxmlformats.org/drawingml/2006/main">
-            <a:r>
-              <a:t>Këtë sjellje e projektojmë me identifikim të operacionit dhe kufizime përkatëse. Më vonë do ta lidhim me konceptin e idempotencës.</a:t>
-            </a:r>
-          </a:p>
-          <a:p xmlns:a="http://schemas.openxmlformats.org/drawingml/2006/main">
-            <a:r>
-              <a:t/>
-            </a:r>
-          </a:p>
-          <a:p xmlns:a="http://schemas.openxmlformats.org/drawingml/2006/main">
-            <a:r>
-              <a:t>Në MVP-në fillestare nuk do të ndërtojmë një radhë të ndërlikuar rezervimesh offline. Do të tregojmë pasigurinë dhe do të kontrollojmë statusin kur lidhja rikthehet.</a:t>
-            </a:r>
-          </a:p>
-          <a:p xmlns:a="http://schemas.openxmlformats.org/drawingml/2006/main">
-            <a:r>
-              <a:t/>
-            </a:r>
-          </a:p>
-          <a:p xmlns:a="http://schemas.openxmlformats.org/drawingml/2006/main">
-            <a:r>
-              <a:t>Realtime mund t’ua përditësojë pamjen përdoruesve. Vendimin për kapacitetin e ruan operacioni në databazë.</a:t>
-            </a:r>
-          </a:p>
-          <a:p xmlns:a="http://schemas.openxmlformats.org/drawingml/2006/main">
-            <a:r>
-              <a:t/>
-            </a:r>
-          </a:p>
-          <a:p xmlns:a="http://schemas.openxmlformats.org/drawingml/2006/main">
-            <a:r>
-              <a:t>PYETJA INTERAKTIVE</a:t>
-            </a:r>
-          </a:p>
-          <a:p xmlns:a="http://schemas.openxmlformats.org/drawingml/2006/main">
-            <a:r>
-              <a:t>Çfarë mesazhi do t’i shfaqnit përdoruesit kur nuk dini nëse kërkesa mbërriti?</a:t>
-            </a:r>
-          </a:p>
-          <a:p xmlns:a="http://schemas.openxmlformats.org/drawingml/2006/main">
-            <a:r>
-              <a:t/>
-            </a:r>
-          </a:p>
-          <a:p xmlns:a="http://schemas.openxmlformats.org/drawingml/2006/main">
-            <a:r>
-              <a:t>UDHËZIMI</a:t>
-            </a:r>
-          </a:p>
-          <a:p xmlns:a="http://schemas.openxmlformats.org/drawingml/2006/main">
-            <a:r>
-              <a:t>1 minutë. Kërkoni një mesazh të qartë, pa premtim të rremë.</a:t>
-            </a:r>
-          </a:p>
-          <a:p xmlns:a="http://schemas.openxmlformats.org/drawingml/2006/main">
-            <a:r>
-              <a:t/>
-            </a:r>
-          </a:p>
-          <a:p xmlns:a="http://schemas.openxmlformats.org/drawingml/2006/main">
-            <a:r>
-              <a:t>PARALAJMËRIMI INXHINIERIK</a:t>
-            </a:r>
-          </a:p>
-          <a:p xmlns:a="http://schemas.openxmlformats.org/drawingml/2006/main">
-            <a:r>
-              <a:t>Mungesa e përgjigjes nuk provon se operacioni dështoi.</a:t>
-            </a:r>
-          </a:p>
-          <a:p xmlns:a="http://schemas.openxmlformats.org/drawingml/2006/main">
-            <a:r>
-              <a:t/>
-            </a:r>
-          </a:p>
-          <a:p xmlns:a="http://schemas.openxmlformats.org/drawingml/2006/main">
-            <a:r>
-              <a:t>Të gjitha situatat, oraret, pamjet e aplikacionit dhe identitetet e RideShare janë ilustrime mësimore.</a:t>
-            </a:r>
-          </a:p>
-          <a:p xmlns:a="http://schemas.openxmlformats.org/drawingml/2006/main">
-            <a:r>
-              <a:t/>
-            </a:r>
-          </a:p>
-          <a:p xmlns:a="http://schemas.openxmlformats.org/drawingml/2006/main">
-            <a:r>
-              <a:t>Logo: https://aab-edu.net/wp-content/themes/Kolegji-AAB/dist/img/kolegji-aab-logo.svg</a:t>
-            </a:r>
-          </a:p>
-        </p:txBody>
-      </p:sp>
-      <p:sp>
-        <p:nvSpPr>
-          <p:cNvPr id="4" name="Slide Number Placeholder 3"/>
-          <p:cNvSpPr>
-            <a:spLocks xmlns:a="http://schemas.openxmlformats.org/drawingml/2006/main" noGrp="1"/>
-          </p:cNvSpPr>
-          <p:nvPr>
-            <p:ph type="sldNum" idx="5"/>
-          </p:nvPr>
-        </p:nvSpPr>
-        <p:spPr/>
-        <p:txBody>
-          <a:bodyPr xmlns:a="http://schemas.openxmlformats.org/drawingml/2006/main"/>
-          <a:lstStyle xmlns:a="http://schemas.openxmlformats.org/drawingml/2006/main"/>
-          <a:p xmlns:a="http://schemas.openxmlformats.org/drawingml/2006/main"/>
-        </p:txBody>
-      </p:sp>
-    </p:spTree>
-  </p:cSld>
-  <p:clrMapOvr>
-    <a:masterClrMapping xmlns:a="http://schemas.openxmlformats.org/drawingml/2006/main"/>
-  </p:clrMapOvr>
-</p:notes>
-</file>
-
-<file path=ppt/notesSlides/notesSlide24.xml><?xml version="1.0" encoding="utf-8"?>
-<p:notes xmlns:p="http://schemas.openxmlformats.org/presentationml/2006/main">
-  <p:cSld>
-    <p:spTree>
-      <p:nvGrpSpPr>
-        <p:cNvPr id="1" name=""/>
-        <p:cNvGrpSpPr/>
-        <p:nvPr/>
-      </p:nvGrpSpPr>
-      <p:grpSpPr>
-        <a:xfrm xmlns:a="http://schemas.openxmlformats.org/drawingml/2006/main"/>
-      </p:grpSpPr>
-      <p:sp>
-        <p:nvSpPr>
-          <p:cNvPr id="2" name="Slide Image Placeholder 1"/>
-          <p:cNvSpPr>
-            <a:spLocks xmlns:a="http://schemas.openxmlformats.org/drawingml/2006/main" noGrp="1"/>
-          </p:cNvSpPr>
-          <p:nvPr>
-            <p:ph type="sldImg" idx="0"/>
-          </p:nvPr>
-        </p:nvSpPr>
-        <p:spPr/>
-      </p:sp>
-      <p:sp>
-        <p:nvSpPr>
-          <p:cNvPr id="3" name="Notes Placeholder 2"/>
-          <p:cNvSpPr>
-            <a:spLocks xmlns:a="http://schemas.openxmlformats.org/drawingml/2006/main" noGrp="1"/>
-          </p:cNvSpPr>
-          <p:nvPr>
-            <p:ph type="body" idx="1"/>
-          </p:nvPr>
-        </p:nvSpPr>
-        <p:spPr/>
-        <p:txBody>
-          <a:bodyPr xmlns:a="http://schemas.openxmlformats.org/drawingml/2006/main"/>
-          <a:lstStyle xmlns:a="http://schemas.openxmlformats.org/drawingml/2006/main"/>
-          <a:p xmlns:a="http://schemas.openxmlformats.org/drawingml/2006/main">
-            <a:r>
-              <a:t>LIGJËRATA 1 — PROGRAMIMI PËR PAJISJE MOBILE</a:t>
-            </a:r>
-          </a:p>
-          <a:p xmlns:a="http://schemas.openxmlformats.org/drawingml/2006/main">
-            <a:r>
-              <a:t>SLAJDI 16: AI propozon. Ju përgjigjeni.</a:t>
-            </a:r>
-          </a:p>
-          <a:p xmlns:a="http://schemas.openxmlformats.org/drawingml/2006/main">
-            <a:r>
-              <a:t>KOHA: 65:00–70:00 | FAZA: Inteligjenca artificiale</a:t>
-            </a:r>
-          </a:p>
-          <a:p xmlns:a="http://schemas.openxmlformats.org/drawingml/2006/main">
-            <a:r>
-              <a:t>Koha përfshin ndërveprimin.</a:t>
-            </a:r>
-          </a:p>
-          <a:p xmlns:a="http://schemas.openxmlformats.org/drawingml/2006/main">
-            <a:r>
-              <a:t/>
-            </a:r>
-          </a:p>
-          <a:p xmlns:a="http://schemas.openxmlformats.org/drawingml/2006/main">
-            <a:r>
-              <a:t>OBJEKTIVI KOGNITIV</a:t>
-            </a:r>
-          </a:p>
-          <a:p xmlns:a="http://schemas.openxmlformats.org/drawingml/2006/main">
-            <a:r>
-              <a:t>Studenti të përdorë AI-n për të përshpejtuar punën duke ruajtur kontrollin dhe përgjegjësinë.</a:t>
-            </a:r>
-          </a:p>
-          <a:p xmlns:a="http://schemas.openxmlformats.org/drawingml/2006/main">
-            <a:r>
-              <a:t/>
-            </a:r>
-          </a:p>
-          <a:p xmlns:a="http://schemas.openxmlformats.org/drawingml/2006/main">
-            <a:r>
-              <a:t>SKENARI I PROFESORIT</a:t>
-            </a:r>
-          </a:p>
-          <a:p xmlns:a="http://schemas.openxmlformats.org/drawingml/2006/main">
-            <a:r>
-              <a:t>Copilot, Cursor ose mjete të ngjashme mund t’ju ndihmojnë të propozoni kod, të kuptoni një gabim dhe të krijoni alternativa.</a:t>
-            </a:r>
-          </a:p>
-          <a:p xmlns:a="http://schemas.openxmlformats.org/drawingml/2006/main">
-            <a:r>
-              <a:t/>
-            </a:r>
-          </a:p>
-          <a:p xmlns:a="http://schemas.openxmlformats.org/drawingml/2006/main">
-            <a:r>
-              <a:t>Ju vendosni çfarë hyn në projekt.</a:t>
-            </a:r>
-          </a:p>
-          <a:p xmlns:a="http://schemas.openxmlformats.org/drawingml/2006/main">
-            <a:r>
-              <a:t/>
-            </a:r>
-          </a:p>
-          <a:p xmlns:a="http://schemas.openxmlformats.org/drawingml/2006/main">
-            <a:r>
-              <a:t>Rregulli ynë është: nëse nuk e shpjegoni dot çdo rresht të kodit që dorëzoni si zgjidhjen tuaj, ajo pjesë nuk merr pikë derisa të demonstroni kuptimin.</a:t>
-            </a:r>
-          </a:p>
-          <a:p xmlns:a="http://schemas.openxmlformats.org/drawingml/2006/main">
-            <a:r>
-              <a:t/>
-            </a:r>
-          </a:p>
-          <a:p xmlns:a="http://schemas.openxmlformats.org/drawingml/2006/main">
-            <a:r>
-              <a:t>Kjo nuk kërkon memorizimin e kodit të brendshëm të bibliotekave. Kërkon të shpjegoni ndryshimet tuaja, thirrjet që bëni dhe supozimet nga të cilat varen.</a:t>
-            </a:r>
-          </a:p>
-          <a:p xmlns:a="http://schemas.openxmlformats.org/drawingml/2006/main">
-            <a:r>
-              <a:t/>
-            </a:r>
-          </a:p>
-          <a:p xmlns:a="http://schemas.openxmlformats.org/drawingml/2006/main">
-            <a:r>
-              <a:t>Kur AI ju jep një zgjidhje, pyesni: çfarë beson kjo zgjidhje për përdoruesin, të dhënat dhe rrjetin?</a:t>
-            </a:r>
-          </a:p>
-          <a:p xmlns:a="http://schemas.openxmlformats.org/drawingml/2006/main">
-            <a:r>
-              <a:t/>
-            </a:r>
-          </a:p>
-          <a:p xmlns:a="http://schemas.openxmlformats.org/drawingml/2006/main">
-            <a:r>
-              <a:t>Pastaj provoni një rast ku ai supozim nuk qëndron.</a:t>
-            </a:r>
-          </a:p>
-          <a:p xmlns:a="http://schemas.openxmlformats.org/drawingml/2006/main">
-            <a:r>
-              <a:t/>
-            </a:r>
-          </a:p>
-          <a:p xmlns:a="http://schemas.openxmlformats.org/drawingml/2006/main">
-            <a:r>
-              <a:t>PYETJA INTERAKTIVE</a:t>
-            </a:r>
-          </a:p>
-          <a:p xmlns:a="http://schemas.openxmlformats.org/drawingml/2006/main">
-            <a:r>
-              <a:t>AI gjeneron një funksion që pranon një rezervim. Cilat tri pyetje do t’i bënit përpara se ta pranoni në projekt?</a:t>
-            </a:r>
-          </a:p>
-          <a:p xmlns:a="http://schemas.openxmlformats.org/drawingml/2006/main">
-            <a:r>
-              <a:t/>
-            </a:r>
-          </a:p>
-          <a:p xmlns:a="http://schemas.openxmlformats.org/drawingml/2006/main">
-            <a:r>
-              <a:t>UDHËZIMI</a:t>
-            </a:r>
-          </a:p>
-          <a:p xmlns:a="http://schemas.openxmlformats.org/drawingml/2006/main">
-            <a:r>
-              <a:t>2 minuta. Kërkoni pyetje rreth identitetit, kapacitetit dhe përsëritjes.</a:t>
-            </a:r>
-          </a:p>
-          <a:p xmlns:a="http://schemas.openxmlformats.org/drawingml/2006/main">
-            <a:r>
-              <a:t/>
-            </a:r>
-          </a:p>
-          <a:p xmlns:a="http://schemas.openxmlformats.org/drawingml/2006/main">
-            <a:r>
-              <a:t>PARALAJMËRIMI INXHINIERIK</a:t>
-            </a:r>
-          </a:p>
-          <a:p xmlns:a="http://schemas.openxmlformats.org/drawingml/2006/main">
-            <a:r>
-              <a:t>Kod i besueshëm në pamje mund të mbështetet në supozime që nuk vlejnë për sistemin tuaj.</a:t>
-            </a:r>
-          </a:p>
-          <a:p xmlns:a="http://schemas.openxmlformats.org/drawingml/2006/main">
-            <a:r>
-              <a:t/>
-            </a:r>
-          </a:p>
-          <a:p xmlns:a="http://schemas.openxmlformats.org/drawingml/2006/main">
-            <a:r>
-              <a:t>Të gjitha situatat, oraret, pamjet e aplikacionit dhe identitetet e RideShare janë ilustrime mësimore.</a:t>
-            </a:r>
-          </a:p>
-          <a:p xmlns:a="http://schemas.openxmlformats.org/drawingml/2006/main">
-            <a:r>
-              <a:t/>
-            </a:r>
-          </a:p>
-          <a:p xmlns:a="http://schemas.openxmlformats.org/drawingml/2006/main">
-            <a:r>
-              <a:t>Logo: https://aab-edu.net/wp-content/themes/Kolegji-AAB/dist/img/kolegji-aab-logo.svg</a:t>
-            </a:r>
-          </a:p>
-        </p:txBody>
-      </p:sp>
-      <p:sp>
-        <p:nvSpPr>
-          <p:cNvPr id="4" name="Slide Number Placeholder 3"/>
-          <p:cNvSpPr>
-            <a:spLocks xmlns:a="http://schemas.openxmlformats.org/drawingml/2006/main" noGrp="1"/>
-          </p:cNvSpPr>
-          <p:nvPr>
-            <p:ph type="sldNum" idx="5"/>
-          </p:nvPr>
-        </p:nvSpPr>
-        <p:spPr/>
-        <p:txBody>
-          <a:bodyPr xmlns:a="http://schemas.openxmlformats.org/drawingml/2006/main"/>
-          <a:lstStyle xmlns:a="http://schemas.openxmlformats.org/drawingml/2006/main"/>
-          <a:p xmlns:a="http://schemas.openxmlformats.org/drawingml/2006/main"/>
-        </p:txBody>
-      </p:sp>
-    </p:spTree>
-  </p:cSld>
-  <p:clrMapOvr>
-    <a:masterClrMapping xmlns:a="http://schemas.openxmlformats.org/drawingml/2006/main"/>
-  </p:clrMapOvr>
-</p:notes>
-</file>
-
-<file path=ppt/notesSlides/notesSlide25.xml><?xml version="1.0" encoding="utf-8"?>
-<p:notes xmlns:p="http://schemas.openxmlformats.org/presentationml/2006/main">
-  <p:cSld>
-    <p:spTree>
-      <p:nvGrpSpPr>
-        <p:cNvPr id="1" name=""/>
-        <p:cNvGrpSpPr/>
-        <p:nvPr/>
-      </p:nvGrpSpPr>
-      <p:grpSpPr>
-        <a:xfrm xmlns:a="http://schemas.openxmlformats.org/drawingml/2006/main"/>
-      </p:grpSpPr>
-      <p:sp>
-        <p:nvSpPr>
-          <p:cNvPr id="2" name="Slide Image Placeholder 1"/>
-          <p:cNvSpPr>
-            <a:spLocks xmlns:a="http://schemas.openxmlformats.org/drawingml/2006/main" noGrp="1"/>
-          </p:cNvSpPr>
-          <p:nvPr>
-            <p:ph type="sldImg" idx="0"/>
-          </p:nvPr>
-        </p:nvSpPr>
-        <p:spPr/>
-      </p:sp>
-      <p:sp>
-        <p:nvSpPr>
-          <p:cNvPr id="3" name="Notes Placeholder 2"/>
-          <p:cNvSpPr>
-            <a:spLocks xmlns:a="http://schemas.openxmlformats.org/drawingml/2006/main" noGrp="1"/>
-          </p:cNvSpPr>
-          <p:nvPr>
-            <p:ph type="body" idx="1"/>
-          </p:nvPr>
-        </p:nvSpPr>
-        <p:spPr/>
-        <p:txBody>
-          <a:bodyPr xmlns:a="http://schemas.openxmlformats.org/drawingml/2006/main"/>
-          <a:lstStyle xmlns:a="http://schemas.openxmlformats.org/drawingml/2006/main"/>
-          <a:p xmlns:a="http://schemas.openxmlformats.org/drawingml/2006/main">
-            <a:r>
-              <a:t>LIGJËRATA 1 — PROGRAMIMI PËR PAJISJE MOBILE</a:t>
-            </a:r>
-          </a:p>
-          <a:p xmlns:a="http://schemas.openxmlformats.org/drawingml/2006/main">
-            <a:r>
-              <a:t>SLAJDI 17: Kërkoni edhe kundërshembullin</a:t>
-            </a:r>
-          </a:p>
-          <a:p xmlns:a="http://schemas.openxmlformats.org/drawingml/2006/main">
-            <a:r>
-              <a:t>KOHA: 70:00–75:00 | FAZA: Inteligjenca artificiale</a:t>
-            </a:r>
-          </a:p>
-          <a:p xmlns:a="http://schemas.openxmlformats.org/drawingml/2006/main">
-            <a:r>
-              <a:t>Koha përfshin ndërveprimin.</a:t>
-            </a:r>
-          </a:p>
-          <a:p xmlns:a="http://schemas.openxmlformats.org/drawingml/2006/main">
-            <a:r>
-              <a:t/>
-            </a:r>
-          </a:p>
-          <a:p xmlns:a="http://schemas.openxmlformats.org/drawingml/2006/main">
-            <a:r>
-              <a:t>OBJEKTIVI KOGNITIV</a:t>
-            </a:r>
-          </a:p>
-          <a:p xmlns:a="http://schemas.openxmlformats.org/drawingml/2006/main">
-            <a:r>
-              <a:t>Studenti të shkruajë kërkesë të kufizuar për AI dhe të kontrollojë rezultatin me prova të pavarura.</a:t>
-            </a:r>
-          </a:p>
-          <a:p xmlns:a="http://schemas.openxmlformats.org/drawingml/2006/main">
-            <a:r>
-              <a:t/>
-            </a:r>
-          </a:p>
-          <a:p xmlns:a="http://schemas.openxmlformats.org/drawingml/2006/main">
-            <a:r>
-              <a:t>SKENARI I PROFESORIT</a:t>
-            </a:r>
-          </a:p>
-          <a:p xmlns:a="http://schemas.openxmlformats.org/drawingml/2006/main">
-            <a:r>
-              <a:t>Shikoni ndryshimin mes dy kërkesave.</a:t>
-            </a:r>
-          </a:p>
-          <a:p xmlns:a="http://schemas.openxmlformats.org/drawingml/2006/main">
-            <a:r>
-              <a:t/>
-            </a:r>
-          </a:p>
-          <a:p xmlns:a="http://schemas.openxmlformats.org/drawingml/2006/main">
-            <a:r>
-              <a:t>Ndërto RideShare i lë mjetit të shpikë shumicën e vendimeve.</a:t>
-            </a:r>
-          </a:p>
-          <a:p xmlns:a="http://schemas.openxmlformats.org/drawingml/2006/main">
-            <a:r>
-              <a:t/>
-            </a:r>
-          </a:p>
-          <a:p xmlns:a="http://schemas.openxmlformats.org/drawingml/2006/main">
-            <a:r>
-              <a:t>Një kërkesë më e dobishme është: Propozo operacionin për kërkesën e një vendi. Identiteti duhet të vijë nga sesioni i verifikuar. Kërkesat e përsëritura nuk duhet të krijojnë dublikatë. Fillimisht shpjego supozimet dhe rastet e dështimit.</a:t>
-            </a:r>
-          </a:p>
-          <a:p xmlns:a="http://schemas.openxmlformats.org/drawingml/2006/main">
-            <a:r>
-              <a:t/>
-            </a:r>
-          </a:p>
-          <a:p xmlns:a="http://schemas.openxmlformats.org/drawingml/2006/main">
-            <a:r>
-              <a:t>Pastaj kërkojmë testet përkatëse dhe i shqyrtojmë vetë.</a:t>
-            </a:r>
-          </a:p>
-          <a:p xmlns:a="http://schemas.openxmlformats.org/drawingml/2006/main">
-            <a:r>
-              <a:t/>
-            </a:r>
-          </a:p>
-          <a:p xmlns:a="http://schemas.openxmlformats.org/drawingml/2006/main">
-            <a:r>
-              <a:t>Një kontroll i dobishëm është të heqim përkohësisht një mbrojtje dhe të shohim nëse testi e zbulon mungesën.</a:t>
-            </a:r>
-          </a:p>
-          <a:p xmlns:a="http://schemas.openxmlformats.org/drawingml/2006/main">
-            <a:r>
-              <a:t/>
-            </a:r>
-          </a:p>
-          <a:p xmlns:a="http://schemas.openxmlformats.org/drawingml/2006/main">
-            <a:r>
-              <a:t>Në shënimin e dorëzimit shkruani: çfarë propozoi AI, çfarë ndryshuat dhe si e verifikuat.</a:t>
-            </a:r>
-          </a:p>
-          <a:p xmlns:a="http://schemas.openxmlformats.org/drawingml/2006/main">
-            <a:r>
-              <a:t/>
-            </a:r>
-          </a:p>
-          <a:p xmlns:a="http://schemas.openxmlformats.org/drawingml/2006/main">
-            <a:r>
-              <a:t>PYETJA INTERAKTIVE</a:t>
-            </a:r>
-          </a:p>
-          <a:p xmlns:a="http://schemas.openxmlformats.org/drawingml/2006/main">
-            <a:r>
-              <a:t>Nëse AI shkruan edhe funksionin, edhe testet, si mund të kenë të dyja të njëjtin gabim?</a:t>
-            </a:r>
-          </a:p>
-          <a:p xmlns:a="http://schemas.openxmlformats.org/drawingml/2006/main">
-            <a:r>
-              <a:t/>
-            </a:r>
-          </a:p>
-          <a:p xmlns:a="http://schemas.openxmlformats.org/drawingml/2006/main">
-            <a:r>
-              <a:t>UDHËZIMI</a:t>
-            </a:r>
-          </a:p>
-          <a:p xmlns:a="http://schemas.openxmlformats.org/drawingml/2006/main">
-            <a:r>
-              <a:t>2 minuta. Lidhni kriterin e pranimit me testin e pavarur.</a:t>
-            </a:r>
-          </a:p>
-          <a:p xmlns:a="http://schemas.openxmlformats.org/drawingml/2006/main">
-            <a:r>
-              <a:t/>
-            </a:r>
-          </a:p>
-          <a:p xmlns:a="http://schemas.openxmlformats.org/drawingml/2006/main">
-            <a:r>
-              <a:t>PARALAJMËRIMI INXHINIERIK</a:t>
-            </a:r>
-          </a:p>
-          <a:p xmlns:a="http://schemas.openxmlformats.org/drawingml/2006/main">
-            <a:r>
-              <a:t>Një test që përsërit supozimin e implementimit mund ta konfirmojë gabimin në vend që ta zbulojë.</a:t>
-            </a:r>
-          </a:p>
-          <a:p xmlns:a="http://schemas.openxmlformats.org/drawingml/2006/main">
-            <a:r>
-              <a:t/>
-            </a:r>
-          </a:p>
-          <a:p xmlns:a="http://schemas.openxmlformats.org/drawingml/2006/main">
-            <a:r>
-              <a:t>Të gjitha situatat, oraret, pamjet e aplikacionit dhe identitetet e RideShare janë ilustrime mësimore.</a:t>
-            </a:r>
-          </a:p>
-          <a:p xmlns:a="http://schemas.openxmlformats.org/drawingml/2006/main">
-            <a:r>
-              <a:t/>
-            </a:r>
-          </a:p>
-          <a:p xmlns:a="http://schemas.openxmlformats.org/drawingml/2006/main">
-            <a:r>
-              <a:t>Logo: https://aab-edu.net/wp-content/themes/Kolegji-AAB/dist/img/kolegji-aab-logo.svg</a:t>
-            </a:r>
-          </a:p>
-        </p:txBody>
-      </p:sp>
-      <p:sp>
-        <p:nvSpPr>
-          <p:cNvPr id="4" name="Slide Number Placeholder 3"/>
-          <p:cNvSpPr>
-            <a:spLocks xmlns:a="http://schemas.openxmlformats.org/drawingml/2006/main" noGrp="1"/>
-          </p:cNvSpPr>
-          <p:nvPr>
-            <p:ph type="sldNum" idx="5"/>
-          </p:nvPr>
-        </p:nvSpPr>
-        <p:spPr/>
-        <p:txBody>
-          <a:bodyPr xmlns:a="http://schemas.openxmlformats.org/drawingml/2006/main"/>
-          <a:lstStyle xmlns:a="http://schemas.openxmlformats.org/drawingml/2006/main"/>
-          <a:p xmlns:a="http://schemas.openxmlformats.org/drawingml/2006/main"/>
-        </p:txBody>
-      </p:sp>
-    </p:spTree>
-  </p:cSld>
-  <p:clrMapOvr>
-    <a:masterClrMapping xmlns:a="http://schemas.openxmlformats.org/drawingml/2006/main"/>
-  </p:clrMapOvr>
-</p:notes>
-</file>
-
-<file path=ppt/notesSlides/notesSlide26.xml><?xml version="1.0" encoding="utf-8"?>
-<p:notes xmlns:p="http://schemas.openxmlformats.org/presentationml/2006/main">
-  <p:cSld>
-    <p:spTree>
-      <p:nvGrpSpPr>
-        <p:cNvPr id="1" name=""/>
-        <p:cNvGrpSpPr/>
-        <p:nvPr/>
-      </p:nvGrpSpPr>
-      <p:grpSpPr>
-        <a:xfrm xmlns:a="http://schemas.openxmlformats.org/drawingml/2006/main"/>
-      </p:grpSpPr>
-      <p:sp>
-        <p:nvSpPr>
-          <p:cNvPr id="2" name="Slide Image Placeholder 1"/>
-          <p:cNvSpPr>
-            <a:spLocks xmlns:a="http://schemas.openxmlformats.org/drawingml/2006/main" noGrp="1"/>
-          </p:cNvSpPr>
-          <p:nvPr>
-            <p:ph type="sldImg" idx="0"/>
-          </p:nvPr>
-        </p:nvSpPr>
-        <p:spPr/>
-      </p:sp>
-      <p:sp>
-        <p:nvSpPr>
-          <p:cNvPr id="3" name="Notes Placeholder 2"/>
-          <p:cNvSpPr>
-            <a:spLocks xmlns:a="http://schemas.openxmlformats.org/drawingml/2006/main" noGrp="1"/>
-          </p:cNvSpPr>
-          <p:nvPr>
-            <p:ph type="body" idx="1"/>
-          </p:nvPr>
-        </p:nvSpPr>
-        <p:spPr/>
-        <p:txBody>
-          <a:bodyPr xmlns:a="http://schemas.openxmlformats.org/drawingml/2006/main"/>
-          <a:lstStyle xmlns:a="http://schemas.openxmlformats.org/drawingml/2006/main"/>
-          <a:p xmlns:a="http://schemas.openxmlformats.org/drawingml/2006/main">
-            <a:r>
-              <a:t>LIGJËRATA 1 — PROGRAMIMI PËR PAJISJE MOBILE</a:t>
-            </a:r>
-          </a:p>
-          <a:p xmlns:a="http://schemas.openxmlformats.org/drawingml/2006/main">
-            <a:r>
-              <a:t>SLAJDI 18: Pikët ndjekin provat</a:t>
-            </a:r>
-          </a:p>
-          <a:p xmlns:a="http://schemas.openxmlformats.org/drawingml/2006/main">
-            <a:r>
-              <a:t>KOHA: 75:00–79:00 | FAZA: Vlerësimi dhe laboratori</a:t>
-            </a:r>
-          </a:p>
-          <a:p xmlns:a="http://schemas.openxmlformats.org/drawingml/2006/main">
-            <a:r>
-              <a:t>Koha përfshin ndërveprimin.</a:t>
-            </a:r>
-          </a:p>
-          <a:p xmlns:a="http://schemas.openxmlformats.org/drawingml/2006/main">
-            <a:r>
-              <a:t/>
-            </a:r>
-          </a:p>
-          <a:p xmlns:a="http://schemas.openxmlformats.org/drawingml/2006/main">
-            <a:r>
-              <a:t>OBJEKTIVI KOGNITIV</a:t>
-            </a:r>
-          </a:p>
-          <a:p xmlns:a="http://schemas.openxmlformats.org/drawingml/2006/main">
-            <a:r>
-              <a:t>Studenti të kuptojë lidhjen mes punës javore, produktit dhe zotërimit individual.</a:t>
-            </a:r>
-          </a:p>
-          <a:p xmlns:a="http://schemas.openxmlformats.org/drawingml/2006/main">
-            <a:r>
-              <a:t/>
-            </a:r>
-          </a:p>
-          <a:p xmlns:a="http://schemas.openxmlformats.org/drawingml/2006/main">
-            <a:r>
-              <a:t>SKENARI I PROFESORIT</a:t>
-            </a:r>
-          </a:p>
-          <a:p xmlns:a="http://schemas.openxmlformats.org/drawingml/2006/main">
-            <a:r>
-              <a:t>Kjo është formula e vlerësimit.</a:t>
-            </a:r>
-          </a:p>
-          <a:p xmlns:a="http://schemas.openxmlformats.org/drawingml/2006/main">
-            <a:r>
-              <a:t/>
-            </a:r>
-          </a:p>
-          <a:p xmlns:a="http://schemas.openxmlformats.org/drawingml/2006/main">
-            <a:r>
-              <a:t>Pjesëmarrja përbën dhjetë për qind, sipas rregullave të kursit. Për një gabim teknik të check-in duhet të ekzistojë rrugë korrigjimi.</a:t>
-            </a:r>
-          </a:p>
-          <a:p xmlns:a="http://schemas.openxmlformats.org/drawingml/2006/main">
-            <a:r>
-              <a:t/>
-            </a:r>
-          </a:p>
-          <a:p xmlns:a="http://schemas.openxmlformats.org/drawingml/2006/main">
-            <a:r>
-              <a:t>Detyrat javore përbëjnë tridhjetë për qind. Ato tregojnë si përparoni dhe çfarë kuptoni.</a:t>
-            </a:r>
-          </a:p>
-          <a:p xmlns:a="http://schemas.openxmlformats.org/drawingml/2006/main">
-            <a:r>
-              <a:t/>
-            </a:r>
-          </a:p>
-          <a:p xmlns:a="http://schemas.openxmlformats.org/drawingml/2006/main">
-            <a:r>
-              <a:t>Projekti përbën dyzet për qind: rrjedha funksionale, përvoja mobile, trajtimi i të dhënave, kontrolli i qasjes dhe verifikimi.</a:t>
-            </a:r>
-          </a:p>
-          <a:p xmlns:a="http://schemas.openxmlformats.org/drawingml/2006/main">
-            <a:r>
-              <a:t/>
-            </a:r>
-          </a:p>
-          <a:p xmlns:a="http://schemas.openxmlformats.org/drawingml/2006/main">
-            <a:r>
-              <a:t>Demo Day përbën njëzet për qind, duke përfshirë shpjegimin individual.</a:t>
-            </a:r>
-          </a:p>
-          <a:p xmlns:a="http://schemas.openxmlformats.org/drawingml/2006/main">
-            <a:r>
-              <a:t/>
-            </a:r>
-          </a:p>
-          <a:p xmlns:a="http://schemas.openxmlformats.org/drawingml/2006/main">
-            <a:r>
-              <a:t>CI na ndihmon të kontrollojmë vazhdimisht disa kërkesa. Një rezultat i gjelbër vlen aq sa kontrollet që kemi shkruar.</a:t>
-            </a:r>
-          </a:p>
-          <a:p xmlns:a="http://schemas.openxmlformats.org/drawingml/2006/main">
-            <a:r>
-              <a:t/>
-            </a:r>
-          </a:p>
-          <a:p xmlns:a="http://schemas.openxmlformats.org/drawingml/2006/main">
-            <a:r>
-              <a:t>Rubrikën do ta keni përpara punës që vlerësohet.</a:t>
-            </a:r>
-          </a:p>
-          <a:p xmlns:a="http://schemas.openxmlformats.org/drawingml/2006/main">
-            <a:r>
-              <a:t/>
-            </a:r>
-          </a:p>
-          <a:p xmlns:a="http://schemas.openxmlformats.org/drawingml/2006/main">
-            <a:r>
-              <a:t>PYETJA INTERAKTIVE</a:t>
-            </a:r>
-          </a:p>
-          <a:p xmlns:a="http://schemas.openxmlformats.org/drawingml/2006/main">
-            <a:r>
-              <a:t>Dy projekte duken njësoj. Njëri lejon përdoruesin të ndryshojë të dhënat e tjetrit. Cila provë do ta zbulonte dallimin?</a:t>
-            </a:r>
-          </a:p>
-          <a:p xmlns:a="http://schemas.openxmlformats.org/drawingml/2006/main">
-            <a:r>
-              <a:t/>
-            </a:r>
-          </a:p>
-          <a:p xmlns:a="http://schemas.openxmlformats.org/drawingml/2006/main">
-            <a:r>
-              <a:t>UDHËZIMI</a:t>
-            </a:r>
-          </a:p>
-          <a:p xmlns:a="http://schemas.openxmlformats.org/drawingml/2006/main">
-            <a:r>
-              <a:t>1 minutë. Lidhni provën e autorizimit me rubrikën.</a:t>
-            </a:r>
-          </a:p>
-          <a:p xmlns:a="http://schemas.openxmlformats.org/drawingml/2006/main">
-            <a:r>
-              <a:t/>
-            </a:r>
-          </a:p>
-          <a:p xmlns:a="http://schemas.openxmlformats.org/drawingml/2006/main">
-            <a:r>
-              <a:t>PARALAJMËRIMI INXHINIERIK</a:t>
-            </a:r>
-          </a:p>
-          <a:p xmlns:a="http://schemas.openxmlformats.org/drawingml/2006/main">
-            <a:r>
-              <a:t>Build-i i suksesshëm tregon se projekti ndërtohet. Nuk provon se kërkesat e produktit plotësohen.</a:t>
-            </a:r>
-          </a:p>
-          <a:p xmlns:a="http://schemas.openxmlformats.org/drawingml/2006/main">
-            <a:r>
-              <a:t/>
-            </a:r>
-          </a:p>
-          <a:p xmlns:a="http://schemas.openxmlformats.org/drawingml/2006/main">
-            <a:r>
-              <a:t>Të gjitha situatat, oraret, pamjet e aplikacionit dhe identitetet e RideShare janë ilustrime mësimore.</a:t>
-            </a:r>
-          </a:p>
-          <a:p xmlns:a="http://schemas.openxmlformats.org/drawingml/2006/main">
-            <a:r>
-              <a:t/>
-            </a:r>
-          </a:p>
-          <a:p xmlns:a="http://schemas.openxmlformats.org/drawingml/2006/main">
-            <a:r>
-              <a:t>Logo: https://aab-edu.net/wp-content/themes/Kolegji-AAB/dist/img/kolegji-aab-logo.svg</a:t>
-            </a:r>
-          </a:p>
-        </p:txBody>
-      </p:sp>
-      <p:sp>
-        <p:nvSpPr>
-          <p:cNvPr id="4" name="Slide Number Placeholder 3"/>
-          <p:cNvSpPr>
-            <a:spLocks xmlns:a="http://schemas.openxmlformats.org/drawingml/2006/main" noGrp="1"/>
-          </p:cNvSpPr>
-          <p:nvPr>
-            <p:ph type="sldNum" idx="5"/>
-          </p:nvPr>
-        </p:nvSpPr>
-        <p:spPr/>
-        <p:txBody>
-          <a:bodyPr xmlns:a="http://schemas.openxmlformats.org/drawingml/2006/main"/>
-          <a:lstStyle xmlns:a="http://schemas.openxmlformats.org/drawingml/2006/main"/>
-          <a:p xmlns:a="http://schemas.openxmlformats.org/drawingml/2006/main"/>
-        </p:txBody>
-      </p:sp>
-    </p:spTree>
-  </p:cSld>
-  <p:clrMapOvr>
-    <a:masterClrMapping xmlns:a="http://schemas.openxmlformats.org/drawingml/2006/main"/>
-  </p:clrMapOvr>
-</p:notes>
-</file>
-
-<file path=ppt/notesSlides/notesSlide27.xml><?xml version="1.0" encoding="utf-8"?>
-<p:notes xmlns:p="http://schemas.openxmlformats.org/presentationml/2006/main">
-  <p:cSld>
-    <p:spTree>
-      <p:nvGrpSpPr>
-        <p:cNvPr id="1" name=""/>
-        <p:cNvGrpSpPr/>
-        <p:nvPr/>
-      </p:nvGrpSpPr>
-      <p:grpSpPr>
-        <a:xfrm xmlns:a="http://schemas.openxmlformats.org/drawingml/2006/main"/>
-      </p:grpSpPr>
-      <p:sp>
-        <p:nvSpPr>
-          <p:cNvPr id="2" name="Slide Image Placeholder 1"/>
-          <p:cNvSpPr>
-            <a:spLocks xmlns:a="http://schemas.openxmlformats.org/drawingml/2006/main" noGrp="1"/>
-          </p:cNvSpPr>
-          <p:nvPr>
-            <p:ph type="sldImg" idx="0"/>
-          </p:nvPr>
-        </p:nvSpPr>
-        <p:spPr/>
-      </p:sp>
-      <p:sp>
-        <p:nvSpPr>
-          <p:cNvPr id="3" name="Notes Placeholder 2"/>
-          <p:cNvSpPr>
-            <a:spLocks xmlns:a="http://schemas.openxmlformats.org/drawingml/2006/main" noGrp="1"/>
-          </p:cNvSpPr>
-          <p:nvPr>
-            <p:ph type="body" idx="1"/>
-          </p:nvPr>
-        </p:nvSpPr>
-        <p:spPr/>
-        <p:txBody>
-          <a:bodyPr xmlns:a="http://schemas.openxmlformats.org/drawingml/2006/main"/>
-          <a:lstStyle xmlns:a="http://schemas.openxmlformats.org/drawingml/2006/main"/>
-          <a:p xmlns:a="http://schemas.openxmlformats.org/drawingml/2006/main">
-            <a:r>
-              <a:t>LIGJËRATA 1 — PROGRAMIMI PËR PAJISJE MOBILE</a:t>
-            </a:r>
-          </a:p>
-          <a:p xmlns:a="http://schemas.openxmlformats.org/drawingml/2006/main">
-            <a:r>
-              <a:t>SLAJDI 19: Demonstroni edhe kur dështon</a:t>
-            </a:r>
-          </a:p>
-          <a:p xmlns:a="http://schemas.openxmlformats.org/drawingml/2006/main">
-            <a:r>
-              <a:t>KOHA: 79:00–83:00 | FAZA: Vlerësimi dhe laboratori</a:t>
-            </a:r>
-          </a:p>
-          <a:p xmlns:a="http://schemas.openxmlformats.org/drawingml/2006/main">
-            <a:r>
-              <a:t>Koha përfshin ndërveprimin.</a:t>
-            </a:r>
-          </a:p>
-          <a:p xmlns:a="http://schemas.openxmlformats.org/drawingml/2006/main">
-            <a:r>
-              <a:t/>
-            </a:r>
-          </a:p>
-          <a:p xmlns:a="http://schemas.openxmlformats.org/drawingml/2006/main">
-            <a:r>
-              <a:t>OBJEKTIVI KOGNITIV</a:t>
-            </a:r>
-          </a:p>
-          <a:p xmlns:a="http://schemas.openxmlformats.org/drawingml/2006/main">
-            <a:r>
-              <a:t>Studenti të shohë demonstrimin si provë funksionimi dhe arsyetimi.</a:t>
-            </a:r>
-          </a:p>
-          <a:p xmlns:a="http://schemas.openxmlformats.org/drawingml/2006/main">
-            <a:r>
-              <a:t/>
-            </a:r>
-          </a:p>
-          <a:p xmlns:a="http://schemas.openxmlformats.org/drawingml/2006/main">
-            <a:r>
-              <a:t>SKENARI I PROFESORIT</a:t>
-            </a:r>
-          </a:p>
-          <a:p xmlns:a="http://schemas.openxmlformats.org/drawingml/2006/main">
-            <a:r>
-              <a:t>Në fund të semestrit do ta paraqitni produktin para jurisë.</a:t>
-            </a:r>
-          </a:p>
-          <a:p xmlns:a="http://schemas.openxmlformats.org/drawingml/2006/main">
-            <a:r>
-              <a:t/>
-            </a:r>
-          </a:p>
-          <a:p xmlns:a="http://schemas.openxmlformats.org/drawingml/2006/main">
-            <a:r>
-              <a:t>Formati që propozoj është i përqendruar: një minutë për problemin dhe evidencën, dy minuta për rrjedhën kryesore, një minutë për një dështim, një minutë për një vendim arkitekturor. Pastaj pyetje.</a:t>
-            </a:r>
-          </a:p>
-          <a:p xmlns:a="http://schemas.openxmlformats.org/drawingml/2006/main">
-            <a:r>
-              <a:t/>
-            </a:r>
-          </a:p>
-          <a:p xmlns:a="http://schemas.openxmlformats.org/drawingml/2006/main">
-            <a:r>
-              <a:t>Dështimi mund të jetë mungesa e rrjetit, një kërkesë e palejuar ose një udhëtim pa vende.</a:t>
-            </a:r>
-          </a:p>
-          <a:p xmlns:a="http://schemas.openxmlformats.org/drawingml/2006/main">
-            <a:r>
-              <a:t/>
-            </a:r>
-          </a:p>
-          <a:p xmlns:a="http://schemas.openxmlformats.org/drawingml/2006/main">
-            <a:r>
-              <a:t>Për RideShare, demonstrimi duhet të tregojë qartë dallimin mes kërkesës dhe pranimit.</a:t>
-            </a:r>
-          </a:p>
-          <a:p xmlns:a="http://schemas.openxmlformats.org/drawingml/2006/main">
-            <a:r>
-              <a:t/>
-            </a:r>
-          </a:p>
-          <a:p xmlns:a="http://schemas.openxmlformats.org/drawingml/2006/main">
-            <a:r>
-              <a:t>Ju duhet gjithashtu të tregoni çfarë ndryshuat pas feedback-ut.</a:t>
-            </a:r>
-          </a:p>
-          <a:p xmlns:a="http://schemas.openxmlformats.org/drawingml/2006/main">
-            <a:r>
-              <a:t/>
-            </a:r>
-          </a:p>
-          <a:p xmlns:a="http://schemas.openxmlformats.org/drawingml/2006/main">
-            <a:r>
-              <a:t>Një themelues argumenton vlerën. Një inxhinier demonstron kufijtë dhe sjelljen. Në këtë kurs do t’i ushtroni të dyja.</a:t>
-            </a:r>
-          </a:p>
-          <a:p xmlns:a="http://schemas.openxmlformats.org/drawingml/2006/main">
-            <a:r>
-              <a:t/>
-            </a:r>
-          </a:p>
-          <a:p xmlns:a="http://schemas.openxmlformats.org/drawingml/2006/main">
-            <a:r>
-              <a:t>PYETJA INTERAKTIVE</a:t>
-            </a:r>
-          </a:p>
-          <a:p xmlns:a="http://schemas.openxmlformats.org/drawingml/2006/main">
-            <a:r>
-              <a:t>Cilin dështim do të zgjidhnit për ta demonstruar dhe çfarë do të provonte ai për produktin tuaj?</a:t>
-            </a:r>
-          </a:p>
-          <a:p xmlns:a="http://schemas.openxmlformats.org/drawingml/2006/main">
-            <a:r>
-              <a:t/>
-            </a:r>
-          </a:p>
-          <a:p xmlns:a="http://schemas.openxmlformats.org/drawingml/2006/main">
-            <a:r>
-              <a:t>UDHËZIMI</a:t>
-            </a:r>
-          </a:p>
-          <a:p xmlns:a="http://schemas.openxmlformats.org/drawingml/2006/main">
-            <a:r>
-              <a:t>1 minutë. Merrni dy shembuj.</a:t>
-            </a:r>
-          </a:p>
-          <a:p xmlns:a="http://schemas.openxmlformats.org/drawingml/2006/main">
-            <a:r>
-              <a:t/>
-            </a:r>
-          </a:p>
-          <a:p xmlns:a="http://schemas.openxmlformats.org/drawingml/2006/main">
-            <a:r>
-              <a:t>PARALAJMËRIMI INXHINIERIK</a:t>
-            </a:r>
-          </a:p>
-          <a:p xmlns:a="http://schemas.openxmlformats.org/drawingml/2006/main">
-            <a:r>
-              <a:t>Një demonstrim vetëm i rrugës ideale lë të panjohur sjelljen kur kushtet ndryshojnë.</a:t>
-            </a:r>
-          </a:p>
-          <a:p xmlns:a="http://schemas.openxmlformats.org/drawingml/2006/main">
-            <a:r>
-              <a:t/>
-            </a:r>
-          </a:p>
-          <a:p xmlns:a="http://schemas.openxmlformats.org/drawingml/2006/main">
-            <a:r>
-              <a:t>Të gjitha situatat, oraret, pamjet e aplikacionit dhe identitetet e RideShare janë ilustrime mësimore.</a:t>
-            </a:r>
-          </a:p>
-          <a:p xmlns:a="http://schemas.openxmlformats.org/drawingml/2006/main">
-            <a:r>
-              <a:t/>
-            </a:r>
-          </a:p>
-          <a:p xmlns:a="http://schemas.openxmlformats.org/drawingml/2006/main">
-            <a:r>
-              <a:t>Logo: https://aab-edu.net/wp-content/themes/Kolegji-AAB/dist/img/kolegji-aab-logo.svg</a:t>
-            </a:r>
-          </a:p>
-        </p:txBody>
-      </p:sp>
-      <p:sp>
-        <p:nvSpPr>
-          <p:cNvPr id="4" name="Slide Number Placeholder 3"/>
-          <p:cNvSpPr>
-            <a:spLocks xmlns:a="http://schemas.openxmlformats.org/drawingml/2006/main" noGrp="1"/>
-          </p:cNvSpPr>
-          <p:nvPr>
-            <p:ph type="sldNum" idx="5"/>
-          </p:nvPr>
-        </p:nvSpPr>
-        <p:spPr/>
-        <p:txBody>
-          <a:bodyPr xmlns:a="http://schemas.openxmlformats.org/drawingml/2006/main"/>
-          <a:lstStyle xmlns:a="http://schemas.openxmlformats.org/drawingml/2006/main"/>
-          <a:p xmlns:a="http://schemas.openxmlformats.org/drawingml/2006/main"/>
-        </p:txBody>
-      </p:sp>
-    </p:spTree>
-  </p:cSld>
-  <p:clrMapOvr>
-    <a:masterClrMapping xmlns:a="http://schemas.openxmlformats.org/drawingml/2006/main"/>
-  </p:clrMapOvr>
-</p:notes>
-</file>
-
-<file path=ppt/notesSlides/notesSlide28.xml><?xml version="1.0" encoding="utf-8"?>
-<p:notes xmlns:p="http://schemas.openxmlformats.org/presentationml/2006/main">
-  <p:cSld>
-    <p:spTree>
-      <p:nvGrpSpPr>
-        <p:cNvPr id="1" name=""/>
-        <p:cNvGrpSpPr/>
-        <p:nvPr/>
-      </p:nvGrpSpPr>
-      <p:grpSpPr>
-        <a:xfrm xmlns:a="http://schemas.openxmlformats.org/drawingml/2006/main"/>
-      </p:grpSpPr>
-      <p:sp>
-        <p:nvSpPr>
-          <p:cNvPr id="2" name="Slide Image Placeholder 1"/>
-          <p:cNvSpPr>
-            <a:spLocks xmlns:a="http://schemas.openxmlformats.org/drawingml/2006/main" noGrp="1"/>
-          </p:cNvSpPr>
-          <p:nvPr>
-            <p:ph type="sldImg" idx="0"/>
-          </p:nvPr>
-        </p:nvSpPr>
-        <p:spPr/>
-      </p:sp>
-      <p:sp>
-        <p:nvSpPr>
-          <p:cNvPr id="3" name="Notes Placeholder 2"/>
-          <p:cNvSpPr>
-            <a:spLocks xmlns:a="http://schemas.openxmlformats.org/drawingml/2006/main" noGrp="1"/>
-          </p:cNvSpPr>
-          <p:nvPr>
-            <p:ph type="body" idx="1"/>
-          </p:nvPr>
-        </p:nvSpPr>
-        <p:spPr/>
-        <p:txBody>
-          <a:bodyPr xmlns:a="http://schemas.openxmlformats.org/drawingml/2006/main"/>
-          <a:lstStyle xmlns:a="http://schemas.openxmlformats.org/drawingml/2006/main"/>
-          <a:p xmlns:a="http://schemas.openxmlformats.org/drawingml/2006/main">
-            <a:r>
-              <a:t>LIGJËRATA 1 — PROGRAMIMI PËR PAJISJE MOBILE</a:t>
-            </a:r>
-          </a:p>
-          <a:p xmlns:a="http://schemas.openxmlformats.org/drawingml/2006/main">
-            <a:r>
-              <a:t>SLAJDI 20: Ndryshimi juaj, në telefon</a:t>
-            </a:r>
-          </a:p>
-          <a:p xmlns:a="http://schemas.openxmlformats.org/drawingml/2006/main">
-            <a:r>
-              <a:t>KOHA: 83:00–88:00 | FAZA: Vlerësimi dhe laboratori</a:t>
-            </a:r>
-          </a:p>
-          <a:p xmlns:a="http://schemas.openxmlformats.org/drawingml/2006/main">
-            <a:r>
-              <a:t>Koha përfshin ndërveprimin.</a:t>
-            </a:r>
-          </a:p>
-          <a:p xmlns:a="http://schemas.openxmlformats.org/drawingml/2006/main">
-            <a:r>
-              <a:t/>
-            </a:r>
-          </a:p>
-          <a:p xmlns:a="http://schemas.openxmlformats.org/drawingml/2006/main">
-            <a:r>
-              <a:t>OBJEKTIVI KOGNITIV</a:t>
-            </a:r>
-          </a:p>
-          <a:p xmlns:a="http://schemas.openxmlformats.org/drawingml/2006/main">
-            <a:r>
-              <a:t>Studenti të kuptojë rezultatin konkret të laboratorit dhe lidhjen mes kodit, historikut dhe publikimit.</a:t>
-            </a:r>
-          </a:p>
-          <a:p xmlns:a="http://schemas.openxmlformats.org/drawingml/2006/main">
-            <a:r>
-              <a:t/>
-            </a:r>
-          </a:p>
-          <a:p xmlns:a="http://schemas.openxmlformats.org/drawingml/2006/main">
-            <a:r>
-              <a:t>SKENARI I PROFESORIT</a:t>
-            </a:r>
-          </a:p>
-          <a:p xmlns:a="http://schemas.openxmlformats.org/drawingml/2006/main">
-            <a:r>
-              <a:t>Në laborator do të përdorim një projekt fillestar të përgatitur dhe të testuar.</a:t>
-            </a:r>
-          </a:p>
-          <a:p xmlns:a="http://schemas.openxmlformats.org/drawingml/2006/main">
-            <a:r>
-              <a:t/>
-            </a:r>
-          </a:p>
-          <a:p xmlns:a="http://schemas.openxmlformats.org/drawingml/2006/main">
-            <a:r>
-              <a:t>Do ta vendosni në repository-n tuaj, do të ndryshoni një pjesë të dukshme dhe do të krijoni commit-in përkatës.</a:t>
-            </a:r>
-          </a:p>
-          <a:p xmlns:a="http://schemas.openxmlformats.org/drawingml/2006/main">
-            <a:r>
-              <a:t/>
-            </a:r>
-          </a:p>
-          <a:p xmlns:a="http://schemas.openxmlformats.org/drawingml/2006/main">
-            <a:r>
-              <a:t>Pastaj do ta lidhni me Vercel dhe do ta hapni adresën publike në telefon.</a:t>
-            </a:r>
-          </a:p>
-          <a:p xmlns:a="http://schemas.openxmlformats.org/drawingml/2006/main">
-            <a:r>
-              <a:t/>
-            </a:r>
-          </a:p>
-          <a:p xmlns:a="http://schemas.openxmlformats.org/drawingml/2006/main">
-            <a:r>
-              <a:t>Prova kryesore vjen pas kësaj: bëni një ndryshim të dytë dhe kontrolloni nëse ai shfaqet pas publikimit të ri.</a:t>
-            </a:r>
-          </a:p>
-          <a:p xmlns:a="http://schemas.openxmlformats.org/drawingml/2006/main">
-            <a:r>
-              <a:t/>
-            </a:r>
-          </a:p>
-          <a:p xmlns:a="http://schemas.openxmlformats.org/drawingml/2006/main">
-            <a:r>
-              <a:t>Projekti fillestar përmban konfigurimin bazë PWA që do ta studiojmë gradualisht. Sot nuk presim backend të plotë ose rezervime reale.</a:t>
-            </a:r>
-          </a:p>
-          <a:p xmlns:a="http://schemas.openxmlformats.org/drawingml/2006/main">
-            <a:r>
-              <a:t/>
-            </a:r>
-          </a:p>
-          <a:p xmlns:a="http://schemas.openxmlformats.org/drawingml/2006/main">
-            <a:r>
-              <a:t>Nëse instalimi lokal ju bllokon, asistenti ju kalon te rruga në shfletues. Aktivizimi i një mjeti AI nuk është kusht për ta përfunduar detyrën.</a:t>
-            </a:r>
-          </a:p>
-          <a:p xmlns:a="http://schemas.openxmlformats.org/drawingml/2006/main">
-            <a:r>
-              <a:t/>
-            </a:r>
-          </a:p>
-          <a:p xmlns:a="http://schemas.openxmlformats.org/drawingml/2006/main">
-            <a:r>
-              <a:t>PYETJA INTERAKTIVE</a:t>
-            </a:r>
-          </a:p>
-          <a:p xmlns:a="http://schemas.openxmlformats.org/drawingml/2006/main">
-            <a:r>
-              <a:t>Çfarë duhet të dorëzoni që asistenti ta lidhë ndryshimin tuaj në kod me faqen që po sheh në telefon?</a:t>
-            </a:r>
-          </a:p>
-          <a:p xmlns:a="http://schemas.openxmlformats.org/drawingml/2006/main">
-            <a:r>
-              <a:t/>
-            </a:r>
-          </a:p>
-          <a:p xmlns:a="http://schemas.openxmlformats.org/drawingml/2006/main">
-            <a:r>
-              <a:t>UDHËZIMI</a:t>
-            </a:r>
-          </a:p>
-          <a:p xmlns:a="http://schemas.openxmlformats.org/drawingml/2006/main">
-            <a:r>
-              <a:t>1 minutë. Përgjigjja e synuar: repo, commit dhe URL funksionale. Laboratori 45-minutësh zhvillohet veçmas.</a:t>
-            </a:r>
-          </a:p>
-          <a:p xmlns:a="http://schemas.openxmlformats.org/drawingml/2006/main">
-            <a:r>
-              <a:t/>
-            </a:r>
-          </a:p>
-          <a:p xmlns:a="http://schemas.openxmlformats.org/drawingml/2006/main">
-            <a:r>
-              <a:t>PARALAJMËRIMI INXHINIERIK</a:t>
-            </a:r>
-          </a:p>
-          <a:p xmlns:a="http://schemas.openxmlformats.org/drawingml/2006/main">
-            <a:r>
-              <a:t>Publikimi automatik shpërndan ndryshimet. Cilësia varet nga kontrollet që kryhen përpara dhe pas tij.</a:t>
-            </a:r>
-          </a:p>
-          <a:p xmlns:a="http://schemas.openxmlformats.org/drawingml/2006/main">
-            <a:r>
-              <a:t/>
-            </a:r>
-          </a:p>
-          <a:p xmlns:a="http://schemas.openxmlformats.org/drawingml/2006/main">
-            <a:r>
-              <a:t>BURIM / SHËNIM</a:t>
-            </a:r>
-          </a:p>
-          <a:p xmlns:a="http://schemas.openxmlformats.org/drawingml/2006/main">
-            <a:r>
-              <a:t>https://vercel.com/docs/git</a:t>
-            </a:r>
-          </a:p>
-          <a:p xmlns:a="http://schemas.openxmlformats.org/drawingml/2006/main">
-            <a:r>
-              <a:t/>
-            </a:r>
-          </a:p>
-          <a:p xmlns:a="http://schemas.openxmlformats.org/drawingml/2006/main">
-            <a:r>
-              <a:t>Të gjitha situatat, oraret, pamjet e aplikacionit dhe identitetet e RideShare janë ilustrime mësimore.</a:t>
-            </a:r>
-          </a:p>
-          <a:p xmlns:a="http://schemas.openxmlformats.org/drawingml/2006/main">
-            <a:r>
-              <a:t/>
-            </a:r>
-          </a:p>
-          <a:p xmlns:a="http://schemas.openxmlformats.org/drawingml/2006/main">
-            <a:r>
-              <a:t>Logo: https://aab-edu.net/wp-content/themes/Kolegji-AAB/dist/img/kolegji-aab-logo.svg</a:t>
-            </a:r>
-          </a:p>
-        </p:txBody>
-      </p:sp>
-      <p:sp>
-        <p:nvSpPr>
-          <p:cNvPr id="4" name="Slide Number Placeholder 3"/>
-          <p:cNvSpPr>
-            <a:spLocks xmlns:a="http://schemas.openxmlformats.org/drawingml/2006/main" noGrp="1"/>
-          </p:cNvSpPr>
-          <p:nvPr>
-            <p:ph type="sldNum" idx="5"/>
-          </p:nvPr>
-        </p:nvSpPr>
-        <p:spPr/>
-        <p:txBody>
-          <a:bodyPr xmlns:a="http://schemas.openxmlformats.org/drawingml/2006/main"/>
-          <a:lstStyle xmlns:a="http://schemas.openxmlformats.org/drawingml/2006/main"/>
-          <a:p xmlns:a="http://schemas.openxmlformats.org/drawingml/2006/main"/>
-        </p:txBody>
-      </p:sp>
-    </p:spTree>
-  </p:cSld>
-  <p:clrMapOvr>
-    <a:masterClrMapping xmlns:a="http://schemas.openxmlformats.org/drawingml/2006/main"/>
-  </p:clrMapOvr>
-</p:notes>
-</file>
-
-<file path=ppt/notesSlides/notesSlide29.xml><?xml version="1.0" encoding="utf-8"?>
-<p:notes xmlns:p="http://schemas.openxmlformats.org/presentationml/2006/main">
-  <p:cSld>
-    <p:spTree>
-      <p:nvGrpSpPr>
-        <p:cNvPr id="1" name=""/>
-        <p:cNvGrpSpPr/>
-        <p:nvPr/>
-      </p:nvGrpSpPr>
-      <p:grpSpPr>
-        <a:xfrm xmlns:a="http://schemas.openxmlformats.org/drawingml/2006/main"/>
-      </p:grpSpPr>
-      <p:sp>
-        <p:nvSpPr>
-          <p:cNvPr id="2" name="Slide Image Placeholder 1"/>
-          <p:cNvSpPr>
-            <a:spLocks xmlns:a="http://schemas.openxmlformats.org/drawingml/2006/main" noGrp="1"/>
-          </p:cNvSpPr>
-          <p:nvPr>
-            <p:ph type="sldImg" idx="0"/>
-          </p:nvPr>
-        </p:nvSpPr>
-        <p:spPr/>
-      </p:sp>
-      <p:sp>
-        <p:nvSpPr>
-          <p:cNvPr id="3" name="Notes Placeholder 2"/>
-          <p:cNvSpPr>
-            <a:spLocks xmlns:a="http://schemas.openxmlformats.org/drawingml/2006/main" noGrp="1"/>
-          </p:cNvSpPr>
-          <p:nvPr>
-            <p:ph type="body" idx="1"/>
-          </p:nvPr>
-        </p:nvSpPr>
-        <p:spPr/>
-        <p:txBody>
-          <a:bodyPr xmlns:a="http://schemas.openxmlformats.org/drawingml/2006/main"/>
-          <a:lstStyle xmlns:a="http://schemas.openxmlformats.org/drawingml/2006/main"/>
-          <a:p xmlns:a="http://schemas.openxmlformats.org/drawingml/2006/main">
-            <a:r>
-              <a:t>LIGJËRATA 1 — PROGRAMIMI PËR PAJISJE MOBILE</a:t>
-            </a:r>
-          </a:p>
-          <a:p xmlns:a="http://schemas.openxmlformats.org/drawingml/2006/main">
-            <a:r>
-              <a:t>SLAJDI 21: Cilin supozim do të provoni?</a:t>
-            </a:r>
-          </a:p>
-          <a:p xmlns:a="http://schemas.openxmlformats.org/drawingml/2006/main">
-            <a:r>
-              <a:t>KOHA: 88:00–90:00 | FAZA: Reflektimi</a:t>
-            </a:r>
-          </a:p>
-          <a:p xmlns:a="http://schemas.openxmlformats.org/drawingml/2006/main">
-            <a:r>
-              <a:t>Koha përfshin ndërveprimin.</a:t>
-            </a:r>
-          </a:p>
-          <a:p xmlns:a="http://schemas.openxmlformats.org/drawingml/2006/main">
-            <a:r>
-              <a:t/>
-            </a:r>
-          </a:p>
-          <a:p xmlns:a="http://schemas.openxmlformats.org/drawingml/2006/main">
-            <a:r>
-              <a:t>OBJEKTIVI KOGNITIV</a:t>
-            </a:r>
-          </a:p>
-          <a:p xmlns:a="http://schemas.openxmlformats.org/drawingml/2006/main">
-            <a:r>
-              <a:t>Studenti të dalë me një problem të kufizuar dhe një hap të qartë për mbledhjen e provave.</a:t>
-            </a:r>
-          </a:p>
-          <a:p xmlns:a="http://schemas.openxmlformats.org/drawingml/2006/main">
-            <a:r>
-              <a:t/>
-            </a:r>
-          </a:p>
-          <a:p xmlns:a="http://schemas.openxmlformats.org/drawingml/2006/main">
-            <a:r>
-              <a:t>SKENARI I PROFESORIT</a:t>
-            </a:r>
-          </a:p>
-          <a:p xmlns:a="http://schemas.openxmlformats.org/drawingml/2006/main">
-            <a:r>
-              <a:t>Përpara se të dilni, plotësoni këto tri fjali. Keni një minutë.</a:t>
-            </a:r>
-          </a:p>
-          <a:p xmlns:a="http://schemas.openxmlformats.org/drawingml/2006/main">
-            <a:r>
-              <a:t/>
-            </a:r>
-          </a:p>
-          <a:p xmlns:a="http://schemas.openxmlformats.org/drawingml/2006/main">
-            <a:r>
-              <a:t>Për javën tjetër, zhvilloni tri biseda të shkurtra me persona që mund ta kenë problemin. Pyetini për rastin e fundit kur e përjetuan dhe si vepruan. Shënimet i sillni të anonimizuara.</a:t>
-            </a:r>
-          </a:p>
-          <a:p xmlns:a="http://schemas.openxmlformats.org/drawingml/2006/main">
-            <a:r>
-              <a:t/>
-            </a:r>
-          </a:p>
-          <a:p xmlns:a="http://schemas.openxmlformats.org/drawingml/2006/main">
-            <a:r>
-              <a:t>Pastaj përgatisni PRD-në paraprake dhe shkruani një veçori që qëllimisht do ta lini jashtë MVP-së.</a:t>
-            </a:r>
-          </a:p>
-          <a:p xmlns:a="http://schemas.openxmlformats.org/drawingml/2006/main">
-            <a:r>
-              <a:t/>
-            </a:r>
-          </a:p>
-          <a:p xmlns:a="http://schemas.openxmlformats.org/drawingml/2006/main">
-            <a:r>
-              <a:t>Sot ndoqëm rrugën nga një mëngjes i pasigurt te kërkesat, kufijtë dhe provat.</a:t>
-            </a:r>
-          </a:p>
-          <a:p xmlns:a="http://schemas.openxmlformats.org/drawingml/2006/main">
-            <a:r>
-              <a:t/>
-            </a:r>
-          </a:p>
-          <a:p xmlns:a="http://schemas.openxmlformats.org/drawingml/2006/main">
-            <a:r>
-              <a:t>Hapi juaj i radhës është të zbuloni nëse supozimi fillestar qëndron.</a:t>
-            </a:r>
-          </a:p>
-          <a:p xmlns:a="http://schemas.openxmlformats.org/drawingml/2006/main">
-            <a:r>
-              <a:t/>
-            </a:r>
-          </a:p>
-          <a:p xmlns:a="http://schemas.openxmlformats.org/drawingml/2006/main">
-            <a:r>
-              <a:t>PYETJA INTERAKTIVE</a:t>
-            </a:r>
-          </a:p>
-          <a:p xmlns:a="http://schemas.openxmlformats.org/drawingml/2006/main">
-            <a:r>
-              <a:t>Cili informacion nga një përdorues real mund t’ju bëjë ta ndryshoni idenë?</a:t>
-            </a:r>
-          </a:p>
-          <a:p xmlns:a="http://schemas.openxmlformats.org/drawingml/2006/main">
-            <a:r>
-              <a:t/>
-            </a:r>
-          </a:p>
-          <a:p xmlns:a="http://schemas.openxmlformats.org/drawingml/2006/main">
-            <a:r>
-              <a:t>UDHËZIMI</a:t>
-            </a:r>
-          </a:p>
-          <a:p xmlns:a="http://schemas.openxmlformats.org/drawingml/2006/main">
-            <a:r>
-              <a:t>1 minutë shkrim individual. Dorëzohet në letër si exit ticket. Nuk hapet debat shtesë.</a:t>
-            </a:r>
-          </a:p>
-          <a:p xmlns:a="http://schemas.openxmlformats.org/drawingml/2006/main">
-            <a:r>
-              <a:t/>
-            </a:r>
-          </a:p>
-          <a:p xmlns:a="http://schemas.openxmlformats.org/drawingml/2006/main">
-            <a:r>
-              <a:t>PARALAJMËRIMI INXHINIERIK</a:t>
-            </a:r>
-          </a:p>
-          <a:p xmlns:a="http://schemas.openxmlformats.org/drawingml/2006/main">
-            <a:r>
-              <a:t>Nëse asnjë rezultat nuk mund ta ndryshojë idenë tuaj, hipoteza ende nuk është e testueshme.</a:t>
-            </a:r>
-          </a:p>
-          <a:p xmlns:a="http://schemas.openxmlformats.org/drawingml/2006/main">
-            <a:r>
-              <a:t/>
-            </a:r>
-          </a:p>
-          <a:p xmlns:a="http://schemas.openxmlformats.org/drawingml/2006/main">
-            <a:r>
-              <a:t>Të gjitha situatat, oraret, pamjet e aplikacionit dhe identitetet e RideShare janë ilustrime mësimore.</a:t>
-            </a:r>
-          </a:p>
-          <a:p xmlns:a="http://schemas.openxmlformats.org/drawingml/2006/main">
-            <a:r>
-              <a:t/>
-            </a:r>
-          </a:p>
-          <a:p xmlns:a="http://schemas.openxmlformats.org/drawingml/2006/main">
-            <a:r>
-              <a:t>Logo: https://aab-edu.net/wp-content/themes/Kolegji-AAB/dist/img/kolegji-aab-logo.svg</a:t>
-            </a:r>
-          </a:p>
-        </p:txBody>
-      </p:sp>
-      <p:sp>
-        <p:nvSpPr>
-          <p:cNvPr id="4" name="Slide Number Placeholder 3"/>
-          <p:cNvSpPr>
-            <a:spLocks xmlns:a="http://schemas.openxmlformats.org/drawingml/2006/main" noGrp="1"/>
-          </p:cNvSpPr>
-          <p:nvPr>
-            <p:ph type="sldNum" idx="5"/>
-          </p:nvPr>
-        </p:nvSpPr>
-        <p:spPr/>
-        <p:txBody>
-          <a:bodyPr xmlns:a="http://schemas.openxmlformats.org/drawingml/2006/main"/>
-          <a:lstStyle xmlns:a="http://schemas.openxmlformats.org/drawingml/2006/main"/>
-          <a:p xmlns:a="http://schemas.openxmlformats.org/drawingml/2006/main"/>
-        </p:txBody>
-      </p:sp>
-    </p:spTree>
-  </p:cSld>
-  <p:clrMapOvr>
-    <a:masterClrMapping xmlns:a="http://schemas.openxmlformats.org/drawingml/2006/main"/>
-  </p:clrMapOvr>
-</p:notes>
-</file>
-
-<file path=ppt/notesSlides/notesSlide3.xml><?xml version="1.0" encoding="utf-8"?>
-<p:notes xmlns:p="http://schemas.openxmlformats.org/presentationml/2006/main">
-  <p:cSld>
-    <p:spTree>
-      <p:nvGrpSpPr>
-        <p:cNvPr id="1" name=""/>
-        <p:cNvGrpSpPr/>
-        <p:nvPr/>
-      </p:nvGrpSpPr>
-      <p:grpSpPr>
-        <a:xfrm xmlns:a="http://schemas.openxmlformats.org/drawingml/2006/main"/>
-      </p:grpSpPr>
-      <p:sp>
-        <p:nvSpPr>
-          <p:cNvPr id="2" name="Slide Image Placeholder 1"/>
-          <p:cNvSpPr>
-            <a:spLocks xmlns:a="http://schemas.openxmlformats.org/drawingml/2006/main" noGrp="1"/>
-          </p:cNvSpPr>
-          <p:nvPr>
-            <p:ph type="sldImg" idx="0"/>
-          </p:nvPr>
-        </p:nvSpPr>
-        <p:spPr/>
-      </p:sp>
-      <p:sp>
-        <p:nvSpPr>
-          <p:cNvPr id="3" name="Notes Placeholder 2"/>
-          <p:cNvSpPr>
-            <a:spLocks xmlns:a="http://schemas.openxmlformats.org/drawingml/2006/main" noGrp="1"/>
-          </p:cNvSpPr>
-          <p:nvPr>
-            <p:ph type="body" idx="1"/>
-          </p:nvPr>
-        </p:nvSpPr>
-        <p:spPr/>
-        <p:txBody>
-          <a:bodyPr xmlns:a="http://schemas.openxmlformats.org/drawingml/2006/main"/>
-          <a:lstStyle xmlns:a="http://schemas.openxmlformats.org/drawingml/2006/main"/>
-          <a:p xmlns:a="http://schemas.openxmlformats.org/drawingml/2006/main">
-            <a:r>
-              <a:t>Këto janë shembuj, jo një listë e mbyllur. Salloni mund të ketë problem me rezervimet e dyfishta. Servisi mund të ketë telefonata të shpeshta për statusin e riparimit. Dyqani mund të marrë porosi të paplota në mesazhe. Mobileria mund të ketë kërkesa pa përmasa apo afat. Flisni me biznesin para se të zgjidhni funksionalitetet. Për projektin mësimor shmangim pagesat reale dhe të dhënat e ndjeshme. Pyetja: cili hap i punës së biznesit tuaj shkakton më shumë telefonata apo gabime?</a:t>
-            </a:r>
-          </a:p>
-          <a:p xmlns:a="http://schemas.openxmlformats.org/drawingml/2006/main">
-            <a:r>
-              <a:t>Logo: https://aab-edu.net/wp-content/themes/Kolegji-AAB/dist/img/kolegji-aab-logo.svg</a:t>
-            </a:r>
-          </a:p>
-        </p:txBody>
-      </p:sp>
-      <p:sp>
-        <p:nvSpPr>
-          <p:cNvPr id="4" name="Slide Number Placeholder 3"/>
-          <p:cNvSpPr>
-            <a:spLocks xmlns:a="http://schemas.openxmlformats.org/drawingml/2006/main" noGrp="1"/>
-          </p:cNvSpPr>
-          <p:nvPr>
-            <p:ph type="sldNum" idx="5"/>
-          </p:nvPr>
-        </p:nvSpPr>
-        <p:spPr/>
-        <p:txBody>
-          <a:bodyPr xmlns:a="http://schemas.openxmlformats.org/drawingml/2006/main"/>
-          <a:lstStyle xmlns:a="http://schemas.openxmlformats.org/drawingml/2006/main"/>
-          <a:p xmlns:a="http://schemas.openxmlformats.org/drawingml/2006/main"/>
-        </p:txBody>
-      </p:sp>
-    </p:spTree>
-  </p:cSld>
-  <p:clrMapOvr>
-    <a:masterClrMapping xmlns:a="http://schemas.openxmlformats.org/drawingml/2006/main"/>
-  </p:clrMapOvr>
-</p:notes>
-</file>
-
-<file path=ppt/notesSlides/notesSlide4.xml><?xml version="1.0" encoding="utf-8"?>
-<p:notes xmlns:p="http://schemas.openxmlformats.org/presentationml/2006/main">
-  <p:cSld>
-    <p:spTree>
-      <p:nvGrpSpPr>
-        <p:cNvPr id="1" name=""/>
-        <p:cNvGrpSpPr/>
-        <p:nvPr/>
-      </p:nvGrpSpPr>
-      <p:grpSpPr>
-        <a:xfrm xmlns:a="http://schemas.openxmlformats.org/drawingml/2006/main"/>
-      </p:grpSpPr>
-      <p:sp>
-        <p:nvSpPr>
-          <p:cNvPr id="2" name="Slide Image Placeholder 1"/>
-          <p:cNvSpPr>
-            <a:spLocks xmlns:a="http://schemas.openxmlformats.org/drawingml/2006/main" noGrp="1"/>
-          </p:cNvSpPr>
-          <p:nvPr>
-            <p:ph type="sldImg" idx="0"/>
-          </p:nvPr>
-        </p:nvSpPr>
-        <p:spPr/>
-      </p:sp>
-      <p:sp>
-        <p:nvSpPr>
-          <p:cNvPr id="3" name="Notes Placeholder 2"/>
-          <p:cNvSpPr>
-            <a:spLocks xmlns:a="http://schemas.openxmlformats.org/drawingml/2006/main" noGrp="1"/>
-          </p:cNvSpPr>
-          <p:nvPr>
-            <p:ph type="body" idx="1"/>
-          </p:nvPr>
-        </p:nvSpPr>
-        <p:spPr/>
-        <p:txBody>
-          <a:bodyPr xmlns:a="http://schemas.openxmlformats.org/drawingml/2006/main"/>
-          <a:lstStyle xmlns:a="http://schemas.openxmlformats.org/drawingml/2006/main"/>
-          <a:p xmlns:a="http://schemas.openxmlformats.org/drawingml/2006/main">
-            <a:r>
-              <a:t>Do ta lidhim çdo njohuri me aplikacionin e biznesit tuaj. React dhe TypeScript na ndihmojnë të ndërtojmë komponentë të kuptueshëm. Next.js App Router organizon faqet dhe logjikën në server. Supabase ruan të dhënat, menaxhon identitetin dhe zbaton politikat RLS. PWA jep instalim kur pajisja e mbështet dhe një sjellje të planifikuar pa rrjet. Testimi dhe publikimi na lejojnë të verifikojmë se ndryshimet nuk e prishin rrjedhën. AI ndihmon, por ju duhet ta shpjegoni dhe ta testoni kodin.</a:t>
-            </a:r>
-          </a:p>
-          <a:p xmlns:a="http://schemas.openxmlformats.org/drawingml/2006/main">
-            <a:r>
-              <a:t>Logo: https://aab-edu.net/wp-content/themes/Kolegji-AAB/dist/img/kolegji-aab-logo.svg</a:t>
-            </a:r>
-          </a:p>
-        </p:txBody>
-      </p:sp>
-      <p:sp>
-        <p:nvSpPr>
-          <p:cNvPr id="4" name="Slide Number Placeholder 3"/>
-          <p:cNvSpPr>
-            <a:spLocks xmlns:a="http://schemas.openxmlformats.org/drawingml/2006/main" noGrp="1"/>
-          </p:cNvSpPr>
-          <p:nvPr>
-            <p:ph type="sldNum" idx="5"/>
-          </p:nvPr>
-        </p:nvSpPr>
-        <p:spPr/>
-        <p:txBody>
-          <a:bodyPr xmlns:a="http://schemas.openxmlformats.org/drawingml/2006/main"/>
-          <a:lstStyle xmlns:a="http://schemas.openxmlformats.org/drawingml/2006/main"/>
-          <a:p xmlns:a="http://schemas.openxmlformats.org/drawingml/2006/main"/>
-        </p:txBody>
-      </p:sp>
-    </p:spTree>
-  </p:cSld>
-  <p:clrMapOvr>
-    <a:masterClrMapping xmlns:a="http://schemas.openxmlformats.org/drawingml/2006/main"/>
-  </p:clrMapOvr>
-</p:notes>
-</file>
-
-<file path=ppt/notesSlides/notesSlide5.xml><?xml version="1.0" encoding="utf-8"?>
-<p:notes xmlns:p="http://schemas.openxmlformats.org/presentationml/2006/main">
-  <p:cSld>
-    <p:spTree>
-      <p:nvGrpSpPr>
-        <p:cNvPr id="1" name=""/>
-        <p:cNvGrpSpPr/>
-        <p:nvPr/>
-      </p:nvGrpSpPr>
-      <p:grpSpPr>
-        <a:xfrm xmlns:a="http://schemas.openxmlformats.org/drawingml/2006/main"/>
-      </p:grpSpPr>
-      <p:sp>
-        <p:nvSpPr>
-          <p:cNvPr id="2" name="Slide Image Placeholder 1"/>
-          <p:cNvSpPr>
-            <a:spLocks xmlns:a="http://schemas.openxmlformats.org/drawingml/2006/main" noGrp="1"/>
-          </p:cNvSpPr>
-          <p:nvPr>
-            <p:ph type="sldImg" idx="0"/>
-          </p:nvPr>
-        </p:nvSpPr>
-        <p:spPr/>
-      </p:sp>
-      <p:sp>
-        <p:nvSpPr>
-          <p:cNvPr id="3" name="Notes Placeholder 2"/>
-          <p:cNvSpPr>
-            <a:spLocks xmlns:a="http://schemas.openxmlformats.org/drawingml/2006/main" noGrp="1"/>
-          </p:cNvSpPr>
-          <p:nvPr>
-            <p:ph type="body" idx="1"/>
-          </p:nvPr>
-        </p:nvSpPr>
-        <p:spPr/>
-        <p:txBody>
-          <a:bodyPr xmlns:a="http://schemas.openxmlformats.org/drawingml/2006/main"/>
-          <a:lstStyle xmlns:a="http://schemas.openxmlformats.org/drawingml/2006/main"/>
-          <a:p xmlns:a="http://schemas.openxmlformats.org/drawingml/2006/main">
-            <a:r>
-              <a:t>Java e parë ka vetëm dy orë ligjëratë. Studentët zgjedhin biznesin dhe përgatiten për laboratorin e parë në javën e dytë. Deri në javën e tretë kemi një version të publikuar me navigim dhe përmbajtje të biznesit. Në javët katër dhe pesë shtojmë ruajtjen e të dhënave dhe autentifikimin. Në javën e gjashtë projektojmë sjelljen PWA dhe offline. Në javën e shtatë secili tregon një rrjedhë funksionale nga fillimi në fund.</a:t>
-            </a:r>
-          </a:p>
-          <a:p xmlns:a="http://schemas.openxmlformats.org/drawingml/2006/main">
-            <a:r>
-              <a:t>Logo: https://aab-edu.net/wp-content/themes/Kolegji-AAB/dist/img/kolegji-aab-logo.svg</a:t>
-            </a:r>
-          </a:p>
-        </p:txBody>
-      </p:sp>
-      <p:sp>
-        <p:nvSpPr>
-          <p:cNvPr id="4" name="Slide Number Placeholder 3"/>
-          <p:cNvSpPr>
-            <a:spLocks xmlns:a="http://schemas.openxmlformats.org/drawingml/2006/main" noGrp="1"/>
-          </p:cNvSpPr>
-          <p:nvPr>
-            <p:ph type="sldNum" idx="5"/>
-          </p:nvPr>
-        </p:nvSpPr>
-        <p:spPr/>
-        <p:txBody>
-          <a:bodyPr xmlns:a="http://schemas.openxmlformats.org/drawingml/2006/main"/>
-          <a:lstStyle xmlns:a="http://schemas.openxmlformats.org/drawingml/2006/main"/>
-          <a:p xmlns:a="http://schemas.openxmlformats.org/drawingml/2006/main"/>
-        </p:txBody>
-      </p:sp>
-    </p:spTree>
-  </p:cSld>
-  <p:clrMapOvr>
-    <a:masterClrMapping xmlns:a="http://schemas.openxmlformats.org/drawingml/2006/main"/>
-  </p:clrMapOvr>
-</p:notes>
-</file>
-
-<file path=ppt/notesSlides/notesSlide6.xml><?xml version="1.0" encoding="utf-8"?>
-<p:notes xmlns:p="http://schemas.openxmlformats.org/presentationml/2006/main">
-  <p:cSld>
-    <p:spTree>
-      <p:nvGrpSpPr>
-        <p:cNvPr id="1" name=""/>
-        <p:cNvGrpSpPr/>
-        <p:nvPr/>
-      </p:nvGrpSpPr>
-      <p:grpSpPr>
-        <a:xfrm xmlns:a="http://schemas.openxmlformats.org/drawingml/2006/main"/>
-      </p:grpSpPr>
-      <p:sp>
-        <p:nvSpPr>
-          <p:cNvPr id="2" name="Slide Image Placeholder 1"/>
-          <p:cNvSpPr>
-            <a:spLocks xmlns:a="http://schemas.openxmlformats.org/drawingml/2006/main" noGrp="1"/>
-          </p:cNvSpPr>
-          <p:nvPr>
-            <p:ph type="sldImg" idx="0"/>
-          </p:nvPr>
-        </p:nvSpPr>
-        <p:spPr/>
-      </p:sp>
-      <p:sp>
-        <p:nvSpPr>
-          <p:cNvPr id="3" name="Notes Placeholder 2"/>
-          <p:cNvSpPr>
-            <a:spLocks xmlns:a="http://schemas.openxmlformats.org/drawingml/2006/main" noGrp="1"/>
-          </p:cNvSpPr>
-          <p:nvPr>
-            <p:ph type="body" idx="1"/>
-          </p:nvPr>
-        </p:nvSpPr>
-        <p:spPr/>
-        <p:txBody>
-          <a:bodyPr xmlns:a="http://schemas.openxmlformats.org/drawingml/2006/main"/>
-          <a:lstStyle xmlns:a="http://schemas.openxmlformats.org/drawingml/2006/main"/>
-          <a:p xmlns:a="http://schemas.openxmlformats.org/drawingml/2006/main">
-            <a:r>
-              <a:t>Më pas shtojmë aftësi vetëm kur i duhen biznesit. Vendndodhja dhe njoftimet duhet të kenë arsye dhe leje të përdoruesit. Nëse nuk i duhen aplikacionit, studenti demonstron një alternativë të arsyetuar. Javët e fundit i kushtohen validimit, sigurisë, performancës dhe testimit të rrjedhës kryesore. Demo Day përfshin një provë reale në telefon, reagimin e biznesit dhe mbrojtjen individuale. Qëllimi është një produkt i vogël që funksionon, me kufizimet e dokumentuara.</a:t>
-            </a:r>
-          </a:p>
-          <a:p xmlns:a="http://schemas.openxmlformats.org/drawingml/2006/main">
-            <a:r>
-              <a:t>Logo: https://aab-edu.net/wp-content/themes/Kolegji-AAB/dist/img/kolegji-aab-logo.svg</a:t>
-            </a:r>
-          </a:p>
-        </p:txBody>
-      </p:sp>
-      <p:sp>
-        <p:nvSpPr>
-          <p:cNvPr id="4" name="Slide Number Placeholder 3"/>
-          <p:cNvSpPr>
-            <a:spLocks xmlns:a="http://schemas.openxmlformats.org/drawingml/2006/main" noGrp="1"/>
-          </p:cNvSpPr>
-          <p:nvPr>
-            <p:ph type="sldNum" idx="5"/>
-          </p:nvPr>
-        </p:nvSpPr>
-        <p:spPr/>
-        <p:txBody>
-          <a:bodyPr xmlns:a="http://schemas.openxmlformats.org/drawingml/2006/main"/>
-          <a:lstStyle xmlns:a="http://schemas.openxmlformats.org/drawingml/2006/main"/>
-          <a:p xmlns:a="http://schemas.openxmlformats.org/drawingml/2006/main"/>
-        </p:txBody>
-      </p:sp>
-    </p:spTree>
-  </p:cSld>
-  <p:clrMapOvr>
-    <a:masterClrMapping xmlns:a="http://schemas.openxmlformats.org/drawingml/2006/main"/>
-  </p:clrMapOvr>
-</p:notes>
-</file>
-
-<file path=ppt/notesSlides/notesSlide7.xml><?xml version="1.0" encoding="utf-8"?>
-<p:notes xmlns:p="http://schemas.openxmlformats.org/presentationml/2006/main">
-  <p:cSld>
-    <p:spTree>
-      <p:nvGrpSpPr>
-        <p:cNvPr id="1" name=""/>
-        <p:cNvGrpSpPr/>
-        <p:nvPr/>
-      </p:nvGrpSpPr>
-      <p:grpSpPr>
-        <a:xfrm xmlns:a="http://schemas.openxmlformats.org/drawingml/2006/main"/>
-      </p:grpSpPr>
-      <p:sp>
-        <p:nvSpPr>
-          <p:cNvPr id="2" name="Slide Image Placeholder 1"/>
-          <p:cNvSpPr>
-            <a:spLocks xmlns:a="http://schemas.openxmlformats.org/drawingml/2006/main" noGrp="1"/>
-          </p:cNvSpPr>
-          <p:nvPr>
-            <p:ph type="sldImg" idx="0"/>
-          </p:nvPr>
-        </p:nvSpPr>
-        <p:spPr/>
-      </p:sp>
-      <p:sp>
-        <p:nvSpPr>
-          <p:cNvPr id="3" name="Notes Placeholder 2"/>
-          <p:cNvSpPr>
-            <a:spLocks xmlns:a="http://schemas.openxmlformats.org/drawingml/2006/main" noGrp="1"/>
-          </p:cNvSpPr>
-          <p:nvPr>
-            <p:ph type="body" idx="1"/>
-          </p:nvPr>
-        </p:nvSpPr>
-        <p:spPr/>
-        <p:txBody>
-          <a:bodyPr xmlns:a="http://schemas.openxmlformats.org/drawingml/2006/main"/>
-          <a:lstStyle xmlns:a="http://schemas.openxmlformats.org/drawingml/2006/main"/>
-          <a:p xmlns:a="http://schemas.openxmlformats.org/drawingml/2006/main">
-            <a:r>
-              <a:t>Nga java e dytë kemi dy orë ushtrime çdo të enjte. Kjo është ndarja orientuese në përqindje të bllokut, sepse kohëzgjatja në minuta varet nëse institucioni përdor orë akademike. Fillojmë me një demonstrim të shkurtër dhe kriteret e pranimit. Pjesën më të madhe e kaloni duke zbatuar ndryshimin në aplikacionin tuaj. Më pas testoni në telefon dhe kontrolloni një skenar dështimi. Në fund bëni commit dhe shënoni çfarë përfunduat dhe çfarë mbetet. Profesori ndihmon për pengesat e përbashkëta. QR në mes të orës regjistron pjesëmarrjen për atë seancë, kur sistemi të jetë aktiv.</a:t>
-            </a:r>
-          </a:p>
-          <a:p xmlns:a="http://schemas.openxmlformats.org/drawingml/2006/main">
-            <a:r>
-              <a:t>Logo: https://aab-edu.net/wp-content/themes/Kolegji-AAB/dist/img/kolegji-aab-logo.svg</a:t>
-            </a:r>
-          </a:p>
-        </p:txBody>
-      </p:sp>
-      <p:sp>
-        <p:nvSpPr>
-          <p:cNvPr id="4" name="Slide Number Placeholder 3"/>
-          <p:cNvSpPr>
-            <a:spLocks xmlns:a="http://schemas.openxmlformats.org/drawingml/2006/main" noGrp="1"/>
-          </p:cNvSpPr>
-          <p:nvPr>
-            <p:ph type="sldNum" idx="5"/>
-          </p:nvPr>
-        </p:nvSpPr>
-        <p:spPr/>
-        <p:txBody>
-          <a:bodyPr xmlns:a="http://schemas.openxmlformats.org/drawingml/2006/main"/>
-          <a:lstStyle xmlns:a="http://schemas.openxmlformats.org/drawingml/2006/main"/>
-          <a:p xmlns:a="http://schemas.openxmlformats.org/drawingml/2006/main"/>
-        </p:txBody>
-      </p:sp>
-    </p:spTree>
-  </p:cSld>
-  <p:clrMapOvr>
-    <a:masterClrMapping xmlns:a="http://schemas.openxmlformats.org/drawingml/2006/main"/>
-  </p:clrMapOvr>
-</p:notes>
-</file>
-
-<file path=ppt/notesSlides/notesSlide8.xml><?xml version="1.0" encoding="utf-8"?>
-<p:notes xmlns:p="http://schemas.openxmlformats.org/presentationml/2006/main">
-  <p:cSld>
-    <p:spTree>
-      <p:nvGrpSpPr>
-        <p:cNvPr id="1" name=""/>
-        <p:cNvGrpSpPr/>
-        <p:nvPr/>
-      </p:nvGrpSpPr>
-      <p:grpSpPr>
-        <a:xfrm xmlns:a="http://schemas.openxmlformats.org/drawingml/2006/main"/>
-      </p:grpSpPr>
-      <p:sp>
-        <p:nvSpPr>
-          <p:cNvPr id="2" name="Slide Image Placeholder 1"/>
-          <p:cNvSpPr>
-            <a:spLocks xmlns:a="http://schemas.openxmlformats.org/drawingml/2006/main" noGrp="1"/>
-          </p:cNvSpPr>
-          <p:nvPr>
-            <p:ph type="sldImg" idx="0"/>
-          </p:nvPr>
-        </p:nvSpPr>
-        <p:spPr/>
-      </p:sp>
-      <p:sp>
-        <p:nvSpPr>
-          <p:cNvPr id="3" name="Notes Placeholder 2"/>
-          <p:cNvSpPr>
-            <a:spLocks xmlns:a="http://schemas.openxmlformats.org/drawingml/2006/main" noGrp="1"/>
-          </p:cNvSpPr>
-          <p:nvPr>
-            <p:ph type="body" idx="1"/>
-          </p:nvPr>
-        </p:nvSpPr>
-        <p:spPr/>
-        <p:txBody>
-          <a:bodyPr xmlns:a="http://schemas.openxmlformats.org/drawingml/2006/main"/>
-          <a:lstStyle xmlns:a="http://schemas.openxmlformats.org/drawingml/2006/main"/>
-          <a:p xmlns:a="http://schemas.openxmlformats.org/drawingml/2006/main">
-            <a:r>
-              <a:t>Dhjetë dorëzime teknike kanë nga tre pikë, gjithsej tridhjetë. Kriteret e çdo dorëzimi publikohen para afatit. Testet duhet të kontrollojnë sjelljen e aplikacionit dhe jo vetëm ekzistencën e skedarëve. Sistemi do të ruajë commit-in e dorëzuar dhe raportin e testeve. Një dështim i shërbimit të testimit nuk do të llogaritet si zero. Përgjigjja e biznesit dhe arsyetimi i vendimeve vlerësohen në projektin dhe mbrojtjen finale. Publikimi automatik i pikëve ende kërkon aktivizimin e shërbimit. Afati të dielën në 23:59 është propozim pune dhe do të konfirmohet para përdorimit me studentët.</a:t>
-            </a:r>
-          </a:p>
-          <a:p xmlns:a="http://schemas.openxmlformats.org/drawingml/2006/main">
-            <a:r>
-              <a:t>Logo: https://aab-edu.net/wp-content/themes/Kolegji-AAB/dist/img/kolegji-aab-logo.svg</a:t>
-            </a:r>
-          </a:p>
-        </p:txBody>
-      </p:sp>
-      <p:sp>
-        <p:nvSpPr>
-          <p:cNvPr id="4" name="Slide Number Placeholder 3"/>
-          <p:cNvSpPr>
-            <a:spLocks xmlns:a="http://schemas.openxmlformats.org/drawingml/2006/main" noGrp="1"/>
-          </p:cNvSpPr>
-          <p:nvPr>
-            <p:ph type="sldNum" idx="5"/>
-          </p:nvPr>
-        </p:nvSpPr>
-        <p:spPr/>
-        <p:txBody>
-          <a:bodyPr xmlns:a="http://schemas.openxmlformats.org/drawingml/2006/main"/>
-          <a:lstStyle xmlns:a="http://schemas.openxmlformats.org/drawingml/2006/main"/>
-          <a:p xmlns:a="http://schemas.openxmlformats.org/drawingml/2006/main"/>
-        </p:txBody>
-      </p:sp>
-    </p:spTree>
-  </p:cSld>
-  <p:clrMapOvr>
-    <a:masterClrMapping xmlns:a="http://schemas.openxmlformats.org/drawingml/2006/main"/>
-  </p:clrMapOvr>
-</p:notes>
-</file>
-
-<file path=ppt/notesSlides/notesSlide9.xml><?xml version="1.0" encoding="utf-8"?>
-<p:notes xmlns:p="http://schemas.openxmlformats.org/presentationml/2006/main">
-  <p:cSld>
-    <p:spTree>
-      <p:nvGrpSpPr>
-        <p:cNvPr id="1" name=""/>
-        <p:cNvGrpSpPr/>
-        <p:nvPr/>
-      </p:nvGrpSpPr>
-      <p:grpSpPr>
-        <a:xfrm xmlns:a="http://schemas.openxmlformats.org/drawingml/2006/main"/>
-      </p:grpSpPr>
-      <p:sp>
-        <p:nvSpPr>
-          <p:cNvPr id="2" name="Slide Image Placeholder 1"/>
-          <p:cNvSpPr>
-            <a:spLocks xmlns:a="http://schemas.openxmlformats.org/drawingml/2006/main" noGrp="1"/>
-          </p:cNvSpPr>
-          <p:nvPr>
-            <p:ph type="sldImg" idx="0"/>
-          </p:nvPr>
-        </p:nvSpPr>
-        <p:spPr/>
-      </p:sp>
-      <p:sp>
-        <p:nvSpPr>
-          <p:cNvPr id="3" name="Notes Placeholder 2"/>
-          <p:cNvSpPr>
-            <a:spLocks xmlns:a="http://schemas.openxmlformats.org/drawingml/2006/main" noGrp="1"/>
-          </p:cNvSpPr>
-          <p:nvPr>
-            <p:ph type="body" idx="1"/>
-          </p:nvPr>
-        </p:nvSpPr>
-        <p:spPr/>
-        <p:txBody>
-          <a:bodyPr xmlns:a="http://schemas.openxmlformats.org/drawingml/2006/main"/>
-          <a:lstStyle xmlns:a="http://schemas.openxmlformats.org/drawingml/2006/main"/>
-          <a:p xmlns:a="http://schemas.openxmlformats.org/drawingml/2006/main">
-            <a:r>
-              <a:t>Orari bazohet në datën e dhënë nga profesori: 17 shtator 2026, çdo të enjte, për 15 javë. Java 15 bie më 24 dhjetor 2026. Java e parë ka dy orë ligjëratë dhe asnjë ushtrim, ndërsa javët dy deri në pesëmbëdhjetë kanë dy orë ligjëratë dhe dy orë ushtrime, gjithsej 30 orë ligjëratë dhe 28 orë ushtrime. Kalendari zyrtar i MPB-së nuk ka festë zyrtare në këto të enjte. Krishtlindjet janë më 25 dhjetor, të premten. Faqja publike e AAB-së ende shfaq kalendarin 2025/26, ndaj pushimi institucional dhe takimi i 24 dhjetorit mbeten për verifikim. Burimet: https://mpb.rks-gov.net/f/86/Festat-Zyrtare dhe https://aab-edu.net/studentet-aktuale/kalendari-akademik/</a:t>
-            </a:r>
-          </a:p>
-          <a:p xmlns:a="http://schemas.openxmlformats.org/drawingml/2006/main">
-            <a:r>
-              <a:t>Logo: https://aab-edu.net/wp-content/themes/Kolegji-AAB/dist/img/kolegji-aab-logo.svg</a:t>
-            </a:r>
-          </a:p>
-        </p:txBody>
-      </p:sp>
-      <p:sp>
-        <p:nvSpPr>
-          <p:cNvPr id="4" name="Slide Number Placeholder 3"/>
-          <p:cNvSpPr>
-            <a:spLocks xmlns:a="http://schemas.openxmlformats.org/drawingml/2006/main" noGrp="1"/>
-          </p:cNvSpPr>
-          <p:nvPr>
-            <p:ph type="sldNum" idx="5"/>
-          </p:nvPr>
-        </p:nvSpPr>
-        <p:spPr/>
-        <p:txBody>
-          <a:bodyPr xmlns:a="http://schemas.openxmlformats.org/drawingml/2006/main"/>
-          <a:lstStyle xmlns:a="http://schemas.openxmlformats.org/drawingml/2006/main"/>
-          <a:p xmlns:a="http://schemas.openxmlformats.org/drawingml/2006/main"/>
-        </p:txBody>
-      </p:sp>
-    </p:spTree>
-  </p:cSld>
-  <p:clrMapOvr>
-    <a:masterClrMapping xmlns:a="http://schemas.openxmlformats.org/drawingml/2006/main"/>
-  </p:clrMapOvr>
-</p:notes>
 </file>
 
 <file path=ppt/slideLayouts/slideLayout1.xml><?xml version="1.0" encoding="utf-8"?>

--- a/Jave1_Hyrje_Nextjs_PWA_Copilot_2026.pptx
+++ b/Jave1_Hyrje_Nextjs_PWA_Copilot_2026.pptx
@@ -2,38 +2,38 @@
 <file path=ppt/presentation.xml><?xml version="1.0" encoding="utf-8"?>
 <p:presentation xmlns:p="http://schemas.openxmlformats.org/presentationml/2006/main">
   <p:sldMasterIdLst>
-    <p:sldMasterId xmlns:r="http://schemas.openxmlformats.org/officeDocument/2006/relationships" id="2147483648" r:id="R23ed594d3c874fff"/>
+    <p:sldMasterId xmlns:r="http://schemas.openxmlformats.org/officeDocument/2006/relationships" id="2147483648" r:id="Rc99adde3bfc14622"/>
   </p:sldMasterIdLst>
   <p:sldIdLst>
-    <p:sldId xmlns:r="http://schemas.openxmlformats.org/officeDocument/2006/relationships" id="256" r:id="R680531d7c8d64170"/>
-    <p:sldId xmlns:r="http://schemas.openxmlformats.org/officeDocument/2006/relationships" id="257" r:id="Rff792a8fc6b64130"/>
-    <p:sldId xmlns:r="http://schemas.openxmlformats.org/officeDocument/2006/relationships" id="258" r:id="Rec8b5cd0ac2947a1"/>
-    <p:sldId xmlns:r="http://schemas.openxmlformats.org/officeDocument/2006/relationships" id="259" r:id="Rc976631b983c4f0d"/>
-    <p:sldId xmlns:r="http://schemas.openxmlformats.org/officeDocument/2006/relationships" id="260" r:id="R6929fd60dd9e43d1"/>
-    <p:sldId xmlns:r="http://schemas.openxmlformats.org/officeDocument/2006/relationships" id="261" r:id="R95a9336130cb4c3d"/>
-    <p:sldId xmlns:r="http://schemas.openxmlformats.org/officeDocument/2006/relationships" id="262" r:id="R3ab32a06e8354b1f"/>
-    <p:sldId xmlns:r="http://schemas.openxmlformats.org/officeDocument/2006/relationships" id="263" r:id="R6fef2d2775ca4193"/>
-    <p:sldId xmlns:r="http://schemas.openxmlformats.org/officeDocument/2006/relationships" id="264" r:id="R3e7df30a18d9477c"/>
-    <p:sldId xmlns:r="http://schemas.openxmlformats.org/officeDocument/2006/relationships" id="265" r:id="Re0e13d699e0340e8"/>
-    <p:sldId xmlns:r="http://schemas.openxmlformats.org/officeDocument/2006/relationships" id="266" r:id="R61c1f25830d0435d"/>
-    <p:sldId xmlns:r="http://schemas.openxmlformats.org/officeDocument/2006/relationships" id="267" r:id="R6119d367e4b04c54"/>
-    <p:sldId xmlns:r="http://schemas.openxmlformats.org/officeDocument/2006/relationships" id="268" r:id="R59b8de1e50604a3c"/>
-    <p:sldId xmlns:r="http://schemas.openxmlformats.org/officeDocument/2006/relationships" id="269" r:id="R7fa0640df4204a27"/>
-    <p:sldId xmlns:r="http://schemas.openxmlformats.org/officeDocument/2006/relationships" id="270" r:id="Rd9b32368748c4db5"/>
-    <p:sldId xmlns:r="http://schemas.openxmlformats.org/officeDocument/2006/relationships" id="271" r:id="R182f79178dae4434"/>
-    <p:sldId xmlns:r="http://schemas.openxmlformats.org/officeDocument/2006/relationships" id="272" r:id="Rd5de8247305f487e"/>
-    <p:sldId xmlns:r="http://schemas.openxmlformats.org/officeDocument/2006/relationships" id="273" r:id="R858f6b8de79542ac"/>
-    <p:sldId xmlns:r="http://schemas.openxmlformats.org/officeDocument/2006/relationships" id="274" r:id="Rab9e0b49b5a244ce"/>
-    <p:sldId xmlns:r="http://schemas.openxmlformats.org/officeDocument/2006/relationships" id="275" r:id="Rd7b1e3376daf4253"/>
-    <p:sldId xmlns:r="http://schemas.openxmlformats.org/officeDocument/2006/relationships" id="276" r:id="R94e51465628e403b"/>
-    <p:sldId xmlns:r="http://schemas.openxmlformats.org/officeDocument/2006/relationships" id="277" r:id="Refbbdaebd851445d"/>
-    <p:sldId xmlns:r="http://schemas.openxmlformats.org/officeDocument/2006/relationships" id="278" r:id="R7fe04622b0274ac7"/>
-    <p:sldId xmlns:r="http://schemas.openxmlformats.org/officeDocument/2006/relationships" id="279" r:id="R721e7f2c1b9a438b"/>
-    <p:sldId xmlns:r="http://schemas.openxmlformats.org/officeDocument/2006/relationships" id="280" r:id="Rb9529caa9c6c457e"/>
-    <p:sldId xmlns:r="http://schemas.openxmlformats.org/officeDocument/2006/relationships" id="281" r:id="Rffe8cf25171c4459"/>
-    <p:sldId xmlns:r="http://schemas.openxmlformats.org/officeDocument/2006/relationships" id="282" r:id="R72c4436e3bd14980"/>
-    <p:sldId xmlns:r="http://schemas.openxmlformats.org/officeDocument/2006/relationships" id="283" r:id="R9d46f5b0ad4e4755"/>
-    <p:sldId xmlns:r="http://schemas.openxmlformats.org/officeDocument/2006/relationships" id="284" r:id="R7279bdfd901941c7"/>
+    <p:sldId xmlns:r="http://schemas.openxmlformats.org/officeDocument/2006/relationships" id="256" r:id="Rb5df68abbea24449"/>
+    <p:sldId xmlns:r="http://schemas.openxmlformats.org/officeDocument/2006/relationships" id="257" r:id="R86c224ac868e48eb"/>
+    <p:sldId xmlns:r="http://schemas.openxmlformats.org/officeDocument/2006/relationships" id="258" r:id="R37209b7858ab46e6"/>
+    <p:sldId xmlns:r="http://schemas.openxmlformats.org/officeDocument/2006/relationships" id="259" r:id="Re5bd5dfdac8c455d"/>
+    <p:sldId xmlns:r="http://schemas.openxmlformats.org/officeDocument/2006/relationships" id="260" r:id="Recc37fcd10e145d6"/>
+    <p:sldId xmlns:r="http://schemas.openxmlformats.org/officeDocument/2006/relationships" id="261" r:id="R3476c86ecbe34502"/>
+    <p:sldId xmlns:r="http://schemas.openxmlformats.org/officeDocument/2006/relationships" id="262" r:id="R750be0211a7e446a"/>
+    <p:sldId xmlns:r="http://schemas.openxmlformats.org/officeDocument/2006/relationships" id="263" r:id="Rf90f3b8d0f254776"/>
+    <p:sldId xmlns:r="http://schemas.openxmlformats.org/officeDocument/2006/relationships" id="264" r:id="R7d944e5f17d1446f"/>
+    <p:sldId xmlns:r="http://schemas.openxmlformats.org/officeDocument/2006/relationships" id="265" r:id="Rad4d5a38425f4841"/>
+    <p:sldId xmlns:r="http://schemas.openxmlformats.org/officeDocument/2006/relationships" id="266" r:id="Rbd25cf0e5e7e4554"/>
+    <p:sldId xmlns:r="http://schemas.openxmlformats.org/officeDocument/2006/relationships" id="267" r:id="Rd8d1b97dad5c49ef"/>
+    <p:sldId xmlns:r="http://schemas.openxmlformats.org/officeDocument/2006/relationships" id="268" r:id="Ra737bd6e2122458e"/>
+    <p:sldId xmlns:r="http://schemas.openxmlformats.org/officeDocument/2006/relationships" id="269" r:id="Re69ec57bea594eb5"/>
+    <p:sldId xmlns:r="http://schemas.openxmlformats.org/officeDocument/2006/relationships" id="270" r:id="R8dbbc04a46934b70"/>
+    <p:sldId xmlns:r="http://schemas.openxmlformats.org/officeDocument/2006/relationships" id="271" r:id="Rbe785212417d4332"/>
+    <p:sldId xmlns:r="http://schemas.openxmlformats.org/officeDocument/2006/relationships" id="272" r:id="R30bccf968651423e"/>
+    <p:sldId xmlns:r="http://schemas.openxmlformats.org/officeDocument/2006/relationships" id="273" r:id="R603cf261503644fe"/>
+    <p:sldId xmlns:r="http://schemas.openxmlformats.org/officeDocument/2006/relationships" id="274" r:id="R94e32af86b9d4c15"/>
+    <p:sldId xmlns:r="http://schemas.openxmlformats.org/officeDocument/2006/relationships" id="275" r:id="R2caa62c305164714"/>
+    <p:sldId xmlns:r="http://schemas.openxmlformats.org/officeDocument/2006/relationships" id="276" r:id="R59146143671e4904"/>
+    <p:sldId xmlns:r="http://schemas.openxmlformats.org/officeDocument/2006/relationships" id="277" r:id="R1ad8cb1a710749d8"/>
+    <p:sldId xmlns:r="http://schemas.openxmlformats.org/officeDocument/2006/relationships" id="278" r:id="R98c64833e7f8403c"/>
+    <p:sldId xmlns:r="http://schemas.openxmlformats.org/officeDocument/2006/relationships" id="279" r:id="Rb671e5fffa54461b"/>
+    <p:sldId xmlns:r="http://schemas.openxmlformats.org/officeDocument/2006/relationships" id="280" r:id="Re1bfb3773799448a"/>
+    <p:sldId xmlns:r="http://schemas.openxmlformats.org/officeDocument/2006/relationships" id="281" r:id="Rdad9ac7bbda645b4"/>
+    <p:sldId xmlns:r="http://schemas.openxmlformats.org/officeDocument/2006/relationships" id="282" r:id="Rd5ee2c84e0c14d05"/>
+    <p:sldId xmlns:r="http://schemas.openxmlformats.org/officeDocument/2006/relationships" id="283" r:id="R0d6e04e5c347457d"/>
+    <p:sldId xmlns:r="http://schemas.openxmlformats.org/officeDocument/2006/relationships" id="284" r:id="R7248704c773b4eb4"/>
   </p:sldIdLst>
   <p:sldSz cx="12192000" cy="6858000"/>
   <p:notesSz cx="6858000" cy="9144000"/>
@@ -78,7 +78,7 @@
   </p:cSld>
   <p:clrMap bg1="lt1" tx1="dk1" bg2="lt2" tx2="dk2" accent1="accent1" accent2="accent2" accent3="accent3" accent4="accent4" accent5="accent5" accent6="accent6" hlink="hlink" folHlink="folHlink"/>
   <p:sldLayoutIdLst>
-    <p:sldLayoutId xmlns:r="http://schemas.openxmlformats.org/officeDocument/2006/relationships" id="2147483649" r:id="R0754685b2e434198"/>
+    <p:sldLayoutId xmlns:r="http://schemas.openxmlformats.org/officeDocument/2006/relationships" id="2147483649" r:id="Rfe6a5ccf7b13489a"/>
   </p:sldLayoutIdLst>
   <p:txStyles>
     <p:titleStyle>
@@ -1094,7 +1094,7 @@
                 <a:ea typeface="Helvetica Neue"/>
                 <a:cs typeface="Helvetica Neue"/>
               </a:rPr>
-              <a:t>Një aplikacion për një biznes real.</a:t>
+              <a:t>Projekti juaj: aplikacion për një biznes real.</a:t>
             </a:r>
           </a:p>
         </p:txBody>
@@ -1448,7 +1448,7 @@
                 <a:ea typeface="Helvetica Neue"/>
                 <a:cs typeface="Helvetica Neue"/>
               </a:rPr>
-              <a:t>AAB RideShare</a:t>
+              <a:t>Restoranti “Sofra”</a:t>
             </a:r>
           </a:p>
         </p:txBody>
@@ -1506,31 +1506,7 @@
                 <a:ea typeface="Helvetica Neue"/>
                 <a:cs typeface="Helvetica Neue"/>
               </a:rPr>
-              <a:t>Fushë Kosovë</a:t>
-            </a:r>
-          </a:p>
-          <a:p xmlns:a="http://schemas.openxmlformats.org/drawingml/2006/main">
-            <a:pPr algn="l">
-              <a:buNone/>
-              <a:defRPr sz="2550" b="1">
-                <a:solidFill>
-                  <a:srgbClr val="F4F2EC"/>
-                </a:solidFill>
-                <a:latin typeface="Helvetica Neue"/>
-                <a:ea typeface="Helvetica Neue"/>
-                <a:cs typeface="Helvetica Neue"/>
-              </a:defRPr>
-            </a:pPr>
-            <a:r>
-              <a:rPr sz="2550" b="1">
-                <a:solidFill>
-                  <a:srgbClr val="F4F2EC"/>
-                </a:solidFill>
-                <a:latin typeface="Helvetica Neue"/>
-                <a:ea typeface="Helvetica Neue"/>
-                <a:cs typeface="Helvetica Neue"/>
-              </a:rPr>
-              <a:t>Kampus</a:t>
+              <a:t>A mund të porosis?</a:t>
             </a:r>
           </a:p>
         </p:txBody>
@@ -1570,25 +1546,25 @@
           <a:p xmlns:a="http://schemas.openxmlformats.org/drawingml/2006/main">
             <a:pPr algn="l">
               <a:buNone/>
-              <a:defRPr sz="3450" b="1">
-                <a:solidFill>
-                  <a:srgbClr val="F4F2EC"/>
-                </a:solidFill>
-                <a:latin typeface="Helvetica Neue"/>
-                <a:ea typeface="Helvetica Neue"/>
-                <a:cs typeface="Helvetica Neue"/>
-              </a:defRPr>
-            </a:pPr>
-            <a:r>
-              <a:rPr sz="3450" b="1">
-                <a:solidFill>
-                  <a:srgbClr val="F4F2EC"/>
-                </a:solidFill>
-                <a:latin typeface="Helvetica Neue"/>
-                <a:ea typeface="Helvetica Neue"/>
-                <a:cs typeface="Helvetica Neue"/>
-              </a:rPr>
-              <a:t>07:30</a:t>
+              <a:defRPr sz="1875" b="1">
+                <a:solidFill>
+                  <a:srgbClr val="F5F7F9"/>
+                </a:solidFill>
+                <a:latin typeface="Helvetica Neue"/>
+                <a:ea typeface="Helvetica Neue"/>
+                <a:cs typeface="Helvetica Neue"/>
+              </a:defRPr>
+            </a:pPr>
+            <a:r>
+              <a:rPr sz="1875" b="1">
+                <a:solidFill>
+                  <a:srgbClr val="F5F7F9"/>
+                </a:solidFill>
+                <a:latin typeface="Helvetica Neue"/>
+                <a:ea typeface="Helvetica Neue"/>
+                <a:cs typeface="Helvetica Neue"/>
+              </a:rPr>
+              <a:t>Tavë shtëpie</a:t>
             </a:r>
           </a:p>
         </p:txBody>
@@ -1646,7 +1622,7 @@
                 <a:ea typeface="Helvetica Neue"/>
                 <a:cs typeface="Helvetica Neue"/>
               </a:rPr>
-              <a:t>1 vend i lirë</a:t>
+              <a:t>Sasia: 1</a:t>
             </a:r>
           </a:p>
         </p:txBody>
@@ -1736,7 +1712,7 @@
                 <a:ea typeface="Helvetica Neue"/>
                 <a:cs typeface="Helvetica Neue"/>
               </a:rPr>
-              <a:t>Kërko vend</a:t>
+              <a:t>Porosit</a:t>
             </a:r>
           </a:p>
         </p:txBody>
@@ -1750,7 +1726,7 @@
           <p:nvPr/>
         </p:nvPicPr>
         <p:blipFill>
-          <a:blip xmlns:r="http://schemas.openxmlformats.org/officeDocument/2006/relationships" xmlns:a="http://schemas.openxmlformats.org/drawingml/2006/main" r:embed="Ra243a7a739104693"/>
+          <a:blip xmlns:r="http://schemas.openxmlformats.org/officeDocument/2006/relationships" xmlns:a="http://schemas.openxmlformats.org/drawingml/2006/main" r:embed="R59a4256bbe014b77"/>
           <a:stretch xmlns:a="http://schemas.openxmlformats.org/drawingml/2006/main"/>
         </p:blipFill>
         <p:spPr>
@@ -1975,7 +1951,7 @@
           <p:nvPr/>
         </p:nvPicPr>
         <p:blipFill>
-          <a:blip xmlns:r="http://schemas.openxmlformats.org/officeDocument/2006/relationships" xmlns:a="http://schemas.openxmlformats.org/drawingml/2006/main" r:embed="R9774eb9d87664a5a"/>
+          <a:blip xmlns:r="http://schemas.openxmlformats.org/officeDocument/2006/relationships" xmlns:a="http://schemas.openxmlformats.org/drawingml/2006/main" r:embed="R2a57d42d75f04264"/>
           <a:stretch xmlns:a="http://schemas.openxmlformats.org/drawingml/2006/main"/>
         </p:blipFill>
         <p:spPr>
@@ -2277,7 +2253,7 @@
           <p:nvPr/>
         </p:nvPicPr>
         <p:blipFill>
-          <a:blip xmlns:r="http://schemas.openxmlformats.org/officeDocument/2006/relationships" xmlns:a="http://schemas.openxmlformats.org/drawingml/2006/main" r:embed="Rba131908bd9f48cd"/>
+          <a:blip xmlns:r="http://schemas.openxmlformats.org/officeDocument/2006/relationships" xmlns:a="http://schemas.openxmlformats.org/drawingml/2006/main" r:embed="R19f3b7d3891a4672"/>
           <a:stretch xmlns:a="http://schemas.openxmlformats.org/drawingml/2006/main"/>
         </p:blipFill>
         <p:spPr>
@@ -3624,7 +3600,7 @@
                 <a:ea typeface="Helvetica Neue"/>
                 <a:cs typeface="Helvetica Neue"/>
               </a:rPr>
-              <a:t>Çfarë prove keni përtej miratimit verbal?</a:t>
+              <a:t>Çfarë prove tregon se porosia u mor dhe nuk u dyfishua?</a:t>
             </a:r>
           </a:p>
         </p:txBody>
@@ -3638,7 +3614,7 @@
           <p:nvPr/>
         </p:nvPicPr>
         <p:blipFill>
-          <a:blip xmlns:r="http://schemas.openxmlformats.org/officeDocument/2006/relationships" xmlns:a="http://schemas.openxmlformats.org/drawingml/2006/main" r:embed="R51bef60c1719491a"/>
+          <a:blip xmlns:r="http://schemas.openxmlformats.org/officeDocument/2006/relationships" xmlns:a="http://schemas.openxmlformats.org/drawingml/2006/main" r:embed="Re39faa6fb8f0409c"/>
           <a:stretch xmlns:a="http://schemas.openxmlformats.org/drawingml/2006/main"/>
         </p:blipFill>
         <p:spPr>
@@ -3849,7 +3825,7 @@
                 <a:ea typeface="Helvetica Neue"/>
                 <a:cs typeface="Helvetica Neue"/>
               </a:rPr>
-              <a:t>07:20. Ende pa konfirmim</a:t>
+              <a:t>11:45. Ende pa konfirmim</a:t>
             </a:r>
           </a:p>
         </p:txBody>
@@ -3941,7 +3917,7 @@
                 <a:ea typeface="Helvetica Neue"/>
                 <a:cs typeface="Helvetica Neue"/>
               </a:rPr>
-              <a:t>Prishtinë</a:t>
+              <a:t>Telefoni</a:t>
             </a:r>
           </a:p>
         </p:txBody>
@@ -4033,7 +4009,7 @@
                 <a:ea typeface="Helvetica Neue"/>
                 <a:cs typeface="Helvetica Neue"/>
               </a:rPr>
-              <a:t>Fushë Kosovë</a:t>
+              <a:t>Instagram</a:t>
             </a:r>
           </a:p>
         </p:txBody>
@@ -4125,7 +4101,7 @@
                 <a:ea typeface="Helvetica Neue"/>
                 <a:cs typeface="Helvetica Neue"/>
               </a:rPr>
-              <a:t>Kampus</a:t>
+              <a:t>Restoranti</a:t>
             </a:r>
           </a:p>
         </p:txBody>
@@ -4243,7 +4219,7 @@
                 <a:ea typeface="Helvetica Neue"/>
                 <a:cs typeface="Helvetica Neue"/>
               </a:rPr>
-              <a:t>Kërkim</a:t>
+              <a:t>Konsumatori</a:t>
             </a:r>
           </a:p>
         </p:txBody>
@@ -4301,7 +4277,7 @@
                 <a:ea typeface="Helvetica Neue"/>
                 <a:cs typeface="Helvetica Neue"/>
               </a:rPr>
-              <a:t>Mesazh</a:t>
+              <a:t>Mesazhi</a:t>
             </a:r>
           </a:p>
         </p:txBody>
@@ -4359,7 +4335,7 @@
                 <a:ea typeface="Helvetica Neue"/>
                 <a:cs typeface="Helvetica Neue"/>
               </a:rPr>
-              <a:t>Pritje</a:t>
+              <a:t>Pa përgjigje</a:t>
             </a:r>
           </a:p>
         </p:txBody>
@@ -4417,7 +4393,7 @@
                 <a:ea typeface="Helvetica Neue"/>
                 <a:cs typeface="Helvetica Neue"/>
               </a:rPr>
-              <a:t>Nisje</a:t>
+              <a:t>Porosia?</a:t>
             </a:r>
           </a:p>
         </p:txBody>
@@ -4535,7 +4511,7 @@
                 <a:ea typeface="Helvetica Neue"/>
                 <a:cs typeface="Helvetica Neue"/>
               </a:rPr>
-              <a:t>Pasiguria ka kosto</a:t>
+              <a:t>A u pranua porosia?</a:t>
             </a:r>
           </a:p>
         </p:txBody>
@@ -4607,7 +4583,7 @@
           <p:nvPr/>
         </p:nvPicPr>
         <p:blipFill>
-          <a:blip xmlns:r="http://schemas.openxmlformats.org/officeDocument/2006/relationships" xmlns:a="http://schemas.openxmlformats.org/drawingml/2006/main" r:embed="R968fcfa1e2c24eaf"/>
+          <a:blip xmlns:r="http://schemas.openxmlformats.org/officeDocument/2006/relationships" xmlns:a="http://schemas.openxmlformats.org/drawingml/2006/main" r:embed="Rd238091616dc4dc1"/>
           <a:stretch xmlns:a="http://schemas.openxmlformats.org/drawingml/2006/main"/>
         </p:blipFill>
         <p:spPr>
@@ -4818,7 +4794,7 @@
                 <a:ea typeface="Helvetica Neue"/>
                 <a:cs typeface="Helvetica Neue"/>
               </a:rPr>
-              <a:t>Mesazhi nuk është rezervim</a:t>
+              <a:t>Mesazhi nuk është porosi</a:t>
             </a:r>
           </a:p>
         </p:txBody>
@@ -4966,7 +4942,7 @@
                 <a:ea typeface="Helvetica Neue"/>
                 <a:cs typeface="Helvetica Neue"/>
               </a:rPr>
-              <a:t>Kam një vend.</a:t>
+              <a:t>Dua një porosi.</a:t>
             </a:r>
           </a:p>
         </p:txBody>
@@ -5056,7 +5032,7 @@
                 <a:ea typeface="Helvetica Neue"/>
                 <a:cs typeface="Helvetica Neue"/>
               </a:rPr>
-              <a:t>Vij unë.</a:t>
+              <a:t>Cilin vakt?</a:t>
             </a:r>
           </a:p>
         </p:txBody>
@@ -5146,7 +5122,7 @@
                 <a:ea typeface="Helvetica Neue"/>
                 <a:cs typeface="Helvetica Neue"/>
               </a:rPr>
-              <a:t>A është ende?</a:t>
+              <a:t>Për katër veta.</a:t>
             </a:r>
           </a:p>
         </p:txBody>
@@ -5236,7 +5212,7 @@
                 <a:ea typeface="Helvetica Neue"/>
                 <a:cs typeface="Helvetica Neue"/>
               </a:rPr>
-              <a:t>U nisët?</a:t>
+              <a:t>Në cilën adresë?</a:t>
             </a:r>
           </a:p>
         </p:txBody>
@@ -5294,7 +5270,7 @@
                 <a:ea typeface="Helvetica Neue"/>
                 <a:cs typeface="Helvetica Neue"/>
               </a:rPr>
-              <a:t>Gjendja e kërkesës</a:t>
+              <a:t>Të dhënat që mungojnë</a:t>
             </a:r>
           </a:p>
         </p:txBody>
@@ -5410,7 +5386,7 @@
                 <a:ea typeface="Helvetica Neue"/>
                 <a:cs typeface="Helvetica Neue"/>
               </a:rPr>
-              <a:t>Kërkuar</a:t>
+              <a:t>Vakti</a:t>
             </a:r>
           </a:p>
         </p:txBody>
@@ -5526,7 +5502,7 @@
                 <a:ea typeface="Helvetica Neue"/>
                 <a:cs typeface="Helvetica Neue"/>
               </a:rPr>
-              <a:t>Pranuar</a:t>
+              <a:t>Sasia</a:t>
             </a:r>
           </a:p>
         </p:txBody>
@@ -5642,7 +5618,7 @@
                 <a:ea typeface="Helvetica Neue"/>
                 <a:cs typeface="Helvetica Neue"/>
               </a:rPr>
-              <a:t>Refuzuar</a:t>
+              <a:t>Adresa</a:t>
             </a:r>
           </a:p>
         </p:txBody>
@@ -5700,7 +5676,7 @@
                 <a:ea typeface="Helvetica Neue"/>
                 <a:cs typeface="Helvetica Neue"/>
               </a:rPr>
-              <a:t>Kush e ka vendin?</a:t>
+              <a:t>Statusi: a u pranua porosia?</a:t>
             </a:r>
           </a:p>
         </p:txBody>
@@ -5714,7 +5690,7 @@
           <p:nvPr/>
         </p:nvPicPr>
         <p:blipFill>
-          <a:blip xmlns:r="http://schemas.openxmlformats.org/officeDocument/2006/relationships" xmlns:a="http://schemas.openxmlformats.org/drawingml/2006/main" r:embed="Rba5f01c83da94874"/>
+          <a:blip xmlns:r="http://schemas.openxmlformats.org/officeDocument/2006/relationships" xmlns:a="http://schemas.openxmlformats.org/drawingml/2006/main" r:embed="R1bfb7d89fb65413f"/>
           <a:stretch xmlns:a="http://schemas.openxmlformats.org/drawingml/2006/main"/>
         </p:blipFill>
         <p:spPr>
@@ -5965,49 +5941,73 @@
           <a:p xmlns:a="http://schemas.openxmlformats.org/drawingml/2006/main">
             <a:pPr algn="l">
               <a:buNone/>
-              <a:defRPr sz="4575" b="1">
-                <a:solidFill>
-                  <a:srgbClr val="F4F2EC"/>
-                </a:solidFill>
-                <a:latin typeface="Helvetica Neue"/>
-                <a:ea typeface="Helvetica Neue"/>
-                <a:cs typeface="Helvetica Neue"/>
-              </a:defRPr>
-            </a:pPr>
-            <a:r>
-              <a:rPr sz="4575" b="1">
-                <a:solidFill>
-                  <a:srgbClr val="F4F2EC"/>
-                </a:solidFill>
-                <a:latin typeface="Helvetica Neue"/>
-                <a:ea typeface="Helvetica Neue"/>
-                <a:cs typeface="Helvetica Neue"/>
-              </a:rPr>
-              <a:t>Statusi i qartë</a:t>
+              <a:defRPr sz="2850" b="1">
+                <a:solidFill>
+                  <a:srgbClr val="F5F7F9"/>
+                </a:solidFill>
+                <a:latin typeface="Helvetica Neue"/>
+                <a:ea typeface="Helvetica Neue"/>
+                <a:cs typeface="Helvetica Neue"/>
+              </a:defRPr>
+            </a:pPr>
+            <a:r>
+              <a:rPr sz="2850" b="1">
+                <a:solidFill>
+                  <a:srgbClr val="F5F7F9"/>
+                </a:solidFill>
+                <a:latin typeface="Helvetica Neue"/>
+                <a:ea typeface="Helvetica Neue"/>
+                <a:cs typeface="Helvetica Neue"/>
+              </a:rPr>
+              <a:t>Checkout i strukturuar</a:t>
             </a:r>
           </a:p>
           <a:p xmlns:a="http://schemas.openxmlformats.org/drawingml/2006/main">
             <a:pPr algn="l">
               <a:buNone/>
-              <a:defRPr sz="4575" b="1">
-                <a:solidFill>
-                  <a:srgbClr val="F4F2EC"/>
-                </a:solidFill>
-                <a:latin typeface="Helvetica Neue"/>
-                <a:ea typeface="Helvetica Neue"/>
-                <a:cs typeface="Helvetica Neue"/>
-              </a:defRPr>
-            </a:pPr>
-            <a:r>
-              <a:rPr sz="4575" b="1">
-                <a:solidFill>
-                  <a:srgbClr val="F4F2EC"/>
-                </a:solidFill>
-                <a:latin typeface="Helvetica Neue"/>
-                <a:ea typeface="Helvetica Neue"/>
-                <a:cs typeface="Helvetica Neue"/>
-              </a:rPr>
-              <a:t>ul pasigurinë.</a:t>
+              <a:defRPr sz="2850" b="1">
+                <a:solidFill>
+                  <a:srgbClr val="F5F7F9"/>
+                </a:solidFill>
+                <a:latin typeface="Helvetica Neue"/>
+                <a:ea typeface="Helvetica Neue"/>
+                <a:cs typeface="Helvetica Neue"/>
+              </a:defRPr>
+            </a:pPr>
+            <a:r>
+              <a:rPr sz="2850" b="1">
+                <a:solidFill>
+                  <a:srgbClr val="F5F7F9"/>
+                </a:solidFill>
+                <a:latin typeface="Helvetica Neue"/>
+                <a:ea typeface="Helvetica Neue"/>
+                <a:cs typeface="Helvetica Neue"/>
+              </a:rPr>
+              <a:t>dhe statusi i dukshëm</a:t>
+            </a:r>
+          </a:p>
+          <a:p xmlns:a="http://schemas.openxmlformats.org/drawingml/2006/main">
+            <a:pPr algn="l">
+              <a:buNone/>
+              <a:defRPr sz="2850" b="1">
+                <a:solidFill>
+                  <a:srgbClr val="F5F7F9"/>
+                </a:solidFill>
+                <a:latin typeface="Helvetica Neue"/>
+                <a:ea typeface="Helvetica Neue"/>
+                <a:cs typeface="Helvetica Neue"/>
+              </a:defRPr>
+            </a:pPr>
+            <a:r>
+              <a:rPr sz="2850" b="1">
+                <a:solidFill>
+                  <a:srgbClr val="F5F7F9"/>
+                </a:solidFill>
+                <a:latin typeface="Helvetica Neue"/>
+                <a:ea typeface="Helvetica Neue"/>
+                <a:cs typeface="Helvetica Neue"/>
+              </a:rPr>
+              <a:t>ulin pasigurinë.</a:t>
             </a:r>
           </a:p>
         </p:txBody>
@@ -6065,7 +6065,7 @@
                 <a:ea typeface="Helvetica Neue"/>
                 <a:cs typeface="Helvetica Neue"/>
               </a:rPr>
-              <a:t>EKSPERIMENT I PROPOZUAR</a:t>
+              <a:t>PRAG HIPOTETIK I PËRDORIMIT</a:t>
             </a:r>
           </a:p>
         </p:txBody>
@@ -6263,7 +6263,7 @@
                 <a:ea typeface="Helvetica Neue"/>
                 <a:cs typeface="Helvetica Neue"/>
               </a:rPr>
-              <a:t>Prag mësimor, ende pa rezultate</a:t>
+              <a:t>Prag hipotetik, ende pa rezultate</a:t>
             </a:r>
           </a:p>
         </p:txBody>
@@ -6335,7 +6335,7 @@
           <p:nvPr/>
         </p:nvPicPr>
         <p:blipFill>
-          <a:blip xmlns:r="http://schemas.openxmlformats.org/officeDocument/2006/relationships" xmlns:a="http://schemas.openxmlformats.org/drawingml/2006/main" r:embed="R54b3663926e04dfa"/>
+          <a:blip xmlns:r="http://schemas.openxmlformats.org/officeDocument/2006/relationships" xmlns:a="http://schemas.openxmlformats.org/drawingml/2006/main" r:embed="Rc3aa58ad78b14f87"/>
           <a:stretch xmlns:a="http://schemas.openxmlformats.org/drawingml/2006/main"/>
         </p:blipFill>
         <p:spPr>
@@ -6546,7 +6546,7 @@
                 <a:ea typeface="Helvetica Neue"/>
                 <a:cs typeface="Helvetica Neue"/>
               </a:rPr>
-              <a:t>Një faqe para kodit</a:t>
+              <a:t>PRD-ja e porosisë</a:t>
             </a:r>
           </a:p>
         </p:txBody>
@@ -6644,73 +6644,73 @@
           <a:p xmlns:a="http://schemas.openxmlformats.org/drawingml/2006/main">
             <a:pPr algn="l">
               <a:buNone/>
-              <a:defRPr sz="2925" b="0">
-                <a:solidFill>
-                  <a:srgbClr val="F4F2EC"/>
-                </a:solidFill>
-                <a:latin typeface="Helvetica Neue"/>
-                <a:ea typeface="Helvetica Neue"/>
-                <a:cs typeface="Helvetica Neue"/>
-              </a:defRPr>
-            </a:pPr>
-            <a:r>
-              <a:rPr sz="2925" b="0">
-                <a:solidFill>
-                  <a:srgbClr val="F4F2EC"/>
-                </a:solidFill>
-                <a:latin typeface="Helvetica Neue"/>
-                <a:ea typeface="Helvetica Neue"/>
-                <a:cs typeface="Helvetica Neue"/>
-              </a:rPr>
-              <a:t>Një marrëveshje</a:t>
+              <a:defRPr sz="1800" b="0">
+                <a:solidFill>
+                  <a:srgbClr val="F5F7F9"/>
+                </a:solidFill>
+                <a:latin typeface="Helvetica Neue"/>
+                <a:ea typeface="Helvetica Neue"/>
+                <a:cs typeface="Helvetica Neue"/>
+              </a:defRPr>
+            </a:pPr>
+            <a:r>
+              <a:rPr sz="1800" b="0">
+                <a:solidFill>
+                  <a:srgbClr val="F5F7F9"/>
+                </a:solidFill>
+                <a:latin typeface="Helvetica Neue"/>
+                <a:ea typeface="Helvetica Neue"/>
+                <a:cs typeface="Helvetica Neue"/>
+              </a:rPr>
+              <a:t>Dokumenti i shkurtër para kodit:</a:t>
             </a:r>
           </a:p>
           <a:p xmlns:a="http://schemas.openxmlformats.org/drawingml/2006/main">
             <a:pPr algn="l">
               <a:buNone/>
-              <a:defRPr sz="2925" b="0">
-                <a:solidFill>
-                  <a:srgbClr val="F4F2EC"/>
-                </a:solidFill>
-                <a:latin typeface="Helvetica Neue"/>
-                <a:ea typeface="Helvetica Neue"/>
-                <a:cs typeface="Helvetica Neue"/>
-              </a:defRPr>
-            </a:pPr>
-            <a:r>
-              <a:rPr sz="2925" b="0">
-                <a:solidFill>
-                  <a:srgbClr val="F4F2EC"/>
-                </a:solidFill>
-                <a:latin typeface="Helvetica Neue"/>
-                <a:ea typeface="Helvetica Neue"/>
-                <a:cs typeface="Helvetica Neue"/>
-              </a:rPr>
-              <a:t>për sjelljen</a:t>
+              <a:defRPr sz="1800" b="0">
+                <a:solidFill>
+                  <a:srgbClr val="F5F7F9"/>
+                </a:solidFill>
+                <a:latin typeface="Helvetica Neue"/>
+                <a:ea typeface="Helvetica Neue"/>
+                <a:cs typeface="Helvetica Neue"/>
+              </a:defRPr>
+            </a:pPr>
+            <a:r>
+              <a:rPr sz="1800" b="0">
+                <a:solidFill>
+                  <a:srgbClr val="F5F7F9"/>
+                </a:solidFill>
+                <a:latin typeface="Helvetica Neue"/>
+                <a:ea typeface="Helvetica Neue"/>
+                <a:cs typeface="Helvetica Neue"/>
+              </a:rPr>
+              <a:t>përdoruesi, problemi, rrjedha,</a:t>
             </a:r>
           </a:p>
           <a:p xmlns:a="http://schemas.openxmlformats.org/drawingml/2006/main">
             <a:pPr algn="l">
               <a:buNone/>
-              <a:defRPr sz="2925" b="0">
-                <a:solidFill>
-                  <a:srgbClr val="F4F2EC"/>
-                </a:solidFill>
-                <a:latin typeface="Helvetica Neue"/>
-                <a:ea typeface="Helvetica Neue"/>
-                <a:cs typeface="Helvetica Neue"/>
-              </a:defRPr>
-            </a:pPr>
-            <a:r>
-              <a:rPr sz="2925" b="0">
-                <a:solidFill>
-                  <a:srgbClr val="F4F2EC"/>
-                </a:solidFill>
-                <a:latin typeface="Helvetica Neue"/>
-                <a:ea typeface="Helvetica Neue"/>
-                <a:cs typeface="Helvetica Neue"/>
-              </a:rPr>
-              <a:t>e produktit.</a:t>
+              <a:defRPr sz="1800" b="0">
+                <a:solidFill>
+                  <a:srgbClr val="F5F7F9"/>
+                </a:solidFill>
+                <a:latin typeface="Helvetica Neue"/>
+                <a:ea typeface="Helvetica Neue"/>
+                <a:cs typeface="Helvetica Neue"/>
+              </a:defRPr>
+            </a:pPr>
+            <a:r>
+              <a:rPr sz="1800" b="0">
+                <a:solidFill>
+                  <a:srgbClr val="F5F7F9"/>
+                </a:solidFill>
+                <a:latin typeface="Helvetica Neue"/>
+                <a:ea typeface="Helvetica Neue"/>
+                <a:cs typeface="Helvetica Neue"/>
+              </a:rPr>
+              <a:t>kufijtë dhe kriteret e pranimit.</a:t>
             </a:r>
           </a:p>
         </p:txBody>
@@ -6808,25 +6808,25 @@
           <a:p xmlns:a="http://schemas.openxmlformats.org/drawingml/2006/main">
             <a:pPr algn="l">
               <a:buNone/>
-              <a:defRPr sz="2100" b="0">
-                <a:solidFill>
-                  <a:srgbClr val="F4F2EC"/>
-                </a:solidFill>
-                <a:latin typeface="Helvetica Neue"/>
-                <a:ea typeface="Helvetica Neue"/>
-                <a:cs typeface="Helvetica Neue"/>
-              </a:defRPr>
-            </a:pPr>
-            <a:r>
-              <a:rPr sz="2100" b="0">
-                <a:solidFill>
-                  <a:srgbClr val="F4F2EC"/>
-                </a:solidFill>
-                <a:latin typeface="Helvetica Neue"/>
-                <a:ea typeface="Helvetica Neue"/>
-                <a:cs typeface="Helvetica Neue"/>
-              </a:rPr>
-              <a:t>Student që kërkon udhëtim</a:t>
+              <a:defRPr sz="1575" b="0">
+                <a:solidFill>
+                  <a:srgbClr val="F5F7F9"/>
+                </a:solidFill>
+                <a:latin typeface="Helvetica Neue"/>
+                <a:ea typeface="Helvetica Neue"/>
+                <a:cs typeface="Helvetica Neue"/>
+              </a:defRPr>
+            </a:pPr>
+            <a:r>
+              <a:rPr sz="1575" b="0">
+                <a:solidFill>
+                  <a:srgbClr val="F5F7F9"/>
+                </a:solidFill>
+                <a:latin typeface="Helvetica Neue"/>
+                <a:ea typeface="Helvetica Neue"/>
+                <a:cs typeface="Helvetica Neue"/>
+              </a:rPr>
+              <a:t>Një klient i restorantit familjar</a:t>
             </a:r>
           </a:p>
         </p:txBody>
@@ -6954,25 +6954,25 @@
           <a:p xmlns:a="http://schemas.openxmlformats.org/drawingml/2006/main">
             <a:pPr algn="l">
               <a:buNone/>
-              <a:defRPr sz="2100" b="0">
-                <a:solidFill>
-                  <a:srgbClr val="F4F2EC"/>
-                </a:solidFill>
-                <a:latin typeface="Helvetica Neue"/>
-                <a:ea typeface="Helvetica Neue"/>
-                <a:cs typeface="Helvetica Neue"/>
-              </a:defRPr>
-            </a:pPr>
-            <a:r>
-              <a:rPr sz="2100" b="0">
-                <a:solidFill>
-                  <a:srgbClr val="F4F2EC"/>
-                </a:solidFill>
-                <a:latin typeface="Helvetica Neue"/>
-                <a:ea typeface="Helvetica Neue"/>
-                <a:cs typeface="Helvetica Neue"/>
-              </a:rPr>
-              <a:t>Konfirmimi mbetet i paqartë</a:t>
+              <a:defRPr sz="1575" b="0">
+                <a:solidFill>
+                  <a:srgbClr val="F5F7F9"/>
+                </a:solidFill>
+                <a:latin typeface="Helvetica Neue"/>
+                <a:ea typeface="Helvetica Neue"/>
+                <a:cs typeface="Helvetica Neue"/>
+              </a:defRPr>
+            </a:pPr>
+            <a:r>
+              <a:rPr sz="1575" b="0">
+                <a:solidFill>
+                  <a:srgbClr val="F5F7F9"/>
+                </a:solidFill>
+                <a:latin typeface="Helvetica Neue"/>
+                <a:ea typeface="Helvetica Neue"/>
+                <a:cs typeface="Helvetica Neue"/>
+              </a:rPr>
+              <a:t>Mesazhi nuk plotëson porosinë</a:t>
             </a:r>
           </a:p>
         </p:txBody>
@@ -7100,25 +7100,25 @@
           <a:p xmlns:a="http://schemas.openxmlformats.org/drawingml/2006/main">
             <a:pPr algn="l">
               <a:buNone/>
-              <a:defRPr sz="2100" b="0">
-                <a:solidFill>
-                  <a:srgbClr val="F4F2EC"/>
-                </a:solidFill>
-                <a:latin typeface="Helvetica Neue"/>
-                <a:ea typeface="Helvetica Neue"/>
-                <a:cs typeface="Helvetica Neue"/>
-              </a:defRPr>
-            </a:pPr>
-            <a:r>
-              <a:rPr sz="2100" b="0">
-                <a:solidFill>
-                  <a:srgbClr val="F4F2EC"/>
-                </a:solidFill>
-                <a:latin typeface="Helvetica Neue"/>
-                <a:ea typeface="Helvetica Neue"/>
-                <a:cs typeface="Helvetica Neue"/>
-              </a:rPr>
-              <a:t>Kërkon vend dhe sheh përgjigjen</a:t>
+              <a:defRPr sz="1575" b="0">
+                <a:solidFill>
+                  <a:srgbClr val="F5F7F9"/>
+                </a:solidFill>
+                <a:latin typeface="Helvetica Neue"/>
+                <a:ea typeface="Helvetica Neue"/>
+                <a:cs typeface="Helvetica Neue"/>
+              </a:defRPr>
+            </a:pPr>
+            <a:r>
+              <a:rPr sz="1575" b="0">
+                <a:solidFill>
+                  <a:srgbClr val="F5F7F9"/>
+                </a:solidFill>
+                <a:latin typeface="Helvetica Neue"/>
+                <a:ea typeface="Helvetica Neue"/>
+                <a:cs typeface="Helvetica Neue"/>
+              </a:rPr>
+              <a:t>Menu → Cart → Order → Ready</a:t>
             </a:r>
           </a:p>
         </p:txBody>
@@ -7246,25 +7246,25 @@
           <a:p xmlns:a="http://schemas.openxmlformats.org/drawingml/2006/main">
             <a:pPr algn="l">
               <a:buNone/>
-              <a:defRPr sz="2100" b="0">
-                <a:solidFill>
-                  <a:srgbClr val="F4F2EC"/>
-                </a:solidFill>
-                <a:latin typeface="Helvetica Neue"/>
-                <a:ea typeface="Helvetica Neue"/>
-                <a:cs typeface="Helvetica Neue"/>
-              </a:defRPr>
-            </a:pPr>
-            <a:r>
-              <a:rPr sz="2100" b="0">
-                <a:solidFill>
-                  <a:srgbClr val="F4F2EC"/>
-                </a:solidFill>
-                <a:latin typeface="Helvetica Neue"/>
-                <a:ea typeface="Helvetica Neue"/>
-                <a:cs typeface="Helvetica Neue"/>
-              </a:rPr>
-              <a:t>Pa pagesa ose GPS live</a:t>
+              <a:defRPr sz="1575" b="0">
+                <a:solidFill>
+                  <a:srgbClr val="F5F7F9"/>
+                </a:solidFill>
+                <a:latin typeface="Helvetica Neue"/>
+                <a:ea typeface="Helvetica Neue"/>
+                <a:cs typeface="Helvetica Neue"/>
+              </a:defRPr>
+            </a:pPr>
+            <a:r>
+              <a:rPr sz="1575" b="0">
+                <a:solidFill>
+                  <a:srgbClr val="F5F7F9"/>
+                </a:solidFill>
+                <a:latin typeface="Helvetica Neue"/>
+                <a:ea typeface="Helvetica Neue"/>
+                <a:cs typeface="Helvetica Neue"/>
+              </a:rPr>
+              <a:t>Pa pagesa ose GPS të korrierit</a:t>
             </a:r>
           </a:p>
         </p:txBody>
@@ -7392,25 +7392,25 @@
           <a:p xmlns:a="http://schemas.openxmlformats.org/drawingml/2006/main">
             <a:pPr algn="l">
               <a:buNone/>
-              <a:defRPr sz="2100" b="0">
-                <a:solidFill>
-                  <a:srgbClr val="F4F2EC"/>
-                </a:solidFill>
-                <a:latin typeface="Helvetica Neue"/>
-                <a:ea typeface="Helvetica Neue"/>
-                <a:cs typeface="Helvetica Neue"/>
-              </a:defRPr>
-            </a:pPr>
-            <a:r>
-              <a:rPr sz="2100" b="0">
-                <a:solidFill>
-                  <a:srgbClr val="F4F2EC"/>
-                </a:solidFill>
-                <a:latin typeface="Helvetica Neue"/>
-                <a:ea typeface="Helvetica Neue"/>
-                <a:cs typeface="Helvetica Neue"/>
-              </a:rPr>
-              <a:t>Kërkesë me status të qartë</a:t>
+              <a:defRPr sz="1500" b="0">
+                <a:solidFill>
+                  <a:srgbClr val="F5F7F9"/>
+                </a:solidFill>
+                <a:latin typeface="Helvetica Neue"/>
+                <a:ea typeface="Helvetica Neue"/>
+                <a:cs typeface="Helvetica Neue"/>
+              </a:defRPr>
+            </a:pPr>
+            <a:r>
+              <a:rPr sz="1500" b="0">
+                <a:solidFill>
+                  <a:srgbClr val="F5F7F9"/>
+                </a:solidFill>
+                <a:latin typeface="Helvetica Neue"/>
+                <a:ea typeface="Helvetica Neue"/>
+                <a:cs typeface="Helvetica Neue"/>
+              </a:rPr>
+              <a:t>Serveri konfirmon vetëm një porosi</a:t>
             </a:r>
           </a:p>
         </p:txBody>
@@ -7424,7 +7424,7 @@
           <p:nvPr/>
         </p:nvPicPr>
         <p:blipFill>
-          <a:blip xmlns:r="http://schemas.openxmlformats.org/officeDocument/2006/relationships" xmlns:a="http://schemas.openxmlformats.org/drawingml/2006/main" r:embed="R2cc19a352b8440f3"/>
+          <a:blip xmlns:r="http://schemas.openxmlformats.org/officeDocument/2006/relationships" xmlns:a="http://schemas.openxmlformats.org/drawingml/2006/main" r:embed="R01f5370d1c3842f4"/>
           <a:stretch xmlns:a="http://schemas.openxmlformats.org/drawingml/2006/main"/>
         </p:blipFill>
         <p:spPr>
@@ -7751,7 +7751,7 @@
                 <a:ea typeface="Helvetica Neue"/>
                 <a:cs typeface="Helvetica Neue"/>
               </a:rPr>
-              <a:t>Publiko</a:t>
+              <a:t>Shiko menunë</a:t>
             </a:r>
           </a:p>
         </p:txBody>
@@ -7809,7 +7809,7 @@
                 <a:ea typeface="Helvetica Neue"/>
                 <a:cs typeface="Helvetica Neue"/>
               </a:rPr>
-              <a:t>Shoferi</a:t>
+              <a:t>Klienti</a:t>
             </a:r>
           </a:p>
         </p:txBody>
@@ -7955,7 +7955,7 @@
                 <a:ea typeface="Helvetica Neue"/>
                 <a:cs typeface="Helvetica Neue"/>
               </a:rPr>
-              <a:t>Kërko</a:t>
+              <a:t>Vendos porosi</a:t>
             </a:r>
           </a:p>
         </p:txBody>
@@ -8013,7 +8013,7 @@
                 <a:ea typeface="Helvetica Neue"/>
                 <a:cs typeface="Helvetica Neue"/>
               </a:rPr>
-              <a:t>Studenti</a:t>
+              <a:t>Klienti</a:t>
             </a:r>
           </a:p>
         </p:txBody>
@@ -8141,25 +8141,25 @@
           <a:p xmlns:a="http://schemas.openxmlformats.org/drawingml/2006/main">
             <a:pPr algn="l">
               <a:buNone/>
-              <a:defRPr sz="3600" b="1">
-                <a:solidFill>
-                  <a:srgbClr val="F4F2EC"/>
-                </a:solidFill>
-                <a:latin typeface="Helvetica Neue"/>
-                <a:ea typeface="Helvetica Neue"/>
-                <a:cs typeface="Helvetica Neue"/>
-              </a:defRPr>
-            </a:pPr>
-            <a:r>
-              <a:rPr sz="3600" b="1">
-                <a:solidFill>
-                  <a:srgbClr val="F4F2EC"/>
-                </a:solidFill>
-                <a:latin typeface="Helvetica Neue"/>
-                <a:ea typeface="Helvetica Neue"/>
-                <a:cs typeface="Helvetica Neue"/>
-              </a:rPr>
-              <a:t>Vendos</a:t>
+              <a:defRPr sz="1875" b="1">
+                <a:solidFill>
+                  <a:srgbClr val="5DCEF2"/>
+                </a:solidFill>
+                <a:latin typeface="Helvetica Neue"/>
+                <a:ea typeface="Helvetica Neue"/>
+                <a:cs typeface="Helvetica Neue"/>
+              </a:defRPr>
+            </a:pPr>
+            <a:r>
+              <a:rPr sz="1875" b="1">
+                <a:solidFill>
+                  <a:srgbClr val="5DCEF2"/>
+                </a:solidFill>
+                <a:latin typeface="Helvetica Neue"/>
+                <a:ea typeface="Helvetica Neue"/>
+                <a:cs typeface="Helvetica Neue"/>
+              </a:rPr>
+              <a:t>Përditëso statusin</a:t>
             </a:r>
           </a:p>
         </p:txBody>
@@ -8217,7 +8217,7 @@
                 <a:ea typeface="Helvetica Neue"/>
                 <a:cs typeface="Helvetica Neue"/>
               </a:rPr>
-              <a:t>Shoferi</a:t>
+              <a:t>Stafi</a:t>
             </a:r>
           </a:p>
         </p:txBody>
@@ -8345,25 +8345,25 @@
           <a:p xmlns:a="http://schemas.openxmlformats.org/drawingml/2006/main">
             <a:pPr algn="l">
               <a:buNone/>
-              <a:defRPr sz="2250" b="0">
-                <a:solidFill>
-                  <a:srgbClr val="AEBFCB"/>
-                </a:solidFill>
-                <a:latin typeface="Helvetica Neue"/>
-                <a:ea typeface="Helvetica Neue"/>
-                <a:cs typeface="Helvetica Neue"/>
-              </a:defRPr>
-            </a:pPr>
-            <a:r>
-              <a:rPr sz="2250" b="0">
-                <a:solidFill>
-                  <a:srgbClr val="AEBFCB"/>
-                </a:solidFill>
-                <a:latin typeface="Helvetica Neue"/>
-                <a:ea typeface="Helvetica Neue"/>
-                <a:cs typeface="Helvetica Neue"/>
-              </a:rPr>
-              <a:t>Pagesa     GPS live     Chat     Vlerësime</a:t>
+              <a:defRPr sz="1275" b="0">
+                <a:solidFill>
+                  <a:srgbClr val="B6C5CE"/>
+                </a:solidFill>
+                <a:latin typeface="Helvetica Neue"/>
+                <a:ea typeface="Helvetica Neue"/>
+                <a:cs typeface="Helvetica Neue"/>
+              </a:defRPr>
+            </a:pPr>
+            <a:r>
+              <a:rPr sz="1275" b="0">
+                <a:solidFill>
+                  <a:srgbClr val="B6C5CE"/>
+                </a:solidFill>
+                <a:latin typeface="Helvetica Neue"/>
+                <a:ea typeface="Helvetica Neue"/>
+                <a:cs typeface="Helvetica Neue"/>
+              </a:rPr>
+              <a:t>Pagesa   marketplace me shumë restorante   GPS live i korrierit   vlerësime</a:t>
             </a:r>
           </a:p>
         </p:txBody>
@@ -8421,7 +8421,7 @@
                 <a:ea typeface="Helvetica Neue"/>
                 <a:cs typeface="Helvetica Neue"/>
               </a:rPr>
-              <a:t>Cilin rrezik ul veçoria që po zgjidhni?</a:t>
+              <a:t>Cili hap i rrjedhës ul pasigurinë e klientit?</a:t>
             </a:r>
           </a:p>
         </p:txBody>
@@ -8435,7 +8435,7 @@
           <p:nvPr/>
         </p:nvPicPr>
         <p:blipFill>
-          <a:blip xmlns:r="http://schemas.openxmlformats.org/officeDocument/2006/relationships" xmlns:a="http://schemas.openxmlformats.org/drawingml/2006/main" r:embed="R58907d9627b54a78"/>
+          <a:blip xmlns:r="http://schemas.openxmlformats.org/officeDocument/2006/relationships" xmlns:a="http://schemas.openxmlformats.org/drawingml/2006/main" r:embed="R4bd16e0b6d04469e"/>
           <a:stretch xmlns:a="http://schemas.openxmlformats.org/drawingml/2006/main"/>
         </p:blipFill>
         <p:spPr>
@@ -8796,7 +8796,7 @@
                 <a:ea typeface="Helvetica Neue"/>
                 <a:cs typeface="Helvetica Neue"/>
               </a:rPr>
-              <a:t>Kërkesa A</a:t>
+              <a:t>Menu</a:t>
             </a:r>
           </a:p>
         </p:txBody>
@@ -8888,7 +8888,7 @@
                 <a:ea typeface="Helvetica Neue"/>
                 <a:cs typeface="Helvetica Neue"/>
               </a:rPr>
-              <a:t>1 vend</a:t>
+              <a:t>Cart</a:t>
             </a:r>
           </a:p>
         </p:txBody>
@@ -8980,7 +8980,7 @@
                 <a:ea typeface="Helvetica Neue"/>
                 <a:cs typeface="Helvetica Neue"/>
               </a:rPr>
-              <a:t>Pranuar</a:t>
+              <a:t>Order</a:t>
             </a:r>
           </a:p>
         </p:txBody>
@@ -9098,7 +9098,7 @@
                 <a:ea typeface="Helvetica Neue"/>
                 <a:cs typeface="Helvetica Neue"/>
               </a:rPr>
-              <a:t>Kërkesa B</a:t>
+              <a:t>Ready</a:t>
             </a:r>
           </a:p>
         </p:txBody>
@@ -9138,25 +9138,25 @@
           <a:p xmlns:a="http://schemas.openxmlformats.org/drawingml/2006/main">
             <a:pPr algn="l">
               <a:buNone/>
-              <a:defRPr sz="2550" b="1">
-                <a:solidFill>
-                  <a:srgbClr val="F2BB66"/>
-                </a:solidFill>
-                <a:latin typeface="Helvetica Neue"/>
-                <a:ea typeface="Helvetica Neue"/>
-                <a:cs typeface="Helvetica Neue"/>
-              </a:defRPr>
-            </a:pPr>
-            <a:r>
-              <a:rPr sz="2550" b="1">
-                <a:solidFill>
-                  <a:srgbClr val="F2BB66"/>
-                </a:solidFill>
-                <a:latin typeface="Helvetica Neue"/>
-                <a:ea typeface="Helvetica Neue"/>
-                <a:cs typeface="Helvetica Neue"/>
-              </a:rPr>
-              <a:t>Pa tejkalim kapaciteti</a:t>
+              <a:defRPr sz="1875" b="1">
+                <a:solidFill>
+                  <a:srgbClr val="F3BE5C"/>
+                </a:solidFill>
+                <a:latin typeface="Helvetica Neue"/>
+                <a:ea typeface="Helvetica Neue"/>
+                <a:cs typeface="Helvetica Neue"/>
+              </a:defRPr>
+            </a:pPr>
+            <a:r>
+              <a:rPr sz="1875" b="1">
+                <a:solidFill>
+                  <a:srgbClr val="F3BE5C"/>
+                </a:solidFill>
+                <a:latin typeface="Helvetica Neue"/>
+                <a:ea typeface="Helvetica Neue"/>
+                <a:cs typeface="Helvetica Neue"/>
+              </a:rPr>
+              <a:t>Vetëm pas konfirmimit të serverit</a:t>
             </a:r>
           </a:p>
         </p:txBody>
@@ -9196,25 +9196,25 @@
           <a:p xmlns:a="http://schemas.openxmlformats.org/drawingml/2006/main">
             <a:pPr algn="l">
               <a:buNone/>
-              <a:defRPr sz="3150" b="1">
-                <a:solidFill>
-                  <a:srgbClr val="F4F2EC"/>
-                </a:solidFill>
-                <a:latin typeface="Helvetica Neue"/>
-                <a:ea typeface="Helvetica Neue"/>
-                <a:cs typeface="Helvetica Neue"/>
-              </a:defRPr>
-            </a:pPr>
-            <a:r>
-              <a:rPr sz="3150" b="1">
-                <a:solidFill>
-                  <a:srgbClr val="F4F2EC"/>
-                </a:solidFill>
-                <a:latin typeface="Helvetica Neue"/>
-                <a:ea typeface="Helvetica Neue"/>
-                <a:cs typeface="Helvetica Neue"/>
-              </a:rPr>
-              <a:t>Vendet e konfirmuara ≤ kapaciteti</a:t>
+              <a:defRPr sz="2025" b="1">
+                <a:solidFill>
+                  <a:srgbClr val="F5F7F9"/>
+                </a:solidFill>
+                <a:latin typeface="Helvetica Neue"/>
+                <a:ea typeface="Helvetica Neue"/>
+                <a:cs typeface="Helvetica Neue"/>
+              </a:defRPr>
+            </a:pPr>
+            <a:r>
+              <a:rPr sz="2025" b="1">
+                <a:solidFill>
+                  <a:srgbClr val="F5F7F9"/>
+                </a:solidFill>
+                <a:latin typeface="Helvetica Neue"/>
+                <a:ea typeface="Helvetica Neue"/>
+                <a:cs typeface="Helvetica Neue"/>
+              </a:rPr>
+              <a:t>Porosia ruhet një herë dhe statusi arrin “Ready”</a:t>
             </a:r>
           </a:p>
         </p:txBody>
@@ -9272,7 +9272,7 @@
                 <a:ea typeface="Helvetica Neue"/>
                 <a:cs typeface="Helvetica Neue"/>
               </a:rPr>
-              <a:t>Çfarë ndodh kur dy kërkesa mbërrijnë njëkohësisht?</a:t>
+              <a:t>Çfarë ndodh kur klienti shtyp “Porosit” dy herë?</a:t>
             </a:r>
           </a:p>
         </p:txBody>
@@ -9286,7 +9286,7 @@
           <p:nvPr/>
         </p:nvPicPr>
         <p:blipFill>
-          <a:blip xmlns:r="http://schemas.openxmlformats.org/officeDocument/2006/relationships" xmlns:a="http://schemas.openxmlformats.org/drawingml/2006/main" r:embed="Rbd4973aaa44e43db"/>
+          <a:blip xmlns:r="http://schemas.openxmlformats.org/officeDocument/2006/relationships" xmlns:a="http://schemas.openxmlformats.org/drawingml/2006/main" r:embed="R14ee83dcf5424339"/>
           <a:stretch xmlns:a="http://schemas.openxmlformats.org/drawingml/2006/main"/>
         </p:blipFill>
         <p:spPr>
@@ -9653,7 +9653,7 @@
                 <a:ea typeface="Helvetica Neue"/>
                 <a:cs typeface="Helvetica Neue"/>
               </a:rPr>
-              <a:t>AAB RideShare</a:t>
+              <a:t>Restoranti Sofra</a:t>
             </a:r>
           </a:p>
         </p:txBody>
@@ -9711,7 +9711,7 @@
                 <a:ea typeface="Helvetica Neue"/>
                 <a:cs typeface="Helvetica Neue"/>
               </a:rPr>
-              <a:t>Udhëtimet</a:t>
+              <a:t>MENU</a:t>
             </a:r>
           </a:p>
         </p:txBody>
@@ -9769,31 +9769,7 @@
                 <a:ea typeface="Helvetica Neue"/>
                 <a:cs typeface="Helvetica Neue"/>
               </a:rPr>
-              <a:t>Fushë Kosovë</a:t>
-            </a:r>
-          </a:p>
-          <a:p xmlns:a="http://schemas.openxmlformats.org/drawingml/2006/main">
-            <a:pPr algn="l">
-              <a:buNone/>
-              <a:defRPr sz="2025" b="1">
-                <a:solidFill>
-                  <a:srgbClr val="F4F2EC"/>
-                </a:solidFill>
-                <a:latin typeface="Helvetica Neue"/>
-                <a:ea typeface="Helvetica Neue"/>
-                <a:cs typeface="Helvetica Neue"/>
-              </a:defRPr>
-            </a:pPr>
-            <a:r>
-              <a:rPr sz="2025" b="1">
-                <a:solidFill>
-                  <a:srgbClr val="F4F2EC"/>
-                </a:solidFill>
-                <a:latin typeface="Helvetica Neue"/>
-                <a:ea typeface="Helvetica Neue"/>
-                <a:cs typeface="Helvetica Neue"/>
-              </a:rPr>
-              <a:t>Kampus</a:t>
+              <a:t>Tavë shtëpie</a:t>
             </a:r>
           </a:p>
         </p:txBody>
@@ -9833,25 +9809,25 @@
           <a:p xmlns:a="http://schemas.openxmlformats.org/drawingml/2006/main">
             <a:pPr algn="l">
               <a:buNone/>
-              <a:defRPr sz="1725" b="0">
-                <a:solidFill>
-                  <a:srgbClr val="AEBFCB"/>
-                </a:solidFill>
-                <a:latin typeface="Helvetica Neue"/>
-                <a:ea typeface="Helvetica Neue"/>
-                <a:cs typeface="Helvetica Neue"/>
-              </a:defRPr>
-            </a:pPr>
-            <a:r>
-              <a:rPr sz="1725" b="0">
-                <a:solidFill>
-                  <a:srgbClr val="AEBFCB"/>
-                </a:solidFill>
-                <a:latin typeface="Helvetica Neue"/>
-                <a:ea typeface="Helvetica Neue"/>
-                <a:cs typeface="Helvetica Neue"/>
-              </a:rPr>
-              <a:t>07:30     1 vend</a:t>
+              <a:defRPr sz="1200" b="0">
+                <a:solidFill>
+                  <a:srgbClr val="B6C5CE"/>
+                </a:solidFill>
+                <a:latin typeface="Helvetica Neue"/>
+                <a:ea typeface="Helvetica Neue"/>
+                <a:cs typeface="Helvetica Neue"/>
+              </a:defRPr>
+            </a:pPr>
+            <a:r>
+              <a:rPr sz="1200" b="0">
+                <a:solidFill>
+                  <a:srgbClr val="B6C5CE"/>
+                </a:solidFill>
+                <a:latin typeface="Helvetica Neue"/>
+                <a:ea typeface="Helvetica Neue"/>
+                <a:cs typeface="Helvetica Neue"/>
+              </a:rPr>
+              <a:t>8 €     Në dispozicion</a:t>
             </a:r>
           </a:p>
         </p:txBody>
@@ -9941,7 +9917,7 @@
                 <a:ea typeface="Helvetica Neue"/>
                 <a:cs typeface="Helvetica Neue"/>
               </a:rPr>
-              <a:t>Shiko detajet</a:t>
+              <a:t>Shto</a:t>
             </a:r>
           </a:p>
         </p:txBody>
@@ -10097,7 +10073,7 @@
                 <a:ea typeface="Helvetica Neue"/>
                 <a:cs typeface="Helvetica Neue"/>
               </a:rPr>
-              <a:t>AAB RideShare</a:t>
+              <a:t>Restoranti Sofra</a:t>
             </a:r>
           </a:p>
         </p:txBody>
@@ -10155,7 +10131,7 @@
                 <a:ea typeface="Helvetica Neue"/>
                 <a:cs typeface="Helvetica Neue"/>
               </a:rPr>
-              <a:t>Fushë Kosovë</a:t>
+              <a:t>CART</a:t>
             </a:r>
           </a:p>
           <a:p xmlns:a="http://schemas.openxmlformats.org/drawingml/2006/main">
@@ -10179,7 +10155,7 @@
                 <a:ea typeface="Helvetica Neue"/>
                 <a:cs typeface="Helvetica Neue"/>
               </a:rPr>
-              <a:t>Kampus</a:t>
+              <a:t>Tavë shtëpie</a:t>
             </a:r>
           </a:p>
         </p:txBody>
@@ -10237,7 +10213,7 @@
                 <a:ea typeface="Helvetica Neue"/>
                 <a:cs typeface="Helvetica Neue"/>
               </a:rPr>
-              <a:t>07:30</a:t>
+              <a:t>Sasia: 1</a:t>
             </a:r>
           </a:p>
         </p:txBody>
@@ -10277,25 +10253,25 @@
           <a:p xmlns:a="http://schemas.openxmlformats.org/drawingml/2006/main">
             <a:pPr algn="l">
               <a:buNone/>
-              <a:defRPr sz="1875" b="0">
-                <a:solidFill>
-                  <a:srgbClr val="AEBFCB"/>
-                </a:solidFill>
-                <a:latin typeface="Helvetica Neue"/>
-                <a:ea typeface="Helvetica Neue"/>
-                <a:cs typeface="Helvetica Neue"/>
-              </a:defRPr>
-            </a:pPr>
-            <a:r>
-              <a:rPr sz="1875" b="0">
-                <a:solidFill>
-                  <a:srgbClr val="AEBFCB"/>
-                </a:solidFill>
-                <a:latin typeface="Helvetica Neue"/>
-                <a:ea typeface="Helvetica Neue"/>
-                <a:cs typeface="Helvetica Neue"/>
-              </a:rPr>
-              <a:t>1 vend i lirë</a:t>
+              <a:defRPr sz="1200" b="0">
+                <a:solidFill>
+                  <a:srgbClr val="B6C5CE"/>
+                </a:solidFill>
+                <a:latin typeface="Helvetica Neue"/>
+                <a:ea typeface="Helvetica Neue"/>
+                <a:cs typeface="Helvetica Neue"/>
+              </a:defRPr>
+            </a:pPr>
+            <a:r>
+              <a:rPr sz="1200" b="0">
+                <a:solidFill>
+                  <a:srgbClr val="B6C5CE"/>
+                </a:solidFill>
+                <a:latin typeface="Helvetica Neue"/>
+                <a:ea typeface="Helvetica Neue"/>
+                <a:cs typeface="Helvetica Neue"/>
+              </a:rPr>
+              <a:t>Gjithsej: 8 €</a:t>
             </a:r>
           </a:p>
         </p:txBody>
@@ -10385,7 +10361,7 @@
                 <a:ea typeface="Helvetica Neue"/>
                 <a:cs typeface="Helvetica Neue"/>
               </a:rPr>
-              <a:t>Kërko vend</a:t>
+              <a:t>Porosit</a:t>
             </a:r>
           </a:p>
         </p:txBody>
@@ -10541,7 +10517,7 @@
                 <a:ea typeface="Helvetica Neue"/>
                 <a:cs typeface="Helvetica Neue"/>
               </a:rPr>
-              <a:t>AAB RideShare</a:t>
+              <a:t>Restoranti Sofra</a:t>
             </a:r>
           </a:p>
         </p:txBody>
@@ -10599,7 +10575,7 @@
                 <a:ea typeface="Helvetica Neue"/>
                 <a:cs typeface="Helvetica Neue"/>
               </a:rPr>
-              <a:t>Kërkesa juaj</a:t>
+              <a:t>ORDER #1042</a:t>
             </a:r>
           </a:p>
         </p:txBody>
@@ -10657,7 +10633,7 @@
                 <a:ea typeface="Helvetica Neue"/>
                 <a:cs typeface="Helvetica Neue"/>
               </a:rPr>
-              <a:t>NË PRITJE</a:t>
+              <a:t>U PRANUA</a:t>
             </a:r>
           </a:p>
         </p:txBody>
@@ -10697,49 +10673,49 @@
           <a:p xmlns:a="http://schemas.openxmlformats.org/drawingml/2006/main">
             <a:pPr algn="l">
               <a:buNone/>
-              <a:defRPr sz="1875" b="0">
-                <a:solidFill>
-                  <a:srgbClr val="AEBFCB"/>
-                </a:solidFill>
-                <a:latin typeface="Helvetica Neue"/>
-                <a:ea typeface="Helvetica Neue"/>
-                <a:cs typeface="Helvetica Neue"/>
-              </a:defRPr>
-            </a:pPr>
-            <a:r>
-              <a:rPr sz="1875" b="0">
-                <a:solidFill>
-                  <a:srgbClr val="AEBFCB"/>
-                </a:solidFill>
-                <a:latin typeface="Helvetica Neue"/>
-                <a:ea typeface="Helvetica Neue"/>
-                <a:cs typeface="Helvetica Neue"/>
-              </a:rPr>
-              <a:t>Shoferi ende</a:t>
+              <a:defRPr sz="1275" b="0">
+                <a:solidFill>
+                  <a:srgbClr val="B6C5CE"/>
+                </a:solidFill>
+                <a:latin typeface="Helvetica Neue"/>
+                <a:ea typeface="Helvetica Neue"/>
+                <a:cs typeface="Helvetica Neue"/>
+              </a:defRPr>
+            </a:pPr>
+            <a:r>
+              <a:rPr sz="1275" b="0">
+                <a:solidFill>
+                  <a:srgbClr val="B6C5CE"/>
+                </a:solidFill>
+                <a:latin typeface="Helvetica Neue"/>
+                <a:ea typeface="Helvetica Neue"/>
+                <a:cs typeface="Helvetica Neue"/>
+              </a:rPr>
+              <a:t>READY</a:t>
             </a:r>
           </a:p>
           <a:p xmlns:a="http://schemas.openxmlformats.org/drawingml/2006/main">
             <a:pPr algn="l">
               <a:buNone/>
-              <a:defRPr sz="1875" b="0">
-                <a:solidFill>
-                  <a:srgbClr val="AEBFCB"/>
-                </a:solidFill>
-                <a:latin typeface="Helvetica Neue"/>
-                <a:ea typeface="Helvetica Neue"/>
-                <a:cs typeface="Helvetica Neue"/>
-              </a:defRPr>
-            </a:pPr>
-            <a:r>
-              <a:rPr sz="1875" b="0">
-                <a:solidFill>
-                  <a:srgbClr val="AEBFCB"/>
-                </a:solidFill>
-                <a:latin typeface="Helvetica Neue"/>
-                <a:ea typeface="Helvetica Neue"/>
-                <a:cs typeface="Helvetica Neue"/>
-              </a:rPr>
-              <a:t>nuk e ka pranuar.</a:t>
+              <a:defRPr sz="1275" b="0">
+                <a:solidFill>
+                  <a:srgbClr val="B6C5CE"/>
+                </a:solidFill>
+                <a:latin typeface="Helvetica Neue"/>
+                <a:ea typeface="Helvetica Neue"/>
+                <a:cs typeface="Helvetica Neue"/>
+              </a:defRPr>
+            </a:pPr>
+            <a:r>
+              <a:rPr sz="1275" b="0">
+                <a:solidFill>
+                  <a:srgbClr val="B6C5CE"/>
+                </a:solidFill>
+                <a:latin typeface="Helvetica Neue"/>
+                <a:ea typeface="Helvetica Neue"/>
+                <a:cs typeface="Helvetica Neue"/>
+              </a:rPr>
+              <a:t>Prit njoftimin e stafit.</a:t>
             </a:r>
           </a:p>
         </p:txBody>
@@ -10857,7 +10833,7 @@
                 <a:ea typeface="Helvetica Neue"/>
                 <a:cs typeface="Helvetica Neue"/>
               </a:rPr>
-              <a:t>Në cilën pamje mund të keqkuptohet konfirmimi?</a:t>
+              <a:t>A ndiqet qartë rrjedha MENU → CART → ORDER → READY?</a:t>
             </a:r>
           </a:p>
         </p:txBody>
@@ -10871,7 +10847,7 @@
           <p:nvPr/>
         </p:nvPicPr>
         <p:blipFill>
-          <a:blip xmlns:r="http://schemas.openxmlformats.org/officeDocument/2006/relationships" xmlns:a="http://schemas.openxmlformats.org/drawingml/2006/main" r:embed="Rb6623f22b2be473b"/>
+          <a:blip xmlns:r="http://schemas.openxmlformats.org/officeDocument/2006/relationships" xmlns:a="http://schemas.openxmlformats.org/drawingml/2006/main" r:embed="R02a3c3e90b9d454f"/>
           <a:stretch xmlns:a="http://schemas.openxmlformats.org/drawingml/2006/main"/>
         </p:blipFill>
         <p:spPr>
@@ -11082,7 +11058,7 @@
                 <a:ea typeface="Helvetica Neue"/>
                 <a:cs typeface="Helvetica Neue"/>
               </a:rPr>
-              <a:t>Produkti mbërrin me një lidhje</a:t>
+              <a:t>PWA për pilotin e restorantit</a:t>
             </a:r>
           </a:p>
         </p:txBody>
@@ -11180,73 +11156,97 @@
           <a:p xmlns:a="http://schemas.openxmlformats.org/drawingml/2006/main">
             <a:pPr algn="l">
               <a:buNone/>
-              <a:defRPr sz="2700" b="0">
-                <a:solidFill>
-                  <a:srgbClr val="F4F2EC"/>
-                </a:solidFill>
-                <a:latin typeface="Helvetica Neue"/>
-                <a:ea typeface="Helvetica Neue"/>
-                <a:cs typeface="Helvetica Neue"/>
-              </a:defRPr>
-            </a:pPr>
-            <a:r>
-              <a:rPr sz="2700" b="0">
-                <a:solidFill>
-                  <a:srgbClr val="F4F2EC"/>
-                </a:solidFill>
-                <a:latin typeface="Helvetica Neue"/>
-                <a:ea typeface="Helvetica Neue"/>
-                <a:cs typeface="Helvetica Neue"/>
-              </a:rPr>
-              <a:t>Një lidhje për ta provuar</a:t>
+              <a:defRPr sz="1875" b="0">
+                <a:solidFill>
+                  <a:srgbClr val="F5F7F9"/>
+                </a:solidFill>
+                <a:latin typeface="Helvetica Neue"/>
+                <a:ea typeface="Helvetica Neue"/>
+                <a:cs typeface="Helvetica Neue"/>
+              </a:defRPr>
+            </a:pPr>
+            <a:r>
+              <a:rPr sz="1875" b="0">
+                <a:solidFill>
+                  <a:srgbClr val="F5F7F9"/>
+                </a:solidFill>
+                <a:latin typeface="Helvetica Neue"/>
+                <a:ea typeface="Helvetica Neue"/>
+                <a:cs typeface="Helvetica Neue"/>
+              </a:rPr>
+              <a:t>Aplikacion web për telefon,</a:t>
             </a:r>
           </a:p>
           <a:p xmlns:a="http://schemas.openxmlformats.org/drawingml/2006/main">
             <a:pPr algn="l">
               <a:buNone/>
-              <a:defRPr sz="2700" b="0">
-                <a:solidFill>
-                  <a:srgbClr val="F4F2EC"/>
-                </a:solidFill>
-                <a:latin typeface="Helvetica Neue"/>
-                <a:ea typeface="Helvetica Neue"/>
-                <a:cs typeface="Helvetica Neue"/>
-              </a:defRPr>
-            </a:pPr>
-            <a:r>
-              <a:rPr sz="2700" b="0">
-                <a:solidFill>
-                  <a:srgbClr val="F4F2EC"/>
-                </a:solidFill>
-                <a:latin typeface="Helvetica Neue"/>
-                <a:ea typeface="Helvetica Neue"/>
-                <a:cs typeface="Helvetica Neue"/>
-              </a:rPr>
-              <a:t>Instalim kur mbështetet</a:t>
+              <a:defRPr sz="1875" b="0">
+                <a:solidFill>
+                  <a:srgbClr val="F5F7F9"/>
+                </a:solidFill>
+                <a:latin typeface="Helvetica Neue"/>
+                <a:ea typeface="Helvetica Neue"/>
+                <a:cs typeface="Helvetica Neue"/>
+              </a:defRPr>
+            </a:pPr>
+            <a:r>
+              <a:rPr sz="1875" b="0">
+                <a:solidFill>
+                  <a:srgbClr val="F5F7F9"/>
+                </a:solidFill>
+                <a:latin typeface="Helvetica Neue"/>
+                <a:ea typeface="Helvetica Neue"/>
+                <a:cs typeface="Helvetica Neue"/>
+              </a:rPr>
+              <a:t>hapet nga një link.</a:t>
             </a:r>
           </a:p>
           <a:p xmlns:a="http://schemas.openxmlformats.org/drawingml/2006/main">
             <a:pPr algn="l">
               <a:buNone/>
-              <a:defRPr sz="2700" b="0">
-                <a:solidFill>
-                  <a:srgbClr val="F4F2EC"/>
-                </a:solidFill>
-                <a:latin typeface="Helvetica Neue"/>
-                <a:ea typeface="Helvetica Neue"/>
-                <a:cs typeface="Helvetica Neue"/>
-              </a:defRPr>
-            </a:pPr>
-            <a:r>
-              <a:rPr sz="2700" b="0">
-                <a:solidFill>
-                  <a:srgbClr val="F4F2EC"/>
-                </a:solidFill>
-                <a:latin typeface="Helvetica Neue"/>
-                <a:ea typeface="Helvetica Neue"/>
-                <a:cs typeface="Helvetica Neue"/>
-              </a:rPr>
-              <a:t>Sjellje offline e projektuar</a:t>
+              <a:defRPr sz="1875" b="0">
+                <a:solidFill>
+                  <a:srgbClr val="F5F7F9"/>
+                </a:solidFill>
+                <a:latin typeface="Helvetica Neue"/>
+                <a:ea typeface="Helvetica Neue"/>
+                <a:cs typeface="Helvetica Neue"/>
+              </a:defRPr>
+            </a:pPr>
+            <a:r>
+              <a:rPr sz="1875" b="0">
+                <a:solidFill>
+                  <a:srgbClr val="F5F7F9"/>
+                </a:solidFill>
+                <a:latin typeface="Helvetica Neue"/>
+                <a:ea typeface="Helvetica Neue"/>
+                <a:cs typeface="Helvetica Neue"/>
+              </a:rPr>
+              <a:t>Instalohet kur mbështetet.</a:t>
+            </a:r>
+          </a:p>
+          <a:p xmlns:a="http://schemas.openxmlformats.org/drawingml/2006/main">
+            <a:pPr algn="l">
+              <a:buNone/>
+              <a:defRPr sz="1875" b="0">
+                <a:solidFill>
+                  <a:srgbClr val="F5F7F9"/>
+                </a:solidFill>
+                <a:latin typeface="Helvetica Neue"/>
+                <a:ea typeface="Helvetica Neue"/>
+                <a:cs typeface="Helvetica Neue"/>
+              </a:defRPr>
+            </a:pPr>
+            <a:r>
+              <a:rPr sz="1875" b="0">
+                <a:solidFill>
+                  <a:srgbClr val="F5F7F9"/>
+                </a:solidFill>
+                <a:latin typeface="Helvetica Neue"/>
+                <a:ea typeface="Helvetica Neue"/>
+                <a:cs typeface="Helvetica Neue"/>
+              </a:rPr>
+              <a:t>Sjellja offline projektohet.</a:t>
             </a:r>
           </a:p>
         </p:txBody>
@@ -11402,7 +11402,7 @@
                 <a:ea typeface="Helvetica Neue"/>
                 <a:cs typeface="Helvetica Neue"/>
               </a:rPr>
-              <a:t>AAB RideShare</a:t>
+              <a:t>Restoranti Sofra</a:t>
             </a:r>
           </a:p>
         </p:txBody>
@@ -11460,7 +11460,7 @@
                 <a:ea typeface="Helvetica Neue"/>
                 <a:cs typeface="Helvetica Neue"/>
               </a:rPr>
-              <a:t>Udhëtimet</a:t>
+              <a:t>MENU</a:t>
             </a:r>
           </a:p>
         </p:txBody>
@@ -11518,31 +11518,7 @@
                 <a:ea typeface="Helvetica Neue"/>
                 <a:cs typeface="Helvetica Neue"/>
               </a:rPr>
-              <a:t>Fushë Kosovë</a:t>
-            </a:r>
-          </a:p>
-          <a:p xmlns:a="http://schemas.openxmlformats.org/drawingml/2006/main">
-            <a:pPr algn="l">
-              <a:buNone/>
-              <a:defRPr sz="2025" b="1">
-                <a:solidFill>
-                  <a:srgbClr val="F4F2EC"/>
-                </a:solidFill>
-                <a:latin typeface="Helvetica Neue"/>
-                <a:ea typeface="Helvetica Neue"/>
-                <a:cs typeface="Helvetica Neue"/>
-              </a:defRPr>
-            </a:pPr>
-            <a:r>
-              <a:rPr sz="2025" b="1">
-                <a:solidFill>
-                  <a:srgbClr val="F4F2EC"/>
-                </a:solidFill>
-                <a:latin typeface="Helvetica Neue"/>
-                <a:ea typeface="Helvetica Neue"/>
-                <a:cs typeface="Helvetica Neue"/>
-              </a:rPr>
-              <a:t>Kampus</a:t>
+              <a:t>Tavë shtëpie</a:t>
             </a:r>
           </a:p>
         </p:txBody>
@@ -11582,25 +11558,25 @@
           <a:p xmlns:a="http://schemas.openxmlformats.org/drawingml/2006/main">
             <a:pPr algn="l">
               <a:buNone/>
-              <a:defRPr sz="1725" b="0">
-                <a:solidFill>
-                  <a:srgbClr val="AEBFCB"/>
-                </a:solidFill>
-                <a:latin typeface="Helvetica Neue"/>
-                <a:ea typeface="Helvetica Neue"/>
-                <a:cs typeface="Helvetica Neue"/>
-              </a:defRPr>
-            </a:pPr>
-            <a:r>
-              <a:rPr sz="1725" b="0">
-                <a:solidFill>
-                  <a:srgbClr val="AEBFCB"/>
-                </a:solidFill>
-                <a:latin typeface="Helvetica Neue"/>
-                <a:ea typeface="Helvetica Neue"/>
-                <a:cs typeface="Helvetica Neue"/>
-              </a:rPr>
-              <a:t>07:30     1 vend</a:t>
+              <a:defRPr sz="1125" b="0">
+                <a:solidFill>
+                  <a:srgbClr val="B6C5CE"/>
+                </a:solidFill>
+                <a:latin typeface="Helvetica Neue"/>
+                <a:ea typeface="Helvetica Neue"/>
+                <a:cs typeface="Helvetica Neue"/>
+              </a:defRPr>
+            </a:pPr>
+            <a:r>
+              <a:rPr sz="1125" b="0">
+                <a:solidFill>
+                  <a:srgbClr val="B6C5CE"/>
+                </a:solidFill>
+                <a:latin typeface="Helvetica Neue"/>
+                <a:ea typeface="Helvetica Neue"/>
+                <a:cs typeface="Helvetica Neue"/>
+              </a:rPr>
+              <a:t>8 €     Në dispozicion</a:t>
             </a:r>
           </a:p>
         </p:txBody>
@@ -11690,7 +11666,7 @@
                 <a:ea typeface="Helvetica Neue"/>
                 <a:cs typeface="Helvetica Neue"/>
               </a:rPr>
-              <a:t>Shiko detajet</a:t>
+              <a:t>Shto</a:t>
             </a:r>
           </a:p>
         </p:txBody>
@@ -11748,7 +11724,7 @@
                 <a:ea typeface="Helvetica Neue"/>
                 <a:cs typeface="Helvetica Neue"/>
               </a:rPr>
-              <a:t>Zgjedhja varet nga aftësitë e pajisjes dhe kërkesat e produktit.</a:t>
+              <a:t>Piloti nis me një link, pa publikim fillestar në App Store.</a:t>
             </a:r>
           </a:p>
         </p:txBody>
@@ -11762,7 +11738,7 @@
           <p:nvPr/>
         </p:nvPicPr>
         <p:blipFill>
-          <a:blip xmlns:r="http://schemas.openxmlformats.org/officeDocument/2006/relationships" xmlns:a="http://schemas.openxmlformats.org/drawingml/2006/main" r:embed="R1afc3fae45b64d34"/>
+          <a:blip xmlns:r="http://schemas.openxmlformats.org/officeDocument/2006/relationships" xmlns:a="http://schemas.openxmlformats.org/drawingml/2006/main" r:embed="R2462c9486002476f"/>
           <a:stretch xmlns:a="http://schemas.openxmlformats.org/drawingml/2006/main"/>
         </p:blipFill>
         <p:spPr>
@@ -11838,6 +11814,7 @@
           <a:lstStyle xmlns:a="http://schemas.openxmlformats.org/drawingml/2006/main"/>
           <a:p xmlns:a="http://schemas.openxmlformats.org/drawingml/2006/main">
             <a:pPr>
+              <a:buNone/>
               <a:defRPr sz="1350" b="1">
                 <a:solidFill>
                   <a:srgbClr val="5DCEF2"/>
@@ -11895,6 +11872,7 @@
           <a:lstStyle xmlns:a="http://schemas.openxmlformats.org/drawingml/2006/main"/>
           <a:p xmlns:a="http://schemas.openxmlformats.org/drawingml/2006/main">
             <a:pPr>
+              <a:buNone/>
               <a:defRPr sz="3600" b="1">
                 <a:solidFill>
                   <a:srgbClr val="F5F7F9"/>
@@ -11952,6 +11930,7 @@
           <a:lstStyle xmlns:a="http://schemas.openxmlformats.org/drawingml/2006/main"/>
           <a:p xmlns:a="http://schemas.openxmlformats.org/drawingml/2006/main">
             <a:pPr>
+              <a:buNone/>
               <a:defRPr sz="3600" b="1">
                 <a:solidFill>
                   <a:srgbClr val="5DCEF2"/>
@@ -12009,6 +11988,7 @@
           <a:lstStyle xmlns:a="http://schemas.openxmlformats.org/drawingml/2006/main"/>
           <a:p xmlns:a="http://schemas.openxmlformats.org/drawingml/2006/main">
             <a:pPr>
+              <a:buNone/>
               <a:defRPr sz="2550" b="0">
                 <a:solidFill>
                   <a:srgbClr val="F5F7F9"/>
@@ -12032,6 +12012,7 @@
           </a:p>
           <a:p xmlns:a="http://schemas.openxmlformats.org/drawingml/2006/main">
             <a:pPr>
+              <a:buNone/>
               <a:defRPr sz="2550" b="0">
                 <a:solidFill>
                   <a:srgbClr val="F5F7F9"/>
@@ -12055,6 +12036,7 @@
           </a:p>
           <a:p xmlns:a="http://schemas.openxmlformats.org/drawingml/2006/main">
             <a:pPr>
+              <a:buNone/>
               <a:defRPr sz="2550" b="0">
                 <a:solidFill>
                   <a:srgbClr val="F5F7F9"/>
@@ -12112,6 +12094,7 @@
           <a:lstStyle xmlns:a="http://schemas.openxmlformats.org/drawingml/2006/main"/>
           <a:p xmlns:a="http://schemas.openxmlformats.org/drawingml/2006/main">
             <a:pPr>
+              <a:buNone/>
               <a:defRPr sz="3600" b="1">
                 <a:solidFill>
                   <a:srgbClr val="5DCEF2"/>
@@ -12169,6 +12152,7 @@
           <a:lstStyle xmlns:a="http://schemas.openxmlformats.org/drawingml/2006/main"/>
           <a:p xmlns:a="http://schemas.openxmlformats.org/drawingml/2006/main">
             <a:pPr>
+              <a:buNone/>
               <a:defRPr sz="2550" b="0">
                 <a:solidFill>
                   <a:srgbClr val="F5F7F9"/>
@@ -12192,6 +12176,7 @@
           </a:p>
           <a:p xmlns:a="http://schemas.openxmlformats.org/drawingml/2006/main">
             <a:pPr>
+              <a:buNone/>
               <a:defRPr sz="2550" b="0">
                 <a:solidFill>
                   <a:srgbClr val="F5F7F9"/>
@@ -12215,6 +12200,7 @@
           </a:p>
           <a:p xmlns:a="http://schemas.openxmlformats.org/drawingml/2006/main">
             <a:pPr>
+              <a:buNone/>
               <a:defRPr sz="2550" b="0">
                 <a:solidFill>
                   <a:srgbClr val="F5F7F9"/>
@@ -12272,6 +12258,7 @@
           <a:lstStyle xmlns:a="http://schemas.openxmlformats.org/drawingml/2006/main"/>
           <a:p xmlns:a="http://schemas.openxmlformats.org/drawingml/2006/main">
             <a:pPr>
+              <a:buNone/>
               <a:defRPr sz="2100" b="0">
                 <a:solidFill>
                   <a:srgbClr val="B6C5CE"/>
@@ -12290,7 +12277,7 @@
                 <a:ea typeface="Helvetica Neue"/>
                 <a:cs typeface="Helvetica Neue"/>
               </a:rPr>
-              <a:t>Një student, një aplikacion, përmirësime gjatë gjithë semestrit</a:t>
+              <a:t>Restoranti është shembulli i ligjëratës. Biznesi juaj është projekti semestral.</a:t>
             </a:r>
           </a:p>
         </p:txBody>
@@ -12329,6 +12316,7 @@
           <a:lstStyle xmlns:a="http://schemas.openxmlformats.org/drawingml/2006/main"/>
           <a:p xmlns:a="http://schemas.openxmlformats.org/drawingml/2006/main">
             <a:pPr>
+              <a:buNone/>
               <a:defRPr sz="1350" b="0">
                 <a:solidFill>
                   <a:srgbClr val="B6C5CE"/>
@@ -12354,14 +12342,14 @@
       </p:sp>
       <p:pic>
         <p:nvPicPr>
-          <p:cNvPr id="18" name=""/>
+          <p:cNvPr id="20" name=""/>
           <p:cNvPicPr>
             <a:picLocks xmlns:a="http://schemas.openxmlformats.org/drawingml/2006/main" noChangeAspect="1"/>
           </p:cNvPicPr>
           <p:nvPr/>
         </p:nvPicPr>
         <p:blipFill>
-          <a:blip xmlns:r="http://schemas.openxmlformats.org/officeDocument/2006/relationships" xmlns:a="http://schemas.openxmlformats.org/drawingml/2006/main" r:embed="R1fc20b2eaa22486f"/>
+          <a:blip xmlns:r="http://schemas.openxmlformats.org/officeDocument/2006/relationships" xmlns:a="http://schemas.openxmlformats.org/drawingml/2006/main" r:embed="R3c2d012dc1594b0b"/>
           <a:stretch xmlns:a="http://schemas.openxmlformats.org/drawingml/2006/main"/>
         </p:blipFill>
         <p:spPr>
@@ -12572,7 +12560,7 @@
                 <a:ea typeface="Helvetica Neue"/>
                 <a:cs typeface="Helvetica Neue"/>
               </a:rPr>
-              <a:t>Ku ekzekutohet vendimi?</a:t>
+              <a:t>Telefon, server dhe të dhëna</a:t>
             </a:r>
           </a:p>
         </p:txBody>
@@ -12838,7 +12826,7 @@
                 <a:ea typeface="Helvetica Neue"/>
                 <a:cs typeface="Helvetica Neue"/>
               </a:rPr>
-              <a:t>React 19</a:t>
+              <a:t>Next.js PWA</a:t>
             </a:r>
           </a:p>
         </p:txBody>
@@ -12896,7 +12884,7 @@
                 <a:ea typeface="Helvetica Neue"/>
                 <a:cs typeface="Helvetica Neue"/>
               </a:rPr>
-              <a:t>Ndërfaqja mobile</a:t>
+              <a:t>Menu / Cart</a:t>
             </a:r>
           </a:p>
         </p:txBody>
@@ -13018,7 +13006,7 @@
                 <a:ea typeface="Helvetica Neue"/>
                 <a:cs typeface="Helvetica Neue"/>
               </a:rPr>
-              <a:t>Next.js 15</a:t>
+              <a:t>Next.js API</a:t>
             </a:r>
           </a:p>
         </p:txBody>
@@ -13076,7 +13064,7 @@
                 <a:ea typeface="Helvetica Neue"/>
                 <a:cs typeface="Helvetica Neue"/>
               </a:rPr>
-              <a:t>App Router / Vercel</a:t>
+              <a:t>Krijon porosinë</a:t>
             </a:r>
           </a:p>
         </p:txBody>
@@ -13256,7 +13244,7 @@
                 <a:ea typeface="Helvetica Neue"/>
                 <a:cs typeface="Helvetica Neue"/>
               </a:rPr>
-              <a:t>Auth / PostgreSQL</a:t>
+              <a:t>Menu / status</a:t>
             </a:r>
           </a:p>
         </p:txBody>
@@ -13314,7 +13302,7 @@
                 <a:ea typeface="Helvetica Neue"/>
                 <a:cs typeface="Helvetica Neue"/>
               </a:rPr>
-              <a:t>TypeScript + Tailwind</a:t>
+              <a:t>Dërgon qëllimin</a:t>
             </a:r>
           </a:p>
         </p:txBody>
@@ -13354,25 +13342,25 @@
           <a:p xmlns:a="http://schemas.openxmlformats.org/drawingml/2006/main">
             <a:pPr algn="l">
               <a:buNone/>
-              <a:defRPr sz="1950" b="0">
-                <a:solidFill>
-                  <a:srgbClr val="AEBFCB"/>
-                </a:solidFill>
-                <a:latin typeface="Helvetica Neue"/>
-                <a:ea typeface="Helvetica Neue"/>
-                <a:cs typeface="Helvetica Neue"/>
-              </a:defRPr>
-            </a:pPr>
-            <a:r>
-              <a:rPr sz="1950" b="0">
-                <a:solidFill>
-                  <a:srgbClr val="AEBFCB"/>
-                </a:solidFill>
-                <a:latin typeface="Helvetica Neue"/>
-                <a:ea typeface="Helvetica Neue"/>
-                <a:cs typeface="Helvetica Neue"/>
-              </a:rPr>
-              <a:t>Server / Client Components</a:t>
+              <a:defRPr sz="1350" b="0">
+                <a:solidFill>
+                  <a:srgbClr val="B6C5CE"/>
+                </a:solidFill>
+                <a:latin typeface="Helvetica Neue"/>
+                <a:ea typeface="Helvetica Neue"/>
+                <a:cs typeface="Helvetica Neue"/>
+              </a:defRPr>
+            </a:pPr>
+            <a:r>
+              <a:rPr sz="1350" b="0">
+                <a:solidFill>
+                  <a:srgbClr val="B6C5CE"/>
+                </a:solidFill>
+                <a:latin typeface="Helvetica Neue"/>
+                <a:ea typeface="Helvetica Neue"/>
+                <a:cs typeface="Helvetica Neue"/>
+              </a:rPr>
+              <a:t>Verifikon dhe shmang dublikatën</a:t>
             </a:r>
           </a:p>
         </p:txBody>
@@ -13412,25 +13400,25 @@
           <a:p xmlns:a="http://schemas.openxmlformats.org/drawingml/2006/main">
             <a:pPr algn="l">
               <a:buNone/>
-              <a:defRPr sz="1950" b="0">
-                <a:solidFill>
-                  <a:srgbClr val="AEBFCB"/>
-                </a:solidFill>
-                <a:latin typeface="Helvetica Neue"/>
-                <a:ea typeface="Helvetica Neue"/>
-                <a:cs typeface="Helvetica Neue"/>
-              </a:defRPr>
-            </a:pPr>
-            <a:r>
-              <a:rPr sz="1950" b="0">
-                <a:solidFill>
-                  <a:srgbClr val="AEBFCB"/>
-                </a:solidFill>
-                <a:latin typeface="Helvetica Neue"/>
-                <a:ea typeface="Helvetica Neue"/>
-                <a:cs typeface="Helvetica Neue"/>
-              </a:rPr>
-              <a:t>RLS + rregullat e të dhënave</a:t>
+              <a:defRPr sz="1350" b="0">
+                <a:solidFill>
+                  <a:srgbClr val="B6C5CE"/>
+                </a:solidFill>
+                <a:latin typeface="Helvetica Neue"/>
+                <a:ea typeface="Helvetica Neue"/>
+                <a:cs typeface="Helvetica Neue"/>
+              </a:defRPr>
+            </a:pPr>
+            <a:r>
+              <a:rPr sz="1350" b="0">
+                <a:solidFill>
+                  <a:srgbClr val="B6C5CE"/>
+                </a:solidFill>
+                <a:latin typeface="Helvetica Neue"/>
+                <a:ea typeface="Helvetica Neue"/>
+                <a:cs typeface="Helvetica Neue"/>
+              </a:rPr>
+              <a:t>RLS zbaton lejet</a:t>
             </a:r>
           </a:p>
         </p:txBody>
@@ -13488,7 +13476,7 @@
                 <a:ea typeface="Helvetica Neue"/>
                 <a:cs typeface="Helvetica Neue"/>
               </a:rPr>
-              <a:t>Ku kontrollohet ndryshimi i numrit të vendeve?</a:t>
+              <a:t>Ku ndryshon disponueshmëria e vaktit ose statusi i porosisë?</a:t>
             </a:r>
           </a:p>
         </p:txBody>
@@ -13502,7 +13490,7 @@
           <p:nvPr/>
         </p:nvPicPr>
         <p:blipFill>
-          <a:blip xmlns:r="http://schemas.openxmlformats.org/officeDocument/2006/relationships" xmlns:a="http://schemas.openxmlformats.org/drawingml/2006/main" r:embed="R98ace120382a43e3"/>
+          <a:blip xmlns:r="http://schemas.openxmlformats.org/officeDocument/2006/relationships" xmlns:a="http://schemas.openxmlformats.org/drawingml/2006/main" r:embed="R70e85076b7a34c75"/>
           <a:stretch xmlns:a="http://schemas.openxmlformats.org/drawingml/2006/main"/>
         </p:blipFill>
         <p:spPr>
@@ -13713,7 +13701,7 @@
                 <a:ea typeface="Helvetica Neue"/>
                 <a:cs typeface="Helvetica Neue"/>
               </a:rPr>
-              <a:t>Telefoni kërkon. Sistemi verifikon.</a:t>
+              <a:t>Vetëm stafi ndryshon menunë dhe statusin</a:t>
             </a:r>
           </a:p>
         </p:txBody>
@@ -13903,25 +13891,25 @@
           <a:p xmlns:a="http://schemas.openxmlformats.org/drawingml/2006/main">
             <a:pPr algn="ctr">
               <a:buNone/>
-              <a:defRPr sz="2250" b="1">
-                <a:solidFill>
-                  <a:srgbClr val="63CDF2"/>
-                </a:solidFill>
-                <a:latin typeface="Helvetica Neue"/>
-                <a:ea typeface="Helvetica Neue"/>
-                <a:cs typeface="Helvetica Neue"/>
-              </a:defRPr>
-            </a:pPr>
-            <a:r>
-              <a:rPr sz="2250" b="1">
-                <a:solidFill>
-                  <a:srgbClr val="63CDF2"/>
-                </a:solidFill>
-                <a:latin typeface="Helvetica Neue"/>
-                <a:ea typeface="Helvetica Neue"/>
-                <a:cs typeface="Helvetica Neue"/>
-              </a:rPr>
-              <a:t>Ndrysho udhëtimin 42</a:t>
+              <a:defRPr sz="1350" b="1">
+                <a:solidFill>
+                  <a:srgbClr val="F5F7F9"/>
+                </a:solidFill>
+                <a:latin typeface="Helvetica Neue"/>
+                <a:ea typeface="Helvetica Neue"/>
+                <a:cs typeface="Helvetica Neue"/>
+              </a:defRPr>
+            </a:pPr>
+            <a:r>
+              <a:rPr sz="1350" b="1">
+                <a:solidFill>
+                  <a:srgbClr val="F5F7F9"/>
+                </a:solidFill>
+                <a:latin typeface="Helvetica Neue"/>
+                <a:ea typeface="Helvetica Neue"/>
+                <a:cs typeface="Helvetica Neue"/>
+              </a:rPr>
+              <a:t>Ndrysho statusin e porosisë #1042</a:t>
             </a:r>
           </a:p>
         </p:txBody>
@@ -14367,7 +14355,7 @@
                 <a:ea typeface="Helvetica Neue"/>
                 <a:cs typeface="Helvetica Neue"/>
               </a:rPr>
-              <a:t>A është ky pronari?</a:t>
+              <a:t>A është ky anëtar i stafit?</a:t>
             </a:r>
           </a:p>
         </p:txBody>
@@ -14541,7 +14529,7 @@
                 <a:ea typeface="Helvetica Neue"/>
                 <a:cs typeface="Helvetica Neue"/>
               </a:rPr>
-              <a:t>RLS + privilegjet e qasjes</a:t>
+              <a:t>RLS + roli i stafit</a:t>
             </a:r>
           </a:p>
         </p:txBody>
@@ -14613,7 +14601,7 @@
           <p:nvPr/>
         </p:nvPicPr>
         <p:blipFill>
-          <a:blip xmlns:r="http://schemas.openxmlformats.org/officeDocument/2006/relationships" xmlns:a="http://schemas.openxmlformats.org/drawingml/2006/main" r:embed="R5d14c913be434580"/>
+          <a:blip xmlns:r="http://schemas.openxmlformats.org/officeDocument/2006/relationships" xmlns:a="http://schemas.openxmlformats.org/drawingml/2006/main" r:embed="R33a1bf0371014d64"/>
           <a:stretch xmlns:a="http://schemas.openxmlformats.org/drawingml/2006/main"/>
         </p:blipFill>
         <p:spPr>
@@ -14980,7 +14968,7 @@
                 <a:ea typeface="Helvetica Neue"/>
                 <a:cs typeface="Helvetica Neue"/>
               </a:rPr>
-              <a:t>AAB RideShare</a:t>
+              <a:t>Restoranti Sofra</a:t>
             </a:r>
           </a:p>
         </p:txBody>
@@ -15096,7 +15084,7 @@
                 <a:ea typeface="Helvetica Neue"/>
                 <a:cs typeface="Helvetica Neue"/>
               </a:rPr>
-              <a:t>Pamje e ruajtur</a:t>
+              <a:t>Menu e ruajtur</a:t>
             </a:r>
           </a:p>
           <a:p xmlns:a="http://schemas.openxmlformats.org/drawingml/2006/main">
@@ -15120,7 +15108,7 @@
                 <a:ea typeface="Helvetica Neue"/>
                 <a:cs typeface="Helvetica Neue"/>
               </a:rPr>
-              <a:t>Përditësuar 07:10</a:t>
+              <a:t>Përditësuar 11:30</a:t>
             </a:r>
           </a:p>
         </p:txBody>
@@ -15190,49 +15178,49 @@
           <a:p xmlns:a="http://schemas.openxmlformats.org/drawingml/2006/main">
             <a:pPr algn="l">
               <a:buNone/>
-              <a:defRPr sz="1800" b="0">
-                <a:solidFill>
-                  <a:srgbClr val="F4F2EC"/>
-                </a:solidFill>
-                <a:latin typeface="Helvetica Neue"/>
-                <a:ea typeface="Helvetica Neue"/>
-                <a:cs typeface="Helvetica Neue"/>
-              </a:defRPr>
-            </a:pPr>
-            <a:r>
-              <a:rPr sz="1800" b="0">
-                <a:solidFill>
-                  <a:srgbClr val="F4F2EC"/>
-                </a:solidFill>
-                <a:latin typeface="Helvetica Neue"/>
-                <a:ea typeface="Helvetica Neue"/>
-                <a:cs typeface="Helvetica Neue"/>
-              </a:rPr>
-              <a:t>Konfirmimi kërkon</a:t>
+              <a:defRPr sz="1200" b="0">
+                <a:solidFill>
+                  <a:srgbClr val="B6C5CE"/>
+                </a:solidFill>
+                <a:latin typeface="Helvetica Neue"/>
+                <a:ea typeface="Helvetica Neue"/>
+                <a:cs typeface="Helvetica Neue"/>
+              </a:defRPr>
+            </a:pPr>
+            <a:r>
+              <a:rPr sz="1200" b="0">
+                <a:solidFill>
+                  <a:srgbClr val="B6C5CE"/>
+                </a:solidFill>
+                <a:latin typeface="Helvetica Neue"/>
+                <a:ea typeface="Helvetica Neue"/>
+                <a:cs typeface="Helvetica Neue"/>
+              </a:rPr>
+              <a:t>Mund të lexohet.</a:t>
             </a:r>
           </a:p>
           <a:p xmlns:a="http://schemas.openxmlformats.org/drawingml/2006/main">
             <a:pPr algn="l">
               <a:buNone/>
-              <a:defRPr sz="1800" b="0">
-                <a:solidFill>
-                  <a:srgbClr val="F4F2EC"/>
-                </a:solidFill>
-                <a:latin typeface="Helvetica Neue"/>
-                <a:ea typeface="Helvetica Neue"/>
-                <a:cs typeface="Helvetica Neue"/>
-              </a:defRPr>
-            </a:pPr>
-            <a:r>
-              <a:rPr sz="1800" b="0">
-                <a:solidFill>
-                  <a:srgbClr val="F4F2EC"/>
-                </a:solidFill>
-                <a:latin typeface="Helvetica Neue"/>
-                <a:ea typeface="Helvetica Neue"/>
-                <a:cs typeface="Helvetica Neue"/>
-              </a:rPr>
-              <a:t>lidhje me serverin.</a:t>
+              <a:defRPr sz="1200" b="0">
+                <a:solidFill>
+                  <a:srgbClr val="B6C5CE"/>
+                </a:solidFill>
+                <a:latin typeface="Helvetica Neue"/>
+                <a:ea typeface="Helvetica Neue"/>
+                <a:cs typeface="Helvetica Neue"/>
+              </a:defRPr>
+            </a:pPr>
+            <a:r>
+              <a:rPr sz="1200" b="0">
+                <a:solidFill>
+                  <a:srgbClr val="B6C5CE"/>
+                </a:solidFill>
+                <a:latin typeface="Helvetica Neue"/>
+                <a:ea typeface="Helvetica Neue"/>
+                <a:cs typeface="Helvetica Neue"/>
+              </a:rPr>
+              <a:t>MUND TË JETË E VJETRUAR</a:t>
             </a:r>
           </a:p>
         </p:txBody>
@@ -15774,7 +15762,7 @@
                 <a:ea typeface="Helvetica Neue"/>
                 <a:cs typeface="Helvetica Neue"/>
               </a:rPr>
-              <a:t>burime të përzgjedhura</a:t>
+              <a:t>menu e ruajtur</a:t>
             </a:r>
           </a:p>
         </p:txBody>
@@ -15832,7 +15820,7 @@
                 <a:ea typeface="Helvetica Neue"/>
                 <a:cs typeface="Helvetica Neue"/>
               </a:rPr>
-              <a:t>Çfarë mund të lexohet pa rrjet? Çfarë kërkon konfirmim?</a:t>
+              <a:t>Menuja lexohet offline. Porosia kërkon konfirmim nga serveri.</a:t>
             </a:r>
           </a:p>
         </p:txBody>
@@ -15846,7 +15834,7 @@
           <p:nvPr/>
         </p:nvPicPr>
         <p:blipFill>
-          <a:blip xmlns:r="http://schemas.openxmlformats.org/officeDocument/2006/relationships" xmlns:a="http://schemas.openxmlformats.org/drawingml/2006/main" r:embed="Rf8eaaf691b6349f2"/>
+          <a:blip xmlns:r="http://schemas.openxmlformats.org/officeDocument/2006/relationships" xmlns:a="http://schemas.openxmlformats.org/drawingml/2006/main" r:embed="Rfb48ce16e4d44311"/>
           <a:stretch xmlns:a="http://schemas.openxmlformats.org/drawingml/2006/main"/>
         </p:blipFill>
         <p:spPr>
@@ -16057,7 +16045,7 @@
                 <a:ea typeface="Helvetica Neue"/>
                 <a:cs typeface="Helvetica Neue"/>
               </a:rPr>
-              <a:t>Kërkesa nuk është konfirmim</a:t>
+              <a:t>Gjendja e porosisë</a:t>
             </a:r>
           </a:p>
         </p:txBody>
@@ -16115,7 +16103,7 @@
                 <a:ea typeface="Helvetica Neue"/>
                 <a:cs typeface="Helvetica Neue"/>
               </a:rPr>
-              <a:t>Dërgimi i pakonfirmuar</a:t>
+              <a:t>Statusi ndryshon vetëm me prova</a:t>
             </a:r>
           </a:p>
         </p:txBody>
@@ -16189,25 +16177,25 @@
           <a:p xmlns:a="http://schemas.openxmlformats.org/drawingml/2006/main">
             <a:pPr algn="ctr">
               <a:buNone/>
-              <a:defRPr sz="2250" b="1">
-                <a:solidFill>
-                  <a:srgbClr val="63CDF2"/>
-                </a:solidFill>
-                <a:latin typeface="Helvetica Neue"/>
-                <a:ea typeface="Helvetica Neue"/>
-                <a:cs typeface="Helvetica Neue"/>
-              </a:defRPr>
-            </a:pPr>
-            <a:r>
-              <a:rPr sz="2250" b="1">
-                <a:solidFill>
-                  <a:srgbClr val="63CDF2"/>
-                </a:solidFill>
-                <a:latin typeface="Helvetica Neue"/>
-                <a:ea typeface="Helvetica Neue"/>
-                <a:cs typeface="Helvetica Neue"/>
-              </a:rPr>
-              <a:t>Dërguar</a:t>
+              <a:defRPr sz="1500" b="1">
+                <a:solidFill>
+                  <a:srgbClr val="5DCEF2"/>
+                </a:solidFill>
+                <a:latin typeface="Helvetica Neue"/>
+                <a:ea typeface="Helvetica Neue"/>
+                <a:cs typeface="Helvetica Neue"/>
+              </a:defRPr>
+            </a:pPr>
+            <a:r>
+              <a:rPr sz="1500" b="1">
+                <a:solidFill>
+                  <a:srgbClr val="5DCEF2"/>
+                </a:solidFill>
+                <a:latin typeface="Helvetica Neue"/>
+                <a:ea typeface="Helvetica Neue"/>
+                <a:cs typeface="Helvetica Neue"/>
+              </a:rPr>
+              <a:t>Dërguar lokalisht</a:t>
             </a:r>
           </a:p>
         </p:txBody>
@@ -16299,7 +16287,7 @@
                 <a:ea typeface="Helvetica Neue"/>
                 <a:cs typeface="Helvetica Neue"/>
               </a:rPr>
-              <a:t>Në pritje</a:t>
+              <a:t>Marrë</a:t>
             </a:r>
           </a:p>
         </p:txBody>
@@ -16373,25 +16361,25 @@
           <a:p xmlns:a="http://schemas.openxmlformats.org/drawingml/2006/main">
             <a:pPr algn="ctr">
               <a:buNone/>
-              <a:defRPr sz="2250" b="1">
-                <a:solidFill>
-                  <a:srgbClr val="91DEBB"/>
-                </a:solidFill>
-                <a:latin typeface="Helvetica Neue"/>
-                <a:ea typeface="Helvetica Neue"/>
-                <a:cs typeface="Helvetica Neue"/>
-              </a:defRPr>
-            </a:pPr>
-            <a:r>
-              <a:rPr sz="2250" b="1">
-                <a:solidFill>
-                  <a:srgbClr val="91DEBB"/>
-                </a:solidFill>
-                <a:latin typeface="Helvetica Neue"/>
-                <a:ea typeface="Helvetica Neue"/>
-                <a:cs typeface="Helvetica Neue"/>
-              </a:rPr>
-              <a:t>Pranuar</a:t>
+              <a:defRPr sz="1575" b="1">
+                <a:solidFill>
+                  <a:srgbClr val="7FD3AA"/>
+                </a:solidFill>
+                <a:latin typeface="Helvetica Neue"/>
+                <a:ea typeface="Helvetica Neue"/>
+                <a:cs typeface="Helvetica Neue"/>
+              </a:defRPr>
+            </a:pPr>
+            <a:r>
+              <a:rPr sz="1575" b="1">
+                <a:solidFill>
+                  <a:srgbClr val="7FD3AA"/>
+                </a:solidFill>
+                <a:latin typeface="Helvetica Neue"/>
+                <a:ea typeface="Helvetica Neue"/>
+                <a:cs typeface="Helvetica Neue"/>
+              </a:rPr>
+              <a:t>Në përgatitje</a:t>
             </a:r>
           </a:p>
         </p:txBody>
@@ -16539,7 +16527,7 @@
                 <a:ea typeface="Helvetica Neue"/>
                 <a:cs typeface="Helvetica Neue"/>
               </a:rPr>
-              <a:t>Refuzuar / Anuluar</a:t>
+              <a:t>Gati</a:t>
             </a:r>
           </a:p>
         </p:txBody>
@@ -16597,7 +16585,7 @@
                 <a:ea typeface="Helvetica Neue"/>
                 <a:cs typeface="Helvetica Neue"/>
               </a:rPr>
-              <a:t>Pa përgjigje: dështim apo rezultat ende i panjohur?</a:t>
+              <a:t>Pa provë nga serveri: dështuar ose status i panjohur.</a:t>
             </a:r>
           </a:p>
         </p:txBody>
@@ -16611,7 +16599,7 @@
           <p:nvPr/>
         </p:nvPicPr>
         <p:blipFill>
-          <a:blip xmlns:r="http://schemas.openxmlformats.org/officeDocument/2006/relationships" xmlns:a="http://schemas.openxmlformats.org/drawingml/2006/main" r:embed="R349646eef29c4cd9"/>
+          <a:blip xmlns:r="http://schemas.openxmlformats.org/officeDocument/2006/relationships" xmlns:a="http://schemas.openxmlformats.org/drawingml/2006/main" r:embed="Rda8ee1ef3d224ab8"/>
           <a:stretch xmlns:a="http://schemas.openxmlformats.org/drawingml/2006/main"/>
         </p:blipFill>
         <p:spPr>
@@ -17036,25 +17024,25 @@
           <a:p xmlns:a="http://schemas.openxmlformats.org/drawingml/2006/main">
             <a:pPr algn="l">
               <a:buNone/>
-              <a:defRPr sz="2400" b="0">
-                <a:solidFill>
-                  <a:srgbClr val="AEBFCB"/>
-                </a:solidFill>
-                <a:latin typeface="Helvetica Neue"/>
-                <a:ea typeface="Helvetica Neue"/>
-                <a:cs typeface="Helvetica Neue"/>
-              </a:defRPr>
-            </a:pPr>
-            <a:r>
-              <a:rPr sz="2400" b="0">
-                <a:solidFill>
-                  <a:srgbClr val="AEBFCB"/>
-                </a:solidFill>
-                <a:latin typeface="Helvetica Neue"/>
-                <a:ea typeface="Helvetica Neue"/>
-                <a:cs typeface="Helvetica Neue"/>
-              </a:rPr>
-              <a:t>Supozimin</a:t>
+              <a:defRPr sz="1500" b="0">
+                <a:solidFill>
+                  <a:srgbClr val="B6C5CE"/>
+                </a:solidFill>
+                <a:latin typeface="Helvetica Neue"/>
+                <a:ea typeface="Helvetica Neue"/>
+                <a:cs typeface="Helvetica Neue"/>
+              </a:defRPr>
+            </a:pPr>
+            <a:r>
+              <a:rPr sz="1500" b="0">
+                <a:solidFill>
+                  <a:srgbClr val="B6C5CE"/>
+                </a:solidFill>
+                <a:latin typeface="Helvetica Neue"/>
+                <a:ea typeface="Helvetica Neue"/>
+                <a:cs typeface="Helvetica Neue"/>
+              </a:rPr>
+              <a:t>Identitetin e porosisë</a:t>
             </a:r>
           </a:p>
         </p:txBody>
@@ -17094,25 +17082,25 @@
           <a:p xmlns:a="http://schemas.openxmlformats.org/drawingml/2006/main">
             <a:pPr algn="l">
               <a:buNone/>
-              <a:defRPr sz="2400" b="0">
-                <a:solidFill>
-                  <a:srgbClr val="AEBFCB"/>
-                </a:solidFill>
-                <a:latin typeface="Helvetica Neue"/>
-                <a:ea typeface="Helvetica Neue"/>
-                <a:cs typeface="Helvetica Neue"/>
-              </a:defRPr>
-            </a:pPr>
-            <a:r>
-              <a:rPr sz="2400" b="0">
-                <a:solidFill>
-                  <a:srgbClr val="AEBFCB"/>
-                </a:solidFill>
-                <a:latin typeface="Helvetica Neue"/>
-                <a:ea typeface="Helvetica Neue"/>
-                <a:cs typeface="Helvetica Neue"/>
-              </a:rPr>
-              <a:t>Vendimin</a:t>
+              <a:defRPr sz="1500" b="0">
+                <a:solidFill>
+                  <a:srgbClr val="B6C5CE"/>
+                </a:solidFill>
+                <a:latin typeface="Helvetica Neue"/>
+                <a:ea typeface="Helvetica Neue"/>
+                <a:cs typeface="Helvetica Neue"/>
+              </a:defRPr>
+            </a:pPr>
+            <a:r>
+              <a:rPr sz="1500" b="0">
+                <a:solidFill>
+                  <a:srgbClr val="B6C5CE"/>
+                </a:solidFill>
+                <a:latin typeface="Helvetica Neue"/>
+                <a:ea typeface="Helvetica Neue"/>
+                <a:cs typeface="Helvetica Neue"/>
+              </a:rPr>
+              <a:t>Disponueshmërinë</a:t>
             </a:r>
           </a:p>
         </p:txBody>
@@ -17152,25 +17140,25 @@
           <a:p xmlns:a="http://schemas.openxmlformats.org/drawingml/2006/main">
             <a:pPr algn="l">
               <a:buNone/>
-              <a:defRPr sz="2325" b="0">
-                <a:solidFill>
-                  <a:srgbClr val="AEBFCB"/>
-                </a:solidFill>
-                <a:latin typeface="Helvetica Neue"/>
-                <a:ea typeface="Helvetica Neue"/>
-                <a:cs typeface="Helvetica Neue"/>
-              </a:defRPr>
-            </a:pPr>
-            <a:r>
-              <a:rPr sz="2325" b="0">
-                <a:solidFill>
-                  <a:srgbClr val="AEBFCB"/>
-                </a:solidFill>
-                <a:latin typeface="Helvetica Neue"/>
-                <a:ea typeface="Helvetica Neue"/>
-                <a:cs typeface="Helvetica Neue"/>
-              </a:rPr>
-              <a:t>Kundërshembullin</a:t>
+              <a:defRPr sz="1425" b="0">
+                <a:solidFill>
+                  <a:srgbClr val="B6C5CE"/>
+                </a:solidFill>
+                <a:latin typeface="Helvetica Neue"/>
+                <a:ea typeface="Helvetica Neue"/>
+                <a:cs typeface="Helvetica Neue"/>
+              </a:defRPr>
+            </a:pPr>
+            <a:r>
+              <a:rPr sz="1425" b="0">
+                <a:solidFill>
+                  <a:srgbClr val="B6C5CE"/>
+                </a:solidFill>
+                <a:latin typeface="Helvetica Neue"/>
+                <a:ea typeface="Helvetica Neue"/>
+                <a:cs typeface="Helvetica Neue"/>
+              </a:rPr>
+              <a:t>Riprovimin pa dublikatë</a:t>
             </a:r>
           </a:p>
         </p:txBody>
@@ -17286,7 +17274,7 @@
                 <a:ea typeface="Helvetica Neue"/>
                 <a:cs typeface="Helvetica Neue"/>
               </a:rPr>
-              <a:t>Çfarë po supozon zgjidhja që propozoi AI?</a:t>
+              <a:t>Çfarë supozon AI për identitetin, disponueshmërinë dhe retry-t?</a:t>
             </a:r>
           </a:p>
         </p:txBody>
@@ -17300,7 +17288,7 @@
           <p:nvPr/>
         </p:nvPicPr>
         <p:blipFill>
-          <a:blip xmlns:r="http://schemas.openxmlformats.org/officeDocument/2006/relationships" xmlns:a="http://schemas.openxmlformats.org/drawingml/2006/main" r:embed="Rc08b661624bd4359"/>
+          <a:blip xmlns:r="http://schemas.openxmlformats.org/officeDocument/2006/relationships" xmlns:a="http://schemas.openxmlformats.org/drawingml/2006/main" r:embed="Rdec5b89e0d3649d7"/>
           <a:stretch xmlns:a="http://schemas.openxmlformats.org/drawingml/2006/main"/>
         </p:blipFill>
         <p:spPr>
@@ -17551,25 +17539,25 @@
           <a:p xmlns:a="http://schemas.openxmlformats.org/drawingml/2006/main">
             <a:pPr algn="l">
               <a:buNone/>
-              <a:defRPr sz="3525" b="0">
-                <a:solidFill>
-                  <a:srgbClr val="AEBFCB"/>
-                </a:solidFill>
-                <a:latin typeface="Helvetica Neue"/>
-                <a:ea typeface="Helvetica Neue"/>
-                <a:cs typeface="Helvetica Neue"/>
-              </a:defRPr>
-            </a:pPr>
-            <a:r>
-              <a:rPr sz="3525" b="0">
-                <a:solidFill>
-                  <a:srgbClr val="AEBFCB"/>
-                </a:solidFill>
-                <a:latin typeface="Helvetica Neue"/>
-                <a:ea typeface="Helvetica Neue"/>
-                <a:cs typeface="Helvetica Neue"/>
-              </a:rPr>
-              <a:t>“Ndërto RideShare.”</a:t>
+              <a:defRPr sz="1650" b="0">
+                <a:solidFill>
+                  <a:srgbClr val="B6C5CE"/>
+                </a:solidFill>
+                <a:latin typeface="Helvetica Neue"/>
+                <a:ea typeface="Helvetica Neue"/>
+                <a:cs typeface="Helvetica Neue"/>
+              </a:defRPr>
+            </a:pPr>
+            <a:r>
+              <a:rPr sz="1650" b="0">
+                <a:solidFill>
+                  <a:srgbClr val="B6C5CE"/>
+                </a:solidFill>
+                <a:latin typeface="Helvetica Neue"/>
+                <a:ea typeface="Helvetica Neue"/>
+                <a:cs typeface="Helvetica Neue"/>
+              </a:rPr>
+              <a:t>“Krijo operacionin e porosisë për një restorant. Përdor një idempotency key që retry-t të mos krijojnë dublikatë.”</a:t>
             </a:r>
           </a:p>
         </p:txBody>
@@ -17715,7 +17703,7 @@
                 <a:ea typeface="Helvetica Neue"/>
                 <a:cs typeface="Helvetica Neue"/>
               </a:rPr>
-              <a:t>Kërko një vend</a:t>
+              <a:t>Krijo porosinë</a:t>
             </a:r>
           </a:p>
         </p:txBody>
@@ -17813,25 +17801,25 @@
           <a:p xmlns:a="http://schemas.openxmlformats.org/drawingml/2006/main">
             <a:pPr algn="l">
               <a:buNone/>
-              <a:defRPr sz="2400" b="0">
-                <a:solidFill>
-                  <a:srgbClr val="F4F2EC"/>
-                </a:solidFill>
-                <a:latin typeface="Helvetica Neue"/>
-                <a:ea typeface="Helvetica Neue"/>
-                <a:cs typeface="Helvetica Neue"/>
-              </a:defRPr>
-            </a:pPr>
-            <a:r>
-              <a:rPr sz="2400" b="0">
-                <a:solidFill>
-                  <a:srgbClr val="F4F2EC"/>
-                </a:solidFill>
-                <a:latin typeface="Helvetica Neue"/>
-                <a:ea typeface="Helvetica Neue"/>
-                <a:cs typeface="Helvetica Neue"/>
-              </a:rPr>
-              <a:t>Identitet i verifikuar, pa dublikatë</a:t>
+              <a:defRPr sz="1425" b="0">
+                <a:solidFill>
+                  <a:srgbClr val="F5F7F9"/>
+                </a:solidFill>
+                <a:latin typeface="Helvetica Neue"/>
+                <a:ea typeface="Helvetica Neue"/>
+                <a:cs typeface="Helvetica Neue"/>
+              </a:defRPr>
+            </a:pPr>
+            <a:r>
+              <a:rPr sz="1425" b="0">
+                <a:solidFill>
+                  <a:srgbClr val="F5F7F9"/>
+                </a:solidFill>
+                <a:latin typeface="Helvetica Neue"/>
+                <a:ea typeface="Helvetica Neue"/>
+                <a:cs typeface="Helvetica Neue"/>
+              </a:rPr>
+              <a:t>Sesioni jep klientin. Menuja verifikon disponueshmërinë.</a:t>
             </a:r>
           </a:p>
         </p:txBody>
@@ -17929,25 +17917,25 @@
           <a:p xmlns:a="http://schemas.openxmlformats.org/drawingml/2006/main">
             <a:pPr algn="l">
               <a:buNone/>
-              <a:defRPr sz="2400" b="0">
-                <a:solidFill>
-                  <a:srgbClr val="F4F2EC"/>
-                </a:solidFill>
-                <a:latin typeface="Helvetica Neue"/>
-                <a:ea typeface="Helvetica Neue"/>
-                <a:cs typeface="Helvetica Neue"/>
-              </a:defRPr>
-            </a:pPr>
-            <a:r>
-              <a:rPr sz="2400" b="0">
-                <a:solidFill>
-                  <a:srgbClr val="F4F2EC"/>
-                </a:solidFill>
-                <a:latin typeface="Helvetica Neue"/>
-                <a:ea typeface="Helvetica Neue"/>
-                <a:cs typeface="Helvetica Neue"/>
-              </a:rPr>
-              <a:t>Përsëritje, qasje e palejuar</a:t>
+              <a:defRPr sz="1350" b="0">
+                <a:solidFill>
+                  <a:srgbClr val="F5F7F9"/>
+                </a:solidFill>
+                <a:latin typeface="Helvetica Neue"/>
+                <a:ea typeface="Helvetica Neue"/>
+                <a:cs typeface="Helvetica Neue"/>
+              </a:defRPr>
+            </a:pPr>
+            <a:r>
+              <a:rPr sz="1350" b="0">
+                <a:solidFill>
+                  <a:srgbClr val="F5F7F9"/>
+                </a:solidFill>
+                <a:latin typeface="Helvetica Neue"/>
+                <a:ea typeface="Helvetica Neue"/>
+                <a:cs typeface="Helvetica Neue"/>
+              </a:rPr>
+              <a:t>I njëjti retry kthen të njëjtën porosi. Qasja pa leje dështon.</a:t>
             </a:r>
           </a:p>
         </p:txBody>
@@ -18019,7 +18007,7 @@
           <p:nvPr/>
         </p:nvPicPr>
         <p:blipFill>
-          <a:blip xmlns:r="http://schemas.openxmlformats.org/officeDocument/2006/relationships" xmlns:a="http://schemas.openxmlformats.org/drawingml/2006/main" r:embed="R2faaef6cf63549da"/>
+          <a:blip xmlns:r="http://schemas.openxmlformats.org/officeDocument/2006/relationships" xmlns:a="http://schemas.openxmlformats.org/drawingml/2006/main" r:embed="Rf5145ec025874654"/>
           <a:stretch xmlns:a="http://schemas.openxmlformats.org/drawingml/2006/main"/>
         </p:blipFill>
         <p:spPr>
@@ -18247,7 +18235,7 @@
         </p:xfrm>
         <a:graphic xmlns:a="http://schemas.openxmlformats.org/drawingml/2006/main">
           <a:graphicData uri="http://schemas.openxmlformats.org/drawingml/2006/chart">
-            <c:chart xmlns:r="http://schemas.openxmlformats.org/officeDocument/2006/relationships" xmlns:c="http://schemas.openxmlformats.org/drawingml/2006/chart" r:id="Ra5480f1dec004572"/>
+            <c:chart xmlns:r="http://schemas.openxmlformats.org/officeDocument/2006/relationships" xmlns:c="http://schemas.openxmlformats.org/drawingml/2006/chart" r:id="R162a29531a2142b9"/>
           </a:graphicData>
         </a:graphic>
       </p:graphicFrame>
@@ -18286,25 +18274,25 @@
           <a:p xmlns:a="http://schemas.openxmlformats.org/drawingml/2006/main">
             <a:pPr algn="l">
               <a:buNone/>
-              <a:defRPr sz="2475" b="0">
-                <a:solidFill>
-                  <a:srgbClr val="AEBFCB"/>
-                </a:solidFill>
-                <a:latin typeface="Helvetica Neue"/>
-                <a:ea typeface="Helvetica Neue"/>
-                <a:cs typeface="Helvetica Neue"/>
-              </a:defRPr>
-            </a:pPr>
-            <a:r>
-              <a:rPr sz="2475" b="0">
-                <a:solidFill>
-                  <a:srgbClr val="AEBFCB"/>
-                </a:solidFill>
-                <a:latin typeface="Helvetica Neue"/>
-                <a:ea typeface="Helvetica Neue"/>
-                <a:cs typeface="Helvetica Neue"/>
-              </a:rPr>
-              <a:t>Rubrika publikohet para dorëzimit.</a:t>
+              <a:defRPr sz="1575" b="0">
+                <a:solidFill>
+                  <a:srgbClr val="B6C5CE"/>
+                </a:solidFill>
+                <a:latin typeface="Helvetica Neue"/>
+                <a:ea typeface="Helvetica Neue"/>
+                <a:cs typeface="Helvetica Neue"/>
+              </a:defRPr>
+            </a:pPr>
+            <a:r>
+              <a:rPr sz="1575" b="0">
+                <a:solidFill>
+                  <a:srgbClr val="B6C5CE"/>
+                </a:solidFill>
+                <a:latin typeface="Helvetica Neue"/>
+                <a:ea typeface="Helvetica Neue"/>
+                <a:cs typeface="Helvetica Neue"/>
+              </a:rPr>
+              <a:t>Provat përfshijnë vakt të padisponueshëm, rrjet të humbur dhe editim të palejuar të menusë.</a:t>
             </a:r>
           </a:p>
         </p:txBody>
@@ -18318,7 +18306,7 @@
           <p:nvPr/>
         </p:nvPicPr>
         <p:blipFill>
-          <a:blip xmlns:r="http://schemas.openxmlformats.org/officeDocument/2006/relationships" xmlns:a="http://schemas.openxmlformats.org/drawingml/2006/main" r:embed="Rb66087b0c8c04312"/>
+          <a:blip xmlns:r="http://schemas.openxmlformats.org/officeDocument/2006/relationships" xmlns:a="http://schemas.openxmlformats.org/drawingml/2006/main" r:embed="Rba37aad4e2d84e70"/>
           <a:stretch xmlns:a="http://schemas.openxmlformats.org/drawingml/2006/main"/>
         </p:blipFill>
         <p:spPr>
@@ -19091,25 +19079,25 @@
           <a:p xmlns:a="http://schemas.openxmlformats.org/drawingml/2006/main">
             <a:pPr algn="l">
               <a:buNone/>
-              <a:defRPr sz="2700" b="0">
-                <a:solidFill>
-                  <a:srgbClr val="F4F2EC"/>
-                </a:solidFill>
-                <a:latin typeface="Helvetica Neue"/>
-                <a:ea typeface="Helvetica Neue"/>
-                <a:cs typeface="Helvetica Neue"/>
-              </a:defRPr>
-            </a:pPr>
-            <a:r>
-              <a:rPr sz="2700" b="0">
-                <a:solidFill>
-                  <a:srgbClr val="F4F2EC"/>
-                </a:solidFill>
-                <a:latin typeface="Helvetica Neue"/>
-                <a:ea typeface="Helvetica Neue"/>
-                <a:cs typeface="Helvetica Neue"/>
-              </a:rPr>
-              <a:t>Pastaj: pyetjet e jurisë dhe mbrojtja individuale</a:t>
+              <a:defRPr sz="1650" b="0">
+                <a:solidFill>
+                  <a:srgbClr val="F5F7F9"/>
+                </a:solidFill>
+                <a:latin typeface="Helvetica Neue"/>
+                <a:ea typeface="Helvetica Neue"/>
+                <a:cs typeface="Helvetica Neue"/>
+              </a:defRPr>
+            </a:pPr>
+            <a:r>
+              <a:rPr sz="1650" b="0">
+                <a:solidFill>
+                  <a:srgbClr val="F5F7F9"/>
+                </a:solidFill>
+                <a:latin typeface="Helvetica Neue"/>
+                <a:ea typeface="Helvetica Neue"/>
+                <a:cs typeface="Helvetica Neue"/>
+              </a:rPr>
+              <a:t>Vakt i padisponueshëm, rrjet i humbur ose editim i palejuar i menusë.</a:t>
             </a:r>
           </a:p>
         </p:txBody>
@@ -19181,7 +19169,7 @@
           <p:nvPr/>
         </p:nvPicPr>
         <p:blipFill>
-          <a:blip xmlns:r="http://schemas.openxmlformats.org/officeDocument/2006/relationships" xmlns:a="http://schemas.openxmlformats.org/drawingml/2006/main" r:embed="R6283e919e6d64c50"/>
+          <a:blip xmlns:r="http://schemas.openxmlformats.org/officeDocument/2006/relationships" xmlns:a="http://schemas.openxmlformats.org/drawingml/2006/main" r:embed="R96ff5aa3f01248a8"/>
           <a:stretch xmlns:a="http://schemas.openxmlformats.org/drawingml/2006/main"/>
         </p:blipFill>
         <p:spPr>
@@ -19374,25 +19362,25 @@
           <a:p xmlns:a="http://schemas.openxmlformats.org/drawingml/2006/main">
             <a:pPr algn="l">
               <a:buNone/>
-              <a:defRPr sz="3825" b="1">
-                <a:solidFill>
-                  <a:srgbClr val="F4F2EC"/>
-                </a:solidFill>
-                <a:latin typeface="Helvetica Neue"/>
-                <a:ea typeface="Helvetica Neue"/>
-                <a:cs typeface="Helvetica Neue"/>
-              </a:defRPr>
-            </a:pPr>
-            <a:r>
-              <a:rPr sz="3825" b="1">
-                <a:solidFill>
-                  <a:srgbClr val="F4F2EC"/>
-                </a:solidFill>
-                <a:latin typeface="Helvetica Neue"/>
-                <a:ea typeface="Helvetica Neue"/>
-                <a:cs typeface="Helvetica Neue"/>
-              </a:rPr>
-              <a:t>Ndryshimi juaj, në telefon</a:t>
+              <a:defRPr sz="3000" b="1">
+                <a:solidFill>
+                  <a:srgbClr val="F5F7F9"/>
+                </a:solidFill>
+                <a:latin typeface="Helvetica Neue"/>
+                <a:ea typeface="Helvetica Neue"/>
+                <a:cs typeface="Helvetica Neue"/>
+              </a:defRPr>
+            </a:pPr>
+            <a:r>
+              <a:rPr sz="3000" b="1">
+                <a:solidFill>
+                  <a:srgbClr val="F5F7F9"/>
+                </a:solidFill>
+                <a:latin typeface="Helvetica Neue"/>
+                <a:ea typeface="Helvetica Neue"/>
+                <a:cs typeface="Helvetica Neue"/>
+              </a:rPr>
+              <a:t>Demo live: porosia bëhet “Gati”</a:t>
             </a:r>
           </a:p>
         </p:txBody>
@@ -19413,8 +19401,8 @@
         </p:nvSpPr>
         <p:spPr>
           <a:xfrm xmlns:a="http://schemas.openxmlformats.org/drawingml/2006/main">
-            <a:off x="647700" y="1971675"/>
-            <a:ext cx="10572750" cy="447675"/>
+            <a:off x="647700" y="1885950"/>
+            <a:ext cx="7620000" cy="447675"/>
           </a:xfrm>
           <a:prstGeom xmlns:a="http://schemas.openxmlformats.org/drawingml/2006/main" prst="rect">
             <a:avLst/>
@@ -19432,25 +19420,25 @@
           <a:p xmlns:a="http://schemas.openxmlformats.org/drawingml/2006/main">
             <a:pPr algn="l">
               <a:buNone/>
-              <a:defRPr sz="2025" b="1">
-                <a:solidFill>
-                  <a:srgbClr val="63CDF2"/>
-                </a:solidFill>
-                <a:latin typeface="Helvetica Neue"/>
-                <a:ea typeface="Helvetica Neue"/>
-                <a:cs typeface="Helvetica Neue"/>
-              </a:defRPr>
-            </a:pPr>
-            <a:r>
-              <a:rPr sz="2025" b="1">
-                <a:solidFill>
-                  <a:srgbClr val="63CDF2"/>
-                </a:solidFill>
-                <a:latin typeface="Helvetica Neue"/>
-                <a:ea typeface="Helvetica Neue"/>
-                <a:cs typeface="Helvetica Neue"/>
-              </a:rPr>
-              <a:t>JAVA 2: PUBLIKIMI I PARË</a:t>
+              <a:defRPr sz="1650" b="1">
+                <a:solidFill>
+                  <a:srgbClr val="5DCEF2"/>
+                </a:solidFill>
+                <a:latin typeface="Helvetica Neue"/>
+                <a:ea typeface="Helvetica Neue"/>
+                <a:cs typeface="Helvetica Neue"/>
+              </a:defRPr>
+            </a:pPr>
+            <a:r>
+              <a:rPr sz="1650" b="1">
+                <a:solidFill>
+                  <a:srgbClr val="5DCEF2"/>
+                </a:solidFill>
+                <a:latin typeface="Helvetica Neue"/>
+                <a:ea typeface="Helvetica Neue"/>
+                <a:cs typeface="Helvetica Neue"/>
+              </a:rPr>
+              <a:t>QR I DEMONSTRIMIT — nuk regjistron pjesëmarrjen</a:t>
             </a:r>
           </a:p>
         </p:txBody>
@@ -19471,44 +19459,44 @@
         </p:nvSpPr>
         <p:spPr>
           <a:xfrm xmlns:a="http://schemas.openxmlformats.org/drawingml/2006/main">
-            <a:off x="685800" y="2867025"/>
-            <a:ext cx="2362200" cy="666750"/>
-          </a:xfrm>
-          <a:prstGeom xmlns:a="http://schemas.openxmlformats.org/drawingml/2006/main" prst="rect">
-            <a:avLst/>
-          </a:prstGeom>
-          <a:noFill xmlns:a="http://schemas.openxmlformats.org/drawingml/2006/main"/>
-          <a:ln xmlns:a="http://schemas.openxmlformats.org/drawingml/2006/main" w="0">
-            <a:noFill/>
-          </a:ln>
-        </p:spPr>
-        <p:txBody>
-          <a:bodyPr xmlns:a="http://schemas.openxmlformats.org/drawingml/2006/main" wrap="square" lIns="0" tIns="0" rIns="0" bIns="0" anchor="ctr">
-            <a:noAutofit/>
-          </a:bodyPr>
-          <a:lstStyle xmlns:a="http://schemas.openxmlformats.org/drawingml/2006/main"/>
-          <a:p xmlns:a="http://schemas.openxmlformats.org/drawingml/2006/main">
-            <a:pPr algn="l">
-              <a:buNone/>
-              <a:defRPr sz="3675" b="1">
-                <a:solidFill>
-                  <a:srgbClr val="F4F2EC"/>
-                </a:solidFill>
-                <a:latin typeface="Helvetica Neue"/>
-                <a:ea typeface="Helvetica Neue"/>
-                <a:cs typeface="Helvetica Neue"/>
-              </a:defRPr>
-            </a:pPr>
-            <a:r>
-              <a:rPr sz="3675" b="1">
-                <a:solidFill>
-                  <a:srgbClr val="F4F2EC"/>
-                </a:solidFill>
-                <a:latin typeface="Helvetica Neue"/>
-                <a:ea typeface="Helvetica Neue"/>
-                <a:cs typeface="Helvetica Neue"/>
-              </a:rPr>
-              <a:t>Repo</a:t>
+            <a:off x="685800" y="2857500"/>
+            <a:ext cx="1476375" cy="523875"/>
+          </a:xfrm>
+          <a:prstGeom xmlns:a="http://schemas.openxmlformats.org/drawingml/2006/main" prst="rect">
+            <a:avLst/>
+          </a:prstGeom>
+          <a:noFill xmlns:a="http://schemas.openxmlformats.org/drawingml/2006/main"/>
+          <a:ln xmlns:a="http://schemas.openxmlformats.org/drawingml/2006/main" w="0">
+            <a:noFill/>
+          </a:ln>
+        </p:spPr>
+        <p:txBody>
+          <a:bodyPr xmlns:a="http://schemas.openxmlformats.org/drawingml/2006/main" wrap="square" lIns="0" tIns="0" rIns="0" bIns="0" anchor="ctr">
+            <a:noAutofit/>
+          </a:bodyPr>
+          <a:lstStyle xmlns:a="http://schemas.openxmlformats.org/drawingml/2006/main"/>
+          <a:p xmlns:a="http://schemas.openxmlformats.org/drawingml/2006/main">
+            <a:pPr algn="ctr">
+              <a:buNone/>
+              <a:defRPr sz="2250" b="1">
+                <a:solidFill>
+                  <a:srgbClr val="5DCEF2"/>
+                </a:solidFill>
+                <a:latin typeface="Helvetica Neue"/>
+                <a:ea typeface="Helvetica Neue"/>
+                <a:cs typeface="Helvetica Neue"/>
+              </a:defRPr>
+            </a:pPr>
+            <a:r>
+              <a:rPr sz="2250" b="1">
+                <a:solidFill>
+                  <a:srgbClr val="5DCEF2"/>
+                </a:solidFill>
+                <a:latin typeface="Helvetica Neue"/>
+                <a:ea typeface="Helvetica Neue"/>
+                <a:cs typeface="Helvetica Neue"/>
+              </a:rPr>
+              <a:t>Menu</a:t>
             </a:r>
           </a:p>
         </p:txBody>
@@ -19529,44 +19517,44 @@
         </p:nvSpPr>
         <p:spPr>
           <a:xfrm xmlns:a="http://schemas.openxmlformats.org/drawingml/2006/main">
-            <a:off x="685800" y="3829050"/>
-            <a:ext cx="2438400" cy="504825"/>
-          </a:xfrm>
-          <a:prstGeom xmlns:a="http://schemas.openxmlformats.org/drawingml/2006/main" prst="rect">
-            <a:avLst/>
-          </a:prstGeom>
-          <a:noFill xmlns:a="http://schemas.openxmlformats.org/drawingml/2006/main"/>
-          <a:ln xmlns:a="http://schemas.openxmlformats.org/drawingml/2006/main" w="0">
-            <a:noFill/>
-          </a:ln>
-        </p:spPr>
-        <p:txBody>
-          <a:bodyPr xmlns:a="http://schemas.openxmlformats.org/drawingml/2006/main" wrap="square" lIns="0" tIns="0" rIns="0" bIns="0" anchor="ctr">
-            <a:noAutofit/>
-          </a:bodyPr>
-          <a:lstStyle xmlns:a="http://schemas.openxmlformats.org/drawingml/2006/main"/>
-          <a:p xmlns:a="http://schemas.openxmlformats.org/drawingml/2006/main">
-            <a:pPr algn="l">
-              <a:buNone/>
-              <a:defRPr sz="2100" b="0">
-                <a:solidFill>
-                  <a:srgbClr val="AEBFCB"/>
-                </a:solidFill>
-                <a:latin typeface="Helvetica Neue"/>
-                <a:ea typeface="Helvetica Neue"/>
-                <a:cs typeface="Helvetica Neue"/>
-              </a:defRPr>
-            </a:pPr>
-            <a:r>
-              <a:rPr sz="2100" b="0">
-                <a:solidFill>
-                  <a:srgbClr val="AEBFCB"/>
-                </a:solidFill>
-                <a:latin typeface="Helvetica Neue"/>
-                <a:ea typeface="Helvetica Neue"/>
-                <a:cs typeface="Helvetica Neue"/>
-              </a:rPr>
-              <a:t>0–10 min</a:t>
+            <a:off x="685800" y="3476625"/>
+            <a:ext cx="1476375" cy="409575"/>
+          </a:xfrm>
+          <a:prstGeom xmlns:a="http://schemas.openxmlformats.org/drawingml/2006/main" prst="rect">
+            <a:avLst/>
+          </a:prstGeom>
+          <a:noFill xmlns:a="http://schemas.openxmlformats.org/drawingml/2006/main"/>
+          <a:ln xmlns:a="http://schemas.openxmlformats.org/drawingml/2006/main" w="0">
+            <a:noFill/>
+          </a:ln>
+        </p:spPr>
+        <p:txBody>
+          <a:bodyPr xmlns:a="http://schemas.openxmlformats.org/drawingml/2006/main" wrap="square" lIns="0" tIns="0" rIns="0" bIns="0" anchor="ctr">
+            <a:noAutofit/>
+          </a:bodyPr>
+          <a:lstStyle xmlns:a="http://schemas.openxmlformats.org/drawingml/2006/main"/>
+          <a:p xmlns:a="http://schemas.openxmlformats.org/drawingml/2006/main">
+            <a:pPr algn="ctr">
+              <a:buNone/>
+              <a:defRPr sz="1200" b="0">
+                <a:solidFill>
+                  <a:srgbClr val="B6C5CE"/>
+                </a:solidFill>
+                <a:latin typeface="Helvetica Neue"/>
+                <a:ea typeface="Helvetica Neue"/>
+                <a:cs typeface="Helvetica Neue"/>
+              </a:defRPr>
+            </a:pPr>
+            <a:r>
+              <a:rPr sz="1200" b="0">
+                <a:solidFill>
+                  <a:srgbClr val="B6C5CE"/>
+                </a:solidFill>
+                <a:latin typeface="Helvetica Neue"/>
+                <a:ea typeface="Helvetica Neue"/>
+                <a:cs typeface="Helvetica Neue"/>
+              </a:rPr>
+              <a:t>Zgjidh vaktin</a:t>
             </a:r>
           </a:p>
         </p:txBody>
@@ -19587,8 +19575,8 @@
         </p:nvSpPr>
         <p:spPr>
           <a:xfrm xmlns:a="http://schemas.openxmlformats.org/drawingml/2006/main">
-            <a:off x="2933700" y="3124200"/>
-            <a:ext cx="304800" cy="171450"/>
+            <a:off x="2276475" y="3028950"/>
+            <a:ext cx="266700" cy="171450"/>
           </a:xfrm>
           <a:prstGeom xmlns:a="http://schemas.openxmlformats.org/drawingml/2006/main" prst="rightArrow">
             <a:avLst/>
@@ -19617,44 +19605,44 @@
         </p:nvSpPr>
         <p:spPr>
           <a:xfrm xmlns:a="http://schemas.openxmlformats.org/drawingml/2006/main">
-            <a:off x="3448050" y="2867025"/>
-            <a:ext cx="2362200" cy="666750"/>
-          </a:xfrm>
-          <a:prstGeom xmlns:a="http://schemas.openxmlformats.org/drawingml/2006/main" prst="rect">
-            <a:avLst/>
-          </a:prstGeom>
-          <a:noFill xmlns:a="http://schemas.openxmlformats.org/drawingml/2006/main"/>
-          <a:ln xmlns:a="http://schemas.openxmlformats.org/drawingml/2006/main" w="0">
-            <a:noFill/>
-          </a:ln>
-        </p:spPr>
-        <p:txBody>
-          <a:bodyPr xmlns:a="http://schemas.openxmlformats.org/drawingml/2006/main" wrap="square" lIns="0" tIns="0" rIns="0" bIns="0" anchor="ctr">
-            <a:noAutofit/>
-          </a:bodyPr>
-          <a:lstStyle xmlns:a="http://schemas.openxmlformats.org/drawingml/2006/main"/>
-          <a:p xmlns:a="http://schemas.openxmlformats.org/drawingml/2006/main">
-            <a:pPr algn="l">
-              <a:buNone/>
-              <a:defRPr sz="3675" b="1">
-                <a:solidFill>
-                  <a:srgbClr val="F4F2EC"/>
-                </a:solidFill>
-                <a:latin typeface="Helvetica Neue"/>
-                <a:ea typeface="Helvetica Neue"/>
-                <a:cs typeface="Helvetica Neue"/>
-              </a:defRPr>
-            </a:pPr>
-            <a:r>
-              <a:rPr sz="3675" b="1">
-                <a:solidFill>
-                  <a:srgbClr val="F4F2EC"/>
-                </a:solidFill>
-                <a:latin typeface="Helvetica Neue"/>
-                <a:ea typeface="Helvetica Neue"/>
-                <a:cs typeface="Helvetica Neue"/>
-              </a:rPr>
-              <a:t>Commit</a:t>
+            <a:off x="2667000" y="2857500"/>
+            <a:ext cx="1476375" cy="523875"/>
+          </a:xfrm>
+          <a:prstGeom xmlns:a="http://schemas.openxmlformats.org/drawingml/2006/main" prst="rect">
+            <a:avLst/>
+          </a:prstGeom>
+          <a:noFill xmlns:a="http://schemas.openxmlformats.org/drawingml/2006/main"/>
+          <a:ln xmlns:a="http://schemas.openxmlformats.org/drawingml/2006/main" w="0">
+            <a:noFill/>
+          </a:ln>
+        </p:spPr>
+        <p:txBody>
+          <a:bodyPr xmlns:a="http://schemas.openxmlformats.org/drawingml/2006/main" wrap="square" lIns="0" tIns="0" rIns="0" bIns="0" anchor="ctr">
+            <a:noAutofit/>
+          </a:bodyPr>
+          <a:lstStyle xmlns:a="http://schemas.openxmlformats.org/drawingml/2006/main"/>
+          <a:p xmlns:a="http://schemas.openxmlformats.org/drawingml/2006/main">
+            <a:pPr algn="ctr">
+              <a:buNone/>
+              <a:defRPr sz="2250" b="1">
+                <a:solidFill>
+                  <a:srgbClr val="F5F7F9"/>
+                </a:solidFill>
+                <a:latin typeface="Helvetica Neue"/>
+                <a:ea typeface="Helvetica Neue"/>
+                <a:cs typeface="Helvetica Neue"/>
+              </a:defRPr>
+            </a:pPr>
+            <a:r>
+              <a:rPr sz="2250" b="1">
+                <a:solidFill>
+                  <a:srgbClr val="F5F7F9"/>
+                </a:solidFill>
+                <a:latin typeface="Helvetica Neue"/>
+                <a:ea typeface="Helvetica Neue"/>
+                <a:cs typeface="Helvetica Neue"/>
+              </a:rPr>
+              <a:t>Cart</a:t>
             </a:r>
           </a:p>
         </p:txBody>
@@ -19675,44 +19663,44 @@
         </p:nvSpPr>
         <p:spPr>
           <a:xfrm xmlns:a="http://schemas.openxmlformats.org/drawingml/2006/main">
-            <a:off x="3448050" y="3829050"/>
-            <a:ext cx="2438400" cy="504825"/>
-          </a:xfrm>
-          <a:prstGeom xmlns:a="http://schemas.openxmlformats.org/drawingml/2006/main" prst="rect">
-            <a:avLst/>
-          </a:prstGeom>
-          <a:noFill xmlns:a="http://schemas.openxmlformats.org/drawingml/2006/main"/>
-          <a:ln xmlns:a="http://schemas.openxmlformats.org/drawingml/2006/main" w="0">
-            <a:noFill/>
-          </a:ln>
-        </p:spPr>
-        <p:txBody>
-          <a:bodyPr xmlns:a="http://schemas.openxmlformats.org/drawingml/2006/main" wrap="square" lIns="0" tIns="0" rIns="0" bIns="0" anchor="ctr">
-            <a:noAutofit/>
-          </a:bodyPr>
-          <a:lstStyle xmlns:a="http://schemas.openxmlformats.org/drawingml/2006/main"/>
-          <a:p xmlns:a="http://schemas.openxmlformats.org/drawingml/2006/main">
-            <a:pPr algn="l">
-              <a:buNone/>
-              <a:defRPr sz="2100" b="0">
-                <a:solidFill>
-                  <a:srgbClr val="AEBFCB"/>
-                </a:solidFill>
-                <a:latin typeface="Helvetica Neue"/>
-                <a:ea typeface="Helvetica Neue"/>
-                <a:cs typeface="Helvetica Neue"/>
-              </a:defRPr>
-            </a:pPr>
-            <a:r>
-              <a:rPr sz="2100" b="0">
-                <a:solidFill>
-                  <a:srgbClr val="AEBFCB"/>
-                </a:solidFill>
-                <a:latin typeface="Helvetica Neue"/>
-                <a:ea typeface="Helvetica Neue"/>
-                <a:cs typeface="Helvetica Neue"/>
-              </a:rPr>
-              <a:t>10–20 min</a:t>
+            <a:off x="2667000" y="3476625"/>
+            <a:ext cx="1476375" cy="409575"/>
+          </a:xfrm>
+          <a:prstGeom xmlns:a="http://schemas.openxmlformats.org/drawingml/2006/main" prst="rect">
+            <a:avLst/>
+          </a:prstGeom>
+          <a:noFill xmlns:a="http://schemas.openxmlformats.org/drawingml/2006/main"/>
+          <a:ln xmlns:a="http://schemas.openxmlformats.org/drawingml/2006/main" w="0">
+            <a:noFill/>
+          </a:ln>
+        </p:spPr>
+        <p:txBody>
+          <a:bodyPr xmlns:a="http://schemas.openxmlformats.org/drawingml/2006/main" wrap="square" lIns="0" tIns="0" rIns="0" bIns="0" anchor="ctr">
+            <a:noAutofit/>
+          </a:bodyPr>
+          <a:lstStyle xmlns:a="http://schemas.openxmlformats.org/drawingml/2006/main"/>
+          <a:p xmlns:a="http://schemas.openxmlformats.org/drawingml/2006/main">
+            <a:pPr algn="ctr">
+              <a:buNone/>
+              <a:defRPr sz="1125" b="0">
+                <a:solidFill>
+                  <a:srgbClr val="B6C5CE"/>
+                </a:solidFill>
+                <a:latin typeface="Helvetica Neue"/>
+                <a:ea typeface="Helvetica Neue"/>
+                <a:cs typeface="Helvetica Neue"/>
+              </a:defRPr>
+            </a:pPr>
+            <a:r>
+              <a:rPr sz="1125" b="0">
+                <a:solidFill>
+                  <a:srgbClr val="B6C5CE"/>
+                </a:solidFill>
+                <a:latin typeface="Helvetica Neue"/>
+                <a:ea typeface="Helvetica Neue"/>
+                <a:cs typeface="Helvetica Neue"/>
+              </a:rPr>
+              <a:t>Sasia 1</a:t>
             </a:r>
           </a:p>
         </p:txBody>
@@ -19733,8 +19721,8 @@
         </p:nvSpPr>
         <p:spPr>
           <a:xfrm xmlns:a="http://schemas.openxmlformats.org/drawingml/2006/main">
-            <a:off x="5695950" y="3124200"/>
-            <a:ext cx="304800" cy="171450"/>
+            <a:off x="4257675" y="3028950"/>
+            <a:ext cx="266700" cy="171450"/>
           </a:xfrm>
           <a:prstGeom xmlns:a="http://schemas.openxmlformats.org/drawingml/2006/main" prst="rightArrow">
             <a:avLst/>
@@ -19763,44 +19751,44 @@
         </p:nvSpPr>
         <p:spPr>
           <a:xfrm xmlns:a="http://schemas.openxmlformats.org/drawingml/2006/main">
-            <a:off x="6210300" y="2867025"/>
-            <a:ext cx="2362200" cy="666750"/>
-          </a:xfrm>
-          <a:prstGeom xmlns:a="http://schemas.openxmlformats.org/drawingml/2006/main" prst="rect">
-            <a:avLst/>
-          </a:prstGeom>
-          <a:noFill xmlns:a="http://schemas.openxmlformats.org/drawingml/2006/main"/>
-          <a:ln xmlns:a="http://schemas.openxmlformats.org/drawingml/2006/main" w="0">
-            <a:noFill/>
-          </a:ln>
-        </p:spPr>
-        <p:txBody>
-          <a:bodyPr xmlns:a="http://schemas.openxmlformats.org/drawingml/2006/main" wrap="square" lIns="0" tIns="0" rIns="0" bIns="0" anchor="ctr">
-            <a:noAutofit/>
-          </a:bodyPr>
-          <a:lstStyle xmlns:a="http://schemas.openxmlformats.org/drawingml/2006/main"/>
-          <a:p xmlns:a="http://schemas.openxmlformats.org/drawingml/2006/main">
-            <a:pPr algn="l">
-              <a:buNone/>
-              <a:defRPr sz="3675" b="1">
-                <a:solidFill>
-                  <a:srgbClr val="F4F2EC"/>
-                </a:solidFill>
-                <a:latin typeface="Helvetica Neue"/>
-                <a:ea typeface="Helvetica Neue"/>
-                <a:cs typeface="Helvetica Neue"/>
-              </a:defRPr>
-            </a:pPr>
-            <a:r>
-              <a:rPr sz="3675" b="1">
-                <a:solidFill>
-                  <a:srgbClr val="F4F2EC"/>
-                </a:solidFill>
-                <a:latin typeface="Helvetica Neue"/>
-                <a:ea typeface="Helvetica Neue"/>
-                <a:cs typeface="Helvetica Neue"/>
-              </a:rPr>
-              <a:t>Deploy</a:t>
+            <a:off x="4648200" y="2857500"/>
+            <a:ext cx="1476375" cy="523875"/>
+          </a:xfrm>
+          <a:prstGeom xmlns:a="http://schemas.openxmlformats.org/drawingml/2006/main" prst="rect">
+            <a:avLst/>
+          </a:prstGeom>
+          <a:noFill xmlns:a="http://schemas.openxmlformats.org/drawingml/2006/main"/>
+          <a:ln xmlns:a="http://schemas.openxmlformats.org/drawingml/2006/main" w="0">
+            <a:noFill/>
+          </a:ln>
+        </p:spPr>
+        <p:txBody>
+          <a:bodyPr xmlns:a="http://schemas.openxmlformats.org/drawingml/2006/main" wrap="square" lIns="0" tIns="0" rIns="0" bIns="0" anchor="ctr">
+            <a:noAutofit/>
+          </a:bodyPr>
+          <a:lstStyle xmlns:a="http://schemas.openxmlformats.org/drawingml/2006/main"/>
+          <a:p xmlns:a="http://schemas.openxmlformats.org/drawingml/2006/main">
+            <a:pPr algn="ctr">
+              <a:buNone/>
+              <a:defRPr sz="2250" b="1">
+                <a:solidFill>
+                  <a:srgbClr val="F5F7F9"/>
+                </a:solidFill>
+                <a:latin typeface="Helvetica Neue"/>
+                <a:ea typeface="Helvetica Neue"/>
+                <a:cs typeface="Helvetica Neue"/>
+              </a:defRPr>
+            </a:pPr>
+            <a:r>
+              <a:rPr sz="2250" b="1">
+                <a:solidFill>
+                  <a:srgbClr val="F5F7F9"/>
+                </a:solidFill>
+                <a:latin typeface="Helvetica Neue"/>
+                <a:ea typeface="Helvetica Neue"/>
+                <a:cs typeface="Helvetica Neue"/>
+              </a:rPr>
+              <a:t>Order</a:t>
             </a:r>
           </a:p>
         </p:txBody>
@@ -19821,44 +19809,44 @@
         </p:nvSpPr>
         <p:spPr>
           <a:xfrm xmlns:a="http://schemas.openxmlformats.org/drawingml/2006/main">
-            <a:off x="6210300" y="3829050"/>
-            <a:ext cx="2438400" cy="504825"/>
-          </a:xfrm>
-          <a:prstGeom xmlns:a="http://schemas.openxmlformats.org/drawingml/2006/main" prst="rect">
-            <a:avLst/>
-          </a:prstGeom>
-          <a:noFill xmlns:a="http://schemas.openxmlformats.org/drawingml/2006/main"/>
-          <a:ln xmlns:a="http://schemas.openxmlformats.org/drawingml/2006/main" w="0">
-            <a:noFill/>
-          </a:ln>
-        </p:spPr>
-        <p:txBody>
-          <a:bodyPr xmlns:a="http://schemas.openxmlformats.org/drawingml/2006/main" wrap="square" lIns="0" tIns="0" rIns="0" bIns="0" anchor="ctr">
-            <a:noAutofit/>
-          </a:bodyPr>
-          <a:lstStyle xmlns:a="http://schemas.openxmlformats.org/drawingml/2006/main"/>
-          <a:p xmlns:a="http://schemas.openxmlformats.org/drawingml/2006/main">
-            <a:pPr algn="l">
-              <a:buNone/>
-              <a:defRPr sz="2100" b="0">
-                <a:solidFill>
-                  <a:srgbClr val="AEBFCB"/>
-                </a:solidFill>
-                <a:latin typeface="Helvetica Neue"/>
-                <a:ea typeface="Helvetica Neue"/>
-                <a:cs typeface="Helvetica Neue"/>
-              </a:defRPr>
-            </a:pPr>
-            <a:r>
-              <a:rPr sz="2100" b="0">
-                <a:solidFill>
-                  <a:srgbClr val="AEBFCB"/>
-                </a:solidFill>
-                <a:latin typeface="Helvetica Neue"/>
-                <a:ea typeface="Helvetica Neue"/>
-                <a:cs typeface="Helvetica Neue"/>
-              </a:rPr>
-              <a:t>20–35 min</a:t>
+            <a:off x="4648200" y="3476625"/>
+            <a:ext cx="1476375" cy="409575"/>
+          </a:xfrm>
+          <a:prstGeom xmlns:a="http://schemas.openxmlformats.org/drawingml/2006/main" prst="rect">
+            <a:avLst/>
+          </a:prstGeom>
+          <a:noFill xmlns:a="http://schemas.openxmlformats.org/drawingml/2006/main"/>
+          <a:ln xmlns:a="http://schemas.openxmlformats.org/drawingml/2006/main" w="0">
+            <a:noFill/>
+          </a:ln>
+        </p:spPr>
+        <p:txBody>
+          <a:bodyPr xmlns:a="http://schemas.openxmlformats.org/drawingml/2006/main" wrap="square" lIns="0" tIns="0" rIns="0" bIns="0" anchor="ctr">
+            <a:noAutofit/>
+          </a:bodyPr>
+          <a:lstStyle xmlns:a="http://schemas.openxmlformats.org/drawingml/2006/main"/>
+          <a:p xmlns:a="http://schemas.openxmlformats.org/drawingml/2006/main">
+            <a:pPr algn="ctr">
+              <a:buNone/>
+              <a:defRPr sz="1125" b="0">
+                <a:solidFill>
+                  <a:srgbClr val="B6C5CE"/>
+                </a:solidFill>
+                <a:latin typeface="Helvetica Neue"/>
+                <a:ea typeface="Helvetica Neue"/>
+                <a:cs typeface="Helvetica Neue"/>
+              </a:defRPr>
+            </a:pPr>
+            <a:r>
+              <a:rPr sz="1125" b="0">
+                <a:solidFill>
+                  <a:srgbClr val="B6C5CE"/>
+                </a:solidFill>
+                <a:latin typeface="Helvetica Neue"/>
+                <a:ea typeface="Helvetica Neue"/>
+                <a:cs typeface="Helvetica Neue"/>
+              </a:rPr>
+              <a:t>U ruajt</a:t>
             </a:r>
           </a:p>
         </p:txBody>
@@ -19879,8 +19867,8 @@
         </p:nvSpPr>
         <p:spPr>
           <a:xfrm xmlns:a="http://schemas.openxmlformats.org/drawingml/2006/main">
-            <a:off x="8458200" y="3124200"/>
-            <a:ext cx="304800" cy="171450"/>
+            <a:off x="6238875" y="3028950"/>
+            <a:ext cx="266700" cy="171450"/>
           </a:xfrm>
           <a:prstGeom xmlns:a="http://schemas.openxmlformats.org/drawingml/2006/main" prst="rightArrow">
             <a:avLst/>
@@ -19909,8 +19897,124 @@
         </p:nvSpPr>
         <p:spPr>
           <a:xfrm xmlns:a="http://schemas.openxmlformats.org/drawingml/2006/main">
-            <a:off x="8972550" y="2867025"/>
-            <a:ext cx="2362200" cy="666750"/>
+            <a:off x="6629400" y="2857500"/>
+            <a:ext cx="1476375" cy="523875"/>
+          </a:xfrm>
+          <a:prstGeom xmlns:a="http://schemas.openxmlformats.org/drawingml/2006/main" prst="rect">
+            <a:avLst/>
+          </a:prstGeom>
+          <a:noFill xmlns:a="http://schemas.openxmlformats.org/drawingml/2006/main"/>
+          <a:ln xmlns:a="http://schemas.openxmlformats.org/drawingml/2006/main" w="0">
+            <a:noFill/>
+          </a:ln>
+        </p:spPr>
+        <p:txBody>
+          <a:bodyPr xmlns:a="http://schemas.openxmlformats.org/drawingml/2006/main" wrap="square" lIns="0" tIns="0" rIns="0" bIns="0" anchor="ctr">
+            <a:noAutofit/>
+          </a:bodyPr>
+          <a:lstStyle xmlns:a="http://schemas.openxmlformats.org/drawingml/2006/main"/>
+          <a:p xmlns:a="http://schemas.openxmlformats.org/drawingml/2006/main">
+            <a:pPr algn="ctr">
+              <a:buNone/>
+              <a:defRPr sz="2250" b="1">
+                <a:solidFill>
+                  <a:srgbClr val="7FD3AA"/>
+                </a:solidFill>
+                <a:latin typeface="Helvetica Neue"/>
+                <a:ea typeface="Helvetica Neue"/>
+                <a:cs typeface="Helvetica Neue"/>
+              </a:defRPr>
+            </a:pPr>
+            <a:r>
+              <a:rPr sz="2250" b="1">
+                <a:solidFill>
+                  <a:srgbClr val="7FD3AA"/>
+                </a:solidFill>
+                <a:latin typeface="Helvetica Neue"/>
+                <a:ea typeface="Helvetica Neue"/>
+                <a:cs typeface="Helvetica Neue"/>
+              </a:rPr>
+              <a:t>Gati</a:t>
+            </a:r>
+          </a:p>
+        </p:txBody>
+      </p:sp>
+      <p:sp>
+        <p:nvSpPr>
+          <p:cNvPr id="15" name="text-336">
+            <a:extLst xmlns:a="http://schemas.openxmlformats.org/drawingml/2006/main">
+              <a:ext uri="{FF2B5EF4-FFF2-40B4-BE49-F238E27FC236}">
+                <a16:creationId xmlns:a16="http://schemas.microsoft.com/office/drawing/2014/main" id="{017BC553-2884-4219-938C-C1BAA44C4EAB}"/>
+              </a:ext>
+            </a:extLst>
+          </p:cNvPr>
+          <p:cNvSpPr>
+            <a:spLocks xmlns:a="http://schemas.openxmlformats.org/drawingml/2006/main" noGrp="1"/>
+          </p:cNvSpPr>
+          <p:nvPr/>
+        </p:nvSpPr>
+        <p:spPr>
+          <a:xfrm xmlns:a="http://schemas.openxmlformats.org/drawingml/2006/main">
+            <a:off x="6629400" y="3476625"/>
+            <a:ext cx="1476375" cy="409575"/>
+          </a:xfrm>
+          <a:prstGeom xmlns:a="http://schemas.openxmlformats.org/drawingml/2006/main" prst="rect">
+            <a:avLst/>
+          </a:prstGeom>
+          <a:noFill xmlns:a="http://schemas.openxmlformats.org/drawingml/2006/main"/>
+          <a:ln xmlns:a="http://schemas.openxmlformats.org/drawingml/2006/main" w="0">
+            <a:noFill/>
+          </a:ln>
+        </p:spPr>
+        <p:txBody>
+          <a:bodyPr xmlns:a="http://schemas.openxmlformats.org/drawingml/2006/main" wrap="square" lIns="0" tIns="0" rIns="0" bIns="0" anchor="ctr">
+            <a:noAutofit/>
+          </a:bodyPr>
+          <a:lstStyle xmlns:a="http://schemas.openxmlformats.org/drawingml/2006/main"/>
+          <a:p xmlns:a="http://schemas.openxmlformats.org/drawingml/2006/main">
+            <a:pPr algn="ctr">
+              <a:buNone/>
+              <a:defRPr sz="1125" b="0">
+                <a:solidFill>
+                  <a:srgbClr val="B6C5CE"/>
+                </a:solidFill>
+                <a:latin typeface="Helvetica Neue"/>
+                <a:ea typeface="Helvetica Neue"/>
+                <a:cs typeface="Helvetica Neue"/>
+              </a:defRPr>
+            </a:pPr>
+            <a:r>
+              <a:rPr sz="1125" b="0">
+                <a:solidFill>
+                  <a:srgbClr val="B6C5CE"/>
+                </a:solidFill>
+                <a:latin typeface="Helvetica Neue"/>
+                <a:ea typeface="Helvetica Neue"/>
+                <a:cs typeface="Helvetica Neue"/>
+              </a:rPr>
+              <a:t>Stafi e mbylli</a:t>
+            </a:r>
+          </a:p>
+        </p:txBody>
+      </p:sp>
+      <p:sp>
+        <p:nvSpPr>
+          <p:cNvPr id="16" name="text-337">
+            <a:extLst xmlns:a="http://schemas.openxmlformats.org/drawingml/2006/main">
+              <a:ext uri="{FF2B5EF4-FFF2-40B4-BE49-F238E27FC236}">
+                <a16:creationId xmlns:a16="http://schemas.microsoft.com/office/drawing/2014/main" id="{3E5A6713-8ED9-47C0-94EA-A242E87F2754}"/>
+              </a:ext>
+            </a:extLst>
+          </p:cNvPr>
+          <p:cNvSpPr>
+            <a:spLocks xmlns:a="http://schemas.openxmlformats.org/drawingml/2006/main" noGrp="1"/>
+          </p:cNvSpPr>
+          <p:nvPr/>
+        </p:nvSpPr>
+        <p:spPr>
+          <a:xfrm xmlns:a="http://schemas.openxmlformats.org/drawingml/2006/main">
+            <a:off x="685800" y="4552950"/>
+            <a:ext cx="10810875" cy="914400"/>
           </a:xfrm>
           <a:prstGeom xmlns:a="http://schemas.openxmlformats.org/drawingml/2006/main" prst="rect">
             <a:avLst/>
@@ -19928,105 +20032,71 @@
           <a:p xmlns:a="http://schemas.openxmlformats.org/drawingml/2006/main">
             <a:pPr algn="l">
               <a:buNone/>
-              <a:defRPr sz="3675" b="1">
-                <a:solidFill>
-                  <a:srgbClr val="F4F2EC"/>
-                </a:solidFill>
-                <a:latin typeface="Helvetica Neue"/>
-                <a:ea typeface="Helvetica Neue"/>
-                <a:cs typeface="Helvetica Neue"/>
-              </a:defRPr>
-            </a:pPr>
-            <a:r>
-              <a:rPr sz="3675" b="1">
-                <a:solidFill>
-                  <a:srgbClr val="F4F2EC"/>
-                </a:solidFill>
-                <a:latin typeface="Helvetica Neue"/>
-                <a:ea typeface="Helvetica Neue"/>
-                <a:cs typeface="Helvetica Neue"/>
-              </a:rPr>
-              <a:t>Telefon</a:t>
-            </a:r>
-          </a:p>
-        </p:txBody>
-      </p:sp>
-      <p:sp>
-        <p:nvSpPr>
-          <p:cNvPr id="15" name="text-336">
-            <a:extLst xmlns:a="http://schemas.openxmlformats.org/drawingml/2006/main">
-              <a:ext uri="{FF2B5EF4-FFF2-40B4-BE49-F238E27FC236}">
-                <a16:creationId xmlns:a16="http://schemas.microsoft.com/office/drawing/2014/main" id="{017BC553-2884-4219-938C-C1BAA44C4EAB}"/>
-              </a:ext>
-            </a:extLst>
-          </p:cNvPr>
-          <p:cNvSpPr>
-            <a:spLocks xmlns:a="http://schemas.openxmlformats.org/drawingml/2006/main" noGrp="1"/>
-          </p:cNvSpPr>
-          <p:nvPr/>
-        </p:nvSpPr>
-        <p:spPr>
-          <a:xfrm xmlns:a="http://schemas.openxmlformats.org/drawingml/2006/main">
-            <a:off x="8972550" y="3829050"/>
-            <a:ext cx="2438400" cy="504825"/>
-          </a:xfrm>
-          <a:prstGeom xmlns:a="http://schemas.openxmlformats.org/drawingml/2006/main" prst="rect">
-            <a:avLst/>
-          </a:prstGeom>
-          <a:noFill xmlns:a="http://schemas.openxmlformats.org/drawingml/2006/main"/>
-          <a:ln xmlns:a="http://schemas.openxmlformats.org/drawingml/2006/main" w="0">
-            <a:noFill/>
-          </a:ln>
-        </p:spPr>
-        <p:txBody>
-          <a:bodyPr xmlns:a="http://schemas.openxmlformats.org/drawingml/2006/main" wrap="square" lIns="0" tIns="0" rIns="0" bIns="0" anchor="ctr">
-            <a:noAutofit/>
-          </a:bodyPr>
-          <a:lstStyle xmlns:a="http://schemas.openxmlformats.org/drawingml/2006/main"/>
+              <a:defRPr sz="1500" b="1">
+                <a:solidFill>
+                  <a:srgbClr val="F5F7F9"/>
+                </a:solidFill>
+                <a:latin typeface="Helvetica Neue"/>
+                <a:ea typeface="Helvetica Neue"/>
+                <a:cs typeface="Helvetica Neue"/>
+              </a:defRPr>
+            </a:pPr>
+            <a:r>
+              <a:rPr sz="1500" b="1">
+                <a:solidFill>
+                  <a:srgbClr val="F5F7F9"/>
+                </a:solidFill>
+                <a:latin typeface="Helvetica Neue"/>
+                <a:ea typeface="Helvetica Neue"/>
+                <a:cs typeface="Helvetica Neue"/>
+              </a:rPr>
+              <a:t>QR I PJESËMARRJES — vetëm në mes të orës; regjistron praninë</a:t>
+            </a:r>
+          </a:p>
           <a:p xmlns:a="http://schemas.openxmlformats.org/drawingml/2006/main">
             <a:pPr algn="l">
               <a:buNone/>
-              <a:defRPr sz="2100" b="0">
-                <a:solidFill>
-                  <a:srgbClr val="AEBFCB"/>
-                </a:solidFill>
-                <a:latin typeface="Helvetica Neue"/>
-                <a:ea typeface="Helvetica Neue"/>
-                <a:cs typeface="Helvetica Neue"/>
-              </a:defRPr>
-            </a:pPr>
-            <a:r>
-              <a:rPr sz="2100" b="0">
-                <a:solidFill>
-                  <a:srgbClr val="AEBFCB"/>
-                </a:solidFill>
-                <a:latin typeface="Helvetica Neue"/>
-                <a:ea typeface="Helvetica Neue"/>
-                <a:cs typeface="Helvetica Neue"/>
-              </a:rPr>
-              <a:t>35–45 min</a:t>
-            </a:r>
-          </a:p>
-        </p:txBody>
-      </p:sp>
-      <p:sp>
-        <p:nvSpPr>
-          <p:cNvPr id="16" name="text-337">
-            <a:extLst xmlns:a="http://schemas.openxmlformats.org/drawingml/2006/main">
-              <a:ext uri="{FF2B5EF4-FFF2-40B4-BE49-F238E27FC236}">
-                <a16:creationId xmlns:a16="http://schemas.microsoft.com/office/drawing/2014/main" id="{3E5A6713-8ED9-47C0-94EA-A242E87F2754}"/>
-              </a:ext>
-            </a:extLst>
-          </p:cNvPr>
-          <p:cNvSpPr>
-            <a:spLocks xmlns:a="http://schemas.openxmlformats.org/drawingml/2006/main" noGrp="1"/>
-          </p:cNvSpPr>
-          <p:nvPr/>
-        </p:nvSpPr>
-        <p:spPr>
-          <a:xfrm xmlns:a="http://schemas.openxmlformats.org/drawingml/2006/main">
-            <a:off x="695325" y="4914900"/>
-            <a:ext cx="10763250" cy="781050"/>
+              <a:defRPr sz="1500" b="1">
+                <a:solidFill>
+                  <a:srgbClr val="F5F7F9"/>
+                </a:solidFill>
+                <a:latin typeface="Helvetica Neue"/>
+                <a:ea typeface="Helvetica Neue"/>
+                <a:cs typeface="Helvetica Neue"/>
+              </a:defRPr>
+            </a:pPr>
+            <a:r>
+              <a:rPr sz="1500" b="1">
+                <a:solidFill>
+                  <a:srgbClr val="F5F7F9"/>
+                </a:solidFill>
+                <a:latin typeface="Helvetica Neue"/>
+                <a:ea typeface="Helvetica Neue"/>
+                <a:cs typeface="Helvetica Neue"/>
+              </a:rPr>
+              <a:t>QR I DEMONSTRIMIT — në fund; hap aplikacionin dhe nuk regjistron praninë</a:t>
+            </a:r>
+          </a:p>
+        </p:txBody>
+      </p:sp>
+      <p:sp>
+        <p:nvSpPr>
+          <p:cNvPr id="17" name="text-338">
+            <a:extLst xmlns:a="http://schemas.openxmlformats.org/drawingml/2006/main">
+              <a:ext uri="{FF2B5EF4-FFF2-40B4-BE49-F238E27FC236}">
+                <a16:creationId xmlns:a16="http://schemas.microsoft.com/office/drawing/2014/main" id="{3FD56265-CA8B-4650-BEB9-C46E17AC08DD}"/>
+              </a:ext>
+            </a:extLst>
+          </p:cNvPr>
+          <p:cNvSpPr>
+            <a:spLocks xmlns:a="http://schemas.openxmlformats.org/drawingml/2006/main" noGrp="1"/>
+          </p:cNvSpPr>
+          <p:nvPr/>
+        </p:nvSpPr>
+        <p:spPr>
+          <a:xfrm xmlns:a="http://schemas.openxmlformats.org/drawingml/2006/main">
+            <a:off x="685800" y="5715000"/>
+            <a:ext cx="10810875" cy="428625"/>
           </a:xfrm>
           <a:prstGeom xmlns:a="http://schemas.openxmlformats.org/drawingml/2006/main" prst="rect">
             <a:avLst/>
@@ -20044,103 +20114,67 @@
           <a:p xmlns:a="http://schemas.openxmlformats.org/drawingml/2006/main">
             <a:pPr algn="l">
               <a:buNone/>
-              <a:defRPr sz="2925" b="1">
-                <a:solidFill>
-                  <a:srgbClr val="91DEBB"/>
-                </a:solidFill>
-                <a:latin typeface="Helvetica Neue"/>
-                <a:ea typeface="Helvetica Neue"/>
-                <a:cs typeface="Helvetica Neue"/>
-              </a:defRPr>
-            </a:pPr>
-            <a:r>
-              <a:rPr sz="2925" b="1">
-                <a:solidFill>
-                  <a:srgbClr val="91DEBB"/>
-                </a:solidFill>
-                <a:latin typeface="Helvetica Neue"/>
-                <a:ea typeface="Helvetica Neue"/>
-                <a:cs typeface="Helvetica Neue"/>
-              </a:rPr>
-              <a:t>Prova: një ndryshim i dytë, i dukshëm në telefon.</a:t>
-            </a:r>
-          </a:p>
-        </p:txBody>
-      </p:sp>
-      <p:sp>
-        <p:nvSpPr>
-          <p:cNvPr id="17" name="text-338">
-            <a:extLst xmlns:a="http://schemas.openxmlformats.org/drawingml/2006/main">
-              <a:ext uri="{FF2B5EF4-FFF2-40B4-BE49-F238E27FC236}">
-                <a16:creationId xmlns:a16="http://schemas.microsoft.com/office/drawing/2014/main" id="{3FD56265-CA8B-4650-BEB9-C46E17AC08DD}"/>
-              </a:ext>
-            </a:extLst>
-          </p:cNvPr>
-          <p:cNvSpPr>
-            <a:spLocks xmlns:a="http://schemas.openxmlformats.org/drawingml/2006/main" noGrp="1"/>
-          </p:cNvSpPr>
-          <p:nvPr/>
-        </p:nvSpPr>
-        <p:spPr>
-          <a:xfrm xmlns:a="http://schemas.openxmlformats.org/drawingml/2006/main">
-            <a:off x="609600" y="5962650"/>
-            <a:ext cx="10763250" cy="428625"/>
-          </a:xfrm>
-          <a:prstGeom xmlns:a="http://schemas.openxmlformats.org/drawingml/2006/main" prst="rect">
-            <a:avLst/>
-          </a:prstGeom>
-          <a:noFill xmlns:a="http://schemas.openxmlformats.org/drawingml/2006/main"/>
-          <a:ln xmlns:a="http://schemas.openxmlformats.org/drawingml/2006/main" w="0">
-            <a:noFill/>
-          </a:ln>
-        </p:spPr>
-        <p:txBody>
-          <a:bodyPr xmlns:a="http://schemas.openxmlformats.org/drawingml/2006/main" wrap="square" lIns="0" tIns="0" rIns="0" bIns="0" anchor="ctr">
-            <a:noAutofit/>
-          </a:bodyPr>
-          <a:lstStyle xmlns:a="http://schemas.openxmlformats.org/drawingml/2006/main"/>
-          <a:p xmlns:a="http://schemas.openxmlformats.org/drawingml/2006/main">
-            <a:pPr algn="l">
-              <a:buNone/>
-              <a:defRPr sz="1950" b="0">
-                <a:solidFill>
-                  <a:srgbClr val="AEBFCB"/>
-                </a:solidFill>
-                <a:latin typeface="Helvetica Neue"/>
-                <a:ea typeface="Helvetica Neue"/>
-                <a:cs typeface="Helvetica Neue"/>
-              </a:defRPr>
-            </a:pPr>
-            <a:r>
-              <a:rPr sz="1950" b="0">
-                <a:solidFill>
-                  <a:srgbClr val="AEBFCB"/>
-                </a:solidFill>
-                <a:latin typeface="Helvetica Neue"/>
-                <a:ea typeface="Helvetica Neue"/>
-                <a:cs typeface="Helvetica Neue"/>
-              </a:rPr>
-              <a:t>24 shtator: segmenti hyrës i ushtrimeve. Vazhdoni në aplikacionin tuaj.</a:t>
+              <a:defRPr sz="1500" b="1">
+                <a:solidFill>
+                  <a:srgbClr val="5DCEF2"/>
+                </a:solidFill>
+                <a:latin typeface="Helvetica Neue"/>
+                <a:ea typeface="Helvetica Neue"/>
+                <a:cs typeface="Helvetica Neue"/>
+              </a:defRPr>
+            </a:pPr>
+            <a:r>
+              <a:rPr sz="1500" b="1">
+                <a:solidFill>
+                  <a:srgbClr val="5DCEF2"/>
+                </a:solidFill>
+                <a:latin typeface="Helvetica Neue"/>
+                <a:ea typeface="Helvetica Neue"/>
+                <a:cs typeface="Helvetica Neue"/>
+              </a:rPr>
+              <a:t>https://arbenl.github.io/demo/restaurant/</a:t>
             </a:r>
           </a:p>
         </p:txBody>
       </p:sp>
       <p:pic>
         <p:nvPicPr>
-          <p:cNvPr id="37" name=""/>
+          <p:cNvPr id="38" name=""/>
           <p:cNvPicPr>
             <a:picLocks xmlns:a="http://schemas.openxmlformats.org/drawingml/2006/main" noChangeAspect="1"/>
           </p:cNvPicPr>
           <p:nvPr/>
         </p:nvPicPr>
         <p:blipFill>
-          <a:blip xmlns:r="http://schemas.openxmlformats.org/officeDocument/2006/relationships" xmlns:a="http://schemas.openxmlformats.org/drawingml/2006/main" r:embed="R0e9f8901551f4f7f"/>
+          <a:blip xmlns:r="http://schemas.openxmlformats.org/officeDocument/2006/relationships" xmlns:a="http://schemas.openxmlformats.org/drawingml/2006/main" r:embed="R4d657ecec4464fca"/>
           <a:stretch xmlns:a="http://schemas.openxmlformats.org/drawingml/2006/main"/>
         </p:blipFill>
         <p:spPr>
           <a:xfrm xmlns:a="http://schemas.openxmlformats.org/drawingml/2006/main">
             <a:off x="9525000" y="299045"/>
             <a:ext cx="1190625" cy="240109"/>
+          </a:xfrm>
+          <a:prstGeom xmlns:a="http://schemas.openxmlformats.org/drawingml/2006/main" prst="rect">
+            <a:avLst/>
+          </a:prstGeom>
+        </p:spPr>
+      </p:pic>
+      <p:pic>
+        <p:nvPicPr>
+          <p:cNvPr id="39" name=""/>
+          <p:cNvPicPr>
+            <a:picLocks xmlns:a="http://schemas.openxmlformats.org/drawingml/2006/main" noChangeAspect="1"/>
+          </p:cNvPicPr>
+          <p:nvPr/>
+        </p:nvPicPr>
+        <p:blipFill>
+          <a:blip xmlns:r="http://schemas.openxmlformats.org/officeDocument/2006/relationships" xmlns:a="http://schemas.openxmlformats.org/drawingml/2006/main" r:embed="R7fc2827eddb84183"/>
+          <a:stretch xmlns:a="http://schemas.openxmlformats.org/drawingml/2006/main"/>
+        </p:blipFill>
+        <p:spPr>
+          <a:xfrm xmlns:a="http://schemas.openxmlformats.org/drawingml/2006/main">
+            <a:off x="9144000" y="1952625"/>
+            <a:ext cx="2095500" cy="2095500"/>
           </a:xfrm>
           <a:prstGeom xmlns:a="http://schemas.openxmlformats.org/drawingml/2006/main" prst="rect">
             <a:avLst/>
@@ -20540,8 +20574,8 @@
         </p:nvSpPr>
         <p:spPr>
           <a:xfrm xmlns:a="http://schemas.openxmlformats.org/drawingml/2006/main">
-            <a:off x="695325" y="5381625"/>
-            <a:ext cx="1809750" cy="504825"/>
+            <a:off x="695325" y="5095875"/>
+            <a:ext cx="1333500" cy="504825"/>
           </a:xfrm>
           <a:prstGeom xmlns:a="http://schemas.openxmlformats.org/drawingml/2006/main" prst="rect">
             <a:avLst/>
@@ -20559,25 +20593,25 @@
           <a:p xmlns:a="http://schemas.openxmlformats.org/drawingml/2006/main">
             <a:pPr algn="l">
               <a:buNone/>
-              <a:defRPr sz="1950" b="1">
-                <a:solidFill>
-                  <a:srgbClr val="F2BB66"/>
-                </a:solidFill>
-                <a:latin typeface="Helvetica Neue"/>
-                <a:ea typeface="Helvetica Neue"/>
-                <a:cs typeface="Helvetica Neue"/>
-              </a:defRPr>
-            </a:pPr>
-            <a:r>
-              <a:rPr sz="1950" b="1">
-                <a:solidFill>
-                  <a:srgbClr val="F2BB66"/>
-                </a:solidFill>
-                <a:latin typeface="Helvetica Neue"/>
-                <a:ea typeface="Helvetica Neue"/>
-                <a:cs typeface="Helvetica Neue"/>
-              </a:rPr>
-              <a:t>JAVA 2</a:t>
+              <a:defRPr sz="1275" b="1">
+                <a:solidFill>
+                  <a:srgbClr val="F3BE5C"/>
+                </a:solidFill>
+                <a:latin typeface="Helvetica Neue"/>
+                <a:ea typeface="Helvetica Neue"/>
+                <a:cs typeface="Helvetica Neue"/>
+              </a:defRPr>
+            </a:pPr>
+            <a:r>
+              <a:rPr sz="1275" b="1">
+                <a:solidFill>
+                  <a:srgbClr val="F3BE5C"/>
+                </a:solidFill>
+                <a:latin typeface="Helvetica Neue"/>
+                <a:ea typeface="Helvetica Neue"/>
+                <a:cs typeface="Helvetica Neue"/>
+              </a:rPr>
+              <a:t>MBYLLJA</a:t>
             </a:r>
           </a:p>
         </p:txBody>
@@ -20598,8 +20632,8 @@
         </p:nvSpPr>
         <p:spPr>
           <a:xfrm xmlns:a="http://schemas.openxmlformats.org/drawingml/2006/main">
-            <a:off x="2676525" y="5305425"/>
-            <a:ext cx="8610600" cy="647700"/>
+            <a:off x="2095500" y="4876800"/>
+            <a:ext cx="9191625" cy="1028700"/>
           </a:xfrm>
           <a:prstGeom xmlns:a="http://schemas.openxmlformats.org/drawingml/2006/main" prst="rect">
             <a:avLst/>
@@ -20617,25 +20651,25 @@
           <a:p xmlns:a="http://schemas.openxmlformats.org/drawingml/2006/main">
             <a:pPr algn="l">
               <a:buNone/>
-              <a:defRPr sz="2775" b="1">
-                <a:solidFill>
-                  <a:srgbClr val="F4F2EC"/>
-                </a:solidFill>
-                <a:latin typeface="Helvetica Neue"/>
-                <a:ea typeface="Helvetica Neue"/>
-                <a:cs typeface="Helvetica Neue"/>
-              </a:defRPr>
-            </a:pPr>
-            <a:r>
-              <a:rPr sz="2775" b="1">
-                <a:solidFill>
-                  <a:srgbClr val="F4F2EC"/>
-                </a:solidFill>
-                <a:latin typeface="Helvetica Neue"/>
-                <a:ea typeface="Helvetica Neue"/>
-                <a:cs typeface="Helvetica Neue"/>
-              </a:rPr>
-              <a:t>Tri biseda + PRD paraprake</a:t>
+              <a:defRPr sz="1575" b="1">
+                <a:solidFill>
+                  <a:srgbClr val="F5F7F9"/>
+                </a:solidFill>
+                <a:latin typeface="Helvetica Neue"/>
+                <a:ea typeface="Helvetica Neue"/>
+                <a:cs typeface="Helvetica Neue"/>
+              </a:defRPr>
+            </a:pPr>
+            <a:r>
+              <a:rPr sz="1575" b="1">
+                <a:solidFill>
+                  <a:srgbClr val="F5F7F9"/>
+                </a:solidFill>
+                <a:latin typeface="Helvetica Neue"/>
+                <a:ea typeface="Helvetica Neue"/>
+                <a:cs typeface="Helvetica Neue"/>
+              </a:rPr>
+              <a:t>15 javë më vonë, këtë mund ta ndërtoni ju. Filloni me një biznes. Gjeni një problem. Ndërtoni një rrjedhë që funksionon.</a:t>
             </a:r>
           </a:p>
         </p:txBody>
@@ -20707,7 +20741,7 @@
           <p:nvPr/>
         </p:nvPicPr>
         <p:blipFill>
-          <a:blip xmlns:r="http://schemas.openxmlformats.org/officeDocument/2006/relationships" xmlns:a="http://schemas.openxmlformats.org/drawingml/2006/main" r:embed="Re2405347440b457e"/>
+          <a:blip xmlns:r="http://schemas.openxmlformats.org/officeDocument/2006/relationships" xmlns:a="http://schemas.openxmlformats.org/drawingml/2006/main" r:embed="Rcbd8d669c1724f77"/>
           <a:stretch xmlns:a="http://schemas.openxmlformats.org/drawingml/2006/main"/>
         </p:blipFill>
         <p:spPr>
@@ -20783,6 +20817,7 @@
           <a:lstStyle xmlns:a="http://schemas.openxmlformats.org/drawingml/2006/main"/>
           <a:p xmlns:a="http://schemas.openxmlformats.org/drawingml/2006/main">
             <a:pPr>
+              <a:buNone/>
               <a:defRPr sz="1350" b="1">
                 <a:solidFill>
                   <a:srgbClr val="5DCEF2"/>
@@ -20840,6 +20875,7 @@
           <a:lstStyle xmlns:a="http://schemas.openxmlformats.org/drawingml/2006/main"/>
           <a:p xmlns:a="http://schemas.openxmlformats.org/drawingml/2006/main">
             <a:pPr>
+              <a:buNone/>
               <a:defRPr sz="3600" b="1">
                 <a:solidFill>
                   <a:srgbClr val="F5F7F9"/>
@@ -20897,6 +20933,7 @@
           <a:lstStyle xmlns:a="http://schemas.openxmlformats.org/drawingml/2006/main"/>
           <a:p xmlns:a="http://schemas.openxmlformats.org/drawingml/2006/main">
             <a:pPr>
+              <a:buNone/>
               <a:defRPr sz="2550" b="1">
                 <a:solidFill>
                   <a:srgbClr val="5DCEF2"/>
@@ -20954,6 +20991,7 @@
           <a:lstStyle xmlns:a="http://schemas.openxmlformats.org/drawingml/2006/main"/>
           <a:p xmlns:a="http://schemas.openxmlformats.org/drawingml/2006/main">
             <a:pPr>
+              <a:buNone/>
               <a:defRPr sz="2400" b="0">
                 <a:solidFill>
                   <a:srgbClr val="F5F7F9"/>
@@ -21011,6 +21049,7 @@
           <a:lstStyle xmlns:a="http://schemas.openxmlformats.org/drawingml/2006/main"/>
           <a:p xmlns:a="http://schemas.openxmlformats.org/drawingml/2006/main">
             <a:pPr>
+              <a:buNone/>
               <a:defRPr sz="2550" b="1">
                 <a:solidFill>
                   <a:srgbClr val="5DCEF2"/>
@@ -21068,6 +21107,7 @@
           <a:lstStyle xmlns:a="http://schemas.openxmlformats.org/drawingml/2006/main"/>
           <a:p xmlns:a="http://schemas.openxmlformats.org/drawingml/2006/main">
             <a:pPr>
+              <a:buNone/>
               <a:defRPr sz="2400" b="0">
                 <a:solidFill>
                   <a:srgbClr val="F5F7F9"/>
@@ -21125,6 +21165,7 @@
           <a:lstStyle xmlns:a="http://schemas.openxmlformats.org/drawingml/2006/main"/>
           <a:p xmlns:a="http://schemas.openxmlformats.org/drawingml/2006/main">
             <a:pPr>
+              <a:buNone/>
               <a:defRPr sz="2550" b="1">
                 <a:solidFill>
                   <a:srgbClr val="5DCEF2"/>
@@ -21182,6 +21223,7 @@
           <a:lstStyle xmlns:a="http://schemas.openxmlformats.org/drawingml/2006/main"/>
           <a:p xmlns:a="http://schemas.openxmlformats.org/drawingml/2006/main">
             <a:pPr>
+              <a:buNone/>
               <a:defRPr sz="2400" b="0">
                 <a:solidFill>
                   <a:srgbClr val="F5F7F9"/>
@@ -21239,6 +21281,7 @@
           <a:lstStyle xmlns:a="http://schemas.openxmlformats.org/drawingml/2006/main"/>
           <a:p xmlns:a="http://schemas.openxmlformats.org/drawingml/2006/main">
             <a:pPr>
+              <a:buNone/>
               <a:defRPr sz="2550" b="1">
                 <a:solidFill>
                   <a:srgbClr val="5DCEF2"/>
@@ -21296,6 +21339,7 @@
           <a:lstStyle xmlns:a="http://schemas.openxmlformats.org/drawingml/2006/main"/>
           <a:p xmlns:a="http://schemas.openxmlformats.org/drawingml/2006/main">
             <a:pPr>
+              <a:buNone/>
               <a:defRPr sz="2400" b="0">
                 <a:solidFill>
                   <a:srgbClr val="F5F7F9"/>
@@ -21353,6 +21397,7 @@
           <a:lstStyle xmlns:a="http://schemas.openxmlformats.org/drawingml/2006/main"/>
           <a:p xmlns:a="http://schemas.openxmlformats.org/drawingml/2006/main">
             <a:pPr>
+              <a:buNone/>
               <a:defRPr sz="2100" b="0">
                 <a:solidFill>
                   <a:srgbClr val="B6C5CE"/>
@@ -21410,6 +21455,7 @@
           <a:lstStyle xmlns:a="http://schemas.openxmlformats.org/drawingml/2006/main"/>
           <a:p xmlns:a="http://schemas.openxmlformats.org/drawingml/2006/main">
             <a:pPr>
+              <a:buNone/>
               <a:defRPr sz="1350" b="0">
                 <a:solidFill>
                   <a:srgbClr val="B6C5CE"/>
@@ -21435,14 +21481,14 @@
       </p:sp>
       <p:pic>
         <p:nvPicPr>
-          <p:cNvPr id="26" name=""/>
+          <p:cNvPr id="28" name=""/>
           <p:cNvPicPr>
             <a:picLocks xmlns:a="http://schemas.openxmlformats.org/drawingml/2006/main" noChangeAspect="1"/>
           </p:cNvPicPr>
           <p:nvPr/>
         </p:nvPicPr>
         <p:blipFill>
-          <a:blip xmlns:r="http://schemas.openxmlformats.org/officeDocument/2006/relationships" xmlns:a="http://schemas.openxmlformats.org/drawingml/2006/main" r:embed="Re1363725f64349c4"/>
+          <a:blip xmlns:r="http://schemas.openxmlformats.org/officeDocument/2006/relationships" xmlns:a="http://schemas.openxmlformats.org/drawingml/2006/main" r:embed="Rb48e5277eba5415a"/>
           <a:stretch xmlns:a="http://schemas.openxmlformats.org/drawingml/2006/main"/>
         </p:blipFill>
         <p:spPr>
@@ -21518,6 +21564,7 @@
           <a:lstStyle xmlns:a="http://schemas.openxmlformats.org/drawingml/2006/main"/>
           <a:p xmlns:a="http://schemas.openxmlformats.org/drawingml/2006/main">
             <a:pPr>
+              <a:buNone/>
               <a:defRPr sz="1350" b="1">
                 <a:solidFill>
                   <a:srgbClr val="5DCEF2"/>
@@ -21575,6 +21622,7 @@
           <a:lstStyle xmlns:a="http://schemas.openxmlformats.org/drawingml/2006/main"/>
           <a:p xmlns:a="http://schemas.openxmlformats.org/drawingml/2006/main">
             <a:pPr>
+              <a:buNone/>
               <a:defRPr sz="3600" b="1">
                 <a:solidFill>
                   <a:srgbClr val="F5F7F9"/>
@@ -21632,6 +21680,7 @@
           <a:lstStyle xmlns:a="http://schemas.openxmlformats.org/drawingml/2006/main"/>
           <a:p xmlns:a="http://schemas.openxmlformats.org/drawingml/2006/main">
             <a:pPr>
+              <a:buNone/>
               <a:defRPr sz="2400" b="1">
                 <a:solidFill>
                   <a:srgbClr val="5DCEF2"/>
@@ -21689,6 +21738,7 @@
           <a:lstStyle xmlns:a="http://schemas.openxmlformats.org/drawingml/2006/main"/>
           <a:p xmlns:a="http://schemas.openxmlformats.org/drawingml/2006/main">
             <a:pPr>
+              <a:buNone/>
               <a:defRPr sz="2250" b="0">
                 <a:solidFill>
                   <a:srgbClr val="F5F7F9"/>
@@ -21746,6 +21796,7 @@
           <a:lstStyle xmlns:a="http://schemas.openxmlformats.org/drawingml/2006/main"/>
           <a:p xmlns:a="http://schemas.openxmlformats.org/drawingml/2006/main">
             <a:pPr>
+              <a:buNone/>
               <a:defRPr sz="2400" b="1">
                 <a:solidFill>
                   <a:srgbClr val="5DCEF2"/>
@@ -21803,6 +21854,7 @@
           <a:lstStyle xmlns:a="http://schemas.openxmlformats.org/drawingml/2006/main"/>
           <a:p xmlns:a="http://schemas.openxmlformats.org/drawingml/2006/main">
             <a:pPr>
+              <a:buNone/>
               <a:defRPr sz="2250" b="0">
                 <a:solidFill>
                   <a:srgbClr val="F5F7F9"/>
@@ -21860,6 +21912,7 @@
           <a:lstStyle xmlns:a="http://schemas.openxmlformats.org/drawingml/2006/main"/>
           <a:p xmlns:a="http://schemas.openxmlformats.org/drawingml/2006/main">
             <a:pPr>
+              <a:buNone/>
               <a:defRPr sz="2400" b="1">
                 <a:solidFill>
                   <a:srgbClr val="5DCEF2"/>
@@ -21917,6 +21970,7 @@
           <a:lstStyle xmlns:a="http://schemas.openxmlformats.org/drawingml/2006/main"/>
           <a:p xmlns:a="http://schemas.openxmlformats.org/drawingml/2006/main">
             <a:pPr>
+              <a:buNone/>
               <a:defRPr sz="2250" b="0">
                 <a:solidFill>
                   <a:srgbClr val="F5F7F9"/>
@@ -21974,6 +22028,7 @@
           <a:lstStyle xmlns:a="http://schemas.openxmlformats.org/drawingml/2006/main"/>
           <a:p xmlns:a="http://schemas.openxmlformats.org/drawingml/2006/main">
             <a:pPr>
+              <a:buNone/>
               <a:defRPr sz="2400" b="1">
                 <a:solidFill>
                   <a:srgbClr val="5DCEF2"/>
@@ -22031,6 +22086,7 @@
           <a:lstStyle xmlns:a="http://schemas.openxmlformats.org/drawingml/2006/main"/>
           <a:p xmlns:a="http://schemas.openxmlformats.org/drawingml/2006/main">
             <a:pPr>
+              <a:buNone/>
               <a:defRPr sz="2250" b="0">
                 <a:solidFill>
                   <a:srgbClr val="F5F7F9"/>
@@ -22088,6 +22144,7 @@
           <a:lstStyle xmlns:a="http://schemas.openxmlformats.org/drawingml/2006/main"/>
           <a:p xmlns:a="http://schemas.openxmlformats.org/drawingml/2006/main">
             <a:pPr>
+              <a:buNone/>
               <a:defRPr sz="1350" b="0">
                 <a:solidFill>
                   <a:srgbClr val="B6C5CE"/>
@@ -22113,14 +22170,14 @@
       </p:sp>
       <p:pic>
         <p:nvPicPr>
-          <p:cNvPr id="24" name=""/>
+          <p:cNvPr id="26" name=""/>
           <p:cNvPicPr>
             <a:picLocks xmlns:a="http://schemas.openxmlformats.org/drawingml/2006/main" noChangeAspect="1"/>
           </p:cNvPicPr>
           <p:nvPr/>
         </p:nvPicPr>
         <p:blipFill>
-          <a:blip xmlns:r="http://schemas.openxmlformats.org/officeDocument/2006/relationships" xmlns:a="http://schemas.openxmlformats.org/drawingml/2006/main" r:embed="R36ce272619b1429a"/>
+          <a:blip xmlns:r="http://schemas.openxmlformats.org/officeDocument/2006/relationships" xmlns:a="http://schemas.openxmlformats.org/drawingml/2006/main" r:embed="R0ca4307bf4f24220"/>
           <a:stretch xmlns:a="http://schemas.openxmlformats.org/drawingml/2006/main"/>
         </p:blipFill>
         <p:spPr>
@@ -22196,6 +22253,7 @@
           <a:lstStyle xmlns:a="http://schemas.openxmlformats.org/drawingml/2006/main"/>
           <a:p xmlns:a="http://schemas.openxmlformats.org/drawingml/2006/main">
             <a:pPr>
+              <a:buNone/>
               <a:defRPr sz="1350" b="1">
                 <a:solidFill>
                   <a:srgbClr val="5DCEF2"/>
@@ -22253,6 +22311,7 @@
           <a:lstStyle xmlns:a="http://schemas.openxmlformats.org/drawingml/2006/main"/>
           <a:p xmlns:a="http://schemas.openxmlformats.org/drawingml/2006/main">
             <a:pPr>
+              <a:buNone/>
               <a:defRPr sz="3600" b="1">
                 <a:solidFill>
                   <a:srgbClr val="F5F7F9"/>
@@ -22310,6 +22369,7 @@
           <a:lstStyle xmlns:a="http://schemas.openxmlformats.org/drawingml/2006/main"/>
           <a:p xmlns:a="http://schemas.openxmlformats.org/drawingml/2006/main">
             <a:pPr>
+              <a:buNone/>
               <a:defRPr sz="3000" b="1">
                 <a:solidFill>
                   <a:srgbClr val="5DCEF2"/>
@@ -22367,6 +22427,7 @@
           <a:lstStyle xmlns:a="http://schemas.openxmlformats.org/drawingml/2006/main"/>
           <a:p xmlns:a="http://schemas.openxmlformats.org/drawingml/2006/main">
             <a:pPr>
+              <a:buNone/>
               <a:defRPr sz="2325" b="0">
                 <a:solidFill>
                   <a:srgbClr val="F5F7F9"/>
@@ -22424,6 +22485,7 @@
           <a:lstStyle xmlns:a="http://schemas.openxmlformats.org/drawingml/2006/main"/>
           <a:p xmlns:a="http://schemas.openxmlformats.org/drawingml/2006/main">
             <a:pPr>
+              <a:buNone/>
               <a:defRPr sz="3000" b="1">
                 <a:solidFill>
                   <a:srgbClr val="5DCEF2"/>
@@ -22481,6 +22543,7 @@
           <a:lstStyle xmlns:a="http://schemas.openxmlformats.org/drawingml/2006/main"/>
           <a:p xmlns:a="http://schemas.openxmlformats.org/drawingml/2006/main">
             <a:pPr>
+              <a:buNone/>
               <a:defRPr sz="2325" b="0">
                 <a:solidFill>
                   <a:srgbClr val="F5F7F9"/>
@@ -22538,6 +22601,7 @@
           <a:lstStyle xmlns:a="http://schemas.openxmlformats.org/drawingml/2006/main"/>
           <a:p xmlns:a="http://schemas.openxmlformats.org/drawingml/2006/main">
             <a:pPr>
+              <a:buNone/>
               <a:defRPr sz="3000" b="1">
                 <a:solidFill>
                   <a:srgbClr val="5DCEF2"/>
@@ -22595,6 +22659,7 @@
           <a:lstStyle xmlns:a="http://schemas.openxmlformats.org/drawingml/2006/main"/>
           <a:p xmlns:a="http://schemas.openxmlformats.org/drawingml/2006/main">
             <a:pPr>
+              <a:buNone/>
               <a:defRPr sz="2325" b="0">
                 <a:solidFill>
                   <a:srgbClr val="F5F7F9"/>
@@ -22652,6 +22717,7 @@
           <a:lstStyle xmlns:a="http://schemas.openxmlformats.org/drawingml/2006/main"/>
           <a:p xmlns:a="http://schemas.openxmlformats.org/drawingml/2006/main">
             <a:pPr>
+              <a:buNone/>
               <a:defRPr sz="3000" b="1">
                 <a:solidFill>
                   <a:srgbClr val="5DCEF2"/>
@@ -22709,6 +22775,7 @@
           <a:lstStyle xmlns:a="http://schemas.openxmlformats.org/drawingml/2006/main"/>
           <a:p xmlns:a="http://schemas.openxmlformats.org/drawingml/2006/main">
             <a:pPr>
+              <a:buNone/>
               <a:defRPr sz="2325" b="0">
                 <a:solidFill>
                   <a:srgbClr val="F5F7F9"/>
@@ -22766,6 +22833,7 @@
           <a:lstStyle xmlns:a="http://schemas.openxmlformats.org/drawingml/2006/main"/>
           <a:p xmlns:a="http://schemas.openxmlformats.org/drawingml/2006/main">
             <a:pPr>
+              <a:buNone/>
               <a:defRPr sz="1350" b="0">
                 <a:solidFill>
                   <a:srgbClr val="B6C5CE"/>
@@ -22791,14 +22859,14 @@
       </p:sp>
       <p:pic>
         <p:nvPicPr>
-          <p:cNvPr id="24" name=""/>
+          <p:cNvPr id="26" name=""/>
           <p:cNvPicPr>
             <a:picLocks xmlns:a="http://schemas.openxmlformats.org/drawingml/2006/main" noChangeAspect="1"/>
           </p:cNvPicPr>
           <p:nvPr/>
         </p:nvPicPr>
         <p:blipFill>
-          <a:blip xmlns:r="http://schemas.openxmlformats.org/officeDocument/2006/relationships" xmlns:a="http://schemas.openxmlformats.org/drawingml/2006/main" r:embed="R62afa0df71354993"/>
+          <a:blip xmlns:r="http://schemas.openxmlformats.org/officeDocument/2006/relationships" xmlns:a="http://schemas.openxmlformats.org/drawingml/2006/main" r:embed="R747f8405bbfd48d3"/>
           <a:stretch xmlns:a="http://schemas.openxmlformats.org/drawingml/2006/main"/>
         </p:blipFill>
         <p:spPr>
@@ -22874,6 +22942,7 @@
           <a:lstStyle xmlns:a="http://schemas.openxmlformats.org/drawingml/2006/main"/>
           <a:p xmlns:a="http://schemas.openxmlformats.org/drawingml/2006/main">
             <a:pPr>
+              <a:buNone/>
               <a:defRPr sz="1350" b="1">
                 <a:solidFill>
                   <a:srgbClr val="5DCEF2"/>
@@ -22931,6 +23000,7 @@
           <a:lstStyle xmlns:a="http://schemas.openxmlformats.org/drawingml/2006/main"/>
           <a:p xmlns:a="http://schemas.openxmlformats.org/drawingml/2006/main">
             <a:pPr>
+              <a:buNone/>
               <a:defRPr sz="3600" b="1">
                 <a:solidFill>
                   <a:srgbClr val="F5F7F9"/>
@@ -22988,6 +23058,7 @@
           <a:lstStyle xmlns:a="http://schemas.openxmlformats.org/drawingml/2006/main"/>
           <a:p xmlns:a="http://schemas.openxmlformats.org/drawingml/2006/main">
             <a:pPr>
+              <a:buNone/>
               <a:defRPr sz="3000" b="1">
                 <a:solidFill>
                   <a:srgbClr val="5DCEF2"/>
@@ -23045,6 +23116,7 @@
           <a:lstStyle xmlns:a="http://schemas.openxmlformats.org/drawingml/2006/main"/>
           <a:p xmlns:a="http://schemas.openxmlformats.org/drawingml/2006/main">
             <a:pPr>
+              <a:buNone/>
               <a:defRPr sz="2325" b="0">
                 <a:solidFill>
                   <a:srgbClr val="F5F7F9"/>
@@ -23102,6 +23174,7 @@
           <a:lstStyle xmlns:a="http://schemas.openxmlformats.org/drawingml/2006/main"/>
           <a:p xmlns:a="http://schemas.openxmlformats.org/drawingml/2006/main">
             <a:pPr>
+              <a:buNone/>
               <a:defRPr sz="3000" b="1">
                 <a:solidFill>
                   <a:srgbClr val="5DCEF2"/>
@@ -23159,6 +23232,7 @@
           <a:lstStyle xmlns:a="http://schemas.openxmlformats.org/drawingml/2006/main"/>
           <a:p xmlns:a="http://schemas.openxmlformats.org/drawingml/2006/main">
             <a:pPr>
+              <a:buNone/>
               <a:defRPr sz="2325" b="0">
                 <a:solidFill>
                   <a:srgbClr val="F5F7F9"/>
@@ -23216,6 +23290,7 @@
           <a:lstStyle xmlns:a="http://schemas.openxmlformats.org/drawingml/2006/main"/>
           <a:p xmlns:a="http://schemas.openxmlformats.org/drawingml/2006/main">
             <a:pPr>
+              <a:buNone/>
               <a:defRPr sz="3000" b="1">
                 <a:solidFill>
                   <a:srgbClr val="5DCEF2"/>
@@ -23273,6 +23348,7 @@
           <a:lstStyle xmlns:a="http://schemas.openxmlformats.org/drawingml/2006/main"/>
           <a:p xmlns:a="http://schemas.openxmlformats.org/drawingml/2006/main">
             <a:pPr>
+              <a:buNone/>
               <a:defRPr sz="2325" b="0">
                 <a:solidFill>
                   <a:srgbClr val="F5F7F9"/>
@@ -23330,6 +23406,7 @@
           <a:lstStyle xmlns:a="http://schemas.openxmlformats.org/drawingml/2006/main"/>
           <a:p xmlns:a="http://schemas.openxmlformats.org/drawingml/2006/main">
             <a:pPr>
+              <a:buNone/>
               <a:defRPr sz="3000" b="1">
                 <a:solidFill>
                   <a:srgbClr val="5DCEF2"/>
@@ -23387,6 +23464,7 @@
           <a:lstStyle xmlns:a="http://schemas.openxmlformats.org/drawingml/2006/main"/>
           <a:p xmlns:a="http://schemas.openxmlformats.org/drawingml/2006/main">
             <a:pPr>
+              <a:buNone/>
               <a:defRPr sz="2325" b="0">
                 <a:solidFill>
                   <a:srgbClr val="F5F7F9"/>
@@ -23444,6 +23522,7 @@
           <a:lstStyle xmlns:a="http://schemas.openxmlformats.org/drawingml/2006/main"/>
           <a:p xmlns:a="http://schemas.openxmlformats.org/drawingml/2006/main">
             <a:pPr>
+              <a:buNone/>
               <a:defRPr sz="1350" b="0">
                 <a:solidFill>
                   <a:srgbClr val="B6C5CE"/>
@@ -23469,14 +23548,14 @@
       </p:sp>
       <p:pic>
         <p:nvPicPr>
-          <p:cNvPr id="24" name=""/>
+          <p:cNvPr id="26" name=""/>
           <p:cNvPicPr>
             <a:picLocks xmlns:a="http://schemas.openxmlformats.org/drawingml/2006/main" noChangeAspect="1"/>
           </p:cNvPicPr>
           <p:nvPr/>
         </p:nvPicPr>
         <p:blipFill>
-          <a:blip xmlns:r="http://schemas.openxmlformats.org/officeDocument/2006/relationships" xmlns:a="http://schemas.openxmlformats.org/drawingml/2006/main" r:embed="Rc65f15f84fce44f1"/>
+          <a:blip xmlns:r="http://schemas.openxmlformats.org/officeDocument/2006/relationships" xmlns:a="http://schemas.openxmlformats.org/drawingml/2006/main" r:embed="Red49676455c44ae1"/>
           <a:stretch xmlns:a="http://schemas.openxmlformats.org/drawingml/2006/main"/>
         </p:blipFill>
         <p:spPr>
@@ -23552,6 +23631,7 @@
           <a:lstStyle xmlns:a="http://schemas.openxmlformats.org/drawingml/2006/main"/>
           <a:p xmlns:a="http://schemas.openxmlformats.org/drawingml/2006/main">
             <a:pPr>
+              <a:buNone/>
               <a:defRPr sz="1350" b="1">
                 <a:solidFill>
                   <a:srgbClr val="5DCEF2"/>
@@ -23609,6 +23689,7 @@
           <a:lstStyle xmlns:a="http://schemas.openxmlformats.org/drawingml/2006/main"/>
           <a:p xmlns:a="http://schemas.openxmlformats.org/drawingml/2006/main">
             <a:pPr>
+              <a:buNone/>
               <a:defRPr sz="3600" b="1">
                 <a:solidFill>
                   <a:srgbClr val="F5F7F9"/>
@@ -23666,6 +23747,7 @@
           <a:lstStyle xmlns:a="http://schemas.openxmlformats.org/drawingml/2006/main"/>
           <a:p xmlns:a="http://schemas.openxmlformats.org/drawingml/2006/main">
             <a:pPr>
+              <a:buNone/>
               <a:defRPr sz="3000" b="1">
                 <a:solidFill>
                   <a:srgbClr val="5DCEF2"/>
@@ -23723,6 +23805,7 @@
           <a:lstStyle xmlns:a="http://schemas.openxmlformats.org/drawingml/2006/main"/>
           <a:p xmlns:a="http://schemas.openxmlformats.org/drawingml/2006/main">
             <a:pPr>
+              <a:buNone/>
               <a:defRPr sz="2400" b="0">
                 <a:solidFill>
                   <a:srgbClr val="F5F7F9"/>
@@ -23780,6 +23863,7 @@
           <a:lstStyle xmlns:a="http://schemas.openxmlformats.org/drawingml/2006/main"/>
           <a:p xmlns:a="http://schemas.openxmlformats.org/drawingml/2006/main">
             <a:pPr>
+              <a:buNone/>
               <a:defRPr sz="3000" b="1">
                 <a:solidFill>
                   <a:srgbClr val="5DCEF2"/>
@@ -23837,6 +23921,7 @@
           <a:lstStyle xmlns:a="http://schemas.openxmlformats.org/drawingml/2006/main"/>
           <a:p xmlns:a="http://schemas.openxmlformats.org/drawingml/2006/main">
             <a:pPr>
+              <a:buNone/>
               <a:defRPr sz="2400" b="0">
                 <a:solidFill>
                   <a:srgbClr val="F5F7F9"/>
@@ -23894,6 +23979,7 @@
           <a:lstStyle xmlns:a="http://schemas.openxmlformats.org/drawingml/2006/main"/>
           <a:p xmlns:a="http://schemas.openxmlformats.org/drawingml/2006/main">
             <a:pPr>
+              <a:buNone/>
               <a:defRPr sz="3000" b="1">
                 <a:solidFill>
                   <a:srgbClr val="5DCEF2"/>
@@ -23951,6 +24037,7 @@
           <a:lstStyle xmlns:a="http://schemas.openxmlformats.org/drawingml/2006/main"/>
           <a:p xmlns:a="http://schemas.openxmlformats.org/drawingml/2006/main">
             <a:pPr>
+              <a:buNone/>
               <a:defRPr sz="2400" b="0">
                 <a:solidFill>
                   <a:srgbClr val="F5F7F9"/>
@@ -24008,6 +24095,7 @@
           <a:lstStyle xmlns:a="http://schemas.openxmlformats.org/drawingml/2006/main"/>
           <a:p xmlns:a="http://schemas.openxmlformats.org/drawingml/2006/main">
             <a:pPr>
+              <a:buNone/>
               <a:defRPr sz="3000" b="1">
                 <a:solidFill>
                   <a:srgbClr val="5DCEF2"/>
@@ -24065,6 +24153,7 @@
           <a:lstStyle xmlns:a="http://schemas.openxmlformats.org/drawingml/2006/main"/>
           <a:p xmlns:a="http://schemas.openxmlformats.org/drawingml/2006/main">
             <a:pPr>
+              <a:buNone/>
               <a:defRPr sz="2400" b="0">
                 <a:solidFill>
                   <a:srgbClr val="F5F7F9"/>
@@ -24122,6 +24211,7 @@
           <a:lstStyle xmlns:a="http://schemas.openxmlformats.org/drawingml/2006/main"/>
           <a:p xmlns:a="http://schemas.openxmlformats.org/drawingml/2006/main">
             <a:pPr>
+              <a:buNone/>
               <a:defRPr sz="2100" b="0">
                 <a:solidFill>
                   <a:srgbClr val="B6C5CE"/>
@@ -24179,6 +24269,7 @@
           <a:lstStyle xmlns:a="http://schemas.openxmlformats.org/drawingml/2006/main"/>
           <a:p xmlns:a="http://schemas.openxmlformats.org/drawingml/2006/main">
             <a:pPr>
+              <a:buNone/>
               <a:defRPr sz="1350" b="0">
                 <a:solidFill>
                   <a:srgbClr val="B6C5CE"/>
@@ -24204,14 +24295,14 @@
       </p:sp>
       <p:pic>
         <p:nvPicPr>
-          <p:cNvPr id="26" name=""/>
+          <p:cNvPr id="28" name=""/>
           <p:cNvPicPr>
             <a:picLocks xmlns:a="http://schemas.openxmlformats.org/drawingml/2006/main" noChangeAspect="1"/>
           </p:cNvPicPr>
           <p:nvPr/>
         </p:nvPicPr>
         <p:blipFill>
-          <a:blip xmlns:r="http://schemas.openxmlformats.org/officeDocument/2006/relationships" xmlns:a="http://schemas.openxmlformats.org/drawingml/2006/main" r:embed="Rc8d13fb93b974a77"/>
+          <a:blip xmlns:r="http://schemas.openxmlformats.org/officeDocument/2006/relationships" xmlns:a="http://schemas.openxmlformats.org/drawingml/2006/main" r:embed="R1dfe96568c7e4884"/>
           <a:stretch xmlns:a="http://schemas.openxmlformats.org/drawingml/2006/main"/>
         </p:blipFill>
         <p:spPr>
@@ -24287,6 +24378,7 @@
           <a:lstStyle xmlns:a="http://schemas.openxmlformats.org/drawingml/2006/main"/>
           <a:p xmlns:a="http://schemas.openxmlformats.org/drawingml/2006/main">
             <a:pPr>
+              <a:buNone/>
               <a:defRPr sz="1350" b="1">
                 <a:solidFill>
                   <a:srgbClr val="5DCEF2"/>
@@ -24344,6 +24436,7 @@
           <a:lstStyle xmlns:a="http://schemas.openxmlformats.org/drawingml/2006/main"/>
           <a:p xmlns:a="http://schemas.openxmlformats.org/drawingml/2006/main">
             <a:pPr>
+              <a:buNone/>
               <a:defRPr sz="3600" b="1">
                 <a:solidFill>
                   <a:srgbClr val="F5F7F9"/>
@@ -24401,6 +24494,7 @@
           <a:lstStyle xmlns:a="http://schemas.openxmlformats.org/drawingml/2006/main"/>
           <a:p xmlns:a="http://schemas.openxmlformats.org/drawingml/2006/main">
             <a:pPr>
+              <a:buNone/>
               <a:defRPr sz="4800" b="1">
                 <a:solidFill>
                   <a:srgbClr val="5DCEF2"/>
@@ -24458,6 +24552,7 @@
           <a:lstStyle xmlns:a="http://schemas.openxmlformats.org/drawingml/2006/main"/>
           <a:p xmlns:a="http://schemas.openxmlformats.org/drawingml/2006/main">
             <a:pPr>
+              <a:buNone/>
               <a:defRPr sz="2325" b="0">
                 <a:solidFill>
                   <a:srgbClr val="F5F7F9"/>
@@ -24481,6 +24576,7 @@
           </a:p>
           <a:p xmlns:a="http://schemas.openxmlformats.org/drawingml/2006/main">
             <a:pPr>
+              <a:buNone/>
               <a:defRPr sz="2325" b="0">
                 <a:solidFill>
                   <a:srgbClr val="F5F7F9"/>
@@ -24504,6 +24600,7 @@
           </a:p>
           <a:p xmlns:a="http://schemas.openxmlformats.org/drawingml/2006/main">
             <a:pPr>
+              <a:buNone/>
               <a:defRPr sz="2325" b="0">
                 <a:solidFill>
                   <a:srgbClr val="F5F7F9"/>
@@ -24561,6 +24658,7 @@
           <a:lstStyle xmlns:a="http://schemas.openxmlformats.org/drawingml/2006/main"/>
           <a:p xmlns:a="http://schemas.openxmlformats.org/drawingml/2006/main">
             <a:pPr>
+              <a:buNone/>
               <a:defRPr sz="2100" b="0">
                 <a:solidFill>
                   <a:srgbClr val="B6C5CE"/>
@@ -24618,6 +24716,7 @@
           <a:lstStyle xmlns:a="http://schemas.openxmlformats.org/drawingml/2006/main"/>
           <a:p xmlns:a="http://schemas.openxmlformats.org/drawingml/2006/main">
             <a:pPr>
+              <a:buNone/>
               <a:defRPr sz="1350" b="0">
                 <a:solidFill>
                   <a:srgbClr val="B6C5CE"/>
@@ -24643,14 +24742,14 @@
       </p:sp>
       <p:pic>
         <p:nvPicPr>
-          <p:cNvPr id="14" name=""/>
+          <p:cNvPr id="16" name=""/>
           <p:cNvPicPr>
             <a:picLocks xmlns:a="http://schemas.openxmlformats.org/drawingml/2006/main" noChangeAspect="1"/>
           </p:cNvPicPr>
           <p:nvPr/>
         </p:nvPicPr>
         <p:blipFill>
-          <a:blip xmlns:r="http://schemas.openxmlformats.org/officeDocument/2006/relationships" xmlns:a="http://schemas.openxmlformats.org/drawingml/2006/main" r:embed="R313cc01891e84e22"/>
+          <a:blip xmlns:r="http://schemas.openxmlformats.org/officeDocument/2006/relationships" xmlns:a="http://schemas.openxmlformats.org/drawingml/2006/main" r:embed="Re1695202f3bc443f"/>
           <a:stretch xmlns:a="http://schemas.openxmlformats.org/drawingml/2006/main"/>
         </p:blipFill>
         <p:spPr>
@@ -24726,6 +24825,7 @@
           <a:lstStyle xmlns:a="http://schemas.openxmlformats.org/drawingml/2006/main"/>
           <a:p xmlns:a="http://schemas.openxmlformats.org/drawingml/2006/main">
             <a:pPr>
+              <a:buNone/>
               <a:defRPr sz="1350" b="1">
                 <a:solidFill>
                   <a:srgbClr val="5DCEF2"/>
@@ -24783,6 +24883,7 @@
           <a:lstStyle xmlns:a="http://schemas.openxmlformats.org/drawingml/2006/main"/>
           <a:p xmlns:a="http://schemas.openxmlformats.org/drawingml/2006/main">
             <a:pPr>
+              <a:buNone/>
               <a:defRPr sz="3600" b="1">
                 <a:solidFill>
                   <a:srgbClr val="F5F7F9"/>
@@ -24840,6 +24941,7 @@
           <a:lstStyle xmlns:a="http://schemas.openxmlformats.org/drawingml/2006/main"/>
           <a:p xmlns:a="http://schemas.openxmlformats.org/drawingml/2006/main">
             <a:pPr>
+              <a:buNone/>
               <a:defRPr sz="3900" b="1">
                 <a:solidFill>
                   <a:srgbClr val="5DCEF2"/>
@@ -24897,6 +24999,7 @@
           <a:lstStyle xmlns:a="http://schemas.openxmlformats.org/drawingml/2006/main"/>
           <a:p xmlns:a="http://schemas.openxmlformats.org/drawingml/2006/main">
             <a:pPr>
+              <a:buNone/>
               <a:defRPr sz="2400" b="1">
                 <a:solidFill>
                   <a:srgbClr val="5DCEF2"/>
@@ -24954,6 +25057,7 @@
           <a:lstStyle xmlns:a="http://schemas.openxmlformats.org/drawingml/2006/main"/>
           <a:p xmlns:a="http://schemas.openxmlformats.org/drawingml/2006/main">
             <a:pPr>
+              <a:buNone/>
               <a:defRPr sz="2550" b="0">
                 <a:solidFill>
                   <a:srgbClr val="F5F7F9"/>
@@ -25011,6 +25115,7 @@
           <a:lstStyle xmlns:a="http://schemas.openxmlformats.org/drawingml/2006/main"/>
           <a:p xmlns:a="http://schemas.openxmlformats.org/drawingml/2006/main">
             <a:pPr>
+              <a:buNone/>
               <a:defRPr sz="2400" b="1">
                 <a:solidFill>
                   <a:srgbClr val="5DCEF2"/>
@@ -25068,6 +25173,7 @@
           <a:lstStyle xmlns:a="http://schemas.openxmlformats.org/drawingml/2006/main"/>
           <a:p xmlns:a="http://schemas.openxmlformats.org/drawingml/2006/main">
             <a:pPr>
+              <a:buNone/>
               <a:defRPr sz="2550" b="0">
                 <a:solidFill>
                   <a:srgbClr val="F5F7F9"/>
@@ -25125,6 +25231,7 @@
           <a:lstStyle xmlns:a="http://schemas.openxmlformats.org/drawingml/2006/main"/>
           <a:p xmlns:a="http://schemas.openxmlformats.org/drawingml/2006/main">
             <a:pPr>
+              <a:buNone/>
               <a:defRPr sz="1950" b="0">
                 <a:solidFill>
                   <a:srgbClr val="B6C5CE"/>
@@ -25182,6 +25289,7 @@
           <a:lstStyle xmlns:a="http://schemas.openxmlformats.org/drawingml/2006/main"/>
           <a:p xmlns:a="http://schemas.openxmlformats.org/drawingml/2006/main">
             <a:pPr>
+              <a:buNone/>
               <a:defRPr sz="1350" b="0">
                 <a:solidFill>
                   <a:srgbClr val="B6C5CE"/>
@@ -25207,14 +25315,14 @@
       </p:sp>
       <p:pic>
         <p:nvPicPr>
-          <p:cNvPr id="20" name=""/>
+          <p:cNvPr id="22" name=""/>
           <p:cNvPicPr>
             <a:picLocks xmlns:a="http://schemas.openxmlformats.org/drawingml/2006/main" noChangeAspect="1"/>
           </p:cNvPicPr>
           <p:nvPr/>
         </p:nvPicPr>
         <p:blipFill>
-          <a:blip xmlns:r="http://schemas.openxmlformats.org/officeDocument/2006/relationships" xmlns:a="http://schemas.openxmlformats.org/drawingml/2006/main" r:embed="Rbacc376dffb34012"/>
+          <a:blip xmlns:r="http://schemas.openxmlformats.org/officeDocument/2006/relationships" xmlns:a="http://schemas.openxmlformats.org/drawingml/2006/main" r:embed="Rceb22c55c2b3415c"/>
           <a:stretch xmlns:a="http://schemas.openxmlformats.org/drawingml/2006/main"/>
         </p:blipFill>
         <p:spPr>
